--- a/Hyde Park BESS/6) Cost Analysis Deliverables/Hyde Park BESS - Cost Analysis Deck.pptx
+++ b/Hyde Park BESS/6) Cost Analysis Deliverables/Hyde Park BESS - Cost Analysis Deck.pptx
@@ -20,6 +20,9 @@
     <p:sldId id="268" r:id="rId20"/>
     <p:sldId id="269" r:id="rId21"/>
     <p:sldId id="270" r:id="rId22"/>
+    <p:sldId id="272" r:id="rId24"/>
+    <p:sldId id="273" r:id="rId25"/>
+    <p:sldId id="274" r:id="rId26"/>
     <p:sldId id="271" r:id="rId23"/>
   </p:sldIdLst>
   <p:sldSz cx="12191695" cy="6858000" type="screen4x3"/>
@@ -12191,6 +12194,2092 @@
                 <a:latin typeface="Calibri"/>
               </a:rPr>
               <a:t>EstimatingCoE | Eversource Energy | Stewards of Affordability</a:t>
+            </a:r>
+          </a:p>
+        </p:txBody>
+      </p:sp>
+    </p:spTree>
+  </p:cSld>
+  <p:clrMapOvr>
+    <a:masterClrMapping/>
+  </p:clrMapOvr>
+</p:sld>
+</file>
+
+<file path=ppt/slides/slide17.xml><?xml version="1.0" encoding="utf-8"?>
+<p:sld xmlns:a="http://schemas.openxmlformats.org/drawingml/2006/main" xmlns:p="http://schemas.openxmlformats.org/presentationml/2006/main" xmlns:r="http://schemas.openxmlformats.org/officeDocument/2006/relationships">
+  <p:cSld>
+    <p:spTree>
+      <p:nvGrpSpPr>
+        <p:cNvPr id="1" name=""/>
+        <p:cNvGrpSpPr/>
+        <p:nvPr/>
+      </p:nvGrpSpPr>
+      <p:grpSpPr/>
+      <p:sp>
+        <p:nvSpPr>
+          <p:cNvPr id="2" name="Rectangle 1"/>
+          <p:cNvSpPr/>
+          <p:nvPr/>
+        </p:nvSpPr>
+        <p:spPr>
+          <a:xfrm>
+            <a:off x="0" y="0"/>
+            <a:ext cx="12191695" cy="6858000"/>
+          </a:xfrm>
+          <a:prstGeom prst="rect">
+            <a:avLst/>
+          </a:prstGeom>
+          <a:solidFill>
+            <a:srgbClr val="FFFFFF"/>
+          </a:solidFill>
+          <a:ln>
+            <a:noFill/>
+          </a:ln>
+          <a:effectLst/>
+        </p:spPr>
+        <p:style>
+          <a:lnRef idx="1">
+            <a:schemeClr val="accent1"/>
+          </a:lnRef>
+          <a:fillRef idx="3">
+            <a:schemeClr val="accent1"/>
+          </a:fillRef>
+          <a:effectRef idx="2">
+            <a:schemeClr val="accent1"/>
+          </a:effectRef>
+          <a:fontRef idx="minor">
+            <a:schemeClr val="lt1"/>
+          </a:fontRef>
+        </p:style>
+        <p:txBody>
+          <a:bodyPr rtlCol="0" anchor="ctr"/>
+          <a:lstStyle/>
+          <a:p>
+            <a:pPr algn="ctr"/>
+          </a:p>
+        </p:txBody>
+      </p:sp>
+      <p:sp>
+        <p:nvSpPr>
+          <p:cNvPr id="3" name="TextBox 2"/>
+          <p:cNvSpPr txBox="1"/>
+          <p:nvPr/>
+        </p:nvSpPr>
+        <p:spPr>
+          <a:xfrm>
+            <a:off x="548640" y="256032"/>
+            <a:ext cx="10058400" cy="274320"/>
+          </a:xfrm>
+          <a:prstGeom prst="rect">
+            <a:avLst/>
+          </a:prstGeom>
+          <a:noFill/>
+        </p:spPr>
+        <p:txBody>
+          <a:bodyPr wrap="square" lIns="45720" rIns="45720" tIns="27432" bIns="27432" anchor="t">
+            <a:spAutoFit/>
+          </a:bodyPr>
+          <a:lstStyle/>
+          <a:p>
+            <a:pPr algn="l">
+              <a:lnSpc>
+                <a:spcPct val="105000"/>
+              </a:lnSpc>
+              <a:spcAft>
+                <a:spcPts val="400"/>
+              </a:spcAft>
+            </a:pPr>
+            <a:r>
+              <a:rPr sz="1100" b="1" i="0">
+                <a:solidFill>
+                  <a:srgbClr val="6E1F2E"/>
+                </a:solidFill>
+                <a:latin typeface="Calibri"/>
+              </a:rPr>
+              <a:t>APPENDIX A. REFERENCE CLASS (PUBLIC DISCLOSURES, NOMINAL $/KWH)</a:t>
+            </a:r>
+          </a:p>
+        </p:txBody>
+      </p:sp>
+      <p:sp>
+        <p:nvSpPr>
+          <p:cNvPr id="4" name="TextBox 3"/>
+          <p:cNvSpPr txBox="1"/>
+          <p:nvPr/>
+        </p:nvSpPr>
+        <p:spPr>
+          <a:xfrm>
+            <a:off x="548640" y="475488"/>
+            <a:ext cx="11064240" cy="868680"/>
+          </a:xfrm>
+          <a:prstGeom prst="rect">
+            <a:avLst/>
+          </a:prstGeom>
+          <a:noFill/>
+        </p:spPr>
+        <p:txBody>
+          <a:bodyPr wrap="square" lIns="45720" rIns="45720" tIns="27432" bIns="27432" anchor="t">
+            <a:spAutoFit/>
+          </a:bodyPr>
+          <a:lstStyle/>
+          <a:p>
+            <a:pPr algn="l">
+              <a:lnSpc>
+                <a:spcPct val="100000"/>
+              </a:lnSpc>
+              <a:spcAft>
+                <a:spcPts val="400"/>
+              </a:spcAft>
+            </a:pPr>
+            <a:r>
+              <a:rPr sz="2300" b="1" i="0">
+                <a:solidFill>
+                  <a:srgbClr val="001E60"/>
+                </a:solidFill>
+                <a:latin typeface="Georgia"/>
+              </a:rPr>
+              <a:t>Thirteen utility-owned projects at or below 100 MWh: where Hyde Park sits</a:t>
+            </a:r>
+          </a:p>
+        </p:txBody>
+      </p:sp>
+      <p:sp>
+        <p:nvSpPr>
+          <p:cNvPr id="5" name="TextBox 4"/>
+          <p:cNvSpPr txBox="1"/>
+          <p:nvPr/>
+        </p:nvSpPr>
+        <p:spPr>
+          <a:xfrm>
+            <a:off x="548640" y="6419088"/>
+            <a:ext cx="8229600" cy="274320"/>
+          </a:xfrm>
+          <a:prstGeom prst="rect">
+            <a:avLst/>
+          </a:prstGeom>
+          <a:noFill/>
+        </p:spPr>
+        <p:txBody>
+          <a:bodyPr wrap="square" lIns="45720" rIns="45720" tIns="27432" bIns="27432" anchor="t">
+            <a:spAutoFit/>
+          </a:bodyPr>
+          <a:lstStyle/>
+          <a:p>
+            <a:pPr algn="l">
+              <a:lnSpc>
+                <a:spcPct val="105000"/>
+              </a:lnSpc>
+              <a:spcAft>
+                <a:spcPts val="400"/>
+              </a:spcAft>
+            </a:pPr>
+            <a:r>
+              <a:rPr sz="1000" b="0" i="0">
+                <a:solidFill>
+                  <a:srgbClr val="6B7280"/>
+                </a:solidFill>
+                <a:latin typeface="Calibri"/>
+              </a:rPr>
+              <a:t>EstimatingCoE | Eversource Energy | Stewards of Affordability</a:t>
+            </a:r>
+          </a:p>
+        </p:txBody>
+      </p:sp>
+      <p:sp>
+        <p:nvSpPr>
+          <p:cNvPr id="6" name="TextBox 5"/>
+          <p:cNvSpPr txBox="1"/>
+          <p:nvPr/>
+        </p:nvSpPr>
+        <p:spPr>
+          <a:xfrm>
+            <a:off x="10972800" y="6419088"/>
+            <a:ext cx="685800" cy="274320"/>
+          </a:xfrm>
+          <a:prstGeom prst="rect">
+            <a:avLst/>
+          </a:prstGeom>
+          <a:noFill/>
+        </p:spPr>
+        <p:txBody>
+          <a:bodyPr wrap="square" lIns="45720" rIns="45720" tIns="27432" bIns="27432" anchor="t">
+            <a:spAutoFit/>
+          </a:bodyPr>
+          <a:lstStyle/>
+          <a:p>
+            <a:pPr algn="r">
+              <a:lnSpc>
+                <a:spcPct val="105000"/>
+              </a:lnSpc>
+              <a:spcAft>
+                <a:spcPts val="400"/>
+              </a:spcAft>
+            </a:pPr>
+            <a:r>
+              <a:rPr sz="1000" b="0" i="0">
+                <a:solidFill>
+                  <a:srgbClr val="6B7280"/>
+                </a:solidFill>
+                <a:latin typeface="Calibri"/>
+              </a:rPr>
+              <a:t>16</a:t>
+            </a:r>
+          </a:p>
+        </p:txBody>
+      </p:sp>
+      <p:pic>
+        <p:nvPicPr>
+          <p:cNvPr id="7" name="Picture 6" descr="stats_refclass.png"/>
+          <p:cNvPicPr>
+            <a:picLocks noChangeAspect="1"/>
+          </p:cNvPicPr>
+          <p:nvPr/>
+        </p:nvPicPr>
+        <p:blipFill>
+          <a:blip r:embed="rId2"/>
+          <a:stretch>
+            <a:fillRect/>
+          </a:stretch>
+        </p:blipFill>
+        <p:spPr>
+          <a:xfrm>
+            <a:off x="457200" y="1417320"/>
+            <a:ext cx="7223760" cy="2471286"/>
+          </a:xfrm>
+          <a:prstGeom prst="rect">
+            <a:avLst/>
+          </a:prstGeom>
+        </p:spPr>
+      </p:pic>
+      <p:sp>
+        <p:nvSpPr>
+          <p:cNvPr id="8" name="TextBox 7"/>
+          <p:cNvSpPr txBox="1"/>
+          <p:nvPr/>
+        </p:nvSpPr>
+        <p:spPr>
+          <a:xfrm>
+            <a:off x="7863840" y="1417320"/>
+            <a:ext cx="3840480" cy="4846320"/>
+          </a:xfrm>
+          <a:prstGeom prst="rect">
+            <a:avLst/>
+          </a:prstGeom>
+          <a:noFill/>
+        </p:spPr>
+        <p:txBody>
+          <a:bodyPr wrap="square" lIns="45720">
+            <a:spAutoFit/>
+          </a:bodyPr>
+          <a:lstStyle/>
+          <a:p>
+            <a:pPr>
+              <a:lnSpc>
+                <a:spcPct val="105000"/>
+              </a:lnSpc>
+              <a:spcAft>
+                <a:spcPts val="600"/>
+              </a:spcAft>
+            </a:pPr>
+            <a:r>
+              <a:rPr sz="1250">
+                <a:solidFill>
+                  <a:srgbClr val="FFC72C"/>
+                </a:solidFill>
+                <a:latin typeface="Calibri"/>
+              </a:rPr>
+              <a:t>▪  </a:t>
+            </a:r>
+            <a:r>
+              <a:rPr b="1" sz="1250">
+                <a:solidFill>
+                  <a:srgbClr val="1F2A44"/>
+                </a:solidFill>
+                <a:latin typeface="Calibri"/>
+              </a:rPr>
+              <a:t>Median </a:t>
+            </a:r>
+            <a:r>
+              <a:rPr sz="1250">
+                <a:solidFill>
+                  <a:srgbClr val="1F2A44"/>
+                </a:solidFill>
+                <a:latin typeface="Calibri"/>
+              </a:rPr>
+              <a:t>$1,235/kWh; interquartile $750 to $1,289.</a:t>
+            </a:r>
+          </a:p>
+          <a:p>
+            <a:pPr>
+              <a:lnSpc>
+                <a:spcPct val="105000"/>
+              </a:lnSpc>
+              <a:spcAft>
+                <a:spcPts val="600"/>
+              </a:spcAft>
+            </a:pPr>
+            <a:r>
+              <a:rPr sz="1250">
+                <a:solidFill>
+                  <a:srgbClr val="FFC72C"/>
+                </a:solidFill>
+                <a:latin typeface="Calibri"/>
+              </a:rPr>
+              <a:t>▪  </a:t>
+            </a:r>
+            <a:r>
+              <a:rPr b="1" sz="1250">
+                <a:solidFill>
+                  <a:srgbClr val="1F2A44"/>
+                </a:solidFill>
+                <a:latin typeface="Calibri"/>
+              </a:rPr>
+              <a:t>Hyde Park battery installed, $833: </a:t>
+            </a:r>
+            <a:r>
+              <a:rPr sz="1250">
+                <a:solidFill>
+                  <a:srgbClr val="1F2A44"/>
+                </a:solidFill>
+                <a:latin typeface="Calibri"/>
+              </a:rPr>
+              <a:t>38% percentile.</a:t>
+            </a:r>
+          </a:p>
+          <a:p>
+            <a:pPr>
+              <a:lnSpc>
+                <a:spcPct val="105000"/>
+              </a:lnSpc>
+              <a:spcAft>
+                <a:spcPts val="600"/>
+              </a:spcAft>
+            </a:pPr>
+            <a:r>
+              <a:rPr sz="1250">
+                <a:solidFill>
+                  <a:srgbClr val="FFC72C"/>
+                </a:solidFill>
+                <a:latin typeface="Calibri"/>
+              </a:rPr>
+              <a:t>▪  </a:t>
+            </a:r>
+            <a:r>
+              <a:rPr b="1" sz="1250">
+                <a:solidFill>
+                  <a:srgbClr val="1F2A44"/>
+                </a:solidFill>
+                <a:latin typeface="Calibri"/>
+              </a:rPr>
+              <a:t>Station complete, direct, $1,483: </a:t>
+            </a:r>
+            <a:r>
+              <a:rPr sz="1250">
+                <a:solidFill>
+                  <a:srgbClr val="1F2A44"/>
+                </a:solidFill>
+                <a:latin typeface="Calibri"/>
+              </a:rPr>
+              <a:t>77% percentile, beside Fairhaven ($1,659 actual, 2023), Chateaugay ($1,490, 2023) and Provincetown ($1,289, 2022).</a:t>
+            </a:r>
+          </a:p>
+          <a:p>
+            <a:pPr>
+              <a:lnSpc>
+                <a:spcPct val="105000"/>
+              </a:lnSpc>
+              <a:spcAft>
+                <a:spcPts val="600"/>
+              </a:spcAft>
+            </a:pPr>
+            <a:r>
+              <a:rPr sz="1250">
+                <a:solidFill>
+                  <a:srgbClr val="FFC72C"/>
+                </a:solidFill>
+                <a:latin typeface="Calibri"/>
+              </a:rPr>
+              <a:t>▪  </a:t>
+            </a:r>
+            <a:r>
+              <a:rPr b="1" sz="1250">
+                <a:solidFill>
+                  <a:srgbClr val="1F2A44"/>
+                </a:solidFill>
+                <a:latin typeface="Calibri"/>
+              </a:rPr>
+              <a:t>Approval level, $2,862: </a:t>
+            </a:r>
+            <a:r>
+              <a:rPr sz="1250">
+                <a:solidFill>
+                  <a:srgbClr val="1F2A44"/>
+                </a:solidFill>
+                <a:latin typeface="Calibri"/>
+              </a:rPr>
+              <a:t>above every member. The loaders ($23.7M) and the two interconnection scopes are what the comparables do not carry.</a:t>
+            </a:r>
+          </a:p>
+          <a:p>
+            <a:pPr>
+              <a:lnSpc>
+                <a:spcPct val="105000"/>
+              </a:lnSpc>
+              <a:spcAft>
+                <a:spcPts val="600"/>
+              </a:spcAft>
+            </a:pPr>
+            <a:r>
+              <a:rPr sz="1250">
+                <a:solidFill>
+                  <a:srgbClr val="FFC72C"/>
+                </a:solidFill>
+                <a:latin typeface="Calibri"/>
+              </a:rPr>
+              <a:t>▪  </a:t>
+            </a:r>
+            <a:r>
+              <a:rPr b="1" sz="1250">
+                <a:solidFill>
+                  <a:srgbClr val="1F2A44"/>
+                </a:solidFill>
+                <a:latin typeface="Calibri"/>
+              </a:rPr>
+              <a:t>Caveat: </a:t>
+            </a:r>
+            <a:r>
+              <a:rPr sz="1250">
+                <a:solidFill>
+                  <a:srgbClr val="1F2A44"/>
+                </a:solidFill>
+                <a:latin typeface="Calibri"/>
+              </a:rPr>
+              <a:t>figures retrieved from search excerpts of regulator and utility documents; verify at source before external use.</a:t>
+            </a:r>
+          </a:p>
+        </p:txBody>
+      </p:sp>
+    </p:spTree>
+  </p:cSld>
+  <p:clrMapOvr>
+    <a:masterClrMapping/>
+  </p:clrMapOvr>
+</p:sld>
+</file>
+
+<file path=ppt/slides/slide18.xml><?xml version="1.0" encoding="utf-8"?>
+<p:sld xmlns:a="http://schemas.openxmlformats.org/drawingml/2006/main" xmlns:p="http://schemas.openxmlformats.org/presentationml/2006/main" xmlns:r="http://schemas.openxmlformats.org/officeDocument/2006/relationships">
+  <p:cSld>
+    <p:spTree>
+      <p:nvGrpSpPr>
+        <p:cNvPr id="1" name=""/>
+        <p:cNvGrpSpPr/>
+        <p:nvPr/>
+      </p:nvGrpSpPr>
+      <p:grpSpPr/>
+      <p:sp>
+        <p:nvSpPr>
+          <p:cNvPr id="2" name="Rectangle 1"/>
+          <p:cNvSpPr/>
+          <p:nvPr/>
+        </p:nvSpPr>
+        <p:spPr>
+          <a:xfrm>
+            <a:off x="0" y="0"/>
+            <a:ext cx="12191695" cy="6858000"/>
+          </a:xfrm>
+          <a:prstGeom prst="rect">
+            <a:avLst/>
+          </a:prstGeom>
+          <a:solidFill>
+            <a:srgbClr val="FFFFFF"/>
+          </a:solidFill>
+          <a:ln>
+            <a:noFill/>
+          </a:ln>
+          <a:effectLst/>
+        </p:spPr>
+        <p:style>
+          <a:lnRef idx="1">
+            <a:schemeClr val="accent1"/>
+          </a:lnRef>
+          <a:fillRef idx="3">
+            <a:schemeClr val="accent1"/>
+          </a:fillRef>
+          <a:effectRef idx="2">
+            <a:schemeClr val="accent1"/>
+          </a:effectRef>
+          <a:fontRef idx="minor">
+            <a:schemeClr val="lt1"/>
+          </a:fontRef>
+        </p:style>
+        <p:txBody>
+          <a:bodyPr rtlCol="0" anchor="ctr"/>
+          <a:lstStyle/>
+          <a:p>
+            <a:pPr algn="ctr"/>
+          </a:p>
+        </p:txBody>
+      </p:sp>
+      <p:sp>
+        <p:nvSpPr>
+          <p:cNvPr id="3" name="TextBox 2"/>
+          <p:cNvSpPr txBox="1"/>
+          <p:nvPr/>
+        </p:nvSpPr>
+        <p:spPr>
+          <a:xfrm>
+            <a:off x="548640" y="256032"/>
+            <a:ext cx="10058400" cy="274320"/>
+          </a:xfrm>
+          <a:prstGeom prst="rect">
+            <a:avLst/>
+          </a:prstGeom>
+          <a:noFill/>
+        </p:spPr>
+        <p:txBody>
+          <a:bodyPr wrap="square" lIns="45720" rIns="45720" tIns="27432" bIns="27432" anchor="t">
+            <a:spAutoFit/>
+          </a:bodyPr>
+          <a:lstStyle/>
+          <a:p>
+            <a:pPr algn="l">
+              <a:lnSpc>
+                <a:spcPct val="105000"/>
+              </a:lnSpc>
+              <a:spcAft>
+                <a:spcPts val="400"/>
+              </a:spcAft>
+            </a:pPr>
+            <a:r>
+              <a:rPr sz="1100" b="1" i="0">
+                <a:solidFill>
+                  <a:srgbClr val="6E1F2E"/>
+                </a:solidFill>
+                <a:latin typeface="Calibri"/>
+              </a:rPr>
+              <a:t>APPENDIX B. REGRESSION ON 26 PUBLIC PROJECTS</a:t>
+            </a:r>
+          </a:p>
+        </p:txBody>
+      </p:sp>
+      <p:sp>
+        <p:nvSpPr>
+          <p:cNvPr id="4" name="TextBox 3"/>
+          <p:cNvSpPr txBox="1"/>
+          <p:nvPr/>
+        </p:nvSpPr>
+        <p:spPr>
+          <a:xfrm>
+            <a:off x="548640" y="475488"/>
+            <a:ext cx="11064240" cy="868680"/>
+          </a:xfrm>
+          <a:prstGeom prst="rect">
+            <a:avLst/>
+          </a:prstGeom>
+          <a:noFill/>
+        </p:spPr>
+        <p:txBody>
+          <a:bodyPr wrap="square" lIns="45720" rIns="45720" tIns="27432" bIns="27432" anchor="t">
+            <a:spAutoFit/>
+          </a:bodyPr>
+          <a:lstStyle/>
+          <a:p>
+            <a:pPr algn="l">
+              <a:lnSpc>
+                <a:spcPct val="100000"/>
+              </a:lnSpc>
+              <a:spcAft>
+                <a:spcPts val="400"/>
+              </a:spcAft>
+            </a:pPr>
+            <a:r>
+              <a:rPr sz="2300" b="1" i="0">
+                <a:solidFill>
+                  <a:srgbClr val="001E60"/>
+                </a:solidFill>
+                <a:latin typeface="Georgia"/>
+              </a:rPr>
+              <a:t>Size and duration explain two thirds of the spread in public costs; Hyde Park's direct cost is high-normal</a:t>
+            </a:r>
+          </a:p>
+        </p:txBody>
+      </p:sp>
+      <p:sp>
+        <p:nvSpPr>
+          <p:cNvPr id="5" name="TextBox 4"/>
+          <p:cNvSpPr txBox="1"/>
+          <p:nvPr/>
+        </p:nvSpPr>
+        <p:spPr>
+          <a:xfrm>
+            <a:off x="548640" y="6419088"/>
+            <a:ext cx="8229600" cy="274320"/>
+          </a:xfrm>
+          <a:prstGeom prst="rect">
+            <a:avLst/>
+          </a:prstGeom>
+          <a:noFill/>
+        </p:spPr>
+        <p:txBody>
+          <a:bodyPr wrap="square" lIns="45720" rIns="45720" tIns="27432" bIns="27432" anchor="t">
+            <a:spAutoFit/>
+          </a:bodyPr>
+          <a:lstStyle/>
+          <a:p>
+            <a:pPr algn="l">
+              <a:lnSpc>
+                <a:spcPct val="105000"/>
+              </a:lnSpc>
+              <a:spcAft>
+                <a:spcPts val="400"/>
+              </a:spcAft>
+            </a:pPr>
+            <a:r>
+              <a:rPr sz="1000" b="0" i="0">
+                <a:solidFill>
+                  <a:srgbClr val="6B7280"/>
+                </a:solidFill>
+                <a:latin typeface="Calibri"/>
+              </a:rPr>
+              <a:t>EstimatingCoE | Eversource Energy | Stewards of Affordability</a:t>
+            </a:r>
+          </a:p>
+        </p:txBody>
+      </p:sp>
+      <p:sp>
+        <p:nvSpPr>
+          <p:cNvPr id="6" name="TextBox 5"/>
+          <p:cNvSpPr txBox="1"/>
+          <p:nvPr/>
+        </p:nvSpPr>
+        <p:spPr>
+          <a:xfrm>
+            <a:off x="10972800" y="6419088"/>
+            <a:ext cx="685800" cy="274320"/>
+          </a:xfrm>
+          <a:prstGeom prst="rect">
+            <a:avLst/>
+          </a:prstGeom>
+          <a:noFill/>
+        </p:spPr>
+        <p:txBody>
+          <a:bodyPr wrap="square" lIns="45720" rIns="45720" tIns="27432" bIns="27432" anchor="t">
+            <a:spAutoFit/>
+          </a:bodyPr>
+          <a:lstStyle/>
+          <a:p>
+            <a:pPr algn="r">
+              <a:lnSpc>
+                <a:spcPct val="105000"/>
+              </a:lnSpc>
+              <a:spcAft>
+                <a:spcPts val="400"/>
+              </a:spcAft>
+            </a:pPr>
+            <a:r>
+              <a:rPr sz="1000" b="0" i="0">
+                <a:solidFill>
+                  <a:srgbClr val="6B7280"/>
+                </a:solidFill>
+                <a:latin typeface="Calibri"/>
+              </a:rPr>
+              <a:t>17</a:t>
+            </a:r>
+          </a:p>
+        </p:txBody>
+      </p:sp>
+      <p:pic>
+        <p:nvPicPr>
+          <p:cNvPr id="7" name="Picture 6" descr="stats_scatter.png"/>
+          <p:cNvPicPr>
+            <a:picLocks noChangeAspect="1"/>
+          </p:cNvPicPr>
+          <p:nvPr/>
+        </p:nvPicPr>
+        <p:blipFill>
+          <a:blip r:embed="rId2"/>
+          <a:stretch>
+            <a:fillRect/>
+          </a:stretch>
+        </p:blipFill>
+        <p:spPr>
+          <a:xfrm>
+            <a:off x="457200" y="1371600"/>
+            <a:ext cx="7223760" cy="4182177"/>
+          </a:xfrm>
+          <a:prstGeom prst="rect">
+            <a:avLst/>
+          </a:prstGeom>
+        </p:spPr>
+      </p:pic>
+      <p:graphicFrame>
+        <p:nvGraphicFramePr>
+          <p:cNvPr id="8" name="Table 7"/>
+          <p:cNvGraphicFramePr>
+            <a:graphicFrameLocks noGrp="1"/>
+          </p:cNvGraphicFramePr>
+          <p:nvPr/>
+        </p:nvGraphicFramePr>
+        <p:xfrm>
+          <a:off x="7863840" y="1417320"/>
+          <a:ext cx="3840480" cy="2103120"/>
+        </p:xfrm>
+        <a:graphic>
+          <a:graphicData uri="http://schemas.openxmlformats.org/drawingml/2006/table">
+            <a:tbl>
+              <a:tblPr firstRow="1" bandRow="1">
+                <a:tableStyleId>{5C22544A-7EE6-4342-B048-85BDC9FD1C3A}</a:tableStyleId>
+              </a:tblPr>
+              <a:tblGrid>
+                <a:gridCol w="1645920"/>
+                <a:gridCol w="1188720"/>
+                <a:gridCol w="1005840"/>
+              </a:tblGrid>
+              <a:tr h="420624">
+                <a:tc>
+                  <a:txBody>
+                    <a:bodyPr/>
+                    <a:lstStyle/>
+                    <a:p>
+                      <a:r>
+                        <a:rPr sz="1100" b="1">
+                          <a:solidFill>
+                            <a:srgbClr val="FFFFFF"/>
+                          </a:solidFill>
+                          <a:latin typeface="Calibri"/>
+                        </a:rPr>
+                        <a:t>Term</a:t>
+                      </a:r>
+                    </a:p>
+                  </a:txBody>
+                  <a:tcPr marL="54864" marR="54864" marT="27432" marB="27432">
+                    <a:solidFill>
+                      <a:srgbClr val="001E60"/>
+                    </a:solidFill>
+                  </a:tcPr>
+                </a:tc>
+                <a:tc>
+                  <a:txBody>
+                    <a:bodyPr/>
+                    <a:lstStyle/>
+                    <a:p>
+                      <a:pPr algn="r"/>
+                      <a:r>
+                        <a:rPr sz="1100" b="1">
+                          <a:solidFill>
+                            <a:srgbClr val="FFFFFF"/>
+                          </a:solidFill>
+                          <a:latin typeface="Calibri"/>
+                        </a:rPr>
+                        <a:t>Coefficient</a:t>
+                      </a:r>
+                    </a:p>
+                  </a:txBody>
+                  <a:tcPr marL="54864" marR="54864" marT="27432" marB="27432">
+                    <a:solidFill>
+                      <a:srgbClr val="001E60"/>
+                    </a:solidFill>
+                  </a:tcPr>
+                </a:tc>
+                <a:tc>
+                  <a:txBody>
+                    <a:bodyPr/>
+                    <a:lstStyle/>
+                    <a:p>
+                      <a:pPr algn="r"/>
+                      <a:r>
+                        <a:rPr sz="1100" b="1">
+                          <a:solidFill>
+                            <a:srgbClr val="FFFFFF"/>
+                          </a:solidFill>
+                          <a:latin typeface="Calibri"/>
+                        </a:rPr>
+                        <a:t>p</a:t>
+                      </a:r>
+                    </a:p>
+                  </a:txBody>
+                  <a:tcPr marL="54864" marR="54864" marT="27432" marB="27432">
+                    <a:solidFill>
+                      <a:srgbClr val="001E60"/>
+                    </a:solidFill>
+                  </a:tcPr>
+                </a:tc>
+              </a:tr>
+              <a:tr h="420624">
+                <a:tc>
+                  <a:txBody>
+                    <a:bodyPr/>
+                    <a:lstStyle/>
+                    <a:p>
+                      <a:r>
+                        <a:rPr sz="1100" b="0">
+                          <a:solidFill>
+                            <a:srgbClr val="1F2A44"/>
+                          </a:solidFill>
+                          <a:latin typeface="Calibri"/>
+                        </a:rPr>
+                        <a:t>Size (ln MWh)</a:t>
+                      </a:r>
+                    </a:p>
+                  </a:txBody>
+                  <a:tcPr marL="54864" marR="54864" marT="27432" marB="27432" anchor="ctr">
+                    <a:solidFill>
+                      <a:srgbClr val="FFFFFF"/>
+                    </a:solidFill>
+                  </a:tcPr>
+                </a:tc>
+                <a:tc>
+                  <a:txBody>
+                    <a:bodyPr/>
+                    <a:lstStyle/>
+                    <a:p>
+                      <a:pPr algn="r"/>
+                      <a:r>
+                        <a:rPr sz="1100" b="0">
+                          <a:solidFill>
+                            <a:srgbClr val="1F2A44"/>
+                          </a:solidFill>
+                          <a:latin typeface="Calibri"/>
+                        </a:rPr>
+                        <a:t>-0.17</a:t>
+                      </a:r>
+                    </a:p>
+                  </a:txBody>
+                  <a:tcPr marL="54864" marR="54864" marT="27432" marB="27432" anchor="ctr">
+                    <a:solidFill>
+                      <a:srgbClr val="FFFFFF"/>
+                    </a:solidFill>
+                  </a:tcPr>
+                </a:tc>
+                <a:tc>
+                  <a:txBody>
+                    <a:bodyPr/>
+                    <a:lstStyle/>
+                    <a:p>
+                      <a:pPr algn="r"/>
+                      <a:r>
+                        <a:rPr sz="1100" b="0">
+                          <a:solidFill>
+                            <a:srgbClr val="1F2A44"/>
+                          </a:solidFill>
+                          <a:latin typeface="Calibri"/>
+                        </a:rPr>
+                        <a:t>0.012</a:t>
+                      </a:r>
+                    </a:p>
+                  </a:txBody>
+                  <a:tcPr marL="54864" marR="54864" marT="27432" marB="27432" anchor="ctr">
+                    <a:solidFill>
+                      <a:srgbClr val="FFFFFF"/>
+                    </a:solidFill>
+                  </a:tcPr>
+                </a:tc>
+              </a:tr>
+              <a:tr h="420624">
+                <a:tc>
+                  <a:txBody>
+                    <a:bodyPr/>
+                    <a:lstStyle/>
+                    <a:p>
+                      <a:r>
+                        <a:rPr sz="1100" b="0">
+                          <a:solidFill>
+                            <a:srgbClr val="1F2A44"/>
+                          </a:solidFill>
+                          <a:latin typeface="Calibri"/>
+                        </a:rPr>
+                        <a:t>Duration (ln h)</a:t>
+                      </a:r>
+                    </a:p>
+                  </a:txBody>
+                  <a:tcPr marL="54864" marR="54864" marT="27432" marB="27432" anchor="ctr">
+                    <a:solidFill>
+                      <a:srgbClr val="F2F4F8"/>
+                    </a:solidFill>
+                  </a:tcPr>
+                </a:tc>
+                <a:tc>
+                  <a:txBody>
+                    <a:bodyPr/>
+                    <a:lstStyle/>
+                    <a:p>
+                      <a:pPr algn="r"/>
+                      <a:r>
+                        <a:rPr sz="1100" b="0">
+                          <a:solidFill>
+                            <a:srgbClr val="1F2A44"/>
+                          </a:solidFill>
+                          <a:latin typeface="Calibri"/>
+                        </a:rPr>
+                        <a:t>-0.29</a:t>
+                      </a:r>
+                    </a:p>
+                  </a:txBody>
+                  <a:tcPr marL="54864" marR="54864" marT="27432" marB="27432" anchor="ctr">
+                    <a:solidFill>
+                      <a:srgbClr val="F2F4F8"/>
+                    </a:solidFill>
+                  </a:tcPr>
+                </a:tc>
+                <a:tc>
+                  <a:txBody>
+                    <a:bodyPr/>
+                    <a:lstStyle/>
+                    <a:p>
+                      <a:pPr algn="r"/>
+                      <a:r>
+                        <a:rPr sz="1100" b="0">
+                          <a:solidFill>
+                            <a:srgbClr val="1F2A44"/>
+                          </a:solidFill>
+                          <a:latin typeface="Calibri"/>
+                        </a:rPr>
+                        <a:t>0.016</a:t>
+                      </a:r>
+                    </a:p>
+                  </a:txBody>
+                  <a:tcPr marL="54864" marR="54864" marT="27432" marB="27432" anchor="ctr">
+                    <a:solidFill>
+                      <a:srgbClr val="F2F4F8"/>
+                    </a:solidFill>
+                  </a:tcPr>
+                </a:tc>
+              </a:tr>
+              <a:tr h="420624">
+                <a:tc>
+                  <a:txBody>
+                    <a:bodyPr/>
+                    <a:lstStyle/>
+                    <a:p>
+                      <a:r>
+                        <a:rPr sz="1100" b="0">
+                          <a:solidFill>
+                            <a:srgbClr val="1F2A44"/>
+                          </a:solidFill>
+                          <a:latin typeface="Calibri"/>
+                        </a:rPr>
+                        <a:t>Year</a:t>
+                      </a:r>
+                    </a:p>
+                  </a:txBody>
+                  <a:tcPr marL="54864" marR="54864" marT="27432" marB="27432" anchor="ctr">
+                    <a:solidFill>
+                      <a:srgbClr val="FFFFFF"/>
+                    </a:solidFill>
+                  </a:tcPr>
+                </a:tc>
+                <a:tc>
+                  <a:txBody>
+                    <a:bodyPr/>
+                    <a:lstStyle/>
+                    <a:p>
+                      <a:pPr algn="r"/>
+                      <a:r>
+                        <a:rPr sz="1100" b="0">
+                          <a:solidFill>
+                            <a:srgbClr val="1F2A44"/>
+                          </a:solidFill>
+                          <a:latin typeface="Calibri"/>
+                        </a:rPr>
+                        <a:t>+0.015</a:t>
+                      </a:r>
+                    </a:p>
+                  </a:txBody>
+                  <a:tcPr marL="54864" marR="54864" marT="27432" marB="27432" anchor="ctr">
+                    <a:solidFill>
+                      <a:srgbClr val="FFFFFF"/>
+                    </a:solidFill>
+                  </a:tcPr>
+                </a:tc>
+                <a:tc>
+                  <a:txBody>
+                    <a:bodyPr/>
+                    <a:lstStyle/>
+                    <a:p>
+                      <a:pPr algn="r"/>
+                      <a:r>
+                        <a:rPr sz="1100" b="0">
+                          <a:solidFill>
+                            <a:srgbClr val="1F2A44"/>
+                          </a:solidFill>
+                          <a:latin typeface="Calibri"/>
+                        </a:rPr>
+                        <a:t>0.68</a:t>
+                      </a:r>
+                    </a:p>
+                  </a:txBody>
+                  <a:tcPr marL="54864" marR="54864" marT="27432" marB="27432" anchor="ctr">
+                    <a:solidFill>
+                      <a:srgbClr val="FFFFFF"/>
+                    </a:solidFill>
+                  </a:tcPr>
+                </a:tc>
+              </a:tr>
+              <a:tr h="420624">
+                <a:tc>
+                  <a:txBody>
+                    <a:bodyPr/>
+                    <a:lstStyle/>
+                    <a:p>
+                      <a:r>
+                        <a:rPr sz="1100" b="0">
+                          <a:solidFill>
+                            <a:srgbClr val="1F2A44"/>
+                          </a:solidFill>
+                          <a:latin typeface="Calibri"/>
+                        </a:rPr>
+                        <a:t>R-squared</a:t>
+                      </a:r>
+                    </a:p>
+                  </a:txBody>
+                  <a:tcPr marL="54864" marR="54864" marT="27432" marB="27432" anchor="ctr">
+                    <a:solidFill>
+                      <a:srgbClr val="F2F4F8"/>
+                    </a:solidFill>
+                  </a:tcPr>
+                </a:tc>
+                <a:tc>
+                  <a:txBody>
+                    <a:bodyPr/>
+                    <a:lstStyle/>
+                    <a:p>
+                      <a:pPr algn="r"/>
+                      <a:r>
+                        <a:rPr sz="1100" b="0">
+                          <a:solidFill>
+                            <a:srgbClr val="1F2A44"/>
+                          </a:solidFill>
+                          <a:latin typeface="Calibri"/>
+                        </a:rPr>
+                        <a:t>0.65</a:t>
+                      </a:r>
+                    </a:p>
+                  </a:txBody>
+                  <a:tcPr marL="54864" marR="54864" marT="27432" marB="27432" anchor="ctr">
+                    <a:solidFill>
+                      <a:srgbClr val="F2F4F8"/>
+                    </a:solidFill>
+                  </a:tcPr>
+                </a:tc>
+                <a:tc>
+                  <a:txBody>
+                    <a:bodyPr/>
+                    <a:lstStyle/>
+                    <a:p>
+                      <a:pPr algn="r"/>
+                      <a:r>
+                        <a:rPr sz="1100" b="0">
+                          <a:solidFill>
+                            <a:srgbClr val="1F2A44"/>
+                          </a:solidFill>
+                          <a:latin typeface="Calibri"/>
+                        </a:rPr>
+                        <a:t>n = 26</a:t>
+                      </a:r>
+                    </a:p>
+                  </a:txBody>
+                  <a:tcPr marL="54864" marR="54864" marT="27432" marB="27432" anchor="ctr">
+                    <a:solidFill>
+                      <a:srgbClr val="F2F4F8"/>
+                    </a:solidFill>
+                  </a:tcPr>
+                </a:tc>
+              </a:tr>
+            </a:tbl>
+          </a:graphicData>
+        </a:graphic>
+      </p:graphicFrame>
+      <p:sp>
+        <p:nvSpPr>
+          <p:cNvPr id="9" name="TextBox 8"/>
+          <p:cNvSpPr txBox="1"/>
+          <p:nvPr/>
+        </p:nvSpPr>
+        <p:spPr>
+          <a:xfrm>
+            <a:off x="7863840" y="3703320"/>
+            <a:ext cx="3840480" cy="2560320"/>
+          </a:xfrm>
+          <a:prstGeom prst="rect">
+            <a:avLst/>
+          </a:prstGeom>
+          <a:noFill/>
+        </p:spPr>
+        <p:txBody>
+          <a:bodyPr wrap="square" lIns="45720">
+            <a:spAutoFit/>
+          </a:bodyPr>
+          <a:lstStyle/>
+          <a:p>
+            <a:pPr>
+              <a:lnSpc>
+                <a:spcPct val="105000"/>
+              </a:lnSpc>
+              <a:spcAft>
+                <a:spcPts val="500"/>
+              </a:spcAft>
+            </a:pPr>
+            <a:r>
+              <a:rPr sz="1200">
+                <a:solidFill>
+                  <a:srgbClr val="FFC72C"/>
+                </a:solidFill>
+                <a:latin typeface="Calibri"/>
+              </a:rPr>
+              <a:t>▪  </a:t>
+            </a:r>
+            <a:r>
+              <a:rPr b="1" sz="1200">
+                <a:solidFill>
+                  <a:srgbClr val="1F2A44"/>
+                </a:solidFill>
+                <a:latin typeface="Calibri"/>
+              </a:rPr>
+              <a:t>20 MWh, 2-h, 2028 prediction: </a:t>
+            </a:r>
+            <a:r>
+              <a:rPr sz="1200">
+                <a:solidFill>
+                  <a:srgbClr val="1F2A44"/>
+                </a:solidFill>
+                <a:latin typeface="Calibri"/>
+              </a:rPr>
+              <a:t>$1,116/kWh, 80% interval $611 to $2,037.</a:t>
+            </a:r>
+          </a:p>
+          <a:p>
+            <a:pPr>
+              <a:lnSpc>
+                <a:spcPct val="105000"/>
+              </a:lnSpc>
+              <a:spcAft>
+                <a:spcPts val="500"/>
+              </a:spcAft>
+            </a:pPr>
+            <a:r>
+              <a:rPr sz="1200">
+                <a:solidFill>
+                  <a:srgbClr val="FFC72C"/>
+                </a:solidFill>
+                <a:latin typeface="Calibri"/>
+              </a:rPr>
+              <a:t>▪  </a:t>
+            </a:r>
+            <a:r>
+              <a:rPr b="1" sz="1200">
+                <a:solidFill>
+                  <a:srgbClr val="1F2A44"/>
+                </a:solidFill>
+                <a:latin typeface="Calibri"/>
+              </a:rPr>
+              <a:t>Hyde Park percentiles: </a:t>
+            </a:r>
+            <a:r>
+              <a:rPr sz="1200">
+                <a:solidFill>
+                  <a:srgbClr val="1F2A44"/>
+                </a:solidFill>
+                <a:latin typeface="Calibri"/>
+              </a:rPr>
+              <a:t>contract 10%, installed 27%, station direct 73%, approval 98%.</a:t>
+            </a:r>
+          </a:p>
+          <a:p>
+            <a:pPr>
+              <a:lnSpc>
+                <a:spcPct val="105000"/>
+              </a:lnSpc>
+              <a:spcAft>
+                <a:spcPts val="500"/>
+              </a:spcAft>
+            </a:pPr>
+            <a:r>
+              <a:rPr sz="1200">
+                <a:solidFill>
+                  <a:srgbClr val="FFC72C"/>
+                </a:solidFill>
+                <a:latin typeface="Calibri"/>
+              </a:rPr>
+              <a:t>▪  </a:t>
+            </a:r>
+            <a:r>
+              <a:rPr b="1" sz="1200">
+                <a:solidFill>
+                  <a:srgbClr val="1F2A44"/>
+                </a:solidFill>
+                <a:latin typeface="Calibri"/>
+              </a:rPr>
+              <a:t>Use as a bracket, not a price. </a:t>
+            </a:r>
+            <a:r>
+              <a:rPr sz="1200">
+                <a:solidFill>
+                  <a:srgbClr val="1F2A44"/>
+                </a:solidFill>
+                <a:latin typeface="Calibri"/>
+              </a:rPr>
+              <a:t>Residual spread is a factor of 1.4; ownership and region terms are not significant at this n.</a:t>
+            </a:r>
+          </a:p>
+        </p:txBody>
+      </p:sp>
+    </p:spTree>
+  </p:cSld>
+  <p:clrMapOvr>
+    <a:masterClrMapping/>
+  </p:clrMapOvr>
+</p:sld>
+</file>
+
+<file path=ppt/slides/slide19.xml><?xml version="1.0" encoding="utf-8"?>
+<p:sld xmlns:a="http://schemas.openxmlformats.org/drawingml/2006/main" xmlns:p="http://schemas.openxmlformats.org/presentationml/2006/main" xmlns:r="http://schemas.openxmlformats.org/officeDocument/2006/relationships">
+  <p:cSld>
+    <p:spTree>
+      <p:nvGrpSpPr>
+        <p:cNvPr id="1" name=""/>
+        <p:cNvGrpSpPr/>
+        <p:nvPr/>
+      </p:nvGrpSpPr>
+      <p:grpSpPr/>
+      <p:sp>
+        <p:nvSpPr>
+          <p:cNvPr id="2" name="Rectangle 1"/>
+          <p:cNvSpPr/>
+          <p:nvPr/>
+        </p:nvSpPr>
+        <p:spPr>
+          <a:xfrm>
+            <a:off x="0" y="0"/>
+            <a:ext cx="12191695" cy="6858000"/>
+          </a:xfrm>
+          <a:prstGeom prst="rect">
+            <a:avLst/>
+          </a:prstGeom>
+          <a:solidFill>
+            <a:srgbClr val="FFFFFF"/>
+          </a:solidFill>
+          <a:ln>
+            <a:noFill/>
+          </a:ln>
+          <a:effectLst/>
+        </p:spPr>
+        <p:style>
+          <a:lnRef idx="1">
+            <a:schemeClr val="accent1"/>
+          </a:lnRef>
+          <a:fillRef idx="3">
+            <a:schemeClr val="accent1"/>
+          </a:fillRef>
+          <a:effectRef idx="2">
+            <a:schemeClr val="accent1"/>
+          </a:effectRef>
+          <a:fontRef idx="minor">
+            <a:schemeClr val="lt1"/>
+          </a:fontRef>
+        </p:style>
+        <p:txBody>
+          <a:bodyPr rtlCol="0" anchor="ctr"/>
+          <a:lstStyle/>
+          <a:p>
+            <a:pPr algn="ctr"/>
+          </a:p>
+        </p:txBody>
+      </p:sp>
+      <p:sp>
+        <p:nvSpPr>
+          <p:cNvPr id="3" name="TextBox 2"/>
+          <p:cNvSpPr txBox="1"/>
+          <p:nvPr/>
+        </p:nvSpPr>
+        <p:spPr>
+          <a:xfrm>
+            <a:off x="548640" y="256032"/>
+            <a:ext cx="10058400" cy="274320"/>
+          </a:xfrm>
+          <a:prstGeom prst="rect">
+            <a:avLst/>
+          </a:prstGeom>
+          <a:noFill/>
+        </p:spPr>
+        <p:txBody>
+          <a:bodyPr wrap="square" lIns="45720" rIns="45720" tIns="27432" bIns="27432" anchor="t">
+            <a:spAutoFit/>
+          </a:bodyPr>
+          <a:lstStyle/>
+          <a:p>
+            <a:pPr algn="l">
+              <a:lnSpc>
+                <a:spcPct val="105000"/>
+              </a:lnSpc>
+              <a:spcAft>
+                <a:spcPts val="400"/>
+              </a:spcAft>
+            </a:pPr>
+            <a:r>
+              <a:rPr sz="1100" b="1" i="0">
+                <a:solidFill>
+                  <a:srgbClr val="6E1F2E"/>
+                </a:solidFill>
+                <a:latin typeface="Calibri"/>
+              </a:rPr>
+              <a:t>APPENDIX C. ELEMENT-LEVEL SIMULATION, 20,000 TRIALS</a:t>
+            </a:r>
+          </a:p>
+        </p:txBody>
+      </p:sp>
+      <p:sp>
+        <p:nvSpPr>
+          <p:cNvPr id="4" name="TextBox 3"/>
+          <p:cNvSpPr txBox="1"/>
+          <p:nvPr/>
+        </p:nvSpPr>
+        <p:spPr>
+          <a:xfrm>
+            <a:off x="548640" y="475488"/>
+            <a:ext cx="11064240" cy="868680"/>
+          </a:xfrm>
+          <a:prstGeom prst="rect">
+            <a:avLst/>
+          </a:prstGeom>
+          <a:noFill/>
+        </p:spPr>
+        <p:txBody>
+          <a:bodyPr wrap="square" lIns="45720" rIns="45720" tIns="27432" bIns="27432" anchor="t">
+            <a:spAutoFit/>
+          </a:bodyPr>
+          <a:lstStyle/>
+          <a:p>
+            <a:pPr algn="l">
+              <a:lnSpc>
+                <a:spcPct val="100000"/>
+              </a:lnSpc>
+              <a:spcAft>
+                <a:spcPts val="400"/>
+              </a:spcAft>
+            </a:pPr>
+            <a:r>
+              <a:rPr sz="2300" b="1" i="0">
+                <a:solidFill>
+                  <a:srgbClr val="001E60"/>
+                </a:solidFill>
+                <a:latin typeface="Georgia"/>
+              </a:rPr>
+              <a:t>Monte Carlo on the layers: the reserve is adequate, and the risk is in the ground and the station, not the battery</a:t>
+            </a:r>
+          </a:p>
+        </p:txBody>
+      </p:sp>
+      <p:sp>
+        <p:nvSpPr>
+          <p:cNvPr id="5" name="TextBox 4"/>
+          <p:cNvSpPr txBox="1"/>
+          <p:nvPr/>
+        </p:nvSpPr>
+        <p:spPr>
+          <a:xfrm>
+            <a:off x="548640" y="6419088"/>
+            <a:ext cx="8229600" cy="274320"/>
+          </a:xfrm>
+          <a:prstGeom prst="rect">
+            <a:avLst/>
+          </a:prstGeom>
+          <a:noFill/>
+        </p:spPr>
+        <p:txBody>
+          <a:bodyPr wrap="square" lIns="45720" rIns="45720" tIns="27432" bIns="27432" anchor="t">
+            <a:spAutoFit/>
+          </a:bodyPr>
+          <a:lstStyle/>
+          <a:p>
+            <a:pPr algn="l">
+              <a:lnSpc>
+                <a:spcPct val="105000"/>
+              </a:lnSpc>
+              <a:spcAft>
+                <a:spcPts val="400"/>
+              </a:spcAft>
+            </a:pPr>
+            <a:r>
+              <a:rPr sz="1000" b="0" i="0">
+                <a:solidFill>
+                  <a:srgbClr val="6B7280"/>
+                </a:solidFill>
+                <a:latin typeface="Calibri"/>
+              </a:rPr>
+              <a:t>EstimatingCoE | Eversource Energy | Stewards of Affordability</a:t>
+            </a:r>
+          </a:p>
+        </p:txBody>
+      </p:sp>
+      <p:sp>
+        <p:nvSpPr>
+          <p:cNvPr id="6" name="TextBox 5"/>
+          <p:cNvSpPr txBox="1"/>
+          <p:nvPr/>
+        </p:nvSpPr>
+        <p:spPr>
+          <a:xfrm>
+            <a:off x="10972800" y="6419088"/>
+            <a:ext cx="685800" cy="274320"/>
+          </a:xfrm>
+          <a:prstGeom prst="rect">
+            <a:avLst/>
+          </a:prstGeom>
+          <a:noFill/>
+        </p:spPr>
+        <p:txBody>
+          <a:bodyPr wrap="square" lIns="45720" rIns="45720" tIns="27432" bIns="27432" anchor="t">
+            <a:spAutoFit/>
+          </a:bodyPr>
+          <a:lstStyle/>
+          <a:p>
+            <a:pPr algn="r">
+              <a:lnSpc>
+                <a:spcPct val="105000"/>
+              </a:lnSpc>
+              <a:spcAft>
+                <a:spcPts val="400"/>
+              </a:spcAft>
+            </a:pPr>
+            <a:r>
+              <a:rPr sz="1000" b="0" i="0">
+                <a:solidFill>
+                  <a:srgbClr val="6B7280"/>
+                </a:solidFill>
+                <a:latin typeface="Calibri"/>
+              </a:rPr>
+              <a:t>18</a:t>
+            </a:r>
+          </a:p>
+        </p:txBody>
+      </p:sp>
+      <p:pic>
+        <p:nvPicPr>
+          <p:cNvPr id="7" name="Picture 6" descr="mc_hist.png"/>
+          <p:cNvPicPr>
+            <a:picLocks noChangeAspect="1"/>
+          </p:cNvPicPr>
+          <p:nvPr/>
+        </p:nvPicPr>
+        <p:blipFill>
+          <a:blip r:embed="rId2"/>
+          <a:stretch>
+            <a:fillRect/>
+          </a:stretch>
+        </p:blipFill>
+        <p:spPr>
+          <a:xfrm>
+            <a:off x="457200" y="1371600"/>
+            <a:ext cx="5852160" cy="2618072"/>
+          </a:xfrm>
+          <a:prstGeom prst="rect">
+            <a:avLst/>
+          </a:prstGeom>
+        </p:spPr>
+      </p:pic>
+      <p:pic>
+        <p:nvPicPr>
+          <p:cNvPr id="8" name="Picture 7" descr="mc_tornado.png"/>
+          <p:cNvPicPr>
+            <a:picLocks noChangeAspect="1"/>
+          </p:cNvPicPr>
+          <p:nvPr/>
+        </p:nvPicPr>
+        <p:blipFill>
+          <a:blip r:embed="rId3"/>
+          <a:stretch>
+            <a:fillRect/>
+          </a:stretch>
+        </p:blipFill>
+        <p:spPr>
+          <a:xfrm>
+            <a:off x="457200" y="4069080"/>
+            <a:ext cx="5852160" cy="2310063"/>
+          </a:xfrm>
+          <a:prstGeom prst="rect">
+            <a:avLst/>
+          </a:prstGeom>
+        </p:spPr>
+      </p:pic>
+      <p:graphicFrame>
+        <p:nvGraphicFramePr>
+          <p:cNvPr id="9" name="Table 8"/>
+          <p:cNvGraphicFramePr>
+            <a:graphicFrameLocks noGrp="1"/>
+          </p:cNvGraphicFramePr>
+          <p:nvPr/>
+        </p:nvGraphicFramePr>
+        <p:xfrm>
+          <a:off x="6583680" y="1417320"/>
+          <a:ext cx="5120640" cy="2377440"/>
+        </p:xfrm>
+        <a:graphic>
+          <a:graphicData uri="http://schemas.openxmlformats.org/drawingml/2006/table">
+            <a:tbl>
+              <a:tblPr firstRow="1" bandRow="1">
+                <a:tableStyleId>{5C22544A-7EE6-4342-B048-85BDC9FD1C3A}</a:tableStyleId>
+              </a:tblPr>
+              <a:tblGrid>
+                <a:gridCol w="2377440"/>
+                <a:gridCol w="1371600"/>
+                <a:gridCol w="1371600"/>
+              </a:tblGrid>
+              <a:tr h="396240">
+                <a:tc>
+                  <a:txBody>
+                    <a:bodyPr/>
+                    <a:lstStyle/>
+                    <a:p>
+                      <a:r>
+                        <a:rPr sz="1200" b="1">
+                          <a:solidFill>
+                            <a:srgbClr val="FFFFFF"/>
+                          </a:solidFill>
+                          <a:latin typeface="Calibri"/>
+                        </a:rPr>
+                        <a:t/>
+                      </a:r>
+                    </a:p>
+                  </a:txBody>
+                  <a:tcPr marL="54864" marR="54864" marT="27432" marB="27432">
+                    <a:solidFill>
+                      <a:srgbClr val="001E60"/>
+                    </a:solidFill>
+                  </a:tcPr>
+                </a:tc>
+                <a:tc>
+                  <a:txBody>
+                    <a:bodyPr/>
+                    <a:lstStyle/>
+                    <a:p>
+                      <a:pPr algn="r"/>
+                      <a:r>
+                        <a:rPr sz="1200" b="1">
+                          <a:solidFill>
+                            <a:srgbClr val="FFFFFF"/>
+                          </a:solidFill>
+                          <a:latin typeface="Calibri"/>
+                        </a:rPr>
+                        <a:t>Base ranges</a:t>
+                      </a:r>
+                    </a:p>
+                  </a:txBody>
+                  <a:tcPr marL="54864" marR="54864" marT="27432" marB="27432">
+                    <a:solidFill>
+                      <a:srgbClr val="001E60"/>
+                    </a:solidFill>
+                  </a:tcPr>
+                </a:tc>
+                <a:tc>
+                  <a:txBody>
+                    <a:bodyPr/>
+                    <a:lstStyle/>
+                    <a:p>
+                      <a:pPr algn="r"/>
+                      <a:r>
+                        <a:rPr sz="1200" b="1">
+                          <a:solidFill>
+                            <a:srgbClr val="FFFFFF"/>
+                          </a:solidFill>
+                          <a:latin typeface="Calibri"/>
+                        </a:rPr>
+                        <a:t>Wide ranges</a:t>
+                      </a:r>
+                    </a:p>
+                  </a:txBody>
+                  <a:tcPr marL="54864" marR="54864" marT="27432" marB="27432">
+                    <a:solidFill>
+                      <a:srgbClr val="001E60"/>
+                    </a:solidFill>
+                  </a:tcPr>
+                </a:tc>
+              </a:tr>
+              <a:tr h="396240">
+                <a:tc>
+                  <a:txBody>
+                    <a:bodyPr/>
+                    <a:lstStyle/>
+                    <a:p>
+                      <a:r>
+                        <a:rPr sz="1200" b="0">
+                          <a:solidFill>
+                            <a:srgbClr val="1F2A44"/>
+                          </a:solidFill>
+                          <a:latin typeface="Calibri"/>
+                        </a:rPr>
+                        <a:t>P50 total</a:t>
+                      </a:r>
+                    </a:p>
+                  </a:txBody>
+                  <a:tcPr marL="54864" marR="54864" marT="27432" marB="27432" anchor="ctr">
+                    <a:solidFill>
+                      <a:srgbClr val="FFFFFF"/>
+                    </a:solidFill>
+                  </a:tcPr>
+                </a:tc>
+                <a:tc>
+                  <a:txBody>
+                    <a:bodyPr/>
+                    <a:lstStyle/>
+                    <a:p>
+                      <a:pPr algn="r"/>
+                      <a:r>
+                        <a:rPr sz="1200" b="0">
+                          <a:solidFill>
+                            <a:srgbClr val="1F2A44"/>
+                          </a:solidFill>
+                          <a:latin typeface="Calibri"/>
+                        </a:rPr>
+                        <a:t>$51.3M</a:t>
+                      </a:r>
+                    </a:p>
+                  </a:txBody>
+                  <a:tcPr marL="54864" marR="54864" marT="27432" marB="27432" anchor="ctr">
+                    <a:solidFill>
+                      <a:srgbClr val="FFFFFF"/>
+                    </a:solidFill>
+                  </a:tcPr>
+                </a:tc>
+                <a:tc>
+                  <a:txBody>
+                    <a:bodyPr/>
+                    <a:lstStyle/>
+                    <a:p>
+                      <a:pPr algn="r"/>
+                      <a:r>
+                        <a:rPr sz="1200" b="0">
+                          <a:solidFill>
+                            <a:srgbClr val="1F2A44"/>
+                          </a:solidFill>
+                          <a:latin typeface="Calibri"/>
+                        </a:rPr>
+                        <a:t>$53.4M</a:t>
+                      </a:r>
+                    </a:p>
+                  </a:txBody>
+                  <a:tcPr marL="54864" marR="54864" marT="27432" marB="27432" anchor="ctr">
+                    <a:solidFill>
+                      <a:srgbClr val="FFFFFF"/>
+                    </a:solidFill>
+                  </a:tcPr>
+                </a:tc>
+              </a:tr>
+              <a:tr h="396240">
+                <a:tc>
+                  <a:txBody>
+                    <a:bodyPr/>
+                    <a:lstStyle/>
+                    <a:p>
+                      <a:r>
+                        <a:rPr sz="1200" b="0">
+                          <a:solidFill>
+                            <a:srgbClr val="1F2A44"/>
+                          </a:solidFill>
+                          <a:latin typeface="Calibri"/>
+                        </a:rPr>
+                        <a:t>P80 total</a:t>
+                      </a:r>
+                    </a:p>
+                  </a:txBody>
+                  <a:tcPr marL="54864" marR="54864" marT="27432" marB="27432" anchor="ctr">
+                    <a:solidFill>
+                      <a:srgbClr val="F2F4F8"/>
+                    </a:solidFill>
+                  </a:tcPr>
+                </a:tc>
+                <a:tc>
+                  <a:txBody>
+                    <a:bodyPr/>
+                    <a:lstStyle/>
+                    <a:p>
+                      <a:pPr algn="r"/>
+                      <a:r>
+                        <a:rPr sz="1200" b="0">
+                          <a:solidFill>
+                            <a:srgbClr val="1F2A44"/>
+                          </a:solidFill>
+                          <a:latin typeface="Calibri"/>
+                        </a:rPr>
+                        <a:t>$53.0M</a:t>
+                      </a:r>
+                    </a:p>
+                  </a:txBody>
+                  <a:tcPr marL="54864" marR="54864" marT="27432" marB="27432" anchor="ctr">
+                    <a:solidFill>
+                      <a:srgbClr val="F2F4F8"/>
+                    </a:solidFill>
+                  </a:tcPr>
+                </a:tc>
+                <a:tc>
+                  <a:txBody>
+                    <a:bodyPr/>
+                    <a:lstStyle/>
+                    <a:p>
+                      <a:pPr algn="r"/>
+                      <a:r>
+                        <a:rPr sz="1200" b="0">
+                          <a:solidFill>
+                            <a:srgbClr val="1F2A44"/>
+                          </a:solidFill>
+                          <a:latin typeface="Calibri"/>
+                        </a:rPr>
+                        <a:t>$55.9M</a:t>
+                      </a:r>
+                    </a:p>
+                  </a:txBody>
+                  <a:tcPr marL="54864" marR="54864" marT="27432" marB="27432" anchor="ctr">
+                    <a:solidFill>
+                      <a:srgbClr val="F2F4F8"/>
+                    </a:solidFill>
+                  </a:tcPr>
+                </a:tc>
+              </a:tr>
+              <a:tr h="396240">
+                <a:tc>
+                  <a:txBody>
+                    <a:bodyPr/>
+                    <a:lstStyle/>
+                    <a:p>
+                      <a:r>
+                        <a:rPr sz="1200" b="0">
+                          <a:solidFill>
+                            <a:srgbClr val="1F2A44"/>
+                          </a:solidFill>
+                          <a:latin typeface="Calibri"/>
+                        </a:rPr>
+                        <a:t>Reserve to reach P80</a:t>
+                      </a:r>
+                    </a:p>
+                  </a:txBody>
+                  <a:tcPr marL="54864" marR="54864" marT="27432" marB="27432" anchor="ctr">
+                    <a:solidFill>
+                      <a:srgbClr val="FFFFFF"/>
+                    </a:solidFill>
+                  </a:tcPr>
+                </a:tc>
+                <a:tc>
+                  <a:txBody>
+                    <a:bodyPr/>
+                    <a:lstStyle/>
+                    <a:p>
+                      <a:pPr algn="r"/>
+                      <a:r>
+                        <a:rPr sz="1200" b="0">
+                          <a:solidFill>
+                            <a:srgbClr val="1F2A44"/>
+                          </a:solidFill>
+                          <a:latin typeface="Calibri"/>
+                        </a:rPr>
+                        <a:t>$3.4M</a:t>
+                      </a:r>
+                    </a:p>
+                  </a:txBody>
+                  <a:tcPr marL="54864" marR="54864" marT="27432" marB="27432" anchor="ctr">
+                    <a:solidFill>
+                      <a:srgbClr val="FFFFFF"/>
+                    </a:solidFill>
+                  </a:tcPr>
+                </a:tc>
+                <a:tc>
+                  <a:txBody>
+                    <a:bodyPr/>
+                    <a:lstStyle/>
+                    <a:p>
+                      <a:pPr algn="r"/>
+                      <a:r>
+                        <a:rPr sz="1200" b="0">
+                          <a:solidFill>
+                            <a:srgbClr val="1F2A44"/>
+                          </a:solidFill>
+                          <a:latin typeface="Calibri"/>
+                        </a:rPr>
+                        <a:t>$6.2M</a:t>
+                      </a:r>
+                    </a:p>
+                  </a:txBody>
+                  <a:tcPr marL="54864" marR="54864" marT="27432" marB="27432" anchor="ctr">
+                    <a:solidFill>
+                      <a:srgbClr val="FFFFFF"/>
+                    </a:solidFill>
+                  </a:tcPr>
+                </a:tc>
+              </a:tr>
+              <a:tr h="396240">
+                <a:tc>
+                  <a:txBody>
+                    <a:bodyPr/>
+                    <a:lstStyle/>
+                    <a:p>
+                      <a:r>
+                        <a:rPr sz="1200" b="0">
+                          <a:solidFill>
+                            <a:srgbClr val="1F2A44"/>
+                          </a:solidFill>
+                          <a:latin typeface="Calibri"/>
+                        </a:rPr>
+                        <a:t>Carried risk + contingency</a:t>
+                      </a:r>
+                    </a:p>
+                  </a:txBody>
+                  <a:tcPr marL="54864" marR="54864" marT="27432" marB="27432" anchor="ctr">
+                    <a:solidFill>
+                      <a:srgbClr val="F2F4F8"/>
+                    </a:solidFill>
+                  </a:tcPr>
+                </a:tc>
+                <a:tc>
+                  <a:txBody>
+                    <a:bodyPr/>
+                    <a:lstStyle/>
+                    <a:p>
+                      <a:pPr algn="r"/>
+                      <a:r>
+                        <a:rPr sz="1200" b="0">
+                          <a:solidFill>
+                            <a:srgbClr val="1F2A44"/>
+                          </a:solidFill>
+                          <a:latin typeface="Calibri"/>
+                        </a:rPr>
+                        <a:t>$7.6M</a:t>
+                      </a:r>
+                    </a:p>
+                  </a:txBody>
+                  <a:tcPr marL="54864" marR="54864" marT="27432" marB="27432" anchor="ctr">
+                    <a:solidFill>
+                      <a:srgbClr val="F2F4F8"/>
+                    </a:solidFill>
+                  </a:tcPr>
+                </a:tc>
+                <a:tc>
+                  <a:txBody>
+                    <a:bodyPr/>
+                    <a:lstStyle/>
+                    <a:p>
+                      <a:pPr algn="r"/>
+                      <a:r>
+                        <a:rPr sz="1200" b="0">
+                          <a:solidFill>
+                            <a:srgbClr val="1F2A44"/>
+                          </a:solidFill>
+                          <a:latin typeface="Calibri"/>
+                        </a:rPr>
+                        <a:t>$7.6M</a:t>
+                      </a:r>
+                    </a:p>
+                  </a:txBody>
+                  <a:tcPr marL="54864" marR="54864" marT="27432" marB="27432" anchor="ctr">
+                    <a:solidFill>
+                      <a:srgbClr val="F2F4F8"/>
+                    </a:solidFill>
+                  </a:tcPr>
+                </a:tc>
+              </a:tr>
+              <a:tr h="396240">
+                <a:tc>
+                  <a:txBody>
+                    <a:bodyPr/>
+                    <a:lstStyle/>
+                    <a:p>
+                      <a:r>
+                        <a:rPr sz="1200" b="0">
+                          <a:solidFill>
+                            <a:srgbClr val="1F2A44"/>
+                          </a:solidFill>
+                          <a:latin typeface="Calibri"/>
+                        </a:rPr>
+                        <a:t>P(total &gt; $57.2M)</a:t>
+                      </a:r>
+                    </a:p>
+                  </a:txBody>
+                  <a:tcPr marL="54864" marR="54864" marT="27432" marB="27432" anchor="ctr">
+                    <a:solidFill>
+                      <a:srgbClr val="FFFFFF"/>
+                    </a:solidFill>
+                  </a:tcPr>
+                </a:tc>
+                <a:tc>
+                  <a:txBody>
+                    <a:bodyPr/>
+                    <a:lstStyle/>
+                    <a:p>
+                      <a:pPr algn="r"/>
+                      <a:r>
+                        <a:rPr sz="1200" b="0">
+                          <a:solidFill>
+                            <a:srgbClr val="1F2A44"/>
+                          </a:solidFill>
+                          <a:latin typeface="Calibri"/>
+                        </a:rPr>
+                        <a:t>0%</a:t>
+                      </a:r>
+                    </a:p>
+                  </a:txBody>
+                  <a:tcPr marL="54864" marR="54864" marT="27432" marB="27432" anchor="ctr">
+                    <a:solidFill>
+                      <a:srgbClr val="FFFFFF"/>
+                    </a:solidFill>
+                  </a:tcPr>
+                </a:tc>
+                <a:tc>
+                  <a:txBody>
+                    <a:bodyPr/>
+                    <a:lstStyle/>
+                    <a:p>
+                      <a:pPr algn="r"/>
+                      <a:r>
+                        <a:rPr sz="1200" b="0">
+                          <a:solidFill>
+                            <a:srgbClr val="1F2A44"/>
+                          </a:solidFill>
+                          <a:latin typeface="Calibri"/>
+                        </a:rPr>
+                        <a:t>10%</a:t>
+                      </a:r>
+                    </a:p>
+                  </a:txBody>
+                  <a:tcPr marL="54864" marR="54864" marT="27432" marB="27432" anchor="ctr">
+                    <a:solidFill>
+                      <a:srgbClr val="FFFFFF"/>
+                    </a:solidFill>
+                  </a:tcPr>
+                </a:tc>
+              </a:tr>
+            </a:tbl>
+          </a:graphicData>
+        </a:graphic>
+      </p:graphicFrame>
+      <p:sp>
+        <p:nvSpPr>
+          <p:cNvPr id="10" name="TextBox 9"/>
+          <p:cNvSpPr txBox="1"/>
+          <p:nvPr/>
+        </p:nvSpPr>
+        <p:spPr>
+          <a:xfrm>
+            <a:off x="6583680" y="3977639"/>
+            <a:ext cx="5120640" cy="2286000"/>
+          </a:xfrm>
+          <a:prstGeom prst="rect">
+            <a:avLst/>
+          </a:prstGeom>
+          <a:noFill/>
+        </p:spPr>
+        <p:txBody>
+          <a:bodyPr wrap="square" lIns="45720">
+            <a:spAutoFit/>
+          </a:bodyPr>
+          <a:lstStyle/>
+          <a:p>
+            <a:pPr>
+              <a:lnSpc>
+                <a:spcPct val="105000"/>
+              </a:lnSpc>
+              <a:spcAft>
+                <a:spcPts val="500"/>
+              </a:spcAft>
+            </a:pPr>
+            <a:r>
+              <a:rPr sz="1200">
+                <a:solidFill>
+                  <a:srgbClr val="FFC72C"/>
+                </a:solidFill>
+                <a:latin typeface="Calibri"/>
+              </a:rPr>
+              <a:t>▪  </a:t>
+            </a:r>
+            <a:r>
+              <a:rPr b="1" sz="1200">
+                <a:solidFill>
+                  <a:srgbClr val="1F2A44"/>
+                </a:solidFill>
+                <a:latin typeface="Calibri"/>
+              </a:rPr>
+              <a:t>Distributions </a:t>
+            </a:r>
+            <a:r>
+              <a:rPr sz="1200">
+                <a:solidFill>
+                  <a:srgbClr val="1F2A44"/>
+                </a:solidFill>
+                <a:latin typeface="Calibri"/>
+              </a:rPr>
+              <a:t>are PERT ranges on each of the nine Station 360 layers plus Station 496, indirects and AFUDC; risk register and contingency are not stacked on top (they fund the same outcomes).</a:t>
+            </a:r>
+          </a:p>
+          <a:p>
+            <a:pPr>
+              <a:lnSpc>
+                <a:spcPct val="105000"/>
+              </a:lnSpc>
+              <a:spcAft>
+                <a:spcPts val="500"/>
+              </a:spcAft>
+            </a:pPr>
+            <a:r>
+              <a:rPr sz="1200">
+                <a:solidFill>
+                  <a:srgbClr val="FFC72C"/>
+                </a:solidFill>
+                <a:latin typeface="Calibri"/>
+              </a:rPr>
+              <a:t>▪  </a:t>
+            </a:r>
+            <a:r>
+              <a:rPr b="1" sz="1200">
+                <a:solidFill>
+                  <a:srgbClr val="1F2A44"/>
+                </a:solidFill>
+                <a:latin typeface="Calibri"/>
+              </a:rPr>
+              <a:t>Estimate-to-actual uplift on comparables: </a:t>
+            </a:r>
+            <a:r>
+              <a:rPr sz="1200">
+                <a:solidFill>
+                  <a:srgbClr val="1F2A44"/>
+                </a:solidFill>
+                <a:latin typeface="Calibri"/>
+              </a:rPr>
+              <a:t>Fairhaven +64%, Provincetown +9 to +40%, Waena +37%, Regina +31%, Hyde Park Sep cycle +21%. Median about +31%; Rev 3 carries 17.9%.</a:t>
+            </a:r>
+          </a:p>
+          <a:p>
+            <a:pPr>
+              <a:lnSpc>
+                <a:spcPct val="105000"/>
+              </a:lnSpc>
+              <a:spcAft>
+                <a:spcPts val="500"/>
+              </a:spcAft>
+            </a:pPr>
+            <a:r>
+              <a:rPr sz="1200">
+                <a:solidFill>
+                  <a:srgbClr val="FFC72C"/>
+                </a:solidFill>
+                <a:latin typeface="Calibri"/>
+              </a:rPr>
+              <a:t>▪  </a:t>
+            </a:r>
+            <a:r>
+              <a:rPr b="1" sz="1200">
+                <a:solidFill>
+                  <a:srgbClr val="1F2A44"/>
+                </a:solidFill>
+                <a:latin typeface="Calibri"/>
+              </a:rPr>
+              <a:t>Next step: </a:t>
+            </a:r>
+            <a:r>
+              <a:rPr sz="1200">
+                <a:solidFill>
+                  <a:srgbClr val="1F2A44"/>
+                </a:solidFill>
+                <a:latin typeface="Calibri"/>
+              </a:rPr>
+              <a:t>replace these ranges with the project team's in a two-hour range-estimating session (AACE 41R-08) before full funding.</a:t>
             </a:r>
           </a:p>
         </p:txBody>

--- a/Hyde Park BESS/6) Cost Analysis Deliverables/Hyde Park BESS - Cost Analysis Deck.pptx
+++ b/Hyde Park BESS/6) Cost Analysis Deliverables/Hyde Park BESS - Cost Analysis Deck.pptx
@@ -20,10 +20,13 @@
     <p:sldId id="268" r:id="rId20"/>
     <p:sldId id="269" r:id="rId21"/>
     <p:sldId id="270" r:id="rId22"/>
+    <p:sldId id="271" r:id="rId23"/>
     <p:sldId id="272" r:id="rId24"/>
     <p:sldId id="273" r:id="rId25"/>
+    <p:sldId id="275" r:id="rId27"/>
+    <p:sldId id="276" r:id="rId28"/>
+    <p:sldId id="277" r:id="rId29"/>
     <p:sldId id="274" r:id="rId26"/>
-    <p:sldId id="271" r:id="rId23"/>
   </p:sldIdLst>
   <p:sldSz cx="12191695" cy="6858000" type="screen4x3"/>
   <p:notesSz cx="6858000" cy="9144000"/>
@@ -3525,7 +3528,7 @@
           <a:lstStyle/>
           <a:p>
             <a:r>
-              <a:t>Every item has an owner and a dollar figure. That is what makes it a plan rather than a worry list.</a:t>
+              <a:t>Ranked by the red team. The first two items are the ones that can move the number by more than the whole reserve; the rest are hygiene.</a:t>
             </a:r>
           </a:p>
         </p:txBody>
@@ -3551,6 +3554,216 @@
 </file>
 
 <file path=ppt/notesSlides/notesSlide16.xml><?xml version="1.0" encoding="utf-8"?>
+<p:notes xmlns:a="http://schemas.openxmlformats.org/drawingml/2006/main" xmlns:p="http://schemas.openxmlformats.org/presentationml/2006/main" xmlns:r="http://schemas.openxmlformats.org/officeDocument/2006/relationships">
+  <p:cSld>
+    <p:spTree>
+      <p:nvGrpSpPr>
+        <p:cNvPr id="1" name=""/>
+        <p:cNvGrpSpPr/>
+        <p:nvPr/>
+      </p:nvGrpSpPr>
+      <p:grpSpPr>
+        <a:xfrm>
+          <a:off x="0" y="0"/>
+          <a:ext cx="0" cy="0"/>
+          <a:chOff x="0" y="0"/>
+          <a:chExt cx="0" cy="0"/>
+        </a:xfrm>
+      </p:grpSpPr>
+      <p:sp>
+        <p:nvSpPr>
+          <p:cNvPr id="2" name="Slide Image Placeholder 1"/>
+          <p:cNvSpPr>
+            <a:spLocks noGrp="1"/>
+          </p:cNvSpPr>
+          <p:nvPr>
+            <p:ph type="sldImg" idx="2"/>
+          </p:nvPr>
+        </p:nvSpPr>
+        <p:spPr/>
+      </p:sp>
+      <p:sp>
+        <p:nvSpPr>
+          <p:cNvPr id="3" name="Notes Placeholder 2"/>
+          <p:cNvSpPr>
+            <a:spLocks noGrp="1"/>
+          </p:cNvSpPr>
+          <p:nvPr>
+            <p:ph type="body" idx="3" sz="quarter"/>
+          </p:nvPr>
+        </p:nvSpPr>
+        <p:spPr/>
+        <p:txBody>
+          <a:bodyPr/>
+          <a:lstStyle/>
+          <a:p>
+            <a:r>
+              <a:t>Steelman first: the battery is contracted, every dollar has a name, the direct cost is inside the reference class. These three are what an outside reviewer will find if we do not.</a:t>
+            </a:r>
+          </a:p>
+        </p:txBody>
+      </p:sp>
+      <p:sp>
+        <p:nvSpPr>
+          <p:cNvPr id="4" name="Slide Number Placeholder 3"/>
+          <p:cNvSpPr>
+            <a:spLocks noGrp="1"/>
+          </p:cNvSpPr>
+          <p:nvPr>
+            <p:ph type="sldNum" idx="5" sz="quarter"/>
+          </p:nvPr>
+        </p:nvSpPr>
+        <p:spPr/>
+      </p:sp>
+    </p:spTree>
+  </p:cSld>
+  <p:clrMapOvr>
+    <a:masterClrMapping/>
+  </p:clrMapOvr>
+</p:notes>
+</file>
+
+<file path=ppt/notesSlides/notesSlide17.xml><?xml version="1.0" encoding="utf-8"?>
+<p:notes xmlns:a="http://schemas.openxmlformats.org/drawingml/2006/main" xmlns:p="http://schemas.openxmlformats.org/presentationml/2006/main" xmlns:r="http://schemas.openxmlformats.org/officeDocument/2006/relationships">
+  <p:cSld>
+    <p:spTree>
+      <p:nvGrpSpPr>
+        <p:cNvPr id="1" name=""/>
+        <p:cNvGrpSpPr/>
+        <p:nvPr/>
+      </p:nvGrpSpPr>
+      <p:grpSpPr>
+        <a:xfrm>
+          <a:off x="0" y="0"/>
+          <a:ext cx="0" cy="0"/>
+          <a:chOff x="0" y="0"/>
+          <a:chExt cx="0" cy="0"/>
+        </a:xfrm>
+      </p:grpSpPr>
+      <p:sp>
+        <p:nvSpPr>
+          <p:cNvPr id="2" name="Slide Image Placeholder 1"/>
+          <p:cNvSpPr>
+            <a:spLocks noGrp="1"/>
+          </p:cNvSpPr>
+          <p:nvPr>
+            <p:ph type="sldImg" idx="2"/>
+          </p:nvPr>
+        </p:nvSpPr>
+        <p:spPr/>
+      </p:sp>
+      <p:sp>
+        <p:nvSpPr>
+          <p:cNvPr id="3" name="Notes Placeholder 2"/>
+          <p:cNvSpPr>
+            <a:spLocks noGrp="1"/>
+          </p:cNvSpPr>
+          <p:nvPr>
+            <p:ph type="body" idx="3" sz="quarter"/>
+          </p:nvPr>
+        </p:nvSpPr>
+        <p:spPr/>
+        <p:txBody>
+          <a:bodyPr/>
+          <a:lstStyle/>
+          <a:p>
+            <a:r>
+              <a:t>The combination case is the one to plan against. It is not exotic: it is the HEG gap plus one missed siting season.</a:t>
+            </a:r>
+          </a:p>
+        </p:txBody>
+      </p:sp>
+      <p:sp>
+        <p:nvSpPr>
+          <p:cNvPr id="4" name="Slide Number Placeholder 3"/>
+          <p:cNvSpPr>
+            <a:spLocks noGrp="1"/>
+          </p:cNvSpPr>
+          <p:nvPr>
+            <p:ph type="sldNum" idx="5" sz="quarter"/>
+          </p:nvPr>
+        </p:nvSpPr>
+        <p:spPr/>
+      </p:sp>
+    </p:spTree>
+  </p:cSld>
+  <p:clrMapOvr>
+    <a:masterClrMapping/>
+  </p:clrMapOvr>
+</p:notes>
+</file>
+
+<file path=ppt/notesSlides/notesSlide18.xml><?xml version="1.0" encoding="utf-8"?>
+<p:notes xmlns:a="http://schemas.openxmlformats.org/drawingml/2006/main" xmlns:p="http://schemas.openxmlformats.org/presentationml/2006/main" xmlns:r="http://schemas.openxmlformats.org/officeDocument/2006/relationships">
+  <p:cSld>
+    <p:spTree>
+      <p:nvGrpSpPr>
+        <p:cNvPr id="1" name=""/>
+        <p:cNvGrpSpPr/>
+        <p:nvPr/>
+      </p:nvGrpSpPr>
+      <p:grpSpPr>
+        <a:xfrm>
+          <a:off x="0" y="0"/>
+          <a:ext cx="0" cy="0"/>
+          <a:chOff x="0" y="0"/>
+          <a:chExt cx="0" cy="0"/>
+        </a:xfrm>
+      </p:grpSpPr>
+      <p:sp>
+        <p:nvSpPr>
+          <p:cNvPr id="2" name="Slide Image Placeholder 1"/>
+          <p:cNvSpPr>
+            <a:spLocks noGrp="1"/>
+          </p:cNvSpPr>
+          <p:nvPr>
+            <p:ph type="sldImg" idx="2"/>
+          </p:nvPr>
+        </p:nvSpPr>
+        <p:spPr/>
+      </p:sp>
+      <p:sp>
+        <p:nvSpPr>
+          <p:cNvPr id="3" name="Notes Placeholder 2"/>
+          <p:cNvSpPr>
+            <a:spLocks noGrp="1"/>
+          </p:cNvSpPr>
+          <p:nvPr>
+            <p:ph type="body" idx="3" sz="quarter"/>
+          </p:nvPr>
+        </p:nvSpPr>
+        <p:spPr/>
+        <p:txBody>
+          <a:bodyPr/>
+          <a:lstStyle/>
+          <a:p>
+            <a:r>
+              <a:t>Five indicators, none of them expensive to watch. Three of them have no owner today.</a:t>
+            </a:r>
+          </a:p>
+        </p:txBody>
+      </p:sp>
+      <p:sp>
+        <p:nvSpPr>
+          <p:cNvPr id="4" name="Slide Number Placeholder 3"/>
+          <p:cNvSpPr>
+            <a:spLocks noGrp="1"/>
+          </p:cNvSpPr>
+          <p:nvPr>
+            <p:ph type="sldNum" idx="5" sz="quarter"/>
+          </p:nvPr>
+        </p:nvSpPr>
+        <p:spPr/>
+      </p:sp>
+    </p:spTree>
+  </p:cSld>
+  <p:clrMapOvr>
+    <a:masterClrMapping/>
+  </p:clrMapOvr>
+</p:notes>
+</file>
+
+<file path=ppt/notesSlides/notesSlide19.xml><?xml version="1.0" encoding="utf-8"?>
 <p:notes xmlns:a="http://schemas.openxmlformats.org/drawingml/2006/main" xmlns:p="http://schemas.openxmlformats.org/presentationml/2006/main" xmlns:r="http://schemas.openxmlformats.org/officeDocument/2006/relationships">
   <p:cSld>
     <p:spTree>
@@ -10579,7 +10792,7 @@
                 </a:solidFill>
                 <a:latin typeface="Calibri"/>
               </a:rPr>
-              <a:t>RECONCILIATIONS AND DECISIONS, WITH THE DOLLARS AT STAKE</a:t>
+              <a:t>RECONCILIATIONS AND DECISIONS, WITH THE DOLLARS AT STAKE (RED-TEAM RANKED)</a:t>
             </a:r>
           </a:p>
         </p:txBody>
@@ -10719,8 +10932,8 @@
           <p:nvPr/>
         </p:nvGraphicFramePr>
         <p:xfrm>
-          <a:off x="548640" y="1417320"/>
-          <a:ext cx="11064240" cy="4572000"/>
+          <a:off x="548640" y="1325880"/>
+          <a:ext cx="11064240" cy="4480560"/>
         </p:xfrm>
         <a:graphic>
           <a:graphicData uri="http://schemas.openxmlformats.org/drawingml/2006/table">
@@ -10729,19 +10942,19 @@
                 <a:tableStyleId>{5C22544A-7EE6-4342-B048-85BDC9FD1C3A}</a:tableStyleId>
               </a:tblPr>
               <a:tblGrid>
-                <a:gridCol w="5852160"/>
-                <a:gridCol w="1280160"/>
+                <a:gridCol w="6035040"/>
+                <a:gridCol w="1188720"/>
                 <a:gridCol w="2286000"/>
-                <a:gridCol w="1645920"/>
+                <a:gridCol w="1554480"/>
               </a:tblGrid>
-              <a:tr h="508000">
-                <a:tc>
-                  <a:txBody>
-                    <a:bodyPr/>
-                    <a:lstStyle/>
-                    <a:p>
-                      <a:r>
-                        <a:rPr sz="1200" b="1">
+              <a:tr h="407323">
+                <a:tc>
+                  <a:txBody>
+                    <a:bodyPr/>
+                    <a:lstStyle/>
+                    <a:p>
+                      <a:r>
+                        <a:rPr sz="1000" b="1">
                           <a:solidFill>
                             <a:srgbClr val="FFFFFF"/>
                           </a:solidFill>
@@ -10763,7 +10976,7 @@
                     <a:lstStyle/>
                     <a:p>
                       <a:r>
-                        <a:rPr sz="1200" b="1">
+                        <a:rPr sz="1000" b="1">
                           <a:solidFill>
                             <a:srgbClr val="FFFFFF"/>
                           </a:solidFill>
@@ -10785,7 +10998,7 @@
                     <a:lstStyle/>
                     <a:p>
                       <a:r>
-                        <a:rPr sz="1200" b="1">
+                        <a:rPr sz="1000" b="1">
                           <a:solidFill>
                             <a:srgbClr val="FFFFFF"/>
                           </a:solidFill>
@@ -10807,7 +11020,7 @@
                     <a:lstStyle/>
                     <a:p>
                       <a:r>
-                        <a:rPr sz="1200" b="1">
+                        <a:rPr sz="1000" b="1">
                           <a:solidFill>
                             <a:srgbClr val="FFFFFF"/>
                           </a:solidFill>
@@ -10824,20 +11037,20 @@
                   </a:tcPr>
                 </a:tc>
               </a:tr>
-              <a:tr h="508000">
-                <a:tc>
-                  <a:txBody>
-                    <a:bodyPr/>
-                    <a:lstStyle/>
-                    <a:p>
-                      <a:r>
-                        <a:rPr sz="1200" b="0">
+              <a:tr h="407323">
+                <a:tc>
+                  <a:txBody>
+                    <a:bodyPr/>
+                    <a:lstStyle/>
+                    <a:p>
+                      <a:r>
+                        <a:rPr sz="1000" b="0">
                           <a:solidFill>
                             <a:srgbClr val="1F2A44"/>
                           </a:solidFill>
                           <a:latin typeface="Calibri"/>
                         </a:rPr>
-                        <a:t>Reconcile Haugland Class 3 base ($19.2M, its scope) to Rev 3 layers B+D+E ($8.3M direct)</a:t>
+                        <a:t>Reconcile Haugland Class 3 base ($19.2M, its scope) to Rev 3 layers B+D+E ($8.3M direct). Red team expects it to move the base up, not down.</a:t>
                       </a:r>
                     </a:p>
                   </a:txBody>
@@ -10853,7 +11066,7 @@
                     <a:lstStyle/>
                     <a:p>
                       <a:r>
-                        <a:rPr sz="1200" b="0">
+                        <a:rPr sz="1000" b="0">
                           <a:solidFill>
                             <a:srgbClr val="1F2A44"/>
                           </a:solidFill>
@@ -10875,13 +11088,13 @@
                     <a:lstStyle/>
                     <a:p>
                       <a:r>
-                        <a:rPr sz="1200" b="0">
+                        <a:rPr sz="1000" b="0">
                           <a:solidFill>
                             <a:srgbClr val="1F2A44"/>
                           </a:solidFill>
                           <a:latin typeface="Calibri"/>
                         </a:rPr>
-                        <a:t>Unknown until mapped</a:t>
+                        <a:t>+$4M to +$8M direct if half the gap is 21334 scope</a:t>
                       </a:r>
                     </a:p>
                   </a:txBody>
@@ -10897,7 +11110,7 @@
                     <a:lstStyle/>
                     <a:p>
                       <a:r>
-                        <a:rPr sz="1200" b="0">
+                        <a:rPr sz="1000" b="0">
                           <a:solidFill>
                             <a:srgbClr val="1F2A44"/>
                           </a:solidFill>
@@ -10914,20 +11127,20 @@
                   </a:tcPr>
                 </a:tc>
               </a:tr>
-              <a:tr h="508000">
-                <a:tc>
-                  <a:txBody>
-                    <a:bodyPr/>
-                    <a:lstStyle/>
-                    <a:p>
-                      <a:r>
-                        <a:rPr sz="1200" b="0">
+              <a:tr h="407323">
+                <a:tc>
+                  <a:txBody>
+                    <a:bodyPr/>
+                    <a:lstStyle/>
+                    <a:p>
+                      <a:r>
+                        <a:rPr sz="1000" b="0">
                           <a:solidFill>
                             <a:srgbClr val="1F2A44"/>
                           </a:solidFill>
                           <a:latin typeface="Calibri"/>
                         </a:rPr>
-                        <a:t>Confirm four written design-basis items (retaining wall, detention basin, duct bank, GSU count)</a:t>
+                        <a:t>Siting chain has no float: ZBA determination Feb 2028, construction start Feb 2028, ISD Dec 2028; EFSB fallback 18-24 mo</a:t>
                       </a:r>
                     </a:p>
                   </a:txBody>
@@ -10943,18 +11156,356 @@
                     <a:lstStyle/>
                     <a:p>
                       <a:r>
-                        <a:rPr sz="1200" b="0">
+                        <a:rPr sz="1000" b="0">
                           <a:solidFill>
                             <a:srgbClr val="1F2A44"/>
                           </a:solidFill>
                           <a:latin typeface="Calibri"/>
                         </a:rPr>
+                        <a:t>Schedule</a:t>
+                      </a:r>
+                    </a:p>
+                  </a:txBody>
+                  <a:tcPr marL="54864" marR="54864" marT="27432" marB="27432" anchor="ctr">
+                    <a:solidFill>
+                      <a:srgbClr val="F2F4F8"/>
+                    </a:solidFill>
+                  </a:tcPr>
+                </a:tc>
+                <a:tc>
+                  <a:txBody>
+                    <a:bodyPr/>
+                    <a:lstStyle/>
+                    <a:p>
+                      <a:r>
+                        <a:rPr sz="1000" b="0">
+                          <a:solidFill>
+                            <a:srgbClr val="1F2A44"/>
+                          </a:solidFill>
+                          <a:latin typeface="Calibri"/>
+                        </a:rPr>
+                        <a:t>~$5M per 12 months (AFUDC, escalation, PM, indirects)</a:t>
+                      </a:r>
+                    </a:p>
+                  </a:txBody>
+                  <a:tcPr marL="54864" marR="54864" marT="27432" marB="27432" anchor="ctr">
+                    <a:solidFill>
+                      <a:srgbClr val="F2F4F8"/>
+                    </a:solidFill>
+                  </a:tcPr>
+                </a:tc>
+                <a:tc>
+                  <a:txBody>
+                    <a:bodyPr/>
+                    <a:lstStyle/>
+                    <a:p>
+                      <a:r>
+                        <a:rPr sz="1000" b="0">
+                          <a:solidFill>
+                            <a:srgbClr val="1F2A44"/>
+                          </a:solidFill>
+                          <a:latin typeface="Calibri"/>
+                        </a:rPr>
+                        <a:t>Siting + PM</a:t>
+                      </a:r>
+                    </a:p>
+                  </a:txBody>
+                  <a:tcPr marL="54864" marR="54864" marT="27432" marB="27432" anchor="ctr">
+                    <a:solidFill>
+                      <a:srgbClr val="F2F4F8"/>
+                    </a:solidFill>
+                  </a:tcPr>
+                </a:tc>
+              </a:tr>
+              <a:tr h="407323">
+                <a:tc>
+                  <a:txBody>
+                    <a:bodyPr/>
+                    <a:lstStyle/>
+                    <a:p>
+                      <a:r>
+                        <a:rPr sz="1000" b="0">
+                          <a:solidFill>
+                            <a:srgbClr val="1F2A44"/>
+                          </a:solidFill>
+                          <a:latin typeface="Calibri"/>
+                        </a:rPr>
+                        <a:t>Present full funding at its real maturity: 30% engineering, no bid, placeholder platform = Class 4</a:t>
+                      </a:r>
+                    </a:p>
+                  </a:txBody>
+                  <a:tcPr marL="54864" marR="54864" marT="27432" marB="27432" anchor="ctr">
+                    <a:solidFill>
+                      <a:srgbClr val="FFFFFF"/>
+                    </a:solidFill>
+                  </a:tcPr>
+                </a:tc>
+                <a:tc>
+                  <a:txBody>
+                    <a:bodyPr/>
+                    <a:lstStyle/>
+                    <a:p>
+                      <a:r>
+                        <a:rPr sz="1000" b="0">
+                          <a:solidFill>
+                            <a:srgbClr val="1F2A44"/>
+                          </a:solidFill>
+                          <a:latin typeface="Calibri"/>
+                        </a:rPr>
+                        <a:t>Classification</a:t>
+                      </a:r>
+                    </a:p>
+                  </a:txBody>
+                  <a:tcPr marL="54864" marR="54864" marT="27432" marB="27432" anchor="ctr">
+                    <a:solidFill>
+                      <a:srgbClr val="FFFFFF"/>
+                    </a:solidFill>
+                  </a:tcPr>
+                </a:tc>
+                <a:tc>
+                  <a:txBody>
+                    <a:bodyPr/>
+                    <a:lstStyle/>
+                    <a:p>
+                      <a:r>
+                        <a:rPr sz="1000" b="0">
+                          <a:solidFill>
+                            <a:srgbClr val="1F2A44"/>
+                          </a:solidFill>
+                          <a:latin typeface="Calibri"/>
+                        </a:rPr>
+                        <a:t>Range is -25/+50% ($43M-$86M) until closed</a:t>
+                      </a:r>
+                    </a:p>
+                  </a:txBody>
+                  <a:tcPr marL="54864" marR="54864" marT="27432" marB="27432" anchor="ctr">
+                    <a:solidFill>
+                      <a:srgbClr val="FFFFFF"/>
+                    </a:solidFill>
+                  </a:tcPr>
+                </a:tc>
+                <a:tc>
+                  <a:txBody>
+                    <a:bodyPr/>
+                    <a:lstStyle/>
+                    <a:p>
+                      <a:r>
+                        <a:rPr sz="1000" b="0">
+                          <a:solidFill>
+                            <a:srgbClr val="1F2A44"/>
+                          </a:solidFill>
+                          <a:latin typeface="Calibri"/>
+                        </a:rPr>
+                        <a:t>Cost Estimating</a:t>
+                      </a:r>
+                    </a:p>
+                  </a:txBody>
+                  <a:tcPr marL="54864" marR="54864" marT="27432" marB="27432" anchor="ctr">
+                    <a:solidFill>
+                      <a:srgbClr val="FFFFFF"/>
+                    </a:solidFill>
+                  </a:tcPr>
+                </a:tc>
+              </a:tr>
+              <a:tr h="407323">
+                <a:tc>
+                  <a:txBody>
+                    <a:bodyPr/>
+                    <a:lstStyle/>
+                    <a:p>
+                      <a:r>
+                        <a:rPr sz="1000" b="0">
+                          <a:solidFill>
+                            <a:srgbClr val="1F2A44"/>
+                          </a:solidFill>
+                          <a:latin typeface="Calibri"/>
+                        </a:rPr>
+                        <a:t>Geotechnical investigation and NFPA 855 hazard mitigation analysis before civil freeze</a:t>
+                      </a:r>
+                    </a:p>
+                  </a:txBody>
+                  <a:tcPr marL="54864" marR="54864" marT="27432" marB="27432" anchor="ctr">
+                    <a:solidFill>
+                      <a:srgbClr val="F2F4F8"/>
+                    </a:solidFill>
+                  </a:tcPr>
+                </a:tc>
+                <a:tc>
+                  <a:txBody>
+                    <a:bodyPr/>
+                    <a:lstStyle/>
+                    <a:p>
+                      <a:r>
+                        <a:rPr sz="1000" b="0">
+                          <a:solidFill>
+                            <a:srgbClr val="1F2A44"/>
+                          </a:solidFill>
+                          <a:latin typeface="Calibri"/>
+                        </a:rPr>
+                        <a:t>Study</a:t>
+                      </a:r>
+                    </a:p>
+                  </a:txBody>
+                  <a:tcPr marL="54864" marR="54864" marT="27432" marB="27432" anchor="ctr">
+                    <a:solidFill>
+                      <a:srgbClr val="F2F4F8"/>
+                    </a:solidFill>
+                  </a:tcPr>
+                </a:tc>
+                <a:tc>
+                  <a:txBody>
+                    <a:bodyPr/>
+                    <a:lstStyle/>
+                    <a:p>
+                      <a:r>
+                        <a:rPr sz="1000" b="0">
+                          <a:solidFill>
+                            <a:srgbClr val="1F2A44"/>
+                          </a:solidFill>
+                          <a:latin typeface="Calibri"/>
+                        </a:rPr>
+                        <a:t>$1.0M of deducts vs $0.6M-$3.5M exposure</a:t>
+                      </a:r>
+                    </a:p>
+                  </a:txBody>
+                  <a:tcPr marL="54864" marR="54864" marT="27432" marB="27432" anchor="ctr">
+                    <a:solidFill>
+                      <a:srgbClr val="F2F4F8"/>
+                    </a:solidFill>
+                  </a:tcPr>
+                </a:tc>
+                <a:tc>
+                  <a:txBody>
+                    <a:bodyPr/>
+                    <a:lstStyle/>
+                    <a:p>
+                      <a:r>
+                        <a:rPr sz="1000" b="0">
+                          <a:solidFill>
+                            <a:srgbClr val="1F2A44"/>
+                          </a:solidFill>
+                          <a:latin typeface="Calibri"/>
+                        </a:rPr>
+                        <a:t>Civil + Capital Projects Eng.</a:t>
+                      </a:r>
+                    </a:p>
+                  </a:txBody>
+                  <a:tcPr marL="54864" marR="54864" marT="27432" marB="27432" anchor="ctr">
+                    <a:solidFill>
+                      <a:srgbClr val="F2F4F8"/>
+                    </a:solidFill>
+                  </a:tcPr>
+                </a:tc>
+              </a:tr>
+              <a:tr h="407323">
+                <a:tc>
+                  <a:txBody>
+                    <a:bodyPr/>
+                    <a:lstStyle/>
+                    <a:p>
+                      <a:r>
+                        <a:rPr sz="1000" b="0">
+                          <a:solidFill>
+                            <a:srgbClr val="1F2A44"/>
+                          </a:solidFill>
+                          <a:latin typeface="Calibri"/>
+                        </a:rPr>
+                        <a:t>Confirm four written design-basis items (retaining wall, basin, duct bank, GSU count)</a:t>
+                      </a:r>
+                    </a:p>
+                  </a:txBody>
+                  <a:tcPr marL="54864" marR="54864" marT="27432" marB="27432" anchor="ctr">
+                    <a:solidFill>
+                      <a:srgbClr val="FFFFFF"/>
+                    </a:solidFill>
+                  </a:tcPr>
+                </a:tc>
+                <a:tc>
+                  <a:txBody>
+                    <a:bodyPr/>
+                    <a:lstStyle/>
+                    <a:p>
+                      <a:r>
+                        <a:rPr sz="1000" b="0">
+                          <a:solidFill>
+                            <a:srgbClr val="1F2A44"/>
+                          </a:solidFill>
+                          <a:latin typeface="Calibri"/>
+                        </a:rPr>
                         <a:t>Design confirmation</a:t>
                       </a:r>
                     </a:p>
                   </a:txBody>
                   <a:tcPr marL="54864" marR="54864" marT="27432" marB="27432" anchor="ctr">
                     <a:solidFill>
+                      <a:srgbClr val="FFFFFF"/>
+                    </a:solidFill>
+                  </a:tcPr>
+                </a:tc>
+                <a:tc>
+                  <a:txBody>
+                    <a:bodyPr/>
+                    <a:lstStyle/>
+                    <a:p>
+                      <a:r>
+                        <a:rPr sz="1000" b="0">
+                          <a:solidFill>
+                            <a:srgbClr val="1F2A44"/>
+                          </a:solidFill>
+                          <a:latin typeface="Calibri"/>
+                        </a:rPr>
+                        <a:t>$1.47M HEG deduct ceiling (~$0.8M net of GSUs already at 4)</a:t>
+                      </a:r>
+                    </a:p>
+                  </a:txBody>
+                  <a:tcPr marL="54864" marR="54864" marT="27432" marB="27432" anchor="ctr">
+                    <a:solidFill>
+                      <a:srgbClr val="FFFFFF"/>
+                    </a:solidFill>
+                  </a:tcPr>
+                </a:tc>
+                <a:tc>
+                  <a:txBody>
+                    <a:bodyPr/>
+                    <a:lstStyle/>
+                    <a:p>
+                      <a:r>
+                        <a:rPr sz="1000" b="0">
+                          <a:solidFill>
+                            <a:srgbClr val="1F2A44"/>
+                          </a:solidFill>
+                          <a:latin typeface="Calibri"/>
+                        </a:rPr>
+                        <a:t>Substation Engineering</a:t>
+                      </a:r>
+                    </a:p>
+                  </a:txBody>
+                  <a:tcPr marL="54864" marR="54864" marT="27432" marB="27432" anchor="ctr">
+                    <a:solidFill>
+                      <a:srgbClr val="FFFFFF"/>
+                    </a:solidFill>
+                  </a:tcPr>
+                </a:tc>
+              </a:tr>
+              <a:tr h="407323">
+                <a:tc>
+                  <a:txBody>
+                    <a:bodyPr/>
+                    <a:lstStyle/>
+                    <a:p>
+                      <a:r>
+                        <a:rPr sz="1000" b="0">
+                          <a:solidFill>
+                            <a:srgbClr val="1F2A44"/>
+                          </a:solidFill>
+                          <a:latin typeface="Calibri"/>
+                        </a:rPr>
+                        <a:t>Escalation on the fixed-price battery balance; check Exhibit C for tariff / change-in-law pass-through</a:t>
+                      </a:r>
+                    </a:p>
+                  </a:txBody>
+                  <a:tcPr marL="54864" marR="54864" marT="27432" marB="27432" anchor="ctr">
+                    <a:solidFill>
                       <a:srgbClr val="F2F4F8"/>
                     </a:solidFill>
                   </a:tcPr>
@@ -10965,13 +11516,13 @@
                     <a:lstStyle/>
                     <a:p>
                       <a:r>
-                        <a:rPr sz="1200" b="0">
+                        <a:rPr sz="1000" b="0">
                           <a:solidFill>
                             <a:srgbClr val="1F2A44"/>
                           </a:solidFill>
                           <a:latin typeface="Calibri"/>
                         </a:rPr>
-                        <a:t>$1.47M HEG deduct ceiling</a:t>
+                        <a:t>Decision</a:t>
                       </a:r>
                     </a:p>
                   </a:txBody>
@@ -10987,13 +11538,13 @@
                     <a:lstStyle/>
                     <a:p>
                       <a:r>
-                        <a:rPr sz="1200" b="0">
+                        <a:rPr sz="1000" b="0">
                           <a:solidFill>
                             <a:srgbClr val="1F2A44"/>
                           </a:solidFill>
                           <a:latin typeface="Calibri"/>
                         </a:rPr>
-                        <a:t>Substation Engineering</a:t>
+                        <a:t>$1.13M</a:t>
                       </a:r>
                     </a:p>
                   </a:txBody>
@@ -11003,21 +11554,43 @@
                     </a:solidFill>
                   </a:tcPr>
                 </a:tc>
+                <a:tc>
+                  <a:txBody>
+                    <a:bodyPr/>
+                    <a:lstStyle/>
+                    <a:p>
+                      <a:r>
+                        <a:rPr sz="1000" b="0">
+                          <a:solidFill>
+                            <a:srgbClr val="1F2A44"/>
+                          </a:solidFill>
+                          <a:latin typeface="Calibri"/>
+                        </a:rPr>
+                        <a:t>PM / Cost Estimating / Sourcing</a:t>
+                      </a:r>
+                    </a:p>
+                  </a:txBody>
+                  <a:tcPr marL="54864" marR="54864" marT="27432" marB="27432" anchor="ctr">
+                    <a:solidFill>
+                      <a:srgbClr val="F2F4F8"/>
+                    </a:solidFill>
+                  </a:tcPr>
+                </a:tc>
               </a:tr>
-              <a:tr h="508000">
-                <a:tc>
-                  <a:txBody>
-                    <a:bodyPr/>
-                    <a:lstStyle/>
-                    <a:p>
-                      <a:r>
-                        <a:rPr sz="1200" b="0">
+              <a:tr h="407323">
+                <a:tc>
+                  <a:txBody>
+                    <a:bodyPr/>
+                    <a:lstStyle/>
+                    <a:p>
+                      <a:r>
+                        <a:rPr sz="1000" b="0">
                           <a:solidFill>
                             <a:srgbClr val="1F2A44"/>
                           </a:solidFill>
                           <a:latin typeface="Calibri"/>
                         </a:rPr>
-                        <a:t>Escalation on the fixed-price battery balance</a:t>
+                        <a:t>Battery installation labor: replace 25%-of-16,801 mh with a crew build-up</a:t>
                       </a:r>
                     </a:p>
                   </a:txBody>
@@ -11033,13 +11606,13 @@
                     <a:lstStyle/>
                     <a:p>
                       <a:r>
-                        <a:rPr sz="1200" b="0">
+                        <a:rPr sz="1000" b="0">
                           <a:solidFill>
                             <a:srgbClr val="1F2A44"/>
                           </a:solidFill>
                           <a:latin typeface="Calibri"/>
                         </a:rPr>
-                        <a:t>Decision</a:t>
+                        <a:t>Estimate</a:t>
                       </a:r>
                     </a:p>
                   </a:txBody>
@@ -11055,13 +11628,13 @@
                     <a:lstStyle/>
                     <a:p>
                       <a:r>
-                        <a:rPr sz="1200" b="0">
+                        <a:rPr sz="1000" b="0">
                           <a:solidFill>
                             <a:srgbClr val="1F2A44"/>
                           </a:solidFill>
                           <a:latin typeface="Calibri"/>
                         </a:rPr>
-                        <a:t>$1.13M</a:t>
+                        <a:t>+/- $0.5M (Rev 2 used 50%)</a:t>
                       </a:r>
                     </a:p>
                   </a:txBody>
@@ -11077,13 +11650,13 @@
                     <a:lstStyle/>
                     <a:p>
                       <a:r>
-                        <a:rPr sz="1200" b="0">
+                        <a:rPr sz="1000" b="0">
                           <a:solidFill>
                             <a:srgbClr val="1F2A44"/>
                           </a:solidFill>
                           <a:latin typeface="Calibri"/>
                         </a:rPr>
-                        <a:t>PM / Cost Estimating</a:t>
+                        <a:t>Cost Estimating + Nomad + HEG</a:t>
                       </a:r>
                     </a:p>
                   </a:txBody>
@@ -11094,20 +11667,20 @@
                   </a:tcPr>
                 </a:tc>
               </a:tr>
-              <a:tr h="508000">
-                <a:tc>
-                  <a:txBody>
-                    <a:bodyPr/>
-                    <a:lstStyle/>
-                    <a:p>
-                      <a:r>
-                        <a:rPr sz="1200" b="0">
+              <a:tr h="407323">
+                <a:tc>
+                  <a:txBody>
+                    <a:bodyPr/>
+                    <a:lstStyle/>
+                    <a:p>
+                      <a:r>
+                        <a:rPr sz="1000" b="0">
                           <a:solidFill>
                             <a:srgbClr val="1F2A44"/>
                           </a:solidFill>
                           <a:latin typeface="Calibri"/>
                         </a:rPr>
-                        <a:t>Geotechnical investigation before IFC (platform depth, bearing)</a:t>
+                        <a:t>Station 496 at $363K per relay: compare to two recent EMA relay-replacement actuals; outage-window premium not priced</a:t>
                       </a:r>
                     </a:p>
                   </a:txBody>
@@ -11123,13 +11696,13 @@
                     <a:lstStyle/>
                     <a:p>
                       <a:r>
-                        <a:rPr sz="1200" b="0">
+                        <a:rPr sz="1000" b="0">
                           <a:solidFill>
                             <a:srgbClr val="1F2A44"/>
                           </a:solidFill>
                           <a:latin typeface="Calibri"/>
                         </a:rPr>
-                        <a:t>Study</a:t>
+                        <a:t>Benchmark</a:t>
                       </a:r>
                     </a:p>
                   </a:txBody>
@@ -11145,13 +11718,13 @@
                     <a:lstStyle/>
                     <a:p>
                       <a:r>
-                        <a:rPr sz="1200" b="0">
+                        <a:rPr sz="1000" b="0">
                           <a:solidFill>
                             <a:srgbClr val="1F2A44"/>
                           </a:solidFill>
                           <a:latin typeface="Calibri"/>
                         </a:rPr>
-                        <a:t>$0.38M deduct or $0.6M-$3.5M exposure</a:t>
+                        <a:t>Unknown; $1.8M testing line</a:t>
                       </a:r>
                     </a:p>
                   </a:txBody>
@@ -11167,13 +11740,13 @@
                     <a:lstStyle/>
                     <a:p>
                       <a:r>
-                        <a:rPr sz="1200" b="0">
+                        <a:rPr sz="1000" b="0">
                           <a:solidFill>
                             <a:srgbClr val="1F2A44"/>
                           </a:solidFill>
                           <a:latin typeface="Calibri"/>
                         </a:rPr>
-                        <a:t>Civil Engineering</a:t>
+                        <a:t>P&amp;C Engineering</a:t>
                       </a:r>
                     </a:p>
                   </a:txBody>
@@ -11184,20 +11757,20 @@
                   </a:tcPr>
                 </a:tc>
               </a:tr>
-              <a:tr h="508000">
-                <a:tc>
-                  <a:txBody>
-                    <a:bodyPr/>
-                    <a:lstStyle/>
-                    <a:p>
-                      <a:r>
-                        <a:rPr sz="1200" b="0">
+              <a:tr h="407323">
+                <a:tc>
+                  <a:txBody>
+                    <a:bodyPr/>
+                    <a:lstStyle/>
+                    <a:p>
+                      <a:r>
+                        <a:rPr sz="1000" b="0">
                           <a:solidFill>
                             <a:srgbClr val="1F2A44"/>
                           </a:solidFill>
                           <a:latin typeface="Calibri"/>
                         </a:rPr>
-                        <a:t>NFPA 855 hazard mitigation analysis before civil freeze (footprint 36,100 vs 17,040 SF)</a:t>
+                        <a:t>Spot generation if the BESS misses Dec 2028 (SSF: 2-8 MW) was removed from scope; who carries it?</a:t>
                       </a:r>
                     </a:p>
                   </a:txBody>
@@ -11213,13 +11786,13 @@
                     <a:lstStyle/>
                     <a:p>
                       <a:r>
-                        <a:rPr sz="1200" b="0">
+                        <a:rPr sz="1000" b="0">
                           <a:solidFill>
                             <a:srgbClr val="1F2A44"/>
                           </a:solidFill>
                           <a:latin typeface="Calibri"/>
                         </a:rPr>
-                        <a:t>Study</a:t>
+                        <a:t>Scope / ownership</a:t>
                       </a:r>
                     </a:p>
                   </a:txBody>
@@ -11235,13 +11808,13 @@
                     <a:lstStyle/>
                     <a:p>
                       <a:r>
-                        <a:rPr sz="1200" b="0">
+                        <a:rPr sz="1000" b="0">
                           <a:solidFill>
                             <a:srgbClr val="1F2A44"/>
                           </a:solidFill>
                           <a:latin typeface="Calibri"/>
                         </a:rPr>
-                        <a:t>$0.58M deduct; containment $0.10M</a:t>
+                        <a:t>Not in project</a:t>
                       </a:r>
                     </a:p>
                   </a:txBody>
@@ -11257,13 +11830,13 @@
                     <a:lstStyle/>
                     <a:p>
                       <a:r>
-                        <a:rPr sz="1200" b="0">
+                        <a:rPr sz="1000" b="0">
                           <a:solidFill>
                             <a:srgbClr val="1F2A44"/>
                           </a:solidFill>
                           <a:latin typeface="Calibri"/>
                         </a:rPr>
-                        <a:t>Capital Projects Eng.</a:t>
+                        <a:t>System Planning</a:t>
                       </a:r>
                     </a:p>
                   </a:txBody>
@@ -11274,14 +11847,14 @@
                   </a:tcPr>
                 </a:tc>
               </a:tr>
-              <a:tr h="508000">
-                <a:tc>
-                  <a:txBody>
-                    <a:bodyPr/>
-                    <a:lstStyle/>
-                    <a:p>
-                      <a:r>
-                        <a:rPr sz="1200" b="0">
+              <a:tr h="407330">
+                <a:tc>
+                  <a:txBody>
+                    <a:bodyPr/>
+                    <a:lstStyle/>
+                    <a:p>
+                      <a:r>
+                        <a:rPr sz="1000" b="0">
                           <a:solidFill>
                             <a:srgbClr val="1F2A44"/>
                           </a:solidFill>
@@ -11303,7 +11876,7 @@
                     <a:lstStyle/>
                     <a:p>
                       <a:r>
-                        <a:rPr sz="1200" b="0">
+                        <a:rPr sz="1000" b="0">
                           <a:solidFill>
                             <a:srgbClr val="1F2A44"/>
                           </a:solidFill>
@@ -11325,7 +11898,7 @@
                     <a:lstStyle/>
                     <a:p>
                       <a:r>
-                        <a:rPr sz="1200" b="0">
+                        <a:rPr sz="1000" b="0">
                           <a:solidFill>
                             <a:srgbClr val="1F2A44"/>
                           </a:solidFill>
@@ -11347,193 +11920,13 @@
                     <a:lstStyle/>
                     <a:p>
                       <a:r>
-                        <a:rPr sz="1200" b="0">
+                        <a:rPr sz="1000" b="0">
                           <a:solidFill>
                             <a:srgbClr val="1F2A44"/>
                           </a:solidFill>
                           <a:latin typeface="Calibri"/>
                         </a:rPr>
                         <a:t>Distribution Engineering</a:t>
-                      </a:r>
-                    </a:p>
-                  </a:txBody>
-                  <a:tcPr marL="54864" marR="54864" marT="27432" marB="27432" anchor="ctr">
-                    <a:solidFill>
-                      <a:srgbClr val="F2F4F8"/>
-                    </a:solidFill>
-                  </a:tcPr>
-                </a:tc>
-              </a:tr>
-              <a:tr h="508000">
-                <a:tc>
-                  <a:txBody>
-                    <a:bodyPr/>
-                    <a:lstStyle/>
-                    <a:p>
-                      <a:r>
-                        <a:rPr sz="1200" b="0">
-                          <a:solidFill>
-                            <a:srgbClr val="1F2A44"/>
-                          </a:solidFill>
-                          <a:latin typeface="Calibri"/>
-                        </a:rPr>
-                        <a:t>Battery installation labor: replace 25%-of-16,801 mh with a crew build-up</a:t>
-                      </a:r>
-                    </a:p>
-                  </a:txBody>
-                  <a:tcPr marL="54864" marR="54864" marT="27432" marB="27432" anchor="ctr">
-                    <a:solidFill>
-                      <a:srgbClr val="FFFFFF"/>
-                    </a:solidFill>
-                  </a:tcPr>
-                </a:tc>
-                <a:tc>
-                  <a:txBody>
-                    <a:bodyPr/>
-                    <a:lstStyle/>
-                    <a:p>
-                      <a:r>
-                        <a:rPr sz="1200" b="0">
-                          <a:solidFill>
-                            <a:srgbClr val="1F2A44"/>
-                          </a:solidFill>
-                          <a:latin typeface="Calibri"/>
-                        </a:rPr>
-                        <a:t>Estimate</a:t>
-                      </a:r>
-                    </a:p>
-                  </a:txBody>
-                  <a:tcPr marL="54864" marR="54864" marT="27432" marB="27432" anchor="ctr">
-                    <a:solidFill>
-                      <a:srgbClr val="FFFFFF"/>
-                    </a:solidFill>
-                  </a:tcPr>
-                </a:tc>
-                <a:tc>
-                  <a:txBody>
-                    <a:bodyPr/>
-                    <a:lstStyle/>
-                    <a:p>
-                      <a:r>
-                        <a:rPr sz="1200" b="0">
-                          <a:solidFill>
-                            <a:srgbClr val="1F2A44"/>
-                          </a:solidFill>
-                          <a:latin typeface="Calibri"/>
-                        </a:rPr>
-                        <a:t>+/- $0.5M</a:t>
-                      </a:r>
-                    </a:p>
-                  </a:txBody>
-                  <a:tcPr marL="54864" marR="54864" marT="27432" marB="27432" anchor="ctr">
-                    <a:solidFill>
-                      <a:srgbClr val="FFFFFF"/>
-                    </a:solidFill>
-                  </a:tcPr>
-                </a:tc>
-                <a:tc>
-                  <a:txBody>
-                    <a:bodyPr/>
-                    <a:lstStyle/>
-                    <a:p>
-                      <a:r>
-                        <a:rPr sz="1200" b="0">
-                          <a:solidFill>
-                            <a:srgbClr val="1F2A44"/>
-                          </a:solidFill>
-                          <a:latin typeface="Calibri"/>
-                        </a:rPr>
-                        <a:t>Cost Estimating + Nomad</a:t>
-                      </a:r>
-                    </a:p>
-                  </a:txBody>
-                  <a:tcPr marL="54864" marR="54864" marT="27432" marB="27432" anchor="ctr">
-                    <a:solidFill>
-                      <a:srgbClr val="FFFFFF"/>
-                    </a:solidFill>
-                  </a:tcPr>
-                </a:tc>
-              </a:tr>
-              <a:tr h="508000">
-                <a:tc>
-                  <a:txBody>
-                    <a:bodyPr/>
-                    <a:lstStyle/>
-                    <a:p>
-                      <a:r>
-                        <a:rPr sz="1200" b="0">
-                          <a:solidFill>
-                            <a:srgbClr val="1F2A44"/>
-                          </a:solidFill>
-                          <a:latin typeface="Calibri"/>
-                        </a:rPr>
-                        <a:t>Present full funding as Planning grade (-25/+25%) once the above close</a:t>
-                      </a:r>
-                    </a:p>
-                  </a:txBody>
-                  <a:tcPr marL="54864" marR="54864" marT="27432" marB="27432" anchor="ctr">
-                    <a:solidFill>
-                      <a:srgbClr val="F2F4F8"/>
-                    </a:solidFill>
-                  </a:tcPr>
-                </a:tc>
-                <a:tc>
-                  <a:txBody>
-                    <a:bodyPr/>
-                    <a:lstStyle/>
-                    <a:p>
-                      <a:r>
-                        <a:rPr sz="1200" b="0">
-                          <a:solidFill>
-                            <a:srgbClr val="1F2A44"/>
-                          </a:solidFill>
-                          <a:latin typeface="Calibri"/>
-                        </a:rPr>
-                        <a:t>Classification</a:t>
-                      </a:r>
-                    </a:p>
-                  </a:txBody>
-                  <a:tcPr marL="54864" marR="54864" marT="27432" marB="27432" anchor="ctr">
-                    <a:solidFill>
-                      <a:srgbClr val="F2F4F8"/>
-                    </a:solidFill>
-                  </a:tcPr>
-                </a:tc>
-                <a:tc>
-                  <a:txBody>
-                    <a:bodyPr/>
-                    <a:lstStyle/>
-                    <a:p>
-                      <a:r>
-                        <a:rPr sz="1200" b="0">
-                          <a:solidFill>
-                            <a:srgbClr val="1F2A44"/>
-                          </a:solidFill>
-                          <a:latin typeface="Calibri"/>
-                        </a:rPr>
-                        <a:t>Range narrows from -$14M/+$29M</a:t>
-                      </a:r>
-                    </a:p>
-                  </a:txBody>
-                  <a:tcPr marL="54864" marR="54864" marT="27432" marB="27432" anchor="ctr">
-                    <a:solidFill>
-                      <a:srgbClr val="F2F4F8"/>
-                    </a:solidFill>
-                  </a:tcPr>
-                </a:tc>
-                <a:tc>
-                  <a:txBody>
-                    <a:bodyPr/>
-                    <a:lstStyle/>
-                    <a:p>
-                      <a:r>
-                        <a:rPr sz="1200" b="0">
-                          <a:solidFill>
-                            <a:srgbClr val="1F2A44"/>
-                          </a:solidFill>
-                          <a:latin typeface="Calibri"/>
-                        </a:rPr>
-                        <a:t>Cost Estimating</a:t>
                       </a:r>
                     </a:p>
                   </a:txBody>
@@ -11556,8 +11949,8 @@
         </p:nvSpPr>
         <p:spPr>
           <a:xfrm>
-            <a:off x="548640" y="6035040"/>
-            <a:ext cx="11064240" cy="365760"/>
+            <a:off x="548640" y="6053328"/>
+            <a:ext cx="11064240" cy="320040"/>
           </a:xfrm>
           <a:prstGeom prst="rect">
             <a:avLst/>
@@ -11579,13 +11972,13 @@
               </a:spcAft>
             </a:pPr>
             <a:r>
-              <a:rPr sz="1200" b="0" i="0">
+              <a:rPr sz="1100" b="0" i="0">
                 <a:solidFill>
                   <a:srgbClr val="6B7280"/>
                 </a:solidFill>
                 <a:latin typeface="Calibri"/>
               </a:rPr>
-              <a:t>Haugland's own roll-up: $2.9M achievable deduct ceiling against its base, $0.15M to capture, plus $1.5M of avoided cost outside the base. Ceiling, not forecast.</a:t>
+              <a:t>Defensible reductions (~$3M: battery escalation, design-basis confirmations, material risk sized on non-battery material) are conditional on the Haugland reconciliation closing first.</a:t>
             </a:r>
           </a:p>
         </p:txBody>
@@ -11599,6 +11992,2997 @@
 </file>
 
 <file path=ppt/slides/slide16.xml><?xml version="1.0" encoding="utf-8"?>
+<p:sld xmlns:a="http://schemas.openxmlformats.org/drawingml/2006/main" xmlns:p="http://schemas.openxmlformats.org/presentationml/2006/main" xmlns:r="http://schemas.openxmlformats.org/officeDocument/2006/relationships">
+  <p:cSld>
+    <p:spTree>
+      <p:nvGrpSpPr>
+        <p:cNvPr id="1" name=""/>
+        <p:cNvGrpSpPr/>
+        <p:nvPr/>
+      </p:nvGrpSpPr>
+      <p:grpSpPr/>
+      <p:sp>
+        <p:nvSpPr>
+          <p:cNvPr id="2" name="Rectangle 1"/>
+          <p:cNvSpPr/>
+          <p:nvPr/>
+        </p:nvSpPr>
+        <p:spPr>
+          <a:xfrm>
+            <a:off x="0" y="0"/>
+            <a:ext cx="12191695" cy="6858000"/>
+          </a:xfrm>
+          <a:prstGeom prst="rect">
+            <a:avLst/>
+          </a:prstGeom>
+          <a:solidFill>
+            <a:srgbClr val="FFFFFF"/>
+          </a:solidFill>
+          <a:ln>
+            <a:noFill/>
+          </a:ln>
+          <a:effectLst/>
+        </p:spPr>
+        <p:style>
+          <a:lnRef idx="1">
+            <a:schemeClr val="accent1"/>
+          </a:lnRef>
+          <a:fillRef idx="3">
+            <a:schemeClr val="accent1"/>
+          </a:fillRef>
+          <a:effectRef idx="2">
+            <a:schemeClr val="accent1"/>
+          </a:effectRef>
+          <a:fontRef idx="minor">
+            <a:schemeClr val="lt1"/>
+          </a:fontRef>
+        </p:style>
+        <p:txBody>
+          <a:bodyPr rtlCol="0" anchor="ctr"/>
+          <a:lstStyle/>
+          <a:p>
+            <a:pPr algn="ctr"/>
+          </a:p>
+        </p:txBody>
+      </p:sp>
+      <p:sp>
+        <p:nvSpPr>
+          <p:cNvPr id="3" name="TextBox 2"/>
+          <p:cNvSpPr txBox="1"/>
+          <p:nvPr/>
+        </p:nvSpPr>
+        <p:spPr>
+          <a:xfrm>
+            <a:off x="548640" y="256032"/>
+            <a:ext cx="10058400" cy="274320"/>
+          </a:xfrm>
+          <a:prstGeom prst="rect">
+            <a:avLst/>
+          </a:prstGeom>
+          <a:noFill/>
+        </p:spPr>
+        <p:txBody>
+          <a:bodyPr wrap="square" lIns="45720" rIns="45720" tIns="27432" bIns="27432" anchor="t">
+            <a:spAutoFit/>
+          </a:bodyPr>
+          <a:lstStyle/>
+          <a:p>
+            <a:pPr algn="l">
+              <a:lnSpc>
+                <a:spcPct val="105000"/>
+              </a:lnSpc>
+              <a:spcAft>
+                <a:spcPts val="400"/>
+              </a:spcAft>
+            </a:pPr>
+            <a:r>
+              <a:rPr sz="1100" b="1" i="0">
+                <a:solidFill>
+                  <a:srgbClr val="6E1F2E"/>
+                </a:solidFill>
+                <a:latin typeface="Calibri"/>
+              </a:rPr>
+              <a:t>INDEPENDENT CHALLENGE, 29 SEP 2026 (ESTIMATE-RED-TEAM METHOD)</a:t>
+            </a:r>
+          </a:p>
+        </p:txBody>
+      </p:sp>
+      <p:sp>
+        <p:nvSpPr>
+          <p:cNvPr id="4" name="TextBox 3"/>
+          <p:cNvSpPr txBox="1"/>
+          <p:nvPr/>
+        </p:nvSpPr>
+        <p:spPr>
+          <a:xfrm>
+            <a:off x="548640" y="475488"/>
+            <a:ext cx="11064240" cy="868680"/>
+          </a:xfrm>
+          <a:prstGeom prst="rect">
+            <a:avLst/>
+          </a:prstGeom>
+          <a:noFill/>
+        </p:spPr>
+        <p:txBody>
+          <a:bodyPr wrap="square" lIns="45720" rIns="45720" tIns="27432" bIns="27432" anchor="t">
+            <a:spAutoFit/>
+          </a:bodyPr>
+          <a:lstStyle/>
+          <a:p>
+            <a:pPr algn="l">
+              <a:lnSpc>
+                <a:spcPct val="100000"/>
+              </a:lnSpc>
+              <a:spcAft>
+                <a:spcPts val="400"/>
+              </a:spcAft>
+            </a:pPr>
+            <a:r>
+              <a:rPr sz="2300" b="1" i="0">
+                <a:solidFill>
+                  <a:srgbClr val="001E60"/>
+                </a:solidFill>
+                <a:latin typeface="Georgia"/>
+              </a:rPr>
+              <a:t>Red team: three assumptions that, if wrong, move the number more than the reserve</a:t>
+            </a:r>
+          </a:p>
+        </p:txBody>
+      </p:sp>
+      <p:sp>
+        <p:nvSpPr>
+          <p:cNvPr id="5" name="TextBox 4"/>
+          <p:cNvSpPr txBox="1"/>
+          <p:nvPr/>
+        </p:nvSpPr>
+        <p:spPr>
+          <a:xfrm>
+            <a:off x="548640" y="6419088"/>
+            <a:ext cx="8229600" cy="274320"/>
+          </a:xfrm>
+          <a:prstGeom prst="rect">
+            <a:avLst/>
+          </a:prstGeom>
+          <a:noFill/>
+        </p:spPr>
+        <p:txBody>
+          <a:bodyPr wrap="square" lIns="45720" rIns="45720" tIns="27432" bIns="27432" anchor="t">
+            <a:spAutoFit/>
+          </a:bodyPr>
+          <a:lstStyle/>
+          <a:p>
+            <a:pPr algn="l">
+              <a:lnSpc>
+                <a:spcPct val="105000"/>
+              </a:lnSpc>
+              <a:spcAft>
+                <a:spcPts val="400"/>
+              </a:spcAft>
+            </a:pPr>
+            <a:r>
+              <a:rPr sz="1000" b="0" i="0">
+                <a:solidFill>
+                  <a:srgbClr val="6B7280"/>
+                </a:solidFill>
+                <a:latin typeface="Calibri"/>
+              </a:rPr>
+              <a:t>EstimatingCoE | Eversource Energy | Stewards of Affordability</a:t>
+            </a:r>
+          </a:p>
+        </p:txBody>
+      </p:sp>
+      <p:sp>
+        <p:nvSpPr>
+          <p:cNvPr id="6" name="TextBox 5"/>
+          <p:cNvSpPr txBox="1"/>
+          <p:nvPr/>
+        </p:nvSpPr>
+        <p:spPr>
+          <a:xfrm>
+            <a:off x="10972800" y="6419088"/>
+            <a:ext cx="685800" cy="274320"/>
+          </a:xfrm>
+          <a:prstGeom prst="rect">
+            <a:avLst/>
+          </a:prstGeom>
+          <a:noFill/>
+        </p:spPr>
+        <p:txBody>
+          <a:bodyPr wrap="square" lIns="45720" rIns="45720" tIns="27432" bIns="27432" anchor="t">
+            <a:spAutoFit/>
+          </a:bodyPr>
+          <a:lstStyle/>
+          <a:p>
+            <a:pPr algn="r">
+              <a:lnSpc>
+                <a:spcPct val="105000"/>
+              </a:lnSpc>
+              <a:spcAft>
+                <a:spcPts val="400"/>
+              </a:spcAft>
+            </a:pPr>
+            <a:r>
+              <a:rPr sz="1000" b="0" i="0">
+                <a:solidFill>
+                  <a:srgbClr val="6B7280"/>
+                </a:solidFill>
+                <a:latin typeface="Calibri"/>
+              </a:rPr>
+              <a:t>16</a:t>
+            </a:r>
+          </a:p>
+        </p:txBody>
+      </p:sp>
+      <p:sp>
+        <p:nvSpPr>
+          <p:cNvPr id="7" name="Rectangle 6"/>
+          <p:cNvSpPr/>
+          <p:nvPr/>
+        </p:nvSpPr>
+        <p:spPr>
+          <a:xfrm>
+            <a:off x="548640" y="1417320"/>
+            <a:ext cx="11064240" cy="1463040"/>
+          </a:xfrm>
+          <a:prstGeom prst="rect">
+            <a:avLst/>
+          </a:prstGeom>
+          <a:solidFill>
+            <a:srgbClr val="F2F4F8"/>
+          </a:solidFill>
+          <a:ln>
+            <a:noFill/>
+          </a:ln>
+          <a:effectLst/>
+        </p:spPr>
+        <p:style>
+          <a:lnRef idx="1">
+            <a:schemeClr val="accent1"/>
+          </a:lnRef>
+          <a:fillRef idx="3">
+            <a:schemeClr val="accent1"/>
+          </a:fillRef>
+          <a:effectRef idx="2">
+            <a:schemeClr val="accent1"/>
+          </a:effectRef>
+          <a:fontRef idx="minor">
+            <a:schemeClr val="lt1"/>
+          </a:fontRef>
+        </p:style>
+        <p:txBody>
+          <a:bodyPr rtlCol="0" anchor="ctr"/>
+          <a:lstStyle/>
+          <a:p>
+            <a:pPr algn="ctr"/>
+          </a:p>
+        </p:txBody>
+      </p:sp>
+      <p:sp>
+        <p:nvSpPr>
+          <p:cNvPr id="8" name="Rectangle 7"/>
+          <p:cNvSpPr/>
+          <p:nvPr/>
+        </p:nvSpPr>
+        <p:spPr>
+          <a:xfrm>
+            <a:off x="548640" y="1417320"/>
+            <a:ext cx="82296" cy="1463040"/>
+          </a:xfrm>
+          <a:prstGeom prst="rect">
+            <a:avLst/>
+          </a:prstGeom>
+          <a:solidFill>
+            <a:srgbClr val="6E1F2E"/>
+          </a:solidFill>
+          <a:ln>
+            <a:noFill/>
+          </a:ln>
+          <a:effectLst/>
+        </p:spPr>
+        <p:style>
+          <a:lnRef idx="1">
+            <a:schemeClr val="accent1"/>
+          </a:lnRef>
+          <a:fillRef idx="3">
+            <a:schemeClr val="accent1"/>
+          </a:fillRef>
+          <a:effectRef idx="2">
+            <a:schemeClr val="accent1"/>
+          </a:effectRef>
+          <a:fontRef idx="minor">
+            <a:schemeClr val="lt1"/>
+          </a:fontRef>
+        </p:style>
+        <p:txBody>
+          <a:bodyPr rtlCol="0" anchor="ctr"/>
+          <a:lstStyle/>
+          <a:p>
+            <a:pPr algn="ctr"/>
+          </a:p>
+        </p:txBody>
+      </p:sp>
+      <p:sp>
+        <p:nvSpPr>
+          <p:cNvPr id="9" name="TextBox 8"/>
+          <p:cNvSpPr txBox="1"/>
+          <p:nvPr/>
+        </p:nvSpPr>
+        <p:spPr>
+          <a:xfrm>
+            <a:off x="777240" y="1490472"/>
+            <a:ext cx="3657600" cy="1325880"/>
+          </a:xfrm>
+          <a:prstGeom prst="rect">
+            <a:avLst/>
+          </a:prstGeom>
+          <a:noFill/>
+        </p:spPr>
+        <p:txBody>
+          <a:bodyPr wrap="square" lIns="45720" rIns="45720" tIns="27432" bIns="27432" anchor="t">
+            <a:spAutoFit/>
+          </a:bodyPr>
+          <a:lstStyle/>
+          <a:p>
+            <a:pPr algn="l">
+              <a:lnSpc>
+                <a:spcPct val="105000"/>
+              </a:lnSpc>
+              <a:spcAft>
+                <a:spcPts val="400"/>
+              </a:spcAft>
+            </a:pPr>
+            <a:r>
+              <a:rPr sz="1600" b="1" i="0">
+                <a:solidFill>
+                  <a:srgbClr val="6E1F2E"/>
+                </a:solidFill>
+                <a:latin typeface="Georgia"/>
+              </a:rPr>
+              <a:t>1. Construction may be low, not high.</a:t>
+            </a:r>
+          </a:p>
+        </p:txBody>
+      </p:sp>
+      <p:sp>
+        <p:nvSpPr>
+          <p:cNvPr id="10" name="TextBox 9"/>
+          <p:cNvSpPr txBox="1"/>
+          <p:nvPr/>
+        </p:nvSpPr>
+        <p:spPr>
+          <a:xfrm>
+            <a:off x="4480560" y="1490472"/>
+            <a:ext cx="4754880" cy="1325880"/>
+          </a:xfrm>
+          <a:prstGeom prst="rect">
+            <a:avLst/>
+          </a:prstGeom>
+          <a:noFill/>
+        </p:spPr>
+        <p:txBody>
+          <a:bodyPr wrap="square" lIns="45720" rIns="45720" tIns="27432" bIns="27432" anchor="t">
+            <a:spAutoFit/>
+          </a:bodyPr>
+          <a:lstStyle/>
+          <a:p>
+            <a:pPr algn="l">
+              <a:lnSpc>
+                <a:spcPct val="105000"/>
+              </a:lnSpc>
+              <a:spcAft>
+                <a:spcPts val="400"/>
+              </a:spcAft>
+            </a:pPr>
+            <a:r>
+              <a:rPr sz="1250" b="0" i="0">
+                <a:solidFill>
+                  <a:srgbClr val="1F2A44"/>
+                </a:solidFill>
+                <a:latin typeface="Calibri"/>
+              </a:rPr>
+              <a:t>Rev 3 layers B+D+E are $8.3M direct. Haugland's Class 3 base for overlapping scope is $19.2M with a $2.9M deduct ceiling. Nobody has mapped one to the other.</a:t>
+            </a:r>
+          </a:p>
+        </p:txBody>
+      </p:sp>
+      <p:sp>
+        <p:nvSpPr>
+          <p:cNvPr id="11" name="TextBox 10"/>
+          <p:cNvSpPr txBox="1"/>
+          <p:nvPr/>
+        </p:nvSpPr>
+        <p:spPr>
+          <a:xfrm>
+            <a:off x="9326880" y="1490472"/>
+            <a:ext cx="2240280" cy="1325880"/>
+          </a:xfrm>
+          <a:prstGeom prst="rect">
+            <a:avLst/>
+          </a:prstGeom>
+          <a:noFill/>
+        </p:spPr>
+        <p:txBody>
+          <a:bodyPr wrap="square" lIns="45720" rIns="45720" tIns="27432" bIns="27432" anchor="t">
+            <a:spAutoFit/>
+          </a:bodyPr>
+          <a:lstStyle/>
+          <a:p>
+            <a:pPr algn="l">
+              <a:lnSpc>
+                <a:spcPct val="105000"/>
+              </a:lnSpc>
+              <a:spcAft>
+                <a:spcPts val="400"/>
+              </a:spcAft>
+            </a:pPr>
+            <a:r>
+              <a:rPr sz="1150" b="0" i="1">
+                <a:solidFill>
+                  <a:srgbClr val="001E60"/>
+                </a:solidFill>
+                <a:latin typeface="Calibri"/>
+              </a:rPr>
+              <a:t>Settles it: a signed HEG-to-Rev 3 scope map before the PAF is drafted.</a:t>
+            </a:r>
+          </a:p>
+        </p:txBody>
+      </p:sp>
+      <p:sp>
+        <p:nvSpPr>
+          <p:cNvPr id="12" name="Rectangle 11"/>
+          <p:cNvSpPr/>
+          <p:nvPr/>
+        </p:nvSpPr>
+        <p:spPr>
+          <a:xfrm>
+            <a:off x="548640" y="2990088"/>
+            <a:ext cx="11064240" cy="1463040"/>
+          </a:xfrm>
+          <a:prstGeom prst="rect">
+            <a:avLst/>
+          </a:prstGeom>
+          <a:solidFill>
+            <a:srgbClr val="F2F4F8"/>
+          </a:solidFill>
+          <a:ln>
+            <a:noFill/>
+          </a:ln>
+          <a:effectLst/>
+        </p:spPr>
+        <p:style>
+          <a:lnRef idx="1">
+            <a:schemeClr val="accent1"/>
+          </a:lnRef>
+          <a:fillRef idx="3">
+            <a:schemeClr val="accent1"/>
+          </a:fillRef>
+          <a:effectRef idx="2">
+            <a:schemeClr val="accent1"/>
+          </a:effectRef>
+          <a:fontRef idx="minor">
+            <a:schemeClr val="lt1"/>
+          </a:fontRef>
+        </p:style>
+        <p:txBody>
+          <a:bodyPr rtlCol="0" anchor="ctr"/>
+          <a:lstStyle/>
+          <a:p>
+            <a:pPr algn="ctr"/>
+          </a:p>
+        </p:txBody>
+      </p:sp>
+      <p:sp>
+        <p:nvSpPr>
+          <p:cNvPr id="13" name="Rectangle 12"/>
+          <p:cNvSpPr/>
+          <p:nvPr/>
+        </p:nvSpPr>
+        <p:spPr>
+          <a:xfrm>
+            <a:off x="548640" y="2990088"/>
+            <a:ext cx="82296" cy="1463040"/>
+          </a:xfrm>
+          <a:prstGeom prst="rect">
+            <a:avLst/>
+          </a:prstGeom>
+          <a:solidFill>
+            <a:srgbClr val="6E1F2E"/>
+          </a:solidFill>
+          <a:ln>
+            <a:noFill/>
+          </a:ln>
+          <a:effectLst/>
+        </p:spPr>
+        <p:style>
+          <a:lnRef idx="1">
+            <a:schemeClr val="accent1"/>
+          </a:lnRef>
+          <a:fillRef idx="3">
+            <a:schemeClr val="accent1"/>
+          </a:fillRef>
+          <a:effectRef idx="2">
+            <a:schemeClr val="accent1"/>
+          </a:effectRef>
+          <a:fontRef idx="minor">
+            <a:schemeClr val="lt1"/>
+          </a:fontRef>
+        </p:style>
+        <p:txBody>
+          <a:bodyPr rtlCol="0" anchor="ctr"/>
+          <a:lstStyle/>
+          <a:p>
+            <a:pPr algn="ctr"/>
+          </a:p>
+        </p:txBody>
+      </p:sp>
+      <p:sp>
+        <p:nvSpPr>
+          <p:cNvPr id="14" name="TextBox 13"/>
+          <p:cNvSpPr txBox="1"/>
+          <p:nvPr/>
+        </p:nvSpPr>
+        <p:spPr>
+          <a:xfrm>
+            <a:off x="777240" y="3063240"/>
+            <a:ext cx="3657600" cy="1325880"/>
+          </a:xfrm>
+          <a:prstGeom prst="rect">
+            <a:avLst/>
+          </a:prstGeom>
+          <a:noFill/>
+        </p:spPr>
+        <p:txBody>
+          <a:bodyPr wrap="square" lIns="45720" rIns="45720" tIns="27432" bIns="27432" anchor="t">
+            <a:spAutoFit/>
+          </a:bodyPr>
+          <a:lstStyle/>
+          <a:p>
+            <a:pPr algn="l">
+              <a:lnSpc>
+                <a:spcPct val="105000"/>
+              </a:lnSpc>
+              <a:spcAft>
+                <a:spcPts val="400"/>
+              </a:spcAft>
+            </a:pPr>
+            <a:r>
+              <a:rPr sz="1600" b="1" i="0">
+                <a:solidFill>
+                  <a:srgbClr val="6E1F2E"/>
+                </a:solidFill>
+                <a:latin typeface="Georgia"/>
+              </a:rPr>
+              <a:t>2. Siting is binary and carries no float.</a:t>
+            </a:r>
+          </a:p>
+        </p:txBody>
+      </p:sp>
+      <p:sp>
+        <p:nvSpPr>
+          <p:cNvPr id="15" name="TextBox 14"/>
+          <p:cNvSpPr txBox="1"/>
+          <p:nvPr/>
+        </p:nvSpPr>
+        <p:spPr>
+          <a:xfrm>
+            <a:off x="4480560" y="3063240"/>
+            <a:ext cx="4754880" cy="1325880"/>
+          </a:xfrm>
+          <a:prstGeom prst="rect">
+            <a:avLst/>
+          </a:prstGeom>
+          <a:noFill/>
+        </p:spPr>
+        <p:txBody>
+          <a:bodyPr wrap="square" lIns="45720" rIns="45720" tIns="27432" bIns="27432" anchor="t">
+            <a:spAutoFit/>
+          </a:bodyPr>
+          <a:lstStyle/>
+          <a:p>
+            <a:pPr algn="l">
+              <a:lnSpc>
+                <a:spcPct val="105000"/>
+              </a:lnSpc>
+              <a:spcAft>
+                <a:spcPts val="400"/>
+              </a:spcAft>
+            </a:pPr>
+            <a:r>
+              <a:rPr sz="1250" b="0" i="0">
+                <a:solidFill>
+                  <a:srgbClr val="1F2A44"/>
+                </a:solidFill>
+                <a:latin typeface="Calibri"/>
+              </a:rPr>
+              <a:t>ZBA determination, construction start and container delivery all land in Q1 2028 for a Dec 2028 ISD. Denial means an EFSB exemption at 18-24 months. The estimate carries $250K for siting delay.</a:t>
+            </a:r>
+          </a:p>
+        </p:txBody>
+      </p:sp>
+      <p:sp>
+        <p:nvSpPr>
+          <p:cNvPr id="16" name="TextBox 15"/>
+          <p:cNvSpPr txBox="1"/>
+          <p:nvPr/>
+        </p:nvSpPr>
+        <p:spPr>
+          <a:xfrm>
+            <a:off x="9326880" y="3063240"/>
+            <a:ext cx="2240280" cy="1325880"/>
+          </a:xfrm>
+          <a:prstGeom prst="rect">
+            <a:avLst/>
+          </a:prstGeom>
+          <a:noFill/>
+        </p:spPr>
+        <p:txBody>
+          <a:bodyPr wrap="square" lIns="45720" rIns="45720" tIns="27432" bIns="27432" anchor="t">
+            <a:spAutoFit/>
+          </a:bodyPr>
+          <a:lstStyle/>
+          <a:p>
+            <a:pPr algn="l">
+              <a:lnSpc>
+                <a:spcPct val="105000"/>
+              </a:lnSpc>
+              <a:spcAft>
+                <a:spcPts val="400"/>
+              </a:spcAft>
+            </a:pPr>
+            <a:r>
+              <a:rPr sz="1150" b="0" i="1">
+                <a:solidFill>
+                  <a:srgbClr val="001E60"/>
+                </a:solidFill>
+                <a:latin typeface="Calibri"/>
+              </a:rPr>
+              <a:t>Settles it: Article 80 filing date, ZBA calendar, P6 float on the siting chain.</a:t>
+            </a:r>
+          </a:p>
+        </p:txBody>
+      </p:sp>
+      <p:sp>
+        <p:nvSpPr>
+          <p:cNvPr id="17" name="Rectangle 16"/>
+          <p:cNvSpPr/>
+          <p:nvPr/>
+        </p:nvSpPr>
+        <p:spPr>
+          <a:xfrm>
+            <a:off x="548640" y="4562856"/>
+            <a:ext cx="11064240" cy="1463040"/>
+          </a:xfrm>
+          <a:prstGeom prst="rect">
+            <a:avLst/>
+          </a:prstGeom>
+          <a:solidFill>
+            <a:srgbClr val="F2F4F8"/>
+          </a:solidFill>
+          <a:ln>
+            <a:noFill/>
+          </a:ln>
+          <a:effectLst/>
+        </p:spPr>
+        <p:style>
+          <a:lnRef idx="1">
+            <a:schemeClr val="accent1"/>
+          </a:lnRef>
+          <a:fillRef idx="3">
+            <a:schemeClr val="accent1"/>
+          </a:fillRef>
+          <a:effectRef idx="2">
+            <a:schemeClr val="accent1"/>
+          </a:effectRef>
+          <a:fontRef idx="minor">
+            <a:schemeClr val="lt1"/>
+          </a:fontRef>
+        </p:style>
+        <p:txBody>
+          <a:bodyPr rtlCol="0" anchor="ctr"/>
+          <a:lstStyle/>
+          <a:p>
+            <a:pPr algn="ctr"/>
+          </a:p>
+        </p:txBody>
+      </p:sp>
+      <p:sp>
+        <p:nvSpPr>
+          <p:cNvPr id="18" name="Rectangle 17"/>
+          <p:cNvSpPr/>
+          <p:nvPr/>
+        </p:nvSpPr>
+        <p:spPr>
+          <a:xfrm>
+            <a:off x="548640" y="4562856"/>
+            <a:ext cx="82296" cy="1463040"/>
+          </a:xfrm>
+          <a:prstGeom prst="rect">
+            <a:avLst/>
+          </a:prstGeom>
+          <a:solidFill>
+            <a:srgbClr val="6E1F2E"/>
+          </a:solidFill>
+          <a:ln>
+            <a:noFill/>
+          </a:ln>
+          <a:effectLst/>
+        </p:spPr>
+        <p:style>
+          <a:lnRef idx="1">
+            <a:schemeClr val="accent1"/>
+          </a:lnRef>
+          <a:fillRef idx="3">
+            <a:schemeClr val="accent1"/>
+          </a:fillRef>
+          <a:effectRef idx="2">
+            <a:schemeClr val="accent1"/>
+          </a:effectRef>
+          <a:fontRef idx="minor">
+            <a:schemeClr val="lt1"/>
+          </a:fontRef>
+        </p:style>
+        <p:txBody>
+          <a:bodyPr rtlCol="0" anchor="ctr"/>
+          <a:lstStyle/>
+          <a:p>
+            <a:pPr algn="ctr"/>
+          </a:p>
+        </p:txBody>
+      </p:sp>
+      <p:sp>
+        <p:nvSpPr>
+          <p:cNvPr id="19" name="TextBox 18"/>
+          <p:cNvSpPr txBox="1"/>
+          <p:nvPr/>
+        </p:nvSpPr>
+        <p:spPr>
+          <a:xfrm>
+            <a:off x="777240" y="4636008"/>
+            <a:ext cx="3657600" cy="1325880"/>
+          </a:xfrm>
+          <a:prstGeom prst="rect">
+            <a:avLst/>
+          </a:prstGeom>
+          <a:noFill/>
+        </p:spPr>
+        <p:txBody>
+          <a:bodyPr wrap="square" lIns="45720" rIns="45720" tIns="27432" bIns="27432" anchor="t">
+            <a:spAutoFit/>
+          </a:bodyPr>
+          <a:lstStyle/>
+          <a:p>
+            <a:pPr algn="l">
+              <a:lnSpc>
+                <a:spcPct val="105000"/>
+              </a:lnSpc>
+              <a:spcAft>
+                <a:spcPts val="400"/>
+              </a:spcAft>
+            </a:pPr>
+            <a:r>
+              <a:rPr sz="1600" b="1" i="0">
+                <a:solidFill>
+                  <a:srgbClr val="6E1F2E"/>
+                </a:solidFill>
+                <a:latin typeface="Georgia"/>
+              </a:rPr>
+              <a:t>3. The number is Class 4 wearing Class 3 clothes.</a:t>
+            </a:r>
+          </a:p>
+        </p:txBody>
+      </p:sp>
+      <p:sp>
+        <p:nvSpPr>
+          <p:cNvPr id="20" name="TextBox 19"/>
+          <p:cNvSpPr txBox="1"/>
+          <p:nvPr/>
+        </p:nvSpPr>
+        <p:spPr>
+          <a:xfrm>
+            <a:off x="4480560" y="4636008"/>
+            <a:ext cx="4754880" cy="1325880"/>
+          </a:xfrm>
+          <a:prstGeom prst="rect">
+            <a:avLst/>
+          </a:prstGeom>
+          <a:noFill/>
+        </p:spPr>
+        <p:txBody>
+          <a:bodyPr wrap="square" lIns="45720" rIns="45720" tIns="27432" bIns="27432" anchor="t">
+            <a:spAutoFit/>
+          </a:bodyPr>
+          <a:lstStyle/>
+          <a:p>
+            <a:pPr algn="l">
+              <a:lnSpc>
+                <a:spcPct val="105000"/>
+              </a:lnSpc>
+              <a:spcAft>
+                <a:spcPts val="400"/>
+              </a:spcAft>
+            </a:pPr>
+            <a:r>
+              <a:rPr sz="1250" b="0" i="0">
+                <a:solidFill>
+                  <a:srgbClr val="1F2A44"/>
+                </a:solidFill>
+                <a:latin typeface="Calibri"/>
+              </a:rPr>
+              <a:t>30% engineering, unit-library construction with no bid, install labor as a percentage of a 2023 total, a 2.5 ft platform placeholder. EPAC will hear $57.2M as a planning number.</a:t>
+            </a:r>
+          </a:p>
+        </p:txBody>
+      </p:sp>
+      <p:sp>
+        <p:nvSpPr>
+          <p:cNvPr id="21" name="TextBox 20"/>
+          <p:cNvSpPr txBox="1"/>
+          <p:nvPr/>
+        </p:nvSpPr>
+        <p:spPr>
+          <a:xfrm>
+            <a:off x="9326880" y="4636008"/>
+            <a:ext cx="2240280" cy="1325880"/>
+          </a:xfrm>
+          <a:prstGeom prst="rect">
+            <a:avLst/>
+          </a:prstGeom>
+          <a:noFill/>
+        </p:spPr>
+        <p:txBody>
+          <a:bodyPr wrap="square" lIns="45720" rIns="45720" tIns="27432" bIns="27432" anchor="t">
+            <a:spAutoFit/>
+          </a:bodyPr>
+          <a:lstStyle/>
+          <a:p>
+            <a:pPr algn="l">
+              <a:lnSpc>
+                <a:spcPct val="105000"/>
+              </a:lnSpc>
+              <a:spcAft>
+                <a:spcPts val="400"/>
+              </a:spcAft>
+            </a:pPr>
+            <a:r>
+              <a:rPr sz="1150" b="0" i="1">
+                <a:solidFill>
+                  <a:srgbClr val="001E60"/>
+                </a:solidFill>
+                <a:latin typeface="Calibri"/>
+              </a:rPr>
+              <a:t>Settles it: geotech, HMA, HEG map, crew build-up; then reclassify with a -15/+25% range.</a:t>
+            </a:r>
+          </a:p>
+        </p:txBody>
+      </p:sp>
+    </p:spTree>
+  </p:cSld>
+  <p:clrMapOvr>
+    <a:masterClrMapping/>
+  </p:clrMapOvr>
+</p:sld>
+</file>
+
+<file path=ppt/slides/slide17.xml><?xml version="1.0" encoding="utf-8"?>
+<p:sld xmlns:a="http://schemas.openxmlformats.org/drawingml/2006/main" xmlns:p="http://schemas.openxmlformats.org/presentationml/2006/main" xmlns:r="http://schemas.openxmlformats.org/officeDocument/2006/relationships">
+  <p:cSld>
+    <p:spTree>
+      <p:nvGrpSpPr>
+        <p:cNvPr id="1" name=""/>
+        <p:cNvGrpSpPr/>
+        <p:nvPr/>
+      </p:nvGrpSpPr>
+      <p:grpSpPr/>
+      <p:sp>
+        <p:nvSpPr>
+          <p:cNvPr id="2" name="Rectangle 1"/>
+          <p:cNvSpPr/>
+          <p:nvPr/>
+        </p:nvSpPr>
+        <p:spPr>
+          <a:xfrm>
+            <a:off x="0" y="0"/>
+            <a:ext cx="12191695" cy="6858000"/>
+          </a:xfrm>
+          <a:prstGeom prst="rect">
+            <a:avLst/>
+          </a:prstGeom>
+          <a:solidFill>
+            <a:srgbClr val="FFFFFF"/>
+          </a:solidFill>
+          <a:ln>
+            <a:noFill/>
+          </a:ln>
+          <a:effectLst/>
+        </p:spPr>
+        <p:style>
+          <a:lnRef idx="1">
+            <a:schemeClr val="accent1"/>
+          </a:lnRef>
+          <a:fillRef idx="3">
+            <a:schemeClr val="accent1"/>
+          </a:fillRef>
+          <a:effectRef idx="2">
+            <a:schemeClr val="accent1"/>
+          </a:effectRef>
+          <a:fontRef idx="minor">
+            <a:schemeClr val="lt1"/>
+          </a:fontRef>
+        </p:style>
+        <p:txBody>
+          <a:bodyPr rtlCol="0" anchor="ctr"/>
+          <a:lstStyle/>
+          <a:p>
+            <a:pPr algn="ctr"/>
+          </a:p>
+        </p:txBody>
+      </p:sp>
+      <p:sp>
+        <p:nvSpPr>
+          <p:cNvPr id="3" name="TextBox 2"/>
+          <p:cNvSpPr txBox="1"/>
+          <p:nvPr/>
+        </p:nvSpPr>
+        <p:spPr>
+          <a:xfrm>
+            <a:off x="548640" y="256032"/>
+            <a:ext cx="10058400" cy="274320"/>
+          </a:xfrm>
+          <a:prstGeom prst="rect">
+            <a:avLst/>
+          </a:prstGeom>
+          <a:noFill/>
+        </p:spPr>
+        <p:txBody>
+          <a:bodyPr wrap="square" lIns="45720" rIns="45720" tIns="27432" bIns="27432" anchor="t">
+            <a:spAutoFit/>
+          </a:bodyPr>
+          <a:lstStyle/>
+          <a:p>
+            <a:pPr algn="l">
+              <a:lnSpc>
+                <a:spcPct val="105000"/>
+              </a:lnSpc>
+              <a:spcAft>
+                <a:spcPts val="400"/>
+              </a:spcAft>
+            </a:pPr>
+            <a:r>
+              <a:rPr sz="1100" b="1" i="0">
+                <a:solidFill>
+                  <a:srgbClr val="6E1F2E"/>
+                </a:solidFill>
+                <a:latin typeface="Calibri"/>
+              </a:rPr>
+              <a:t>RED TEAM: QUANTIFIED DOWNSIDE, LOADED AT THE 1.685 STATION 360 FACTOR</a:t>
+            </a:r>
+          </a:p>
+        </p:txBody>
+      </p:sp>
+      <p:sp>
+        <p:nvSpPr>
+          <p:cNvPr id="4" name="TextBox 3"/>
+          <p:cNvSpPr txBox="1"/>
+          <p:nvPr/>
+        </p:nvSpPr>
+        <p:spPr>
+          <a:xfrm>
+            <a:off x="548640" y="475488"/>
+            <a:ext cx="11064240" cy="868680"/>
+          </a:xfrm>
+          <a:prstGeom prst="rect">
+            <a:avLst/>
+          </a:prstGeom>
+          <a:noFill/>
+        </p:spPr>
+        <p:txBody>
+          <a:bodyPr wrap="square" lIns="45720" rIns="45720" tIns="27432" bIns="27432" anchor="t">
+            <a:spAutoFit/>
+          </a:bodyPr>
+          <a:lstStyle/>
+          <a:p>
+            <a:pPr algn="l">
+              <a:lnSpc>
+                <a:spcPct val="100000"/>
+              </a:lnSpc>
+              <a:spcAft>
+                <a:spcPts val="400"/>
+              </a:spcAft>
+            </a:pPr>
+            <a:r>
+              <a:rPr sz="2300" b="1" i="0">
+                <a:solidFill>
+                  <a:srgbClr val="001E60"/>
+                </a:solidFill>
+                <a:latin typeface="Georgia"/>
+              </a:rPr>
+              <a:t>Stress tests on the package's own numbers, and what history says about small utility batteries</a:t>
+            </a:r>
+          </a:p>
+        </p:txBody>
+      </p:sp>
+      <p:sp>
+        <p:nvSpPr>
+          <p:cNvPr id="5" name="TextBox 4"/>
+          <p:cNvSpPr txBox="1"/>
+          <p:nvPr/>
+        </p:nvSpPr>
+        <p:spPr>
+          <a:xfrm>
+            <a:off x="548640" y="6419088"/>
+            <a:ext cx="8229600" cy="274320"/>
+          </a:xfrm>
+          <a:prstGeom prst="rect">
+            <a:avLst/>
+          </a:prstGeom>
+          <a:noFill/>
+        </p:spPr>
+        <p:txBody>
+          <a:bodyPr wrap="square" lIns="45720" rIns="45720" tIns="27432" bIns="27432" anchor="t">
+            <a:spAutoFit/>
+          </a:bodyPr>
+          <a:lstStyle/>
+          <a:p>
+            <a:pPr algn="l">
+              <a:lnSpc>
+                <a:spcPct val="105000"/>
+              </a:lnSpc>
+              <a:spcAft>
+                <a:spcPts val="400"/>
+              </a:spcAft>
+            </a:pPr>
+            <a:r>
+              <a:rPr sz="1000" b="0" i="0">
+                <a:solidFill>
+                  <a:srgbClr val="6B7280"/>
+                </a:solidFill>
+                <a:latin typeface="Calibri"/>
+              </a:rPr>
+              <a:t>EstimatingCoE | Eversource Energy | Stewards of Affordability</a:t>
+            </a:r>
+          </a:p>
+        </p:txBody>
+      </p:sp>
+      <p:sp>
+        <p:nvSpPr>
+          <p:cNvPr id="6" name="TextBox 5"/>
+          <p:cNvSpPr txBox="1"/>
+          <p:nvPr/>
+        </p:nvSpPr>
+        <p:spPr>
+          <a:xfrm>
+            <a:off x="10972800" y="6419088"/>
+            <a:ext cx="685800" cy="274320"/>
+          </a:xfrm>
+          <a:prstGeom prst="rect">
+            <a:avLst/>
+          </a:prstGeom>
+          <a:noFill/>
+        </p:spPr>
+        <p:txBody>
+          <a:bodyPr wrap="square" lIns="45720" rIns="45720" tIns="27432" bIns="27432" anchor="t">
+            <a:spAutoFit/>
+          </a:bodyPr>
+          <a:lstStyle/>
+          <a:p>
+            <a:pPr algn="r">
+              <a:lnSpc>
+                <a:spcPct val="105000"/>
+              </a:lnSpc>
+              <a:spcAft>
+                <a:spcPts val="400"/>
+              </a:spcAft>
+            </a:pPr>
+            <a:r>
+              <a:rPr sz="1000" b="0" i="0">
+                <a:solidFill>
+                  <a:srgbClr val="6B7280"/>
+                </a:solidFill>
+                <a:latin typeface="Calibri"/>
+              </a:rPr>
+              <a:t>17</a:t>
+            </a:r>
+          </a:p>
+        </p:txBody>
+      </p:sp>
+      <p:graphicFrame>
+        <p:nvGraphicFramePr>
+          <p:cNvPr id="7" name="Table 6"/>
+          <p:cNvGraphicFramePr>
+            <a:graphicFrameLocks noGrp="1"/>
+          </p:cNvGraphicFramePr>
+          <p:nvPr/>
+        </p:nvGraphicFramePr>
+        <p:xfrm>
+          <a:off x="548640" y="1371600"/>
+          <a:ext cx="6949440" cy="3840480"/>
+        </p:xfrm>
+        <a:graphic>
+          <a:graphicData uri="http://schemas.openxmlformats.org/drawingml/2006/table">
+            <a:tbl>
+              <a:tblPr firstRow="1" bandRow="1">
+                <a:tableStyleId>{5C22544A-7EE6-4342-B048-85BDC9FD1C3A}</a:tableStyleId>
+              </a:tblPr>
+              <a:tblGrid>
+                <a:gridCol w="3291840"/>
+                <a:gridCol w="1371600"/>
+                <a:gridCol w="914400"/>
+                <a:gridCol w="1371600"/>
+              </a:tblGrid>
+              <a:tr h="480060">
+                <a:tc>
+                  <a:txBody>
+                    <a:bodyPr/>
+                    <a:lstStyle/>
+                    <a:p>
+                      <a:r>
+                        <a:rPr sz="1100" b="1">
+                          <a:solidFill>
+                            <a:srgbClr val="FFFFFF"/>
+                          </a:solidFill>
+                          <a:latin typeface="Calibri"/>
+                        </a:rPr>
+                        <a:t>Scenario</a:t>
+                      </a:r>
+                    </a:p>
+                  </a:txBody>
+                  <a:tcPr marL="54864" marR="54864" marT="27432" marB="27432">
+                    <a:solidFill>
+                      <a:srgbClr val="001E60"/>
+                    </a:solidFill>
+                  </a:tcPr>
+                </a:tc>
+                <a:tc>
+                  <a:txBody>
+                    <a:bodyPr/>
+                    <a:lstStyle/>
+                    <a:p>
+                      <a:r>
+                        <a:rPr sz="1100" b="1">
+                          <a:solidFill>
+                            <a:srgbClr val="FFFFFF"/>
+                          </a:solidFill>
+                          <a:latin typeface="Calibri"/>
+                        </a:rPr>
+                        <a:t>Loaded cost</a:t>
+                      </a:r>
+                    </a:p>
+                  </a:txBody>
+                  <a:tcPr marL="54864" marR="54864" marT="27432" marB="27432">
+                    <a:solidFill>
+                      <a:srgbClr val="001E60"/>
+                    </a:solidFill>
+                  </a:tcPr>
+                </a:tc>
+                <a:tc>
+                  <a:txBody>
+                    <a:bodyPr/>
+                    <a:lstStyle/>
+                    <a:p>
+                      <a:r>
+                        <a:rPr sz="1100" b="1">
+                          <a:solidFill>
+                            <a:srgbClr val="FFFFFF"/>
+                          </a:solidFill>
+                          <a:latin typeface="Calibri"/>
+                        </a:rPr>
+                        <a:t>Date</a:t>
+                      </a:r>
+                    </a:p>
+                  </a:txBody>
+                  <a:tcPr marL="54864" marR="54864" marT="27432" marB="27432">
+                    <a:solidFill>
+                      <a:srgbClr val="001E60"/>
+                    </a:solidFill>
+                  </a:tcPr>
+                </a:tc>
+                <a:tc>
+                  <a:txBody>
+                    <a:bodyPr/>
+                    <a:lstStyle/>
+                    <a:p>
+                      <a:r>
+                        <a:rPr sz="1100" b="1">
+                          <a:solidFill>
+                            <a:srgbClr val="FFFFFF"/>
+                          </a:solidFill>
+                          <a:latin typeface="Calibri"/>
+                        </a:rPr>
+                        <a:t>Covered by $7.6M reserve?</a:t>
+                      </a:r>
+                    </a:p>
+                  </a:txBody>
+                  <a:tcPr marL="54864" marR="54864" marT="27432" marB="27432">
+                    <a:solidFill>
+                      <a:srgbClr val="001E60"/>
+                    </a:solidFill>
+                  </a:tcPr>
+                </a:tc>
+              </a:tr>
+              <a:tr h="480060">
+                <a:tc>
+                  <a:txBody>
+                    <a:bodyPr/>
+                    <a:lstStyle/>
+                    <a:p>
+                      <a:r>
+                        <a:rPr sz="1100" b="0">
+                          <a:solidFill>
+                            <a:srgbClr val="1F2A44"/>
+                          </a:solidFill>
+                          <a:latin typeface="Calibri"/>
+                        </a:rPr>
+                        <a:t>Construction unit costs +25% on B+D+E+G</a:t>
+                      </a:r>
+                    </a:p>
+                  </a:txBody>
+                  <a:tcPr marL="54864" marR="54864" marT="27432" marB="27432" anchor="ctr">
+                    <a:solidFill>
+                      <a:srgbClr val="FFFFFF"/>
+                    </a:solidFill>
+                  </a:tcPr>
+                </a:tc>
+                <a:tc>
+                  <a:txBody>
+                    <a:bodyPr/>
+                    <a:lstStyle/>
+                    <a:p>
+                      <a:r>
+                        <a:rPr sz="1100" b="0">
+                          <a:solidFill>
+                            <a:srgbClr val="1F2A44"/>
+                          </a:solidFill>
+                          <a:latin typeface="Calibri"/>
+                        </a:rPr>
+                        <a:t>+$4.0M</a:t>
+                      </a:r>
+                    </a:p>
+                  </a:txBody>
+                  <a:tcPr marL="54864" marR="54864" marT="27432" marB="27432" anchor="ctr">
+                    <a:solidFill>
+                      <a:srgbClr val="FFFFFF"/>
+                    </a:solidFill>
+                  </a:tcPr>
+                </a:tc>
+                <a:tc>
+                  <a:txBody>
+                    <a:bodyPr/>
+                    <a:lstStyle/>
+                    <a:p>
+                      <a:r>
+                        <a:rPr sz="1100" b="0">
+                          <a:solidFill>
+                            <a:srgbClr val="1F2A44"/>
+                          </a:solidFill>
+                          <a:latin typeface="Calibri"/>
+                        </a:rPr>
+                        <a:t>0</a:t>
+                      </a:r>
+                    </a:p>
+                  </a:txBody>
+                  <a:tcPr marL="54864" marR="54864" marT="27432" marB="27432" anchor="ctr">
+                    <a:solidFill>
+                      <a:srgbClr val="FFFFFF"/>
+                    </a:solidFill>
+                  </a:tcPr>
+                </a:tc>
+                <a:tc>
+                  <a:txBody>
+                    <a:bodyPr/>
+                    <a:lstStyle/>
+                    <a:p>
+                      <a:r>
+                        <a:rPr sz="1100" b="0">
+                          <a:solidFill>
+                            <a:srgbClr val="1F2A44"/>
+                          </a:solidFill>
+                          <a:latin typeface="Calibri"/>
+                        </a:rPr>
+                        <a:t>Yes, alone</a:t>
+                      </a:r>
+                    </a:p>
+                  </a:txBody>
+                  <a:tcPr marL="54864" marR="54864" marT="27432" marB="27432" anchor="ctr">
+                    <a:solidFill>
+                      <a:srgbClr val="FFFFFF"/>
+                    </a:solidFill>
+                  </a:tcPr>
+                </a:tc>
+              </a:tr>
+              <a:tr h="480060">
+                <a:tc>
+                  <a:txBody>
+                    <a:bodyPr/>
+                    <a:lstStyle/>
+                    <a:p>
+                      <a:r>
+                        <a:rPr sz="1100" b="0">
+                          <a:solidFill>
+                            <a:srgbClr val="1F2A44"/>
+                          </a:solidFill>
+                          <a:latin typeface="Calibri"/>
+                        </a:rPr>
+                        <a:t>HEG reconciliation at midpoint of the gap (+$5M direct)</a:t>
+                      </a:r>
+                    </a:p>
+                  </a:txBody>
+                  <a:tcPr marL="54864" marR="54864" marT="27432" marB="27432" anchor="ctr">
+                    <a:solidFill>
+                      <a:srgbClr val="F2F4F8"/>
+                    </a:solidFill>
+                  </a:tcPr>
+                </a:tc>
+                <a:tc>
+                  <a:txBody>
+                    <a:bodyPr/>
+                    <a:lstStyle/>
+                    <a:p>
+                      <a:r>
+                        <a:rPr sz="1100" b="0">
+                          <a:solidFill>
+                            <a:srgbClr val="1F2A44"/>
+                          </a:solidFill>
+                          <a:latin typeface="Calibri"/>
+                        </a:rPr>
+                        <a:t>+$8.4M</a:t>
+                      </a:r>
+                    </a:p>
+                  </a:txBody>
+                  <a:tcPr marL="54864" marR="54864" marT="27432" marB="27432" anchor="ctr">
+                    <a:solidFill>
+                      <a:srgbClr val="F2F4F8"/>
+                    </a:solidFill>
+                  </a:tcPr>
+                </a:tc>
+                <a:tc>
+                  <a:txBody>
+                    <a:bodyPr/>
+                    <a:lstStyle/>
+                    <a:p>
+                      <a:r>
+                        <a:rPr sz="1100" b="0">
+                          <a:solidFill>
+                            <a:srgbClr val="1F2A44"/>
+                          </a:solidFill>
+                          <a:latin typeface="Calibri"/>
+                        </a:rPr>
+                        <a:t>0</a:t>
+                      </a:r>
+                    </a:p>
+                  </a:txBody>
+                  <a:tcPr marL="54864" marR="54864" marT="27432" marB="27432" anchor="ctr">
+                    <a:solidFill>
+                      <a:srgbClr val="F2F4F8"/>
+                    </a:solidFill>
+                  </a:tcPr>
+                </a:tc>
+                <a:tc>
+                  <a:txBody>
+                    <a:bodyPr/>
+                    <a:lstStyle/>
+                    <a:p>
+                      <a:r>
+                        <a:rPr sz="1100" b="0">
+                          <a:solidFill>
+                            <a:srgbClr val="1F2A44"/>
+                          </a:solidFill>
+                          <a:latin typeface="Calibri"/>
+                        </a:rPr>
+                        <a:t>No</a:t>
+                      </a:r>
+                    </a:p>
+                  </a:txBody>
+                  <a:tcPr marL="54864" marR="54864" marT="27432" marB="27432" anchor="ctr">
+                    <a:solidFill>
+                      <a:srgbClr val="F2F4F8"/>
+                    </a:solidFill>
+                  </a:tcPr>
+                </a:tc>
+              </a:tr>
+              <a:tr h="480060">
+                <a:tc>
+                  <a:txBody>
+                    <a:bodyPr/>
+                    <a:lstStyle/>
+                    <a:p>
+                      <a:r>
+                        <a:rPr sz="1100" b="0">
+                          <a:solidFill>
+                            <a:srgbClr val="1F2A44"/>
+                          </a:solidFill>
+                          <a:latin typeface="Calibri"/>
+                        </a:rPr>
+                        <a:t>Schedule +12 months (siting or long-lead)</a:t>
+                      </a:r>
+                    </a:p>
+                  </a:txBody>
+                  <a:tcPr marL="54864" marR="54864" marT="27432" marB="27432" anchor="ctr">
+                    <a:solidFill>
+                      <a:srgbClr val="FFFFFF"/>
+                    </a:solidFill>
+                  </a:tcPr>
+                </a:tc>
+                <a:tc>
+                  <a:txBody>
+                    <a:bodyPr/>
+                    <a:lstStyle/>
+                    <a:p>
+                      <a:r>
+                        <a:rPr sz="1100" b="0">
+                          <a:solidFill>
+                            <a:srgbClr val="1F2A44"/>
+                          </a:solidFill>
+                          <a:latin typeface="Calibri"/>
+                        </a:rPr>
+                        <a:t>~+$5M</a:t>
+                      </a:r>
+                    </a:p>
+                  </a:txBody>
+                  <a:tcPr marL="54864" marR="54864" marT="27432" marB="27432" anchor="ctr">
+                    <a:solidFill>
+                      <a:srgbClr val="FFFFFF"/>
+                    </a:solidFill>
+                  </a:tcPr>
+                </a:tc>
+                <a:tc>
+                  <a:txBody>
+                    <a:bodyPr/>
+                    <a:lstStyle/>
+                    <a:p>
+                      <a:r>
+                        <a:rPr sz="1100" b="0">
+                          <a:solidFill>
+                            <a:srgbClr val="1F2A44"/>
+                          </a:solidFill>
+                          <a:latin typeface="Calibri"/>
+                        </a:rPr>
+                        <a:t>+12 mo</a:t>
+                      </a:r>
+                    </a:p>
+                  </a:txBody>
+                  <a:tcPr marL="54864" marR="54864" marT="27432" marB="27432" anchor="ctr">
+                    <a:solidFill>
+                      <a:srgbClr val="FFFFFF"/>
+                    </a:solidFill>
+                  </a:tcPr>
+                </a:tc>
+                <a:tc>
+                  <a:txBody>
+                    <a:bodyPr/>
+                    <a:lstStyle/>
+                    <a:p>
+                      <a:r>
+                        <a:rPr sz="1100" b="0">
+                          <a:solidFill>
+                            <a:srgbClr val="1F2A44"/>
+                          </a:solidFill>
+                          <a:latin typeface="Calibri"/>
+                        </a:rPr>
+                        <a:t>Partly</a:t>
+                      </a:r>
+                    </a:p>
+                  </a:txBody>
+                  <a:tcPr marL="54864" marR="54864" marT="27432" marB="27432" anchor="ctr">
+                    <a:solidFill>
+                      <a:srgbClr val="FFFFFF"/>
+                    </a:solidFill>
+                  </a:tcPr>
+                </a:tc>
+              </a:tr>
+              <a:tr h="480060">
+                <a:tc>
+                  <a:txBody>
+                    <a:bodyPr/>
+                    <a:lstStyle/>
+                    <a:p>
+                      <a:r>
+                        <a:rPr sz="1100" b="0">
+                          <a:solidFill>
+                            <a:srgbClr val="1F2A44"/>
+                          </a:solidFill>
+                          <a:latin typeface="Calibri"/>
+                        </a:rPr>
+                        <a:t>EFSB zoning exemption path</a:t>
+                      </a:r>
+                    </a:p>
+                  </a:txBody>
+                  <a:tcPr marL="54864" marR="54864" marT="27432" marB="27432" anchor="ctr">
+                    <a:solidFill>
+                      <a:srgbClr val="F2F4F8"/>
+                    </a:solidFill>
+                  </a:tcPr>
+                </a:tc>
+                <a:tc>
+                  <a:txBody>
+                    <a:bodyPr/>
+                    <a:lstStyle/>
+                    <a:p>
+                      <a:r>
+                        <a:rPr sz="1100" b="0">
+                          <a:solidFill>
+                            <a:srgbClr val="1F2A44"/>
+                          </a:solidFill>
+                          <a:latin typeface="Calibri"/>
+                        </a:rPr>
+                        <a:t>~+$8M to +$10M</a:t>
+                      </a:r>
+                    </a:p>
+                  </a:txBody>
+                  <a:tcPr marL="54864" marR="54864" marT="27432" marB="27432" anchor="ctr">
+                    <a:solidFill>
+                      <a:srgbClr val="F2F4F8"/>
+                    </a:solidFill>
+                  </a:tcPr>
+                </a:tc>
+                <a:tc>
+                  <a:txBody>
+                    <a:bodyPr/>
+                    <a:lstStyle/>
+                    <a:p>
+                      <a:r>
+                        <a:rPr sz="1100" b="0">
+                          <a:solidFill>
+                            <a:srgbClr val="1F2A44"/>
+                          </a:solidFill>
+                          <a:latin typeface="Calibri"/>
+                        </a:rPr>
+                        <a:t>+18-24 mo</a:t>
+                      </a:r>
+                    </a:p>
+                  </a:txBody>
+                  <a:tcPr marL="54864" marR="54864" marT="27432" marB="27432" anchor="ctr">
+                    <a:solidFill>
+                      <a:srgbClr val="F2F4F8"/>
+                    </a:solidFill>
+                  </a:tcPr>
+                </a:tc>
+                <a:tc>
+                  <a:txBody>
+                    <a:bodyPr/>
+                    <a:lstStyle/>
+                    <a:p>
+                      <a:r>
+                        <a:rPr sz="1100" b="0">
+                          <a:solidFill>
+                            <a:srgbClr val="1F2A44"/>
+                          </a:solidFill>
+                          <a:latin typeface="Calibri"/>
+                        </a:rPr>
+                        <a:t>No</a:t>
+                      </a:r>
+                    </a:p>
+                  </a:txBody>
+                  <a:tcPr marL="54864" marR="54864" marT="27432" marB="27432" anchor="ctr">
+                    <a:solidFill>
+                      <a:srgbClr val="F2F4F8"/>
+                    </a:solidFill>
+                  </a:tcPr>
+                </a:tc>
+              </a:tr>
+              <a:tr h="480060">
+                <a:tc>
+                  <a:txBody>
+                    <a:bodyPr/>
+                    <a:lstStyle/>
+                    <a:p>
+                      <a:r>
+                        <a:rPr sz="1100" b="0">
+                          <a:solidFill>
+                            <a:srgbClr val="1F2A44"/>
+                          </a:solidFill>
+                          <a:latin typeface="Calibri"/>
+                        </a:rPr>
+                        <a:t>Contractor bids +20% over estimate labor</a:t>
+                      </a:r>
+                    </a:p>
+                  </a:txBody>
+                  <a:tcPr marL="54864" marR="54864" marT="27432" marB="27432" anchor="ctr">
+                    <a:solidFill>
+                      <a:srgbClr val="FFFFFF"/>
+                    </a:solidFill>
+                  </a:tcPr>
+                </a:tc>
+                <a:tc>
+                  <a:txBody>
+                    <a:bodyPr/>
+                    <a:lstStyle/>
+                    <a:p>
+                      <a:r>
+                        <a:rPr sz="1100" b="0">
+                          <a:solidFill>
+                            <a:srgbClr val="1F2A44"/>
+                          </a:solidFill>
+                          <a:latin typeface="Calibri"/>
+                        </a:rPr>
+                        <a:t>+$2.1M</a:t>
+                      </a:r>
+                    </a:p>
+                  </a:txBody>
+                  <a:tcPr marL="54864" marR="54864" marT="27432" marB="27432" anchor="ctr">
+                    <a:solidFill>
+                      <a:srgbClr val="FFFFFF"/>
+                    </a:solidFill>
+                  </a:tcPr>
+                </a:tc>
+                <a:tc>
+                  <a:txBody>
+                    <a:bodyPr/>
+                    <a:lstStyle/>
+                    <a:p>
+                      <a:r>
+                        <a:rPr sz="1100" b="0">
+                          <a:solidFill>
+                            <a:srgbClr val="1F2A44"/>
+                          </a:solidFill>
+                          <a:latin typeface="Calibri"/>
+                        </a:rPr>
+                        <a:t>0</a:t>
+                      </a:r>
+                    </a:p>
+                  </a:txBody>
+                  <a:tcPr marL="54864" marR="54864" marT="27432" marB="27432" anchor="ctr">
+                    <a:solidFill>
+                      <a:srgbClr val="FFFFFF"/>
+                    </a:solidFill>
+                  </a:tcPr>
+                </a:tc>
+                <a:tc>
+                  <a:txBody>
+                    <a:bodyPr/>
+                    <a:lstStyle/>
+                    <a:p>
+                      <a:r>
+                        <a:rPr sz="1100" b="0">
+                          <a:solidFill>
+                            <a:srgbClr val="1F2A44"/>
+                          </a:solidFill>
+                          <a:latin typeface="Calibri"/>
+                        </a:rPr>
+                        <a:t>Yes, alone</a:t>
+                      </a:r>
+                    </a:p>
+                  </a:txBody>
+                  <a:tcPr marL="54864" marR="54864" marT="27432" marB="27432" anchor="ctr">
+                    <a:solidFill>
+                      <a:srgbClr val="FFFFFF"/>
+                    </a:solidFill>
+                  </a:tcPr>
+                </a:tc>
+              </a:tr>
+              <a:tr h="480060">
+                <a:tc>
+                  <a:txBody>
+                    <a:bodyPr/>
+                    <a:lstStyle/>
+                    <a:p>
+                      <a:r>
+                        <a:rPr sz="1100" b="0">
+                          <a:solidFill>
+                            <a:srgbClr val="1F2A44"/>
+                          </a:solidFill>
+                          <a:latin typeface="Calibri"/>
+                        </a:rPr>
+                        <a:t>Combination: HEG midpoint + 12-month slip</a:t>
+                      </a:r>
+                    </a:p>
+                  </a:txBody>
+                  <a:tcPr marL="54864" marR="54864" marT="27432" marB="27432" anchor="ctr">
+                    <a:solidFill>
+                      <a:srgbClr val="F2F4F8"/>
+                    </a:solidFill>
+                  </a:tcPr>
+                </a:tc>
+                <a:tc>
+                  <a:txBody>
+                    <a:bodyPr/>
+                    <a:lstStyle/>
+                    <a:p>
+                      <a:r>
+                        <a:rPr sz="1100" b="0">
+                          <a:solidFill>
+                            <a:srgbClr val="1F2A44"/>
+                          </a:solidFill>
+                          <a:latin typeface="Calibri"/>
+                        </a:rPr>
+                        <a:t>~+$13M (to ~$70M)</a:t>
+                      </a:r>
+                    </a:p>
+                  </a:txBody>
+                  <a:tcPr marL="54864" marR="54864" marT="27432" marB="27432" anchor="ctr">
+                    <a:solidFill>
+                      <a:srgbClr val="F2F4F8"/>
+                    </a:solidFill>
+                  </a:tcPr>
+                </a:tc>
+                <a:tc>
+                  <a:txBody>
+                    <a:bodyPr/>
+                    <a:lstStyle/>
+                    <a:p>
+                      <a:r>
+                        <a:rPr sz="1100" b="0">
+                          <a:solidFill>
+                            <a:srgbClr val="1F2A44"/>
+                          </a:solidFill>
+                          <a:latin typeface="Calibri"/>
+                        </a:rPr>
+                        <a:t>+12 mo</a:t>
+                      </a:r>
+                    </a:p>
+                  </a:txBody>
+                  <a:tcPr marL="54864" marR="54864" marT="27432" marB="27432" anchor="ctr">
+                    <a:solidFill>
+                      <a:srgbClr val="F2F4F8"/>
+                    </a:solidFill>
+                  </a:tcPr>
+                </a:tc>
+                <a:tc>
+                  <a:txBody>
+                    <a:bodyPr/>
+                    <a:lstStyle/>
+                    <a:p>
+                      <a:r>
+                        <a:rPr sz="1100" b="0">
+                          <a:solidFill>
+                            <a:srgbClr val="1F2A44"/>
+                          </a:solidFill>
+                          <a:latin typeface="Calibri"/>
+                        </a:rPr>
+                        <a:t>No</a:t>
+                      </a:r>
+                    </a:p>
+                  </a:txBody>
+                  <a:tcPr marL="54864" marR="54864" marT="27432" marB="27432" anchor="ctr">
+                    <a:solidFill>
+                      <a:srgbClr val="F2F4F8"/>
+                    </a:solidFill>
+                  </a:tcPr>
+                </a:tc>
+              </a:tr>
+              <a:tr h="480060">
+                <a:tc>
+                  <a:txBody>
+                    <a:bodyPr/>
+                    <a:lstStyle/>
+                    <a:p>
+                      <a:r>
+                        <a:rPr sz="1100" b="0">
+                          <a:solidFill>
+                            <a:srgbClr val="1F2A44"/>
+                          </a:solidFill>
+                          <a:latin typeface="Calibri"/>
+                        </a:rPr>
+                        <a:t>Battery change orders at the LD cap (10%)</a:t>
+                      </a:r>
+                    </a:p>
+                  </a:txBody>
+                  <a:tcPr marL="54864" marR="54864" marT="27432" marB="27432" anchor="ctr">
+                    <a:solidFill>
+                      <a:srgbClr val="FFFFFF"/>
+                    </a:solidFill>
+                  </a:tcPr>
+                </a:tc>
+                <a:tc>
+                  <a:txBody>
+                    <a:bodyPr/>
+                    <a:lstStyle/>
+                    <a:p>
+                      <a:r>
+                        <a:rPr sz="1100" b="0">
+                          <a:solidFill>
+                            <a:srgbClr val="1F2A44"/>
+                          </a:solidFill>
+                          <a:latin typeface="Calibri"/>
+                        </a:rPr>
+                        <a:t>+$1.2M</a:t>
+                      </a:r>
+                    </a:p>
+                  </a:txBody>
+                  <a:tcPr marL="54864" marR="54864" marT="27432" marB="27432" anchor="ctr">
+                    <a:solidFill>
+                      <a:srgbClr val="FFFFFF"/>
+                    </a:solidFill>
+                  </a:tcPr>
+                </a:tc>
+                <a:tc>
+                  <a:txBody>
+                    <a:bodyPr/>
+                    <a:lstStyle/>
+                    <a:p>
+                      <a:r>
+                        <a:rPr sz="1100" b="0">
+                          <a:solidFill>
+                            <a:srgbClr val="1F2A44"/>
+                          </a:solidFill>
+                          <a:latin typeface="Calibri"/>
+                        </a:rPr>
+                        <a:t>0</a:t>
+                      </a:r>
+                    </a:p>
+                  </a:txBody>
+                  <a:tcPr marL="54864" marR="54864" marT="27432" marB="27432" anchor="ctr">
+                    <a:solidFill>
+                      <a:srgbClr val="FFFFFF"/>
+                    </a:solidFill>
+                  </a:tcPr>
+                </a:tc>
+                <a:tc>
+                  <a:txBody>
+                    <a:bodyPr/>
+                    <a:lstStyle/>
+                    <a:p>
+                      <a:r>
+                        <a:rPr sz="1100" b="0">
+                          <a:solidFill>
+                            <a:srgbClr val="1F2A44"/>
+                          </a:solidFill>
+                          <a:latin typeface="Calibri"/>
+                        </a:rPr>
+                        <a:t>Yes</a:t>
+                      </a:r>
+                    </a:p>
+                  </a:txBody>
+                  <a:tcPr marL="54864" marR="54864" marT="27432" marB="27432" anchor="ctr">
+                    <a:solidFill>
+                      <a:srgbClr val="FFFFFF"/>
+                    </a:solidFill>
+                  </a:tcPr>
+                </a:tc>
+              </a:tr>
+            </a:tbl>
+          </a:graphicData>
+        </a:graphic>
+      </p:graphicFrame>
+      <p:sp>
+        <p:nvSpPr>
+          <p:cNvPr id="8" name="TextBox 7"/>
+          <p:cNvSpPr txBox="1"/>
+          <p:nvPr/>
+        </p:nvSpPr>
+        <p:spPr>
+          <a:xfrm>
+            <a:off x="548640" y="5303520"/>
+            <a:ext cx="6949440" cy="914400"/>
+          </a:xfrm>
+          <a:prstGeom prst="rect">
+            <a:avLst/>
+          </a:prstGeom>
+          <a:noFill/>
+        </p:spPr>
+        <p:txBody>
+          <a:bodyPr wrap="square" lIns="45720" rIns="45720" tIns="27432" bIns="27432" anchor="t">
+            <a:spAutoFit/>
+          </a:bodyPr>
+          <a:lstStyle/>
+          <a:p>
+            <a:pPr algn="l">
+              <a:lnSpc>
+                <a:spcPct val="105000"/>
+              </a:lnSpc>
+              <a:spcAft>
+                <a:spcPts val="400"/>
+              </a:spcAft>
+            </a:pPr>
+            <a:r>
+              <a:rPr sz="1050" b="0" i="0">
+                <a:solidFill>
+                  <a:srgbClr val="6B7280"/>
+                </a:solidFill>
+                <a:latin typeface="Calibri"/>
+              </a:rPr>
+              <a:t>Untestable from the package: tariff or change-in-law pass-through on the Nomad price (Exhibit C terms), the AFUDC rate (assumed ~7% on CWIP), Station 496 outage premium (1.35 to 1.70 factor on affected hours), FEOC / ITC effect on net cost.</a:t>
+            </a:r>
+          </a:p>
+        </p:txBody>
+      </p:sp>
+      <p:sp>
+        <p:nvSpPr>
+          <p:cNvPr id="9" name="TextBox 8"/>
+          <p:cNvSpPr txBox="1"/>
+          <p:nvPr/>
+        </p:nvSpPr>
+        <p:spPr>
+          <a:xfrm>
+            <a:off x="7772400" y="1371600"/>
+            <a:ext cx="3931920" cy="365760"/>
+          </a:xfrm>
+          <a:prstGeom prst="rect">
+            <a:avLst/>
+          </a:prstGeom>
+          <a:noFill/>
+        </p:spPr>
+        <p:txBody>
+          <a:bodyPr wrap="square" lIns="45720" rIns="45720" tIns="27432" bIns="27432" anchor="t">
+            <a:spAutoFit/>
+          </a:bodyPr>
+          <a:lstStyle/>
+          <a:p>
+            <a:pPr algn="l">
+              <a:lnSpc>
+                <a:spcPct val="105000"/>
+              </a:lnSpc>
+              <a:spcAft>
+                <a:spcPts val="400"/>
+              </a:spcAft>
+            </a:pPr>
+            <a:r>
+              <a:rPr sz="1500" b="1" i="0">
+                <a:solidFill>
+                  <a:srgbClr val="001E60"/>
+                </a:solidFill>
+                <a:latin typeface="Georgia"/>
+              </a:rPr>
+              <a:t>Base rate: approved to actual</a:t>
+            </a:r>
+          </a:p>
+        </p:txBody>
+      </p:sp>
+      <p:graphicFrame>
+        <p:nvGraphicFramePr>
+          <p:cNvPr id="10" name="Table 9"/>
+          <p:cNvGraphicFramePr>
+            <a:graphicFrameLocks noGrp="1"/>
+          </p:cNvGraphicFramePr>
+          <p:nvPr/>
+        </p:nvGraphicFramePr>
+        <p:xfrm>
+          <a:off x="7772400" y="1783080"/>
+          <a:ext cx="3931920" cy="2286000"/>
+        </p:xfrm>
+        <a:graphic>
+          <a:graphicData uri="http://schemas.openxmlformats.org/drawingml/2006/table">
+            <a:tbl>
+              <a:tblPr firstRow="1" bandRow="1">
+                <a:tableStyleId>{5C22544A-7EE6-4342-B048-85BDC9FD1C3A}</a:tableStyleId>
+              </a:tblPr>
+              <a:tblGrid>
+                <a:gridCol w="2743200"/>
+                <a:gridCol w="1188720"/>
+              </a:tblGrid>
+              <a:tr h="326571">
+                <a:tc>
+                  <a:txBody>
+                    <a:bodyPr/>
+                    <a:lstStyle/>
+                    <a:p>
+                      <a:r>
+                        <a:rPr sz="1100" b="1">
+                          <a:solidFill>
+                            <a:srgbClr val="FFFFFF"/>
+                          </a:solidFill>
+                          <a:latin typeface="Calibri"/>
+                        </a:rPr>
+                        <a:t>Project</a:t>
+                      </a:r>
+                    </a:p>
+                  </a:txBody>
+                  <a:tcPr marL="54864" marR="54864" marT="27432" marB="27432">
+                    <a:solidFill>
+                      <a:srgbClr val="001E60"/>
+                    </a:solidFill>
+                  </a:tcPr>
+                </a:tc>
+                <a:tc>
+                  <a:txBody>
+                    <a:bodyPr/>
+                    <a:lstStyle/>
+                    <a:p>
+                      <a:pPr algn="r"/>
+                      <a:r>
+                        <a:rPr sz="1100" b="1">
+                          <a:solidFill>
+                            <a:srgbClr val="FFFFFF"/>
+                          </a:solidFill>
+                          <a:latin typeface="Calibri"/>
+                        </a:rPr>
+                        <a:t>Uplift</a:t>
+                      </a:r>
+                    </a:p>
+                  </a:txBody>
+                  <a:tcPr marL="54864" marR="54864" marT="27432" marB="27432">
+                    <a:solidFill>
+                      <a:srgbClr val="001E60"/>
+                    </a:solidFill>
+                  </a:tcPr>
+                </a:tc>
+              </a:tr>
+              <a:tr h="326571">
+                <a:tc>
+                  <a:txBody>
+                    <a:bodyPr/>
+                    <a:lstStyle/>
+                    <a:p>
+                      <a:r>
+                        <a:rPr sz="1100" b="0">
+                          <a:solidFill>
+                            <a:srgbClr val="1F2A44"/>
+                          </a:solidFill>
+                          <a:latin typeface="Calibri"/>
+                        </a:rPr>
+                        <a:t>BGE Fairhaven 2.5 MW/9.7 MWh</a:t>
+                      </a:r>
+                    </a:p>
+                  </a:txBody>
+                  <a:tcPr marL="54864" marR="54864" marT="27432" marB="27432" anchor="ctr">
+                    <a:solidFill>
+                      <a:srgbClr val="FFFFFF"/>
+                    </a:solidFill>
+                  </a:tcPr>
+                </a:tc>
+                <a:tc>
+                  <a:txBody>
+                    <a:bodyPr/>
+                    <a:lstStyle/>
+                    <a:p>
+                      <a:pPr algn="r"/>
+                      <a:r>
+                        <a:rPr sz="1100" b="0">
+                          <a:solidFill>
+                            <a:srgbClr val="1F2A44"/>
+                          </a:solidFill>
+                          <a:latin typeface="Calibri"/>
+                        </a:rPr>
+                        <a:t>+64%</a:t>
+                      </a:r>
+                    </a:p>
+                  </a:txBody>
+                  <a:tcPr marL="54864" marR="54864" marT="27432" marB="27432" anchor="ctr">
+                    <a:solidFill>
+                      <a:srgbClr val="FFFFFF"/>
+                    </a:solidFill>
+                  </a:tcPr>
+                </a:tc>
+              </a:tr>
+              <a:tr h="326571">
+                <a:tc>
+                  <a:txBody>
+                    <a:bodyPr/>
+                    <a:lstStyle/>
+                    <a:p>
+                      <a:r>
+                        <a:rPr sz="1100" b="0">
+                          <a:solidFill>
+                            <a:srgbClr val="1F2A44"/>
+                          </a:solidFill>
+                          <a:latin typeface="Calibri"/>
+                        </a:rPr>
+                        <a:t>HECO Waena 40 MW/160 MWh</a:t>
+                      </a:r>
+                    </a:p>
+                  </a:txBody>
+                  <a:tcPr marL="54864" marR="54864" marT="27432" marB="27432" anchor="ctr">
+                    <a:solidFill>
+                      <a:srgbClr val="F2F4F8"/>
+                    </a:solidFill>
+                  </a:tcPr>
+                </a:tc>
+                <a:tc>
+                  <a:txBody>
+                    <a:bodyPr/>
+                    <a:lstStyle/>
+                    <a:p>
+                      <a:pPr algn="r"/>
+                      <a:r>
+                        <a:rPr sz="1100" b="0">
+                          <a:solidFill>
+                            <a:srgbClr val="1F2A44"/>
+                          </a:solidFill>
+                          <a:latin typeface="Calibri"/>
+                        </a:rPr>
+                        <a:t>+37%</a:t>
+                      </a:r>
+                    </a:p>
+                  </a:txBody>
+                  <a:tcPr marL="54864" marR="54864" marT="27432" marB="27432" anchor="ctr">
+                    <a:solidFill>
+                      <a:srgbClr val="F2F4F8"/>
+                    </a:solidFill>
+                  </a:tcPr>
+                </a:tc>
+              </a:tr>
+              <a:tr h="326571">
+                <a:tc>
+                  <a:txBody>
+                    <a:bodyPr/>
+                    <a:lstStyle/>
+                    <a:p>
+                      <a:r>
+                        <a:rPr sz="1100" b="0">
+                          <a:solidFill>
+                            <a:srgbClr val="1F2A44"/>
+                          </a:solidFill>
+                          <a:latin typeface="Calibri"/>
+                        </a:rPr>
+                        <a:t>SaskPower Regina 20 MW</a:t>
+                      </a:r>
+                    </a:p>
+                  </a:txBody>
+                  <a:tcPr marL="54864" marR="54864" marT="27432" marB="27432" anchor="ctr">
+                    <a:solidFill>
+                      <a:srgbClr val="FFFFFF"/>
+                    </a:solidFill>
+                  </a:tcPr>
+                </a:tc>
+                <a:tc>
+                  <a:txBody>
+                    <a:bodyPr/>
+                    <a:lstStyle/>
+                    <a:p>
+                      <a:pPr algn="r"/>
+                      <a:r>
+                        <a:rPr sz="1100" b="0">
+                          <a:solidFill>
+                            <a:srgbClr val="1F2A44"/>
+                          </a:solidFill>
+                          <a:latin typeface="Calibri"/>
+                        </a:rPr>
+                        <a:t>+31%</a:t>
+                      </a:r>
+                    </a:p>
+                  </a:txBody>
+                  <a:tcPr marL="54864" marR="54864" marT="27432" marB="27432" anchor="ctr">
+                    <a:solidFill>
+                      <a:srgbClr val="FFFFFF"/>
+                    </a:solidFill>
+                  </a:tcPr>
+                </a:tc>
+              </a:tr>
+              <a:tr h="326571">
+                <a:tc>
+                  <a:txBody>
+                    <a:bodyPr/>
+                    <a:lstStyle/>
+                    <a:p>
+                      <a:r>
+                        <a:rPr sz="1100" b="0">
+                          <a:solidFill>
+                            <a:srgbClr val="1F2A44"/>
+                          </a:solidFill>
+                          <a:latin typeface="Calibri"/>
+                        </a:rPr>
+                        <a:t>Eversource Provincetown</a:t>
+                      </a:r>
+                    </a:p>
+                  </a:txBody>
+                  <a:tcPr marL="54864" marR="54864" marT="27432" marB="27432" anchor="ctr">
+                    <a:solidFill>
+                      <a:srgbClr val="F2F4F8"/>
+                    </a:solidFill>
+                  </a:tcPr>
+                </a:tc>
+                <a:tc>
+                  <a:txBody>
+                    <a:bodyPr/>
+                    <a:lstStyle/>
+                    <a:p>
+                      <a:pPr algn="r"/>
+                      <a:r>
+                        <a:rPr sz="1100" b="0">
+                          <a:solidFill>
+                            <a:srgbClr val="1F2A44"/>
+                          </a:solidFill>
+                          <a:latin typeface="Calibri"/>
+                        </a:rPr>
+                        <a:t>+9% to +40%</a:t>
+                      </a:r>
+                    </a:p>
+                  </a:txBody>
+                  <a:tcPr marL="54864" marR="54864" marT="27432" marB="27432" anchor="ctr">
+                    <a:solidFill>
+                      <a:srgbClr val="F2F4F8"/>
+                    </a:solidFill>
+                  </a:tcPr>
+                </a:tc>
+              </a:tr>
+              <a:tr h="326571">
+                <a:tc>
+                  <a:txBody>
+                    <a:bodyPr/>
+                    <a:lstStyle/>
+                    <a:p>
+                      <a:r>
+                        <a:rPr sz="1100" b="0">
+                          <a:solidFill>
+                            <a:srgbClr val="1F2A44"/>
+                          </a:solidFill>
+                          <a:latin typeface="Calibri"/>
+                        </a:rPr>
+                        <a:t>Hyde Park, Dec 2023 to Sep 2026</a:t>
+                      </a:r>
+                    </a:p>
+                  </a:txBody>
+                  <a:tcPr marL="54864" marR="54864" marT="27432" marB="27432" anchor="ctr">
+                    <a:solidFill>
+                      <a:srgbClr val="FFFFFF"/>
+                    </a:solidFill>
+                  </a:tcPr>
+                </a:tc>
+                <a:tc>
+                  <a:txBody>
+                    <a:bodyPr/>
+                    <a:lstStyle/>
+                    <a:p>
+                      <a:pPr algn="r"/>
+                      <a:r>
+                        <a:rPr sz="1100" b="0">
+                          <a:solidFill>
+                            <a:srgbClr val="1F2A44"/>
+                          </a:solidFill>
+                          <a:latin typeface="Calibri"/>
+                        </a:rPr>
+                        <a:t>+30%</a:t>
+                      </a:r>
+                    </a:p>
+                  </a:txBody>
+                  <a:tcPr marL="54864" marR="54864" marT="27432" marB="27432" anchor="ctr">
+                    <a:solidFill>
+                      <a:srgbClr val="FFFFFF"/>
+                    </a:solidFill>
+                  </a:tcPr>
+                </a:tc>
+              </a:tr>
+              <a:tr h="326574">
+                <a:tc>
+                  <a:txBody>
+                    <a:bodyPr/>
+                    <a:lstStyle/>
+                    <a:p>
+                      <a:r>
+                        <a:rPr sz="1100" b="0">
+                          <a:solidFill>
+                            <a:srgbClr val="1F2A44"/>
+                          </a:solidFill>
+                          <a:latin typeface="Calibri"/>
+                        </a:rPr>
+                        <a:t>Hyde Park, Rev 0 to Rev 3 (5 wks)</a:t>
+                      </a:r>
+                    </a:p>
+                  </a:txBody>
+                  <a:tcPr marL="54864" marR="54864" marT="27432" marB="27432" anchor="ctr">
+                    <a:solidFill>
+                      <a:srgbClr val="F2F4F8"/>
+                    </a:solidFill>
+                  </a:tcPr>
+                </a:tc>
+                <a:tc>
+                  <a:txBody>
+                    <a:bodyPr/>
+                    <a:lstStyle/>
+                    <a:p>
+                      <a:pPr algn="r"/>
+                      <a:r>
+                        <a:rPr sz="1100" b="0">
+                          <a:solidFill>
+                            <a:srgbClr val="1F2A44"/>
+                          </a:solidFill>
+                          <a:latin typeface="Calibri"/>
+                        </a:rPr>
+                        <a:t>+21%</a:t>
+                      </a:r>
+                    </a:p>
+                  </a:txBody>
+                  <a:tcPr marL="54864" marR="54864" marT="27432" marB="27432" anchor="ctr">
+                    <a:solidFill>
+                      <a:srgbClr val="F2F4F8"/>
+                    </a:solidFill>
+                  </a:tcPr>
+                </a:tc>
+              </a:tr>
+            </a:tbl>
+          </a:graphicData>
+        </a:graphic>
+      </p:graphicFrame>
+      <p:sp>
+        <p:nvSpPr>
+          <p:cNvPr id="11" name="TextBox 10"/>
+          <p:cNvSpPr txBox="1"/>
+          <p:nvPr/>
+        </p:nvSpPr>
+        <p:spPr>
+          <a:xfrm>
+            <a:off x="7772400" y="4206240"/>
+            <a:ext cx="3931920" cy="2103120"/>
+          </a:xfrm>
+          <a:prstGeom prst="rect">
+            <a:avLst/>
+          </a:prstGeom>
+          <a:noFill/>
+        </p:spPr>
+        <p:txBody>
+          <a:bodyPr wrap="square" lIns="45720" rIns="45720" tIns="27432" bIns="27432" anchor="t">
+            <a:spAutoFit/>
+          </a:bodyPr>
+          <a:lstStyle/>
+          <a:p>
+            <a:pPr algn="l">
+              <a:lnSpc>
+                <a:spcPct val="105000"/>
+              </a:lnSpc>
+              <a:spcAft>
+                <a:spcPts val="400"/>
+              </a:spcAft>
+            </a:pPr>
+            <a:r>
+              <a:rPr sz="1150" b="0" i="0">
+                <a:solidFill>
+                  <a:srgbClr val="1F2A44"/>
+                </a:solidFill>
+                <a:latin typeface="Calibri"/>
+              </a:rPr>
+              <a:t>Rev 3 carries 17.9% risk plus contingency. The exception case for beating the base rate rests on three anchors: a fixed battery price, a Siemens price on the skids, and Haugland engaged pre-construction. Together they cover about a third of the cost. The other two thirds have no such anchor.</a:t>
+            </a:r>
+          </a:p>
+        </p:txBody>
+      </p:sp>
+    </p:spTree>
+  </p:cSld>
+  <p:clrMapOvr>
+    <a:masterClrMapping/>
+  </p:clrMapOvr>
+</p:sld>
+</file>
+
+<file path=ppt/slides/slide18.xml><?xml version="1.0" encoding="utf-8"?>
+<p:sld xmlns:a="http://schemas.openxmlformats.org/drawingml/2006/main" xmlns:p="http://schemas.openxmlformats.org/presentationml/2006/main" xmlns:r="http://schemas.openxmlformats.org/officeDocument/2006/relationships">
+  <p:cSld>
+    <p:spTree>
+      <p:nvGrpSpPr>
+        <p:cNvPr id="1" name=""/>
+        <p:cNvGrpSpPr/>
+        <p:nvPr/>
+      </p:nvGrpSpPr>
+      <p:grpSpPr/>
+      <p:sp>
+        <p:nvSpPr>
+          <p:cNvPr id="2" name="Rectangle 1"/>
+          <p:cNvSpPr/>
+          <p:nvPr/>
+        </p:nvSpPr>
+        <p:spPr>
+          <a:xfrm>
+            <a:off x="0" y="0"/>
+            <a:ext cx="12191695" cy="6858000"/>
+          </a:xfrm>
+          <a:prstGeom prst="rect">
+            <a:avLst/>
+          </a:prstGeom>
+          <a:solidFill>
+            <a:srgbClr val="FFFFFF"/>
+          </a:solidFill>
+          <a:ln>
+            <a:noFill/>
+          </a:ln>
+          <a:effectLst/>
+        </p:spPr>
+        <p:style>
+          <a:lnRef idx="1">
+            <a:schemeClr val="accent1"/>
+          </a:lnRef>
+          <a:fillRef idx="3">
+            <a:schemeClr val="accent1"/>
+          </a:fillRef>
+          <a:effectRef idx="2">
+            <a:schemeClr val="accent1"/>
+          </a:effectRef>
+          <a:fontRef idx="minor">
+            <a:schemeClr val="lt1"/>
+          </a:fontRef>
+        </p:style>
+        <p:txBody>
+          <a:bodyPr rtlCol="0" anchor="ctr"/>
+          <a:lstStyle/>
+          <a:p>
+            <a:pPr algn="ctr"/>
+          </a:p>
+        </p:txBody>
+      </p:sp>
+      <p:sp>
+        <p:nvSpPr>
+          <p:cNvPr id="3" name="TextBox 2"/>
+          <p:cNvSpPr txBox="1"/>
+          <p:nvPr/>
+        </p:nvSpPr>
+        <p:spPr>
+          <a:xfrm>
+            <a:off x="548640" y="256032"/>
+            <a:ext cx="10058400" cy="274320"/>
+          </a:xfrm>
+          <a:prstGeom prst="rect">
+            <a:avLst/>
+          </a:prstGeom>
+          <a:noFill/>
+        </p:spPr>
+        <p:txBody>
+          <a:bodyPr wrap="square" lIns="45720" rIns="45720" tIns="27432" bIns="27432" anchor="t">
+            <a:spAutoFit/>
+          </a:bodyPr>
+          <a:lstStyle/>
+          <a:p>
+            <a:pPr algn="l">
+              <a:lnSpc>
+                <a:spcPct val="105000"/>
+              </a:lnSpc>
+              <a:spcAft>
+                <a:spcPts val="400"/>
+              </a:spcAft>
+            </a:pPr>
+            <a:r>
+              <a:rPr sz="1100" b="1" i="0">
+                <a:solidFill>
+                  <a:srgbClr val="6E1F2E"/>
+                </a:solidFill>
+                <a:latin typeface="Calibri"/>
+              </a:rPr>
+              <a:t>RED TEAM: FAILURE NARRATIVE AND THE EARLY-WARNING INDICATORS THAT WOULD HAVE CAUGHT IT</a:t>
+            </a:r>
+          </a:p>
+        </p:txBody>
+      </p:sp>
+      <p:sp>
+        <p:nvSpPr>
+          <p:cNvPr id="4" name="TextBox 3"/>
+          <p:cNvSpPr txBox="1"/>
+          <p:nvPr/>
+        </p:nvSpPr>
+        <p:spPr>
+          <a:xfrm>
+            <a:off x="548640" y="475488"/>
+            <a:ext cx="11064240" cy="868680"/>
+          </a:xfrm>
+          <a:prstGeom prst="rect">
+            <a:avLst/>
+          </a:prstGeom>
+          <a:noFill/>
+        </p:spPr>
+        <p:txBody>
+          <a:bodyPr wrap="square" lIns="45720" rIns="45720" tIns="27432" bIns="27432" anchor="t">
+            <a:spAutoFit/>
+          </a:bodyPr>
+          <a:lstStyle/>
+          <a:p>
+            <a:pPr algn="l">
+              <a:lnSpc>
+                <a:spcPct val="100000"/>
+              </a:lnSpc>
+              <a:spcAft>
+                <a:spcPts val="400"/>
+              </a:spcAft>
+            </a:pPr>
+            <a:r>
+              <a:rPr sz="2300" b="1" i="0">
+                <a:solidFill>
+                  <a:srgbClr val="001E60"/>
+                </a:solidFill>
+                <a:latin typeface="Georgia"/>
+              </a:rPr>
+              <a:t>Pre-mortem: it is June 2031, the project finished at $74M and fifteen months late. What happened?</a:t>
+            </a:r>
+          </a:p>
+        </p:txBody>
+      </p:sp>
+      <p:sp>
+        <p:nvSpPr>
+          <p:cNvPr id="5" name="TextBox 4"/>
+          <p:cNvSpPr txBox="1"/>
+          <p:nvPr/>
+        </p:nvSpPr>
+        <p:spPr>
+          <a:xfrm>
+            <a:off x="548640" y="6419088"/>
+            <a:ext cx="8229600" cy="274320"/>
+          </a:xfrm>
+          <a:prstGeom prst="rect">
+            <a:avLst/>
+          </a:prstGeom>
+          <a:noFill/>
+        </p:spPr>
+        <p:txBody>
+          <a:bodyPr wrap="square" lIns="45720" rIns="45720" tIns="27432" bIns="27432" anchor="t">
+            <a:spAutoFit/>
+          </a:bodyPr>
+          <a:lstStyle/>
+          <a:p>
+            <a:pPr algn="l">
+              <a:lnSpc>
+                <a:spcPct val="105000"/>
+              </a:lnSpc>
+              <a:spcAft>
+                <a:spcPts val="400"/>
+              </a:spcAft>
+            </a:pPr>
+            <a:r>
+              <a:rPr sz="1000" b="0" i="0">
+                <a:solidFill>
+                  <a:srgbClr val="6B7280"/>
+                </a:solidFill>
+                <a:latin typeface="Calibri"/>
+              </a:rPr>
+              <a:t>EstimatingCoE | Eversource Energy | Stewards of Affordability</a:t>
+            </a:r>
+          </a:p>
+        </p:txBody>
+      </p:sp>
+      <p:sp>
+        <p:nvSpPr>
+          <p:cNvPr id="6" name="TextBox 5"/>
+          <p:cNvSpPr txBox="1"/>
+          <p:nvPr/>
+        </p:nvSpPr>
+        <p:spPr>
+          <a:xfrm>
+            <a:off x="10972800" y="6419088"/>
+            <a:ext cx="685800" cy="274320"/>
+          </a:xfrm>
+          <a:prstGeom prst="rect">
+            <a:avLst/>
+          </a:prstGeom>
+          <a:noFill/>
+        </p:spPr>
+        <p:txBody>
+          <a:bodyPr wrap="square" lIns="45720" rIns="45720" tIns="27432" bIns="27432" anchor="t">
+            <a:spAutoFit/>
+          </a:bodyPr>
+          <a:lstStyle/>
+          <a:p>
+            <a:pPr algn="r">
+              <a:lnSpc>
+                <a:spcPct val="105000"/>
+              </a:lnSpc>
+              <a:spcAft>
+                <a:spcPts val="400"/>
+              </a:spcAft>
+            </a:pPr>
+            <a:r>
+              <a:rPr sz="1000" b="0" i="0">
+                <a:solidFill>
+                  <a:srgbClr val="6B7280"/>
+                </a:solidFill>
+                <a:latin typeface="Calibri"/>
+              </a:rPr>
+              <a:t>18</a:t>
+            </a:r>
+          </a:p>
+        </p:txBody>
+      </p:sp>
+      <p:sp>
+        <p:nvSpPr>
+          <p:cNvPr id="7" name="Rectangle 6"/>
+          <p:cNvSpPr/>
+          <p:nvPr/>
+        </p:nvSpPr>
+        <p:spPr>
+          <a:xfrm>
+            <a:off x="548640" y="1371600"/>
+            <a:ext cx="5760720" cy="4846320"/>
+          </a:xfrm>
+          <a:prstGeom prst="rect">
+            <a:avLst/>
+          </a:prstGeom>
+          <a:solidFill>
+            <a:srgbClr val="F2F4F8"/>
+          </a:solidFill>
+          <a:ln>
+            <a:noFill/>
+          </a:ln>
+          <a:effectLst/>
+        </p:spPr>
+        <p:style>
+          <a:lnRef idx="1">
+            <a:schemeClr val="accent1"/>
+          </a:lnRef>
+          <a:fillRef idx="3">
+            <a:schemeClr val="accent1"/>
+          </a:fillRef>
+          <a:effectRef idx="2">
+            <a:schemeClr val="accent1"/>
+          </a:effectRef>
+          <a:fontRef idx="minor">
+            <a:schemeClr val="lt1"/>
+          </a:fontRef>
+        </p:style>
+        <p:txBody>
+          <a:bodyPr rtlCol="0" anchor="ctr"/>
+          <a:lstStyle/>
+          <a:p>
+            <a:pPr algn="ctr"/>
+          </a:p>
+        </p:txBody>
+      </p:sp>
+      <p:sp>
+        <p:nvSpPr>
+          <p:cNvPr id="8" name="TextBox 7"/>
+          <p:cNvSpPr txBox="1"/>
+          <p:nvPr/>
+        </p:nvSpPr>
+        <p:spPr>
+          <a:xfrm>
+            <a:off x="731520" y="1463040"/>
+            <a:ext cx="5394960" cy="4663440"/>
+          </a:xfrm>
+          <a:prstGeom prst="rect">
+            <a:avLst/>
+          </a:prstGeom>
+          <a:noFill/>
+        </p:spPr>
+        <p:txBody>
+          <a:bodyPr wrap="square" lIns="45720" rIns="45720" tIns="27432" bIns="27432" anchor="t">
+            <a:spAutoFit/>
+          </a:bodyPr>
+          <a:lstStyle/>
+          <a:p>
+            <a:pPr algn="l">
+              <a:lnSpc>
+                <a:spcPct val="105000"/>
+              </a:lnSpc>
+              <a:spcAft>
+                <a:spcPts val="400"/>
+              </a:spcAft>
+            </a:pPr>
+            <a:r>
+              <a:rPr sz="1250" b="0" i="1">
+                <a:solidFill>
+                  <a:srgbClr val="1F2A44"/>
+                </a:solidFill>
+                <a:latin typeface="Calibri"/>
+              </a:rPr>
+              <a:t>The ZBA hearing in late 2027 drew the abutters who had raised open-land and traffic concerns since 2024; approval was conditioned on a redesigned screening plan and a smaller footprint, which sent the civil package back through Haugland in the winter of 2028. Borings, finally drilled in spring 2027, found debris deeper than the 2014 closure set showed, and the platform went from 2.5 ft of fill to a piled solution; the HEG reconciliation that had never been done was done as a change order. Nomad's twelve containers arrived on schedule in January 2028 and sat in a rented yard for nine months with the support clock running. Station 496 cutovers needed night outage windows priced at straight time. AFUDC alone added $4M. The full-funding PAF said Conceptual, -25/+50%. Everyone remembered $57M.</a:t>
+            </a:r>
+          </a:p>
+        </p:txBody>
+      </p:sp>
+      <p:sp>
+        <p:nvSpPr>
+          <p:cNvPr id="9" name="TextBox 8"/>
+          <p:cNvSpPr txBox="1"/>
+          <p:nvPr/>
+        </p:nvSpPr>
+        <p:spPr>
+          <a:xfrm>
+            <a:off x="6583680" y="1371600"/>
+            <a:ext cx="5120640" cy="365760"/>
+          </a:xfrm>
+          <a:prstGeom prst="rect">
+            <a:avLst/>
+          </a:prstGeom>
+          <a:noFill/>
+        </p:spPr>
+        <p:txBody>
+          <a:bodyPr wrap="square" lIns="45720" rIns="45720" tIns="27432" bIns="27432" anchor="t">
+            <a:spAutoFit/>
+          </a:bodyPr>
+          <a:lstStyle/>
+          <a:p>
+            <a:pPr algn="l">
+              <a:lnSpc>
+                <a:spcPct val="105000"/>
+              </a:lnSpc>
+              <a:spcAft>
+                <a:spcPts val="400"/>
+              </a:spcAft>
+            </a:pPr>
+            <a:r>
+              <a:rPr sz="1500" b="1" i="0">
+                <a:solidFill>
+                  <a:srgbClr val="001E60"/>
+                </a:solidFill>
+                <a:latin typeface="Georgia"/>
+              </a:rPr>
+              <a:t>Early-warning indicators</a:t>
+            </a:r>
+          </a:p>
+        </p:txBody>
+      </p:sp>
+      <p:graphicFrame>
+        <p:nvGraphicFramePr>
+          <p:cNvPr id="10" name="Table 9"/>
+          <p:cNvGraphicFramePr>
+            <a:graphicFrameLocks noGrp="1"/>
+          </p:cNvGraphicFramePr>
+          <p:nvPr/>
+        </p:nvGraphicFramePr>
+        <p:xfrm>
+          <a:off x="6583680" y="1783080"/>
+          <a:ext cx="5120640" cy="4480560"/>
+        </p:xfrm>
+        <a:graphic>
+          <a:graphicData uri="http://schemas.openxmlformats.org/drawingml/2006/table">
+            <a:tbl>
+              <a:tblPr firstRow="1" bandRow="1">
+                <a:tableStyleId>{5C22544A-7EE6-4342-B048-85BDC9FD1C3A}</a:tableStyleId>
+              </a:tblPr>
+              <a:tblGrid>
+                <a:gridCol w="3108960"/>
+                <a:gridCol w="2011680"/>
+              </a:tblGrid>
+              <a:tr h="746760">
+                <a:tc>
+                  <a:txBody>
+                    <a:bodyPr/>
+                    <a:lstStyle/>
+                    <a:p>
+                      <a:r>
+                        <a:rPr sz="1100" b="1">
+                          <a:solidFill>
+                            <a:srgbClr val="FFFFFF"/>
+                          </a:solidFill>
+                          <a:latin typeface="Calibri"/>
+                        </a:rPr>
+                        <a:t>Indicator</a:t>
+                      </a:r>
+                    </a:p>
+                  </a:txBody>
+                  <a:tcPr marL="54864" marR="54864" marT="27432" marB="27432">
+                    <a:solidFill>
+                      <a:srgbClr val="001E60"/>
+                    </a:solidFill>
+                  </a:tcPr>
+                </a:tc>
+                <a:tc>
+                  <a:txBody>
+                    <a:bodyPr/>
+                    <a:lstStyle/>
+                    <a:p>
+                      <a:r>
+                        <a:rPr sz="1100" b="1">
+                          <a:solidFill>
+                            <a:srgbClr val="FFFFFF"/>
+                          </a:solidFill>
+                          <a:latin typeface="Calibri"/>
+                        </a:rPr>
+                        <a:t>Caught today?</a:t>
+                      </a:r>
+                    </a:p>
+                  </a:txBody>
+                  <a:tcPr marL="54864" marR="54864" marT="27432" marB="27432">
+                    <a:solidFill>
+                      <a:srgbClr val="001E60"/>
+                    </a:solidFill>
+                  </a:tcPr>
+                </a:tc>
+              </a:tr>
+              <a:tr h="746760">
+                <a:tc>
+                  <a:txBody>
+                    <a:bodyPr/>
+                    <a:lstStyle/>
+                    <a:p>
+                      <a:r>
+                        <a:rPr sz="1100" b="0">
+                          <a:solidFill>
+                            <a:srgbClr val="1F2A44"/>
+                          </a:solidFill>
+                          <a:latin typeface="Calibri"/>
+                        </a:rPr>
+                        <a:t>Geotech report not issued by IFC-civil design freeze (mid-2027)</a:t>
+                      </a:r>
+                    </a:p>
+                  </a:txBody>
+                  <a:tcPr marL="54864" marR="54864" marT="27432" marB="27432" anchor="ctr">
+                    <a:solidFill>
+                      <a:srgbClr val="FFFFFF"/>
+                    </a:solidFill>
+                  </a:tcPr>
+                </a:tc>
+                <a:tc>
+                  <a:txBody>
+                    <a:bodyPr/>
+                    <a:lstStyle/>
+                    <a:p>
+                      <a:r>
+                        <a:rPr sz="1100" b="0">
+                          <a:solidFill>
+                            <a:srgbClr val="1F2A44"/>
+                          </a:solidFill>
+                          <a:latin typeface="Calibri"/>
+                        </a:rPr>
+                        <a:t>No: no P6 gate ties IFC to it</a:t>
+                      </a:r>
+                    </a:p>
+                  </a:txBody>
+                  <a:tcPr marL="54864" marR="54864" marT="27432" marB="27432" anchor="ctr">
+                    <a:solidFill>
+                      <a:srgbClr val="FFFFFF"/>
+                    </a:solidFill>
+                  </a:tcPr>
+                </a:tc>
+              </a:tr>
+              <a:tr h="746760">
+                <a:tc>
+                  <a:txBody>
+                    <a:bodyPr/>
+                    <a:lstStyle/>
+                    <a:p>
+                      <a:r>
+                        <a:rPr sz="1100" b="0">
+                          <a:solidFill>
+                            <a:srgbClr val="1F2A44"/>
+                          </a:solidFill>
+                          <a:latin typeface="Calibri"/>
+                        </a:rPr>
+                        <a:t>ZBA hearing date not set within 90 days of Article 80 filing</a:t>
+                      </a:r>
+                    </a:p>
+                  </a:txBody>
+                  <a:tcPr marL="54864" marR="54864" marT="27432" marB="27432" anchor="ctr">
+                    <a:solidFill>
+                      <a:srgbClr val="F2F4F8"/>
+                    </a:solidFill>
+                  </a:tcPr>
+                </a:tc>
+                <a:tc>
+                  <a:txBody>
+                    <a:bodyPr/>
+                    <a:lstStyle/>
+                    <a:p>
+                      <a:r>
+                        <a:rPr sz="1100" b="0">
+                          <a:solidFill>
+                            <a:srgbClr val="1F2A44"/>
+                          </a:solidFill>
+                          <a:latin typeface="Calibri"/>
+                        </a:rPr>
+                        <a:t>No: siting carries hours, not milestones</a:t>
+                      </a:r>
+                    </a:p>
+                  </a:txBody>
+                  <a:tcPr marL="54864" marR="54864" marT="27432" marB="27432" anchor="ctr">
+                    <a:solidFill>
+                      <a:srgbClr val="F2F4F8"/>
+                    </a:solidFill>
+                  </a:tcPr>
+                </a:tc>
+              </a:tr>
+              <a:tr h="746760">
+                <a:tc>
+                  <a:txBody>
+                    <a:bodyPr/>
+                    <a:lstStyle/>
+                    <a:p>
+                      <a:r>
+                        <a:rPr sz="1100" b="0">
+                          <a:solidFill>
+                            <a:srgbClr val="1F2A44"/>
+                          </a:solidFill>
+                          <a:latin typeface="Calibri"/>
+                        </a:rPr>
+                        <a:t>HEG reconciliation not closed before the PAF is drafted (Nov 2026)</a:t>
+                      </a:r>
+                    </a:p>
+                  </a:txBody>
+                  <a:tcPr marL="54864" marR="54864" marT="27432" marB="27432" anchor="ctr">
+                    <a:solidFill>
+                      <a:srgbClr val="FFFFFF"/>
+                    </a:solidFill>
+                  </a:tcPr>
+                </a:tc>
+                <a:tc>
+                  <a:txBody>
+                    <a:bodyPr/>
+                    <a:lstStyle/>
+                    <a:p>
+                      <a:r>
+                        <a:rPr sz="1100" b="0">
+                          <a:solidFill>
+                            <a:srgbClr val="1F2A44"/>
+                          </a:solidFill>
+                          <a:latin typeface="Calibri"/>
+                        </a:rPr>
+                        <a:t>Only if the CoE makes it a precondition</a:t>
+                      </a:r>
+                    </a:p>
+                  </a:txBody>
+                  <a:tcPr marL="54864" marR="54864" marT="27432" marB="27432" anchor="ctr">
+                    <a:solidFill>
+                      <a:srgbClr val="FFFFFF"/>
+                    </a:solidFill>
+                  </a:tcPr>
+                </a:tc>
+              </a:tr>
+              <a:tr h="746760">
+                <a:tc>
+                  <a:txBody>
+                    <a:bodyPr/>
+                    <a:lstStyle/>
+                    <a:p>
+                      <a:r>
+                        <a:rPr sz="1100" b="0">
+                          <a:solidFill>
+                            <a:srgbClr val="1F2A44"/>
+                          </a:solidFill>
+                          <a:latin typeface="Calibri"/>
+                        </a:rPr>
+                        <a:t>Nomad final-drawings milestone (13 Jul 2026) slipped</a:t>
+                      </a:r>
+                    </a:p>
+                  </a:txBody>
+                  <a:tcPr marL="54864" marR="54864" marT="27432" marB="27432" anchor="ctr">
+                    <a:solidFill>
+                      <a:srgbClr val="F2F4F8"/>
+                    </a:solidFill>
+                  </a:tcPr>
+                </a:tc>
+                <a:tc>
+                  <a:txBody>
+                    <a:bodyPr/>
+                    <a:lstStyle/>
+                    <a:p>
+                      <a:r>
+                        <a:rPr sz="1100" b="0">
+                          <a:solidFill>
+                            <a:srgbClr val="1F2A44"/>
+                          </a:solidFill>
+                          <a:latin typeface="Calibri"/>
+                        </a:rPr>
+                        <a:t>Partly: payments tracked, not downstream effect on GSU spec and civil</a:t>
+                      </a:r>
+                    </a:p>
+                  </a:txBody>
+                  <a:tcPr marL="54864" marR="54864" marT="27432" marB="27432" anchor="ctr">
+                    <a:solidFill>
+                      <a:srgbClr val="F2F4F8"/>
+                    </a:solidFill>
+                  </a:tcPr>
+                </a:tc>
+              </a:tr>
+              <a:tr h="746760">
+                <a:tc>
+                  <a:txBody>
+                    <a:bodyPr/>
+                    <a:lstStyle/>
+                    <a:p>
+                      <a:r>
+                        <a:rPr sz="1100" b="0">
+                          <a:solidFill>
+                            <a:srgbClr val="1F2A44"/>
+                          </a:solidFill>
+                          <a:latin typeface="Calibri"/>
+                        </a:rPr>
+                        <a:t>Station 496 outage plan not issued before construction pricing</a:t>
+                      </a:r>
+                    </a:p>
+                  </a:txBody>
+                  <a:tcPr marL="54864" marR="54864" marT="27432" marB="27432" anchor="ctr">
+                    <a:solidFill>
+                      <a:srgbClr val="FFFFFF"/>
+                    </a:solidFill>
+                  </a:tcPr>
+                </a:tc>
+                <a:tc>
+                  <a:txBody>
+                    <a:bodyPr/>
+                    <a:lstStyle/>
+                    <a:p>
+                      <a:r>
+                        <a:rPr sz="1100" b="0">
+                          <a:solidFill>
+                            <a:srgbClr val="1F2A44"/>
+                          </a:solidFill>
+                          <a:latin typeface="Calibri"/>
+                        </a:rPr>
+                        <a:t>No</a:t>
+                      </a:r>
+                    </a:p>
+                  </a:txBody>
+                  <a:tcPr marL="54864" marR="54864" marT="27432" marB="27432" anchor="ctr">
+                    <a:solidFill>
+                      <a:srgbClr val="FFFFFF"/>
+                    </a:solidFill>
+                  </a:tcPr>
+                </a:tc>
+              </a:tr>
+            </a:tbl>
+          </a:graphicData>
+        </a:graphic>
+      </p:graphicFrame>
+    </p:spTree>
+  </p:cSld>
+  <p:clrMapOvr>
+    <a:masterClrMapping/>
+  </p:clrMapOvr>
+</p:sld>
+</file>
+
+<file path=ppt/slides/slide19.xml><?xml version="1.0" encoding="utf-8"?>
 <p:sld xmlns:a="http://schemas.openxmlformats.org/drawingml/2006/main" xmlns:p="http://schemas.openxmlformats.org/presentationml/2006/main" xmlns:r="http://schemas.openxmlformats.org/officeDocument/2006/relationships">
   <p:cSld>
     <p:spTree>
@@ -11893,7 +15277,7 @@
                 </a:solidFill>
                 <a:latin typeface="Calibri"/>
               </a:rPr>
-              <a:t>Open-item register. </a:t>
+              <a:t>Red team and open-item register. </a:t>
             </a:r>
             <a:r>
               <a:rPr sz="1450">
@@ -11902,7 +15286,7 @@
                 </a:solidFill>
                 <a:latin typeface="Calibri"/>
               </a:rPr>
-              <a:t>Eight reconciliations with owners and dollars, led by the Haugland Class 3 reconciliation and the $1.13M escalation decision.</a:t>
+              <a:t>Three kill shots, seven stress tests, a pre-mortem with five early-warning indicators, and ten reconciliations with owners and dollars.</a:t>
             </a:r>
           </a:p>
         </p:txBody>
@@ -12067,7 +15451,7 @@
                 </a:solidFill>
                 <a:latin typeface="Calibri"/>
               </a:rPr>
-              <a:t>Direct the Haugland-to-Rev 3 reconciliation before the full-funding PAF is drafted.</a:t>
+              <a:t>Make the Haugland-to-Rev 3 reconciliation a precondition of the full-funding PAF; it is the one item that can move the base by more than the reserve.</a:t>
             </a:r>
           </a:p>
           <a:p>
@@ -12095,7 +15479,7 @@
                 </a:solidFill>
                 <a:latin typeface="Calibri"/>
               </a:rPr>
-              <a:t>Decide the escalation treatment on the fixed-price battery balance.</a:t>
+              <a:t>Present November at its real maturity (Class 4, -25/+50%) unless geotech, HMA and the HEG map close first.</a:t>
             </a:r>
           </a:p>
           <a:p>
@@ -12123,7 +15507,7 @@
                 </a:solidFill>
                 <a:latin typeface="Calibri"/>
               </a:rPr>
-              <a:t>Fund the geotechnical investigation and the NFPA 855 hazard mitigation analysis now; both gate $1M of deducts and $3.5M of exposure.</a:t>
+              <a:t>Put a float target on the siting chain and assign owners to the five early-warning indicators.</a:t>
             </a:r>
           </a:p>
           <a:p>
@@ -12151,7 +15535,7 @@
                 </a:solidFill>
                 <a:latin typeface="Calibri"/>
               </a:rPr>
-              <a:t>Retire the $43.9M placeholder in the PAF narrative.</a:t>
+              <a:t>Decide the escalation treatment on the fixed-price battery balance; retire the $43.9M placeholder.</a:t>
             </a:r>
           </a:p>
         </p:txBody>
@@ -12206,7 +15590,7 @@
 </p:sld>
 </file>
 
-<file path=ppt/slides/slide17.xml><?xml version="1.0" encoding="utf-8"?>
+<file path=ppt/slides/slide2.xml><?xml version="1.0" encoding="utf-8"?>
 <p:sld xmlns:a="http://schemas.openxmlformats.org/drawingml/2006/main" xmlns:p="http://schemas.openxmlformats.org/presentationml/2006/main" xmlns:r="http://schemas.openxmlformats.org/officeDocument/2006/relationships">
   <p:cSld>
     <p:spTree>
@@ -12297,7 +15681,7 @@
                 </a:solidFill>
                 <a:latin typeface="Calibri"/>
               </a:rPr>
-              <a:t>APPENDIX A. REFERENCE CLASS (PUBLIC DISCLOSURES, NOMINAL $/KWH)</a:t>
+              <a:t>THE PROMISE</a:t>
             </a:r>
           </a:p>
         </p:txBody>
@@ -12339,7 +15723,7 @@
                 </a:solidFill>
                 <a:latin typeface="Georgia"/>
               </a:rPr>
-              <a:t>Thirteen utility-owned projects at or below 100 MWh: where Hyde Park sits</a:t>
+              <a:t>By the end of this deck you can answer one question in one breath</a:t>
             </a:r>
           </a:p>
         </p:txBody>
@@ -12423,45 +15807,21 @@
                 </a:solidFill>
                 <a:latin typeface="Calibri"/>
               </a:rPr>
-              <a:t>16</a:t>
-            </a:r>
-          </a:p>
-        </p:txBody>
-      </p:sp>
-      <p:pic>
-        <p:nvPicPr>
-          <p:cNvPr id="7" name="Picture 6" descr="stats_refclass.png"/>
-          <p:cNvPicPr>
-            <a:picLocks noChangeAspect="1"/>
-          </p:cNvPicPr>
+              <a:t>2</a:t>
+            </a:r>
+          </a:p>
+        </p:txBody>
+      </p:sp>
+      <p:sp>
+        <p:nvSpPr>
+          <p:cNvPr id="7" name="TextBox 6"/>
+          <p:cNvSpPr txBox="1"/>
           <p:nvPr/>
-        </p:nvPicPr>
-        <p:blipFill>
-          <a:blip r:embed="rId2"/>
-          <a:stretch>
-            <a:fillRect/>
-          </a:stretch>
-        </p:blipFill>
+        </p:nvSpPr>
         <p:spPr>
           <a:xfrm>
-            <a:off x="457200" y="1417320"/>
-            <a:ext cx="7223760" cy="2471286"/>
-          </a:xfrm>
-          <a:prstGeom prst="rect">
-            <a:avLst/>
-          </a:prstGeom>
-        </p:spPr>
-      </p:pic>
-      <p:sp>
-        <p:nvSpPr>
-          <p:cNvPr id="8" name="TextBox 7"/>
-          <p:cNvSpPr txBox="1"/>
-          <p:nvPr/>
-        </p:nvSpPr>
-        <p:spPr>
-          <a:xfrm>
-            <a:off x="7863840" y="1417320"/>
-            <a:ext cx="3840480" cy="4846320"/>
+            <a:off x="548640" y="1417320"/>
+            <a:ext cx="10972800" cy="640080"/>
           </a:xfrm>
           <a:prstGeom prst="rect">
             <a:avLst/>
@@ -12469,193 +15829,588 @@
           <a:noFill/>
         </p:spPr>
         <p:txBody>
-          <a:bodyPr wrap="square" lIns="45720">
+          <a:bodyPr wrap="square" lIns="45720" rIns="45720" tIns="27432" bIns="27432" anchor="t">
             <a:spAutoFit/>
           </a:bodyPr>
           <a:lstStyle/>
           <a:p>
-            <a:pPr>
+            <a:pPr algn="l">
               <a:lnSpc>
                 <a:spcPct val="105000"/>
               </a:lnSpc>
               <a:spcAft>
-                <a:spcPts val="600"/>
+                <a:spcPts val="400"/>
               </a:spcAft>
             </a:pPr>
             <a:r>
-              <a:rPr sz="1250">
-                <a:solidFill>
-                  <a:srgbClr val="FFC72C"/>
+              <a:rPr sz="1900" b="0" i="0">
+                <a:solidFill>
+                  <a:srgbClr val="1F2A44"/>
                 </a:solidFill>
                 <a:latin typeface="Calibri"/>
               </a:rPr>
-              <a:t>▪  </a:t>
-            </a:r>
-            <a:r>
-              <a:rPr b="1" sz="1250">
-                <a:solidFill>
-                  <a:srgbClr val="1F2A44"/>
-                </a:solidFill>
-                <a:latin typeface="Calibri"/>
-              </a:rPr>
-              <a:t>Median </a:t>
-            </a:r>
-            <a:r>
-              <a:rPr sz="1250">
-                <a:solidFill>
-                  <a:srgbClr val="1F2A44"/>
-                </a:solidFill>
-                <a:latin typeface="Calibri"/>
-              </a:rPr>
-              <a:t>$1,235/kWh; interquartile $750 to $1,289.</a:t>
-            </a:r>
-          </a:p>
-          <a:p>
-            <a:pPr>
+              <a:t>“Why is a $12 million battery a $57 million project?”  Because the battery is the only part a vendor prices. The station, the site, the feeder protection, the siting case, the risk and the cost of money are ours.</a:t>
+            </a:r>
+          </a:p>
+        </p:txBody>
+      </p:sp>
+      <p:sp>
+        <p:nvSpPr>
+          <p:cNvPr id="8" name="Rectangle 7"/>
+          <p:cNvSpPr/>
+          <p:nvPr/>
+        </p:nvSpPr>
+        <p:spPr>
+          <a:xfrm>
+            <a:off x="548640" y="2468880"/>
+            <a:ext cx="3566160" cy="2194560"/>
+          </a:xfrm>
+          <a:prstGeom prst="rect">
+            <a:avLst/>
+          </a:prstGeom>
+          <a:solidFill>
+            <a:srgbClr val="F2F4F8"/>
+          </a:solidFill>
+          <a:ln>
+            <a:noFill/>
+          </a:ln>
+          <a:effectLst/>
+        </p:spPr>
+        <p:style>
+          <a:lnRef idx="1">
+            <a:schemeClr val="accent1"/>
+          </a:lnRef>
+          <a:fillRef idx="3">
+            <a:schemeClr val="accent1"/>
+          </a:fillRef>
+          <a:effectRef idx="2">
+            <a:schemeClr val="accent1"/>
+          </a:effectRef>
+          <a:fontRef idx="minor">
+            <a:schemeClr val="lt1"/>
+          </a:fontRef>
+        </p:style>
+        <p:txBody>
+          <a:bodyPr rtlCol="0" anchor="ctr"/>
+          <a:lstStyle/>
+          <a:p>
+            <a:pPr algn="ctr"/>
+          </a:p>
+        </p:txBody>
+      </p:sp>
+      <p:sp>
+        <p:nvSpPr>
+          <p:cNvPr id="9" name="TextBox 8"/>
+          <p:cNvSpPr txBox="1"/>
+          <p:nvPr/>
+        </p:nvSpPr>
+        <p:spPr>
+          <a:xfrm>
+            <a:off x="685800" y="2578608"/>
+            <a:ext cx="3291840" cy="822960"/>
+          </a:xfrm>
+          <a:prstGeom prst="rect">
+            <a:avLst/>
+          </a:prstGeom>
+          <a:noFill/>
+        </p:spPr>
+        <p:txBody>
+          <a:bodyPr wrap="square" lIns="45720" rIns="45720" tIns="27432" bIns="27432" anchor="t">
+            <a:spAutoFit/>
+          </a:bodyPr>
+          <a:lstStyle/>
+          <a:p>
+            <a:pPr algn="l">
               <a:lnSpc>
                 <a:spcPct val="105000"/>
               </a:lnSpc>
               <a:spcAft>
-                <a:spcPts val="600"/>
+                <a:spcPts val="400"/>
               </a:spcAft>
             </a:pPr>
             <a:r>
-              <a:rPr sz="1250">
-                <a:solidFill>
-                  <a:srgbClr val="FFC72C"/>
-                </a:solidFill>
-                <a:latin typeface="Calibri"/>
-              </a:rPr>
-              <a:t>▪  </a:t>
-            </a:r>
-            <a:r>
-              <a:rPr b="1" sz="1250">
-                <a:solidFill>
-                  <a:srgbClr val="1F2A44"/>
-                </a:solidFill>
-                <a:latin typeface="Calibri"/>
-              </a:rPr>
-              <a:t>Hyde Park battery installed, $833: </a:t>
-            </a:r>
-            <a:r>
-              <a:rPr sz="1250">
-                <a:solidFill>
-                  <a:srgbClr val="1F2A44"/>
-                </a:solidFill>
-                <a:latin typeface="Calibri"/>
-              </a:rPr>
-              <a:t>38% percentile.</a:t>
-            </a:r>
-          </a:p>
-          <a:p>
-            <a:pPr>
+              <a:rPr sz="4000" b="1" i="0">
+                <a:solidFill>
+                  <a:srgbClr val="001E60"/>
+                </a:solidFill>
+                <a:latin typeface="Georgia"/>
+              </a:rPr>
+              <a:t>$12.1M</a:t>
+            </a:r>
+          </a:p>
+        </p:txBody>
+      </p:sp>
+      <p:sp>
+        <p:nvSpPr>
+          <p:cNvPr id="10" name="TextBox 9"/>
+          <p:cNvSpPr txBox="1"/>
+          <p:nvPr/>
+        </p:nvSpPr>
+        <p:spPr>
+          <a:xfrm>
+            <a:off x="685800" y="3264408"/>
+            <a:ext cx="3291840" cy="457200"/>
+          </a:xfrm>
+          <a:prstGeom prst="rect">
+            <a:avLst/>
+          </a:prstGeom>
+          <a:noFill/>
+        </p:spPr>
+        <p:txBody>
+          <a:bodyPr wrap="square" lIns="45720" rIns="45720" tIns="27432" bIns="27432" anchor="t">
+            <a:spAutoFit/>
+          </a:bodyPr>
+          <a:lstStyle/>
+          <a:p>
+            <a:pPr algn="l">
               <a:lnSpc>
                 <a:spcPct val="105000"/>
               </a:lnSpc>
               <a:spcAft>
-                <a:spcPts val="600"/>
+                <a:spcPts val="400"/>
               </a:spcAft>
             </a:pPr>
             <a:r>
-              <a:rPr sz="1250">
-                <a:solidFill>
-                  <a:srgbClr val="FFC72C"/>
+              <a:rPr sz="1500" b="1" i="0">
+                <a:solidFill>
+                  <a:srgbClr val="1F2A44"/>
                 </a:solidFill>
                 <a:latin typeface="Calibri"/>
               </a:rPr>
-              <a:t>▪  </a:t>
-            </a:r>
-            <a:r>
-              <a:rPr b="1" sz="1250">
-                <a:solidFill>
-                  <a:srgbClr val="1F2A44"/>
+              <a:t>Vendor fixed-price contract</a:t>
+            </a:r>
+          </a:p>
+        </p:txBody>
+      </p:sp>
+      <p:sp>
+        <p:nvSpPr>
+          <p:cNvPr id="11" name="TextBox 10"/>
+          <p:cNvSpPr txBox="1"/>
+          <p:nvPr/>
+        </p:nvSpPr>
+        <p:spPr>
+          <a:xfrm>
+            <a:off x="685800" y="3648456"/>
+            <a:ext cx="3291840" cy="969263"/>
+          </a:xfrm>
+          <a:prstGeom prst="rect">
+            <a:avLst/>
+          </a:prstGeom>
+          <a:noFill/>
+        </p:spPr>
+        <p:txBody>
+          <a:bodyPr wrap="square" lIns="45720" rIns="45720" tIns="27432" bIns="27432" anchor="t">
+            <a:spAutoFit/>
+          </a:bodyPr>
+          <a:lstStyle/>
+          <a:p>
+            <a:pPr algn="l">
+              <a:lnSpc>
+                <a:spcPct val="100000"/>
+              </a:lnSpc>
+              <a:spcAft>
+                <a:spcPts val="400"/>
+              </a:spcAft>
+            </a:pPr>
+            <a:r>
+              <a:rPr sz="1250" b="0" i="0">
+                <a:solidFill>
+                  <a:srgbClr val="6B7280"/>
                 </a:solidFill>
                 <a:latin typeface="Calibri"/>
               </a:rPr>
-              <a:t>Station complete, direct, $1,483: </a:t>
-            </a:r>
-            <a:r>
-              <a:rPr sz="1250">
-                <a:solidFill>
-                  <a:srgbClr val="1F2A44"/>
-                </a:solidFill>
-                <a:latin typeface="Calibri"/>
-              </a:rPr>
-              <a:t>77% percentile, beside Fairhaven ($1,659 actual, 2023), Chateaugay ($1,490, 2023) and Provincetown ($1,289, 2022).</a:t>
-            </a:r>
-          </a:p>
-          <a:p>
-            <a:pPr>
+              <a:t>Nomad cover agreement, 10 Mar 2026. 12 Voyager LFP units, PCS, BMS, fire protection, 10-yr warranty. $605/kWh, $1,211/kW.</a:t>
+            </a:r>
+          </a:p>
+        </p:txBody>
+      </p:sp>
+      <p:sp>
+        <p:nvSpPr>
+          <p:cNvPr id="12" name="Rectangle 11"/>
+          <p:cNvSpPr/>
+          <p:nvPr/>
+        </p:nvSpPr>
+        <p:spPr>
+          <a:xfrm>
+            <a:off x="4315968" y="2468880"/>
+            <a:ext cx="3566160" cy="2194560"/>
+          </a:xfrm>
+          <a:prstGeom prst="rect">
+            <a:avLst/>
+          </a:prstGeom>
+          <a:solidFill>
+            <a:srgbClr val="F2F4F8"/>
+          </a:solidFill>
+          <a:ln>
+            <a:noFill/>
+          </a:ln>
+          <a:effectLst/>
+        </p:spPr>
+        <p:style>
+          <a:lnRef idx="1">
+            <a:schemeClr val="accent1"/>
+          </a:lnRef>
+          <a:fillRef idx="3">
+            <a:schemeClr val="accent1"/>
+          </a:fillRef>
+          <a:effectRef idx="2">
+            <a:schemeClr val="accent1"/>
+          </a:effectRef>
+          <a:fontRef idx="minor">
+            <a:schemeClr val="lt1"/>
+          </a:fontRef>
+        </p:style>
+        <p:txBody>
+          <a:bodyPr rtlCol="0" anchor="ctr"/>
+          <a:lstStyle/>
+          <a:p>
+            <a:pPr algn="ctr"/>
+          </a:p>
+        </p:txBody>
+      </p:sp>
+      <p:sp>
+        <p:nvSpPr>
+          <p:cNvPr id="13" name="TextBox 12"/>
+          <p:cNvSpPr txBox="1"/>
+          <p:nvPr/>
+        </p:nvSpPr>
+        <p:spPr>
+          <a:xfrm>
+            <a:off x="4453128" y="2578608"/>
+            <a:ext cx="3291840" cy="822960"/>
+          </a:xfrm>
+          <a:prstGeom prst="rect">
+            <a:avLst/>
+          </a:prstGeom>
+          <a:noFill/>
+        </p:spPr>
+        <p:txBody>
+          <a:bodyPr wrap="square" lIns="45720" rIns="45720" tIns="27432" bIns="27432" anchor="t">
+            <a:spAutoFit/>
+          </a:bodyPr>
+          <a:lstStyle/>
+          <a:p>
+            <a:pPr algn="l">
               <a:lnSpc>
                 <a:spcPct val="105000"/>
               </a:lnSpc>
               <a:spcAft>
-                <a:spcPts val="600"/>
+                <a:spcPts val="400"/>
               </a:spcAft>
             </a:pPr>
             <a:r>
-              <a:rPr sz="1250">
-                <a:solidFill>
-                  <a:srgbClr val="FFC72C"/>
-                </a:solidFill>
-                <a:latin typeface="Calibri"/>
-              </a:rPr>
-              <a:t>▪  </a:t>
-            </a:r>
-            <a:r>
-              <a:rPr b="1" sz="1250">
-                <a:solidFill>
-                  <a:srgbClr val="1F2A44"/>
-                </a:solidFill>
-                <a:latin typeface="Calibri"/>
-              </a:rPr>
-              <a:t>Approval level, $2,862: </a:t>
-            </a:r>
-            <a:r>
-              <a:rPr sz="1250">
-                <a:solidFill>
-                  <a:srgbClr val="1F2A44"/>
-                </a:solidFill>
-                <a:latin typeface="Calibri"/>
-              </a:rPr>
-              <a:t>above every member. The loaders ($23.7M) and the two interconnection scopes are what the comparables do not carry.</a:t>
-            </a:r>
-          </a:p>
-          <a:p>
-            <a:pPr>
+              <a:rPr sz="4000" b="1" i="0">
+                <a:solidFill>
+                  <a:srgbClr val="6E1F2E"/>
+                </a:solidFill>
+                <a:latin typeface="Georgia"/>
+              </a:rPr>
+              <a:t>$57.2M</a:t>
+            </a:r>
+          </a:p>
+        </p:txBody>
+      </p:sp>
+      <p:sp>
+        <p:nvSpPr>
+          <p:cNvPr id="14" name="TextBox 13"/>
+          <p:cNvSpPr txBox="1"/>
+          <p:nvPr/>
+        </p:nvSpPr>
+        <p:spPr>
+          <a:xfrm>
+            <a:off x="4453128" y="3264408"/>
+            <a:ext cx="3291840" cy="457200"/>
+          </a:xfrm>
+          <a:prstGeom prst="rect">
+            <a:avLst/>
+          </a:prstGeom>
+          <a:noFill/>
+        </p:spPr>
+        <p:txBody>
+          <a:bodyPr wrap="square" lIns="45720" rIns="45720" tIns="27432" bIns="27432" anchor="t">
+            <a:spAutoFit/>
+          </a:bodyPr>
+          <a:lstStyle/>
+          <a:p>
+            <a:pPr algn="l">
               <a:lnSpc>
                 <a:spcPct val="105000"/>
               </a:lnSpc>
               <a:spcAft>
-                <a:spcPts val="600"/>
+                <a:spcPts val="400"/>
               </a:spcAft>
             </a:pPr>
             <a:r>
-              <a:rPr sz="1250">
-                <a:solidFill>
-                  <a:srgbClr val="FFC72C"/>
+              <a:rPr sz="1500" b="1" i="0">
+                <a:solidFill>
+                  <a:srgbClr val="1F2A44"/>
                 </a:solidFill>
                 <a:latin typeface="Calibri"/>
               </a:rPr>
-              <a:t>▪  </a:t>
-            </a:r>
-            <a:r>
-              <a:rPr b="1" sz="1250">
+              <a:t>Project 21334 approval level</a:t>
+            </a:r>
+          </a:p>
+        </p:txBody>
+      </p:sp>
+      <p:sp>
+        <p:nvSpPr>
+          <p:cNvPr id="15" name="TextBox 14"/>
+          <p:cNvSpPr txBox="1"/>
+          <p:nvPr/>
+        </p:nvSpPr>
+        <p:spPr>
+          <a:xfrm>
+            <a:off x="4453128" y="3648456"/>
+            <a:ext cx="3291840" cy="969263"/>
+          </a:xfrm>
+          <a:prstGeom prst="rect">
+            <a:avLst/>
+          </a:prstGeom>
+          <a:noFill/>
+        </p:spPr>
+        <p:txBody>
+          <a:bodyPr wrap="square" lIns="45720" rIns="45720" tIns="27432" bIns="27432" anchor="t">
+            <a:spAutoFit/>
+          </a:bodyPr>
+          <a:lstStyle/>
+          <a:p>
+            <a:pPr algn="l">
+              <a:lnSpc>
+                <a:spcPct val="100000"/>
+              </a:lnSpc>
+              <a:spcAft>
+                <a:spcPts val="400"/>
+              </a:spcAft>
+            </a:pPr>
+            <a:r>
+              <a:rPr sz="1250" b="0" i="0">
+                <a:solidFill>
+                  <a:srgbClr val="6B7280"/>
+                </a:solidFill>
+                <a:latin typeface="Calibri"/>
+              </a:rPr>
+              <a:t>ESF Total Rev 3. Station 360 $50.0M plus Station 496 protection $7.3M. $2,862/kWh, $5,725/kW. Conceptual, -25%/+50%.</a:t>
+            </a:r>
+          </a:p>
+        </p:txBody>
+      </p:sp>
+      <p:sp>
+        <p:nvSpPr>
+          <p:cNvPr id="16" name="Rectangle 15"/>
+          <p:cNvSpPr/>
+          <p:nvPr/>
+        </p:nvSpPr>
+        <p:spPr>
+          <a:xfrm>
+            <a:off x="8083296" y="2468880"/>
+            <a:ext cx="3566160" cy="2194560"/>
+          </a:xfrm>
+          <a:prstGeom prst="rect">
+            <a:avLst/>
+          </a:prstGeom>
+          <a:solidFill>
+            <a:srgbClr val="F2F4F8"/>
+          </a:solidFill>
+          <a:ln>
+            <a:noFill/>
+          </a:ln>
+          <a:effectLst/>
+        </p:spPr>
+        <p:style>
+          <a:lnRef idx="1">
+            <a:schemeClr val="accent1"/>
+          </a:lnRef>
+          <a:fillRef idx="3">
+            <a:schemeClr val="accent1"/>
+          </a:fillRef>
+          <a:effectRef idx="2">
+            <a:schemeClr val="accent1"/>
+          </a:effectRef>
+          <a:fontRef idx="minor">
+            <a:schemeClr val="lt1"/>
+          </a:fontRef>
+        </p:style>
+        <p:txBody>
+          <a:bodyPr rtlCol="0" anchor="ctr"/>
+          <a:lstStyle/>
+          <a:p>
+            <a:pPr algn="ctr"/>
+          </a:p>
+        </p:txBody>
+      </p:sp>
+      <p:sp>
+        <p:nvSpPr>
+          <p:cNvPr id="17" name="TextBox 16"/>
+          <p:cNvSpPr txBox="1"/>
+          <p:nvPr/>
+        </p:nvSpPr>
+        <p:spPr>
+          <a:xfrm>
+            <a:off x="8220456" y="2578608"/>
+            <a:ext cx="3291840" cy="822960"/>
+          </a:xfrm>
+          <a:prstGeom prst="rect">
+            <a:avLst/>
+          </a:prstGeom>
+          <a:noFill/>
+        </p:spPr>
+        <p:txBody>
+          <a:bodyPr wrap="square" lIns="45720" rIns="45720" tIns="27432" bIns="27432" anchor="t">
+            <a:spAutoFit/>
+          </a:bodyPr>
+          <a:lstStyle/>
+          <a:p>
+            <a:pPr algn="l">
+              <a:lnSpc>
+                <a:spcPct val="105000"/>
+              </a:lnSpc>
+              <a:spcAft>
+                <a:spcPts val="400"/>
+              </a:spcAft>
+            </a:pPr>
+            <a:r>
+              <a:rPr sz="4000" b="1" i="0">
+                <a:solidFill>
+                  <a:srgbClr val="001E60"/>
+                </a:solidFill>
+                <a:latin typeface="Georgia"/>
+              </a:rPr>
+              <a:t>21%</a:t>
+            </a:r>
+          </a:p>
+        </p:txBody>
+      </p:sp>
+      <p:sp>
+        <p:nvSpPr>
+          <p:cNvPr id="18" name="TextBox 17"/>
+          <p:cNvSpPr txBox="1"/>
+          <p:nvPr/>
+        </p:nvSpPr>
+        <p:spPr>
+          <a:xfrm>
+            <a:off x="8220456" y="3264408"/>
+            <a:ext cx="3291840" cy="457200"/>
+          </a:xfrm>
+          <a:prstGeom prst="rect">
+            <a:avLst/>
+          </a:prstGeom>
+          <a:noFill/>
+        </p:spPr>
+        <p:txBody>
+          <a:bodyPr wrap="square" lIns="45720" rIns="45720" tIns="27432" bIns="27432" anchor="t">
+            <a:spAutoFit/>
+          </a:bodyPr>
+          <a:lstStyle/>
+          <a:p>
+            <a:pPr algn="l">
+              <a:lnSpc>
+                <a:spcPct val="105000"/>
+              </a:lnSpc>
+              <a:spcAft>
+                <a:spcPts val="400"/>
+              </a:spcAft>
+            </a:pPr>
+            <a:r>
+              <a:rPr sz="1500" b="1" i="0">
                 <a:solidFill>
                   <a:srgbClr val="1F2A44"/>
                 </a:solidFill>
                 <a:latin typeface="Calibri"/>
               </a:rPr>
-              <a:t>Caveat: </a:t>
-            </a:r>
-            <a:r>
-              <a:rPr sz="1250">
+              <a:t>Battery share of the total</a:t>
+            </a:r>
+          </a:p>
+        </p:txBody>
+      </p:sp>
+      <p:sp>
+        <p:nvSpPr>
+          <p:cNvPr id="19" name="TextBox 18"/>
+          <p:cNvSpPr txBox="1"/>
+          <p:nvPr/>
+        </p:nvSpPr>
+        <p:spPr>
+          <a:xfrm>
+            <a:off x="8220456" y="3648456"/>
+            <a:ext cx="3291840" cy="969263"/>
+          </a:xfrm>
+          <a:prstGeom prst="rect">
+            <a:avLst/>
+          </a:prstGeom>
+          <a:noFill/>
+        </p:spPr>
+        <p:txBody>
+          <a:bodyPr wrap="square" lIns="45720" rIns="45720" tIns="27432" bIns="27432" anchor="t">
+            <a:spAutoFit/>
+          </a:bodyPr>
+          <a:lstStyle/>
+          <a:p>
+            <a:pPr algn="l">
+              <a:lnSpc>
+                <a:spcPct val="100000"/>
+              </a:lnSpc>
+              <a:spcAft>
+                <a:spcPts val="400"/>
+              </a:spcAft>
+            </a:pPr>
+            <a:r>
+              <a:rPr sz="1250" b="0" i="0">
+                <a:solidFill>
+                  <a:srgbClr val="6B7280"/>
+                </a:solidFill>
+                <a:latin typeface="Calibri"/>
+              </a:rPr>
+              <a:t>Add the D-Line circuit extension (24211, $4.8M conceptual) and the share drops to 20%. Four dollars of every five are not the battery.</a:t>
+            </a:r>
+          </a:p>
+        </p:txBody>
+      </p:sp>
+      <p:sp>
+        <p:nvSpPr>
+          <p:cNvPr id="20" name="TextBox 19"/>
+          <p:cNvSpPr txBox="1"/>
+          <p:nvPr/>
+        </p:nvSpPr>
+        <p:spPr>
+          <a:xfrm>
+            <a:off x="548640" y="4937760"/>
+            <a:ext cx="11064240" cy="1280160"/>
+          </a:xfrm>
+          <a:prstGeom prst="rect">
+            <a:avLst/>
+          </a:prstGeom>
+          <a:noFill/>
+        </p:spPr>
+        <p:txBody>
+          <a:bodyPr wrap="square" lIns="45720" rIns="45720" tIns="27432" bIns="27432" anchor="t">
+            <a:spAutoFit/>
+          </a:bodyPr>
+          <a:lstStyle/>
+          <a:p>
+            <a:pPr algn="l">
+              <a:lnSpc>
+                <a:spcPct val="105000"/>
+              </a:lnSpc>
+              <a:spcAft>
+                <a:spcPts val="400"/>
+              </a:spcAft>
+            </a:pPr>
+            <a:r>
+              <a:rPr sz="1600" b="1" i="0">
+                <a:solidFill>
+                  <a:srgbClr val="001E60"/>
+                </a:solidFill>
+                <a:latin typeface="Calibri"/>
+              </a:rPr>
+              <a:t>What this deck contributes: </a:t>
+            </a:r>
+            <a:r>
+              <a:rPr sz="1600" b="0" i="0">
                 <a:solidFill>
                   <a:srgbClr val="1F2A44"/>
                 </a:solidFill>
                 <a:latin typeface="Calibri"/>
               </a:rPr>
-              <a:t>figures retrieved from search excerpts of regulator and utility documents; verify at source before external use.</a:t>
+              <a:t>a line-by-line extraction of the Rev 3 estimate into thirteen cost layers, unit costs at every boundary a benchmark could be quoted at, the cost history from the 2021 IFR to today, and the reconciliations that must close before full funding.</a:t>
             </a:r>
           </a:p>
         </p:txBody>
@@ -12668,7 +16423,7 @@
 </p:sld>
 </file>
 
-<file path=ppt/slides/slide18.xml><?xml version="1.0" encoding="utf-8"?>
+<file path=ppt/slides/slide20.xml><?xml version="1.0" encoding="utf-8"?>
 <p:sld xmlns:a="http://schemas.openxmlformats.org/drawingml/2006/main" xmlns:p="http://schemas.openxmlformats.org/presentationml/2006/main" xmlns:r="http://schemas.openxmlformats.org/officeDocument/2006/relationships">
   <p:cSld>
     <p:spTree>
@@ -12759,7 +16514,7 @@
                 </a:solidFill>
                 <a:latin typeface="Calibri"/>
               </a:rPr>
-              <a:t>APPENDIX B. REGRESSION ON 26 PUBLIC PROJECTS</a:t>
+              <a:t>APPENDIX A. REFERENCE CLASS (PUBLIC DISCLOSURES, NOMINAL $/KWH)</a:t>
             </a:r>
           </a:p>
         </p:txBody>
@@ -12801,7 +16556,7 @@
                 </a:solidFill>
                 <a:latin typeface="Georgia"/>
               </a:rPr>
-              <a:t>Size and duration explain two thirds of the spread in public costs; Hyde Park's direct cost is high-normal</a:t>
+              <a:t>Thirteen utility-owned projects at or below 100 MWh: where Hyde Park sits</a:t>
             </a:r>
           </a:p>
         </p:txBody>
@@ -12885,7 +16640,469 @@
                 </a:solidFill>
                 <a:latin typeface="Calibri"/>
               </a:rPr>
-              <a:t>17</a:t>
+              <a:t>19</a:t>
+            </a:r>
+          </a:p>
+        </p:txBody>
+      </p:sp>
+      <p:pic>
+        <p:nvPicPr>
+          <p:cNvPr id="7" name="Picture 6" descr="stats_refclass.png"/>
+          <p:cNvPicPr>
+            <a:picLocks noChangeAspect="1"/>
+          </p:cNvPicPr>
+          <p:nvPr/>
+        </p:nvPicPr>
+        <p:blipFill>
+          <a:blip r:embed="rId2"/>
+          <a:stretch>
+            <a:fillRect/>
+          </a:stretch>
+        </p:blipFill>
+        <p:spPr>
+          <a:xfrm>
+            <a:off x="457200" y="1417320"/>
+            <a:ext cx="7223760" cy="2471286"/>
+          </a:xfrm>
+          <a:prstGeom prst="rect">
+            <a:avLst/>
+          </a:prstGeom>
+        </p:spPr>
+      </p:pic>
+      <p:sp>
+        <p:nvSpPr>
+          <p:cNvPr id="8" name="TextBox 7"/>
+          <p:cNvSpPr txBox="1"/>
+          <p:nvPr/>
+        </p:nvSpPr>
+        <p:spPr>
+          <a:xfrm>
+            <a:off x="7863840" y="1417320"/>
+            <a:ext cx="3840480" cy="4846320"/>
+          </a:xfrm>
+          <a:prstGeom prst="rect">
+            <a:avLst/>
+          </a:prstGeom>
+          <a:noFill/>
+        </p:spPr>
+        <p:txBody>
+          <a:bodyPr wrap="square" lIns="45720">
+            <a:spAutoFit/>
+          </a:bodyPr>
+          <a:lstStyle/>
+          <a:p>
+            <a:pPr>
+              <a:lnSpc>
+                <a:spcPct val="105000"/>
+              </a:lnSpc>
+              <a:spcAft>
+                <a:spcPts val="600"/>
+              </a:spcAft>
+            </a:pPr>
+            <a:r>
+              <a:rPr sz="1250">
+                <a:solidFill>
+                  <a:srgbClr val="FFC72C"/>
+                </a:solidFill>
+                <a:latin typeface="Calibri"/>
+              </a:rPr>
+              <a:t>▪  </a:t>
+            </a:r>
+            <a:r>
+              <a:rPr b="1" sz="1250">
+                <a:solidFill>
+                  <a:srgbClr val="1F2A44"/>
+                </a:solidFill>
+                <a:latin typeface="Calibri"/>
+              </a:rPr>
+              <a:t>Median </a:t>
+            </a:r>
+            <a:r>
+              <a:rPr sz="1250">
+                <a:solidFill>
+                  <a:srgbClr val="1F2A44"/>
+                </a:solidFill>
+                <a:latin typeface="Calibri"/>
+              </a:rPr>
+              <a:t>$1,235/kWh; interquartile $750 to $1,289.</a:t>
+            </a:r>
+          </a:p>
+          <a:p>
+            <a:pPr>
+              <a:lnSpc>
+                <a:spcPct val="105000"/>
+              </a:lnSpc>
+              <a:spcAft>
+                <a:spcPts val="600"/>
+              </a:spcAft>
+            </a:pPr>
+            <a:r>
+              <a:rPr sz="1250">
+                <a:solidFill>
+                  <a:srgbClr val="FFC72C"/>
+                </a:solidFill>
+                <a:latin typeface="Calibri"/>
+              </a:rPr>
+              <a:t>▪  </a:t>
+            </a:r>
+            <a:r>
+              <a:rPr b="1" sz="1250">
+                <a:solidFill>
+                  <a:srgbClr val="1F2A44"/>
+                </a:solidFill>
+                <a:latin typeface="Calibri"/>
+              </a:rPr>
+              <a:t>Hyde Park battery installed, $833: </a:t>
+            </a:r>
+            <a:r>
+              <a:rPr sz="1250">
+                <a:solidFill>
+                  <a:srgbClr val="1F2A44"/>
+                </a:solidFill>
+                <a:latin typeface="Calibri"/>
+              </a:rPr>
+              <a:t>38% percentile.</a:t>
+            </a:r>
+          </a:p>
+          <a:p>
+            <a:pPr>
+              <a:lnSpc>
+                <a:spcPct val="105000"/>
+              </a:lnSpc>
+              <a:spcAft>
+                <a:spcPts val="600"/>
+              </a:spcAft>
+            </a:pPr>
+            <a:r>
+              <a:rPr sz="1250">
+                <a:solidFill>
+                  <a:srgbClr val="FFC72C"/>
+                </a:solidFill>
+                <a:latin typeface="Calibri"/>
+              </a:rPr>
+              <a:t>▪  </a:t>
+            </a:r>
+            <a:r>
+              <a:rPr b="1" sz="1250">
+                <a:solidFill>
+                  <a:srgbClr val="1F2A44"/>
+                </a:solidFill>
+                <a:latin typeface="Calibri"/>
+              </a:rPr>
+              <a:t>Station complete, direct, $1,483: </a:t>
+            </a:r>
+            <a:r>
+              <a:rPr sz="1250">
+                <a:solidFill>
+                  <a:srgbClr val="1F2A44"/>
+                </a:solidFill>
+                <a:latin typeface="Calibri"/>
+              </a:rPr>
+              <a:t>77% percentile, beside Fairhaven ($1,659 actual, 2023), Chateaugay ($1,490, 2023) and Provincetown ($1,289, 2022).</a:t>
+            </a:r>
+          </a:p>
+          <a:p>
+            <a:pPr>
+              <a:lnSpc>
+                <a:spcPct val="105000"/>
+              </a:lnSpc>
+              <a:spcAft>
+                <a:spcPts val="600"/>
+              </a:spcAft>
+            </a:pPr>
+            <a:r>
+              <a:rPr sz="1250">
+                <a:solidFill>
+                  <a:srgbClr val="FFC72C"/>
+                </a:solidFill>
+                <a:latin typeface="Calibri"/>
+              </a:rPr>
+              <a:t>▪  </a:t>
+            </a:r>
+            <a:r>
+              <a:rPr b="1" sz="1250">
+                <a:solidFill>
+                  <a:srgbClr val="1F2A44"/>
+                </a:solidFill>
+                <a:latin typeface="Calibri"/>
+              </a:rPr>
+              <a:t>Approval level, $2,862: </a:t>
+            </a:r>
+            <a:r>
+              <a:rPr sz="1250">
+                <a:solidFill>
+                  <a:srgbClr val="1F2A44"/>
+                </a:solidFill>
+                <a:latin typeface="Calibri"/>
+              </a:rPr>
+              <a:t>above every member. The loaders ($23.7M) and the two interconnection scopes are what the comparables do not carry.</a:t>
+            </a:r>
+          </a:p>
+          <a:p>
+            <a:pPr>
+              <a:lnSpc>
+                <a:spcPct val="105000"/>
+              </a:lnSpc>
+              <a:spcAft>
+                <a:spcPts val="600"/>
+              </a:spcAft>
+            </a:pPr>
+            <a:r>
+              <a:rPr sz="1250">
+                <a:solidFill>
+                  <a:srgbClr val="FFC72C"/>
+                </a:solidFill>
+                <a:latin typeface="Calibri"/>
+              </a:rPr>
+              <a:t>▪  </a:t>
+            </a:r>
+            <a:r>
+              <a:rPr b="1" sz="1250">
+                <a:solidFill>
+                  <a:srgbClr val="1F2A44"/>
+                </a:solidFill>
+                <a:latin typeface="Calibri"/>
+              </a:rPr>
+              <a:t>Caveat: </a:t>
+            </a:r>
+            <a:r>
+              <a:rPr sz="1250">
+                <a:solidFill>
+                  <a:srgbClr val="1F2A44"/>
+                </a:solidFill>
+                <a:latin typeface="Calibri"/>
+              </a:rPr>
+              <a:t>figures retrieved from search excerpts of regulator and utility documents; verify at source before external use.</a:t>
+            </a:r>
+          </a:p>
+        </p:txBody>
+      </p:sp>
+    </p:spTree>
+  </p:cSld>
+  <p:clrMapOvr>
+    <a:masterClrMapping/>
+  </p:clrMapOvr>
+</p:sld>
+</file>
+
+<file path=ppt/slides/slide21.xml><?xml version="1.0" encoding="utf-8"?>
+<p:sld xmlns:a="http://schemas.openxmlformats.org/drawingml/2006/main" xmlns:p="http://schemas.openxmlformats.org/presentationml/2006/main" xmlns:r="http://schemas.openxmlformats.org/officeDocument/2006/relationships">
+  <p:cSld>
+    <p:spTree>
+      <p:nvGrpSpPr>
+        <p:cNvPr id="1" name=""/>
+        <p:cNvGrpSpPr/>
+        <p:nvPr/>
+      </p:nvGrpSpPr>
+      <p:grpSpPr/>
+      <p:sp>
+        <p:nvSpPr>
+          <p:cNvPr id="2" name="Rectangle 1"/>
+          <p:cNvSpPr/>
+          <p:nvPr/>
+        </p:nvSpPr>
+        <p:spPr>
+          <a:xfrm>
+            <a:off x="0" y="0"/>
+            <a:ext cx="12191695" cy="6858000"/>
+          </a:xfrm>
+          <a:prstGeom prst="rect">
+            <a:avLst/>
+          </a:prstGeom>
+          <a:solidFill>
+            <a:srgbClr val="FFFFFF"/>
+          </a:solidFill>
+          <a:ln>
+            <a:noFill/>
+          </a:ln>
+          <a:effectLst/>
+        </p:spPr>
+        <p:style>
+          <a:lnRef idx="1">
+            <a:schemeClr val="accent1"/>
+          </a:lnRef>
+          <a:fillRef idx="3">
+            <a:schemeClr val="accent1"/>
+          </a:fillRef>
+          <a:effectRef idx="2">
+            <a:schemeClr val="accent1"/>
+          </a:effectRef>
+          <a:fontRef idx="minor">
+            <a:schemeClr val="lt1"/>
+          </a:fontRef>
+        </p:style>
+        <p:txBody>
+          <a:bodyPr rtlCol="0" anchor="ctr"/>
+          <a:lstStyle/>
+          <a:p>
+            <a:pPr algn="ctr"/>
+          </a:p>
+        </p:txBody>
+      </p:sp>
+      <p:sp>
+        <p:nvSpPr>
+          <p:cNvPr id="3" name="TextBox 2"/>
+          <p:cNvSpPr txBox="1"/>
+          <p:nvPr/>
+        </p:nvSpPr>
+        <p:spPr>
+          <a:xfrm>
+            <a:off x="548640" y="256032"/>
+            <a:ext cx="10058400" cy="274320"/>
+          </a:xfrm>
+          <a:prstGeom prst="rect">
+            <a:avLst/>
+          </a:prstGeom>
+          <a:noFill/>
+        </p:spPr>
+        <p:txBody>
+          <a:bodyPr wrap="square" lIns="45720" rIns="45720" tIns="27432" bIns="27432" anchor="t">
+            <a:spAutoFit/>
+          </a:bodyPr>
+          <a:lstStyle/>
+          <a:p>
+            <a:pPr algn="l">
+              <a:lnSpc>
+                <a:spcPct val="105000"/>
+              </a:lnSpc>
+              <a:spcAft>
+                <a:spcPts val="400"/>
+              </a:spcAft>
+            </a:pPr>
+            <a:r>
+              <a:rPr sz="1100" b="1" i="0">
+                <a:solidFill>
+                  <a:srgbClr val="6E1F2E"/>
+                </a:solidFill>
+                <a:latin typeface="Calibri"/>
+              </a:rPr>
+              <a:t>APPENDIX B. REGRESSION ON 26 PUBLIC PROJECTS</a:t>
+            </a:r>
+          </a:p>
+        </p:txBody>
+      </p:sp>
+      <p:sp>
+        <p:nvSpPr>
+          <p:cNvPr id="4" name="TextBox 3"/>
+          <p:cNvSpPr txBox="1"/>
+          <p:nvPr/>
+        </p:nvSpPr>
+        <p:spPr>
+          <a:xfrm>
+            <a:off x="548640" y="475488"/>
+            <a:ext cx="11064240" cy="868680"/>
+          </a:xfrm>
+          <a:prstGeom prst="rect">
+            <a:avLst/>
+          </a:prstGeom>
+          <a:noFill/>
+        </p:spPr>
+        <p:txBody>
+          <a:bodyPr wrap="square" lIns="45720" rIns="45720" tIns="27432" bIns="27432" anchor="t">
+            <a:spAutoFit/>
+          </a:bodyPr>
+          <a:lstStyle/>
+          <a:p>
+            <a:pPr algn="l">
+              <a:lnSpc>
+                <a:spcPct val="100000"/>
+              </a:lnSpc>
+              <a:spcAft>
+                <a:spcPts val="400"/>
+              </a:spcAft>
+            </a:pPr>
+            <a:r>
+              <a:rPr sz="2300" b="1" i="0">
+                <a:solidFill>
+                  <a:srgbClr val="001E60"/>
+                </a:solidFill>
+                <a:latin typeface="Georgia"/>
+              </a:rPr>
+              <a:t>Size and duration explain two thirds of the spread in public costs; Hyde Park's direct cost is high-normal</a:t>
+            </a:r>
+          </a:p>
+        </p:txBody>
+      </p:sp>
+      <p:sp>
+        <p:nvSpPr>
+          <p:cNvPr id="5" name="TextBox 4"/>
+          <p:cNvSpPr txBox="1"/>
+          <p:nvPr/>
+        </p:nvSpPr>
+        <p:spPr>
+          <a:xfrm>
+            <a:off x="548640" y="6419088"/>
+            <a:ext cx="8229600" cy="274320"/>
+          </a:xfrm>
+          <a:prstGeom prst="rect">
+            <a:avLst/>
+          </a:prstGeom>
+          <a:noFill/>
+        </p:spPr>
+        <p:txBody>
+          <a:bodyPr wrap="square" lIns="45720" rIns="45720" tIns="27432" bIns="27432" anchor="t">
+            <a:spAutoFit/>
+          </a:bodyPr>
+          <a:lstStyle/>
+          <a:p>
+            <a:pPr algn="l">
+              <a:lnSpc>
+                <a:spcPct val="105000"/>
+              </a:lnSpc>
+              <a:spcAft>
+                <a:spcPts val="400"/>
+              </a:spcAft>
+            </a:pPr>
+            <a:r>
+              <a:rPr sz="1000" b="0" i="0">
+                <a:solidFill>
+                  <a:srgbClr val="6B7280"/>
+                </a:solidFill>
+                <a:latin typeface="Calibri"/>
+              </a:rPr>
+              <a:t>EstimatingCoE | Eversource Energy | Stewards of Affordability</a:t>
+            </a:r>
+          </a:p>
+        </p:txBody>
+      </p:sp>
+      <p:sp>
+        <p:nvSpPr>
+          <p:cNvPr id="6" name="TextBox 5"/>
+          <p:cNvSpPr txBox="1"/>
+          <p:nvPr/>
+        </p:nvSpPr>
+        <p:spPr>
+          <a:xfrm>
+            <a:off x="10972800" y="6419088"/>
+            <a:ext cx="685800" cy="274320"/>
+          </a:xfrm>
+          <a:prstGeom prst="rect">
+            <a:avLst/>
+          </a:prstGeom>
+          <a:noFill/>
+        </p:spPr>
+        <p:txBody>
+          <a:bodyPr wrap="square" lIns="45720" rIns="45720" tIns="27432" bIns="27432" anchor="t">
+            <a:spAutoFit/>
+          </a:bodyPr>
+          <a:lstStyle/>
+          <a:p>
+            <a:pPr algn="r">
+              <a:lnSpc>
+                <a:spcPct val="105000"/>
+              </a:lnSpc>
+              <a:spcAft>
+                <a:spcPts val="400"/>
+              </a:spcAft>
+            </a:pPr>
+            <a:r>
+              <a:rPr sz="1000" b="0" i="0">
+                <a:solidFill>
+                  <a:srgbClr val="6B7280"/>
+                </a:solidFill>
+                <a:latin typeface="Calibri"/>
+              </a:rPr>
+              <a:t>20</a:t>
             </a:r>
           </a:p>
         </p:txBody>
@@ -13433,7 +17650,7 @@
 </p:sld>
 </file>
 
-<file path=ppt/slides/slide19.xml><?xml version="1.0" encoding="utf-8"?>
+<file path=ppt/slides/slide22.xml><?xml version="1.0" encoding="utf-8"?>
 <p:sld xmlns:a="http://schemas.openxmlformats.org/drawingml/2006/main" xmlns:p="http://schemas.openxmlformats.org/presentationml/2006/main" xmlns:r="http://schemas.openxmlformats.org/officeDocument/2006/relationships">
   <p:cSld>
     <p:spTree>
@@ -13566,7 +17783,7 @@
                 </a:solidFill>
                 <a:latin typeface="Georgia"/>
               </a:rPr>
-              <a:t>Monte Carlo on the layers: the reserve is adequate, and the risk is in the ground and the station, not the battery</a:t>
+              <a:t>Monte Carlo on the layers: the reserve covers the element ranges but is thin against outside history; the risk is in the ground and the station</a:t>
             </a:r>
           </a:p>
         </p:txBody>
@@ -13650,7 +17867,7 @@
                 </a:solidFill>
                 <a:latin typeface="Calibri"/>
               </a:rPr>
-              <a:t>18</a:t>
+              <a:t>21</a:t>
             </a:r>
           </a:p>
         </p:txBody>
@@ -14280,839 +18497,6 @@
                 <a:latin typeface="Calibri"/>
               </a:rPr>
               <a:t>replace these ranges with the project team's in a two-hour range-estimating session (AACE 41R-08) before full funding.</a:t>
-            </a:r>
-          </a:p>
-        </p:txBody>
-      </p:sp>
-    </p:spTree>
-  </p:cSld>
-  <p:clrMapOvr>
-    <a:masterClrMapping/>
-  </p:clrMapOvr>
-</p:sld>
-</file>
-
-<file path=ppt/slides/slide2.xml><?xml version="1.0" encoding="utf-8"?>
-<p:sld xmlns:a="http://schemas.openxmlformats.org/drawingml/2006/main" xmlns:p="http://schemas.openxmlformats.org/presentationml/2006/main" xmlns:r="http://schemas.openxmlformats.org/officeDocument/2006/relationships">
-  <p:cSld>
-    <p:spTree>
-      <p:nvGrpSpPr>
-        <p:cNvPr id="1" name=""/>
-        <p:cNvGrpSpPr/>
-        <p:nvPr/>
-      </p:nvGrpSpPr>
-      <p:grpSpPr/>
-      <p:sp>
-        <p:nvSpPr>
-          <p:cNvPr id="2" name="Rectangle 1"/>
-          <p:cNvSpPr/>
-          <p:nvPr/>
-        </p:nvSpPr>
-        <p:spPr>
-          <a:xfrm>
-            <a:off x="0" y="0"/>
-            <a:ext cx="12191695" cy="6858000"/>
-          </a:xfrm>
-          <a:prstGeom prst="rect">
-            <a:avLst/>
-          </a:prstGeom>
-          <a:solidFill>
-            <a:srgbClr val="FFFFFF"/>
-          </a:solidFill>
-          <a:ln>
-            <a:noFill/>
-          </a:ln>
-          <a:effectLst/>
-        </p:spPr>
-        <p:style>
-          <a:lnRef idx="1">
-            <a:schemeClr val="accent1"/>
-          </a:lnRef>
-          <a:fillRef idx="3">
-            <a:schemeClr val="accent1"/>
-          </a:fillRef>
-          <a:effectRef idx="2">
-            <a:schemeClr val="accent1"/>
-          </a:effectRef>
-          <a:fontRef idx="minor">
-            <a:schemeClr val="lt1"/>
-          </a:fontRef>
-        </p:style>
-        <p:txBody>
-          <a:bodyPr rtlCol="0" anchor="ctr"/>
-          <a:lstStyle/>
-          <a:p>
-            <a:pPr algn="ctr"/>
-          </a:p>
-        </p:txBody>
-      </p:sp>
-      <p:sp>
-        <p:nvSpPr>
-          <p:cNvPr id="3" name="TextBox 2"/>
-          <p:cNvSpPr txBox="1"/>
-          <p:nvPr/>
-        </p:nvSpPr>
-        <p:spPr>
-          <a:xfrm>
-            <a:off x="548640" y="256032"/>
-            <a:ext cx="10058400" cy="274320"/>
-          </a:xfrm>
-          <a:prstGeom prst="rect">
-            <a:avLst/>
-          </a:prstGeom>
-          <a:noFill/>
-        </p:spPr>
-        <p:txBody>
-          <a:bodyPr wrap="square" lIns="45720" rIns="45720" tIns="27432" bIns="27432" anchor="t">
-            <a:spAutoFit/>
-          </a:bodyPr>
-          <a:lstStyle/>
-          <a:p>
-            <a:pPr algn="l">
-              <a:lnSpc>
-                <a:spcPct val="105000"/>
-              </a:lnSpc>
-              <a:spcAft>
-                <a:spcPts val="400"/>
-              </a:spcAft>
-            </a:pPr>
-            <a:r>
-              <a:rPr sz="1100" b="1" i="0">
-                <a:solidFill>
-                  <a:srgbClr val="6E1F2E"/>
-                </a:solidFill>
-                <a:latin typeface="Calibri"/>
-              </a:rPr>
-              <a:t>THE PROMISE</a:t>
-            </a:r>
-          </a:p>
-        </p:txBody>
-      </p:sp>
-      <p:sp>
-        <p:nvSpPr>
-          <p:cNvPr id="4" name="TextBox 3"/>
-          <p:cNvSpPr txBox="1"/>
-          <p:nvPr/>
-        </p:nvSpPr>
-        <p:spPr>
-          <a:xfrm>
-            <a:off x="548640" y="475488"/>
-            <a:ext cx="11064240" cy="868680"/>
-          </a:xfrm>
-          <a:prstGeom prst="rect">
-            <a:avLst/>
-          </a:prstGeom>
-          <a:noFill/>
-        </p:spPr>
-        <p:txBody>
-          <a:bodyPr wrap="square" lIns="45720" rIns="45720" tIns="27432" bIns="27432" anchor="t">
-            <a:spAutoFit/>
-          </a:bodyPr>
-          <a:lstStyle/>
-          <a:p>
-            <a:pPr algn="l">
-              <a:lnSpc>
-                <a:spcPct val="100000"/>
-              </a:lnSpc>
-              <a:spcAft>
-                <a:spcPts val="400"/>
-              </a:spcAft>
-            </a:pPr>
-            <a:r>
-              <a:rPr sz="2300" b="1" i="0">
-                <a:solidFill>
-                  <a:srgbClr val="001E60"/>
-                </a:solidFill>
-                <a:latin typeface="Georgia"/>
-              </a:rPr>
-              <a:t>By the end of this deck you can answer one question in one breath</a:t>
-            </a:r>
-          </a:p>
-        </p:txBody>
-      </p:sp>
-      <p:sp>
-        <p:nvSpPr>
-          <p:cNvPr id="5" name="TextBox 4"/>
-          <p:cNvSpPr txBox="1"/>
-          <p:nvPr/>
-        </p:nvSpPr>
-        <p:spPr>
-          <a:xfrm>
-            <a:off x="548640" y="6419088"/>
-            <a:ext cx="8229600" cy="274320"/>
-          </a:xfrm>
-          <a:prstGeom prst="rect">
-            <a:avLst/>
-          </a:prstGeom>
-          <a:noFill/>
-        </p:spPr>
-        <p:txBody>
-          <a:bodyPr wrap="square" lIns="45720" rIns="45720" tIns="27432" bIns="27432" anchor="t">
-            <a:spAutoFit/>
-          </a:bodyPr>
-          <a:lstStyle/>
-          <a:p>
-            <a:pPr algn="l">
-              <a:lnSpc>
-                <a:spcPct val="105000"/>
-              </a:lnSpc>
-              <a:spcAft>
-                <a:spcPts val="400"/>
-              </a:spcAft>
-            </a:pPr>
-            <a:r>
-              <a:rPr sz="1000" b="0" i="0">
-                <a:solidFill>
-                  <a:srgbClr val="6B7280"/>
-                </a:solidFill>
-                <a:latin typeface="Calibri"/>
-              </a:rPr>
-              <a:t>EstimatingCoE | Eversource Energy | Stewards of Affordability</a:t>
-            </a:r>
-          </a:p>
-        </p:txBody>
-      </p:sp>
-      <p:sp>
-        <p:nvSpPr>
-          <p:cNvPr id="6" name="TextBox 5"/>
-          <p:cNvSpPr txBox="1"/>
-          <p:nvPr/>
-        </p:nvSpPr>
-        <p:spPr>
-          <a:xfrm>
-            <a:off x="10972800" y="6419088"/>
-            <a:ext cx="685800" cy="274320"/>
-          </a:xfrm>
-          <a:prstGeom prst="rect">
-            <a:avLst/>
-          </a:prstGeom>
-          <a:noFill/>
-        </p:spPr>
-        <p:txBody>
-          <a:bodyPr wrap="square" lIns="45720" rIns="45720" tIns="27432" bIns="27432" anchor="t">
-            <a:spAutoFit/>
-          </a:bodyPr>
-          <a:lstStyle/>
-          <a:p>
-            <a:pPr algn="r">
-              <a:lnSpc>
-                <a:spcPct val="105000"/>
-              </a:lnSpc>
-              <a:spcAft>
-                <a:spcPts val="400"/>
-              </a:spcAft>
-            </a:pPr>
-            <a:r>
-              <a:rPr sz="1000" b="0" i="0">
-                <a:solidFill>
-                  <a:srgbClr val="6B7280"/>
-                </a:solidFill>
-                <a:latin typeface="Calibri"/>
-              </a:rPr>
-              <a:t>2</a:t>
-            </a:r>
-          </a:p>
-        </p:txBody>
-      </p:sp>
-      <p:sp>
-        <p:nvSpPr>
-          <p:cNvPr id="7" name="TextBox 6"/>
-          <p:cNvSpPr txBox="1"/>
-          <p:nvPr/>
-        </p:nvSpPr>
-        <p:spPr>
-          <a:xfrm>
-            <a:off x="548640" y="1417320"/>
-            <a:ext cx="10972800" cy="640080"/>
-          </a:xfrm>
-          <a:prstGeom prst="rect">
-            <a:avLst/>
-          </a:prstGeom>
-          <a:noFill/>
-        </p:spPr>
-        <p:txBody>
-          <a:bodyPr wrap="square" lIns="45720" rIns="45720" tIns="27432" bIns="27432" anchor="t">
-            <a:spAutoFit/>
-          </a:bodyPr>
-          <a:lstStyle/>
-          <a:p>
-            <a:pPr algn="l">
-              <a:lnSpc>
-                <a:spcPct val="105000"/>
-              </a:lnSpc>
-              <a:spcAft>
-                <a:spcPts val="400"/>
-              </a:spcAft>
-            </a:pPr>
-            <a:r>
-              <a:rPr sz="1900" b="0" i="0">
-                <a:solidFill>
-                  <a:srgbClr val="1F2A44"/>
-                </a:solidFill>
-                <a:latin typeface="Calibri"/>
-              </a:rPr>
-              <a:t>“Why is a $12 million battery a $57 million project?”  Because the battery is the only part a vendor prices. The station, the site, the feeder protection, the siting case, the risk and the cost of money are ours.</a:t>
-            </a:r>
-          </a:p>
-        </p:txBody>
-      </p:sp>
-      <p:sp>
-        <p:nvSpPr>
-          <p:cNvPr id="8" name="Rectangle 7"/>
-          <p:cNvSpPr/>
-          <p:nvPr/>
-        </p:nvSpPr>
-        <p:spPr>
-          <a:xfrm>
-            <a:off x="548640" y="2468880"/>
-            <a:ext cx="3566160" cy="2194560"/>
-          </a:xfrm>
-          <a:prstGeom prst="rect">
-            <a:avLst/>
-          </a:prstGeom>
-          <a:solidFill>
-            <a:srgbClr val="F2F4F8"/>
-          </a:solidFill>
-          <a:ln>
-            <a:noFill/>
-          </a:ln>
-          <a:effectLst/>
-        </p:spPr>
-        <p:style>
-          <a:lnRef idx="1">
-            <a:schemeClr val="accent1"/>
-          </a:lnRef>
-          <a:fillRef idx="3">
-            <a:schemeClr val="accent1"/>
-          </a:fillRef>
-          <a:effectRef idx="2">
-            <a:schemeClr val="accent1"/>
-          </a:effectRef>
-          <a:fontRef idx="minor">
-            <a:schemeClr val="lt1"/>
-          </a:fontRef>
-        </p:style>
-        <p:txBody>
-          <a:bodyPr rtlCol="0" anchor="ctr"/>
-          <a:lstStyle/>
-          <a:p>
-            <a:pPr algn="ctr"/>
-          </a:p>
-        </p:txBody>
-      </p:sp>
-      <p:sp>
-        <p:nvSpPr>
-          <p:cNvPr id="9" name="TextBox 8"/>
-          <p:cNvSpPr txBox="1"/>
-          <p:nvPr/>
-        </p:nvSpPr>
-        <p:spPr>
-          <a:xfrm>
-            <a:off x="685800" y="2578608"/>
-            <a:ext cx="3291840" cy="822960"/>
-          </a:xfrm>
-          <a:prstGeom prst="rect">
-            <a:avLst/>
-          </a:prstGeom>
-          <a:noFill/>
-        </p:spPr>
-        <p:txBody>
-          <a:bodyPr wrap="square" lIns="45720" rIns="45720" tIns="27432" bIns="27432" anchor="t">
-            <a:spAutoFit/>
-          </a:bodyPr>
-          <a:lstStyle/>
-          <a:p>
-            <a:pPr algn="l">
-              <a:lnSpc>
-                <a:spcPct val="105000"/>
-              </a:lnSpc>
-              <a:spcAft>
-                <a:spcPts val="400"/>
-              </a:spcAft>
-            </a:pPr>
-            <a:r>
-              <a:rPr sz="4000" b="1" i="0">
-                <a:solidFill>
-                  <a:srgbClr val="001E60"/>
-                </a:solidFill>
-                <a:latin typeface="Georgia"/>
-              </a:rPr>
-              <a:t>$12.1M</a:t>
-            </a:r>
-          </a:p>
-        </p:txBody>
-      </p:sp>
-      <p:sp>
-        <p:nvSpPr>
-          <p:cNvPr id="10" name="TextBox 9"/>
-          <p:cNvSpPr txBox="1"/>
-          <p:nvPr/>
-        </p:nvSpPr>
-        <p:spPr>
-          <a:xfrm>
-            <a:off x="685800" y="3264408"/>
-            <a:ext cx="3291840" cy="457200"/>
-          </a:xfrm>
-          <a:prstGeom prst="rect">
-            <a:avLst/>
-          </a:prstGeom>
-          <a:noFill/>
-        </p:spPr>
-        <p:txBody>
-          <a:bodyPr wrap="square" lIns="45720" rIns="45720" tIns="27432" bIns="27432" anchor="t">
-            <a:spAutoFit/>
-          </a:bodyPr>
-          <a:lstStyle/>
-          <a:p>
-            <a:pPr algn="l">
-              <a:lnSpc>
-                <a:spcPct val="105000"/>
-              </a:lnSpc>
-              <a:spcAft>
-                <a:spcPts val="400"/>
-              </a:spcAft>
-            </a:pPr>
-            <a:r>
-              <a:rPr sz="1500" b="1" i="0">
-                <a:solidFill>
-                  <a:srgbClr val="1F2A44"/>
-                </a:solidFill>
-                <a:latin typeface="Calibri"/>
-              </a:rPr>
-              <a:t>Vendor fixed-price contract</a:t>
-            </a:r>
-          </a:p>
-        </p:txBody>
-      </p:sp>
-      <p:sp>
-        <p:nvSpPr>
-          <p:cNvPr id="11" name="TextBox 10"/>
-          <p:cNvSpPr txBox="1"/>
-          <p:nvPr/>
-        </p:nvSpPr>
-        <p:spPr>
-          <a:xfrm>
-            <a:off x="685800" y="3648456"/>
-            <a:ext cx="3291840" cy="969263"/>
-          </a:xfrm>
-          <a:prstGeom prst="rect">
-            <a:avLst/>
-          </a:prstGeom>
-          <a:noFill/>
-        </p:spPr>
-        <p:txBody>
-          <a:bodyPr wrap="square" lIns="45720" rIns="45720" tIns="27432" bIns="27432" anchor="t">
-            <a:spAutoFit/>
-          </a:bodyPr>
-          <a:lstStyle/>
-          <a:p>
-            <a:pPr algn="l">
-              <a:lnSpc>
-                <a:spcPct val="100000"/>
-              </a:lnSpc>
-              <a:spcAft>
-                <a:spcPts val="400"/>
-              </a:spcAft>
-            </a:pPr>
-            <a:r>
-              <a:rPr sz="1250" b="0" i="0">
-                <a:solidFill>
-                  <a:srgbClr val="6B7280"/>
-                </a:solidFill>
-                <a:latin typeface="Calibri"/>
-              </a:rPr>
-              <a:t>Nomad cover agreement, 10 Mar 2026. 12 Voyager LFP units, PCS, BMS, fire protection, 10-yr warranty. $605/kWh, $1,211/kW.</a:t>
-            </a:r>
-          </a:p>
-        </p:txBody>
-      </p:sp>
-      <p:sp>
-        <p:nvSpPr>
-          <p:cNvPr id="12" name="Rectangle 11"/>
-          <p:cNvSpPr/>
-          <p:nvPr/>
-        </p:nvSpPr>
-        <p:spPr>
-          <a:xfrm>
-            <a:off x="4315968" y="2468880"/>
-            <a:ext cx="3566160" cy="2194560"/>
-          </a:xfrm>
-          <a:prstGeom prst="rect">
-            <a:avLst/>
-          </a:prstGeom>
-          <a:solidFill>
-            <a:srgbClr val="F2F4F8"/>
-          </a:solidFill>
-          <a:ln>
-            <a:noFill/>
-          </a:ln>
-          <a:effectLst/>
-        </p:spPr>
-        <p:style>
-          <a:lnRef idx="1">
-            <a:schemeClr val="accent1"/>
-          </a:lnRef>
-          <a:fillRef idx="3">
-            <a:schemeClr val="accent1"/>
-          </a:fillRef>
-          <a:effectRef idx="2">
-            <a:schemeClr val="accent1"/>
-          </a:effectRef>
-          <a:fontRef idx="minor">
-            <a:schemeClr val="lt1"/>
-          </a:fontRef>
-        </p:style>
-        <p:txBody>
-          <a:bodyPr rtlCol="0" anchor="ctr"/>
-          <a:lstStyle/>
-          <a:p>
-            <a:pPr algn="ctr"/>
-          </a:p>
-        </p:txBody>
-      </p:sp>
-      <p:sp>
-        <p:nvSpPr>
-          <p:cNvPr id="13" name="TextBox 12"/>
-          <p:cNvSpPr txBox="1"/>
-          <p:nvPr/>
-        </p:nvSpPr>
-        <p:spPr>
-          <a:xfrm>
-            <a:off x="4453128" y="2578608"/>
-            <a:ext cx="3291840" cy="822960"/>
-          </a:xfrm>
-          <a:prstGeom prst="rect">
-            <a:avLst/>
-          </a:prstGeom>
-          <a:noFill/>
-        </p:spPr>
-        <p:txBody>
-          <a:bodyPr wrap="square" lIns="45720" rIns="45720" tIns="27432" bIns="27432" anchor="t">
-            <a:spAutoFit/>
-          </a:bodyPr>
-          <a:lstStyle/>
-          <a:p>
-            <a:pPr algn="l">
-              <a:lnSpc>
-                <a:spcPct val="105000"/>
-              </a:lnSpc>
-              <a:spcAft>
-                <a:spcPts val="400"/>
-              </a:spcAft>
-            </a:pPr>
-            <a:r>
-              <a:rPr sz="4000" b="1" i="0">
-                <a:solidFill>
-                  <a:srgbClr val="6E1F2E"/>
-                </a:solidFill>
-                <a:latin typeface="Georgia"/>
-              </a:rPr>
-              <a:t>$57.2M</a:t>
-            </a:r>
-          </a:p>
-        </p:txBody>
-      </p:sp>
-      <p:sp>
-        <p:nvSpPr>
-          <p:cNvPr id="14" name="TextBox 13"/>
-          <p:cNvSpPr txBox="1"/>
-          <p:nvPr/>
-        </p:nvSpPr>
-        <p:spPr>
-          <a:xfrm>
-            <a:off x="4453128" y="3264408"/>
-            <a:ext cx="3291840" cy="457200"/>
-          </a:xfrm>
-          <a:prstGeom prst="rect">
-            <a:avLst/>
-          </a:prstGeom>
-          <a:noFill/>
-        </p:spPr>
-        <p:txBody>
-          <a:bodyPr wrap="square" lIns="45720" rIns="45720" tIns="27432" bIns="27432" anchor="t">
-            <a:spAutoFit/>
-          </a:bodyPr>
-          <a:lstStyle/>
-          <a:p>
-            <a:pPr algn="l">
-              <a:lnSpc>
-                <a:spcPct val="105000"/>
-              </a:lnSpc>
-              <a:spcAft>
-                <a:spcPts val="400"/>
-              </a:spcAft>
-            </a:pPr>
-            <a:r>
-              <a:rPr sz="1500" b="1" i="0">
-                <a:solidFill>
-                  <a:srgbClr val="1F2A44"/>
-                </a:solidFill>
-                <a:latin typeface="Calibri"/>
-              </a:rPr>
-              <a:t>Project 21334 approval level</a:t>
-            </a:r>
-          </a:p>
-        </p:txBody>
-      </p:sp>
-      <p:sp>
-        <p:nvSpPr>
-          <p:cNvPr id="15" name="TextBox 14"/>
-          <p:cNvSpPr txBox="1"/>
-          <p:nvPr/>
-        </p:nvSpPr>
-        <p:spPr>
-          <a:xfrm>
-            <a:off x="4453128" y="3648456"/>
-            <a:ext cx="3291840" cy="969263"/>
-          </a:xfrm>
-          <a:prstGeom prst="rect">
-            <a:avLst/>
-          </a:prstGeom>
-          <a:noFill/>
-        </p:spPr>
-        <p:txBody>
-          <a:bodyPr wrap="square" lIns="45720" rIns="45720" tIns="27432" bIns="27432" anchor="t">
-            <a:spAutoFit/>
-          </a:bodyPr>
-          <a:lstStyle/>
-          <a:p>
-            <a:pPr algn="l">
-              <a:lnSpc>
-                <a:spcPct val="100000"/>
-              </a:lnSpc>
-              <a:spcAft>
-                <a:spcPts val="400"/>
-              </a:spcAft>
-            </a:pPr>
-            <a:r>
-              <a:rPr sz="1250" b="0" i="0">
-                <a:solidFill>
-                  <a:srgbClr val="6B7280"/>
-                </a:solidFill>
-                <a:latin typeface="Calibri"/>
-              </a:rPr>
-              <a:t>ESF Total Rev 3. Station 360 $50.0M plus Station 496 protection $7.3M. $2,862/kWh, $5,725/kW. Conceptual, -25%/+50%.</a:t>
-            </a:r>
-          </a:p>
-        </p:txBody>
-      </p:sp>
-      <p:sp>
-        <p:nvSpPr>
-          <p:cNvPr id="16" name="Rectangle 15"/>
-          <p:cNvSpPr/>
-          <p:nvPr/>
-        </p:nvSpPr>
-        <p:spPr>
-          <a:xfrm>
-            <a:off x="8083296" y="2468880"/>
-            <a:ext cx="3566160" cy="2194560"/>
-          </a:xfrm>
-          <a:prstGeom prst="rect">
-            <a:avLst/>
-          </a:prstGeom>
-          <a:solidFill>
-            <a:srgbClr val="F2F4F8"/>
-          </a:solidFill>
-          <a:ln>
-            <a:noFill/>
-          </a:ln>
-          <a:effectLst/>
-        </p:spPr>
-        <p:style>
-          <a:lnRef idx="1">
-            <a:schemeClr val="accent1"/>
-          </a:lnRef>
-          <a:fillRef idx="3">
-            <a:schemeClr val="accent1"/>
-          </a:fillRef>
-          <a:effectRef idx="2">
-            <a:schemeClr val="accent1"/>
-          </a:effectRef>
-          <a:fontRef idx="minor">
-            <a:schemeClr val="lt1"/>
-          </a:fontRef>
-        </p:style>
-        <p:txBody>
-          <a:bodyPr rtlCol="0" anchor="ctr"/>
-          <a:lstStyle/>
-          <a:p>
-            <a:pPr algn="ctr"/>
-          </a:p>
-        </p:txBody>
-      </p:sp>
-      <p:sp>
-        <p:nvSpPr>
-          <p:cNvPr id="17" name="TextBox 16"/>
-          <p:cNvSpPr txBox="1"/>
-          <p:nvPr/>
-        </p:nvSpPr>
-        <p:spPr>
-          <a:xfrm>
-            <a:off x="8220456" y="2578608"/>
-            <a:ext cx="3291840" cy="822960"/>
-          </a:xfrm>
-          <a:prstGeom prst="rect">
-            <a:avLst/>
-          </a:prstGeom>
-          <a:noFill/>
-        </p:spPr>
-        <p:txBody>
-          <a:bodyPr wrap="square" lIns="45720" rIns="45720" tIns="27432" bIns="27432" anchor="t">
-            <a:spAutoFit/>
-          </a:bodyPr>
-          <a:lstStyle/>
-          <a:p>
-            <a:pPr algn="l">
-              <a:lnSpc>
-                <a:spcPct val="105000"/>
-              </a:lnSpc>
-              <a:spcAft>
-                <a:spcPts val="400"/>
-              </a:spcAft>
-            </a:pPr>
-            <a:r>
-              <a:rPr sz="4000" b="1" i="0">
-                <a:solidFill>
-                  <a:srgbClr val="001E60"/>
-                </a:solidFill>
-                <a:latin typeface="Georgia"/>
-              </a:rPr>
-              <a:t>21%</a:t>
-            </a:r>
-          </a:p>
-        </p:txBody>
-      </p:sp>
-      <p:sp>
-        <p:nvSpPr>
-          <p:cNvPr id="18" name="TextBox 17"/>
-          <p:cNvSpPr txBox="1"/>
-          <p:nvPr/>
-        </p:nvSpPr>
-        <p:spPr>
-          <a:xfrm>
-            <a:off x="8220456" y="3264408"/>
-            <a:ext cx="3291840" cy="457200"/>
-          </a:xfrm>
-          <a:prstGeom prst="rect">
-            <a:avLst/>
-          </a:prstGeom>
-          <a:noFill/>
-        </p:spPr>
-        <p:txBody>
-          <a:bodyPr wrap="square" lIns="45720" rIns="45720" tIns="27432" bIns="27432" anchor="t">
-            <a:spAutoFit/>
-          </a:bodyPr>
-          <a:lstStyle/>
-          <a:p>
-            <a:pPr algn="l">
-              <a:lnSpc>
-                <a:spcPct val="105000"/>
-              </a:lnSpc>
-              <a:spcAft>
-                <a:spcPts val="400"/>
-              </a:spcAft>
-            </a:pPr>
-            <a:r>
-              <a:rPr sz="1500" b="1" i="0">
-                <a:solidFill>
-                  <a:srgbClr val="1F2A44"/>
-                </a:solidFill>
-                <a:latin typeface="Calibri"/>
-              </a:rPr>
-              <a:t>Battery share of the total</a:t>
-            </a:r>
-          </a:p>
-        </p:txBody>
-      </p:sp>
-      <p:sp>
-        <p:nvSpPr>
-          <p:cNvPr id="19" name="TextBox 18"/>
-          <p:cNvSpPr txBox="1"/>
-          <p:nvPr/>
-        </p:nvSpPr>
-        <p:spPr>
-          <a:xfrm>
-            <a:off x="8220456" y="3648456"/>
-            <a:ext cx="3291840" cy="969263"/>
-          </a:xfrm>
-          <a:prstGeom prst="rect">
-            <a:avLst/>
-          </a:prstGeom>
-          <a:noFill/>
-        </p:spPr>
-        <p:txBody>
-          <a:bodyPr wrap="square" lIns="45720" rIns="45720" tIns="27432" bIns="27432" anchor="t">
-            <a:spAutoFit/>
-          </a:bodyPr>
-          <a:lstStyle/>
-          <a:p>
-            <a:pPr algn="l">
-              <a:lnSpc>
-                <a:spcPct val="100000"/>
-              </a:lnSpc>
-              <a:spcAft>
-                <a:spcPts val="400"/>
-              </a:spcAft>
-            </a:pPr>
-            <a:r>
-              <a:rPr sz="1250" b="0" i="0">
-                <a:solidFill>
-                  <a:srgbClr val="6B7280"/>
-                </a:solidFill>
-                <a:latin typeface="Calibri"/>
-              </a:rPr>
-              <a:t>Add the D-Line circuit extension (24211, $4.8M conceptual) and the share drops to 20%. Four dollars of every five are not the battery.</a:t>
-            </a:r>
-          </a:p>
-        </p:txBody>
-      </p:sp>
-      <p:sp>
-        <p:nvSpPr>
-          <p:cNvPr id="20" name="TextBox 19"/>
-          <p:cNvSpPr txBox="1"/>
-          <p:nvPr/>
-        </p:nvSpPr>
-        <p:spPr>
-          <a:xfrm>
-            <a:off x="548640" y="4937760"/>
-            <a:ext cx="11064240" cy="1280160"/>
-          </a:xfrm>
-          <a:prstGeom prst="rect">
-            <a:avLst/>
-          </a:prstGeom>
-          <a:noFill/>
-        </p:spPr>
-        <p:txBody>
-          <a:bodyPr wrap="square" lIns="45720" rIns="45720" tIns="27432" bIns="27432" anchor="t">
-            <a:spAutoFit/>
-          </a:bodyPr>
-          <a:lstStyle/>
-          <a:p>
-            <a:pPr algn="l">
-              <a:lnSpc>
-                <a:spcPct val="105000"/>
-              </a:lnSpc>
-              <a:spcAft>
-                <a:spcPts val="400"/>
-              </a:spcAft>
-            </a:pPr>
-            <a:r>
-              <a:rPr sz="1600" b="1" i="0">
-                <a:solidFill>
-                  <a:srgbClr val="001E60"/>
-                </a:solidFill>
-                <a:latin typeface="Calibri"/>
-              </a:rPr>
-              <a:t>What this deck contributes: </a:t>
-            </a:r>
-            <a:r>
-              <a:rPr sz="1600" b="0" i="0">
-                <a:solidFill>
-                  <a:srgbClr val="1F2A44"/>
-                </a:solidFill>
-                <a:latin typeface="Calibri"/>
-              </a:rPr>
-              <a:t>a line-by-line extraction of the Rev 3 estimate into thirteen cost layers, unit costs at every boundary a benchmark could be quoted at, the cost history from the 2021 IFR to today, and the reconciliations that must close before full funding.</a:t>
             </a:r>
           </a:p>
         </p:txBody>

--- a/Hyde Park BESS/6) Cost Analysis Deliverables/Hyde Park BESS - Cost Analysis Deck.pptx
+++ b/Hyde Park BESS/6) Cost Analysis Deliverables/Hyde Park BESS - Cost Analysis Deck.pptx
@@ -15993,7 +15993,7 @@
                 </a:solidFill>
                 <a:latin typeface="Calibri"/>
               </a:rPr>
-              <a:t>“Why is a $12 million battery a $57 million project?”  Because the battery is the only part a vendor prices. The station, the site, the feeder protection, the siting case, the risk and the cost of money are ours.</a:t>
+              <a:t>“Why is a $12 million battery a $57 million project?”  Because a vendor prices the battery. We build the station, the site, the feeder protection and the siting case, and we carry the risk and the cost of money.</a:t>
             </a:r>
           </a:p>
         </p:txBody>

--- a/Hyde Park BESS/6) Cost Analysis Deliverables/Hyde Park BESS - Cost Analysis Deck.pptx
+++ b/Hyde Park BESS/6) Cost Analysis Deliverables/Hyde Park BESS - Cost Analysis Deck.pptx
@@ -23,10 +23,12 @@
     <p:sldId id="271" r:id="rId23"/>
     <p:sldId id="272" r:id="rId24"/>
     <p:sldId id="273" r:id="rId25"/>
+    <p:sldId id="274" r:id="rId26"/>
     <p:sldId id="275" r:id="rId27"/>
+    <p:sldId id="277" r:id="rId29"/>
+    <p:sldId id="278" r:id="rId30"/>
+    <p:sldId id="279" r:id="rId31"/>
     <p:sldId id="276" r:id="rId28"/>
-    <p:sldId id="277" r:id="rId29"/>
-    <p:sldId id="274" r:id="rId26"/>
   </p:sldIdLst>
   <p:sldSz cx="12191695" cy="6858000" type="screen4x3"/>
   <p:notesSz cx="6858000" cy="9144000"/>
@@ -582,6 +584,240 @@
     <a:p>
       <a:pPr>
         <a:defRPr sz="1100">
+          <a:solidFill>
+            <a:srgbClr val="1F2A44"/>
+          </a:solidFill>
+          <a:latin typeface="Calibri"/>
+        </a:defRPr>
+      </a:pPr>
+      <a:endParaRPr lang="en-US"/>
+    </a:p>
+  </c:txPr>
+  <c:externalData r:id="rId1">
+    <c:autoUpdate val="0"/>
+  </c:externalData>
+</c:chartSpace>
+</file>
+
+<file path=ppt/charts/chart10.xml><?xml version="1.0" encoding="utf-8"?>
+<c:chartSpace xmlns:c="http://schemas.openxmlformats.org/drawingml/2006/chart" xmlns:a="http://schemas.openxmlformats.org/drawingml/2006/main" xmlns:r="http://schemas.openxmlformats.org/officeDocument/2006/relationships">
+  <c:date1904 val="0"/>
+  <c:chart>
+    <c:autoTitleDeleted val="1"/>
+    <c:plotArea>
+      <c:barChart>
+        <c:barDir val="col"/>
+        <c:grouping val="clustered"/>
+        <c:ser>
+          <c:idx val="0"/>
+          <c:order val="0"/>
+          <c:tx>
+            <c:strRef>
+              <c:f>Sheet1!$B$1</c:f>
+              <c:strCache>
+                <c:ptCount val="1"/>
+                <c:pt idx="0">
+                  <c:v>$/kWh</c:v>
+                </c:pt>
+              </c:strCache>
+            </c:strRef>
+          </c:tx>
+          <c:dPt>
+            <c:idx val="0"/>
+            <c:spPr>
+              <a:solidFill>
+                <a:srgbClr val="C9D1E0"/>
+              </a:solidFill>
+            </c:spPr>
+          </c:dPt>
+          <c:dPt>
+            <c:idx val="1"/>
+            <c:spPr>
+              <a:solidFill>
+                <a:srgbClr val="C9D1E0"/>
+              </a:solidFill>
+            </c:spPr>
+          </c:dPt>
+          <c:dPt>
+            <c:idx val="2"/>
+            <c:spPr>
+              <a:solidFill>
+                <a:srgbClr val="C9D1E0"/>
+              </a:solidFill>
+            </c:spPr>
+          </c:dPt>
+          <c:dPt>
+            <c:idx val="3"/>
+            <c:spPr>
+              <a:solidFill>
+                <a:srgbClr val="6E1F2E"/>
+              </a:solidFill>
+            </c:spPr>
+          </c:dPt>
+          <c:dPt>
+            <c:idx val="4"/>
+            <c:spPr>
+              <a:solidFill>
+                <a:srgbClr val="C9D1E0"/>
+              </a:solidFill>
+            </c:spPr>
+          </c:dPt>
+          <c:dPt>
+            <c:idx val="5"/>
+            <c:spPr>
+              <a:solidFill>
+                <a:srgbClr val="C9D1E0"/>
+              </a:solidFill>
+            </c:spPr>
+          </c:dPt>
+          <c:dPt>
+            <c:idx val="6"/>
+            <c:spPr>
+              <a:solidFill>
+                <a:srgbClr val="FFC72C"/>
+              </a:solidFill>
+            </c:spPr>
+          </c:dPt>
+          <c:dLbls>
+            <c:numFmt formatCode="&quot;$&quot;#,##0" sourceLinked="0"/>
+            <c:txPr>
+              <a:bodyPr/>
+              <a:lstStyle/>
+              <a:p>
+                <a:pPr>
+                  <a:defRPr sz="1000" b="1"/>
+                </a:pPr>
+              </a:p>
+            </c:txPr>
+            <c:dLblPos val="outEnd"/>
+            <c:showLegendKey val="0"/>
+            <c:showVal val="1"/>
+            <c:showCatName val="0"/>
+            <c:showSerName val="0"/>
+            <c:showPercent val="0"/>
+            <c:showBubbleSize val="0"/>
+            <c:showLeaderLines val="1"/>
+          </c:dLbls>
+          <c:cat>
+            <c:strRef>
+              <c:f>Sheet1!$A$2:$A$8</c:f>
+              <c:strCache>
+                <c:ptCount val="7"/>
+                <c:pt idx="0">
+                  <c:v>Company 1</c:v>
+                </c:pt>
+                <c:pt idx="1">
+                  <c:v>Company 2 (Opt 1)</c:v>
+                </c:pt>
+                <c:pt idx="2">
+                  <c:v>Company 2 (Opt 2)</c:v>
+                </c:pt>
+                <c:pt idx="3">
+                  <c:v>Company 3</c:v>
+                </c:pt>
+                <c:pt idx="4">
+                  <c:v>Company 4</c:v>
+                </c:pt>
+                <c:pt idx="5">
+                  <c:v>Company 5</c:v>
+                </c:pt>
+                <c:pt idx="6">
+                  <c:v>Nomad contract
+Mar 2026</c:v>
+                </c:pt>
+              </c:strCache>
+            </c:strRef>
+          </c:cat>
+          <c:val>
+            <c:numRef>
+              <c:f>Sheet1!$B$2:$B$8</c:f>
+              <c:numCache>
+                <c:formatCode>General</c:formatCode>
+                <c:ptCount val="7"/>
+                <c:pt idx="0">
+                  <c:v>578</c:v>
+                </c:pt>
+                <c:pt idx="1">
+                  <c:v>527</c:v>
+                </c:pt>
+                <c:pt idx="2">
+                  <c:v>479</c:v>
+                </c:pt>
+                <c:pt idx="3">
+                  <c:v>911</c:v>
+                </c:pt>
+                <c:pt idx="4">
+                  <c:v>574</c:v>
+                </c:pt>
+                <c:pt idx="5">
+                  <c:v>696</c:v>
+                </c:pt>
+                <c:pt idx="6">
+                  <c:v>605</c:v>
+                </c:pt>
+              </c:numCache>
+            </c:numRef>
+          </c:val>
+        </c:ser>
+        <c:gapWidth val="50"/>
+        <c:axId val="-2068027336"/>
+        <c:axId val="-2113994440"/>
+      </c:barChart>
+      <c:catAx>
+        <c:axId val="-2068027336"/>
+        <c:scaling>
+          <c:orientation val="minMax"/>
+        </c:scaling>
+        <c:delete val="0"/>
+        <c:axPos val="b"/>
+        <c:majorTickMark val="out"/>
+        <c:minorTickMark val="none"/>
+        <c:tickLblPos val="nextTo"/>
+        <c:spPr>
+          <a:ln>
+            <a:solidFill>
+              <a:srgbClr val="C9D1E0"/>
+            </a:solidFill>
+          </a:ln>
+        </c:spPr>
+        <c:txPr>
+          <a:bodyPr/>
+          <a:lstStyle/>
+          <a:p>
+            <a:pPr>
+              <a:defRPr sz="900"/>
+            </a:pPr>
+          </a:p>
+        </c:txPr>
+        <c:crossAx val="-2113994440"/>
+        <c:crosses val="autoZero"/>
+        <c:auto val="1"/>
+        <c:lblAlgn val="ctr"/>
+        <c:lblOffset val="100"/>
+        <c:noMultiLvlLbl val="0"/>
+      </c:catAx>
+      <c:valAx>
+        <c:axId val="-2113994440"/>
+        <c:scaling>
+          <c:max val="1150.0"/>
+        </c:scaling>
+        <c:delete/>
+        <c:axPos val="l"/>
+        <c:majorTickMark val="out"/>
+        <c:minorTickMark val="none"/>
+        <c:tickLblPos val="nextTo"/>
+        <c:crossAx val="-2068027336"/>
+        <c:crosses val="autoZero"/>
+      </c:valAx>
+    </c:plotArea>
+    <c:dispBlanksAs val="gap"/>
+  </c:chart>
+  <c:txPr>
+    <a:bodyPr/>
+    <a:lstStyle/>
+    <a:p>
+      <a:pPr>
+        <a:defRPr sz="1000">
           <a:solidFill>
             <a:srgbClr val="1F2A44"/>
           </a:solidFill>
@@ -1518,6 +1754,768 @@
 
 <file path=ppt/charts/chart6.xml><?xml version="1.0" encoding="utf-8"?>
 <c:chartSpace xmlns:c="http://schemas.openxmlformats.org/drawingml/2006/chart" xmlns:a="http://schemas.openxmlformats.org/drawingml/2006/main" xmlns:r="http://schemas.openxmlformats.org/officeDocument/2006/relationships">
+  <c:chart>
+    <c:autoTitleDeleted val="1"/>
+    <c:plotArea>
+      <c:scatterChart>
+        <c:scatterStyle val="lineMarker"/>
+        <c:varyColors val="0"/>
+        <c:ser>
+          <c:idx val="0"/>
+          <c:order val="0"/>
+          <c:tx>
+            <c:strRef>
+              <c:f>Sheet1!$B$1</c:f>
+              <c:strCache>
+                <c:ptCount val="1"/>
+                <c:pt idx="0">
+                  <c:v>_</c:v>
+                </c:pt>
+              </c:strCache>
+            </c:strRef>
+          </c:tx>
+          <c:spPr>
+            <a:ln w="25400">
+              <a:noFill/>
+            </a:ln>
+          </c:spPr>
+          <c:marker>
+            <c:symbol val="none"/>
+          </c:marker>
+          <c:xVal>
+            <c:numRef>
+              <c:f>Sheet1!$A$2:$A$7</c:f>
+              <c:numCache>
+                <c:formatCode>General</c:formatCode>
+                <c:ptCount val="6"/>
+                <c:pt idx="0">
+                  <c:v>2000</c:v>
+                </c:pt>
+                <c:pt idx="1">
+                  <c:v>2001</c:v>
+                </c:pt>
+                <c:pt idx="2">
+                  <c:v>2002</c:v>
+                </c:pt>
+                <c:pt idx="3">
+                  <c:v>2003</c:v>
+                </c:pt>
+                <c:pt idx="4">
+                  <c:v>2004</c:v>
+                </c:pt>
+                <c:pt idx="5">
+                  <c:v>2005</c:v>
+                </c:pt>
+              </c:numCache>
+            </c:numRef>
+          </c:xVal>
+          <c:yVal>
+            <c:numRef>
+              <c:f>Sheet1!$B$2:$B$7</c:f>
+              <c:numCache>
+                <c:formatCode>General</c:formatCode>
+                <c:ptCount val="6"/>
+                <c:pt idx="0">
+                  <c:v>100</c:v>
+                </c:pt>
+                <c:pt idx="1">
+                  <c:v>100</c:v>
+                </c:pt>
+                <c:pt idx="2">
+                  <c:v>100</c:v>
+                </c:pt>
+                <c:pt idx="3">
+                  <c:v>100</c:v>
+                </c:pt>
+                <c:pt idx="4">
+                  <c:v>100</c:v>
+                </c:pt>
+                <c:pt idx="5">
+                  <c:v>100</c:v>
+                </c:pt>
+              </c:numCache>
+            </c:numRef>
+          </c:yVal>
+          <c:smooth val="0"/>
+        </c:ser>
+        <c:ser>
+          <c:idx val="1"/>
+          <c:order val="1"/>
+          <c:tx>
+            <c:strRef>
+              <c:f>Sheet1!$B$9</c:f>
+              <c:strCache>
+                <c:ptCount val="1"/>
+                <c:pt idx="0">
+                  <c:v>EIA reported all-in, utility-scale</c:v>
+                </c:pt>
+              </c:strCache>
+            </c:strRef>
+          </c:tx>
+          <c:spPr>
+            <a:ln w="25400">
+              <a:solidFill>
+                <a:srgbClr val="1F2A44"/>
+              </a:solidFill>
+            </a:ln>
+          </c:spPr>
+          <c:marker>
+            <c:symbol val="circle"/>
+            <c:size val="7"/>
+            <c:spPr>
+              <a:solidFill>
+                <a:srgbClr val="FFFFFF"/>
+              </a:solidFill>
+              <a:ln>
+                <a:solidFill>
+                  <a:srgbClr val="FFFFFF"/>
+                </a:solidFill>
+              </a:ln>
+            </c:spPr>
+          </c:marker>
+          <c:xVal>
+            <c:numRef>
+              <c:f>Sheet1!$A$10:$A$12</c:f>
+              <c:numCache>
+                <c:formatCode>General</c:formatCode>
+                <c:ptCount val="3"/>
+                <c:pt idx="0">
+                  <c:v>2015</c:v>
+                </c:pt>
+                <c:pt idx="1">
+                  <c:v>2017</c:v>
+                </c:pt>
+                <c:pt idx="2">
+                  <c:v>2018</c:v>
+                </c:pt>
+              </c:numCache>
+            </c:numRef>
+          </c:xVal>
+          <c:yVal>
+            <c:numRef>
+              <c:f>Sheet1!$B$10:$B$12</c:f>
+              <c:numCache>
+                <c:formatCode>General</c:formatCode>
+                <c:ptCount val="3"/>
+                <c:pt idx="0">
+                  <c:v>2152</c:v>
+                </c:pt>
+                <c:pt idx="1">
+                  <c:v>834</c:v>
+                </c:pt>
+                <c:pt idx="2">
+                  <c:v>625</c:v>
+                </c:pt>
+              </c:numCache>
+            </c:numRef>
+          </c:yVal>
+          <c:smooth val="0"/>
+        </c:ser>
+        <c:ser>
+          <c:idx val="2"/>
+          <c:order val="2"/>
+          <c:tx>
+            <c:strRef>
+              <c:f>Sheet1!$B$14</c:f>
+              <c:strCache>
+                <c:ptCount val="1"/>
+                <c:pt idx="0">
+                  <c:v>BNEF turnkey system, global avg, 4-h</c:v>
+                </c:pt>
+              </c:strCache>
+            </c:strRef>
+          </c:tx>
+          <c:spPr>
+            <a:ln w="25400">
+              <a:solidFill>
+                <a:srgbClr val="001E60"/>
+              </a:solidFill>
+            </a:ln>
+          </c:spPr>
+          <c:marker>
+            <c:symbol val="circle"/>
+            <c:size val="7"/>
+            <c:spPr>
+              <a:solidFill>
+                <a:srgbClr val="1F2A44"/>
+              </a:solidFill>
+              <a:ln>
+                <a:solidFill>
+                  <a:srgbClr val="1F2A44"/>
+                </a:solidFill>
+              </a:ln>
+            </c:spPr>
+          </c:marker>
+          <c:xVal>
+            <c:numRef>
+              <c:f>Sheet1!$A$15:$A$18</c:f>
+              <c:numCache>
+                <c:formatCode>General</c:formatCode>
+                <c:ptCount val="4"/>
+                <c:pt idx="0">
+                  <c:v>2022</c:v>
+                </c:pt>
+                <c:pt idx="1">
+                  <c:v>2023</c:v>
+                </c:pt>
+                <c:pt idx="2">
+                  <c:v>2024</c:v>
+                </c:pt>
+                <c:pt idx="3">
+                  <c:v>2025</c:v>
+                </c:pt>
+              </c:numCache>
+            </c:numRef>
+          </c:xVal>
+          <c:yVal>
+            <c:numRef>
+              <c:f>Sheet1!$B$15:$B$18</c:f>
+              <c:numCache>
+                <c:formatCode>General</c:formatCode>
+                <c:ptCount val="4"/>
+                <c:pt idx="0">
+                  <c:v>324</c:v>
+                </c:pt>
+                <c:pt idx="1">
+                  <c:v>263</c:v>
+                </c:pt>
+                <c:pt idx="2">
+                  <c:v>165</c:v>
+                </c:pt>
+                <c:pt idx="3">
+                  <c:v>117</c:v>
+                </c:pt>
+              </c:numCache>
+            </c:numRef>
+          </c:yVal>
+          <c:smooth val="0"/>
+        </c:ser>
+        <c:ser>
+          <c:idx val="3"/>
+          <c:order val="3"/>
+          <c:tx>
+            <c:strRef>
+              <c:f>Sheet1!$B$20</c:f>
+              <c:strCache>
+                <c:ptCount val="1"/>
+                <c:pt idx="0">
+                  <c:v>BNEF turnkey system, United States, 4-h</c:v>
+                </c:pt>
+              </c:strCache>
+            </c:strRef>
+          </c:tx>
+          <c:spPr>
+            <a:ln w="25400">
+              <a:solidFill>
+                <a:srgbClr val="2A8A8C"/>
+              </a:solidFill>
+            </a:ln>
+          </c:spPr>
+          <c:marker>
+            <c:symbol val="circle"/>
+            <c:size val="7"/>
+            <c:spPr>
+              <a:solidFill>
+                <a:srgbClr val="001E60"/>
+              </a:solidFill>
+              <a:ln>
+                <a:solidFill>
+                  <a:srgbClr val="001E60"/>
+                </a:solidFill>
+              </a:ln>
+            </c:spPr>
+          </c:marker>
+          <c:xVal>
+            <c:numRef>
+              <c:f>Sheet1!$A$21:$A$22</c:f>
+              <c:numCache>
+                <c:formatCode>General</c:formatCode>
+                <c:ptCount val="2"/>
+                <c:pt idx="0">
+                  <c:v>2024</c:v>
+                </c:pt>
+                <c:pt idx="1">
+                  <c:v>2025</c:v>
+                </c:pt>
+              </c:numCache>
+            </c:numRef>
+          </c:xVal>
+          <c:yVal>
+            <c:numRef>
+              <c:f>Sheet1!$B$21:$B$22</c:f>
+              <c:numCache>
+                <c:formatCode>General</c:formatCode>
+                <c:ptCount val="2"/>
+                <c:pt idx="0">
+                  <c:v>236</c:v>
+                </c:pt>
+                <c:pt idx="1">
+                  <c:v>219</c:v>
+                </c:pt>
+              </c:numCache>
+            </c:numRef>
+          </c:yVal>
+          <c:smooth val="0"/>
+        </c:ser>
+        <c:ser>
+          <c:idx val="4"/>
+          <c:order val="4"/>
+          <c:tx>
+            <c:strRef>
+              <c:f>Sheet1!$B$24</c:f>
+              <c:strCache>
+                <c:ptCount val="1"/>
+                <c:pt idx="0">
+                  <c:v>NREL bottom-up all-in, 4-h 60 MW</c:v>
+                </c:pt>
+              </c:strCache>
+            </c:strRef>
+          </c:tx>
+          <c:spPr>
+            <a:ln w="25400">
+              <a:solidFill>
+                <a:srgbClr val="6B7280"/>
+              </a:solidFill>
+              <a:prstDash val="dash"/>
+            </a:ln>
+          </c:spPr>
+          <c:marker>
+            <c:symbol val="circle"/>
+            <c:size val="7"/>
+            <c:spPr>
+              <a:solidFill>
+                <a:srgbClr val="2A8A8C"/>
+              </a:solidFill>
+              <a:ln>
+                <a:solidFill>
+                  <a:srgbClr val="2A8A8C"/>
+                </a:solidFill>
+              </a:ln>
+            </c:spPr>
+          </c:marker>
+          <c:xVal>
+            <c:numRef>
+              <c:f>Sheet1!$A$25:$A$27</c:f>
+              <c:numCache>
+                <c:formatCode>General</c:formatCode>
+                <c:ptCount val="3"/>
+                <c:pt idx="0">
+                  <c:v>2024</c:v>
+                </c:pt>
+                <c:pt idx="1">
+                  <c:v>2028</c:v>
+                </c:pt>
+                <c:pt idx="2">
+                  <c:v>2035</c:v>
+                </c:pt>
+              </c:numCache>
+            </c:numRef>
+          </c:xVal>
+          <c:yVal>
+            <c:numRef>
+              <c:f>Sheet1!$B$25:$B$27</c:f>
+              <c:numCache>
+                <c:formatCode>General</c:formatCode>
+                <c:ptCount val="3"/>
+                <c:pt idx="0">
+                  <c:v>334</c:v>
+                </c:pt>
+                <c:pt idx="1">
+                  <c:v>302</c:v>
+                </c:pt>
+                <c:pt idx="2">
+                  <c:v>247</c:v>
+                </c:pt>
+              </c:numCache>
+            </c:numRef>
+          </c:yVal>
+          <c:smooth val="0"/>
+        </c:ser>
+        <c:ser>
+          <c:idx val="5"/>
+          <c:order val="5"/>
+          <c:tx>
+            <c:strRef>
+              <c:f>Sheet1!$B$29</c:f>
+              <c:strCache>
+                <c:ptCount val="1"/>
+                <c:pt idx="0">
+                  <c:v>Hyde Park 2023 indicative bids (range)</c:v>
+                </c:pt>
+              </c:strCache>
+            </c:strRef>
+          </c:tx>
+          <c:spPr>
+            <a:ln w="44450">
+              <a:solidFill>
+                <a:srgbClr val="6E1F2E"/>
+              </a:solidFill>
+            </a:ln>
+          </c:spPr>
+          <c:marker>
+            <c:symbol val="dash"/>
+            <c:size val="12"/>
+            <c:spPr>
+              <a:solidFill>
+                <a:srgbClr val="6B7280"/>
+              </a:solidFill>
+              <a:ln>
+                <a:solidFill>
+                  <a:srgbClr val="6B7280"/>
+                </a:solidFill>
+              </a:ln>
+            </c:spPr>
+          </c:marker>
+          <c:xVal>
+            <c:numRef>
+              <c:f>Sheet1!$A$30:$A$31</c:f>
+              <c:numCache>
+                <c:formatCode>General</c:formatCode>
+                <c:ptCount val="2"/>
+                <c:pt idx="0">
+                  <c:v>2023.5</c:v>
+                </c:pt>
+                <c:pt idx="1">
+                  <c:v>2023.5</c:v>
+                </c:pt>
+              </c:numCache>
+            </c:numRef>
+          </c:xVal>
+          <c:yVal>
+            <c:numRef>
+              <c:f>Sheet1!$B$30:$B$31</c:f>
+              <c:numCache>
+                <c:formatCode>General</c:formatCode>
+                <c:ptCount val="2"/>
+                <c:pt idx="0">
+                  <c:v>479</c:v>
+                </c:pt>
+                <c:pt idx="1">
+                  <c:v>911</c:v>
+                </c:pt>
+              </c:numCache>
+            </c:numRef>
+          </c:yVal>
+          <c:smooth val="0"/>
+        </c:ser>
+        <c:ser>
+          <c:idx val="6"/>
+          <c:order val="6"/>
+          <c:tx>
+            <c:strRef>
+              <c:f>Sheet1!$B$33</c:f>
+              <c:strCache>
+                <c:ptCount val="1"/>
+                <c:pt idx="0">
+                  <c:v>Hyde Park 2026 (equipment, contract, as carried, installed)</c:v>
+                </c:pt>
+              </c:strCache>
+            </c:strRef>
+          </c:tx>
+          <c:spPr>
+            <a:ln w="25400">
+              <a:noFill/>
+            </a:ln>
+          </c:spPr>
+          <c:marker>
+            <c:symbol val="diamond"/>
+            <c:size val="11"/>
+            <c:spPr>
+              <a:solidFill>
+                <a:srgbClr val="6E1F2E"/>
+              </a:solidFill>
+              <a:ln>
+                <a:solidFill>
+                  <a:srgbClr val="001E60"/>
+                </a:solidFill>
+              </a:ln>
+            </c:spPr>
+          </c:marker>
+          <c:dLbls>
+            <c:dLbl>
+              <c:idx val="0"/>
+              <c:tx>
+                <c:rich>
+                  <a:bodyPr/>
+                  <a:lstStyle/>
+                  <a:p>
+                    <a:r>
+                      <a:rPr sz="900" b="1">
+                        <a:solidFill>
+                          <a:srgbClr val="001E60"/>
+                        </a:solidFill>
+                      </a:rPr>
+                      <a:t>$532</a:t>
+                    </a:r>
+                  </a:p>
+                </c:rich>
+              </c:tx>
+              <c:dLblPos val="b"/>
+              <c:showLegendKey val="0"/>
+              <c:showVal val="1"/>
+              <c:showCatName val="0"/>
+              <c:showSerName val="0"/>
+              <c:showPercent val="0"/>
+              <c:showBubbleSize val="0"/>
+            </c:dLbl>
+            <c:dLbl>
+              <c:idx val="1"/>
+              <c:tx>
+                <c:rich>
+                  <a:bodyPr/>
+                  <a:lstStyle/>
+                  <a:p>
+                    <a:r>
+                      <a:rPr sz="900" b="1">
+                        <a:solidFill>
+                          <a:srgbClr val="001E60"/>
+                        </a:solidFill>
+                      </a:rPr>
+                      <a:t>$605</a:t>
+                    </a:r>
+                  </a:p>
+                </c:rich>
+              </c:tx>
+              <c:dLblPos val="l"/>
+              <c:showLegendKey val="0"/>
+              <c:showVal val="1"/>
+              <c:showCatName val="0"/>
+              <c:showSerName val="0"/>
+              <c:showPercent val="0"/>
+              <c:showBubbleSize val="0"/>
+            </c:dLbl>
+            <c:dLbl>
+              <c:idx val="2"/>
+              <c:tx>
+                <c:rich>
+                  <a:bodyPr/>
+                  <a:lstStyle/>
+                  <a:p>
+                    <a:r>
+                      <a:rPr sz="900" b="1">
+                        <a:solidFill>
+                          <a:srgbClr val="001E60"/>
+                        </a:solidFill>
+                      </a:rPr>
+                      <a:t>$650</a:t>
+                    </a:r>
+                  </a:p>
+                </c:rich>
+              </c:tx>
+              <c:dLblPos val="r"/>
+              <c:showLegendKey val="0"/>
+              <c:showVal val="1"/>
+              <c:showCatName val="0"/>
+              <c:showSerName val="0"/>
+              <c:showPercent val="0"/>
+              <c:showBubbleSize val="0"/>
+            </c:dLbl>
+            <c:dLbl>
+              <c:idx val="3"/>
+              <c:tx>
+                <c:rich>
+                  <a:bodyPr/>
+                  <a:lstStyle/>
+                  <a:p>
+                    <a:r>
+                      <a:rPr sz="900" b="1">
+                        <a:solidFill>
+                          <a:srgbClr val="001E60"/>
+                        </a:solidFill>
+                      </a:rPr>
+                      <a:t>$833</a:t>
+                    </a:r>
+                  </a:p>
+                </c:rich>
+              </c:tx>
+              <c:dLblPos val="r"/>
+              <c:showLegendKey val="0"/>
+              <c:showVal val="1"/>
+              <c:showCatName val="0"/>
+              <c:showSerName val="0"/>
+              <c:showPercent val="0"/>
+              <c:showBubbleSize val="0"/>
+            </c:dLbl>
+            <c:showLegendKey val="0"/>
+            <c:showVal val="0"/>
+            <c:showCatName val="0"/>
+            <c:showSerName val="0"/>
+            <c:showPercent val="0"/>
+            <c:showBubbleSize val="0"/>
+            <c:showLeaderLines val="1"/>
+          </c:dLbls>
+          <c:xVal>
+            <c:numRef>
+              <c:f>Sheet1!$A$34:$A$37</c:f>
+              <c:numCache>
+                <c:formatCode>General</c:formatCode>
+                <c:ptCount val="4"/>
+                <c:pt idx="0">
+                  <c:v>2026.2</c:v>
+                </c:pt>
+                <c:pt idx="1">
+                  <c:v>2026.2</c:v>
+                </c:pt>
+                <c:pt idx="2">
+                  <c:v>2026.75</c:v>
+                </c:pt>
+                <c:pt idx="3">
+                  <c:v>2026.75</c:v>
+                </c:pt>
+              </c:numCache>
+            </c:numRef>
+          </c:xVal>
+          <c:yVal>
+            <c:numRef>
+              <c:f>Sheet1!$B$34:$B$37</c:f>
+              <c:numCache>
+                <c:formatCode>General</c:formatCode>
+                <c:ptCount val="4"/>
+                <c:pt idx="0">
+                  <c:v>532</c:v>
+                </c:pt>
+                <c:pt idx="1">
+                  <c:v>605</c:v>
+                </c:pt>
+                <c:pt idx="2">
+                  <c:v>650</c:v>
+                </c:pt>
+                <c:pt idx="3">
+                  <c:v>833</c:v>
+                </c:pt>
+              </c:numCache>
+            </c:numRef>
+          </c:yVal>
+          <c:smooth val="0"/>
+        </c:ser>
+        <c:axId val="-2128940872"/>
+        <c:axId val="-2129643912"/>
+      </c:scatterChart>
+      <c:valAx>
+        <c:axId val="-2128940872"/>
+        <c:scaling>
+          <c:orientation val="minMax"/>
+          <c:max val="2029.0"/>
+          <c:min val="2014.5"/>
+        </c:scaling>
+        <c:delete val="0"/>
+        <c:axPos val="b"/>
+        <c:numFmt formatCode="0" sourceLinked="0"/>
+        <c:majorTickMark val="out"/>
+        <c:minorTickMark val="none"/>
+        <c:tickLblPos val="nextTo"/>
+        <c:spPr>
+          <a:ln>
+            <a:solidFill>
+              <a:srgbClr val="C9D1E0"/>
+            </a:solidFill>
+          </a:ln>
+        </c:spPr>
+        <c:txPr>
+          <a:bodyPr/>
+          <a:lstStyle/>
+          <a:p>
+            <a:pPr>
+              <a:defRPr sz="950"/>
+            </a:pPr>
+          </a:p>
+        </c:txPr>
+        <c:crossAx val="-2129643912"/>
+        <c:crosses val="autoZero"/>
+        <c:crossBetween val="midCat"/>
+        <c:majorUnit val="2.0"/>
+      </c:valAx>
+      <c:valAx>
+        <c:axId val="-2129643912"/>
+        <c:scaling>
+          <c:logBase val="10"/>
+          <c:orientation val="minMax"/>
+          <c:max val="3000.0"/>
+          <c:min val="100.0"/>
+        </c:scaling>
+        <c:delete val="0"/>
+        <c:axPos val="l"/>
+        <c:majorGridlines>
+          <c:spPr>
+            <a:ln>
+              <a:solidFill>
+                <a:srgbClr val="C9D1E0"/>
+              </a:solidFill>
+            </a:ln>
+          </c:spPr>
+        </c:majorGridlines>
+        <c:numFmt formatCode="&quot;$&quot;#,##0" sourceLinked="0"/>
+        <c:majorTickMark val="out"/>
+        <c:minorTickMark val="none"/>
+        <c:tickLblPos val="nextTo"/>
+        <c:spPr>
+          <a:ln>
+            <a:solidFill>
+              <a:srgbClr val="C9D1E0"/>
+            </a:solidFill>
+          </a:ln>
+        </c:spPr>
+        <c:txPr>
+          <a:bodyPr/>
+          <a:lstStyle/>
+          <a:p>
+            <a:pPr>
+              <a:defRPr sz="950"/>
+            </a:pPr>
+          </a:p>
+        </c:txPr>
+        <c:crossAx val="-2128940872"/>
+        <c:crosses val="autoZero"/>
+        <c:crossBetween val="midCat"/>
+      </c:valAx>
+    </c:plotArea>
+    <c:legend>
+      <c:legendPos val="b"/>
+      <c:legendEntry>
+        <c:idx val="0"/>
+        <c:delete val="1"/>
+      </c:legendEntry>
+      <c:layout/>
+      <c:overlay val="0"/>
+      <c:txPr>
+        <a:bodyPr/>
+        <a:lstStyle/>
+        <a:p>
+          <a:pPr>
+            <a:defRPr sz="950">
+              <a:latin typeface="Calibri"/>
+            </a:defRPr>
+          </a:pPr>
+        </a:p>
+      </c:txPr>
+    </c:legend>
+    <c:plotVisOnly val="1"/>
+    <c:dispBlanksAs val="gap"/>
+    <c:showDLblsOverMax val="0"/>
+  </c:chart>
+  <c:txPr>
+    <a:bodyPr/>
+    <a:lstStyle/>
+    <a:p>
+      <a:pPr>
+        <a:defRPr sz="950">
+          <a:solidFill>
+            <a:srgbClr val="1F2A44"/>
+          </a:solidFill>
+          <a:latin typeface="Calibri"/>
+        </a:defRPr>
+      </a:pPr>
+      <a:endParaRPr lang="en-US"/>
+    </a:p>
+  </c:txPr>
+  <c:externalData r:id="rId1">
+    <c:autoUpdate val="0"/>
+  </c:externalData>
+</c:chartSpace>
+</file>
+
+<file path=ppt/charts/chart7.xml><?xml version="1.0" encoding="utf-8"?>
+<c:chartSpace xmlns:c="http://schemas.openxmlformats.org/drawingml/2006/chart" xmlns:a="http://schemas.openxmlformats.org/drawingml/2006/main" xmlns:r="http://schemas.openxmlformats.org/officeDocument/2006/relationships">
   <c:date1904 val="0"/>
   <c:chart>
     <c:autoTitleDeleted val="1"/>
@@ -1775,7 +2773,7 @@
 </c:chartSpace>
 </file>
 
-<file path=ppt/charts/chart7.xml><?xml version="1.0" encoding="utf-8"?>
+<file path=ppt/charts/chart8.xml><?xml version="1.0" encoding="utf-8"?>
 <c:chartSpace xmlns:c="http://schemas.openxmlformats.org/drawingml/2006/chart" xmlns:a="http://schemas.openxmlformats.org/drawingml/2006/main" xmlns:r="http://schemas.openxmlformats.org/officeDocument/2006/relationships">
   <c:date1904 val="0"/>
   <c:chart>
@@ -2141,7 +3139,7 @@
 </c:chartSpace>
 </file>
 
-<file path=ppt/charts/chart8.xml><?xml version="1.0" encoding="utf-8"?>
+<file path=ppt/charts/chart9.xml><?xml version="1.0" encoding="utf-8"?>
 <c:chartSpace xmlns:c="http://schemas.openxmlformats.org/drawingml/2006/chart" xmlns:a="http://schemas.openxmlformats.org/drawingml/2006/main" xmlns:r="http://schemas.openxmlformats.org/officeDocument/2006/relationships">
   <c:date1904 val="0"/>
   <c:chart>
@@ -2446,240 +3444,6 @@
         <c:axId val="-2113994440"/>
         <c:scaling>
           <c:max val="70.0"/>
-        </c:scaling>
-        <c:delete/>
-        <c:axPos val="l"/>
-        <c:majorTickMark val="out"/>
-        <c:minorTickMark val="none"/>
-        <c:tickLblPos val="nextTo"/>
-        <c:crossAx val="-2068027336"/>
-        <c:crosses val="autoZero"/>
-      </c:valAx>
-    </c:plotArea>
-    <c:dispBlanksAs val="gap"/>
-  </c:chart>
-  <c:txPr>
-    <a:bodyPr/>
-    <a:lstStyle/>
-    <a:p>
-      <a:pPr>
-        <a:defRPr sz="1000">
-          <a:solidFill>
-            <a:srgbClr val="1F2A44"/>
-          </a:solidFill>
-          <a:latin typeface="Calibri"/>
-        </a:defRPr>
-      </a:pPr>
-      <a:endParaRPr lang="en-US"/>
-    </a:p>
-  </c:txPr>
-  <c:externalData r:id="rId1">
-    <c:autoUpdate val="0"/>
-  </c:externalData>
-</c:chartSpace>
-</file>
-
-<file path=ppt/charts/chart9.xml><?xml version="1.0" encoding="utf-8"?>
-<c:chartSpace xmlns:c="http://schemas.openxmlformats.org/drawingml/2006/chart" xmlns:a="http://schemas.openxmlformats.org/drawingml/2006/main" xmlns:r="http://schemas.openxmlformats.org/officeDocument/2006/relationships">
-  <c:date1904 val="0"/>
-  <c:chart>
-    <c:autoTitleDeleted val="1"/>
-    <c:plotArea>
-      <c:barChart>
-        <c:barDir val="col"/>
-        <c:grouping val="clustered"/>
-        <c:ser>
-          <c:idx val="0"/>
-          <c:order val="0"/>
-          <c:tx>
-            <c:strRef>
-              <c:f>Sheet1!$B$1</c:f>
-              <c:strCache>
-                <c:ptCount val="1"/>
-                <c:pt idx="0">
-                  <c:v>$/kWh</c:v>
-                </c:pt>
-              </c:strCache>
-            </c:strRef>
-          </c:tx>
-          <c:dPt>
-            <c:idx val="0"/>
-            <c:spPr>
-              <a:solidFill>
-                <a:srgbClr val="C9D1E0"/>
-              </a:solidFill>
-            </c:spPr>
-          </c:dPt>
-          <c:dPt>
-            <c:idx val="1"/>
-            <c:spPr>
-              <a:solidFill>
-                <a:srgbClr val="C9D1E0"/>
-              </a:solidFill>
-            </c:spPr>
-          </c:dPt>
-          <c:dPt>
-            <c:idx val="2"/>
-            <c:spPr>
-              <a:solidFill>
-                <a:srgbClr val="C9D1E0"/>
-              </a:solidFill>
-            </c:spPr>
-          </c:dPt>
-          <c:dPt>
-            <c:idx val="3"/>
-            <c:spPr>
-              <a:solidFill>
-                <a:srgbClr val="6E1F2E"/>
-              </a:solidFill>
-            </c:spPr>
-          </c:dPt>
-          <c:dPt>
-            <c:idx val="4"/>
-            <c:spPr>
-              <a:solidFill>
-                <a:srgbClr val="C9D1E0"/>
-              </a:solidFill>
-            </c:spPr>
-          </c:dPt>
-          <c:dPt>
-            <c:idx val="5"/>
-            <c:spPr>
-              <a:solidFill>
-                <a:srgbClr val="C9D1E0"/>
-              </a:solidFill>
-            </c:spPr>
-          </c:dPt>
-          <c:dPt>
-            <c:idx val="6"/>
-            <c:spPr>
-              <a:solidFill>
-                <a:srgbClr val="FFC72C"/>
-              </a:solidFill>
-            </c:spPr>
-          </c:dPt>
-          <c:dLbls>
-            <c:numFmt formatCode="&quot;$&quot;#,##0" sourceLinked="0"/>
-            <c:txPr>
-              <a:bodyPr/>
-              <a:lstStyle/>
-              <a:p>
-                <a:pPr>
-                  <a:defRPr sz="1000" b="1"/>
-                </a:pPr>
-              </a:p>
-            </c:txPr>
-            <c:dLblPos val="outEnd"/>
-            <c:showLegendKey val="0"/>
-            <c:showVal val="1"/>
-            <c:showCatName val="0"/>
-            <c:showSerName val="0"/>
-            <c:showPercent val="0"/>
-            <c:showBubbleSize val="0"/>
-            <c:showLeaderLines val="1"/>
-          </c:dLbls>
-          <c:cat>
-            <c:strRef>
-              <c:f>Sheet1!$A$2:$A$8</c:f>
-              <c:strCache>
-                <c:ptCount val="7"/>
-                <c:pt idx="0">
-                  <c:v>Company 1</c:v>
-                </c:pt>
-                <c:pt idx="1">
-                  <c:v>Company 2 (Opt 1)</c:v>
-                </c:pt>
-                <c:pt idx="2">
-                  <c:v>Company 2 (Opt 2)</c:v>
-                </c:pt>
-                <c:pt idx="3">
-                  <c:v>Company 3</c:v>
-                </c:pt>
-                <c:pt idx="4">
-                  <c:v>Company 4</c:v>
-                </c:pt>
-                <c:pt idx="5">
-                  <c:v>Company 5</c:v>
-                </c:pt>
-                <c:pt idx="6">
-                  <c:v>Nomad contract
-Mar 2026</c:v>
-                </c:pt>
-              </c:strCache>
-            </c:strRef>
-          </c:cat>
-          <c:val>
-            <c:numRef>
-              <c:f>Sheet1!$B$2:$B$8</c:f>
-              <c:numCache>
-                <c:formatCode>General</c:formatCode>
-                <c:ptCount val="7"/>
-                <c:pt idx="0">
-                  <c:v>578</c:v>
-                </c:pt>
-                <c:pt idx="1">
-                  <c:v>527</c:v>
-                </c:pt>
-                <c:pt idx="2">
-                  <c:v>479</c:v>
-                </c:pt>
-                <c:pt idx="3">
-                  <c:v>911</c:v>
-                </c:pt>
-                <c:pt idx="4">
-                  <c:v>574</c:v>
-                </c:pt>
-                <c:pt idx="5">
-                  <c:v>696</c:v>
-                </c:pt>
-                <c:pt idx="6">
-                  <c:v>605</c:v>
-                </c:pt>
-              </c:numCache>
-            </c:numRef>
-          </c:val>
-        </c:ser>
-        <c:gapWidth val="50"/>
-        <c:axId val="-2068027336"/>
-        <c:axId val="-2113994440"/>
-      </c:barChart>
-      <c:catAx>
-        <c:axId val="-2068027336"/>
-        <c:scaling>
-          <c:orientation val="minMax"/>
-        </c:scaling>
-        <c:delete val="0"/>
-        <c:axPos val="b"/>
-        <c:majorTickMark val="out"/>
-        <c:minorTickMark val="none"/>
-        <c:tickLblPos val="nextTo"/>
-        <c:spPr>
-          <a:ln>
-            <a:solidFill>
-              <a:srgbClr val="C9D1E0"/>
-            </a:solidFill>
-          </a:ln>
-        </c:spPr>
-        <c:txPr>
-          <a:bodyPr/>
-          <a:lstStyle/>
-          <a:p>
-            <a:pPr>
-              <a:defRPr sz="900"/>
-            </a:pPr>
-          </a:p>
-        </c:txPr>
-        <c:crossAx val="-2113994440"/>
-        <c:crosses val="autoZero"/>
-        <c:auto val="1"/>
-        <c:lblAlgn val="ctr"/>
-        <c:lblOffset val="100"/>
-        <c:noMultiLvlLbl val="0"/>
-      </c:catAx>
-      <c:valAx>
-        <c:axId val="-2113994440"/>
-        <c:scaling>
-          <c:max val="1150.0"/>
         </c:scaling>
         <c:delete/>
         <c:axPos val="l"/>
@@ -3178,7 +3942,7 @@
           <a:lstStyle/>
           <a:p>
             <a:r>
-              <a:t>None of these six is optional and none of them is the battery.</a:t>
+              <a:t>Answer to 'is there a battery curve': yes, and the Nomad price lands on it. The curve is for four-hour, 60 to 150 MW systems in real dollars; our system is two-hour and 10 MW in nominal dollars, which is why the raw comparison looks unfavorable and the adjusted one does not. Sources: EIA Today in Energy #45596 (2015-2018 $/kWh); BNEF Energy Storage System Cost Surveys 2022-2025 (bnef.com/insights/30443, 33081, 35543, 38229); NREL Cole et al. 2025 Update (NREL/TP-6A40-93281); Anza and ESS News for the 2026 tariff and lithium moves. Duration factor from NREL's cost structure; size factor from the Appendix B regression.</a:t>
             </a:r>
           </a:p>
         </p:txBody>
@@ -3248,7 +4012,7 @@
           <a:lstStyle/>
           <a:p>
             <a:r>
-              <a:t>The story is not that batteries got expensive. The battery got cheaper. The project got more real.</a:t>
+              <a:t>Answer to 'escalation to be included': it is, at $2.95M on the ESF Overview tab (Sta 360 $2,622,100; Sta 496 $326,100), inside the directs at the template rates. The slide shows what it is applied to, which part of it is contestable ($1.13M on the fixed-price battery balance), and what the comparison looks like once both sides are in the same dollar year. The ex-escalation column removes the station escalation from the direct boundaries; the allocation of the non-battery escalation to B+C is pro rata to direct cost and approximate. The 2028 benchmark column compounds each published figure at 3% from its dollar year; the 2-h and 10 MW adjustment is the same one used on the curve slide.</a:t>
             </a:r>
           </a:p>
         </p:txBody>
@@ -3318,7 +4082,7 @@
           <a:lstStyle/>
           <a:p>
             <a:r>
-              <a:t>Materials up 2.9, testing up 2.0, siting up 1.4, risk up 2.1, AFUDC up 1.7. Those five are 10.1 of the 13.3.</a:t>
+              <a:t>None of these six is optional and none of them is the battery.</a:t>
             </a:r>
           </a:p>
         </p:txBody>
@@ -3388,7 +4152,7 @@
           <a:lstStyle/>
           <a:p>
             <a:r>
-              <a:t>This walk is in the email record. It matters because the full-funding placeholder of $43.9M was never touched between December 2023 and August 2026.</a:t>
+              <a:t>The story is not that batteries got expensive. The battery got cheaper. The project got more real.</a:t>
             </a:r>
           </a:p>
         </p:txBody>
@@ -3458,7 +4222,7 @@
           <a:lstStyle/>
           <a:p>
             <a:r>
-              <a:t>The lesson from 2023: a low bid with exclusions is not a low project. The lesson from 2026: the vendor price is defensible. It is the boundary that moved.</a:t>
+              <a:t>Materials up 2.9, testing up 2.0, siting up 1.4, risk up 2.1, AFUDC up 1.7. Those five are 10.1 of the 13.3.</a:t>
             </a:r>
           </a:p>
         </p:txBody>
@@ -3528,7 +4292,7 @@
           <a:lstStyle/>
           <a:p>
             <a:r>
-              <a:t>Steelman first: the battery is contracted, every dollar has a name, the direct cost is inside the reference class. These three are what an outside reviewer will find if we do not.</a:t>
+              <a:t>This walk is in the email record. It matters because the full-funding placeholder of $43.9M was never touched between December 2023 and August 2026.</a:t>
             </a:r>
           </a:p>
         </p:txBody>
@@ -3598,7 +4362,7 @@
           <a:lstStyle/>
           <a:p>
             <a:r>
-              <a:t>The combination case is the one to plan against. It is not exotic: it is the HEG gap plus one missed siting season.</a:t>
+              <a:t>The lesson from 2023: a low bid with exclusions is not a low project. The lesson from 2026: the vendor price is defensible. It is the boundary that moved.</a:t>
             </a:r>
           </a:p>
         </p:txBody>
@@ -3668,7 +4432,7 @@
           <a:lstStyle/>
           <a:p>
             <a:r>
-              <a:t>Five indicators, none of them expensive to watch. Three of them have no owner today.</a:t>
+              <a:t>Steelman first: the battery is contracted, every dollar has a name, the direct cost is inside the reference class. These three are what an outside reviewer will find if we do not.</a:t>
             </a:r>
           </a:p>
         </p:txBody>
@@ -3738,7 +4502,7 @@
           <a:lstStyle/>
           <a:p>
             <a:r>
-              <a:t>Ranked by the red team. The first two items are the ones that can move the number by more than the whole reserve; the rest are hygiene.</a:t>
+              <a:t>The combination case is the one to plan against. It is not exotic: it is the HEG gap plus one missed siting season.</a:t>
             </a:r>
           </a:p>
         </p:txBody>
@@ -3808,7 +4572,7 @@
           <a:lstStyle/>
           <a:p>
             <a:r>
-              <a:t>Mirror the open. Leave this slide up for questions. Do not add a Questions slide.</a:t>
+              <a:t>Five indicators, none of them expensive to watch. Three of them have no owner today.</a:t>
             </a:r>
           </a:p>
         </p:txBody>
@@ -3878,7 +4642,147 @@
           <a:lstStyle/>
           <a:p>
             <a:r>
-              <a:t>Three numbers. Vendor contract, approval level, share. Everything after this slide is proof. CORE PATH for a 25-minute slot: slides 1, 2, 3, 6, 4, 7, 8, 9, 11, 15, 18, 22. Everything else is reachable from the appendix.</a:t>
+              <a:t>Three numbers. Vendor contract, approval level, share. Everything after this slide is proof. CORE PATH for a 25-minute slot: slides 1, 2, 3, 6, 4, 7, 8, 9, 10, 13, 17, 20, 24. Everything else is reachable from the appendix.</a:t>
+            </a:r>
+          </a:p>
+        </p:txBody>
+      </p:sp>
+      <p:sp>
+        <p:nvSpPr>
+          <p:cNvPr id="4" name="Slide Number Placeholder 3"/>
+          <p:cNvSpPr>
+            <a:spLocks noGrp="1"/>
+          </p:cNvSpPr>
+          <p:nvPr>
+            <p:ph type="sldNum" idx="5" sz="quarter"/>
+          </p:nvPr>
+        </p:nvSpPr>
+        <p:spPr/>
+      </p:sp>
+    </p:spTree>
+  </p:cSld>
+  <p:clrMapOvr>
+    <a:masterClrMapping/>
+  </p:clrMapOvr>
+</p:notes>
+</file>
+
+<file path=ppt/notesSlides/notesSlide20.xml><?xml version="1.0" encoding="utf-8"?>
+<p:notes xmlns:a="http://schemas.openxmlformats.org/drawingml/2006/main" xmlns:p="http://schemas.openxmlformats.org/presentationml/2006/main" xmlns:r="http://schemas.openxmlformats.org/officeDocument/2006/relationships">
+  <p:cSld>
+    <p:spTree>
+      <p:nvGrpSpPr>
+        <p:cNvPr id="1" name=""/>
+        <p:cNvGrpSpPr/>
+        <p:nvPr/>
+      </p:nvGrpSpPr>
+      <p:grpSpPr>
+        <a:xfrm>
+          <a:off x="0" y="0"/>
+          <a:ext cx="0" cy="0"/>
+          <a:chOff x="0" y="0"/>
+          <a:chExt cx="0" cy="0"/>
+        </a:xfrm>
+      </p:grpSpPr>
+      <p:sp>
+        <p:nvSpPr>
+          <p:cNvPr id="2" name="Slide Image Placeholder 1"/>
+          <p:cNvSpPr>
+            <a:spLocks noGrp="1"/>
+          </p:cNvSpPr>
+          <p:nvPr>
+            <p:ph type="sldImg" idx="2"/>
+          </p:nvPr>
+        </p:nvSpPr>
+        <p:spPr/>
+      </p:sp>
+      <p:sp>
+        <p:nvSpPr>
+          <p:cNvPr id="3" name="Notes Placeholder 2"/>
+          <p:cNvSpPr>
+            <a:spLocks noGrp="1"/>
+          </p:cNvSpPr>
+          <p:nvPr>
+            <p:ph type="body" idx="3" sz="quarter"/>
+          </p:nvPr>
+        </p:nvSpPr>
+        <p:spPr/>
+        <p:txBody>
+          <a:bodyPr/>
+          <a:lstStyle/>
+          <a:p>
+            <a:r>
+              <a:t>Ranked by the red team. The first two items are the ones that can move the number by more than the whole reserve; the rest are hygiene.</a:t>
+            </a:r>
+          </a:p>
+        </p:txBody>
+      </p:sp>
+      <p:sp>
+        <p:nvSpPr>
+          <p:cNvPr id="4" name="Slide Number Placeholder 3"/>
+          <p:cNvSpPr>
+            <a:spLocks noGrp="1"/>
+          </p:cNvSpPr>
+          <p:nvPr>
+            <p:ph type="sldNum" idx="5" sz="quarter"/>
+          </p:nvPr>
+        </p:nvSpPr>
+        <p:spPr/>
+      </p:sp>
+    </p:spTree>
+  </p:cSld>
+  <p:clrMapOvr>
+    <a:masterClrMapping/>
+  </p:clrMapOvr>
+</p:notes>
+</file>
+
+<file path=ppt/notesSlides/notesSlide21.xml><?xml version="1.0" encoding="utf-8"?>
+<p:notes xmlns:a="http://schemas.openxmlformats.org/drawingml/2006/main" xmlns:p="http://schemas.openxmlformats.org/presentationml/2006/main" xmlns:r="http://schemas.openxmlformats.org/officeDocument/2006/relationships">
+  <p:cSld>
+    <p:spTree>
+      <p:nvGrpSpPr>
+        <p:cNvPr id="1" name=""/>
+        <p:cNvGrpSpPr/>
+        <p:nvPr/>
+      </p:nvGrpSpPr>
+      <p:grpSpPr>
+        <a:xfrm>
+          <a:off x="0" y="0"/>
+          <a:ext cx="0" cy="0"/>
+          <a:chOff x="0" y="0"/>
+          <a:chExt cx="0" cy="0"/>
+        </a:xfrm>
+      </p:grpSpPr>
+      <p:sp>
+        <p:nvSpPr>
+          <p:cNvPr id="2" name="Slide Image Placeholder 1"/>
+          <p:cNvSpPr>
+            <a:spLocks noGrp="1"/>
+          </p:cNvSpPr>
+          <p:nvPr>
+            <p:ph type="sldImg" idx="2"/>
+          </p:nvPr>
+        </p:nvSpPr>
+        <p:spPr/>
+      </p:sp>
+      <p:sp>
+        <p:nvSpPr>
+          <p:cNvPr id="3" name="Notes Placeholder 2"/>
+          <p:cNvSpPr>
+            <a:spLocks noGrp="1"/>
+          </p:cNvSpPr>
+          <p:nvPr>
+            <p:ph type="body" idx="3" sz="quarter"/>
+          </p:nvPr>
+        </p:nvSpPr>
+        <p:spPr/>
+        <p:txBody>
+          <a:bodyPr/>
+          <a:lstStyle/>
+          <a:p>
+            <a:r>
+              <a:t>Mirror the open. Leave this slide up for questions. Do not add a Questions slide.</a:t>
             </a:r>
           </a:p>
         </p:txBody>
@@ -7685,7 +8589,7 @@
                 </a:solidFill>
                 <a:latin typeface="Calibri"/>
               </a:rPr>
-              <a:t>1 · WHERE THE MONEY SITS   |   WHY A SMALL URBAN UTILITY-OWNED PROJECT SITS ABOVE THE INDEX</a:t>
+              <a:t>1 · WHERE THE MONEY SITS   |   INDUSTRY CURVE 2015-2028 VS HYDE PARK, $/KWH, LOG SCALE</a:t>
             </a:r>
           </a:p>
         </p:txBody>
@@ -7727,7 +8631,7 @@
                 </a:solidFill>
                 <a:latin typeface="Georgia"/>
               </a:rPr>
-              <a:t>Six things about Hyde Park that a 100 MW greenfield benchmark never has to pay for</a:t>
+              <a:t>Battery installed-cost curve: the Nomad price sits on it once duration and size are adjusted</a:t>
             </a:r>
           </a:p>
         </p:txBody>
@@ -7812,6 +8716,1891 @@
                 <a:latin typeface="Calibri"/>
               </a:rPr>
               <a:t>10</a:t>
+            </a:r>
+          </a:p>
+        </p:txBody>
+      </p:sp>
+      <p:graphicFrame>
+        <p:nvGraphicFramePr>
+          <p:cNvPr id="7" name="Chart 6"/>
+          <p:cNvGraphicFramePr>
+            <a:graphicFrameLocks noGrp="1"/>
+          </p:cNvGraphicFramePr>
+          <p:nvPr/>
+        </p:nvGraphicFramePr>
+        <p:xfrm>
+          <a:off x="457200" y="1371600"/>
+          <a:ext cx="7040880" cy="4526280"/>
+        </p:xfrm>
+        <a:graphic>
+          <a:graphicData uri="http://schemas.openxmlformats.org/drawingml/2006/chart">
+            <c:chart xmlns:c="http://schemas.openxmlformats.org/drawingml/2006/chart" r:id="rId2"/>
+          </a:graphicData>
+        </a:graphic>
+      </p:graphicFrame>
+      <p:sp>
+        <p:nvSpPr>
+          <p:cNvPr id="8" name="TextBox 7"/>
+          <p:cNvSpPr txBox="1"/>
+          <p:nvPr/>
+        </p:nvSpPr>
+        <p:spPr>
+          <a:xfrm>
+            <a:off x="7680960" y="1417320"/>
+            <a:ext cx="4023360" cy="4572000"/>
+          </a:xfrm>
+          <a:prstGeom prst="rect">
+            <a:avLst/>
+          </a:prstGeom>
+          <a:noFill/>
+        </p:spPr>
+        <p:txBody>
+          <a:bodyPr wrap="square" lIns="45720">
+            <a:spAutoFit/>
+          </a:bodyPr>
+          <a:lstStyle/>
+          <a:p>
+            <a:pPr>
+              <a:lnSpc>
+                <a:spcPct val="105000"/>
+              </a:lnSpc>
+              <a:spcAft>
+                <a:spcPts val="500"/>
+              </a:spcAft>
+            </a:pPr>
+            <a:r>
+              <a:rPr sz="1200">
+                <a:solidFill>
+                  <a:srgbClr val="FFC72C"/>
+                </a:solidFill>
+                <a:latin typeface="Calibri"/>
+              </a:rPr>
+              <a:t>▪  </a:t>
+            </a:r>
+            <a:r>
+              <a:rPr b="1" sz="1200">
+                <a:solidFill>
+                  <a:srgbClr val="1F2A44"/>
+                </a:solidFill>
+                <a:latin typeface="Calibri"/>
+              </a:rPr>
+              <a:t>The curve is a 4-h, 60-150 MW, real-dollar curve. </a:t>
+            </a:r>
+            <a:r>
+              <a:rPr sz="1200">
+                <a:solidFill>
+                  <a:srgbClr val="1F2A44"/>
+                </a:solidFill>
+                <a:latin typeface="Calibri"/>
+              </a:rPr>
+              <a:t>EIA's reported all-in fell from $2,152 (2015) to $625 (2018); BNEF turnkey from $324 (2022) to $117 global and $219 US (2025); NREL's 4-h bottom-up base is $334 (2024), $247 by 2035.</a:t>
+            </a:r>
+          </a:p>
+          <a:p>
+            <a:pPr>
+              <a:lnSpc>
+                <a:spcPct val="105000"/>
+              </a:lnSpc>
+              <a:spcAft>
+                <a:spcPts val="500"/>
+              </a:spcAft>
+            </a:pPr>
+            <a:r>
+              <a:rPr sz="1200">
+                <a:solidFill>
+                  <a:srgbClr val="FFC72C"/>
+                </a:solidFill>
+                <a:latin typeface="Calibri"/>
+              </a:rPr>
+              <a:t>▪  </a:t>
+            </a:r>
+            <a:r>
+              <a:rPr b="1" sz="1200">
+                <a:solidFill>
+                  <a:srgbClr val="1F2A44"/>
+                </a:solidFill>
+                <a:latin typeface="Calibri"/>
+              </a:rPr>
+              <a:t>Hyde Park is 2-h, 10 MW, nominal. </a:t>
+            </a:r>
+            <a:r>
+              <a:rPr sz="1200">
+                <a:solidFill>
+                  <a:srgbClr val="1F2A44"/>
+                </a:solidFill>
+                <a:latin typeface="Calibri"/>
+              </a:rPr>
+              <a:t>NREL's structure puts a 2-h system at 1.3-1.5x the 4-h $/kWh; the size elasticity in Appendix B adds 1.5x at 20 MWh. Adjusted US turnkey: $440-$505. Nomad equipment: $532.</a:t>
+            </a:r>
+          </a:p>
+          <a:p>
+            <a:pPr>
+              <a:lnSpc>
+                <a:spcPct val="105000"/>
+              </a:lnSpc>
+              <a:spcAft>
+                <a:spcPts val="500"/>
+              </a:spcAft>
+            </a:pPr>
+            <a:r>
+              <a:rPr sz="1200">
+                <a:solidFill>
+                  <a:srgbClr val="FFC72C"/>
+                </a:solidFill>
+                <a:latin typeface="Calibri"/>
+              </a:rPr>
+              <a:t>▪  </a:t>
+            </a:r>
+            <a:r>
+              <a:rPr b="1" sz="1200">
+                <a:solidFill>
+                  <a:srgbClr val="1F2A44"/>
+                </a:solidFill>
+                <a:latin typeface="Calibri"/>
+              </a:rPr>
+              <a:t>Install is the layer the curve never shows. </a:t>
+            </a:r>
+            <a:r>
+              <a:rPr sz="1200">
+                <a:solidFill>
+                  <a:srgbClr val="1F2A44"/>
+                </a:solidFill>
+                <a:latin typeface="Calibri"/>
+              </a:rPr>
+              <a:t>Owner-scope installation, integration and balance of plant (B+C) add $183/kWh to the $650 battery line: $833 installed. BNEF's install sits inside a developer's EPC; ours is Eversource scope at New England rates.</a:t>
+            </a:r>
+          </a:p>
+          <a:p>
+            <a:pPr>
+              <a:lnSpc>
+                <a:spcPct val="105000"/>
+              </a:lnSpc>
+              <a:spcAft>
+                <a:spcPts val="500"/>
+              </a:spcAft>
+            </a:pPr>
+            <a:r>
+              <a:rPr sz="1200">
+                <a:solidFill>
+                  <a:srgbClr val="FFC72C"/>
+                </a:solidFill>
+                <a:latin typeface="Calibri"/>
+              </a:rPr>
+              <a:t>▪  </a:t>
+            </a:r>
+            <a:r>
+              <a:rPr b="1" sz="1200">
+                <a:solidFill>
+                  <a:srgbClr val="1F2A44"/>
+                </a:solidFill>
+                <a:latin typeface="Calibri"/>
+              </a:rPr>
+              <a:t>The 2026 turn. </a:t>
+            </a:r>
+            <a:r>
+              <a:rPr sz="1200">
+                <a:solidFill>
+                  <a:srgbClr val="1F2A44"/>
+                </a:solidFill>
+                <a:latin typeface="Calibri"/>
+              </a:rPr>
+              <a:t>Lithium carbonate roughly doubled year on year by August 2026 and tariffs lifted delivered US prices. The March 2026 fixed price sits below where a 2027 re-procurement would land.</a:t>
+            </a:r>
+          </a:p>
+        </p:txBody>
+      </p:sp>
+      <p:sp>
+        <p:nvSpPr>
+          <p:cNvPr id="9" name="TextBox 8"/>
+          <p:cNvSpPr txBox="1"/>
+          <p:nvPr/>
+        </p:nvSpPr>
+        <p:spPr>
+          <a:xfrm>
+            <a:off x="548640" y="5943600"/>
+            <a:ext cx="6949440" cy="457200"/>
+          </a:xfrm>
+          <a:prstGeom prst="rect">
+            <a:avLst/>
+          </a:prstGeom>
+          <a:noFill/>
+        </p:spPr>
+        <p:txBody>
+          <a:bodyPr wrap="square" lIns="45720" rIns="45720" tIns="27432" bIns="27432" anchor="t">
+            <a:spAutoFit/>
+          </a:bodyPr>
+          <a:lstStyle/>
+          <a:p>
+            <a:pPr algn="l">
+              <a:lnSpc>
+                <a:spcPct val="105000"/>
+              </a:lnSpc>
+              <a:spcAft>
+                <a:spcPts val="400"/>
+              </a:spcAft>
+            </a:pPr>
+            <a:r>
+              <a:rPr sz="950" b="0" i="0">
+                <a:solidFill>
+                  <a:srgbClr val="6B7280"/>
+                </a:solidFill>
+                <a:latin typeface="Calibri"/>
+              </a:rPr>
+              <a:t>Plotted as published: EIA-860 nominal; BNEF real survey-year; NREL 2024$ (2028 interpolated between the 2024 base and the 2035 mid case). 2023 bar = five indicative bids, $479-$911/kWh, differing scopes. Retrieved from search excerpts; verify before external use.</a:t>
+            </a:r>
+          </a:p>
+        </p:txBody>
+      </p:sp>
+    </p:spTree>
+  </p:cSld>
+  <p:clrMapOvr>
+    <a:masterClrMapping/>
+  </p:clrMapOvr>
+</p:sld>
+</file>
+
+<file path=ppt/slides/slide11.xml><?xml version="1.0" encoding="utf-8"?>
+<p:sld xmlns:a="http://schemas.openxmlformats.org/drawingml/2006/main" xmlns:p="http://schemas.openxmlformats.org/presentationml/2006/main" xmlns:r="http://schemas.openxmlformats.org/officeDocument/2006/relationships">
+  <p:cSld>
+    <p:spTree>
+      <p:nvGrpSpPr>
+        <p:cNvPr id="1" name=""/>
+        <p:cNvGrpSpPr/>
+        <p:nvPr/>
+      </p:nvGrpSpPr>
+      <p:grpSpPr/>
+      <p:sp>
+        <p:nvSpPr>
+          <p:cNvPr id="2" name="Rectangle 1"/>
+          <p:cNvSpPr/>
+          <p:nvPr/>
+        </p:nvSpPr>
+        <p:spPr>
+          <a:xfrm>
+            <a:off x="0" y="0"/>
+            <a:ext cx="12191695" cy="6858000"/>
+          </a:xfrm>
+          <a:prstGeom prst="rect">
+            <a:avLst/>
+          </a:prstGeom>
+          <a:solidFill>
+            <a:srgbClr val="FFFFFF"/>
+          </a:solidFill>
+          <a:ln>
+            <a:noFill/>
+          </a:ln>
+          <a:effectLst/>
+        </p:spPr>
+        <p:style>
+          <a:lnRef idx="1">
+            <a:schemeClr val="accent1"/>
+          </a:lnRef>
+          <a:fillRef idx="3">
+            <a:schemeClr val="accent1"/>
+          </a:fillRef>
+          <a:effectRef idx="2">
+            <a:schemeClr val="accent1"/>
+          </a:effectRef>
+          <a:fontRef idx="minor">
+            <a:schemeClr val="lt1"/>
+          </a:fontRef>
+        </p:style>
+        <p:txBody>
+          <a:bodyPr rtlCol="0" anchor="ctr"/>
+          <a:lstStyle/>
+          <a:p>
+            <a:pPr algn="ctr"/>
+          </a:p>
+        </p:txBody>
+      </p:sp>
+      <p:sp>
+        <p:nvSpPr>
+          <p:cNvPr id="3" name="TextBox 2"/>
+          <p:cNvSpPr txBox="1"/>
+          <p:nvPr/>
+        </p:nvSpPr>
+        <p:spPr>
+          <a:xfrm>
+            <a:off x="548640" y="256032"/>
+            <a:ext cx="11064240" cy="274320"/>
+          </a:xfrm>
+          <a:prstGeom prst="rect">
+            <a:avLst/>
+          </a:prstGeom>
+          <a:noFill/>
+        </p:spPr>
+        <p:txBody>
+          <a:bodyPr wrap="square" lIns="45720" rIns="45720" tIns="27432" bIns="27432" anchor="t">
+            <a:spAutoFit/>
+          </a:bodyPr>
+          <a:lstStyle/>
+          <a:p>
+            <a:pPr algn="l">
+              <a:lnSpc>
+                <a:spcPct val="105000"/>
+              </a:lnSpc>
+              <a:spcAft>
+                <a:spcPts val="400"/>
+              </a:spcAft>
+            </a:pPr>
+            <a:r>
+              <a:rPr sz="1100" b="1" i="0">
+                <a:solidFill>
+                  <a:srgbClr val="6E1F2E"/>
+                </a:solidFill>
+                <a:latin typeface="Calibri"/>
+              </a:rPr>
+              <a:t>1 · WHERE THE MONEY SITS   |   ESCALATION BASIS AND THE COMMON-DOLLAR COMPARISON</a:t>
+            </a:r>
+          </a:p>
+        </p:txBody>
+      </p:sp>
+      <p:sp>
+        <p:nvSpPr>
+          <p:cNvPr id="4" name="TextBox 3"/>
+          <p:cNvSpPr txBox="1"/>
+          <p:nvPr/>
+        </p:nvSpPr>
+        <p:spPr>
+          <a:xfrm>
+            <a:off x="548640" y="475488"/>
+            <a:ext cx="11064240" cy="868680"/>
+          </a:xfrm>
+          <a:prstGeom prst="rect">
+            <a:avLst/>
+          </a:prstGeom>
+          <a:noFill/>
+        </p:spPr>
+        <p:txBody>
+          <a:bodyPr wrap="square" lIns="45720" rIns="45720" tIns="27432" bIns="27432" anchor="t">
+            <a:spAutoFit/>
+          </a:bodyPr>
+          <a:lstStyle/>
+          <a:p>
+            <a:pPr algn="l">
+              <a:lnSpc>
+                <a:spcPct val="100000"/>
+              </a:lnSpc>
+              <a:spcAft>
+                <a:spcPts val="400"/>
+              </a:spcAft>
+            </a:pPr>
+            <a:r>
+              <a:rPr sz="2300" b="1" i="0">
+                <a:solidFill>
+                  <a:srgbClr val="001E60"/>
+                </a:solidFill>
+                <a:latin typeface="Georgia"/>
+              </a:rPr>
+              <a:t>Escalation is already in the number: $2.9M at template rates, $1.1M of it on a fixed price</a:t>
+            </a:r>
+          </a:p>
+        </p:txBody>
+      </p:sp>
+      <p:sp>
+        <p:nvSpPr>
+          <p:cNvPr id="5" name="TextBox 4"/>
+          <p:cNvSpPr txBox="1"/>
+          <p:nvPr/>
+        </p:nvSpPr>
+        <p:spPr>
+          <a:xfrm>
+            <a:off x="548640" y="6419088"/>
+            <a:ext cx="8229600" cy="274320"/>
+          </a:xfrm>
+          <a:prstGeom prst="rect">
+            <a:avLst/>
+          </a:prstGeom>
+          <a:noFill/>
+        </p:spPr>
+        <p:txBody>
+          <a:bodyPr wrap="square" lIns="45720" rIns="45720" tIns="27432" bIns="27432" anchor="t">
+            <a:spAutoFit/>
+          </a:bodyPr>
+          <a:lstStyle/>
+          <a:p>
+            <a:pPr algn="l">
+              <a:lnSpc>
+                <a:spcPct val="105000"/>
+              </a:lnSpc>
+              <a:spcAft>
+                <a:spcPts val="400"/>
+              </a:spcAft>
+            </a:pPr>
+            <a:r>
+              <a:rPr sz="1000" b="0" i="0">
+                <a:solidFill>
+                  <a:srgbClr val="6B7280"/>
+                </a:solidFill>
+                <a:latin typeface="Calibri"/>
+              </a:rPr>
+              <a:t>EstimatingCoE | Eversource Energy | Stewards of Affordability</a:t>
+            </a:r>
+          </a:p>
+        </p:txBody>
+      </p:sp>
+      <p:sp>
+        <p:nvSpPr>
+          <p:cNvPr id="6" name="TextBox 5"/>
+          <p:cNvSpPr txBox="1"/>
+          <p:nvPr/>
+        </p:nvSpPr>
+        <p:spPr>
+          <a:xfrm>
+            <a:off x="10972800" y="6419088"/>
+            <a:ext cx="685800" cy="274320"/>
+          </a:xfrm>
+          <a:prstGeom prst="rect">
+            <a:avLst/>
+          </a:prstGeom>
+          <a:noFill/>
+        </p:spPr>
+        <p:txBody>
+          <a:bodyPr wrap="square" lIns="45720" rIns="45720" tIns="27432" bIns="27432" anchor="t">
+            <a:spAutoFit/>
+          </a:bodyPr>
+          <a:lstStyle/>
+          <a:p>
+            <a:pPr algn="r">
+              <a:lnSpc>
+                <a:spcPct val="105000"/>
+              </a:lnSpc>
+              <a:spcAft>
+                <a:spcPts val="400"/>
+              </a:spcAft>
+            </a:pPr>
+            <a:r>
+              <a:rPr sz="1000" b="0" i="0">
+                <a:solidFill>
+                  <a:srgbClr val="6B7280"/>
+                </a:solidFill>
+                <a:latin typeface="Calibri"/>
+              </a:rPr>
+              <a:t>11</a:t>
+            </a:r>
+          </a:p>
+        </p:txBody>
+      </p:sp>
+      <p:sp>
+        <p:nvSpPr>
+          <p:cNvPr id="7" name="TextBox 6"/>
+          <p:cNvSpPr txBox="1"/>
+          <p:nvPr/>
+        </p:nvSpPr>
+        <p:spPr>
+          <a:xfrm>
+            <a:off x="548640" y="1371600"/>
+            <a:ext cx="5486400" cy="320040"/>
+          </a:xfrm>
+          <a:prstGeom prst="rect">
+            <a:avLst/>
+          </a:prstGeom>
+          <a:noFill/>
+        </p:spPr>
+        <p:txBody>
+          <a:bodyPr wrap="square" lIns="45720" rIns="45720" tIns="27432" bIns="27432" anchor="t">
+            <a:spAutoFit/>
+          </a:bodyPr>
+          <a:lstStyle/>
+          <a:p>
+            <a:pPr algn="l">
+              <a:lnSpc>
+                <a:spcPct val="105000"/>
+              </a:lnSpc>
+              <a:spcAft>
+                <a:spcPts val="400"/>
+              </a:spcAft>
+            </a:pPr>
+            <a:r>
+              <a:rPr sz="1300" b="1" i="0">
+                <a:solidFill>
+                  <a:srgbClr val="001E60"/>
+                </a:solidFill>
+                <a:latin typeface="Calibri"/>
+              </a:rPr>
+              <a:t>Where the escalation sits (Rev 3, included in the directs)</a:t>
+            </a:r>
+          </a:p>
+        </p:txBody>
+      </p:sp>
+      <p:graphicFrame>
+        <p:nvGraphicFramePr>
+          <p:cNvPr id="8" name="Table 7"/>
+          <p:cNvGraphicFramePr>
+            <a:graphicFrameLocks noGrp="1"/>
+          </p:cNvGraphicFramePr>
+          <p:nvPr/>
+        </p:nvGraphicFramePr>
+        <p:xfrm>
+          <a:off x="548640" y="1737360"/>
+          <a:ext cx="5486400" cy="2148840"/>
+        </p:xfrm>
+        <a:graphic>
+          <a:graphicData uri="http://schemas.openxmlformats.org/drawingml/2006/table">
+            <a:tbl>
+              <a:tblPr firstRow="1" bandRow="1">
+                <a:tableStyleId>{5C22544A-7EE6-4342-B048-85BDC9FD1C3A}</a:tableStyleId>
+              </a:tblPr>
+              <a:tblGrid>
+                <a:gridCol w="4114800"/>
+                <a:gridCol w="731520"/>
+                <a:gridCol w="640080"/>
+              </a:tblGrid>
+              <a:tr h="429768">
+                <a:tc>
+                  <a:txBody>
+                    <a:bodyPr/>
+                    <a:lstStyle/>
+                    <a:p>
+                      <a:r>
+                        <a:rPr sz="1100" b="1">
+                          <a:solidFill>
+                            <a:srgbClr val="FFFFFF"/>
+                          </a:solidFill>
+                          <a:latin typeface="Calibri"/>
+                        </a:rPr>
+                        <a:t>Item</a:t>
+                      </a:r>
+                    </a:p>
+                  </a:txBody>
+                  <a:tcPr marL="54864" marR="54864" marT="27432" marB="27432">
+                    <a:solidFill>
+                      <a:srgbClr val="001E60"/>
+                    </a:solidFill>
+                  </a:tcPr>
+                </a:tc>
+                <a:tc>
+                  <a:txBody>
+                    <a:bodyPr/>
+                    <a:lstStyle/>
+                    <a:p>
+                      <a:pPr algn="r"/>
+                      <a:r>
+                        <a:rPr sz="1100" b="1">
+                          <a:solidFill>
+                            <a:srgbClr val="FFFFFF"/>
+                          </a:solidFill>
+                          <a:latin typeface="Calibri"/>
+                        </a:rPr>
+                        <a:t>$</a:t>
+                      </a:r>
+                    </a:p>
+                  </a:txBody>
+                  <a:tcPr marL="54864" marR="54864" marT="27432" marB="27432">
+                    <a:solidFill>
+                      <a:srgbClr val="001E60"/>
+                    </a:solidFill>
+                  </a:tcPr>
+                </a:tc>
+                <a:tc>
+                  <a:txBody>
+                    <a:bodyPr/>
+                    <a:lstStyle/>
+                    <a:p>
+                      <a:pPr algn="r"/>
+                      <a:r>
+                        <a:rPr sz="1100" b="1">
+                          <a:solidFill>
+                            <a:srgbClr val="FFFFFF"/>
+                          </a:solidFill>
+                          <a:latin typeface="Calibri"/>
+                        </a:rPr>
+                        <a:t>$/kWh</a:t>
+                      </a:r>
+                    </a:p>
+                  </a:txBody>
+                  <a:tcPr marL="54864" marR="54864" marT="27432" marB="27432">
+                    <a:solidFill>
+                      <a:srgbClr val="001E60"/>
+                    </a:solidFill>
+                  </a:tcPr>
+                </a:tc>
+              </a:tr>
+              <a:tr h="429768">
+                <a:tc>
+                  <a:txBody>
+                    <a:bodyPr/>
+                    <a:lstStyle/>
+                    <a:p>
+                      <a:r>
+                        <a:rPr sz="1100" b="0">
+                          <a:solidFill>
+                            <a:srgbClr val="1F2A44"/>
+                          </a:solidFill>
+                          <a:latin typeface="Calibri"/>
+                        </a:rPr>
+                        <a:t>Escalation in the approval level (Sta 360 $2,622K + Sta 496 $326K)</a:t>
+                      </a:r>
+                    </a:p>
+                  </a:txBody>
+                  <a:tcPr marL="54864" marR="54864" marT="27432" marB="27432" anchor="ctr">
+                    <a:solidFill>
+                      <a:srgbClr val="FFFFFF"/>
+                    </a:solidFill>
+                  </a:tcPr>
+                </a:tc>
+                <a:tc>
+                  <a:txBody>
+                    <a:bodyPr/>
+                    <a:lstStyle/>
+                    <a:p>
+                      <a:pPr algn="r"/>
+                      <a:r>
+                        <a:rPr sz="1100" b="0">
+                          <a:solidFill>
+                            <a:srgbClr val="1F2A44"/>
+                          </a:solidFill>
+                          <a:latin typeface="Calibri"/>
+                        </a:rPr>
+                        <a:t>$2,948K</a:t>
+                      </a:r>
+                    </a:p>
+                  </a:txBody>
+                  <a:tcPr marL="54864" marR="54864" marT="27432" marB="27432" anchor="ctr">
+                    <a:solidFill>
+                      <a:srgbClr val="FFFFFF"/>
+                    </a:solidFill>
+                  </a:tcPr>
+                </a:tc>
+                <a:tc>
+                  <a:txBody>
+                    <a:bodyPr/>
+                    <a:lstStyle/>
+                    <a:p>
+                      <a:pPr algn="r"/>
+                      <a:r>
+                        <a:rPr sz="1100" b="0">
+                          <a:solidFill>
+                            <a:srgbClr val="1F2A44"/>
+                          </a:solidFill>
+                          <a:latin typeface="Calibri"/>
+                        </a:rPr>
+                        <a:t>$147</a:t>
+                      </a:r>
+                    </a:p>
+                  </a:txBody>
+                  <a:tcPr marL="54864" marR="54864" marT="27432" marB="27432" anchor="ctr">
+                    <a:solidFill>
+                      <a:srgbClr val="FFFFFF"/>
+                    </a:solidFill>
+                  </a:tcPr>
+                </a:tc>
+              </a:tr>
+              <a:tr h="429768">
+                <a:tc>
+                  <a:txBody>
+                    <a:bodyPr/>
+                    <a:lstStyle/>
+                    <a:p>
+                      <a:r>
+                        <a:rPr sz="1100" b="0">
+                          <a:solidFill>
+                            <a:srgbClr val="1F2A44"/>
+                          </a:solidFill>
+                          <a:latin typeface="Calibri"/>
+                        </a:rPr>
+                        <a:t>on the Nomad balance, which Exhibit C fixes until Final Acceptance</a:t>
+                      </a:r>
+                    </a:p>
+                  </a:txBody>
+                  <a:tcPr marL="54864" marR="54864" marT="27432" marB="27432" anchor="ctr">
+                    <a:solidFill>
+                      <a:srgbClr val="F2F4F8"/>
+                    </a:solidFill>
+                  </a:tcPr>
+                </a:tc>
+                <a:tc>
+                  <a:txBody>
+                    <a:bodyPr/>
+                    <a:lstStyle/>
+                    <a:p>
+                      <a:pPr algn="r"/>
+                      <a:r>
+                        <a:rPr sz="1100" b="0">
+                          <a:solidFill>
+                            <a:srgbClr val="1F2A44"/>
+                          </a:solidFill>
+                          <a:latin typeface="Calibri"/>
+                        </a:rPr>
+                        <a:t>$1,130K</a:t>
+                      </a:r>
+                    </a:p>
+                  </a:txBody>
+                  <a:tcPr marL="54864" marR="54864" marT="27432" marB="27432" anchor="ctr">
+                    <a:solidFill>
+                      <a:srgbClr val="F2F4F8"/>
+                    </a:solidFill>
+                  </a:tcPr>
+                </a:tc>
+                <a:tc>
+                  <a:txBody>
+                    <a:bodyPr/>
+                    <a:lstStyle/>
+                    <a:p>
+                      <a:pPr algn="r"/>
+                      <a:r>
+                        <a:rPr sz="1100" b="0">
+                          <a:solidFill>
+                            <a:srgbClr val="1F2A44"/>
+                          </a:solidFill>
+                          <a:latin typeface="Calibri"/>
+                        </a:rPr>
+                        <a:t>$57</a:t>
+                      </a:r>
+                    </a:p>
+                  </a:txBody>
+                  <a:tcPr marL="54864" marR="54864" marT="27432" marB="27432" anchor="ctr">
+                    <a:solidFill>
+                      <a:srgbClr val="F2F4F8"/>
+                    </a:solidFill>
+                  </a:tcPr>
+                </a:tc>
+              </a:tr>
+              <a:tr h="429768">
+                <a:tc>
+                  <a:txBody>
+                    <a:bodyPr/>
+                    <a:lstStyle/>
+                    <a:p>
+                      <a:r>
+                        <a:rPr sz="1100" b="0">
+                          <a:solidFill>
+                            <a:srgbClr val="1F2A44"/>
+                          </a:solidFill>
+                          <a:latin typeface="Calibri"/>
+                        </a:rPr>
+                        <a:t>on station, site, feeder protection, testing and owner scope</a:t>
+                      </a:r>
+                    </a:p>
+                  </a:txBody>
+                  <a:tcPr marL="54864" marR="54864" marT="27432" marB="27432" anchor="ctr">
+                    <a:solidFill>
+                      <a:srgbClr val="FFFFFF"/>
+                    </a:solidFill>
+                  </a:tcPr>
+                </a:tc>
+                <a:tc>
+                  <a:txBody>
+                    <a:bodyPr/>
+                    <a:lstStyle/>
+                    <a:p>
+                      <a:pPr algn="r"/>
+                      <a:r>
+                        <a:rPr sz="1100" b="0">
+                          <a:solidFill>
+                            <a:srgbClr val="1F2A44"/>
+                          </a:solidFill>
+                          <a:latin typeface="Calibri"/>
+                        </a:rPr>
+                        <a:t>$1,818K</a:t>
+                      </a:r>
+                    </a:p>
+                  </a:txBody>
+                  <a:tcPr marL="54864" marR="54864" marT="27432" marB="27432" anchor="ctr">
+                    <a:solidFill>
+                      <a:srgbClr val="FFFFFF"/>
+                    </a:solidFill>
+                  </a:tcPr>
+                </a:tc>
+                <a:tc>
+                  <a:txBody>
+                    <a:bodyPr/>
+                    <a:lstStyle/>
+                    <a:p>
+                      <a:pPr algn="r"/>
+                      <a:r>
+                        <a:rPr sz="1100" b="0">
+                          <a:solidFill>
+                            <a:srgbClr val="1F2A44"/>
+                          </a:solidFill>
+                          <a:latin typeface="Calibri"/>
+                        </a:rPr>
+                        <a:t>$91</a:t>
+                      </a:r>
+                    </a:p>
+                  </a:txBody>
+                  <a:tcPr marL="54864" marR="54864" marT="27432" marB="27432" anchor="ctr">
+                    <a:solidFill>
+                      <a:srgbClr val="FFFFFF"/>
+                    </a:solidFill>
+                  </a:tcPr>
+                </a:tc>
+              </a:tr>
+              <a:tr h="429768">
+                <a:tc>
+                  <a:txBody>
+                    <a:bodyPr/>
+                    <a:lstStyle/>
+                    <a:p>
+                      <a:r>
+                        <a:rPr sz="1100" b="0">
+                          <a:solidFill>
+                            <a:srgbClr val="1F2A44"/>
+                          </a:solidFill>
+                          <a:latin typeface="Calibri"/>
+                        </a:rPr>
+                        <a:t>Spend curve it is applied to: actuals $5.2M, 2026 $13.5M, 2027 $12.5M, 2028 $26.1M</a:t>
+                      </a:r>
+                    </a:p>
+                  </a:txBody>
+                  <a:tcPr marL="54864" marR="54864" marT="27432" marB="27432" anchor="ctr">
+                    <a:solidFill>
+                      <a:srgbClr val="F2F4F8"/>
+                    </a:solidFill>
+                  </a:tcPr>
+                </a:tc>
+                <a:tc>
+                  <a:txBody>
+                    <a:bodyPr/>
+                    <a:lstStyle/>
+                    <a:p>
+                      <a:pPr algn="r"/>
+                      <a:r>
+                        <a:rPr sz="1100" b="0">
+                          <a:solidFill>
+                            <a:srgbClr val="1F2A44"/>
+                          </a:solidFill>
+                          <a:latin typeface="Calibri"/>
+                        </a:rPr>
+                        <a:t/>
+                      </a:r>
+                    </a:p>
+                  </a:txBody>
+                  <a:tcPr marL="54864" marR="54864" marT="27432" marB="27432" anchor="ctr">
+                    <a:solidFill>
+                      <a:srgbClr val="F2F4F8"/>
+                    </a:solidFill>
+                  </a:tcPr>
+                </a:tc>
+                <a:tc>
+                  <a:txBody>
+                    <a:bodyPr/>
+                    <a:lstStyle/>
+                    <a:p>
+                      <a:pPr algn="r"/>
+                      <a:r>
+                        <a:rPr sz="1100" b="0">
+                          <a:solidFill>
+                            <a:srgbClr val="1F2A44"/>
+                          </a:solidFill>
+                          <a:latin typeface="Calibri"/>
+                        </a:rPr>
+                        <a:t/>
+                      </a:r>
+                    </a:p>
+                  </a:txBody>
+                  <a:tcPr marL="54864" marR="54864" marT="27432" marB="27432" anchor="ctr">
+                    <a:solidFill>
+                      <a:srgbClr val="F2F4F8"/>
+                    </a:solidFill>
+                  </a:tcPr>
+                </a:tc>
+              </a:tr>
+            </a:tbl>
+          </a:graphicData>
+        </a:graphic>
+      </p:graphicFrame>
+      <p:sp>
+        <p:nvSpPr>
+          <p:cNvPr id="9" name="TextBox 8"/>
+          <p:cNvSpPr txBox="1"/>
+          <p:nvPr/>
+        </p:nvSpPr>
+        <p:spPr>
+          <a:xfrm>
+            <a:off x="548640" y="4023360"/>
+            <a:ext cx="5486400" cy="320040"/>
+          </a:xfrm>
+          <a:prstGeom prst="rect">
+            <a:avLst/>
+          </a:prstGeom>
+          <a:noFill/>
+        </p:spPr>
+        <p:txBody>
+          <a:bodyPr wrap="square" lIns="45720" rIns="45720" tIns="27432" bIns="27432" anchor="t">
+            <a:spAutoFit/>
+          </a:bodyPr>
+          <a:lstStyle/>
+          <a:p>
+            <a:pPr algn="l">
+              <a:lnSpc>
+                <a:spcPct val="105000"/>
+              </a:lnSpc>
+              <a:spcAft>
+                <a:spcPts val="400"/>
+              </a:spcAft>
+            </a:pPr>
+            <a:r>
+              <a:rPr sz="1300" b="1" i="0">
+                <a:solidFill>
+                  <a:srgbClr val="001E60"/>
+                </a:solidFill>
+                <a:latin typeface="Calibri"/>
+              </a:rPr>
+              <a:t>Same comparison, same dollars (per kWh)</a:t>
+            </a:r>
+          </a:p>
+        </p:txBody>
+      </p:sp>
+      <p:graphicFrame>
+        <p:nvGraphicFramePr>
+          <p:cNvPr id="10" name="Table 9"/>
+          <p:cNvGraphicFramePr>
+            <a:graphicFrameLocks noGrp="1"/>
+          </p:cNvGraphicFramePr>
+          <p:nvPr/>
+        </p:nvGraphicFramePr>
+        <p:xfrm>
+          <a:off x="548640" y="4389120"/>
+          <a:ext cx="5486400" cy="1783080"/>
+        </p:xfrm>
+        <a:graphic>
+          <a:graphicData uri="http://schemas.openxmlformats.org/drawingml/2006/table">
+            <a:tbl>
+              <a:tblPr firstRow="1" bandRow="1">
+                <a:tableStyleId>{5C22544A-7EE6-4342-B048-85BDC9FD1C3A}</a:tableStyleId>
+              </a:tblPr>
+              <a:tblGrid>
+                <a:gridCol w="1417320"/>
+                <a:gridCol w="777240"/>
+                <a:gridCol w="1005840"/>
+                <a:gridCol w="2286000"/>
+              </a:tblGrid>
+              <a:tr h="356616">
+                <a:tc>
+                  <a:txBody>
+                    <a:bodyPr/>
+                    <a:lstStyle/>
+                    <a:p>
+                      <a:r>
+                        <a:rPr sz="1050" b="1">
+                          <a:solidFill>
+                            <a:srgbClr val="FFFFFF"/>
+                          </a:solidFill>
+                          <a:latin typeface="Calibri"/>
+                        </a:rPr>
+                        <a:t>Boundary</a:t>
+                      </a:r>
+                    </a:p>
+                  </a:txBody>
+                  <a:tcPr marL="54864" marR="54864" marT="27432" marB="27432">
+                    <a:solidFill>
+                      <a:srgbClr val="001E60"/>
+                    </a:solidFill>
+                  </a:tcPr>
+                </a:tc>
+                <a:tc>
+                  <a:txBody>
+                    <a:bodyPr/>
+                    <a:lstStyle/>
+                    <a:p>
+                      <a:pPr algn="r"/>
+                      <a:r>
+                        <a:rPr sz="1050" b="1">
+                          <a:solidFill>
+                            <a:srgbClr val="FFFFFF"/>
+                          </a:solidFill>
+                          <a:latin typeface="Calibri"/>
+                        </a:rPr>
+                        <a:t>Nominal</a:t>
+                      </a:r>
+                    </a:p>
+                  </a:txBody>
+                  <a:tcPr marL="54864" marR="54864" marT="27432" marB="27432">
+                    <a:solidFill>
+                      <a:srgbClr val="001E60"/>
+                    </a:solidFill>
+                  </a:tcPr>
+                </a:tc>
+                <a:tc>
+                  <a:txBody>
+                    <a:bodyPr/>
+                    <a:lstStyle/>
+                    <a:p>
+                      <a:pPr algn="r"/>
+                      <a:r>
+                        <a:rPr sz="1050" b="1">
+                          <a:solidFill>
+                            <a:srgbClr val="FFFFFF"/>
+                          </a:solidFill>
+                          <a:latin typeface="Calibri"/>
+                        </a:rPr>
+                        <a:t>Ex-escalation</a:t>
+                      </a:r>
+                    </a:p>
+                  </a:txBody>
+                  <a:tcPr marL="54864" marR="54864" marT="27432" marB="27432">
+                    <a:solidFill>
+                      <a:srgbClr val="001E60"/>
+                    </a:solidFill>
+                  </a:tcPr>
+                </a:tc>
+                <a:tc>
+                  <a:txBody>
+                    <a:bodyPr/>
+                    <a:lstStyle/>
+                    <a:p>
+                      <a:r>
+                        <a:rPr sz="1050" b="1">
+                          <a:solidFill>
+                            <a:srgbClr val="FFFFFF"/>
+                          </a:solidFill>
+                          <a:latin typeface="Calibri"/>
+                        </a:rPr>
+                        <a:t>Benchmark brought to 2028 at 3%/yr</a:t>
+                      </a:r>
+                    </a:p>
+                  </a:txBody>
+                  <a:tcPr marL="54864" marR="54864" marT="27432" marB="27432">
+                    <a:solidFill>
+                      <a:srgbClr val="001E60"/>
+                    </a:solidFill>
+                  </a:tcPr>
+                </a:tc>
+              </a:tr>
+              <a:tr h="356616">
+                <a:tc>
+                  <a:txBody>
+                    <a:bodyPr/>
+                    <a:lstStyle/>
+                    <a:p>
+                      <a:r>
+                        <a:rPr sz="1050" b="0">
+                          <a:solidFill>
+                            <a:srgbClr val="1F2A44"/>
+                          </a:solidFill>
+                          <a:latin typeface="Calibri"/>
+                        </a:rPr>
+                        <a:t>Vendor contract</a:t>
+                      </a:r>
+                    </a:p>
+                  </a:txBody>
+                  <a:tcPr marL="54864" marR="54864" marT="27432" marB="27432" anchor="ctr">
+                    <a:solidFill>
+                      <a:srgbClr val="FFFFFF"/>
+                    </a:solidFill>
+                  </a:tcPr>
+                </a:tc>
+                <a:tc>
+                  <a:txBody>
+                    <a:bodyPr/>
+                    <a:lstStyle/>
+                    <a:p>
+                      <a:pPr algn="r"/>
+                      <a:r>
+                        <a:rPr sz="1050" b="0">
+                          <a:solidFill>
+                            <a:srgbClr val="1F2A44"/>
+                          </a:solidFill>
+                          <a:latin typeface="Calibri"/>
+                        </a:rPr>
+                        <a:t>$605</a:t>
+                      </a:r>
+                    </a:p>
+                  </a:txBody>
+                  <a:tcPr marL="54864" marR="54864" marT="27432" marB="27432" anchor="ctr">
+                    <a:solidFill>
+                      <a:srgbClr val="FFFFFF"/>
+                    </a:solidFill>
+                  </a:tcPr>
+                </a:tc>
+                <a:tc>
+                  <a:txBody>
+                    <a:bodyPr/>
+                    <a:lstStyle/>
+                    <a:p>
+                      <a:pPr algn="r"/>
+                      <a:r>
+                        <a:rPr sz="1050" b="0">
+                          <a:solidFill>
+                            <a:srgbClr val="1F2A44"/>
+                          </a:solidFill>
+                          <a:latin typeface="Calibri"/>
+                        </a:rPr>
+                        <a:t>$605 (fixed)</a:t>
+                      </a:r>
+                    </a:p>
+                  </a:txBody>
+                  <a:tcPr marL="54864" marR="54864" marT="27432" marB="27432" anchor="ctr">
+                    <a:solidFill>
+                      <a:srgbClr val="FFFFFF"/>
+                    </a:solidFill>
+                  </a:tcPr>
+                </a:tc>
+                <a:tc>
+                  <a:txBody>
+                    <a:bodyPr/>
+                    <a:lstStyle/>
+                    <a:p>
+                      <a:r>
+                        <a:rPr sz="1050" b="0">
+                          <a:solidFill>
+                            <a:srgbClr val="1F2A44"/>
+                          </a:solidFill>
+                          <a:latin typeface="Calibri"/>
+                        </a:rPr>
+                        <a:t>BNEF US turnkey $219 (2025) = $239</a:t>
+                      </a:r>
+                    </a:p>
+                  </a:txBody>
+                  <a:tcPr marL="54864" marR="54864" marT="27432" marB="27432" anchor="ctr">
+                    <a:solidFill>
+                      <a:srgbClr val="FFFFFF"/>
+                    </a:solidFill>
+                  </a:tcPr>
+                </a:tc>
+              </a:tr>
+              <a:tr h="356616">
+                <a:tc>
+                  <a:txBody>
+                    <a:bodyPr/>
+                    <a:lstStyle/>
+                    <a:p>
+                      <a:r>
+                        <a:rPr sz="1050" b="0">
+                          <a:solidFill>
+                            <a:srgbClr val="1F2A44"/>
+                          </a:solidFill>
+                          <a:latin typeface="Calibri"/>
+                        </a:rPr>
+                        <a:t>Battery as carried (A)</a:t>
+                      </a:r>
+                    </a:p>
+                  </a:txBody>
+                  <a:tcPr marL="54864" marR="54864" marT="27432" marB="27432" anchor="ctr">
+                    <a:solidFill>
+                      <a:srgbClr val="F2F4F8"/>
+                    </a:solidFill>
+                  </a:tcPr>
+                </a:tc>
+                <a:tc>
+                  <a:txBody>
+                    <a:bodyPr/>
+                    <a:lstStyle/>
+                    <a:p>
+                      <a:pPr algn="r"/>
+                      <a:r>
+                        <a:rPr sz="1050" b="0">
+                          <a:solidFill>
+                            <a:srgbClr val="1F2A44"/>
+                          </a:solidFill>
+                          <a:latin typeface="Calibri"/>
+                        </a:rPr>
+                        <a:t>$650</a:t>
+                      </a:r>
+                    </a:p>
+                  </a:txBody>
+                  <a:tcPr marL="54864" marR="54864" marT="27432" marB="27432" anchor="ctr">
+                    <a:solidFill>
+                      <a:srgbClr val="F2F4F8"/>
+                    </a:solidFill>
+                  </a:tcPr>
+                </a:tc>
+                <a:tc>
+                  <a:txBody>
+                    <a:bodyPr/>
+                    <a:lstStyle/>
+                    <a:p>
+                      <a:pPr algn="r"/>
+                      <a:r>
+                        <a:rPr sz="1050" b="0">
+                          <a:solidFill>
+                            <a:srgbClr val="1F2A44"/>
+                          </a:solidFill>
+                          <a:latin typeface="Calibri"/>
+                        </a:rPr>
+                        <a:t>$593</a:t>
+                      </a:r>
+                    </a:p>
+                  </a:txBody>
+                  <a:tcPr marL="54864" marR="54864" marT="27432" marB="27432" anchor="ctr">
+                    <a:solidFill>
+                      <a:srgbClr val="F2F4F8"/>
+                    </a:solidFill>
+                  </a:tcPr>
+                </a:tc>
+                <a:tc>
+                  <a:txBody>
+                    <a:bodyPr/>
+                    <a:lstStyle/>
+                    <a:p>
+                      <a:r>
+                        <a:rPr sz="1050" b="0">
+                          <a:solidFill>
+                            <a:srgbClr val="1F2A44"/>
+                          </a:solidFill>
+                          <a:latin typeface="Calibri"/>
+                        </a:rPr>
+                        <a:t>NREL 4-h $334 (2024$) = $376</a:t>
+                      </a:r>
+                    </a:p>
+                  </a:txBody>
+                  <a:tcPr marL="54864" marR="54864" marT="27432" marB="27432" anchor="ctr">
+                    <a:solidFill>
+                      <a:srgbClr val="F2F4F8"/>
+                    </a:solidFill>
+                  </a:tcPr>
+                </a:tc>
+              </a:tr>
+              <a:tr h="356616">
+                <a:tc>
+                  <a:txBody>
+                    <a:bodyPr/>
+                    <a:lstStyle/>
+                    <a:p>
+                      <a:r>
+                        <a:rPr sz="1050" b="0">
+                          <a:solidFill>
+                            <a:srgbClr val="1F2A44"/>
+                          </a:solidFill>
+                          <a:latin typeface="Calibri"/>
+                        </a:rPr>
+                        <a:t>Battery installed (A+B+C)</a:t>
+                      </a:r>
+                    </a:p>
+                  </a:txBody>
+                  <a:tcPr marL="54864" marR="54864" marT="27432" marB="27432" anchor="ctr">
+                    <a:solidFill>
+                      <a:srgbClr val="FFFFFF"/>
+                    </a:solidFill>
+                  </a:tcPr>
+                </a:tc>
+                <a:tc>
+                  <a:txBody>
+                    <a:bodyPr/>
+                    <a:lstStyle/>
+                    <a:p>
+                      <a:pPr algn="r"/>
+                      <a:r>
+                        <a:rPr sz="1050" b="0">
+                          <a:solidFill>
+                            <a:srgbClr val="1F2A44"/>
+                          </a:solidFill>
+                          <a:latin typeface="Calibri"/>
+                        </a:rPr>
+                        <a:t>$833</a:t>
+                      </a:r>
+                    </a:p>
+                  </a:txBody>
+                  <a:tcPr marL="54864" marR="54864" marT="27432" marB="27432" anchor="ctr">
+                    <a:solidFill>
+                      <a:srgbClr val="FFFFFF"/>
+                    </a:solidFill>
+                  </a:tcPr>
+                </a:tc>
+                <a:tc>
+                  <a:txBody>
+                    <a:bodyPr/>
+                    <a:lstStyle/>
+                    <a:p>
+                      <a:pPr algn="r"/>
+                      <a:r>
+                        <a:rPr sz="1050" b="0">
+                          <a:solidFill>
+                            <a:srgbClr val="1F2A44"/>
+                          </a:solidFill>
+                          <a:latin typeface="Calibri"/>
+                        </a:rPr>
+                        <a:t>~$756</a:t>
+                      </a:r>
+                    </a:p>
+                  </a:txBody>
+                  <a:tcPr marL="54864" marR="54864" marT="27432" marB="27432" anchor="ctr">
+                    <a:solidFill>
+                      <a:srgbClr val="FFFFFF"/>
+                    </a:solidFill>
+                  </a:tcPr>
+                </a:tc>
+                <a:tc>
+                  <a:txBody>
+                    <a:bodyPr/>
+                    <a:lstStyle/>
+                    <a:p>
+                      <a:r>
+                        <a:rPr sz="1050" b="0">
+                          <a:solidFill>
+                            <a:srgbClr val="1F2A44"/>
+                          </a:solidFill>
+                          <a:latin typeface="Calibri"/>
+                        </a:rPr>
+                        <a:t>NREL adjusted to 2-h, 10 MW: $750-$870</a:t>
+                      </a:r>
+                    </a:p>
+                  </a:txBody>
+                  <a:tcPr marL="54864" marR="54864" marT="27432" marB="27432" anchor="ctr">
+                    <a:solidFill>
+                      <a:srgbClr val="FFFFFF"/>
+                    </a:solidFill>
+                  </a:tcPr>
+                </a:tc>
+              </a:tr>
+              <a:tr h="356616">
+                <a:tc>
+                  <a:txBody>
+                    <a:bodyPr/>
+                    <a:lstStyle/>
+                    <a:p>
+                      <a:r>
+                        <a:rPr sz="1050" b="0">
+                          <a:solidFill>
+                            <a:srgbClr val="1F2A44"/>
+                          </a:solidFill>
+                          <a:latin typeface="Calibri"/>
+                        </a:rPr>
+                        <a:t>Station complete, direct</a:t>
+                      </a:r>
+                    </a:p>
+                  </a:txBody>
+                  <a:tcPr marL="54864" marR="54864" marT="27432" marB="27432" anchor="ctr">
+                    <a:solidFill>
+                      <a:srgbClr val="F2F4F8"/>
+                    </a:solidFill>
+                  </a:tcPr>
+                </a:tc>
+                <a:tc>
+                  <a:txBody>
+                    <a:bodyPr/>
+                    <a:lstStyle/>
+                    <a:p>
+                      <a:pPr algn="r"/>
+                      <a:r>
+                        <a:rPr sz="1050" b="0">
+                          <a:solidFill>
+                            <a:srgbClr val="1F2A44"/>
+                          </a:solidFill>
+                          <a:latin typeface="Calibri"/>
+                        </a:rPr>
+                        <a:t>$1,483</a:t>
+                      </a:r>
+                    </a:p>
+                  </a:txBody>
+                  <a:tcPr marL="54864" marR="54864" marT="27432" marB="27432" anchor="ctr">
+                    <a:solidFill>
+                      <a:srgbClr val="F2F4F8"/>
+                    </a:solidFill>
+                  </a:tcPr>
+                </a:tc>
+                <a:tc>
+                  <a:txBody>
+                    <a:bodyPr/>
+                    <a:lstStyle/>
+                    <a:p>
+                      <a:pPr algn="r"/>
+                      <a:r>
+                        <a:rPr sz="1050" b="0">
+                          <a:solidFill>
+                            <a:srgbClr val="1F2A44"/>
+                          </a:solidFill>
+                          <a:latin typeface="Calibri"/>
+                        </a:rPr>
+                        <a:t>$1,352</a:t>
+                      </a:r>
+                    </a:p>
+                  </a:txBody>
+                  <a:tcPr marL="54864" marR="54864" marT="27432" marB="27432" anchor="ctr">
+                    <a:solidFill>
+                      <a:srgbClr val="F2F4F8"/>
+                    </a:solidFill>
+                  </a:tcPr>
+                </a:tc>
+                <a:tc>
+                  <a:txBody>
+                    <a:bodyPr/>
+                    <a:lstStyle/>
+                    <a:p>
+                      <a:r>
+                        <a:rPr sz="1050" b="0">
+                          <a:solidFill>
+                            <a:srgbClr val="1F2A44"/>
+                          </a:solidFill>
+                          <a:latin typeface="Calibri"/>
+                        </a:rPr>
+                        <a:t>EIA/S&amp;L $436 (2023$) = $505; LBNL $458 = $516</a:t>
+                      </a:r>
+                    </a:p>
+                  </a:txBody>
+                  <a:tcPr marL="54864" marR="54864" marT="27432" marB="27432" anchor="ctr">
+                    <a:solidFill>
+                      <a:srgbClr val="F2F4F8"/>
+                    </a:solidFill>
+                  </a:tcPr>
+                </a:tc>
+              </a:tr>
+            </a:tbl>
+          </a:graphicData>
+        </a:graphic>
+      </p:graphicFrame>
+      <p:sp>
+        <p:nvSpPr>
+          <p:cNvPr id="11" name="TextBox 10"/>
+          <p:cNvSpPr txBox="1"/>
+          <p:nvPr/>
+        </p:nvSpPr>
+        <p:spPr>
+          <a:xfrm>
+            <a:off x="6309360" y="1371600"/>
+            <a:ext cx="5394960" cy="4846320"/>
+          </a:xfrm>
+          <a:prstGeom prst="rect">
+            <a:avLst/>
+          </a:prstGeom>
+          <a:noFill/>
+        </p:spPr>
+        <p:txBody>
+          <a:bodyPr wrap="square" lIns="45720">
+            <a:spAutoFit/>
+          </a:bodyPr>
+          <a:lstStyle/>
+          <a:p>
+            <a:pPr>
+              <a:lnSpc>
+                <a:spcPct val="105000"/>
+              </a:lnSpc>
+              <a:spcAft>
+                <a:spcPts val="400"/>
+              </a:spcAft>
+            </a:pPr>
+            <a:r>
+              <a:rPr sz="1150">
+                <a:solidFill>
+                  <a:srgbClr val="FFC72C"/>
+                </a:solidFill>
+                <a:latin typeface="Calibri"/>
+              </a:rPr>
+              <a:t>▪  </a:t>
+            </a:r>
+            <a:r>
+              <a:rPr b="1" sz="1150">
+                <a:solidFill>
+                  <a:srgbClr val="1F2A44"/>
+                </a:solidFill>
+                <a:latin typeface="Calibri"/>
+              </a:rPr>
+              <a:t>Rates. </a:t>
+            </a:r>
+            <a:r>
+              <a:rPr sz="1150">
+                <a:solidFill>
+                  <a:srgbClr val="1F2A44"/>
+                </a:solidFill>
+                <a:latin typeface="Calibri"/>
+              </a:rPr>
+              <a:t>ESF template escalation, about 3% a year, on the 2026-2028 spend curve. $2.9M is 5.1% of the approval level and 7.4% of directs. Benchmarks are 2023-2025 dollars; Rev 3 is 2026-2028 nominal, so one side must move before they are compared.</a:t>
+            </a:r>
+          </a:p>
+          <a:p>
+            <a:pPr>
+              <a:lnSpc>
+                <a:spcPct val="105000"/>
+              </a:lnSpc>
+              <a:spcAft>
+                <a:spcPts val="400"/>
+              </a:spcAft>
+            </a:pPr>
+            <a:r>
+              <a:rPr sz="1150">
+                <a:solidFill>
+                  <a:srgbClr val="FFC72C"/>
+                </a:solidFill>
+                <a:latin typeface="Calibri"/>
+              </a:rPr>
+              <a:t>▪  </a:t>
+            </a:r>
+            <a:r>
+              <a:rPr b="1" sz="1150">
+                <a:solidFill>
+                  <a:srgbClr val="1F2A44"/>
+                </a:solidFill>
+                <a:latin typeface="Calibri"/>
+              </a:rPr>
+              <a:t>Decision pending. </a:t>
+            </a:r>
+            <a:r>
+              <a:rPr sz="1150">
+                <a:solidFill>
+                  <a:srgbClr val="1F2A44"/>
+                </a:solidFill>
+                <a:latin typeface="Calibri"/>
+              </a:rPr>
+              <a:t>$1.13M sits on a price the contract fixes. Remove it or move it to the risk register with a stated rationale (open item, slide 20).</a:t>
+            </a:r>
+          </a:p>
+          <a:p>
+            <a:pPr>
+              <a:lnSpc>
+                <a:spcPct val="105000"/>
+              </a:lnSpc>
+              <a:spcAft>
+                <a:spcPts val="400"/>
+              </a:spcAft>
+            </a:pPr>
+            <a:r>
+              <a:rPr sz="1150">
+                <a:solidFill>
+                  <a:srgbClr val="FFC72C"/>
+                </a:solidFill>
+                <a:latin typeface="Calibri"/>
+              </a:rPr>
+              <a:t>▪  </a:t>
+            </a:r>
+            <a:r>
+              <a:rPr b="1" sz="1150">
+                <a:solidFill>
+                  <a:srgbClr val="1F2A44"/>
+                </a:solidFill>
+                <a:latin typeface="Calibri"/>
+              </a:rPr>
+              <a:t>Brought to the same year, the installed battery is on the index. </a:t>
+            </a:r>
+            <a:r>
+              <a:rPr sz="1150">
+                <a:solidFill>
+                  <a:srgbClr val="1F2A44"/>
+                </a:solidFill>
+                <a:latin typeface="Calibri"/>
+              </a:rPr>
+              <a:t>NREL's $334 is $376 in 2028 dollars and $750-$870 after the 2-h and 10 MW adjustments; Hyde Park installed is $833.</a:t>
+            </a:r>
+          </a:p>
+          <a:p>
+            <a:pPr>
+              <a:lnSpc>
+                <a:spcPct val="105000"/>
+              </a:lnSpc>
+              <a:spcAft>
+                <a:spcPts val="400"/>
+              </a:spcAft>
+            </a:pPr>
+            <a:r>
+              <a:rPr sz="1150">
+                <a:solidFill>
+                  <a:srgbClr val="FFC72C"/>
+                </a:solidFill>
+                <a:latin typeface="Calibri"/>
+              </a:rPr>
+              <a:t>▪  </a:t>
+            </a:r>
+            <a:r>
+              <a:rPr b="1" sz="1150">
+                <a:solidFill>
+                  <a:srgbClr val="1F2A44"/>
+                </a:solidFill>
+                <a:latin typeface="Calibri"/>
+              </a:rPr>
+              <a:t>What 3% does not cover. </a:t>
+            </a:r>
+            <a:r>
+              <a:rPr sz="1150">
+                <a:solidFill>
+                  <a:srgbClr val="1F2A44"/>
+                </a:solidFill>
+                <a:latin typeface="Calibri"/>
+              </a:rPr>
+              <a:t>Lithium carbonate and tariffs moved faster than 3% in 2026. The battery is fixed by contract, so the exposure is the $3.7M of non-battery material and the labor lines. The $1.0M tariff item in the risk register is sized on total material, battery included.</a:t>
+            </a:r>
+          </a:p>
+          <a:p>
+            <a:pPr>
+              <a:lnSpc>
+                <a:spcPct val="105000"/>
+              </a:lnSpc>
+              <a:spcAft>
+                <a:spcPts val="400"/>
+              </a:spcAft>
+            </a:pPr>
+            <a:r>
+              <a:rPr sz="1150">
+                <a:solidFill>
+                  <a:srgbClr val="FFC72C"/>
+                </a:solidFill>
+                <a:latin typeface="Calibri"/>
+              </a:rPr>
+              <a:t>▪  </a:t>
+            </a:r>
+            <a:r>
+              <a:rPr b="1" sz="1150">
+                <a:solidFill>
+                  <a:srgbClr val="1F2A44"/>
+                </a:solidFill>
+                <a:latin typeface="Calibri"/>
+              </a:rPr>
+              <a:t>Schedule. </a:t>
+            </a:r>
+            <a:r>
+              <a:rPr sz="1150">
+                <a:solidFill>
+                  <a:srgbClr val="1F2A44"/>
+                </a:solidFill>
+                <a:latin typeface="Calibri"/>
+              </a:rPr>
+              <a:t>Twelve months of slip adds about $1.2M of escalation on the $38.6M scheduled for 2027-2028, before AFUDC, PM and indirects (about $5M in total).</a:t>
+            </a:r>
+          </a:p>
+          <a:p>
+            <a:pPr>
+              <a:lnSpc>
+                <a:spcPct val="105000"/>
+              </a:lnSpc>
+              <a:spcAft>
+                <a:spcPts val="400"/>
+              </a:spcAft>
+            </a:pPr>
+            <a:r>
+              <a:rPr sz="1150">
+                <a:solidFill>
+                  <a:srgbClr val="FFC72C"/>
+                </a:solidFill>
+                <a:latin typeface="Calibri"/>
+              </a:rPr>
+              <a:t>▪  </a:t>
+            </a:r>
+            <a:r>
+              <a:rPr b="1" sz="1150">
+                <a:solidFill>
+                  <a:srgbClr val="1F2A44"/>
+                </a:solidFill>
+                <a:latin typeface="Calibri"/>
+              </a:rPr>
+              <a:t>Ex-escalation values </a:t>
+            </a:r>
+            <a:r>
+              <a:rPr sz="1150">
+                <a:solidFill>
+                  <a:srgbClr val="1F2A44"/>
+                </a:solidFill>
+                <a:latin typeface="Calibri"/>
+              </a:rPr>
+              <a:t>strip the station's $131/kWh from the direct boundaries; the B+C share (~$20/kWh) is allocated pro rata and is approximate.</a:t>
+            </a:r>
+          </a:p>
+        </p:txBody>
+      </p:sp>
+    </p:spTree>
+  </p:cSld>
+  <p:clrMapOvr>
+    <a:masterClrMapping/>
+  </p:clrMapOvr>
+</p:sld>
+</file>
+
+<file path=ppt/slides/slide12.xml><?xml version="1.0" encoding="utf-8"?>
+<p:sld xmlns:a="http://schemas.openxmlformats.org/drawingml/2006/main" xmlns:p="http://schemas.openxmlformats.org/presentationml/2006/main" xmlns:r="http://schemas.openxmlformats.org/officeDocument/2006/relationships">
+  <p:cSld>
+    <p:spTree>
+      <p:nvGrpSpPr>
+        <p:cNvPr id="1" name=""/>
+        <p:cNvGrpSpPr/>
+        <p:nvPr/>
+      </p:nvGrpSpPr>
+      <p:grpSpPr/>
+      <p:sp>
+        <p:nvSpPr>
+          <p:cNvPr id="2" name="Rectangle 1"/>
+          <p:cNvSpPr/>
+          <p:nvPr/>
+        </p:nvSpPr>
+        <p:spPr>
+          <a:xfrm>
+            <a:off x="0" y="0"/>
+            <a:ext cx="12191695" cy="6858000"/>
+          </a:xfrm>
+          <a:prstGeom prst="rect">
+            <a:avLst/>
+          </a:prstGeom>
+          <a:solidFill>
+            <a:srgbClr val="FFFFFF"/>
+          </a:solidFill>
+          <a:ln>
+            <a:noFill/>
+          </a:ln>
+          <a:effectLst/>
+        </p:spPr>
+        <p:style>
+          <a:lnRef idx="1">
+            <a:schemeClr val="accent1"/>
+          </a:lnRef>
+          <a:fillRef idx="3">
+            <a:schemeClr val="accent1"/>
+          </a:fillRef>
+          <a:effectRef idx="2">
+            <a:schemeClr val="accent1"/>
+          </a:effectRef>
+          <a:fontRef idx="minor">
+            <a:schemeClr val="lt1"/>
+          </a:fontRef>
+        </p:style>
+        <p:txBody>
+          <a:bodyPr rtlCol="0" anchor="ctr"/>
+          <a:lstStyle/>
+          <a:p>
+            <a:pPr algn="ctr"/>
+          </a:p>
+        </p:txBody>
+      </p:sp>
+      <p:sp>
+        <p:nvSpPr>
+          <p:cNvPr id="3" name="TextBox 2"/>
+          <p:cNvSpPr txBox="1"/>
+          <p:nvPr/>
+        </p:nvSpPr>
+        <p:spPr>
+          <a:xfrm>
+            <a:off x="548640" y="256032"/>
+            <a:ext cx="11064240" cy="274320"/>
+          </a:xfrm>
+          <a:prstGeom prst="rect">
+            <a:avLst/>
+          </a:prstGeom>
+          <a:noFill/>
+        </p:spPr>
+        <p:txBody>
+          <a:bodyPr wrap="square" lIns="45720" rIns="45720" tIns="27432" bIns="27432" anchor="t">
+            <a:spAutoFit/>
+          </a:bodyPr>
+          <a:lstStyle/>
+          <a:p>
+            <a:pPr algn="l">
+              <a:lnSpc>
+                <a:spcPct val="105000"/>
+              </a:lnSpc>
+              <a:spcAft>
+                <a:spcPts val="400"/>
+              </a:spcAft>
+            </a:pPr>
+            <a:r>
+              <a:rPr sz="1100" b="1" i="0">
+                <a:solidFill>
+                  <a:srgbClr val="6E1F2E"/>
+                </a:solidFill>
+                <a:latin typeface="Calibri"/>
+              </a:rPr>
+              <a:t>1 · WHERE THE MONEY SITS   |   WHY A SMALL URBAN UTILITY-OWNED PROJECT SITS ABOVE THE INDEX</a:t>
+            </a:r>
+          </a:p>
+        </p:txBody>
+      </p:sp>
+      <p:sp>
+        <p:nvSpPr>
+          <p:cNvPr id="4" name="TextBox 3"/>
+          <p:cNvSpPr txBox="1"/>
+          <p:nvPr/>
+        </p:nvSpPr>
+        <p:spPr>
+          <a:xfrm>
+            <a:off x="548640" y="475488"/>
+            <a:ext cx="11064240" cy="868680"/>
+          </a:xfrm>
+          <a:prstGeom prst="rect">
+            <a:avLst/>
+          </a:prstGeom>
+          <a:noFill/>
+        </p:spPr>
+        <p:txBody>
+          <a:bodyPr wrap="square" lIns="45720" rIns="45720" tIns="27432" bIns="27432" anchor="t">
+            <a:spAutoFit/>
+          </a:bodyPr>
+          <a:lstStyle/>
+          <a:p>
+            <a:pPr algn="l">
+              <a:lnSpc>
+                <a:spcPct val="100000"/>
+              </a:lnSpc>
+              <a:spcAft>
+                <a:spcPts val="400"/>
+              </a:spcAft>
+            </a:pPr>
+            <a:r>
+              <a:rPr sz="2300" b="1" i="0">
+                <a:solidFill>
+                  <a:srgbClr val="001E60"/>
+                </a:solidFill>
+                <a:latin typeface="Georgia"/>
+              </a:rPr>
+              <a:t>Six things about Hyde Park that a 100 MW greenfield benchmark never has to pay for</a:t>
+            </a:r>
+          </a:p>
+        </p:txBody>
+      </p:sp>
+      <p:sp>
+        <p:nvSpPr>
+          <p:cNvPr id="5" name="TextBox 4"/>
+          <p:cNvSpPr txBox="1"/>
+          <p:nvPr/>
+        </p:nvSpPr>
+        <p:spPr>
+          <a:xfrm>
+            <a:off x="548640" y="6419088"/>
+            <a:ext cx="8229600" cy="274320"/>
+          </a:xfrm>
+          <a:prstGeom prst="rect">
+            <a:avLst/>
+          </a:prstGeom>
+          <a:noFill/>
+        </p:spPr>
+        <p:txBody>
+          <a:bodyPr wrap="square" lIns="45720" rIns="45720" tIns="27432" bIns="27432" anchor="t">
+            <a:spAutoFit/>
+          </a:bodyPr>
+          <a:lstStyle/>
+          <a:p>
+            <a:pPr algn="l">
+              <a:lnSpc>
+                <a:spcPct val="105000"/>
+              </a:lnSpc>
+              <a:spcAft>
+                <a:spcPts val="400"/>
+              </a:spcAft>
+            </a:pPr>
+            <a:r>
+              <a:rPr sz="1000" b="0" i="0">
+                <a:solidFill>
+                  <a:srgbClr val="6B7280"/>
+                </a:solidFill>
+                <a:latin typeface="Calibri"/>
+              </a:rPr>
+              <a:t>EstimatingCoE | Eversource Energy | Stewards of Affordability</a:t>
+            </a:r>
+          </a:p>
+        </p:txBody>
+      </p:sp>
+      <p:sp>
+        <p:nvSpPr>
+          <p:cNvPr id="6" name="TextBox 5"/>
+          <p:cNvSpPr txBox="1"/>
+          <p:nvPr/>
+        </p:nvSpPr>
+        <p:spPr>
+          <a:xfrm>
+            <a:off x="10972800" y="6419088"/>
+            <a:ext cx="685800" cy="274320"/>
+          </a:xfrm>
+          <a:prstGeom prst="rect">
+            <a:avLst/>
+          </a:prstGeom>
+          <a:noFill/>
+        </p:spPr>
+        <p:txBody>
+          <a:bodyPr wrap="square" lIns="45720" rIns="45720" tIns="27432" bIns="27432" anchor="t">
+            <a:spAutoFit/>
+          </a:bodyPr>
+          <a:lstStyle/>
+          <a:p>
+            <a:pPr algn="r">
+              <a:lnSpc>
+                <a:spcPct val="105000"/>
+              </a:lnSpc>
+              <a:spcAft>
+                <a:spcPts val="400"/>
+              </a:spcAft>
+            </a:pPr>
+            <a:r>
+              <a:rPr sz="1000" b="0" i="0">
+                <a:solidFill>
+                  <a:srgbClr val="6B7280"/>
+                </a:solidFill>
+                <a:latin typeface="Calibri"/>
+              </a:rPr>
+              <a:t>12</a:t>
             </a:r>
           </a:p>
         </p:txBody>
@@ -8658,7 +11447,7 @@
 </p:sld>
 </file>
 
-<file path=ppt/slides/slide11.xml><?xml version="1.0" encoding="utf-8"?>
+<file path=ppt/slides/slide13.xml><?xml version="1.0" encoding="utf-8"?>
 <p:sld xmlns:a="http://schemas.openxmlformats.org/drawingml/2006/main" xmlns:p="http://schemas.openxmlformats.org/presentationml/2006/main" xmlns:r="http://schemas.openxmlformats.org/officeDocument/2006/relationships">
   <p:cSld>
     <p:spTree>
@@ -8875,7 +11664,7 @@
                 </a:solidFill>
                 <a:latin typeface="Calibri"/>
               </a:rPr>
-              <a:t>11</a:t>
+              <a:t>13</a:t>
             </a:r>
           </a:p>
         </p:txBody>
@@ -9292,7 +12081,7 @@
 </p:sld>
 </file>
 
-<file path=ppt/slides/slide12.xml><?xml version="1.0" encoding="utf-8"?>
+<file path=ppt/slides/slide14.xml><?xml version="1.0" encoding="utf-8"?>
 <p:sld xmlns:a="http://schemas.openxmlformats.org/drawingml/2006/main" xmlns:p="http://schemas.openxmlformats.org/presentationml/2006/main" xmlns:r="http://schemas.openxmlformats.org/officeDocument/2006/relationships">
   <p:cSld>
     <p:spTree>
@@ -9509,7 +12298,7 @@
                 </a:solidFill>
                 <a:latin typeface="Calibri"/>
               </a:rPr>
-              <a:t>12</a:t>
+              <a:t>14</a:t>
             </a:r>
           </a:p>
         </p:txBody>
@@ -10026,7 +12815,7 @@
 </p:sld>
 </file>
 
-<file path=ppt/slides/slide13.xml><?xml version="1.0" encoding="utf-8"?>
+<file path=ppt/slides/slide15.xml><?xml version="1.0" encoding="utf-8"?>
 <p:sld xmlns:a="http://schemas.openxmlformats.org/drawingml/2006/main" xmlns:p="http://schemas.openxmlformats.org/presentationml/2006/main" xmlns:r="http://schemas.openxmlformats.org/officeDocument/2006/relationships">
   <p:cSld>
     <p:spTree>
@@ -10243,7 +13032,7 @@
                 </a:solidFill>
                 <a:latin typeface="Calibri"/>
               </a:rPr>
-              <a:t>13</a:t>
+              <a:t>15</a:t>
             </a:r>
           </a:p>
         </p:txBody>
@@ -10445,7 +13234,7 @@
 </p:sld>
 </file>
 
-<file path=ppt/slides/slide14.xml><?xml version="1.0" encoding="utf-8"?>
+<file path=ppt/slides/slide16.xml><?xml version="1.0" encoding="utf-8"?>
 <p:sld xmlns:a="http://schemas.openxmlformats.org/drawingml/2006/main" xmlns:p="http://schemas.openxmlformats.org/presentationml/2006/main" xmlns:r="http://schemas.openxmlformats.org/officeDocument/2006/relationships">
   <p:cSld>
     <p:spTree>
@@ -10662,7 +13451,7 @@
                 </a:solidFill>
                 <a:latin typeface="Calibri"/>
               </a:rPr>
-              <a:t>14</a:t>
+              <a:t>16</a:t>
             </a:r>
           </a:p>
         </p:txBody>
@@ -10851,7 +13640,7 @@
                 </a:solidFill>
                 <a:latin typeface="Calibri"/>
               </a:rPr>
-              <a:t>$10.64M, $532/kWh, in line with published 2025-26 turnkey system indices (slide 7).</a:t>
+              <a:t>$10.64M, $532/kWh, in line with published 2025-26 turnkey system indices (slides 9-10).</a:t>
             </a:r>
           </a:p>
           <a:p>
@@ -10901,7 +13690,7 @@
 </p:sld>
 </file>
 
-<file path=ppt/slides/slide15.xml><?xml version="1.0" encoding="utf-8"?>
+<file path=ppt/slides/slide17.xml><?xml version="1.0" encoding="utf-8"?>
 <p:sld xmlns:a="http://schemas.openxmlformats.org/drawingml/2006/main" xmlns:p="http://schemas.openxmlformats.org/presentationml/2006/main" xmlns:r="http://schemas.openxmlformats.org/officeDocument/2006/relationships">
   <p:cSld>
     <p:spTree>
@@ -11118,7 +13907,7 @@
                 </a:solidFill>
                 <a:latin typeface="Calibri"/>
               </a:rPr>
-              <a:t>15</a:t>
+              <a:t>17</a:t>
             </a:r>
           </a:p>
         </p:txBody>
@@ -11773,7 +14562,7 @@
 </p:sld>
 </file>
 
-<file path=ppt/slides/slide16.xml><?xml version="1.0" encoding="utf-8"?>
+<file path=ppt/slides/slide18.xml><?xml version="1.0" encoding="utf-8"?>
 <p:sld xmlns:a="http://schemas.openxmlformats.org/drawingml/2006/main" xmlns:p="http://schemas.openxmlformats.org/presentationml/2006/main" xmlns:r="http://schemas.openxmlformats.org/officeDocument/2006/relationships">
   <p:cSld>
     <p:spTree>
@@ -11990,7 +14779,7 @@
                 </a:solidFill>
                 <a:latin typeface="Calibri"/>
               </a:rPr>
-              <a:t>16</a:t>
+              <a:t>18</a:t>
             </a:r>
           </a:p>
         </p:txBody>
@@ -13232,7 +16021,7 @@
 </p:sld>
 </file>
 
-<file path=ppt/slides/slide17.xml><?xml version="1.0" encoding="utf-8"?>
+<file path=ppt/slides/slide19.xml><?xml version="1.0" encoding="utf-8"?>
 <p:sld xmlns:a="http://schemas.openxmlformats.org/drawingml/2006/main" xmlns:p="http://schemas.openxmlformats.org/presentationml/2006/main" xmlns:r="http://schemas.openxmlformats.org/officeDocument/2006/relationships">
   <p:cSld>
     <p:spTree>
@@ -13449,7 +16238,7 @@
                 </a:solidFill>
                 <a:latin typeface="Calibri"/>
               </a:rPr>
-              <a:t>17</a:t>
+              <a:t>19</a:t>
             </a:r>
           </a:p>
         </p:txBody>
@@ -13892,7 +16681,7 @@
 </p:sld>
 </file>
 
-<file path=ppt/slides/slide18.xml><?xml version="1.0" encoding="utf-8"?>
+<file path=ppt/slides/slide2.xml><?xml version="1.0" encoding="utf-8"?>
 <p:sld xmlns:a="http://schemas.openxmlformats.org/drawingml/2006/main" xmlns:p="http://schemas.openxmlformats.org/presentationml/2006/main" xmlns:r="http://schemas.openxmlformats.org/officeDocument/2006/relationships">
   <p:cSld>
     <p:spTree>
@@ -13983,7 +16772,7 @@
                 </a:solidFill>
                 <a:latin typeface="Calibri"/>
               </a:rPr>
-              <a:t>3 · CAN THE NUMBER BE DEFENDED   |   RECONCILIATIONS AND DECISIONS, RED-TEAM RANKED</a:t>
+              <a:t>THE PROMISE</a:t>
             </a:r>
           </a:p>
         </p:txBody>
@@ -14025,7 +16814,7 @@
                 </a:solidFill>
                 <a:latin typeface="Georgia"/>
               </a:rPr>
-              <a:t>What must close before this number goes to EPAC as full funding</a:t>
+              <a:t>By the end of this deck you can answer one question in one breath</a:t>
             </a:r>
           </a:p>
         </p:txBody>
@@ -14109,7 +16898,840 @@
                 </a:solidFill>
                 <a:latin typeface="Calibri"/>
               </a:rPr>
-              <a:t>18</a:t>
+              <a:t>2</a:t>
+            </a:r>
+          </a:p>
+        </p:txBody>
+      </p:sp>
+      <p:sp>
+        <p:nvSpPr>
+          <p:cNvPr id="7" name="TextBox 6"/>
+          <p:cNvSpPr txBox="1"/>
+          <p:nvPr/>
+        </p:nvSpPr>
+        <p:spPr>
+          <a:xfrm>
+            <a:off x="548640" y="1417320"/>
+            <a:ext cx="10972800" cy="640080"/>
+          </a:xfrm>
+          <a:prstGeom prst="rect">
+            <a:avLst/>
+          </a:prstGeom>
+          <a:noFill/>
+        </p:spPr>
+        <p:txBody>
+          <a:bodyPr wrap="square" lIns="45720" rIns="45720" tIns="27432" bIns="27432" anchor="t">
+            <a:spAutoFit/>
+          </a:bodyPr>
+          <a:lstStyle/>
+          <a:p>
+            <a:pPr algn="l">
+              <a:lnSpc>
+                <a:spcPct val="105000"/>
+              </a:lnSpc>
+              <a:spcAft>
+                <a:spcPts val="400"/>
+              </a:spcAft>
+            </a:pPr>
+            <a:r>
+              <a:rPr sz="1900" b="0" i="0">
+                <a:solidFill>
+                  <a:srgbClr val="1F2A44"/>
+                </a:solidFill>
+                <a:latin typeface="Calibri"/>
+              </a:rPr>
+              <a:t>“Why is a $12 million battery a $57 million project?”  Because a vendor prices the battery. We build the station, the site, the feeder protection and the siting case, and we carry the risk and the cost of money.</a:t>
+            </a:r>
+          </a:p>
+        </p:txBody>
+      </p:sp>
+      <p:sp>
+        <p:nvSpPr>
+          <p:cNvPr id="8" name="Rectangle 7"/>
+          <p:cNvSpPr/>
+          <p:nvPr/>
+        </p:nvSpPr>
+        <p:spPr>
+          <a:xfrm>
+            <a:off x="548640" y="2468880"/>
+            <a:ext cx="3566160" cy="2194560"/>
+          </a:xfrm>
+          <a:prstGeom prst="rect">
+            <a:avLst/>
+          </a:prstGeom>
+          <a:solidFill>
+            <a:srgbClr val="F2F4F8"/>
+          </a:solidFill>
+          <a:ln>
+            <a:noFill/>
+          </a:ln>
+          <a:effectLst/>
+        </p:spPr>
+        <p:style>
+          <a:lnRef idx="1">
+            <a:schemeClr val="accent1"/>
+          </a:lnRef>
+          <a:fillRef idx="3">
+            <a:schemeClr val="accent1"/>
+          </a:fillRef>
+          <a:effectRef idx="2">
+            <a:schemeClr val="accent1"/>
+          </a:effectRef>
+          <a:fontRef idx="minor">
+            <a:schemeClr val="lt1"/>
+          </a:fontRef>
+        </p:style>
+        <p:txBody>
+          <a:bodyPr rtlCol="0" anchor="ctr"/>
+          <a:lstStyle/>
+          <a:p>
+            <a:pPr algn="ctr"/>
+          </a:p>
+        </p:txBody>
+      </p:sp>
+      <p:sp>
+        <p:nvSpPr>
+          <p:cNvPr id="9" name="TextBox 8"/>
+          <p:cNvSpPr txBox="1"/>
+          <p:nvPr/>
+        </p:nvSpPr>
+        <p:spPr>
+          <a:xfrm>
+            <a:off x="685800" y="2578608"/>
+            <a:ext cx="3291840" cy="822960"/>
+          </a:xfrm>
+          <a:prstGeom prst="rect">
+            <a:avLst/>
+          </a:prstGeom>
+          <a:noFill/>
+        </p:spPr>
+        <p:txBody>
+          <a:bodyPr wrap="square" lIns="45720" rIns="45720" tIns="27432" bIns="27432" anchor="t">
+            <a:spAutoFit/>
+          </a:bodyPr>
+          <a:lstStyle/>
+          <a:p>
+            <a:pPr algn="l">
+              <a:lnSpc>
+                <a:spcPct val="105000"/>
+              </a:lnSpc>
+              <a:spcAft>
+                <a:spcPts val="400"/>
+              </a:spcAft>
+            </a:pPr>
+            <a:r>
+              <a:rPr sz="4000" b="1" i="0">
+                <a:solidFill>
+                  <a:srgbClr val="001E60"/>
+                </a:solidFill>
+                <a:latin typeface="Georgia"/>
+              </a:rPr>
+              <a:t>$12.1M</a:t>
+            </a:r>
+          </a:p>
+        </p:txBody>
+      </p:sp>
+      <p:sp>
+        <p:nvSpPr>
+          <p:cNvPr id="10" name="TextBox 9"/>
+          <p:cNvSpPr txBox="1"/>
+          <p:nvPr/>
+        </p:nvSpPr>
+        <p:spPr>
+          <a:xfrm>
+            <a:off x="685800" y="3264408"/>
+            <a:ext cx="3291840" cy="457200"/>
+          </a:xfrm>
+          <a:prstGeom prst="rect">
+            <a:avLst/>
+          </a:prstGeom>
+          <a:noFill/>
+        </p:spPr>
+        <p:txBody>
+          <a:bodyPr wrap="square" lIns="45720" rIns="45720" tIns="27432" bIns="27432" anchor="t">
+            <a:spAutoFit/>
+          </a:bodyPr>
+          <a:lstStyle/>
+          <a:p>
+            <a:pPr algn="l">
+              <a:lnSpc>
+                <a:spcPct val="105000"/>
+              </a:lnSpc>
+              <a:spcAft>
+                <a:spcPts val="400"/>
+              </a:spcAft>
+            </a:pPr>
+            <a:r>
+              <a:rPr sz="1500" b="1" i="0">
+                <a:solidFill>
+                  <a:srgbClr val="1F2A44"/>
+                </a:solidFill>
+                <a:latin typeface="Calibri"/>
+              </a:rPr>
+              <a:t>Vendor fixed-price contract</a:t>
+            </a:r>
+          </a:p>
+        </p:txBody>
+      </p:sp>
+      <p:sp>
+        <p:nvSpPr>
+          <p:cNvPr id="11" name="TextBox 10"/>
+          <p:cNvSpPr txBox="1"/>
+          <p:nvPr/>
+        </p:nvSpPr>
+        <p:spPr>
+          <a:xfrm>
+            <a:off x="685800" y="3648456"/>
+            <a:ext cx="3291840" cy="969263"/>
+          </a:xfrm>
+          <a:prstGeom prst="rect">
+            <a:avLst/>
+          </a:prstGeom>
+          <a:noFill/>
+        </p:spPr>
+        <p:txBody>
+          <a:bodyPr wrap="square" lIns="45720" rIns="45720" tIns="27432" bIns="27432" anchor="t">
+            <a:spAutoFit/>
+          </a:bodyPr>
+          <a:lstStyle/>
+          <a:p>
+            <a:pPr algn="l">
+              <a:lnSpc>
+                <a:spcPct val="100000"/>
+              </a:lnSpc>
+              <a:spcAft>
+                <a:spcPts val="400"/>
+              </a:spcAft>
+            </a:pPr>
+            <a:r>
+              <a:rPr sz="1250" b="0" i="0">
+                <a:solidFill>
+                  <a:srgbClr val="6B7280"/>
+                </a:solidFill>
+                <a:latin typeface="Calibri"/>
+              </a:rPr>
+              <a:t>Nomad cover agreement, 10 Mar 2026. 12 Voyager LFP units, PCS, BMS, fire protection, 10-yr warranty. $605/kWh, $1,211/kW.</a:t>
+            </a:r>
+          </a:p>
+        </p:txBody>
+      </p:sp>
+      <p:sp>
+        <p:nvSpPr>
+          <p:cNvPr id="12" name="Rectangle 11"/>
+          <p:cNvSpPr/>
+          <p:nvPr/>
+        </p:nvSpPr>
+        <p:spPr>
+          <a:xfrm>
+            <a:off x="4315968" y="2468880"/>
+            <a:ext cx="3566160" cy="2194560"/>
+          </a:xfrm>
+          <a:prstGeom prst="rect">
+            <a:avLst/>
+          </a:prstGeom>
+          <a:solidFill>
+            <a:srgbClr val="F2F4F8"/>
+          </a:solidFill>
+          <a:ln>
+            <a:noFill/>
+          </a:ln>
+          <a:effectLst/>
+        </p:spPr>
+        <p:style>
+          <a:lnRef idx="1">
+            <a:schemeClr val="accent1"/>
+          </a:lnRef>
+          <a:fillRef idx="3">
+            <a:schemeClr val="accent1"/>
+          </a:fillRef>
+          <a:effectRef idx="2">
+            <a:schemeClr val="accent1"/>
+          </a:effectRef>
+          <a:fontRef idx="minor">
+            <a:schemeClr val="lt1"/>
+          </a:fontRef>
+        </p:style>
+        <p:txBody>
+          <a:bodyPr rtlCol="0" anchor="ctr"/>
+          <a:lstStyle/>
+          <a:p>
+            <a:pPr algn="ctr"/>
+          </a:p>
+        </p:txBody>
+      </p:sp>
+      <p:sp>
+        <p:nvSpPr>
+          <p:cNvPr id="13" name="TextBox 12"/>
+          <p:cNvSpPr txBox="1"/>
+          <p:nvPr/>
+        </p:nvSpPr>
+        <p:spPr>
+          <a:xfrm>
+            <a:off x="4453128" y="2578608"/>
+            <a:ext cx="3291840" cy="822960"/>
+          </a:xfrm>
+          <a:prstGeom prst="rect">
+            <a:avLst/>
+          </a:prstGeom>
+          <a:noFill/>
+        </p:spPr>
+        <p:txBody>
+          <a:bodyPr wrap="square" lIns="45720" rIns="45720" tIns="27432" bIns="27432" anchor="t">
+            <a:spAutoFit/>
+          </a:bodyPr>
+          <a:lstStyle/>
+          <a:p>
+            <a:pPr algn="l">
+              <a:lnSpc>
+                <a:spcPct val="105000"/>
+              </a:lnSpc>
+              <a:spcAft>
+                <a:spcPts val="400"/>
+              </a:spcAft>
+            </a:pPr>
+            <a:r>
+              <a:rPr sz="4000" b="1" i="0">
+                <a:solidFill>
+                  <a:srgbClr val="6E1F2E"/>
+                </a:solidFill>
+                <a:latin typeface="Georgia"/>
+              </a:rPr>
+              <a:t>$57.2M</a:t>
+            </a:r>
+          </a:p>
+        </p:txBody>
+      </p:sp>
+      <p:sp>
+        <p:nvSpPr>
+          <p:cNvPr id="14" name="TextBox 13"/>
+          <p:cNvSpPr txBox="1"/>
+          <p:nvPr/>
+        </p:nvSpPr>
+        <p:spPr>
+          <a:xfrm>
+            <a:off x="4453128" y="3264408"/>
+            <a:ext cx="3291840" cy="457200"/>
+          </a:xfrm>
+          <a:prstGeom prst="rect">
+            <a:avLst/>
+          </a:prstGeom>
+          <a:noFill/>
+        </p:spPr>
+        <p:txBody>
+          <a:bodyPr wrap="square" lIns="45720" rIns="45720" tIns="27432" bIns="27432" anchor="t">
+            <a:spAutoFit/>
+          </a:bodyPr>
+          <a:lstStyle/>
+          <a:p>
+            <a:pPr algn="l">
+              <a:lnSpc>
+                <a:spcPct val="105000"/>
+              </a:lnSpc>
+              <a:spcAft>
+                <a:spcPts val="400"/>
+              </a:spcAft>
+            </a:pPr>
+            <a:r>
+              <a:rPr sz="1500" b="1" i="0">
+                <a:solidFill>
+                  <a:srgbClr val="1F2A44"/>
+                </a:solidFill>
+                <a:latin typeface="Calibri"/>
+              </a:rPr>
+              <a:t>Project 21334 approval level</a:t>
+            </a:r>
+          </a:p>
+        </p:txBody>
+      </p:sp>
+      <p:sp>
+        <p:nvSpPr>
+          <p:cNvPr id="15" name="TextBox 14"/>
+          <p:cNvSpPr txBox="1"/>
+          <p:nvPr/>
+        </p:nvSpPr>
+        <p:spPr>
+          <a:xfrm>
+            <a:off x="4453128" y="3648456"/>
+            <a:ext cx="3291840" cy="969263"/>
+          </a:xfrm>
+          <a:prstGeom prst="rect">
+            <a:avLst/>
+          </a:prstGeom>
+          <a:noFill/>
+        </p:spPr>
+        <p:txBody>
+          <a:bodyPr wrap="square" lIns="45720" rIns="45720" tIns="27432" bIns="27432" anchor="t">
+            <a:spAutoFit/>
+          </a:bodyPr>
+          <a:lstStyle/>
+          <a:p>
+            <a:pPr algn="l">
+              <a:lnSpc>
+                <a:spcPct val="100000"/>
+              </a:lnSpc>
+              <a:spcAft>
+                <a:spcPts val="400"/>
+              </a:spcAft>
+            </a:pPr>
+            <a:r>
+              <a:rPr sz="1250" b="0" i="0">
+                <a:solidFill>
+                  <a:srgbClr val="6B7280"/>
+                </a:solidFill>
+                <a:latin typeface="Calibri"/>
+              </a:rPr>
+              <a:t>ESF Total Rev 3. Station 360 $50.0M plus Station 496 protection $7.3M. $2,862/kWh, $5,725/kW. Conceptual, -25%/+50%.</a:t>
+            </a:r>
+          </a:p>
+        </p:txBody>
+      </p:sp>
+      <p:sp>
+        <p:nvSpPr>
+          <p:cNvPr id="16" name="Rectangle 15"/>
+          <p:cNvSpPr/>
+          <p:nvPr/>
+        </p:nvSpPr>
+        <p:spPr>
+          <a:xfrm>
+            <a:off x="8083296" y="2468880"/>
+            <a:ext cx="3566160" cy="2194560"/>
+          </a:xfrm>
+          <a:prstGeom prst="rect">
+            <a:avLst/>
+          </a:prstGeom>
+          <a:solidFill>
+            <a:srgbClr val="F2F4F8"/>
+          </a:solidFill>
+          <a:ln>
+            <a:noFill/>
+          </a:ln>
+          <a:effectLst/>
+        </p:spPr>
+        <p:style>
+          <a:lnRef idx="1">
+            <a:schemeClr val="accent1"/>
+          </a:lnRef>
+          <a:fillRef idx="3">
+            <a:schemeClr val="accent1"/>
+          </a:fillRef>
+          <a:effectRef idx="2">
+            <a:schemeClr val="accent1"/>
+          </a:effectRef>
+          <a:fontRef idx="minor">
+            <a:schemeClr val="lt1"/>
+          </a:fontRef>
+        </p:style>
+        <p:txBody>
+          <a:bodyPr rtlCol="0" anchor="ctr"/>
+          <a:lstStyle/>
+          <a:p>
+            <a:pPr algn="ctr"/>
+          </a:p>
+        </p:txBody>
+      </p:sp>
+      <p:sp>
+        <p:nvSpPr>
+          <p:cNvPr id="17" name="TextBox 16"/>
+          <p:cNvSpPr txBox="1"/>
+          <p:nvPr/>
+        </p:nvSpPr>
+        <p:spPr>
+          <a:xfrm>
+            <a:off x="8220456" y="2578608"/>
+            <a:ext cx="3291840" cy="822960"/>
+          </a:xfrm>
+          <a:prstGeom prst="rect">
+            <a:avLst/>
+          </a:prstGeom>
+          <a:noFill/>
+        </p:spPr>
+        <p:txBody>
+          <a:bodyPr wrap="square" lIns="45720" rIns="45720" tIns="27432" bIns="27432" anchor="t">
+            <a:spAutoFit/>
+          </a:bodyPr>
+          <a:lstStyle/>
+          <a:p>
+            <a:pPr algn="l">
+              <a:lnSpc>
+                <a:spcPct val="105000"/>
+              </a:lnSpc>
+              <a:spcAft>
+                <a:spcPts val="400"/>
+              </a:spcAft>
+            </a:pPr>
+            <a:r>
+              <a:rPr sz="4000" b="1" i="0">
+                <a:solidFill>
+                  <a:srgbClr val="001E60"/>
+                </a:solidFill>
+                <a:latin typeface="Georgia"/>
+              </a:rPr>
+              <a:t>21%</a:t>
+            </a:r>
+          </a:p>
+        </p:txBody>
+      </p:sp>
+      <p:sp>
+        <p:nvSpPr>
+          <p:cNvPr id="18" name="TextBox 17"/>
+          <p:cNvSpPr txBox="1"/>
+          <p:nvPr/>
+        </p:nvSpPr>
+        <p:spPr>
+          <a:xfrm>
+            <a:off x="8220456" y="3264408"/>
+            <a:ext cx="3291840" cy="457200"/>
+          </a:xfrm>
+          <a:prstGeom prst="rect">
+            <a:avLst/>
+          </a:prstGeom>
+          <a:noFill/>
+        </p:spPr>
+        <p:txBody>
+          <a:bodyPr wrap="square" lIns="45720" rIns="45720" tIns="27432" bIns="27432" anchor="t">
+            <a:spAutoFit/>
+          </a:bodyPr>
+          <a:lstStyle/>
+          <a:p>
+            <a:pPr algn="l">
+              <a:lnSpc>
+                <a:spcPct val="105000"/>
+              </a:lnSpc>
+              <a:spcAft>
+                <a:spcPts val="400"/>
+              </a:spcAft>
+            </a:pPr>
+            <a:r>
+              <a:rPr sz="1500" b="1" i="0">
+                <a:solidFill>
+                  <a:srgbClr val="1F2A44"/>
+                </a:solidFill>
+                <a:latin typeface="Calibri"/>
+              </a:rPr>
+              <a:t>Battery share of the total</a:t>
+            </a:r>
+          </a:p>
+        </p:txBody>
+      </p:sp>
+      <p:sp>
+        <p:nvSpPr>
+          <p:cNvPr id="19" name="TextBox 18"/>
+          <p:cNvSpPr txBox="1"/>
+          <p:nvPr/>
+        </p:nvSpPr>
+        <p:spPr>
+          <a:xfrm>
+            <a:off x="8220456" y="3648456"/>
+            <a:ext cx="3291840" cy="969263"/>
+          </a:xfrm>
+          <a:prstGeom prst="rect">
+            <a:avLst/>
+          </a:prstGeom>
+          <a:noFill/>
+        </p:spPr>
+        <p:txBody>
+          <a:bodyPr wrap="square" lIns="45720" rIns="45720" tIns="27432" bIns="27432" anchor="t">
+            <a:spAutoFit/>
+          </a:bodyPr>
+          <a:lstStyle/>
+          <a:p>
+            <a:pPr algn="l">
+              <a:lnSpc>
+                <a:spcPct val="100000"/>
+              </a:lnSpc>
+              <a:spcAft>
+                <a:spcPts val="400"/>
+              </a:spcAft>
+            </a:pPr>
+            <a:r>
+              <a:rPr sz="1250" b="0" i="0">
+                <a:solidFill>
+                  <a:srgbClr val="6B7280"/>
+                </a:solidFill>
+                <a:latin typeface="Calibri"/>
+              </a:rPr>
+              <a:t>Add the D-Line circuit extension (24211, $4.8M conceptual) and the share drops to 20%. Four dollars of every five are not the battery.</a:t>
+            </a:r>
+          </a:p>
+        </p:txBody>
+      </p:sp>
+      <p:sp>
+        <p:nvSpPr>
+          <p:cNvPr id="20" name="TextBox 19"/>
+          <p:cNvSpPr txBox="1"/>
+          <p:nvPr/>
+        </p:nvSpPr>
+        <p:spPr>
+          <a:xfrm>
+            <a:off x="548640" y="4937760"/>
+            <a:ext cx="11064240" cy="1097280"/>
+          </a:xfrm>
+          <a:prstGeom prst="rect">
+            <a:avLst/>
+          </a:prstGeom>
+          <a:noFill/>
+        </p:spPr>
+        <p:txBody>
+          <a:bodyPr wrap="square" lIns="45720" rIns="45720" tIns="27432" bIns="27432" anchor="t">
+            <a:spAutoFit/>
+          </a:bodyPr>
+          <a:lstStyle/>
+          <a:p>
+            <a:pPr algn="l">
+              <a:lnSpc>
+                <a:spcPct val="105000"/>
+              </a:lnSpc>
+              <a:spcAft>
+                <a:spcPts val="400"/>
+              </a:spcAft>
+            </a:pPr>
+            <a:r>
+              <a:rPr sz="1600" b="1" i="0">
+                <a:solidFill>
+                  <a:srgbClr val="001E60"/>
+                </a:solidFill>
+                <a:latin typeface="Calibri"/>
+              </a:rPr>
+              <a:t>Three sections: </a:t>
+            </a:r>
+            <a:r>
+              <a:rPr sz="1600" b="0" i="0">
+                <a:solidFill>
+                  <a:srgbClr val="1F2A44"/>
+                </a:solidFill>
+                <a:latin typeface="Calibri"/>
+              </a:rPr>
+              <a:t>where the money sits (thirteen layers, unit costs, benchmarks); how the cost changed (2021 to today); can the number be defended (red team, stress tests, what must close).</a:t>
+            </a:r>
+          </a:p>
+        </p:txBody>
+      </p:sp>
+    </p:spTree>
+  </p:cSld>
+  <p:clrMapOvr>
+    <a:masterClrMapping/>
+  </p:clrMapOvr>
+</p:sld>
+</file>
+
+<file path=ppt/slides/slide20.xml><?xml version="1.0" encoding="utf-8"?>
+<p:sld xmlns:a="http://schemas.openxmlformats.org/drawingml/2006/main" xmlns:p="http://schemas.openxmlformats.org/presentationml/2006/main" xmlns:r="http://schemas.openxmlformats.org/officeDocument/2006/relationships">
+  <p:cSld>
+    <p:spTree>
+      <p:nvGrpSpPr>
+        <p:cNvPr id="1" name=""/>
+        <p:cNvGrpSpPr/>
+        <p:nvPr/>
+      </p:nvGrpSpPr>
+      <p:grpSpPr/>
+      <p:sp>
+        <p:nvSpPr>
+          <p:cNvPr id="2" name="Rectangle 1"/>
+          <p:cNvSpPr/>
+          <p:nvPr/>
+        </p:nvSpPr>
+        <p:spPr>
+          <a:xfrm>
+            <a:off x="0" y="0"/>
+            <a:ext cx="12191695" cy="6858000"/>
+          </a:xfrm>
+          <a:prstGeom prst="rect">
+            <a:avLst/>
+          </a:prstGeom>
+          <a:solidFill>
+            <a:srgbClr val="FFFFFF"/>
+          </a:solidFill>
+          <a:ln>
+            <a:noFill/>
+          </a:ln>
+          <a:effectLst/>
+        </p:spPr>
+        <p:style>
+          <a:lnRef idx="1">
+            <a:schemeClr val="accent1"/>
+          </a:lnRef>
+          <a:fillRef idx="3">
+            <a:schemeClr val="accent1"/>
+          </a:fillRef>
+          <a:effectRef idx="2">
+            <a:schemeClr val="accent1"/>
+          </a:effectRef>
+          <a:fontRef idx="minor">
+            <a:schemeClr val="lt1"/>
+          </a:fontRef>
+        </p:style>
+        <p:txBody>
+          <a:bodyPr rtlCol="0" anchor="ctr"/>
+          <a:lstStyle/>
+          <a:p>
+            <a:pPr algn="ctr"/>
+          </a:p>
+        </p:txBody>
+      </p:sp>
+      <p:sp>
+        <p:nvSpPr>
+          <p:cNvPr id="3" name="TextBox 2"/>
+          <p:cNvSpPr txBox="1"/>
+          <p:nvPr/>
+        </p:nvSpPr>
+        <p:spPr>
+          <a:xfrm>
+            <a:off x="548640" y="256032"/>
+            <a:ext cx="11064240" cy="274320"/>
+          </a:xfrm>
+          <a:prstGeom prst="rect">
+            <a:avLst/>
+          </a:prstGeom>
+          <a:noFill/>
+        </p:spPr>
+        <p:txBody>
+          <a:bodyPr wrap="square" lIns="45720" rIns="45720" tIns="27432" bIns="27432" anchor="t">
+            <a:spAutoFit/>
+          </a:bodyPr>
+          <a:lstStyle/>
+          <a:p>
+            <a:pPr algn="l">
+              <a:lnSpc>
+                <a:spcPct val="105000"/>
+              </a:lnSpc>
+              <a:spcAft>
+                <a:spcPts val="400"/>
+              </a:spcAft>
+            </a:pPr>
+            <a:r>
+              <a:rPr sz="1100" b="1" i="0">
+                <a:solidFill>
+                  <a:srgbClr val="6E1F2E"/>
+                </a:solidFill>
+                <a:latin typeface="Calibri"/>
+              </a:rPr>
+              <a:t>3 · CAN THE NUMBER BE DEFENDED   |   RECONCILIATIONS AND DECISIONS, RED-TEAM RANKED</a:t>
+            </a:r>
+          </a:p>
+        </p:txBody>
+      </p:sp>
+      <p:sp>
+        <p:nvSpPr>
+          <p:cNvPr id="4" name="TextBox 3"/>
+          <p:cNvSpPr txBox="1"/>
+          <p:nvPr/>
+        </p:nvSpPr>
+        <p:spPr>
+          <a:xfrm>
+            <a:off x="548640" y="475488"/>
+            <a:ext cx="11064240" cy="868680"/>
+          </a:xfrm>
+          <a:prstGeom prst="rect">
+            <a:avLst/>
+          </a:prstGeom>
+          <a:noFill/>
+        </p:spPr>
+        <p:txBody>
+          <a:bodyPr wrap="square" lIns="45720" rIns="45720" tIns="27432" bIns="27432" anchor="t">
+            <a:spAutoFit/>
+          </a:bodyPr>
+          <a:lstStyle/>
+          <a:p>
+            <a:pPr algn="l">
+              <a:lnSpc>
+                <a:spcPct val="100000"/>
+              </a:lnSpc>
+              <a:spcAft>
+                <a:spcPts val="400"/>
+              </a:spcAft>
+            </a:pPr>
+            <a:r>
+              <a:rPr sz="2300" b="1" i="0">
+                <a:solidFill>
+                  <a:srgbClr val="001E60"/>
+                </a:solidFill>
+                <a:latin typeface="Georgia"/>
+              </a:rPr>
+              <a:t>What must close before this number goes to EPAC as full funding</a:t>
+            </a:r>
+          </a:p>
+        </p:txBody>
+      </p:sp>
+      <p:sp>
+        <p:nvSpPr>
+          <p:cNvPr id="5" name="TextBox 4"/>
+          <p:cNvSpPr txBox="1"/>
+          <p:nvPr/>
+        </p:nvSpPr>
+        <p:spPr>
+          <a:xfrm>
+            <a:off x="548640" y="6419088"/>
+            <a:ext cx="8229600" cy="274320"/>
+          </a:xfrm>
+          <a:prstGeom prst="rect">
+            <a:avLst/>
+          </a:prstGeom>
+          <a:noFill/>
+        </p:spPr>
+        <p:txBody>
+          <a:bodyPr wrap="square" lIns="45720" rIns="45720" tIns="27432" bIns="27432" anchor="t">
+            <a:spAutoFit/>
+          </a:bodyPr>
+          <a:lstStyle/>
+          <a:p>
+            <a:pPr algn="l">
+              <a:lnSpc>
+                <a:spcPct val="105000"/>
+              </a:lnSpc>
+              <a:spcAft>
+                <a:spcPts val="400"/>
+              </a:spcAft>
+            </a:pPr>
+            <a:r>
+              <a:rPr sz="1000" b="0" i="0">
+                <a:solidFill>
+                  <a:srgbClr val="6B7280"/>
+                </a:solidFill>
+                <a:latin typeface="Calibri"/>
+              </a:rPr>
+              <a:t>EstimatingCoE | Eversource Energy | Stewards of Affordability</a:t>
+            </a:r>
+          </a:p>
+        </p:txBody>
+      </p:sp>
+      <p:sp>
+        <p:nvSpPr>
+          <p:cNvPr id="6" name="TextBox 5"/>
+          <p:cNvSpPr txBox="1"/>
+          <p:nvPr/>
+        </p:nvSpPr>
+        <p:spPr>
+          <a:xfrm>
+            <a:off x="10972800" y="6419088"/>
+            <a:ext cx="685800" cy="274320"/>
+          </a:xfrm>
+          <a:prstGeom prst="rect">
+            <a:avLst/>
+          </a:prstGeom>
+          <a:noFill/>
+        </p:spPr>
+        <p:txBody>
+          <a:bodyPr wrap="square" lIns="45720" rIns="45720" tIns="27432" bIns="27432" anchor="t">
+            <a:spAutoFit/>
+          </a:bodyPr>
+          <a:lstStyle/>
+          <a:p>
+            <a:pPr algn="r">
+              <a:lnSpc>
+                <a:spcPct val="105000"/>
+              </a:lnSpc>
+              <a:spcAft>
+                <a:spcPts val="400"/>
+              </a:spcAft>
+            </a:pPr>
+            <a:r>
+              <a:rPr sz="1000" b="0" i="0">
+                <a:solidFill>
+                  <a:srgbClr val="6B7280"/>
+                </a:solidFill>
+                <a:latin typeface="Calibri"/>
+              </a:rPr>
+              <a:t>20</a:t>
             </a:r>
           </a:p>
         </p:txBody>
@@ -15182,7 +18804,7 @@
 </p:sld>
 </file>
 
-<file path=ppt/slides/slide19.xml><?xml version="1.0" encoding="utf-8"?>
+<file path=ppt/slides/slide21.xml><?xml version="1.0" encoding="utf-8"?>
 <p:sld xmlns:a="http://schemas.openxmlformats.org/drawingml/2006/main" xmlns:p="http://schemas.openxmlformats.org/presentationml/2006/main" xmlns:r="http://schemas.openxmlformats.org/officeDocument/2006/relationships">
   <p:cSld>
     <p:spTree>
@@ -15734,7 +19356,7 @@
 </p:sld>
 </file>
 
-<file path=ppt/slides/slide2.xml><?xml version="1.0" encoding="utf-8"?>
+<file path=ppt/slides/slide22.xml><?xml version="1.0" encoding="utf-8"?>
 <p:sld xmlns:a="http://schemas.openxmlformats.org/drawingml/2006/main" xmlns:p="http://schemas.openxmlformats.org/presentationml/2006/main" xmlns:r="http://schemas.openxmlformats.org/officeDocument/2006/relationships">
   <p:cSld>
     <p:spTree>
@@ -15825,7 +19447,7 @@
                 </a:solidFill>
                 <a:latin typeface="Calibri"/>
               </a:rPr>
-              <a:t>THE PROMISE</a:t>
+              <a:t>APPENDIX A. REFERENCE CLASS (PUBLIC DISCLOSURES, NOMINAL $/KWH)</a:t>
             </a:r>
           </a:p>
         </p:txBody>
@@ -15867,7 +19489,7 @@
                 </a:solidFill>
                 <a:latin typeface="Georgia"/>
               </a:rPr>
-              <a:t>By the end of this deck you can answer one question in one breath</a:t>
+              <a:t>Thirteen utility-owned projects at or below 100 MWh: where Hyde Park sits</a:t>
             </a:r>
           </a:p>
         </p:txBody>
@@ -15951,21 +19573,45 @@
                 </a:solidFill>
                 <a:latin typeface="Calibri"/>
               </a:rPr>
-              <a:t>2</a:t>
-            </a:r>
-          </a:p>
-        </p:txBody>
-      </p:sp>
-      <p:sp>
-        <p:nvSpPr>
-          <p:cNvPr id="7" name="TextBox 6"/>
+              <a:t>21</a:t>
+            </a:r>
+          </a:p>
+        </p:txBody>
+      </p:sp>
+      <p:pic>
+        <p:nvPicPr>
+          <p:cNvPr id="7" name="Picture 6" descr="stats_refclass.png"/>
+          <p:cNvPicPr>
+            <a:picLocks noChangeAspect="1"/>
+          </p:cNvPicPr>
+          <p:nvPr/>
+        </p:nvPicPr>
+        <p:blipFill>
+          <a:blip r:embed="rId2"/>
+          <a:stretch>
+            <a:fillRect/>
+          </a:stretch>
+        </p:blipFill>
+        <p:spPr>
+          <a:xfrm>
+            <a:off x="457200" y="1417320"/>
+            <a:ext cx="7223760" cy="2471286"/>
+          </a:xfrm>
+          <a:prstGeom prst="rect">
+            <a:avLst/>
+          </a:prstGeom>
+        </p:spPr>
+      </p:pic>
+      <p:sp>
+        <p:nvSpPr>
+          <p:cNvPr id="8" name="TextBox 7"/>
           <p:cNvSpPr txBox="1"/>
           <p:nvPr/>
         </p:nvSpPr>
         <p:spPr>
           <a:xfrm>
-            <a:off x="548640" y="1417320"/>
-            <a:ext cx="10972800" cy="640080"/>
+            <a:off x="7863840" y="1417320"/>
+            <a:ext cx="3840480" cy="4846320"/>
           </a:xfrm>
           <a:prstGeom prst="rect">
             <a:avLst/>
@@ -15973,588 +19619,193 @@
           <a:noFill/>
         </p:spPr>
         <p:txBody>
-          <a:bodyPr wrap="square" lIns="45720" rIns="45720" tIns="27432" bIns="27432" anchor="t">
+          <a:bodyPr wrap="square" lIns="45720">
             <a:spAutoFit/>
           </a:bodyPr>
           <a:lstStyle/>
           <a:p>
-            <a:pPr algn="l">
+            <a:pPr>
               <a:lnSpc>
                 <a:spcPct val="105000"/>
               </a:lnSpc>
               <a:spcAft>
-                <a:spcPts val="400"/>
+                <a:spcPts val="600"/>
               </a:spcAft>
             </a:pPr>
             <a:r>
-              <a:rPr sz="1900" b="0" i="0">
+              <a:rPr sz="1250">
+                <a:solidFill>
+                  <a:srgbClr val="FFC72C"/>
+                </a:solidFill>
+                <a:latin typeface="Calibri"/>
+              </a:rPr>
+              <a:t>▪  </a:t>
+            </a:r>
+            <a:r>
+              <a:rPr b="1" sz="1250">
                 <a:solidFill>
                   <a:srgbClr val="1F2A44"/>
                 </a:solidFill>
                 <a:latin typeface="Calibri"/>
               </a:rPr>
-              <a:t>“Why is a $12 million battery a $57 million project?”  Because a vendor prices the battery. We build the station, the site, the feeder protection and the siting case, and we carry the risk and the cost of money.</a:t>
-            </a:r>
-          </a:p>
-        </p:txBody>
-      </p:sp>
-      <p:sp>
-        <p:nvSpPr>
-          <p:cNvPr id="8" name="Rectangle 7"/>
-          <p:cNvSpPr/>
-          <p:nvPr/>
-        </p:nvSpPr>
-        <p:spPr>
-          <a:xfrm>
-            <a:off x="548640" y="2468880"/>
-            <a:ext cx="3566160" cy="2194560"/>
-          </a:xfrm>
-          <a:prstGeom prst="rect">
-            <a:avLst/>
-          </a:prstGeom>
-          <a:solidFill>
-            <a:srgbClr val="F2F4F8"/>
-          </a:solidFill>
-          <a:ln>
-            <a:noFill/>
-          </a:ln>
-          <a:effectLst/>
-        </p:spPr>
-        <p:style>
-          <a:lnRef idx="1">
-            <a:schemeClr val="accent1"/>
-          </a:lnRef>
-          <a:fillRef idx="3">
-            <a:schemeClr val="accent1"/>
-          </a:fillRef>
-          <a:effectRef idx="2">
-            <a:schemeClr val="accent1"/>
-          </a:effectRef>
-          <a:fontRef idx="minor">
-            <a:schemeClr val="lt1"/>
-          </a:fontRef>
-        </p:style>
-        <p:txBody>
-          <a:bodyPr rtlCol="0" anchor="ctr"/>
-          <a:lstStyle/>
-          <a:p>
-            <a:pPr algn="ctr"/>
-          </a:p>
-        </p:txBody>
-      </p:sp>
-      <p:sp>
-        <p:nvSpPr>
-          <p:cNvPr id="9" name="TextBox 8"/>
-          <p:cNvSpPr txBox="1"/>
-          <p:nvPr/>
-        </p:nvSpPr>
-        <p:spPr>
-          <a:xfrm>
-            <a:off x="685800" y="2578608"/>
-            <a:ext cx="3291840" cy="822960"/>
-          </a:xfrm>
-          <a:prstGeom prst="rect">
-            <a:avLst/>
-          </a:prstGeom>
-          <a:noFill/>
-        </p:spPr>
-        <p:txBody>
-          <a:bodyPr wrap="square" lIns="45720" rIns="45720" tIns="27432" bIns="27432" anchor="t">
-            <a:spAutoFit/>
-          </a:bodyPr>
-          <a:lstStyle/>
-          <a:p>
-            <a:pPr algn="l">
+              <a:t>Median </a:t>
+            </a:r>
+            <a:r>
+              <a:rPr sz="1250">
+                <a:solidFill>
+                  <a:srgbClr val="1F2A44"/>
+                </a:solidFill>
+                <a:latin typeface="Calibri"/>
+              </a:rPr>
+              <a:t>$1,235/kWh; interquartile $750 to $1,289.</a:t>
+            </a:r>
+          </a:p>
+          <a:p>
+            <a:pPr>
               <a:lnSpc>
                 <a:spcPct val="105000"/>
               </a:lnSpc>
               <a:spcAft>
-                <a:spcPts val="400"/>
+                <a:spcPts val="600"/>
               </a:spcAft>
             </a:pPr>
             <a:r>
-              <a:rPr sz="4000" b="1" i="0">
-                <a:solidFill>
-                  <a:srgbClr val="001E60"/>
-                </a:solidFill>
-                <a:latin typeface="Georgia"/>
-              </a:rPr>
-              <a:t>$12.1M</a:t>
-            </a:r>
-          </a:p>
-        </p:txBody>
-      </p:sp>
-      <p:sp>
-        <p:nvSpPr>
-          <p:cNvPr id="10" name="TextBox 9"/>
-          <p:cNvSpPr txBox="1"/>
-          <p:nvPr/>
-        </p:nvSpPr>
-        <p:spPr>
-          <a:xfrm>
-            <a:off x="685800" y="3264408"/>
-            <a:ext cx="3291840" cy="457200"/>
-          </a:xfrm>
-          <a:prstGeom prst="rect">
-            <a:avLst/>
-          </a:prstGeom>
-          <a:noFill/>
-        </p:spPr>
-        <p:txBody>
-          <a:bodyPr wrap="square" lIns="45720" rIns="45720" tIns="27432" bIns="27432" anchor="t">
-            <a:spAutoFit/>
-          </a:bodyPr>
-          <a:lstStyle/>
-          <a:p>
-            <a:pPr algn="l">
+              <a:rPr sz="1250">
+                <a:solidFill>
+                  <a:srgbClr val="FFC72C"/>
+                </a:solidFill>
+                <a:latin typeface="Calibri"/>
+              </a:rPr>
+              <a:t>▪  </a:t>
+            </a:r>
+            <a:r>
+              <a:rPr b="1" sz="1250">
+                <a:solidFill>
+                  <a:srgbClr val="1F2A44"/>
+                </a:solidFill>
+                <a:latin typeface="Calibri"/>
+              </a:rPr>
+              <a:t>Hyde Park battery installed, $833: </a:t>
+            </a:r>
+            <a:r>
+              <a:rPr sz="1250">
+                <a:solidFill>
+                  <a:srgbClr val="1F2A44"/>
+                </a:solidFill>
+                <a:latin typeface="Calibri"/>
+              </a:rPr>
+              <a:t>38% percentile.</a:t>
+            </a:r>
+          </a:p>
+          <a:p>
+            <a:pPr>
               <a:lnSpc>
                 <a:spcPct val="105000"/>
               </a:lnSpc>
               <a:spcAft>
-                <a:spcPts val="400"/>
+                <a:spcPts val="600"/>
               </a:spcAft>
             </a:pPr>
             <a:r>
-              <a:rPr sz="1500" b="1" i="0">
+              <a:rPr sz="1250">
+                <a:solidFill>
+                  <a:srgbClr val="FFC72C"/>
+                </a:solidFill>
+                <a:latin typeface="Calibri"/>
+              </a:rPr>
+              <a:t>▪  </a:t>
+            </a:r>
+            <a:r>
+              <a:rPr b="1" sz="1250">
                 <a:solidFill>
                   <a:srgbClr val="1F2A44"/>
                 </a:solidFill>
                 <a:latin typeface="Calibri"/>
               </a:rPr>
-              <a:t>Vendor fixed-price contract</a:t>
-            </a:r>
-          </a:p>
-        </p:txBody>
-      </p:sp>
-      <p:sp>
-        <p:nvSpPr>
-          <p:cNvPr id="11" name="TextBox 10"/>
-          <p:cNvSpPr txBox="1"/>
-          <p:nvPr/>
-        </p:nvSpPr>
-        <p:spPr>
-          <a:xfrm>
-            <a:off x="685800" y="3648456"/>
-            <a:ext cx="3291840" cy="969263"/>
-          </a:xfrm>
-          <a:prstGeom prst="rect">
-            <a:avLst/>
-          </a:prstGeom>
-          <a:noFill/>
-        </p:spPr>
-        <p:txBody>
-          <a:bodyPr wrap="square" lIns="45720" rIns="45720" tIns="27432" bIns="27432" anchor="t">
-            <a:spAutoFit/>
-          </a:bodyPr>
-          <a:lstStyle/>
-          <a:p>
-            <a:pPr algn="l">
-              <a:lnSpc>
-                <a:spcPct val="100000"/>
-              </a:lnSpc>
-              <a:spcAft>
-                <a:spcPts val="400"/>
-              </a:spcAft>
-            </a:pPr>
-            <a:r>
-              <a:rPr sz="1250" b="0" i="0">
-                <a:solidFill>
-                  <a:srgbClr val="6B7280"/>
-                </a:solidFill>
-                <a:latin typeface="Calibri"/>
-              </a:rPr>
-              <a:t>Nomad cover agreement, 10 Mar 2026. 12 Voyager LFP units, PCS, BMS, fire protection, 10-yr warranty. $605/kWh, $1,211/kW.</a:t>
-            </a:r>
-          </a:p>
-        </p:txBody>
-      </p:sp>
-      <p:sp>
-        <p:nvSpPr>
-          <p:cNvPr id="12" name="Rectangle 11"/>
-          <p:cNvSpPr/>
-          <p:nvPr/>
-        </p:nvSpPr>
-        <p:spPr>
-          <a:xfrm>
-            <a:off x="4315968" y="2468880"/>
-            <a:ext cx="3566160" cy="2194560"/>
-          </a:xfrm>
-          <a:prstGeom prst="rect">
-            <a:avLst/>
-          </a:prstGeom>
-          <a:solidFill>
-            <a:srgbClr val="F2F4F8"/>
-          </a:solidFill>
-          <a:ln>
-            <a:noFill/>
-          </a:ln>
-          <a:effectLst/>
-        </p:spPr>
-        <p:style>
-          <a:lnRef idx="1">
-            <a:schemeClr val="accent1"/>
-          </a:lnRef>
-          <a:fillRef idx="3">
-            <a:schemeClr val="accent1"/>
-          </a:fillRef>
-          <a:effectRef idx="2">
-            <a:schemeClr val="accent1"/>
-          </a:effectRef>
-          <a:fontRef idx="minor">
-            <a:schemeClr val="lt1"/>
-          </a:fontRef>
-        </p:style>
-        <p:txBody>
-          <a:bodyPr rtlCol="0" anchor="ctr"/>
-          <a:lstStyle/>
-          <a:p>
-            <a:pPr algn="ctr"/>
-          </a:p>
-        </p:txBody>
-      </p:sp>
-      <p:sp>
-        <p:nvSpPr>
-          <p:cNvPr id="13" name="TextBox 12"/>
-          <p:cNvSpPr txBox="1"/>
-          <p:nvPr/>
-        </p:nvSpPr>
-        <p:spPr>
-          <a:xfrm>
-            <a:off x="4453128" y="2578608"/>
-            <a:ext cx="3291840" cy="822960"/>
-          </a:xfrm>
-          <a:prstGeom prst="rect">
-            <a:avLst/>
-          </a:prstGeom>
-          <a:noFill/>
-        </p:spPr>
-        <p:txBody>
-          <a:bodyPr wrap="square" lIns="45720" rIns="45720" tIns="27432" bIns="27432" anchor="t">
-            <a:spAutoFit/>
-          </a:bodyPr>
-          <a:lstStyle/>
-          <a:p>
-            <a:pPr algn="l">
+              <a:t>Station complete, direct, $1,483: </a:t>
+            </a:r>
+            <a:r>
+              <a:rPr sz="1250">
+                <a:solidFill>
+                  <a:srgbClr val="1F2A44"/>
+                </a:solidFill>
+                <a:latin typeface="Calibri"/>
+              </a:rPr>
+              <a:t>77% percentile, beside Fairhaven ($1,659 actual, 2023), Chateaugay ($1,490, 2023) and Provincetown ($1,289, 2022).</a:t>
+            </a:r>
+          </a:p>
+          <a:p>
+            <a:pPr>
               <a:lnSpc>
                 <a:spcPct val="105000"/>
               </a:lnSpc>
               <a:spcAft>
-                <a:spcPts val="400"/>
+                <a:spcPts val="600"/>
               </a:spcAft>
             </a:pPr>
             <a:r>
-              <a:rPr sz="4000" b="1" i="0">
-                <a:solidFill>
-                  <a:srgbClr val="6E1F2E"/>
-                </a:solidFill>
-                <a:latin typeface="Georgia"/>
-              </a:rPr>
-              <a:t>$57.2M</a:t>
-            </a:r>
-          </a:p>
-        </p:txBody>
-      </p:sp>
-      <p:sp>
-        <p:nvSpPr>
-          <p:cNvPr id="14" name="TextBox 13"/>
-          <p:cNvSpPr txBox="1"/>
-          <p:nvPr/>
-        </p:nvSpPr>
-        <p:spPr>
-          <a:xfrm>
-            <a:off x="4453128" y="3264408"/>
-            <a:ext cx="3291840" cy="457200"/>
-          </a:xfrm>
-          <a:prstGeom prst="rect">
-            <a:avLst/>
-          </a:prstGeom>
-          <a:noFill/>
-        </p:spPr>
-        <p:txBody>
-          <a:bodyPr wrap="square" lIns="45720" rIns="45720" tIns="27432" bIns="27432" anchor="t">
-            <a:spAutoFit/>
-          </a:bodyPr>
-          <a:lstStyle/>
-          <a:p>
-            <a:pPr algn="l">
+              <a:rPr sz="1250">
+                <a:solidFill>
+                  <a:srgbClr val="FFC72C"/>
+                </a:solidFill>
+                <a:latin typeface="Calibri"/>
+              </a:rPr>
+              <a:t>▪  </a:t>
+            </a:r>
+            <a:r>
+              <a:rPr b="1" sz="1250">
+                <a:solidFill>
+                  <a:srgbClr val="1F2A44"/>
+                </a:solidFill>
+                <a:latin typeface="Calibri"/>
+              </a:rPr>
+              <a:t>Approval level, $2,862: </a:t>
+            </a:r>
+            <a:r>
+              <a:rPr sz="1250">
+                <a:solidFill>
+                  <a:srgbClr val="1F2A44"/>
+                </a:solidFill>
+                <a:latin typeface="Calibri"/>
+              </a:rPr>
+              <a:t>above every member. The loaders ($23.7M) and the two interconnection scopes are what the comparables do not carry.</a:t>
+            </a:r>
+          </a:p>
+          <a:p>
+            <a:pPr>
               <a:lnSpc>
                 <a:spcPct val="105000"/>
               </a:lnSpc>
               <a:spcAft>
-                <a:spcPts val="400"/>
+                <a:spcPts val="600"/>
               </a:spcAft>
             </a:pPr>
             <a:r>
-              <a:rPr sz="1500" b="1" i="0">
+              <a:rPr sz="1250">
+                <a:solidFill>
+                  <a:srgbClr val="FFC72C"/>
+                </a:solidFill>
+                <a:latin typeface="Calibri"/>
+              </a:rPr>
+              <a:t>▪  </a:t>
+            </a:r>
+            <a:r>
+              <a:rPr b="1" sz="1250">
                 <a:solidFill>
                   <a:srgbClr val="1F2A44"/>
                 </a:solidFill>
                 <a:latin typeface="Calibri"/>
               </a:rPr>
-              <a:t>Project 21334 approval level</a:t>
-            </a:r>
-          </a:p>
-        </p:txBody>
-      </p:sp>
-      <p:sp>
-        <p:nvSpPr>
-          <p:cNvPr id="15" name="TextBox 14"/>
-          <p:cNvSpPr txBox="1"/>
-          <p:nvPr/>
-        </p:nvSpPr>
-        <p:spPr>
-          <a:xfrm>
-            <a:off x="4453128" y="3648456"/>
-            <a:ext cx="3291840" cy="969263"/>
-          </a:xfrm>
-          <a:prstGeom prst="rect">
-            <a:avLst/>
-          </a:prstGeom>
-          <a:noFill/>
-        </p:spPr>
-        <p:txBody>
-          <a:bodyPr wrap="square" lIns="45720" rIns="45720" tIns="27432" bIns="27432" anchor="t">
-            <a:spAutoFit/>
-          </a:bodyPr>
-          <a:lstStyle/>
-          <a:p>
-            <a:pPr algn="l">
-              <a:lnSpc>
-                <a:spcPct val="100000"/>
-              </a:lnSpc>
-              <a:spcAft>
-                <a:spcPts val="400"/>
-              </a:spcAft>
-            </a:pPr>
-            <a:r>
-              <a:rPr sz="1250" b="0" i="0">
-                <a:solidFill>
-                  <a:srgbClr val="6B7280"/>
-                </a:solidFill>
-                <a:latin typeface="Calibri"/>
-              </a:rPr>
-              <a:t>ESF Total Rev 3. Station 360 $50.0M plus Station 496 protection $7.3M. $2,862/kWh, $5,725/kW. Conceptual, -25%/+50%.</a:t>
-            </a:r>
-          </a:p>
-        </p:txBody>
-      </p:sp>
-      <p:sp>
-        <p:nvSpPr>
-          <p:cNvPr id="16" name="Rectangle 15"/>
-          <p:cNvSpPr/>
-          <p:nvPr/>
-        </p:nvSpPr>
-        <p:spPr>
-          <a:xfrm>
-            <a:off x="8083296" y="2468880"/>
-            <a:ext cx="3566160" cy="2194560"/>
-          </a:xfrm>
-          <a:prstGeom prst="rect">
-            <a:avLst/>
-          </a:prstGeom>
-          <a:solidFill>
-            <a:srgbClr val="F2F4F8"/>
-          </a:solidFill>
-          <a:ln>
-            <a:noFill/>
-          </a:ln>
-          <a:effectLst/>
-        </p:spPr>
-        <p:style>
-          <a:lnRef idx="1">
-            <a:schemeClr val="accent1"/>
-          </a:lnRef>
-          <a:fillRef idx="3">
-            <a:schemeClr val="accent1"/>
-          </a:fillRef>
-          <a:effectRef idx="2">
-            <a:schemeClr val="accent1"/>
-          </a:effectRef>
-          <a:fontRef idx="minor">
-            <a:schemeClr val="lt1"/>
-          </a:fontRef>
-        </p:style>
-        <p:txBody>
-          <a:bodyPr rtlCol="0" anchor="ctr"/>
-          <a:lstStyle/>
-          <a:p>
-            <a:pPr algn="ctr"/>
-          </a:p>
-        </p:txBody>
-      </p:sp>
-      <p:sp>
-        <p:nvSpPr>
-          <p:cNvPr id="17" name="TextBox 16"/>
-          <p:cNvSpPr txBox="1"/>
-          <p:nvPr/>
-        </p:nvSpPr>
-        <p:spPr>
-          <a:xfrm>
-            <a:off x="8220456" y="2578608"/>
-            <a:ext cx="3291840" cy="822960"/>
-          </a:xfrm>
-          <a:prstGeom prst="rect">
-            <a:avLst/>
-          </a:prstGeom>
-          <a:noFill/>
-        </p:spPr>
-        <p:txBody>
-          <a:bodyPr wrap="square" lIns="45720" rIns="45720" tIns="27432" bIns="27432" anchor="t">
-            <a:spAutoFit/>
-          </a:bodyPr>
-          <a:lstStyle/>
-          <a:p>
-            <a:pPr algn="l">
-              <a:lnSpc>
-                <a:spcPct val="105000"/>
-              </a:lnSpc>
-              <a:spcAft>
-                <a:spcPts val="400"/>
-              </a:spcAft>
-            </a:pPr>
-            <a:r>
-              <a:rPr sz="4000" b="1" i="0">
-                <a:solidFill>
-                  <a:srgbClr val="001E60"/>
-                </a:solidFill>
-                <a:latin typeface="Georgia"/>
-              </a:rPr>
-              <a:t>21%</a:t>
-            </a:r>
-          </a:p>
-        </p:txBody>
-      </p:sp>
-      <p:sp>
-        <p:nvSpPr>
-          <p:cNvPr id="18" name="TextBox 17"/>
-          <p:cNvSpPr txBox="1"/>
-          <p:nvPr/>
-        </p:nvSpPr>
-        <p:spPr>
-          <a:xfrm>
-            <a:off x="8220456" y="3264408"/>
-            <a:ext cx="3291840" cy="457200"/>
-          </a:xfrm>
-          <a:prstGeom prst="rect">
-            <a:avLst/>
-          </a:prstGeom>
-          <a:noFill/>
-        </p:spPr>
-        <p:txBody>
-          <a:bodyPr wrap="square" lIns="45720" rIns="45720" tIns="27432" bIns="27432" anchor="t">
-            <a:spAutoFit/>
-          </a:bodyPr>
-          <a:lstStyle/>
-          <a:p>
-            <a:pPr algn="l">
-              <a:lnSpc>
-                <a:spcPct val="105000"/>
-              </a:lnSpc>
-              <a:spcAft>
-                <a:spcPts val="400"/>
-              </a:spcAft>
-            </a:pPr>
-            <a:r>
-              <a:rPr sz="1500" b="1" i="0">
+              <a:t>Caveat: </a:t>
+            </a:r>
+            <a:r>
+              <a:rPr sz="1250">
                 <a:solidFill>
                   <a:srgbClr val="1F2A44"/>
                 </a:solidFill>
                 <a:latin typeface="Calibri"/>
               </a:rPr>
-              <a:t>Battery share of the total</a:t>
-            </a:r>
-          </a:p>
-        </p:txBody>
-      </p:sp>
-      <p:sp>
-        <p:nvSpPr>
-          <p:cNvPr id="19" name="TextBox 18"/>
-          <p:cNvSpPr txBox="1"/>
-          <p:nvPr/>
-        </p:nvSpPr>
-        <p:spPr>
-          <a:xfrm>
-            <a:off x="8220456" y="3648456"/>
-            <a:ext cx="3291840" cy="969263"/>
-          </a:xfrm>
-          <a:prstGeom prst="rect">
-            <a:avLst/>
-          </a:prstGeom>
-          <a:noFill/>
-        </p:spPr>
-        <p:txBody>
-          <a:bodyPr wrap="square" lIns="45720" rIns="45720" tIns="27432" bIns="27432" anchor="t">
-            <a:spAutoFit/>
-          </a:bodyPr>
-          <a:lstStyle/>
-          <a:p>
-            <a:pPr algn="l">
-              <a:lnSpc>
-                <a:spcPct val="100000"/>
-              </a:lnSpc>
-              <a:spcAft>
-                <a:spcPts val="400"/>
-              </a:spcAft>
-            </a:pPr>
-            <a:r>
-              <a:rPr sz="1250" b="0" i="0">
-                <a:solidFill>
-                  <a:srgbClr val="6B7280"/>
-                </a:solidFill>
-                <a:latin typeface="Calibri"/>
-              </a:rPr>
-              <a:t>Add the D-Line circuit extension (24211, $4.8M conceptual) and the share drops to 20%. Four dollars of every five are not the battery.</a:t>
-            </a:r>
-          </a:p>
-        </p:txBody>
-      </p:sp>
-      <p:sp>
-        <p:nvSpPr>
-          <p:cNvPr id="20" name="TextBox 19"/>
-          <p:cNvSpPr txBox="1"/>
-          <p:nvPr/>
-        </p:nvSpPr>
-        <p:spPr>
-          <a:xfrm>
-            <a:off x="548640" y="4937760"/>
-            <a:ext cx="11064240" cy="1097280"/>
-          </a:xfrm>
-          <a:prstGeom prst="rect">
-            <a:avLst/>
-          </a:prstGeom>
-          <a:noFill/>
-        </p:spPr>
-        <p:txBody>
-          <a:bodyPr wrap="square" lIns="45720" rIns="45720" tIns="27432" bIns="27432" anchor="t">
-            <a:spAutoFit/>
-          </a:bodyPr>
-          <a:lstStyle/>
-          <a:p>
-            <a:pPr algn="l">
-              <a:lnSpc>
-                <a:spcPct val="105000"/>
-              </a:lnSpc>
-              <a:spcAft>
-                <a:spcPts val="400"/>
-              </a:spcAft>
-            </a:pPr>
-            <a:r>
-              <a:rPr sz="1600" b="1" i="0">
-                <a:solidFill>
-                  <a:srgbClr val="001E60"/>
-                </a:solidFill>
-                <a:latin typeface="Calibri"/>
-              </a:rPr>
-              <a:t>Three sections: </a:t>
-            </a:r>
-            <a:r>
-              <a:rPr sz="1600" b="0" i="0">
-                <a:solidFill>
-                  <a:srgbClr val="1F2A44"/>
-                </a:solidFill>
-                <a:latin typeface="Calibri"/>
-              </a:rPr>
-              <a:t>where the money sits (thirteen layers, unit costs, benchmarks); how the cost changed (2021 to today); can the number be defended (red team, stress tests, what must close).</a:t>
+              <a:t>figures retrieved from search excerpts of regulator and utility documents; verify at source before external use.</a:t>
             </a:r>
           </a:p>
         </p:txBody>
@@ -16567,7 +19818,7 @@
 </p:sld>
 </file>
 
-<file path=ppt/slides/slide20.xml><?xml version="1.0" encoding="utf-8"?>
+<file path=ppt/slides/slide23.xml><?xml version="1.0" encoding="utf-8"?>
 <p:sld xmlns:a="http://schemas.openxmlformats.org/drawingml/2006/main" xmlns:p="http://schemas.openxmlformats.org/presentationml/2006/main" xmlns:r="http://schemas.openxmlformats.org/officeDocument/2006/relationships">
   <p:cSld>
     <p:spTree>
@@ -16658,7 +19909,7 @@
                 </a:solidFill>
                 <a:latin typeface="Calibri"/>
               </a:rPr>
-              <a:t>APPENDIX A. REFERENCE CLASS (PUBLIC DISCLOSURES, NOMINAL $/KWH)</a:t>
+              <a:t>APPENDIX B. REGRESSION ON 26 PUBLIC PROJECTS</a:t>
             </a:r>
           </a:p>
         </p:txBody>
@@ -16700,7 +19951,7 @@
                 </a:solidFill>
                 <a:latin typeface="Georgia"/>
               </a:rPr>
-              <a:t>Thirteen utility-owned projects at or below 100 MWh: where Hyde Park sits</a:t>
+              <a:t>Size and duration explain two thirds of the spread in public costs; Hyde Park's direct cost is high-normal</a:t>
             </a:r>
           </a:p>
         </p:txBody>
@@ -16784,469 +20035,7 @@
                 </a:solidFill>
                 <a:latin typeface="Calibri"/>
               </a:rPr>
-              <a:t>19</a:t>
-            </a:r>
-          </a:p>
-        </p:txBody>
-      </p:sp>
-      <p:pic>
-        <p:nvPicPr>
-          <p:cNvPr id="7" name="Picture 6" descr="stats_refclass.png"/>
-          <p:cNvPicPr>
-            <a:picLocks noChangeAspect="1"/>
-          </p:cNvPicPr>
-          <p:nvPr/>
-        </p:nvPicPr>
-        <p:blipFill>
-          <a:blip r:embed="rId2"/>
-          <a:stretch>
-            <a:fillRect/>
-          </a:stretch>
-        </p:blipFill>
-        <p:spPr>
-          <a:xfrm>
-            <a:off x="457200" y="1417320"/>
-            <a:ext cx="7223760" cy="2471286"/>
-          </a:xfrm>
-          <a:prstGeom prst="rect">
-            <a:avLst/>
-          </a:prstGeom>
-        </p:spPr>
-      </p:pic>
-      <p:sp>
-        <p:nvSpPr>
-          <p:cNvPr id="8" name="TextBox 7"/>
-          <p:cNvSpPr txBox="1"/>
-          <p:nvPr/>
-        </p:nvSpPr>
-        <p:spPr>
-          <a:xfrm>
-            <a:off x="7863840" y="1417320"/>
-            <a:ext cx="3840480" cy="4846320"/>
-          </a:xfrm>
-          <a:prstGeom prst="rect">
-            <a:avLst/>
-          </a:prstGeom>
-          <a:noFill/>
-        </p:spPr>
-        <p:txBody>
-          <a:bodyPr wrap="square" lIns="45720">
-            <a:spAutoFit/>
-          </a:bodyPr>
-          <a:lstStyle/>
-          <a:p>
-            <a:pPr>
-              <a:lnSpc>
-                <a:spcPct val="105000"/>
-              </a:lnSpc>
-              <a:spcAft>
-                <a:spcPts val="600"/>
-              </a:spcAft>
-            </a:pPr>
-            <a:r>
-              <a:rPr sz="1250">
-                <a:solidFill>
-                  <a:srgbClr val="FFC72C"/>
-                </a:solidFill>
-                <a:latin typeface="Calibri"/>
-              </a:rPr>
-              <a:t>▪  </a:t>
-            </a:r>
-            <a:r>
-              <a:rPr b="1" sz="1250">
-                <a:solidFill>
-                  <a:srgbClr val="1F2A44"/>
-                </a:solidFill>
-                <a:latin typeface="Calibri"/>
-              </a:rPr>
-              <a:t>Median </a:t>
-            </a:r>
-            <a:r>
-              <a:rPr sz="1250">
-                <a:solidFill>
-                  <a:srgbClr val="1F2A44"/>
-                </a:solidFill>
-                <a:latin typeface="Calibri"/>
-              </a:rPr>
-              <a:t>$1,235/kWh; interquartile $750 to $1,289.</a:t>
-            </a:r>
-          </a:p>
-          <a:p>
-            <a:pPr>
-              <a:lnSpc>
-                <a:spcPct val="105000"/>
-              </a:lnSpc>
-              <a:spcAft>
-                <a:spcPts val="600"/>
-              </a:spcAft>
-            </a:pPr>
-            <a:r>
-              <a:rPr sz="1250">
-                <a:solidFill>
-                  <a:srgbClr val="FFC72C"/>
-                </a:solidFill>
-                <a:latin typeface="Calibri"/>
-              </a:rPr>
-              <a:t>▪  </a:t>
-            </a:r>
-            <a:r>
-              <a:rPr b="1" sz="1250">
-                <a:solidFill>
-                  <a:srgbClr val="1F2A44"/>
-                </a:solidFill>
-                <a:latin typeface="Calibri"/>
-              </a:rPr>
-              <a:t>Hyde Park battery installed, $833: </a:t>
-            </a:r>
-            <a:r>
-              <a:rPr sz="1250">
-                <a:solidFill>
-                  <a:srgbClr val="1F2A44"/>
-                </a:solidFill>
-                <a:latin typeface="Calibri"/>
-              </a:rPr>
-              <a:t>38% percentile.</a:t>
-            </a:r>
-          </a:p>
-          <a:p>
-            <a:pPr>
-              <a:lnSpc>
-                <a:spcPct val="105000"/>
-              </a:lnSpc>
-              <a:spcAft>
-                <a:spcPts val="600"/>
-              </a:spcAft>
-            </a:pPr>
-            <a:r>
-              <a:rPr sz="1250">
-                <a:solidFill>
-                  <a:srgbClr val="FFC72C"/>
-                </a:solidFill>
-                <a:latin typeface="Calibri"/>
-              </a:rPr>
-              <a:t>▪  </a:t>
-            </a:r>
-            <a:r>
-              <a:rPr b="1" sz="1250">
-                <a:solidFill>
-                  <a:srgbClr val="1F2A44"/>
-                </a:solidFill>
-                <a:latin typeface="Calibri"/>
-              </a:rPr>
-              <a:t>Station complete, direct, $1,483: </a:t>
-            </a:r>
-            <a:r>
-              <a:rPr sz="1250">
-                <a:solidFill>
-                  <a:srgbClr val="1F2A44"/>
-                </a:solidFill>
-                <a:latin typeface="Calibri"/>
-              </a:rPr>
-              <a:t>77% percentile, beside Fairhaven ($1,659 actual, 2023), Chateaugay ($1,490, 2023) and Provincetown ($1,289, 2022).</a:t>
-            </a:r>
-          </a:p>
-          <a:p>
-            <a:pPr>
-              <a:lnSpc>
-                <a:spcPct val="105000"/>
-              </a:lnSpc>
-              <a:spcAft>
-                <a:spcPts val="600"/>
-              </a:spcAft>
-            </a:pPr>
-            <a:r>
-              <a:rPr sz="1250">
-                <a:solidFill>
-                  <a:srgbClr val="FFC72C"/>
-                </a:solidFill>
-                <a:latin typeface="Calibri"/>
-              </a:rPr>
-              <a:t>▪  </a:t>
-            </a:r>
-            <a:r>
-              <a:rPr b="1" sz="1250">
-                <a:solidFill>
-                  <a:srgbClr val="1F2A44"/>
-                </a:solidFill>
-                <a:latin typeface="Calibri"/>
-              </a:rPr>
-              <a:t>Approval level, $2,862: </a:t>
-            </a:r>
-            <a:r>
-              <a:rPr sz="1250">
-                <a:solidFill>
-                  <a:srgbClr val="1F2A44"/>
-                </a:solidFill>
-                <a:latin typeface="Calibri"/>
-              </a:rPr>
-              <a:t>above every member. The loaders ($23.7M) and the two interconnection scopes are what the comparables do not carry.</a:t>
-            </a:r>
-          </a:p>
-          <a:p>
-            <a:pPr>
-              <a:lnSpc>
-                <a:spcPct val="105000"/>
-              </a:lnSpc>
-              <a:spcAft>
-                <a:spcPts val="600"/>
-              </a:spcAft>
-            </a:pPr>
-            <a:r>
-              <a:rPr sz="1250">
-                <a:solidFill>
-                  <a:srgbClr val="FFC72C"/>
-                </a:solidFill>
-                <a:latin typeface="Calibri"/>
-              </a:rPr>
-              <a:t>▪  </a:t>
-            </a:r>
-            <a:r>
-              <a:rPr b="1" sz="1250">
-                <a:solidFill>
-                  <a:srgbClr val="1F2A44"/>
-                </a:solidFill>
-                <a:latin typeface="Calibri"/>
-              </a:rPr>
-              <a:t>Caveat: </a:t>
-            </a:r>
-            <a:r>
-              <a:rPr sz="1250">
-                <a:solidFill>
-                  <a:srgbClr val="1F2A44"/>
-                </a:solidFill>
-                <a:latin typeface="Calibri"/>
-              </a:rPr>
-              <a:t>figures retrieved from search excerpts of regulator and utility documents; verify at source before external use.</a:t>
-            </a:r>
-          </a:p>
-        </p:txBody>
-      </p:sp>
-    </p:spTree>
-  </p:cSld>
-  <p:clrMapOvr>
-    <a:masterClrMapping/>
-  </p:clrMapOvr>
-</p:sld>
-</file>
-
-<file path=ppt/slides/slide21.xml><?xml version="1.0" encoding="utf-8"?>
-<p:sld xmlns:a="http://schemas.openxmlformats.org/drawingml/2006/main" xmlns:p="http://schemas.openxmlformats.org/presentationml/2006/main" xmlns:r="http://schemas.openxmlformats.org/officeDocument/2006/relationships">
-  <p:cSld>
-    <p:spTree>
-      <p:nvGrpSpPr>
-        <p:cNvPr id="1" name=""/>
-        <p:cNvGrpSpPr/>
-        <p:nvPr/>
-      </p:nvGrpSpPr>
-      <p:grpSpPr/>
-      <p:sp>
-        <p:nvSpPr>
-          <p:cNvPr id="2" name="Rectangle 1"/>
-          <p:cNvSpPr/>
-          <p:nvPr/>
-        </p:nvSpPr>
-        <p:spPr>
-          <a:xfrm>
-            <a:off x="0" y="0"/>
-            <a:ext cx="12191695" cy="6858000"/>
-          </a:xfrm>
-          <a:prstGeom prst="rect">
-            <a:avLst/>
-          </a:prstGeom>
-          <a:solidFill>
-            <a:srgbClr val="FFFFFF"/>
-          </a:solidFill>
-          <a:ln>
-            <a:noFill/>
-          </a:ln>
-          <a:effectLst/>
-        </p:spPr>
-        <p:style>
-          <a:lnRef idx="1">
-            <a:schemeClr val="accent1"/>
-          </a:lnRef>
-          <a:fillRef idx="3">
-            <a:schemeClr val="accent1"/>
-          </a:fillRef>
-          <a:effectRef idx="2">
-            <a:schemeClr val="accent1"/>
-          </a:effectRef>
-          <a:fontRef idx="minor">
-            <a:schemeClr val="lt1"/>
-          </a:fontRef>
-        </p:style>
-        <p:txBody>
-          <a:bodyPr rtlCol="0" anchor="ctr"/>
-          <a:lstStyle/>
-          <a:p>
-            <a:pPr algn="ctr"/>
-          </a:p>
-        </p:txBody>
-      </p:sp>
-      <p:sp>
-        <p:nvSpPr>
-          <p:cNvPr id="3" name="TextBox 2"/>
-          <p:cNvSpPr txBox="1"/>
-          <p:nvPr/>
-        </p:nvSpPr>
-        <p:spPr>
-          <a:xfrm>
-            <a:off x="548640" y="256032"/>
-            <a:ext cx="11064240" cy="274320"/>
-          </a:xfrm>
-          <a:prstGeom prst="rect">
-            <a:avLst/>
-          </a:prstGeom>
-          <a:noFill/>
-        </p:spPr>
-        <p:txBody>
-          <a:bodyPr wrap="square" lIns="45720" rIns="45720" tIns="27432" bIns="27432" anchor="t">
-            <a:spAutoFit/>
-          </a:bodyPr>
-          <a:lstStyle/>
-          <a:p>
-            <a:pPr algn="l">
-              <a:lnSpc>
-                <a:spcPct val="105000"/>
-              </a:lnSpc>
-              <a:spcAft>
-                <a:spcPts val="400"/>
-              </a:spcAft>
-            </a:pPr>
-            <a:r>
-              <a:rPr sz="1100" b="1" i="0">
-                <a:solidFill>
-                  <a:srgbClr val="6E1F2E"/>
-                </a:solidFill>
-                <a:latin typeface="Calibri"/>
-              </a:rPr>
-              <a:t>APPENDIX B. REGRESSION ON 26 PUBLIC PROJECTS</a:t>
-            </a:r>
-          </a:p>
-        </p:txBody>
-      </p:sp>
-      <p:sp>
-        <p:nvSpPr>
-          <p:cNvPr id="4" name="TextBox 3"/>
-          <p:cNvSpPr txBox="1"/>
-          <p:nvPr/>
-        </p:nvSpPr>
-        <p:spPr>
-          <a:xfrm>
-            <a:off x="548640" y="475488"/>
-            <a:ext cx="11064240" cy="868680"/>
-          </a:xfrm>
-          <a:prstGeom prst="rect">
-            <a:avLst/>
-          </a:prstGeom>
-          <a:noFill/>
-        </p:spPr>
-        <p:txBody>
-          <a:bodyPr wrap="square" lIns="45720" rIns="45720" tIns="27432" bIns="27432" anchor="t">
-            <a:spAutoFit/>
-          </a:bodyPr>
-          <a:lstStyle/>
-          <a:p>
-            <a:pPr algn="l">
-              <a:lnSpc>
-                <a:spcPct val="100000"/>
-              </a:lnSpc>
-              <a:spcAft>
-                <a:spcPts val="400"/>
-              </a:spcAft>
-            </a:pPr>
-            <a:r>
-              <a:rPr sz="2300" b="1" i="0">
-                <a:solidFill>
-                  <a:srgbClr val="001E60"/>
-                </a:solidFill>
-                <a:latin typeface="Georgia"/>
-              </a:rPr>
-              <a:t>Size and duration explain two thirds of the spread in public costs; Hyde Park's direct cost is high-normal</a:t>
-            </a:r>
-          </a:p>
-        </p:txBody>
-      </p:sp>
-      <p:sp>
-        <p:nvSpPr>
-          <p:cNvPr id="5" name="TextBox 4"/>
-          <p:cNvSpPr txBox="1"/>
-          <p:nvPr/>
-        </p:nvSpPr>
-        <p:spPr>
-          <a:xfrm>
-            <a:off x="548640" y="6419088"/>
-            <a:ext cx="8229600" cy="274320"/>
-          </a:xfrm>
-          <a:prstGeom prst="rect">
-            <a:avLst/>
-          </a:prstGeom>
-          <a:noFill/>
-        </p:spPr>
-        <p:txBody>
-          <a:bodyPr wrap="square" lIns="45720" rIns="45720" tIns="27432" bIns="27432" anchor="t">
-            <a:spAutoFit/>
-          </a:bodyPr>
-          <a:lstStyle/>
-          <a:p>
-            <a:pPr algn="l">
-              <a:lnSpc>
-                <a:spcPct val="105000"/>
-              </a:lnSpc>
-              <a:spcAft>
-                <a:spcPts val="400"/>
-              </a:spcAft>
-            </a:pPr>
-            <a:r>
-              <a:rPr sz="1000" b="0" i="0">
-                <a:solidFill>
-                  <a:srgbClr val="6B7280"/>
-                </a:solidFill>
-                <a:latin typeface="Calibri"/>
-              </a:rPr>
-              <a:t>EstimatingCoE | Eversource Energy | Stewards of Affordability</a:t>
-            </a:r>
-          </a:p>
-        </p:txBody>
-      </p:sp>
-      <p:sp>
-        <p:nvSpPr>
-          <p:cNvPr id="6" name="TextBox 5"/>
-          <p:cNvSpPr txBox="1"/>
-          <p:nvPr/>
-        </p:nvSpPr>
-        <p:spPr>
-          <a:xfrm>
-            <a:off x="10972800" y="6419088"/>
-            <a:ext cx="685800" cy="274320"/>
-          </a:xfrm>
-          <a:prstGeom prst="rect">
-            <a:avLst/>
-          </a:prstGeom>
-          <a:noFill/>
-        </p:spPr>
-        <p:txBody>
-          <a:bodyPr wrap="square" lIns="45720" rIns="45720" tIns="27432" bIns="27432" anchor="t">
-            <a:spAutoFit/>
-          </a:bodyPr>
-          <a:lstStyle/>
-          <a:p>
-            <a:pPr algn="r">
-              <a:lnSpc>
-                <a:spcPct val="105000"/>
-              </a:lnSpc>
-              <a:spcAft>
-                <a:spcPts val="400"/>
-              </a:spcAft>
-            </a:pPr>
-            <a:r>
-              <a:rPr sz="1000" b="0" i="0">
-                <a:solidFill>
-                  <a:srgbClr val="6B7280"/>
-                </a:solidFill>
-                <a:latin typeface="Calibri"/>
-              </a:rPr>
-              <a:t>20</a:t>
+              <a:t>22</a:t>
             </a:r>
           </a:p>
         </p:txBody>
@@ -17794,7 +20583,7 @@
 </p:sld>
 </file>
 
-<file path=ppt/slides/slide22.xml><?xml version="1.0" encoding="utf-8"?>
+<file path=ppt/slides/slide24.xml><?xml version="1.0" encoding="utf-8"?>
 <p:sld xmlns:a="http://schemas.openxmlformats.org/drawingml/2006/main" xmlns:p="http://schemas.openxmlformats.org/presentationml/2006/main" xmlns:r="http://schemas.openxmlformats.org/officeDocument/2006/relationships">
   <p:cSld>
     <p:spTree>
@@ -18011,7 +20800,7 @@
                 </a:solidFill>
                 <a:latin typeface="Calibri"/>
               </a:rPr>
-              <a:t>21</a:t>
+              <a:t>23</a:t>
             </a:r>
           </a:p>
         </p:txBody>
@@ -19731,7 +22520,7 @@
                 </a:solidFill>
                 <a:latin typeface="Calibri"/>
               </a:rPr>
-              <a:t>Gold = battery contract as carried in Rev 3 ($12.1M contract plus $1.1M escalation on the unpaid balance; see slide 12). Teal = station, site and feeder protection. Burgundy = risk, contingency, indirects, AFUDC. Total $57.2M.</a:t>
+              <a:t>Gold = battery contract as carried in Rev 3 ($12.1M contract plus $1.1M escalation on the unpaid balance; see slide 16). Teal = station, site and feeder protection. Burgundy = risk, contingency, indirects, AFUDC. Total $57.2M.</a:t>
             </a:r>
           </a:p>
         </p:txBody>

--- a/Hyde Park BESS/6) Cost Analysis Deliverables/Hyde Park BESS - Cost Analysis Deck.pptx
+++ b/Hyde Park BESS/6) Cost Analysis Deliverables/Hyde Park BESS - Cost Analysis Deck.pptx
@@ -4876,7 +4876,7 @@
           <a:lstStyle/>
           <a:p>
             <a:r>
-              <a:t>Answer to the review comment that New York has built many more of these (NineDot Energy). Sources: NYCIDA public hearing notices and inducement resolutions (edc.nyc, Mar-Apr 2024) for the Arthur Kill Road, Victory Boulevard and Maspeth project costs; NineDot and Natixis releases (Feb 2026) for the 28-project financing; NYSERDA 6 GW Energy Storage Roadmap (Dec 2022) for the retail program averages; Utility Dive and the NY-BEST/NYSEIA filing in Case 24-E-0621 for the interconnection figures; existing dataset rows for Pomona, Ozone Park and Chateaugay. The NY cohort is 2021-2027 dollars and is not re-based (2025 to 2026 at the installed index is +2%). Developer-owned rows carry developer overhead and profit but not utility indirects or AFUDC. These rows are not in the regression (n = 26), which was not re-run.</a:t>
+              <a:t>Answer to the review comment that New York has built many more of these (NineDot Energy). Sources: NYCIDA public hearing notices and inducement resolutions (edc.nyc, Mar-Apr 2024) for the Arthur Kill Road, Victory Boulevard and Maspeth project costs; NineDot and Natixis releases (Feb 2026) for the 28-project financing; NYSERDA 6 GW Energy Storage Roadmap (Dec 2022) for the retail program averages; Utility Dive and the NY-BEST/NYSEIA filing in Case 24-E-0621 for the interconnection figures; existing dataset rows for Pomona, Ozone Park and Chateaugay. The NY cohort is 2021-2027 dollars and is not re-based (2025 to 2026 at the installed index is +2%). Developer-owned rows carry developer overhead and profit but not utility indirects or AFUDC. The three NYCIDA-costed rows (Arthur Kill Road, Victory Boulevard, Maspeth) were added to the regression dataset on 2 Oct 2026 (n = 29, Appendix B); the financing floor and the NYSERDA averages are not project costs and were not. The size elasticity is unchanged at -0.17 and the prediction for 20 MWh / 2-h / 2028 moved from $1,116 to $1,114/kWh with a narrower 80% interval ($652 to $1,903).</a:t>
             </a:r>
           </a:p>
         </p:txBody>
@@ -22483,7 +22483,7 @@
                 </a:solidFill>
                 <a:latin typeface="Calibri"/>
               </a:rPr>
-              <a:t>APPENDIX B. REGRESSION ON 26 PUBLIC PROJECTS</a:t>
+              <a:t>APPENDIX B. REGRESSION ON 29 PUBLIC PROJECTS</a:t>
             </a:r>
           </a:p>
         </p:txBody>
@@ -22790,7 +22790,7 @@
                           </a:solidFill>
                           <a:latin typeface="Calibri"/>
                         </a:rPr>
-                        <a:t>0.012</a:t>
+                        <a:t>0.001</a:t>
                       </a:r>
                     </a:p>
                   </a:txBody>
@@ -22860,7 +22860,7 @@
                           </a:solidFill>
                           <a:latin typeface="Calibri"/>
                         </a:rPr>
-                        <a:t>0.016</a:t>
+                        <a:t>0.012</a:t>
                       </a:r>
                     </a:p>
                   </a:txBody>
@@ -22930,7 +22930,7 @@
                           </a:solidFill>
                           <a:latin typeface="Calibri"/>
                         </a:rPr>
-                        <a:t>0.68</a:t>
+                        <a:t>0.62</a:t>
                       </a:r>
                     </a:p>
                   </a:txBody>
@@ -22977,7 +22977,7 @@
                           </a:solidFill>
                           <a:latin typeface="Calibri"/>
                         </a:rPr>
-                        <a:t>0.65</a:t>
+                        <a:t>0.63</a:t>
                       </a:r>
                     </a:p>
                   </a:txBody>
@@ -23000,7 +23000,7 @@
                           </a:solidFill>
                           <a:latin typeface="Calibri"/>
                         </a:rPr>
-                        <a:t>n = 26</a:t>
+                        <a:t>n = 29</a:t>
                       </a:r>
                     </a:p>
                   </a:txBody>
@@ -23070,7 +23070,7 @@
                 </a:solidFill>
                 <a:latin typeface="Calibri"/>
               </a:rPr>
-              <a:t>$1,116/kWh, 80% interval $611 to $2,037.</a:t>
+              <a:t>$1,114/kWh, 80% interval $652 to $1,903.</a:t>
             </a:r>
           </a:p>
           <a:p>
@@ -23107,7 +23107,7 @@
                 </a:solidFill>
                 <a:latin typeface="Calibri"/>
               </a:rPr>
-              <a:t>contract 10%, installed 27%, station direct 73%, approval 98%.</a:t>
+              <a:t>contract 7%, installed 24%, station direct 75%, approval 99%.</a:t>
             </a:r>
           </a:p>
           <a:p>

--- a/Hyde Park BESS/6) Cost Analysis Deliverables/Hyde Park BESS - Cost Analysis Deck.pptx
+++ b/Hyde Park BESS/6) Cost Analysis Deliverables/Hyde Park BESS - Cost Analysis Deck.pptx
@@ -3599,22 +3599,22 @@
                 <c:formatCode>General</c:formatCode>
                 <c:ptCount val="6"/>
                 <c:pt idx="0">
-                  <c:v>883</c:v>
+                  <c:v>843</c:v>
                 </c:pt>
                 <c:pt idx="1">
-                  <c:v>868</c:v>
+                  <c:v>837</c:v>
                 </c:pt>
                 <c:pt idx="2">
-                  <c:v>844</c:v>
+                  <c:v>830</c:v>
                 </c:pt>
                 <c:pt idx="3">
-                  <c:v>890</c:v>
+                  <c:v>862</c:v>
                 </c:pt>
                 <c:pt idx="4">
-                  <c:v>925</c:v>
+                  <c:v>909</c:v>
                 </c:pt>
                 <c:pt idx="5">
-                  <c:v>923</c:v>
+                  <c:v>902</c:v>
                 </c:pt>
               </c:numCache>
             </c:numRef>
@@ -3692,22 +3692,22 @@
                 <c:formatCode>General</c:formatCode>
                 <c:ptCount val="6"/>
                 <c:pt idx="0">
-                  <c:v>861</c:v>
+                  <c:v>832</c:v>
                 </c:pt>
                 <c:pt idx="1">
-                  <c:v>848</c:v>
+                  <c:v>830</c:v>
                 </c:pt>
                 <c:pt idx="2">
-                  <c:v>828</c:v>
+                  <c:v>806</c:v>
                 </c:pt>
                 <c:pt idx="3">
-                  <c:v>853</c:v>
+                  <c:v>838</c:v>
                 </c:pt>
                 <c:pt idx="4">
-                  <c:v>921</c:v>
+                  <c:v>903</c:v>
                 </c:pt>
                 <c:pt idx="5">
-                  <c:v>923</c:v>
+                  <c:v>902</c:v>
                 </c:pt>
               </c:numCache>
             </c:numRef>
@@ -3765,22 +3765,22 @@
                 <c:formatCode>General</c:formatCode>
                 <c:ptCount val="6"/>
                 <c:pt idx="0">
-                  <c:v>835</c:v>
+                  <c:v>832</c:v>
                 </c:pt>
                 <c:pt idx="1">
-                  <c:v>831</c:v>
+                  <c:v>809</c:v>
                 </c:pt>
                 <c:pt idx="2">
-                  <c:v>826</c:v>
+                  <c:v>744</c:v>
                 </c:pt>
                 <c:pt idx="3">
-                  <c:v>833</c:v>
+                  <c:v>820</c:v>
                 </c:pt>
                 <c:pt idx="4">
-                  <c:v>915</c:v>
+                  <c:v>895</c:v>
                 </c:pt>
                 <c:pt idx="5">
-                  <c:v>923</c:v>
+                  <c:v>902</c:v>
                 </c:pt>
               </c:numCache>
             </c:numRef>
@@ -4760,7 +4760,7 @@
           <a:lstStyle/>
           <a:p>
             <a:r>
-              <a:t>Reference class redefined on 2 Oct 2026 at the reviewer's request: every project at or below 100 MWh with an all-in disclosed cost, any owner. 44 members (26 utility-owned, 18 developer-owned); utility-only subclass of 26 kept in the workbook for continuity (median $993). Model: cost_2026 = cost x [ s x I(2026)/I(y) + (1 - s) x HW(2026)/HW(y) ], s = 0.40, I = the battery index in the row, HW = Handy-Whitman North Atlantic production-plant index (700 in 2015, 745 in 2018, 1,112 in 2026; PJM posting). The 3.5%/yr flat proxy used in the earlier version gives $839 at the installed index. Naive whole-cost deflation at the battery rate: $772 (installed), $763 (pack). Sources on the workbook tab '2026$ Adjustment' and in the research log.</a:t>
+              <a:t>Reference class redefined on 2 Oct 2026 at the reviewer's request: every project at or below 100 MWh with an all-in disclosed cost, any owner. 55 members (31 utility-owned, 24 developer-owned); utility-only subclass of 31 kept in the workbook for continuity (median $986). Model: cost_2026 = cost x [ s x I(2026)/I(y) + (1 - s) x HW(2026)/HW(y) ], s = 0.40, I = the battery index in the row, HW = Handy-Whitman North Atlantic production-plant index (700 in 2015, 745 in 2018, 1,112 in 2026; PJM posting). The 3.5%/yr flat proxy used in the earlier version gives $816 at the installed index. Naive whole-cost deflation at the battery rate: $620 (installed), $607 (pack). Sources on the workbook tab '2026$ Adjustment' and in the research log.</a:t>
             </a:r>
           </a:p>
         </p:txBody>
@@ -11362,7 +11362,7 @@
                 </a:solidFill>
                 <a:latin typeface="Calibri"/>
               </a:rPr>
-              <a:t>1 · WHERE THE MONEY SITS   |   44 COMPARABLES AT OR BELOW 100 MWH (26 UTILITY-, 18 DEVELOPER-OWNED), NOMINAL VS 2026$</a:t>
+              <a:t>1 · WHERE THE MONEY SITS   |   55 COMPARABLES AT OR BELOW 100 MWH (31 UTILITY-, 24 DEVELOPER-OWNED), NOMINAL VS 2026$</a:t>
             </a:r>
           </a:p>
         </p:txBody>
@@ -11404,7 +11404,7 @@
                 </a:solidFill>
                 <a:latin typeface="Georgia"/>
               </a:rPr>
-              <a:t>Re-based to 2026 dollars, the 44-project class moves by at most a tenth and Hyde Park's station cost stays in the top fifth</a:t>
+              <a:t>Re-based to 2026 dollars, the 55-project class moves by at most a tenth and Hyde Park's station cost stays in the top fifth</a:t>
             </a:r>
           </a:p>
         </p:txBody>
@@ -11670,7 +11670,7 @@
                           </a:solidFill>
                           <a:latin typeface="Calibri"/>
                         </a:rPr>
-                        <a:t>$831</a:t>
+                        <a:t>$771</a:t>
                       </a:r>
                     </a:p>
                   </a:txBody>
@@ -11693,7 +11693,7 @@
                           </a:solidFill>
                           <a:latin typeface="Calibri"/>
                         </a:rPr>
-                        <a:t>52%</a:t>
+                        <a:t>58%</a:t>
                       </a:r>
                     </a:p>
                   </a:txBody>
@@ -11716,7 +11716,7 @@
                           </a:solidFill>
                           <a:latin typeface="Calibri"/>
                         </a:rPr>
-                        <a:t>86%</a:t>
+                        <a:t>85%</a:t>
                       </a:r>
                     </a:p>
                   </a:txBody>
@@ -11763,7 +11763,7 @@
                           </a:solidFill>
                           <a:latin typeface="Calibri"/>
                         </a:rPr>
-                        <a:t>$861</a:t>
+                        <a:t>$832</a:t>
                       </a:r>
                     </a:p>
                   </a:txBody>
@@ -11786,7 +11786,7 @@
                           </a:solidFill>
                           <a:latin typeface="Calibri"/>
                         </a:rPr>
-                        <a:t>48%</a:t>
+                        <a:t>51%</a:t>
                       </a:r>
                     </a:p>
                   </a:txBody>
@@ -11809,7 +11809,7 @@
                           </a:solidFill>
                           <a:latin typeface="Calibri"/>
                         </a:rPr>
-                        <a:t>86%</a:t>
+                        <a:t>85%</a:t>
                       </a:r>
                     </a:p>
                   </a:txBody>
@@ -11856,7 +11856,7 @@
                           </a:solidFill>
                           <a:latin typeface="Calibri"/>
                         </a:rPr>
-                        <a:t>$848</a:t>
+                        <a:t>$830</a:t>
                       </a:r>
                     </a:p>
                   </a:txBody>
@@ -11879,7 +11879,7 @@
                           </a:solidFill>
                           <a:latin typeface="Calibri"/>
                         </a:rPr>
-                        <a:t>50%</a:t>
+                        <a:t>53%</a:t>
                       </a:r>
                     </a:p>
                   </a:txBody>
@@ -11902,7 +11902,7 @@
                           </a:solidFill>
                           <a:latin typeface="Calibri"/>
                         </a:rPr>
-                        <a:t>89%</a:t>
+                        <a:t>87%</a:t>
                       </a:r>
                     </a:p>
                   </a:txBody>
@@ -11949,7 +11949,7 @@
                           </a:solidFill>
                           <a:latin typeface="Calibri"/>
                         </a:rPr>
-                        <a:t>$828</a:t>
+                        <a:t>$806</a:t>
                       </a:r>
                     </a:p>
                   </a:txBody>
@@ -11972,7 +11972,7 @@
                           </a:solidFill>
                           <a:latin typeface="Calibri"/>
                         </a:rPr>
-                        <a:t>55%</a:t>
+                        <a:t>60%</a:t>
                       </a:r>
                     </a:p>
                   </a:txBody>
@@ -11995,7 +11995,7 @@
                           </a:solidFill>
                           <a:latin typeface="Calibri"/>
                         </a:rPr>
-                        <a:t>91%</a:t>
+                        <a:t>89%</a:t>
                       </a:r>
                     </a:p>
                   </a:txBody>
@@ -12042,7 +12042,7 @@
                           </a:solidFill>
                           <a:latin typeface="Calibri"/>
                         </a:rPr>
-                        <a:t>$853</a:t>
+                        <a:t>$838</a:t>
                       </a:r>
                     </a:p>
                   </a:txBody>
@@ -12065,7 +12065,7 @@
                           </a:solidFill>
                           <a:latin typeface="Calibri"/>
                         </a:rPr>
-                        <a:t>45%</a:t>
+                        <a:t>49%</a:t>
                       </a:r>
                     </a:p>
                   </a:txBody>
@@ -12135,7 +12135,7 @@
                           </a:solidFill>
                           <a:latin typeface="Calibri"/>
                         </a:rPr>
-                        <a:t>$921</a:t>
+                        <a:t>$903</a:t>
                       </a:r>
                     </a:p>
                   </a:txBody>
@@ -12158,7 +12158,7 @@
                           </a:solidFill>
                           <a:latin typeface="Calibri"/>
                         </a:rPr>
-                        <a:t>36%</a:t>
+                        <a:t>42%</a:t>
                       </a:r>
                     </a:p>
                   </a:txBody>
@@ -12181,7 +12181,7 @@
                           </a:solidFill>
                           <a:latin typeface="Calibri"/>
                         </a:rPr>
-                        <a:t>75%</a:t>
+                        <a:t>76%</a:t>
                       </a:r>
                     </a:p>
                   </a:txBody>
@@ -12228,7 +12228,7 @@
                           </a:solidFill>
                           <a:latin typeface="Calibri"/>
                         </a:rPr>
-                        <a:t>$923</a:t>
+                        <a:t>$902</a:t>
                       </a:r>
                     </a:p>
                   </a:txBody>
@@ -12251,7 +12251,7 @@
                           </a:solidFill>
                           <a:latin typeface="Calibri"/>
                         </a:rPr>
-                        <a:t>36%</a:t>
+                        <a:t>42%</a:t>
                       </a:r>
                     </a:p>
                   </a:txBody>
@@ -12274,7 +12274,7 @@
                           </a:solidFill>
                           <a:latin typeface="Calibri"/>
                         </a:rPr>
-                        <a:t>73%</a:t>
+                        <a:t>75%</a:t>
                       </a:r>
                     </a:p>
                   </a:txBody>
@@ -12316,11 +12316,11 @@
                 <a:spcPct val="105000"/>
               </a:lnSpc>
               <a:spcAft>
-                <a:spcPts val="400"/>
+                <a:spcPts val="300"/>
               </a:spcAft>
             </a:pPr>
             <a:r>
-              <a:rPr sz="1050">
+              <a:rPr sz="1000">
                 <a:solidFill>
                   <a:srgbClr val="FFC72C"/>
                 </a:solidFill>
@@ -12329,7 +12329,7 @@
               <a:t>▪  </a:t>
             </a:r>
             <a:r>
-              <a:rPr b="1" sz="1050">
+              <a:rPr b="1" sz="1000">
                 <a:solidFill>
                   <a:srgbClr val="1F2A44"/>
                 </a:solidFill>
@@ -12338,7 +12338,7 @@
               <a:t>Two forces, one net. </a:t>
             </a:r>
             <a:r>
-              <a:rPr sz="1050">
+              <a:rPr sz="1000">
                 <a:solidFill>
                   <a:srgbClr val="1F2A44"/>
                 </a:solidFill>
@@ -12353,11 +12353,11 @@
                 <a:spcPct val="105000"/>
               </a:lnSpc>
               <a:spcAft>
-                <a:spcPts val="400"/>
+                <a:spcPts val="300"/>
               </a:spcAft>
             </a:pPr>
             <a:r>
-              <a:rPr sz="1050">
+              <a:rPr sz="1000">
                 <a:solidFill>
                   <a:srgbClr val="FFC72C"/>
                 </a:solidFill>
@@ -12366,22 +12366,22 @@
               <a:t>▪  </a:t>
             </a:r>
             <a:r>
-              <a:rPr b="1" sz="1050">
+              <a:rPr b="1" sz="1000">
                 <a:solidFill>
                   <a:srgbClr val="1F2A44"/>
                 </a:solidFill>
                 <a:latin typeface="Calibri"/>
               </a:rPr>
-              <a:t>Adding 31 projects, 18 of them developer-owned New York and New England sites, </a:t>
-            </a:r>
-            <a:r>
-              <a:rPr sz="1050">
+              <a:t>Widening the class from 13 utility-owned to 55 projects, 24 of them developer-owned, </a:t>
+            </a:r>
+            <a:r>
+              <a:rPr sz="1000">
                 <a:solidFill>
                   <a:srgbClr val="1F2A44"/>
                 </a:solidFill>
                 <a:latin typeface="Calibri"/>
               </a:rPr>
-              <a:t>pulls the median from $1,235 to $831 and lifts Hyde Park's station-direct cost to the 86th percentile. That is the honest comparison and the argument still holds: those sites carry no utility station, no landfill and no siting case.</a:t>
+              <a:t>pulls the median from $1,235 to $771 and puts Hyde Park's station-direct cost at the 85% percentile (74% among the utility-owned members). That is the honest comparison and the argument holds: the developer sites carry no utility station, no landfill and no siting case.</a:t>
             </a:r>
           </a:p>
           <a:p>
@@ -12390,11 +12390,11 @@
                 <a:spcPct val="105000"/>
               </a:lnSpc>
               <a:spcAft>
-                <a:spcPts val="400"/>
+                <a:spcPts val="300"/>
               </a:spcAft>
             </a:pPr>
             <a:r>
-              <a:rPr sz="1050">
+              <a:rPr sz="1000">
                 <a:solidFill>
                   <a:srgbClr val="FFC72C"/>
                 </a:solidFill>
@@ -12403,16 +12403,16 @@
               <a:t>▪  </a:t>
             </a:r>
             <a:r>
-              <a:rPr b="1" sz="1050">
+              <a:rPr b="1" sz="1000">
                 <a:solidFill>
                   <a:srgbClr val="1F2A44"/>
                 </a:solidFill>
                 <a:latin typeface="Calibri"/>
               </a:rPr>
-              <a:t>The curve you pick moves the median by 4%; </a:t>
-            </a:r>
-            <a:r>
-              <a:rPr sz="1050">
+              <a:t>The battery curve you pick moves the median by 4%; </a:t>
+            </a:r>
+            <a:r>
+              <a:rPr sz="1000">
                 <a:solidFill>
                   <a:srgbClr val="1F2A44"/>
                 </a:solidFill>
@@ -13081,7 +13081,7 @@
                 </a:solidFill>
                 <a:latin typeface="Calibri"/>
               </a:rPr>
-              <a:t>11 projects at 6 NYC sites, 39 MW operating (Sep 2026); 28 more financed at $431M for 494 MWh. Thirteen NYC developer sites with NYCIDA-filed costs are now in the dataset (NineDot, Convergent, Soltage, Agilitas, Greenbacker, Elevate): $410 to $1,110/kWh, median about $830. Developer-owned 4-h sites on leased lots, VDER revenue, NYSERDA incentive, ITC; no utility station, no landfill, no siting case.</a:t>
+              <a:t>11 projects at 6 NYC sites, 39 MW operating (Sep 2026); 28 more financed at $431M for 494 MWh. Thirteen NYC developer sites with NYCIDA-filed costs are in the dataset (NineDot, Convergent, Soltage, Agilitas, Greenbacker, Elevate): $410 to $1,110/kWh, median about $830. Developer-owned 4-h sites on leased lots, VDER revenue, NYSERDA incentive, ITC; no utility station, no landfill, no siting case.</a:t>
             </a:r>
           </a:p>
           <a:p>
@@ -13482,7 +13482,7 @@
                 </a:solidFill>
                 <a:latin typeface="Calibri"/>
               </a:rPr>
-              <a:t>Nominal median $831. Hyde Park station complete, direct, is $1,483/kWh; its percentile under each index is at right. Deflating whole projects at the battery rate gives $611 to $772.</a:t>
+              <a:t>Nominal median $771. Hyde Park station complete, direct, is $1,483/kWh; its percentile under each index is at right. Deflating whole projects at the battery rate gives $524 to $620.</a:t>
             </a:r>
           </a:p>
         </p:txBody>
@@ -13686,7 +13686,7 @@
                           </a:solidFill>
                           <a:latin typeface="Calibri"/>
                         </a:rPr>
-                        <a:t>86%</a:t>
+                        <a:t>85%</a:t>
                       </a:r>
                     </a:p>
                   </a:txBody>
@@ -13779,7 +13779,7 @@
                           </a:solidFill>
                           <a:latin typeface="Calibri"/>
                         </a:rPr>
-                        <a:t>89%</a:t>
+                        <a:t>87%</a:t>
                       </a:r>
                     </a:p>
                   </a:txBody>
@@ -13872,7 +13872,7 @@
                           </a:solidFill>
                           <a:latin typeface="Calibri"/>
                         </a:rPr>
-                        <a:t>91%</a:t>
+                        <a:t>89%</a:t>
                       </a:r>
                     </a:p>
                   </a:txBody>
@@ -14058,7 +14058,7 @@
                           </a:solidFill>
                           <a:latin typeface="Calibri"/>
                         </a:rPr>
-                        <a:t>75%</a:t>
+                        <a:t>76%</a:t>
                       </a:r>
                     </a:p>
                   </a:txBody>
@@ -14151,7 +14151,7 @@
                           </a:solidFill>
                           <a:latin typeface="Calibri"/>
                         </a:rPr>
-                        <a:t>73%</a:t>
+                        <a:t>75%</a:t>
                       </a:r>
                     </a:p>
                   </a:txBody>
@@ -14221,7 +14221,7 @@
                 </a:solidFill>
                 <a:latin typeface="Calibri"/>
               </a:rPr>
-              <a:t>medians $828 to $923, a 4% spread outside LCOS. The curves disagree about packs, not about projects.</a:t>
+              <a:t>medians $806 to $838 across the four battery series (LCOS $903). The curves disagree about packs, not about projects.</a:t>
             </a:r>
           </a:p>
           <a:p>
@@ -14258,7 +14258,7 @@
                 </a:solidFill>
                 <a:latin typeface="Calibri"/>
               </a:rPr>
-              <a:t>30% to 50% moves the median $26 to $53 under any curve; the share is a bigger lever than the curve.</a:t>
+              <a:t>30% to 50% moves the median $11 to $86 depending on the curve; the share is a lever of the same order as the curve.</a:t>
             </a:r>
           </a:p>
           <a:p>
@@ -14295,7 +14295,7 @@
                 </a:solidFill>
                 <a:latin typeface="Calibri"/>
               </a:rPr>
-              <a:t>Handy-Whitman North Atlantic rose 49% from 2018 to 2026 (10% a year in 2021-22); a flat 3.5% proxy gives 32%, and a median $839 instead of $861.</a:t>
+              <a:t>Handy-Whitman North Atlantic rose 49% from 2018 to 2026 (10% a year in 2021-22); a flat 3.5% proxy gives 32%, and a median $816 instead of $832.</a:t>
             </a:r>
           </a:p>
           <a:p>
@@ -23493,7 +23493,7 @@
                 </a:solidFill>
                 <a:latin typeface="Georgia"/>
               </a:rPr>
-              <a:t>44 projects at or below 100 MWh, utility- and developer-owned: where Hyde Park sits</a:t>
+              <a:t>55 projects at or below 100 MWh, utility- and developer-owned: where Hyde Park sits</a:t>
             </a:r>
           </a:p>
         </p:txBody>
@@ -23661,7 +23661,7 @@
                 </a:solidFill>
                 <a:latin typeface="Calibri"/>
               </a:rPr>
-              <a:t>$831/kWh; interquartile $640 to $1,239. Utility-owned subclass (26): median $993.</a:t>
+              <a:t>$771/kWh; interquartile $576 to $1,172. Utility-owned subclass (31): median $986.</a:t>
             </a:r>
           </a:p>
           <a:p>
@@ -23698,7 +23698,7 @@
                 </a:solidFill>
                 <a:latin typeface="Calibri"/>
               </a:rPr>
-              <a:t>52% percentile.</a:t>
+              <a:t>58% percentile.</a:t>
             </a:r>
           </a:p>
           <a:p>
@@ -23735,7 +23735,7 @@
                 </a:solidFill>
                 <a:latin typeface="Calibri"/>
               </a:rPr>
-              <a:t>86% percentile (77% in the utility subclass), beside Fairhaven ($1,659 actual, 2023), Chateaugay ($1,490, 2023), Hinesburg ($1,400, 2023) and Provincetown ($1,289, 2022).</a:t>
+              <a:t>85% percentile (74% in the utility subclass), beside Fairhaven ($1,659 actual, 2023), Chateaugay ($1,490, 2023), Hinesburg ($1,400, 2023) and Provincetown ($1,289, 2022).</a:t>
             </a:r>
           </a:p>
           <a:p>
@@ -23809,7 +23809,7 @@
                 </a:solidFill>
                 <a:latin typeface="Calibri"/>
               </a:rPr>
-              <a:t>median $861 at the installed index, $883 to $835 across 30 to 50% battery share.</a:t>
+              <a:t>median $832 at the installed index, $843 to $832 across 30 to 50% battery share.</a:t>
             </a:r>
           </a:p>
           <a:p>
@@ -23846,7 +23846,7 @@
                 </a:solidFill>
                 <a:latin typeface="Calibri"/>
               </a:rPr>
-              <a:t>figures retrieved from search excerpts of regulator, IDA and utility documents; verify at source before external use. Eighteen developer-owned members carry developer overhead and profit but no utility indirects or AFUDC; incentives are not netted.</a:t>
+              <a:t>figures retrieved from search excerpts of regulator, IDA and utility documents; verify at source before external use. 24 developer-owned members carry developer overhead and profit but no utility indirects or AFUDC; incentives are not netted.</a:t>
             </a:r>
           </a:p>
         </p:txBody>
@@ -23950,7 +23950,7 @@
                 </a:solidFill>
                 <a:latin typeface="Calibri"/>
               </a:rPr>
-              <a:t>APPENDIX B. REGRESSION ON 55 PUBLIC PROJECTS</a:t>
+              <a:t>APPENDIX B. REGRESSION ON 81 PUBLIC PROJECTS</a:t>
             </a:r>
           </a:p>
         </p:txBody>
@@ -24234,7 +24234,7 @@
                           </a:solidFill>
                           <a:latin typeface="Calibri"/>
                         </a:rPr>
-                        <a:t>-0.14</a:t>
+                        <a:t>-0.18</a:t>
                       </a:r>
                     </a:p>
                   </a:txBody>
@@ -24304,7 +24304,7 @@
                           </a:solidFill>
                           <a:latin typeface="Calibri"/>
                         </a:rPr>
-                        <a:t>-0.33</a:t>
+                        <a:t>-0.30</a:t>
                       </a:r>
                     </a:p>
                   </a:txBody>
@@ -24327,7 +24327,7 @@
                           </a:solidFill>
                           <a:latin typeface="Calibri"/>
                         </a:rPr>
-                        <a:t>0.001</a:t>
+                        <a:t>0.000</a:t>
                       </a:r>
                     </a:p>
                   </a:txBody>
@@ -24374,7 +24374,7 @@
                           </a:solidFill>
                           <a:latin typeface="Calibri"/>
                         </a:rPr>
-                        <a:t>+0.012</a:t>
+                        <a:t>+0.027</a:t>
                       </a:r>
                     </a:p>
                   </a:txBody>
@@ -24397,7 +24397,7 @@
                           </a:solidFill>
                           <a:latin typeface="Calibri"/>
                         </a:rPr>
-                        <a:t>0.57</a:t>
+                        <a:t>0.12</a:t>
                       </a:r>
                     </a:p>
                   </a:txBody>
@@ -24444,7 +24444,7 @@
                           </a:solidFill>
                           <a:latin typeface="Calibri"/>
                         </a:rPr>
-                        <a:t>0.51</a:t>
+                        <a:t>0.55</a:t>
                       </a:r>
                     </a:p>
                   </a:txBody>
@@ -24467,7 +24467,7 @@
                           </a:solidFill>
                           <a:latin typeface="Calibri"/>
                         </a:rPr>
-                        <a:t>n = 55</a:t>
+                        <a:t>n = 81</a:t>
                       </a:r>
                     </a:p>
                   </a:txBody>
@@ -24537,7 +24537,7 @@
                 </a:solidFill>
                 <a:latin typeface="Calibri"/>
               </a:rPr>
-              <a:t>$1,014/kWh, 80% interval $631 to $1,630.</a:t>
+              <a:t>$1,062/kWh, 80% interval $676 to $1,668.</a:t>
             </a:r>
           </a:p>
           <a:p>
@@ -24574,7 +24574,7 @@
                 </a:solidFill>
                 <a:latin typeface="Calibri"/>
               </a:rPr>
-              <a:t>contract 8%, installed 30%, station direct 85%, approval 100%.</a:t>
+              <a:t>contract 6%, installed 25%, station direct 83%, approval 100%.</a:t>
             </a:r>
           </a:p>
           <a:p>
@@ -24611,7 +24611,7 @@
                 </a:solidFill>
                 <a:latin typeface="Calibri"/>
               </a:rPr>
-              <a:t>Residual spread is a factor of 1.4; ownership and region terms are not significant at this n.</a:t>
+              <a:t>Residual spread is a factor of 1.4. In the fuller model utility ownership adds 18% at the same size, duration and year (p 0.03); region is not significant.</a:t>
             </a:r>
           </a:p>
         </p:txBody>

--- a/Hyde Park BESS/6) Cost Analysis Deliverables/Hyde Park BESS - Cost Analysis Deck.pptx
+++ b/Hyde Park BESS/6) Cost Analysis Deliverables/Hyde Park BESS - Cost Analysis Deck.pptx
@@ -28,10 +28,12 @@
     <p:sldId id="276" r:id="rId28"/>
     <p:sldId id="277" r:id="rId29"/>
     <p:sldId id="278" r:id="rId30"/>
+    <p:sldId id="279" r:id="rId31"/>
     <p:sldId id="280" r:id="rId32"/>
+    <p:sldId id="282" r:id="rId34"/>
+    <p:sldId id="283" r:id="rId35"/>
+    <p:sldId id="284" r:id="rId36"/>
     <p:sldId id="281" r:id="rId33"/>
-    <p:sldId id="282" r:id="rId34"/>
-    <p:sldId id="279" r:id="rId31"/>
   </p:sldIdLst>
   <p:sldSz cx="12191695" cy="6858000" type="screen4x3"/>
   <p:notesSz cx="6858000" cy="9144000"/>
@@ -620,6 +622,265 @@
               <c:strCache>
                 <c:ptCount val="1"/>
                 <c:pt idx="0">
+                  <c:v>$M</c:v>
+                </c:pt>
+              </c:strCache>
+            </c:strRef>
+          </c:tx>
+          <c:dPt>
+            <c:idx val="0"/>
+            <c:spPr>
+              <a:solidFill>
+                <a:srgbClr val="C9D1E0"/>
+              </a:solidFill>
+            </c:spPr>
+          </c:dPt>
+          <c:dPt>
+            <c:idx val="1"/>
+            <c:spPr>
+              <a:solidFill>
+                <a:srgbClr val="FFC72C"/>
+              </a:solidFill>
+            </c:spPr>
+          </c:dPt>
+          <c:dPt>
+            <c:idx val="2"/>
+            <c:spPr>
+              <a:solidFill>
+                <a:srgbClr val="001E60"/>
+              </a:solidFill>
+            </c:spPr>
+          </c:dPt>
+          <c:dPt>
+            <c:idx val="3"/>
+            <c:spPr>
+              <a:solidFill>
+                <a:srgbClr val="001E60"/>
+              </a:solidFill>
+            </c:spPr>
+          </c:dPt>
+          <c:dPt>
+            <c:idx val="4"/>
+            <c:spPr>
+              <a:solidFill>
+                <a:srgbClr val="FFC72C"/>
+              </a:solidFill>
+            </c:spPr>
+          </c:dPt>
+          <c:dPt>
+            <c:idx val="5"/>
+            <c:spPr>
+              <a:solidFill>
+                <a:srgbClr val="001E60"/>
+              </a:solidFill>
+            </c:spPr>
+          </c:dPt>
+          <c:dPt>
+            <c:idx val="6"/>
+            <c:spPr>
+              <a:solidFill>
+                <a:srgbClr val="001E60"/>
+              </a:solidFill>
+            </c:spPr>
+          </c:dPt>
+          <c:dPt>
+            <c:idx val="7"/>
+            <c:spPr>
+              <a:solidFill>
+                <a:srgbClr val="001E60"/>
+              </a:solidFill>
+            </c:spPr>
+          </c:dPt>
+          <c:dLbls>
+            <c:numFmt formatCode="&quot;$&quot;0.0&quot;M&quot;" sourceLinked="0"/>
+            <c:txPr>
+              <a:bodyPr/>
+              <a:lstStyle/>
+              <a:p>
+                <a:pPr>
+                  <a:defRPr sz="1000" b="1"/>
+                </a:pPr>
+              </a:p>
+            </c:txPr>
+            <c:dLblPos val="outEnd"/>
+            <c:showLegendKey val="0"/>
+            <c:showVal val="1"/>
+            <c:showCatName val="0"/>
+            <c:showSerName val="0"/>
+            <c:showPercent val="0"/>
+            <c:showBubbleSize val="0"/>
+            <c:showLeaderLines val="1"/>
+          </c:dLbls>
+          <c:cat>
+            <c:strRef>
+              <c:f>Sheet1!$A$2:$A$9</c:f>
+              <c:strCache>
+                <c:ptCount val="8"/>
+                <c:pt idx="0">
+                  <c:v>Jun 2021
+IFR</c:v>
+                </c:pt>
+                <c:pt idx="1">
+                  <c:v>Jul 2023
+Vendor indicative
+(Company 3, turnkey)</c:v>
+                </c:pt>
+                <c:pt idx="2">
+                  <c:v>Dec 2023
+E-23-373
+conceptual</c:v>
+                </c:pt>
+                <c:pt idx="3">
+                  <c:v>Feb 2024
+SSF incl.
+D-Line</c:v>
+                </c:pt>
+                <c:pt idx="4">
+                  <c:v>Mar 2026
+Nomad
+contract</c:v>
+                </c:pt>
+                <c:pt idx="5">
+                  <c:v>Aug 2026
+Rev 0</c:v>
+                </c:pt>
+                <c:pt idx="6">
+                  <c:v>Sep 2026
+Rev 2</c:v>
+                </c:pt>
+                <c:pt idx="7">
+                  <c:v>Sep 2026
+Rev 3</c:v>
+                </c:pt>
+              </c:strCache>
+            </c:strRef>
+          </c:cat>
+          <c:val>
+            <c:numRef>
+              <c:f>Sheet1!$B$2:$B$9</c:f>
+              <c:numCache>
+                <c:formatCode>General</c:formatCode>
+                <c:ptCount val="8"/>
+                <c:pt idx="0">
+                  <c:v>0.2</c:v>
+                </c:pt>
+                <c:pt idx="1">
+                  <c:v>18.2</c:v>
+                </c:pt>
+                <c:pt idx="2">
+                  <c:v>43.9</c:v>
+                </c:pt>
+                <c:pt idx="3">
+                  <c:v>49.2</c:v>
+                </c:pt>
+                <c:pt idx="4">
+                  <c:v>12.1</c:v>
+                </c:pt>
+                <c:pt idx="5">
+                  <c:v>47.2</c:v>
+                </c:pt>
+                <c:pt idx="6">
+                  <c:v>63.6</c:v>
+                </c:pt>
+                <c:pt idx="7">
+                  <c:v>57.2</c:v>
+                </c:pt>
+              </c:numCache>
+            </c:numRef>
+          </c:val>
+        </c:ser>
+        <c:gapWidth val="50"/>
+        <c:axId val="-2068027336"/>
+        <c:axId val="-2113994440"/>
+      </c:barChart>
+      <c:catAx>
+        <c:axId val="-2068027336"/>
+        <c:scaling>
+          <c:orientation val="minMax"/>
+        </c:scaling>
+        <c:delete val="0"/>
+        <c:axPos val="b"/>
+        <c:majorTickMark val="out"/>
+        <c:minorTickMark val="none"/>
+        <c:tickLblPos val="nextTo"/>
+        <c:spPr>
+          <a:ln>
+            <a:solidFill>
+              <a:srgbClr val="C9D1E0"/>
+            </a:solidFill>
+          </a:ln>
+        </c:spPr>
+        <c:txPr>
+          <a:bodyPr/>
+          <a:lstStyle/>
+          <a:p>
+            <a:pPr>
+              <a:defRPr sz="900"/>
+            </a:pPr>
+          </a:p>
+        </c:txPr>
+        <c:crossAx val="-2113994440"/>
+        <c:crosses val="autoZero"/>
+        <c:auto val="1"/>
+        <c:lblAlgn val="ctr"/>
+        <c:lblOffset val="100"/>
+        <c:noMultiLvlLbl val="0"/>
+      </c:catAx>
+      <c:valAx>
+        <c:axId val="-2113994440"/>
+        <c:scaling>
+          <c:max val="72.0"/>
+        </c:scaling>
+        <c:delete/>
+        <c:axPos val="l"/>
+        <c:majorTickMark val="out"/>
+        <c:minorTickMark val="none"/>
+        <c:tickLblPos val="nextTo"/>
+        <c:crossAx val="-2068027336"/>
+        <c:crosses val="autoZero"/>
+      </c:valAx>
+    </c:plotArea>
+    <c:dispBlanksAs val="gap"/>
+  </c:chart>
+  <c:txPr>
+    <a:bodyPr/>
+    <a:lstStyle/>
+    <a:p>
+      <a:pPr>
+        <a:defRPr sz="1000">
+          <a:solidFill>
+            <a:srgbClr val="1F2A44"/>
+          </a:solidFill>
+          <a:latin typeface="Calibri"/>
+        </a:defRPr>
+      </a:pPr>
+      <a:endParaRPr lang="en-US"/>
+    </a:p>
+  </c:txPr>
+  <c:externalData r:id="rId1">
+    <c:autoUpdate val="0"/>
+  </c:externalData>
+</c:chartSpace>
+</file>
+
+<file path=ppt/charts/chart11.xml><?xml version="1.0" encoding="utf-8"?>
+<c:chartSpace xmlns:c="http://schemas.openxmlformats.org/drawingml/2006/chart" xmlns:a="http://schemas.openxmlformats.org/drawingml/2006/main" xmlns:r="http://schemas.openxmlformats.org/officeDocument/2006/relationships">
+  <c:date1904 val="0"/>
+  <c:chart>
+    <c:autoTitleDeleted val="1"/>
+    <c:plotArea>
+      <c:barChart>
+        <c:barDir val="col"/>
+        <c:grouping val="clustered"/>
+        <c:ser>
+          <c:idx val="0"/>
+          <c:order val="0"/>
+          <c:tx>
+            <c:strRef>
+              <c:f>Sheet1!$B$1</c:f>
+              <c:strCache>
+                <c:ptCount val="1"/>
+                <c:pt idx="0">
                   <c:v>E-23-373 (Dec 2023)</c:v>
                 </c:pt>
               </c:strCache>
@@ -968,7 +1229,7 @@
 </c:chartSpace>
 </file>
 
-<file path=ppt/charts/chart11.xml><?xml version="1.0" encoding="utf-8"?>
+<file path=ppt/charts/chart12.xml><?xml version="1.0" encoding="utf-8"?>
 <c:chartSpace xmlns:c="http://schemas.openxmlformats.org/drawingml/2006/chart" xmlns:a="http://schemas.openxmlformats.org/drawingml/2006/main" xmlns:r="http://schemas.openxmlformats.org/officeDocument/2006/relationships">
   <c:date1904 val="0"/>
   <c:chart>
@@ -1306,7 +1567,7 @@
 </c:chartSpace>
 </file>
 
-<file path=ppt/charts/chart12.xml><?xml version="1.0" encoding="utf-8"?>
+<file path=ppt/charts/chart13.xml><?xml version="1.0" encoding="utf-8"?>
 <c:chartSpace xmlns:c="http://schemas.openxmlformats.org/drawingml/2006/chart" xmlns:a="http://schemas.openxmlformats.org/drawingml/2006/main" xmlns:r="http://schemas.openxmlformats.org/officeDocument/2006/relationships">
   <c:date1904 val="0"/>
   <c:chart>
@@ -3540,6 +3801,854 @@
 
 <file path=ppt/charts/chart8.xml><?xml version="1.0" encoding="utf-8"?>
 <c:chartSpace xmlns:c="http://schemas.openxmlformats.org/drawingml/2006/chart" xmlns:a="http://schemas.openxmlformats.org/drawingml/2006/main" xmlns:r="http://schemas.openxmlformats.org/officeDocument/2006/relationships">
+  <c:chart>
+    <c:autoTitleDeleted val="1"/>
+    <c:plotArea>
+      <c:scatterChart>
+        <c:scatterStyle val="lineMarker"/>
+        <c:varyColors val="0"/>
+        <c:ser>
+          <c:idx val="0"/>
+          <c:order val="0"/>
+          <c:tx>
+            <c:strRef>
+              <c:f>Sheet1!$B$1</c:f>
+              <c:strCache>
+                <c:ptCount val="1"/>
+                <c:pt idx="0">
+                  <c:v>_</c:v>
+                </c:pt>
+              </c:strCache>
+            </c:strRef>
+          </c:tx>
+          <c:spPr>
+            <a:ln w="25400">
+              <a:noFill/>
+            </a:ln>
+          </c:spPr>
+          <c:marker>
+            <c:symbol val="none"/>
+            <c:size val="6"/>
+            <c:spPr>
+              <a:solidFill>
+                <a:srgbClr val="FFFFFF"/>
+              </a:solidFill>
+              <a:ln>
+                <a:solidFill>
+                  <a:srgbClr val="FFFFFF"/>
+                </a:solidFill>
+              </a:ln>
+            </c:spPr>
+          </c:marker>
+          <c:xVal>
+            <c:numRef>
+              <c:f>Sheet1!$A$2:$A$15</c:f>
+              <c:numCache>
+                <c:formatCode>General</c:formatCode>
+                <c:ptCount val="14"/>
+                <c:pt idx="0">
+                  <c:v>1990</c:v>
+                </c:pt>
+                <c:pt idx="1">
+                  <c:v>1991</c:v>
+                </c:pt>
+                <c:pt idx="2">
+                  <c:v>1992</c:v>
+                </c:pt>
+                <c:pt idx="3">
+                  <c:v>1993</c:v>
+                </c:pt>
+                <c:pt idx="4">
+                  <c:v>1994</c:v>
+                </c:pt>
+                <c:pt idx="5">
+                  <c:v>1995</c:v>
+                </c:pt>
+                <c:pt idx="6">
+                  <c:v>1996</c:v>
+                </c:pt>
+                <c:pt idx="7">
+                  <c:v>1997</c:v>
+                </c:pt>
+                <c:pt idx="8">
+                  <c:v>1998</c:v>
+                </c:pt>
+                <c:pt idx="9">
+                  <c:v>1999</c:v>
+                </c:pt>
+                <c:pt idx="10">
+                  <c:v>2000</c:v>
+                </c:pt>
+                <c:pt idx="11">
+                  <c:v>2001</c:v>
+                </c:pt>
+                <c:pt idx="12">
+                  <c:v>2002</c:v>
+                </c:pt>
+                <c:pt idx="13">
+                  <c:v>2003</c:v>
+                </c:pt>
+              </c:numCache>
+            </c:numRef>
+          </c:xVal>
+          <c:yVal>
+            <c:numRef>
+              <c:f>Sheet1!$B$2:$B$15</c:f>
+              <c:numCache>
+                <c:formatCode>General</c:formatCode>
+                <c:ptCount val="14"/>
+                <c:pt idx="0">
+                  <c:v>1.0</c:v>
+                </c:pt>
+                <c:pt idx="1">
+                  <c:v>1.0</c:v>
+                </c:pt>
+                <c:pt idx="2">
+                  <c:v>1.0</c:v>
+                </c:pt>
+                <c:pt idx="3">
+                  <c:v>1.0</c:v>
+                </c:pt>
+                <c:pt idx="4">
+                  <c:v>1.0</c:v>
+                </c:pt>
+                <c:pt idx="5">
+                  <c:v>1.0</c:v>
+                </c:pt>
+                <c:pt idx="6">
+                  <c:v>1.0</c:v>
+                </c:pt>
+                <c:pt idx="7">
+                  <c:v>1.0</c:v>
+                </c:pt>
+                <c:pt idx="8">
+                  <c:v>1.0</c:v>
+                </c:pt>
+                <c:pt idx="9">
+                  <c:v>1.0</c:v>
+                </c:pt>
+                <c:pt idx="10">
+                  <c:v>1.0</c:v>
+                </c:pt>
+                <c:pt idx="11">
+                  <c:v>1.0</c:v>
+                </c:pt>
+                <c:pt idx="12">
+                  <c:v>1.0</c:v>
+                </c:pt>
+                <c:pt idx="13">
+                  <c:v>1.0</c:v>
+                </c:pt>
+              </c:numCache>
+            </c:numRef>
+          </c:yVal>
+          <c:smooth val="0"/>
+        </c:ser>
+        <c:ser>
+          <c:idx val="1"/>
+          <c:order val="1"/>
+          <c:tx>
+            <c:strRef>
+              <c:f>Sheet1!$B$17</c:f>
+              <c:strCache>
+                <c:ptCount val="1"/>
+                <c:pt idx="0">
+                  <c:v>BNEF pack price</c:v>
+                </c:pt>
+              </c:strCache>
+            </c:strRef>
+          </c:tx>
+          <c:spPr>
+            <a:ln w="25400">
+              <a:solidFill>
+                <a:srgbClr val="FFC72C"/>
+              </a:solidFill>
+            </a:ln>
+          </c:spPr>
+          <c:marker>
+            <c:symbol val="circle"/>
+            <c:size val="6"/>
+            <c:spPr>
+              <a:solidFill>
+                <a:srgbClr val="FFC72C"/>
+              </a:solidFill>
+              <a:ln>
+                <a:solidFill>
+                  <a:srgbClr val="FFC72C"/>
+                </a:solidFill>
+              </a:ln>
+            </c:spPr>
+          </c:marker>
+          <c:xVal>
+            <c:numRef>
+              <c:f>Sheet1!$A$18:$A$29</c:f>
+              <c:numCache>
+                <c:formatCode>General</c:formatCode>
+                <c:ptCount val="12"/>
+                <c:pt idx="0">
+                  <c:v>2014</c:v>
+                </c:pt>
+                <c:pt idx="1">
+                  <c:v>2015</c:v>
+                </c:pt>
+                <c:pt idx="2">
+                  <c:v>2016</c:v>
+                </c:pt>
+                <c:pt idx="3">
+                  <c:v>2017</c:v>
+                </c:pt>
+                <c:pt idx="4">
+                  <c:v>2018</c:v>
+                </c:pt>
+                <c:pt idx="5">
+                  <c:v>2019</c:v>
+                </c:pt>
+                <c:pt idx="6">
+                  <c:v>2020</c:v>
+                </c:pt>
+                <c:pt idx="7">
+                  <c:v>2021</c:v>
+                </c:pt>
+                <c:pt idx="8">
+                  <c:v>2022</c:v>
+                </c:pt>
+                <c:pt idx="9">
+                  <c:v>2023</c:v>
+                </c:pt>
+                <c:pt idx="10">
+                  <c:v>2024</c:v>
+                </c:pt>
+                <c:pt idx="11">
+                  <c:v>2025</c:v>
+                </c:pt>
+              </c:numCache>
+            </c:numRef>
+          </c:xVal>
+          <c:yVal>
+            <c:numRef>
+              <c:f>Sheet1!$B$18:$B$29</c:f>
+              <c:numCache>
+                <c:formatCode>General</c:formatCode>
+                <c:ptCount val="12"/>
+                <c:pt idx="0">
+                  <c:v>3.068</c:v>
+                </c:pt>
+                <c:pt idx="1">
+                  <c:v>1.989</c:v>
+                </c:pt>
+                <c:pt idx="2">
+                  <c:v>1.551</c:v>
+                </c:pt>
+                <c:pt idx="3">
+                  <c:v>1.188</c:v>
+                </c:pt>
+                <c:pt idx="4">
+                  <c:v>1.0</c:v>
+                </c:pt>
+                <c:pt idx="5">
+                  <c:v>0.886</c:v>
+                </c:pt>
+                <c:pt idx="6">
+                  <c:v>0.778</c:v>
+                </c:pt>
+                <c:pt idx="7">
+                  <c:v>0.75</c:v>
+                </c:pt>
+                <c:pt idx="8">
+                  <c:v>0.858</c:v>
+                </c:pt>
+                <c:pt idx="9">
+                  <c:v>0.79</c:v>
+                </c:pt>
+                <c:pt idx="10">
+                  <c:v>0.653</c:v>
+                </c:pt>
+                <c:pt idx="11">
+                  <c:v>0.614</c:v>
+                </c:pt>
+              </c:numCache>
+            </c:numRef>
+          </c:yVal>
+          <c:smooth val="0"/>
+        </c:ser>
+        <c:ser>
+          <c:idx val="2"/>
+          <c:order val="2"/>
+          <c:tx>
+            <c:strRef>
+              <c:f>Sheet1!$B$31</c:f>
+              <c:strCache>
+                <c:ptCount val="1"/>
+                <c:pt idx="0">
+                  <c:v>BNEF turnkey system</c:v>
+                </c:pt>
+              </c:strCache>
+            </c:strRef>
+          </c:tx>
+          <c:spPr>
+            <a:ln w="25400">
+              <a:solidFill>
+                <a:srgbClr val="2A8A8C"/>
+              </a:solidFill>
+            </a:ln>
+          </c:spPr>
+          <c:marker>
+            <c:symbol val="circle"/>
+            <c:size val="6"/>
+            <c:spPr>
+              <a:solidFill>
+                <a:srgbClr val="2A8A8C"/>
+              </a:solidFill>
+              <a:ln>
+                <a:solidFill>
+                  <a:srgbClr val="2A8A8C"/>
+                </a:solidFill>
+              </a:ln>
+            </c:spPr>
+          </c:marker>
+          <c:xVal>
+            <c:numRef>
+              <c:f>Sheet1!$A$32:$A$36</c:f>
+              <c:numCache>
+                <c:formatCode>General</c:formatCode>
+                <c:ptCount val="5"/>
+                <c:pt idx="0">
+                  <c:v>2021</c:v>
+                </c:pt>
+                <c:pt idx="1">
+                  <c:v>2022</c:v>
+                </c:pt>
+                <c:pt idx="2">
+                  <c:v>2023</c:v>
+                </c:pt>
+                <c:pt idx="3">
+                  <c:v>2024</c:v>
+                </c:pt>
+                <c:pt idx="4">
+                  <c:v>2025</c:v>
+                </c:pt>
+              </c:numCache>
+            </c:numRef>
+          </c:xVal>
+          <c:yVal>
+            <c:numRef>
+              <c:f>Sheet1!$B$32:$B$36</c:f>
+              <c:numCache>
+                <c:formatCode>General</c:formatCode>
+                <c:ptCount val="5"/>
+                <c:pt idx="0">
+                  <c:v>1.0</c:v>
+                </c:pt>
+                <c:pt idx="1">
+                  <c:v>1.361</c:v>
+                </c:pt>
+                <c:pt idx="2">
+                  <c:v>1.105</c:v>
+                </c:pt>
+                <c:pt idx="3">
+                  <c:v>0.693</c:v>
+                </c:pt>
+                <c:pt idx="4">
+                  <c:v>0.492</c:v>
+                </c:pt>
+              </c:numCache>
+            </c:numRef>
+          </c:yVal>
+          <c:smooth val="0"/>
+        </c:ser>
+        <c:ser>
+          <c:idx val="3"/>
+          <c:order val="3"/>
+          <c:tx>
+            <c:strRef>
+              <c:f>Sheet1!$B$38</c:f>
+              <c:strCache>
+                <c:ptCount val="1"/>
+                <c:pt idx="0">
+                  <c:v>NREL bottom-up base year</c:v>
+                </c:pt>
+              </c:strCache>
+            </c:strRef>
+          </c:tx>
+          <c:spPr>
+            <a:ln w="25400">
+              <a:solidFill>
+                <a:srgbClr val="001E60"/>
+              </a:solidFill>
+            </a:ln>
+          </c:spPr>
+          <c:marker>
+            <c:symbol val="circle"/>
+            <c:size val="6"/>
+            <c:spPr>
+              <a:solidFill>
+                <a:srgbClr val="001E60"/>
+              </a:solidFill>
+              <a:ln>
+                <a:solidFill>
+                  <a:srgbClr val="001E60"/>
+                </a:solidFill>
+              </a:ln>
+            </c:spPr>
+          </c:marker>
+          <c:xVal>
+            <c:numRef>
+              <c:f>Sheet1!$A$39:$A$40</c:f>
+              <c:numCache>
+                <c:formatCode>General</c:formatCode>
+                <c:ptCount val="2"/>
+                <c:pt idx="0">
+                  <c:v>2022</c:v>
+                </c:pt>
+                <c:pt idx="1">
+                  <c:v>2024</c:v>
+                </c:pt>
+              </c:numCache>
+            </c:numRef>
+          </c:xVal>
+          <c:yVal>
+            <c:numRef>
+              <c:f>Sheet1!$B$39:$B$40</c:f>
+              <c:numCache>
+                <c:formatCode>General</c:formatCode>
+                <c:ptCount val="2"/>
+                <c:pt idx="0">
+                  <c:v>1.0</c:v>
+                </c:pt>
+                <c:pt idx="1">
+                  <c:v>0.693</c:v>
+                </c:pt>
+              </c:numCache>
+            </c:numRef>
+          </c:yVal>
+          <c:smooth val="0"/>
+        </c:ser>
+        <c:ser>
+          <c:idx val="4"/>
+          <c:order val="4"/>
+          <c:tx>
+            <c:strRef>
+              <c:f>Sheet1!$B$42</c:f>
+              <c:strCache>
+                <c:ptCount val="1"/>
+                <c:pt idx="0">
+                  <c:v>EIA / LBNL installed all-in</c:v>
+                </c:pt>
+              </c:strCache>
+            </c:strRef>
+          </c:tx>
+          <c:spPr>
+            <a:ln w="25400">
+              <a:solidFill>
+                <a:srgbClr val="1F2A44"/>
+              </a:solidFill>
+            </a:ln>
+          </c:spPr>
+          <c:marker>
+            <c:symbol val="circle"/>
+            <c:size val="6"/>
+            <c:spPr>
+              <a:solidFill>
+                <a:srgbClr val="1F2A44"/>
+              </a:solidFill>
+              <a:ln>
+                <a:solidFill>
+                  <a:srgbClr val="1F2A44"/>
+                </a:solidFill>
+              </a:ln>
+            </c:spPr>
+          </c:marker>
+          <c:xVal>
+            <c:numRef>
+              <c:f>Sheet1!$A$43:$A$46</c:f>
+              <c:numCache>
+                <c:formatCode>General</c:formatCode>
+                <c:ptCount val="4"/>
+                <c:pt idx="0">
+                  <c:v>2015</c:v>
+                </c:pt>
+                <c:pt idx="1">
+                  <c:v>2017</c:v>
+                </c:pt>
+                <c:pt idx="2">
+                  <c:v>2018</c:v>
+                </c:pt>
+                <c:pt idx="3">
+                  <c:v>2024</c:v>
+                </c:pt>
+              </c:numCache>
+            </c:numRef>
+          </c:xVal>
+          <c:yVal>
+            <c:numRef>
+              <c:f>Sheet1!$B$43:$B$46</c:f>
+              <c:numCache>
+                <c:formatCode>General</c:formatCode>
+                <c:ptCount val="4"/>
+                <c:pt idx="0">
+                  <c:v>3.443</c:v>
+                </c:pt>
+                <c:pt idx="1">
+                  <c:v>1.334</c:v>
+                </c:pt>
+                <c:pt idx="2">
+                  <c:v>1.0</c:v>
+                </c:pt>
+                <c:pt idx="3">
+                  <c:v>0.733</c:v>
+                </c:pt>
+              </c:numCache>
+            </c:numRef>
+          </c:yVal>
+          <c:smooth val="0"/>
+        </c:ser>
+        <c:ser>
+          <c:idx val="5"/>
+          <c:order val="5"/>
+          <c:tx>
+            <c:strRef>
+              <c:f>Sheet1!$B$48</c:f>
+              <c:strCache>
+                <c:ptCount val="1"/>
+                <c:pt idx="0">
+                  <c:v>Lazard LCOS midpoint</c:v>
+                </c:pt>
+              </c:strCache>
+            </c:strRef>
+          </c:tx>
+          <c:spPr>
+            <a:ln w="25400">
+              <a:solidFill>
+                <a:srgbClr val="6B7280"/>
+              </a:solidFill>
+              <a:prstDash val="dash"/>
+            </a:ln>
+          </c:spPr>
+          <c:marker>
+            <c:symbol val="circle"/>
+            <c:size val="6"/>
+            <c:spPr>
+              <a:solidFill>
+                <a:srgbClr val="6B7280"/>
+              </a:solidFill>
+              <a:ln>
+                <a:solidFill>
+                  <a:srgbClr val="6B7280"/>
+                </a:solidFill>
+              </a:ln>
+            </c:spPr>
+          </c:marker>
+          <c:xVal>
+            <c:numRef>
+              <c:f>Sheet1!$A$49:$A$54</c:f>
+              <c:numCache>
+                <c:formatCode>General</c:formatCode>
+                <c:ptCount val="6"/>
+                <c:pt idx="0">
+                  <c:v>2019</c:v>
+                </c:pt>
+                <c:pt idx="1">
+                  <c:v>2020</c:v>
+                </c:pt>
+                <c:pt idx="2">
+                  <c:v>2021</c:v>
+                </c:pt>
+                <c:pt idx="3">
+                  <c:v>2024</c:v>
+                </c:pt>
+                <c:pt idx="4">
+                  <c:v>2025</c:v>
+                </c:pt>
+                <c:pt idx="5">
+                  <c:v>2026</c:v>
+                </c:pt>
+              </c:numCache>
+            </c:numRef>
+          </c:xVal>
+          <c:yVal>
+            <c:numRef>
+              <c:f>Sheet1!$B$49:$B$54</c:f>
+              <c:numCache>
+                <c:formatCode>General</c:formatCode>
+                <c:ptCount val="6"/>
+                <c:pt idx="0">
+                  <c:v>1.0</c:v>
+                </c:pt>
+                <c:pt idx="1">
+                  <c:v>0.783</c:v>
+                </c:pt>
+                <c:pt idx="2">
+                  <c:v>0.744</c:v>
+                </c:pt>
+                <c:pt idx="3">
+                  <c:v>0.955</c:v>
+                </c:pt>
+                <c:pt idx="4">
+                  <c:v>0.756</c:v>
+                </c:pt>
+                <c:pt idx="5">
+                  <c:v>1.029</c:v>
+                </c:pt>
+              </c:numCache>
+            </c:numRef>
+          </c:yVal>
+          <c:smooth val="0"/>
+        </c:ser>
+        <c:ser>
+          <c:idx val="6"/>
+          <c:order val="6"/>
+          <c:tx>
+            <c:strRef>
+              <c:f>Sheet1!$B$56</c:f>
+              <c:strCache>
+                <c:ptCount val="1"/>
+                <c:pt idx="0">
+                  <c:v>Handy-Whitman construction</c:v>
+                </c:pt>
+              </c:strCache>
+            </c:strRef>
+          </c:tx>
+          <c:spPr>
+            <a:ln w="25400">
+              <a:solidFill>
+                <a:srgbClr val="6E1F2E"/>
+              </a:solidFill>
+            </a:ln>
+          </c:spPr>
+          <c:marker>
+            <c:symbol val="circle"/>
+            <c:size val="6"/>
+            <c:spPr>
+              <a:solidFill>
+                <a:srgbClr val="6E1F2E"/>
+              </a:solidFill>
+              <a:ln>
+                <a:solidFill>
+                  <a:srgbClr val="6E1F2E"/>
+                </a:solidFill>
+              </a:ln>
+            </c:spPr>
+          </c:marker>
+          <c:xVal>
+            <c:numRef>
+              <c:f>Sheet1!$A$57:$A$68</c:f>
+              <c:numCache>
+                <c:formatCode>General</c:formatCode>
+                <c:ptCount val="12"/>
+                <c:pt idx="0">
+                  <c:v>2015</c:v>
+                </c:pt>
+                <c:pt idx="1">
+                  <c:v>2016</c:v>
+                </c:pt>
+                <c:pt idx="2">
+                  <c:v>2017</c:v>
+                </c:pt>
+                <c:pt idx="3">
+                  <c:v>2018</c:v>
+                </c:pt>
+                <c:pt idx="4">
+                  <c:v>2019</c:v>
+                </c:pt>
+                <c:pt idx="5">
+                  <c:v>2020</c:v>
+                </c:pt>
+                <c:pt idx="6">
+                  <c:v>2021</c:v>
+                </c:pt>
+                <c:pt idx="7">
+                  <c:v>2022</c:v>
+                </c:pt>
+                <c:pt idx="8">
+                  <c:v>2023</c:v>
+                </c:pt>
+                <c:pt idx="9">
+                  <c:v>2024</c:v>
+                </c:pt>
+                <c:pt idx="10">
+                  <c:v>2025</c:v>
+                </c:pt>
+                <c:pt idx="11">
+                  <c:v>2026</c:v>
+                </c:pt>
+              </c:numCache>
+            </c:numRef>
+          </c:xVal>
+          <c:yVal>
+            <c:numRef>
+              <c:f>Sheet1!$B$57:$B$68</c:f>
+              <c:numCache>
+                <c:formatCode>General</c:formatCode>
+                <c:ptCount val="12"/>
+                <c:pt idx="0">
+                  <c:v>0.94</c:v>
+                </c:pt>
+                <c:pt idx="1">
+                  <c:v>0.958</c:v>
+                </c:pt>
+                <c:pt idx="2">
+                  <c:v>0.954</c:v>
+                </c:pt>
+                <c:pt idx="3">
+                  <c:v>1.0</c:v>
+                </c:pt>
+                <c:pt idx="4">
+                  <c:v>1.02</c:v>
+                </c:pt>
+                <c:pt idx="5">
+                  <c:v>1.046</c:v>
+                </c:pt>
+                <c:pt idx="6">
+                  <c:v>1.156</c:v>
+                </c:pt>
+                <c:pt idx="7">
+                  <c:v>1.279</c:v>
+                </c:pt>
+                <c:pt idx="8">
+                  <c:v>1.362</c:v>
+                </c:pt>
+                <c:pt idx="9">
+                  <c:v>1.417</c:v>
+                </c:pt>
+                <c:pt idx="10">
+                  <c:v>1.431</c:v>
+                </c:pt>
+                <c:pt idx="11">
+                  <c:v>1.493</c:v>
+                </c:pt>
+              </c:numCache>
+            </c:numRef>
+          </c:yVal>
+          <c:smooth val="0"/>
+        </c:ser>
+        <c:axId val="-2128940872"/>
+        <c:axId val="-2129643912"/>
+      </c:scatterChart>
+      <c:valAx>
+        <c:axId val="-2128940872"/>
+        <c:scaling>
+          <c:orientation val="minMax"/>
+          <c:max val="2026.5"/>
+          <c:min val="2014.0"/>
+        </c:scaling>
+        <c:delete val="0"/>
+        <c:axPos val="b"/>
+        <c:numFmt formatCode="0" sourceLinked="0"/>
+        <c:majorTickMark val="out"/>
+        <c:minorTickMark val="none"/>
+        <c:tickLblPos val="nextTo"/>
+        <c:spPr>
+          <a:ln>
+            <a:solidFill>
+              <a:srgbClr val="C9D1E0"/>
+            </a:solidFill>
+          </a:ln>
+        </c:spPr>
+        <c:txPr>
+          <a:bodyPr/>
+          <a:lstStyle/>
+          <a:p>
+            <a:pPr>
+              <a:defRPr sz="900"/>
+            </a:pPr>
+          </a:p>
+        </c:txPr>
+        <c:crossAx val="-2129643912"/>
+        <c:crosses val="autoZero"/>
+        <c:crossBetween val="midCat"/>
+        <c:majorUnit val="2.0"/>
+      </c:valAx>
+      <c:valAx>
+        <c:axId val="-2129643912"/>
+        <c:scaling>
+          <c:orientation val="minMax"/>
+          <c:max val="3.6"/>
+          <c:min val="0.0"/>
+        </c:scaling>
+        <c:delete val="0"/>
+        <c:axPos val="l"/>
+        <c:majorGridlines>
+          <c:spPr>
+            <a:ln>
+              <a:solidFill>
+                <a:srgbClr val="C9D1E0"/>
+              </a:solidFill>
+            </a:ln>
+          </c:spPr>
+        </c:majorGridlines>
+        <c:numFmt formatCode="0.0&quot;x&quot;" sourceLinked="0"/>
+        <c:majorTickMark val="out"/>
+        <c:minorTickMark val="none"/>
+        <c:tickLblPos val="nextTo"/>
+        <c:spPr>
+          <a:ln>
+            <a:solidFill>
+              <a:srgbClr val="C9D1E0"/>
+            </a:solidFill>
+          </a:ln>
+        </c:spPr>
+        <c:txPr>
+          <a:bodyPr/>
+          <a:lstStyle/>
+          <a:p>
+            <a:pPr>
+              <a:defRPr sz="900"/>
+            </a:pPr>
+          </a:p>
+        </c:txPr>
+        <c:crossAx val="-2128940872"/>
+        <c:crosses val="autoZero"/>
+        <c:crossBetween val="midCat"/>
+        <c:majorUnit val="0.5"/>
+      </c:valAx>
+    </c:plotArea>
+    <c:legend>
+      <c:legendPos val="b"/>
+      <c:legendEntry>
+        <c:idx val="0"/>
+        <c:delete val="1"/>
+      </c:legendEntry>
+      <c:layout/>
+      <c:overlay val="0"/>
+      <c:txPr>
+        <a:bodyPr/>
+        <a:lstStyle/>
+        <a:p>
+          <a:pPr>
+            <a:defRPr sz="900">
+              <a:latin typeface="Calibri"/>
+            </a:defRPr>
+          </a:pPr>
+        </a:p>
+      </c:txPr>
+    </c:legend>
+    <c:plotVisOnly val="1"/>
+    <c:dispBlanksAs val="gap"/>
+    <c:showDLblsOverMax val="0"/>
+  </c:chart>
+  <c:txPr>
+    <a:bodyPr/>
+    <a:lstStyle/>
+    <a:p>
+      <a:pPr>
+        <a:defRPr sz="900">
+          <a:solidFill>
+            <a:srgbClr val="1F2A44"/>
+          </a:solidFill>
+          <a:latin typeface="Calibri"/>
+        </a:defRPr>
+      </a:pPr>
+      <a:endParaRPr lang="en-US"/>
+    </a:p>
+  </c:txPr>
+  <c:externalData r:id="rId1">
+    <c:autoUpdate val="0"/>
+  </c:externalData>
+</c:chartSpace>
+</file>
+
+<file path=ppt/charts/chart9.xml><?xml version="1.0" encoding="utf-8"?>
+<c:chartSpace xmlns:c="http://schemas.openxmlformats.org/drawingml/2006/chart" xmlns:a="http://schemas.openxmlformats.org/drawingml/2006/main" xmlns:r="http://schemas.openxmlformats.org/officeDocument/2006/relationships">
   <c:date1904 val="0"/>
   <c:chart>
     <c:autoTitleDeleted val="1"/>
@@ -3881,265 +4990,6 @@
     <a:p>
       <a:pPr>
         <a:defRPr sz="950">
-          <a:solidFill>
-            <a:srgbClr val="1F2A44"/>
-          </a:solidFill>
-          <a:latin typeface="Calibri"/>
-        </a:defRPr>
-      </a:pPr>
-      <a:endParaRPr lang="en-US"/>
-    </a:p>
-  </c:txPr>
-  <c:externalData r:id="rId1">
-    <c:autoUpdate val="0"/>
-  </c:externalData>
-</c:chartSpace>
-</file>
-
-<file path=ppt/charts/chart9.xml><?xml version="1.0" encoding="utf-8"?>
-<c:chartSpace xmlns:c="http://schemas.openxmlformats.org/drawingml/2006/chart" xmlns:a="http://schemas.openxmlformats.org/drawingml/2006/main" xmlns:r="http://schemas.openxmlformats.org/officeDocument/2006/relationships">
-  <c:date1904 val="0"/>
-  <c:chart>
-    <c:autoTitleDeleted val="1"/>
-    <c:plotArea>
-      <c:barChart>
-        <c:barDir val="col"/>
-        <c:grouping val="clustered"/>
-        <c:ser>
-          <c:idx val="0"/>
-          <c:order val="0"/>
-          <c:tx>
-            <c:strRef>
-              <c:f>Sheet1!$B$1</c:f>
-              <c:strCache>
-                <c:ptCount val="1"/>
-                <c:pt idx="0">
-                  <c:v>$M</c:v>
-                </c:pt>
-              </c:strCache>
-            </c:strRef>
-          </c:tx>
-          <c:dPt>
-            <c:idx val="0"/>
-            <c:spPr>
-              <a:solidFill>
-                <a:srgbClr val="C9D1E0"/>
-              </a:solidFill>
-            </c:spPr>
-          </c:dPt>
-          <c:dPt>
-            <c:idx val="1"/>
-            <c:spPr>
-              <a:solidFill>
-                <a:srgbClr val="FFC72C"/>
-              </a:solidFill>
-            </c:spPr>
-          </c:dPt>
-          <c:dPt>
-            <c:idx val="2"/>
-            <c:spPr>
-              <a:solidFill>
-                <a:srgbClr val="001E60"/>
-              </a:solidFill>
-            </c:spPr>
-          </c:dPt>
-          <c:dPt>
-            <c:idx val="3"/>
-            <c:spPr>
-              <a:solidFill>
-                <a:srgbClr val="001E60"/>
-              </a:solidFill>
-            </c:spPr>
-          </c:dPt>
-          <c:dPt>
-            <c:idx val="4"/>
-            <c:spPr>
-              <a:solidFill>
-                <a:srgbClr val="FFC72C"/>
-              </a:solidFill>
-            </c:spPr>
-          </c:dPt>
-          <c:dPt>
-            <c:idx val="5"/>
-            <c:spPr>
-              <a:solidFill>
-                <a:srgbClr val="001E60"/>
-              </a:solidFill>
-            </c:spPr>
-          </c:dPt>
-          <c:dPt>
-            <c:idx val="6"/>
-            <c:spPr>
-              <a:solidFill>
-                <a:srgbClr val="001E60"/>
-              </a:solidFill>
-            </c:spPr>
-          </c:dPt>
-          <c:dPt>
-            <c:idx val="7"/>
-            <c:spPr>
-              <a:solidFill>
-                <a:srgbClr val="001E60"/>
-              </a:solidFill>
-            </c:spPr>
-          </c:dPt>
-          <c:dLbls>
-            <c:numFmt formatCode="&quot;$&quot;0.0&quot;M&quot;" sourceLinked="0"/>
-            <c:txPr>
-              <a:bodyPr/>
-              <a:lstStyle/>
-              <a:p>
-                <a:pPr>
-                  <a:defRPr sz="1000" b="1"/>
-                </a:pPr>
-              </a:p>
-            </c:txPr>
-            <c:dLblPos val="outEnd"/>
-            <c:showLegendKey val="0"/>
-            <c:showVal val="1"/>
-            <c:showCatName val="0"/>
-            <c:showSerName val="0"/>
-            <c:showPercent val="0"/>
-            <c:showBubbleSize val="0"/>
-            <c:showLeaderLines val="1"/>
-          </c:dLbls>
-          <c:cat>
-            <c:strRef>
-              <c:f>Sheet1!$A$2:$A$9</c:f>
-              <c:strCache>
-                <c:ptCount val="8"/>
-                <c:pt idx="0">
-                  <c:v>Jun 2021
-IFR</c:v>
-                </c:pt>
-                <c:pt idx="1">
-                  <c:v>Jul 2023
-Vendor indicative
-(Company 3, turnkey)</c:v>
-                </c:pt>
-                <c:pt idx="2">
-                  <c:v>Dec 2023
-E-23-373
-conceptual</c:v>
-                </c:pt>
-                <c:pt idx="3">
-                  <c:v>Feb 2024
-SSF incl.
-D-Line</c:v>
-                </c:pt>
-                <c:pt idx="4">
-                  <c:v>Mar 2026
-Nomad
-contract</c:v>
-                </c:pt>
-                <c:pt idx="5">
-                  <c:v>Aug 2026
-Rev 0</c:v>
-                </c:pt>
-                <c:pt idx="6">
-                  <c:v>Sep 2026
-Rev 2</c:v>
-                </c:pt>
-                <c:pt idx="7">
-                  <c:v>Sep 2026
-Rev 3</c:v>
-                </c:pt>
-              </c:strCache>
-            </c:strRef>
-          </c:cat>
-          <c:val>
-            <c:numRef>
-              <c:f>Sheet1!$B$2:$B$9</c:f>
-              <c:numCache>
-                <c:formatCode>General</c:formatCode>
-                <c:ptCount val="8"/>
-                <c:pt idx="0">
-                  <c:v>0.2</c:v>
-                </c:pt>
-                <c:pt idx="1">
-                  <c:v>18.2</c:v>
-                </c:pt>
-                <c:pt idx="2">
-                  <c:v>43.9</c:v>
-                </c:pt>
-                <c:pt idx="3">
-                  <c:v>49.2</c:v>
-                </c:pt>
-                <c:pt idx="4">
-                  <c:v>12.1</c:v>
-                </c:pt>
-                <c:pt idx="5">
-                  <c:v>47.2</c:v>
-                </c:pt>
-                <c:pt idx="6">
-                  <c:v>63.6</c:v>
-                </c:pt>
-                <c:pt idx="7">
-                  <c:v>57.2</c:v>
-                </c:pt>
-              </c:numCache>
-            </c:numRef>
-          </c:val>
-        </c:ser>
-        <c:gapWidth val="50"/>
-        <c:axId val="-2068027336"/>
-        <c:axId val="-2113994440"/>
-      </c:barChart>
-      <c:catAx>
-        <c:axId val="-2068027336"/>
-        <c:scaling>
-          <c:orientation val="minMax"/>
-        </c:scaling>
-        <c:delete val="0"/>
-        <c:axPos val="b"/>
-        <c:majorTickMark val="out"/>
-        <c:minorTickMark val="none"/>
-        <c:tickLblPos val="nextTo"/>
-        <c:spPr>
-          <a:ln>
-            <a:solidFill>
-              <a:srgbClr val="C9D1E0"/>
-            </a:solidFill>
-          </a:ln>
-        </c:spPr>
-        <c:txPr>
-          <a:bodyPr/>
-          <a:lstStyle/>
-          <a:p>
-            <a:pPr>
-              <a:defRPr sz="900"/>
-            </a:pPr>
-          </a:p>
-        </c:txPr>
-        <c:crossAx val="-2113994440"/>
-        <c:crosses val="autoZero"/>
-        <c:auto val="1"/>
-        <c:lblAlgn val="ctr"/>
-        <c:lblOffset val="100"/>
-        <c:noMultiLvlLbl val="0"/>
-      </c:catAx>
-      <c:valAx>
-        <c:axId val="-2113994440"/>
-        <c:scaling>
-          <c:max val="72.0"/>
-        </c:scaling>
-        <c:delete/>
-        <c:axPos val="l"/>
-        <c:majorTickMark val="out"/>
-        <c:minorTickMark val="none"/>
-        <c:tickLblPos val="nextTo"/>
-        <c:crossAx val="-2068027336"/>
-        <c:crosses val="autoZero"/>
-      </c:valAx>
-    </c:plotArea>
-    <c:dispBlanksAs val="gap"/>
-  </c:chart>
-  <c:txPr>
-    <a:bodyPr/>
-    <a:lstStyle/>
-    <a:p>
-      <a:pPr>
-        <a:defRPr sz="1000">
           <a:solidFill>
             <a:srgbClr val="1F2A44"/>
           </a:solidFill>
@@ -4900,7 +5750,7 @@
           <a:lstStyle/>
           <a:p>
             <a:r>
-              <a:t>This is the answer to 'what do the different curves do'. Three levers in order of leverage: (1) the non-battery escalator, because 60% of a comparable is station, civil, labor and interconnection and Handy-Whitman says that cost rose half again since 2018; (2) the battery share, which nobody discloses per project; (3) the battery curve itself, where the five published series agree within 4% on the class median once the share is fixed. The ratios in the table: pack 0.61, turnkey 0.49 (2021 base), NREL 0.69 (2022 base), installed 0.73, LCOS 1.03, Handy-Whitman 1.49. Net factor = 0.4 x battery ratio + 0.6 x 1.49.</a:t>
+              <a:t>Catalog of the curves a reviewer might cite, with each series divided by its own 2018 value so they can share one axis (turnkey and NREL have no 2018 point and are held at their first published value, so their 2018 ratio understates their decline). Pack 2014-2025 from the BNEF releases as published; turnkey 2021-2025; NREL 2022 and 2024 base years; EIA 2015-2018 and LBNL 2024; Lazard LCOS unsubsidized 100 MW 4-h range midpoints v5.0 to 2026; Handy-Whitman North Atlantic production-plant index from the PJM posting. Sources and confidence tags in indices.json and the research log.</a:t>
             </a:r>
           </a:p>
         </p:txBody>
@@ -4970,7 +5820,7 @@
           <a:lstStyle/>
           <a:p>
             <a:r>
-              <a:t>None of these six is optional and none of them is the battery.</a:t>
+              <a:t>This is the answer to 'what do the different curves do'. Three levers in order of leverage: (1) the non-battery escalator, because 60% of a comparable is station, civil, labor and interconnection and Handy-Whitman says that cost rose half again since 2018; (2) the battery share, which nobody discloses per project; (3) the battery curve itself, where the five published series agree within 4% on the class median once the share is fixed. The ratios in the table: pack 0.61, turnkey 0.49 (2021 base), NREL 0.69 (2022 base), installed 0.73, LCOS 1.03, Handy-Whitman 1.49. Net factor = 0.4 x battery ratio + 0.6 x 1.49.</a:t>
             </a:r>
           </a:p>
         </p:txBody>
@@ -5040,7 +5890,7 @@
           <a:lstStyle/>
           <a:p>
             <a:r>
-              <a:t>The story is not that batteries got expensive. The battery got cheaper. The project got more real.</a:t>
+              <a:t>Companion to the catalog slide. Battery share 40% in every row; the Handy-Whitman index escalates the other 60% except in the last column, which applies the battery ratio to the whole cost. Utility subclass = the members owned by investor-owned, municipal, cooperative, state or crown utilities. Workbook tab '2026$ Adjustment' reproduces every cell with an index selector.</a:t>
             </a:r>
           </a:p>
         </p:txBody>
@@ -5110,7 +5960,7 @@
           <a:lstStyle/>
           <a:p>
             <a:r>
-              <a:t>Materials up 2.9, testing up 2.0, siting up 1.4, risk up 2.1, AFUDC up 1.7. Those five are 10.1 of the 13.3.</a:t>
+              <a:t>None of these six is optional and none of them is the battery.</a:t>
             </a:r>
           </a:p>
         </p:txBody>
@@ -5180,7 +6030,7 @@
           <a:lstStyle/>
           <a:p>
             <a:r>
-              <a:t>This walk is in the email record. It matters because the full-funding placeholder of $43.9M was never touched between December 2023 and August 2026.</a:t>
+              <a:t>The story is not that batteries got expensive. The battery got cheaper. The project got more real.</a:t>
             </a:r>
           </a:p>
         </p:txBody>
@@ -5250,7 +6100,7 @@
           <a:lstStyle/>
           <a:p>
             <a:r>
-              <a:t>The lesson from 2023: a low bid with exclusions is not a low project. The lesson from 2026: the vendor price is defensible. It is the boundary that moved.</a:t>
+              <a:t>Materials up 2.9, testing up 2.0, siting up 1.4, risk up 2.1, AFUDC up 1.7. Those five are 10.1 of the 13.3.</a:t>
             </a:r>
           </a:p>
         </p:txBody>
@@ -5320,7 +6170,7 @@
           <a:lstStyle/>
           <a:p>
             <a:r>
-              <a:t>Three numbers. Vendor contract, approval level, share. Everything after this slide is proof. CORE PATH for a 25-minute slot: slides 1, 2, 3, 6, 4, 7, 8, 9, 10, 12, 16, 20, 23, 27. Everything else is reachable from the appendix.</a:t>
+              <a:t>Three numbers. Vendor contract, approval level, share. Everything after this slide is proof. CORE PATH for a 25-minute slot: slides 1, 2, 3, 6, 4, 7, 8, 9, 10, 12, 18, 22, 25, 29. Everything else is reachable from the appendix.</a:t>
             </a:r>
           </a:p>
         </p:txBody>
@@ -5390,7 +6240,7 @@
           <a:lstStyle/>
           <a:p>
             <a:r>
-              <a:t>Steelman first: the battery is contracted, every dollar has a name, the direct cost is inside the reference class. These three are what an outside reviewer will find if we do not.</a:t>
+              <a:t>This walk is in the email record. It matters because the full-funding placeholder of $43.9M was never touched between December 2023 and August 2026.</a:t>
             </a:r>
           </a:p>
         </p:txBody>
@@ -5460,7 +6310,7 @@
           <a:lstStyle/>
           <a:p>
             <a:r>
-              <a:t>The combination case is the one to plan against. It is not exotic: it is the HEG gap plus one missed siting season.</a:t>
+              <a:t>The lesson from 2023: a low bid with exclusions is not a low project. The lesson from 2026: the vendor price is defensible. It is the boundary that moved.</a:t>
             </a:r>
           </a:p>
         </p:txBody>
@@ -5530,7 +6380,7 @@
           <a:lstStyle/>
           <a:p>
             <a:r>
-              <a:t>Five indicators, none of them expensive to watch. Three of them have no owner today.</a:t>
+              <a:t>Steelman first: the battery is contracted, every dollar has a name, the direct cost is inside the reference class. These three are what an outside reviewer will find if we do not.</a:t>
             </a:r>
           </a:p>
         </p:txBody>
@@ -5600,7 +6450,7 @@
           <a:lstStyle/>
           <a:p>
             <a:r>
-              <a:t>Ranked by the red team. The first two items are the ones that can move the number by more than the whole reserve; the rest are hygiene.</a:t>
+              <a:t>The combination case is the one to plan against. It is not exotic: it is the HEG gap plus one missed siting season.</a:t>
             </a:r>
           </a:p>
         </p:txBody>
@@ -5626,6 +6476,146 @@
 </file>
 
 <file path=ppt/notesSlides/notesSlide24.xml><?xml version="1.0" encoding="utf-8"?>
+<p:notes xmlns:a="http://schemas.openxmlformats.org/drawingml/2006/main" xmlns:p="http://schemas.openxmlformats.org/presentationml/2006/main" xmlns:r="http://schemas.openxmlformats.org/officeDocument/2006/relationships">
+  <p:cSld>
+    <p:spTree>
+      <p:nvGrpSpPr>
+        <p:cNvPr id="1" name=""/>
+        <p:cNvGrpSpPr/>
+        <p:nvPr/>
+      </p:nvGrpSpPr>
+      <p:grpSpPr>
+        <a:xfrm>
+          <a:off x="0" y="0"/>
+          <a:ext cx="0" cy="0"/>
+          <a:chOff x="0" y="0"/>
+          <a:chExt cx="0" cy="0"/>
+        </a:xfrm>
+      </p:grpSpPr>
+      <p:sp>
+        <p:nvSpPr>
+          <p:cNvPr id="2" name="Slide Image Placeholder 1"/>
+          <p:cNvSpPr>
+            <a:spLocks noGrp="1"/>
+          </p:cNvSpPr>
+          <p:nvPr>
+            <p:ph type="sldImg" idx="2"/>
+          </p:nvPr>
+        </p:nvSpPr>
+        <p:spPr/>
+      </p:sp>
+      <p:sp>
+        <p:nvSpPr>
+          <p:cNvPr id="3" name="Notes Placeholder 2"/>
+          <p:cNvSpPr>
+            <a:spLocks noGrp="1"/>
+          </p:cNvSpPr>
+          <p:nvPr>
+            <p:ph type="body" idx="3" sz="quarter"/>
+          </p:nvPr>
+        </p:nvSpPr>
+        <p:spPr/>
+        <p:txBody>
+          <a:bodyPr/>
+          <a:lstStyle/>
+          <a:p>
+            <a:r>
+              <a:t>Five indicators, none of them expensive to watch. Three of them have no owner today.</a:t>
+            </a:r>
+          </a:p>
+        </p:txBody>
+      </p:sp>
+      <p:sp>
+        <p:nvSpPr>
+          <p:cNvPr id="4" name="Slide Number Placeholder 3"/>
+          <p:cNvSpPr>
+            <a:spLocks noGrp="1"/>
+          </p:cNvSpPr>
+          <p:nvPr>
+            <p:ph type="sldNum" idx="5" sz="quarter"/>
+          </p:nvPr>
+        </p:nvSpPr>
+        <p:spPr/>
+      </p:sp>
+    </p:spTree>
+  </p:cSld>
+  <p:clrMapOvr>
+    <a:masterClrMapping/>
+  </p:clrMapOvr>
+</p:notes>
+</file>
+
+<file path=ppt/notesSlides/notesSlide25.xml><?xml version="1.0" encoding="utf-8"?>
+<p:notes xmlns:a="http://schemas.openxmlformats.org/drawingml/2006/main" xmlns:p="http://schemas.openxmlformats.org/presentationml/2006/main" xmlns:r="http://schemas.openxmlformats.org/officeDocument/2006/relationships">
+  <p:cSld>
+    <p:spTree>
+      <p:nvGrpSpPr>
+        <p:cNvPr id="1" name=""/>
+        <p:cNvGrpSpPr/>
+        <p:nvPr/>
+      </p:nvGrpSpPr>
+      <p:grpSpPr>
+        <a:xfrm>
+          <a:off x="0" y="0"/>
+          <a:ext cx="0" cy="0"/>
+          <a:chOff x="0" y="0"/>
+          <a:chExt cx="0" cy="0"/>
+        </a:xfrm>
+      </p:grpSpPr>
+      <p:sp>
+        <p:nvSpPr>
+          <p:cNvPr id="2" name="Slide Image Placeholder 1"/>
+          <p:cNvSpPr>
+            <a:spLocks noGrp="1"/>
+          </p:cNvSpPr>
+          <p:nvPr>
+            <p:ph type="sldImg" idx="2"/>
+          </p:nvPr>
+        </p:nvSpPr>
+        <p:spPr/>
+      </p:sp>
+      <p:sp>
+        <p:nvSpPr>
+          <p:cNvPr id="3" name="Notes Placeholder 2"/>
+          <p:cNvSpPr>
+            <a:spLocks noGrp="1"/>
+          </p:cNvSpPr>
+          <p:nvPr>
+            <p:ph type="body" idx="3" sz="quarter"/>
+          </p:nvPr>
+        </p:nvSpPr>
+        <p:spPr/>
+        <p:txBody>
+          <a:bodyPr/>
+          <a:lstStyle/>
+          <a:p>
+            <a:r>
+              <a:t>Ranked by the red team. The first two items are the ones that can move the number by more than the whole reserve; the rest are hygiene.</a:t>
+            </a:r>
+          </a:p>
+        </p:txBody>
+      </p:sp>
+      <p:sp>
+        <p:nvSpPr>
+          <p:cNvPr id="4" name="Slide Number Placeholder 3"/>
+          <p:cNvSpPr>
+            <a:spLocks noGrp="1"/>
+          </p:cNvSpPr>
+          <p:nvPr>
+            <p:ph type="sldNum" idx="5" sz="quarter"/>
+          </p:nvPr>
+        </p:nvSpPr>
+        <p:spPr/>
+      </p:sp>
+    </p:spTree>
+  </p:cSld>
+  <p:clrMapOvr>
+    <a:masterClrMapping/>
+  </p:clrMapOvr>
+</p:notes>
+</file>
+
+<file path=ppt/notesSlides/notesSlide26.xml><?xml version="1.0" encoding="utf-8"?>
 <p:notes xmlns:a="http://schemas.openxmlformats.org/drawingml/2006/main" xmlns:p="http://schemas.openxmlformats.org/presentationml/2006/main" xmlns:r="http://schemas.openxmlformats.org/officeDocument/2006/relationships">
   <p:cSld>
     <p:spTree>
@@ -11110,7 +12100,7 @@
                 </a:solidFill>
                 <a:latin typeface="Calibri"/>
               </a:rPr>
-              <a:t>$1.13M sits on a price the contract fixes. Remove it or move it to the risk register with a stated rationale (open item, slide 23).</a:t>
+              <a:t>$1.13M sits on a price the contract fixes. Remove it or move it to the risk register with a stated rationale (open item, slide 25).</a:t>
             </a:r>
           </a:p>
           <a:p>
@@ -12418,7 +13408,7 @@
                 </a:solidFill>
                 <a:latin typeface="Calibri"/>
               </a:rPr>
-              <a:t>slide 14 shows what moves it more.</a:t>
+              <a:t>slides 14 to 16 show the curves and what moves it more.</a:t>
             </a:r>
           </a:p>
         </p:txBody>
@@ -13296,7 +14286,7 @@
                 </a:solidFill>
                 <a:latin typeface="Calibri"/>
               </a:rPr>
-              <a:t>1 · WHERE THE MONEY SITS   |   NORMALIZING TO 2026: SIX INDICES X THREE BATTERY SHARES, CLASS MEDIAN $/KWH</a:t>
+              <a:t>1 · WHERE THE MONEY SITS   |   BATTERY PRICE CURVES YOU COULD CITE, 2014-2026, EACH SERIES INDEXED TO ITS 2018 VALUE = 1.00</a:t>
             </a:r>
           </a:p>
         </p:txBody>
@@ -13338,7 +14328,7 @@
                 </a:solidFill>
                 <a:latin typeface="Georgia"/>
               </a:rPr>
-              <a:t>The battery curve you choose moves the median 4%; the battery share and the construction index move it more</a:t>
+              <a:t>Six published curves, indexed to 2018: batteries fell 1.4 to 2x, the rest of a project rose half again</a:t>
             </a:r>
           </a:p>
         </p:txBody>
@@ -13437,7 +14427,7 @@
         </p:nvGraphicFramePr>
         <p:xfrm>
           <a:off x="457200" y="1371600"/>
-          <a:ext cx="6949440" cy="3291840"/>
+          <a:ext cx="6400800" cy="4572000"/>
         </p:xfrm>
         <a:graphic>
           <a:graphicData uri="http://schemas.openxmlformats.org/drawingml/2006/chart">
@@ -13445,59 +14435,17 @@
           </a:graphicData>
         </a:graphic>
       </p:graphicFrame>
-      <p:sp>
-        <p:nvSpPr>
-          <p:cNvPr id="8" name="TextBox 7"/>
-          <p:cNvSpPr txBox="1"/>
-          <p:nvPr/>
-        </p:nvSpPr>
-        <p:spPr>
-          <a:xfrm>
-            <a:off x="548640" y="4709160"/>
-            <a:ext cx="6858000" cy="320040"/>
-          </a:xfrm>
-          <a:prstGeom prst="rect">
-            <a:avLst/>
-          </a:prstGeom>
-          <a:noFill/>
-        </p:spPr>
-        <p:txBody>
-          <a:bodyPr wrap="square" lIns="45720" rIns="45720" tIns="27432" bIns="27432" anchor="t">
-            <a:spAutoFit/>
-          </a:bodyPr>
-          <a:lstStyle/>
-          <a:p>
-            <a:pPr algn="l">
-              <a:lnSpc>
-                <a:spcPct val="105000"/>
-              </a:lnSpc>
-              <a:spcAft>
-                <a:spcPts val="400"/>
-              </a:spcAft>
-            </a:pPr>
-            <a:r>
-              <a:rPr sz="1050" b="0" i="0">
-                <a:solidFill>
-                  <a:srgbClr val="6B7280"/>
-                </a:solidFill>
-                <a:latin typeface="Calibri"/>
-              </a:rPr>
-              <a:t>Nominal median $771. Hyde Park station complete, direct, is $1,483/kWh; its percentile under each index is at right. Deflating whole projects at the battery rate gives $524 to $620.</a:t>
-            </a:r>
-          </a:p>
-        </p:txBody>
-      </p:sp>
       <p:graphicFrame>
         <p:nvGraphicFramePr>
-          <p:cNvPr id="9" name="Table 8"/>
+          <p:cNvPr id="8" name="Table 7"/>
           <p:cNvGraphicFramePr>
             <a:graphicFrameLocks noGrp="1"/>
           </p:cNvGraphicFramePr>
           <p:nvPr/>
         </p:nvGraphicFramePr>
         <p:xfrm>
-          <a:off x="7635240" y="1371600"/>
-          <a:ext cx="4069080" cy="2651760"/>
+          <a:off x="7086600" y="1371600"/>
+          <a:ext cx="4617720" cy="3749039"/>
         </p:xfrm>
         <a:graphic>
           <a:graphicData uri="http://schemas.openxmlformats.org/drawingml/2006/table">
@@ -13506,25 +14454,25 @@
                 <a:tableStyleId>{5C22544A-7EE6-4342-B048-85BDC9FD1C3A}</a:tableStyleId>
               </a:tblPr>
               <a:tblGrid>
-                <a:gridCol w="1325880"/>
-                <a:gridCol w="868680"/>
-                <a:gridCol w="1188720"/>
+                <a:gridCol w="1051560"/>
+                <a:gridCol w="2057400"/>
                 <a:gridCol w="685800"/>
+                <a:gridCol w="822960"/>
               </a:tblGrid>
-              <a:tr h="378822">
-                <a:tc>
-                  <a:txBody>
-                    <a:bodyPr/>
-                    <a:lstStyle/>
-                    <a:p>
-                      <a:r>
-                        <a:rPr sz="950" b="1">
+              <a:tr h="535577">
+                <a:tc>
+                  <a:txBody>
+                    <a:bodyPr/>
+                    <a:lstStyle/>
+                    <a:p>
+                      <a:r>
+                        <a:rPr sz="800" b="1">
                           <a:solidFill>
                             <a:srgbClr val="FFFFFF"/>
                           </a:solidFill>
                           <a:latin typeface="Calibri"/>
                         </a:rPr>
-                        <a:t>Index</a:t>
+                        <a:t>Curve</a:t>
                       </a:r>
                     </a:p>
                   </a:txBody>
@@ -13539,15 +14487,14 @@
                     <a:bodyPr/>
                     <a:lstStyle/>
                     <a:p>
-                      <a:pPr algn="r"/>
-                      <a:r>
-                        <a:rPr sz="950" b="1">
+                      <a:r>
+                        <a:rPr sz="800" b="1">
                           <a:solidFill>
                             <a:srgbClr val="FFFFFF"/>
                           </a:solidFill>
                           <a:latin typeface="Calibri"/>
                         </a:rPr>
-                        <a:t>2018 to 2026</a:t>
+                        <a:t>What it measures</a:t>
                       </a:r>
                     </a:p>
                   </a:txBody>
@@ -13562,15 +14509,14 @@
                     <a:bodyPr/>
                     <a:lstStyle/>
                     <a:p>
-                      <a:pPr algn="r"/>
-                      <a:r>
-                        <a:rPr sz="950" b="1">
+                      <a:r>
+                        <a:rPr sz="800" b="1">
                           <a:solidFill>
                             <a:srgbClr val="FFFFFF"/>
                           </a:solidFill>
                           <a:latin typeface="Calibri"/>
                         </a:rPr>
-                        <a:t>Net factor, 2018 project, 40% share</a:t>
+                        <a:t>2018 to latest</a:t>
                       </a:r>
                     </a:p>
                   </a:txBody>
@@ -13585,15 +14531,14 @@
                     <a:bodyPr/>
                     <a:lstStyle/>
                     <a:p>
-                      <a:pPr algn="r"/>
-                      <a:r>
-                        <a:rPr sz="950" b="1">
+                      <a:r>
+                        <a:rPr sz="800" b="1">
                           <a:solidFill>
                             <a:srgbClr val="FFFFFF"/>
                           </a:solidFill>
                           <a:latin typeface="Calibri"/>
                         </a:rPr>
-                        <a:t>HP station pct</a:t>
+                        <a:t>Use in re-basing</a:t>
                       </a:r>
                     </a:p>
                   </a:txBody>
@@ -13604,20 +14549,20 @@
                   </a:tcPr>
                 </a:tc>
               </a:tr>
-              <a:tr h="378822">
-                <a:tc>
-                  <a:txBody>
-                    <a:bodyPr/>
-                    <a:lstStyle/>
-                    <a:p>
-                      <a:r>
-                        <a:rPr sz="950" b="0">
-                          <a:solidFill>
-                            <a:srgbClr val="1F2A44"/>
-                          </a:solidFill>
-                          <a:latin typeface="Calibri"/>
-                        </a:rPr>
-                        <a:t>Installed all-in</a:t>
+              <a:tr h="535577">
+                <a:tc>
+                  <a:txBody>
+                    <a:bodyPr/>
+                    <a:lstStyle/>
+                    <a:p>
+                      <a:r>
+                        <a:rPr sz="800" b="0">
+                          <a:solidFill>
+                            <a:srgbClr val="1F2A44"/>
+                          </a:solidFill>
+                          <a:latin typeface="Calibri"/>
+                        </a:rPr>
+                        <a:t>BNEF pack price</a:t>
                       </a:r>
                     </a:p>
                   </a:txBody>
@@ -13632,9 +14577,300 @@
                     <a:bodyPr/>
                     <a:lstStyle/>
                     <a:p>
-                      <a:pPr algn="r"/>
-                      <a:r>
-                        <a:rPr sz="950" b="0">
+                      <a:r>
+                        <a:rPr sz="800" b="0">
+                          <a:solidFill>
+                            <a:srgbClr val="1F2A44"/>
+                          </a:solidFill>
+                          <a:latin typeface="Calibri"/>
+                        </a:rPr>
+                        <a:t>Cells and pack, ex-works; real $; annual since 2010</a:t>
+                      </a:r>
+                    </a:p>
+                  </a:txBody>
+                  <a:tcPr marL="54864" marR="54864" marT="27432" marB="27432" anchor="ctr">
+                    <a:solidFill>
+                      <a:srgbClr val="FFFFFF"/>
+                    </a:solidFill>
+                  </a:tcPr>
+                </a:tc>
+                <a:tc>
+                  <a:txBody>
+                    <a:bodyPr/>
+                    <a:lstStyle/>
+                    <a:p>
+                      <a:r>
+                        <a:rPr sz="800" b="0">
+                          <a:solidFill>
+                            <a:srgbClr val="1F2A44"/>
+                          </a:solidFill>
+                          <a:latin typeface="Calibri"/>
+                        </a:rPr>
+                        <a:t>0.61x</a:t>
+                      </a:r>
+                    </a:p>
+                  </a:txBody>
+                  <a:tcPr marL="54864" marR="54864" marT="27432" marB="27432" anchor="ctr">
+                    <a:solidFill>
+                      <a:srgbClr val="FFFFFF"/>
+                    </a:solidFill>
+                  </a:tcPr>
+                </a:tc>
+                <a:tc>
+                  <a:txBody>
+                    <a:bodyPr/>
+                    <a:lstStyle/>
+                    <a:p>
+                      <a:r>
+                        <a:rPr sz="800" b="0">
+                          <a:solidFill>
+                            <a:srgbClr val="1F2A44"/>
+                          </a:solidFill>
+                          <a:latin typeface="Calibri"/>
+                        </a:rPr>
+                        <a:t>Battery share only</a:t>
+                      </a:r>
+                    </a:p>
+                  </a:txBody>
+                  <a:tcPr marL="54864" marR="54864" marT="27432" marB="27432" anchor="ctr">
+                    <a:solidFill>
+                      <a:srgbClr val="FFFFFF"/>
+                    </a:solidFill>
+                  </a:tcPr>
+                </a:tc>
+              </a:tr>
+              <a:tr h="535577">
+                <a:tc>
+                  <a:txBody>
+                    <a:bodyPr/>
+                    <a:lstStyle/>
+                    <a:p>
+                      <a:r>
+                        <a:rPr sz="800" b="0">
+                          <a:solidFill>
+                            <a:srgbClr val="1F2A44"/>
+                          </a:solidFill>
+                          <a:latin typeface="Calibri"/>
+                        </a:rPr>
+                        <a:t>BNEF turnkey system</a:t>
+                      </a:r>
+                    </a:p>
+                  </a:txBody>
+                  <a:tcPr marL="54864" marR="54864" marT="27432" marB="27432" anchor="ctr">
+                    <a:solidFill>
+                      <a:srgbClr val="F2F4F8"/>
+                    </a:solidFill>
+                  </a:tcPr>
+                </a:tc>
+                <a:tc>
+                  <a:txBody>
+                    <a:bodyPr/>
+                    <a:lstStyle/>
+                    <a:p>
+                      <a:r>
+                        <a:rPr sz="800" b="0">
+                          <a:solidFill>
+                            <a:srgbClr val="1F2A44"/>
+                          </a:solidFill>
+                          <a:latin typeface="Calibri"/>
+                        </a:rPr>
+                        <a:t>Racks, PCS, BOS, install; excl. grid connection, land, owner costs</a:t>
+                      </a:r>
+                    </a:p>
+                  </a:txBody>
+                  <a:tcPr marL="54864" marR="54864" marT="27432" marB="27432" anchor="ctr">
+                    <a:solidFill>
+                      <a:srgbClr val="F2F4F8"/>
+                    </a:solidFill>
+                  </a:tcPr>
+                </a:tc>
+                <a:tc>
+                  <a:txBody>
+                    <a:bodyPr/>
+                    <a:lstStyle/>
+                    <a:p>
+                      <a:r>
+                        <a:rPr sz="800" b="0">
+                          <a:solidFill>
+                            <a:srgbClr val="1F2A44"/>
+                          </a:solidFill>
+                          <a:latin typeface="Calibri"/>
+                        </a:rPr>
+                        <a:t>0.49x</a:t>
+                      </a:r>
+                    </a:p>
+                  </a:txBody>
+                  <a:tcPr marL="54864" marR="54864" marT="27432" marB="27432" anchor="ctr">
+                    <a:solidFill>
+                      <a:srgbClr val="F2F4F8"/>
+                    </a:solidFill>
+                  </a:tcPr>
+                </a:tc>
+                <a:tc>
+                  <a:txBody>
+                    <a:bodyPr/>
+                    <a:lstStyle/>
+                    <a:p>
+                      <a:r>
+                        <a:rPr sz="800" b="0">
+                          <a:solidFill>
+                            <a:srgbClr val="1F2A44"/>
+                          </a:solidFill>
+                          <a:latin typeface="Calibri"/>
+                        </a:rPr>
+                        <a:t>Battery share; short history</a:t>
+                      </a:r>
+                    </a:p>
+                  </a:txBody>
+                  <a:tcPr marL="54864" marR="54864" marT="27432" marB="27432" anchor="ctr">
+                    <a:solidFill>
+                      <a:srgbClr val="F2F4F8"/>
+                    </a:solidFill>
+                  </a:tcPr>
+                </a:tc>
+              </a:tr>
+              <a:tr h="535577">
+                <a:tc>
+                  <a:txBody>
+                    <a:bodyPr/>
+                    <a:lstStyle/>
+                    <a:p>
+                      <a:r>
+                        <a:rPr sz="800" b="0">
+                          <a:solidFill>
+                            <a:srgbClr val="1F2A44"/>
+                          </a:solidFill>
+                          <a:latin typeface="Calibri"/>
+                        </a:rPr>
+                        <a:t>NREL bottom-up base year</a:t>
+                      </a:r>
+                    </a:p>
+                  </a:txBody>
+                  <a:tcPr marL="54864" marR="54864" marT="27432" marB="27432" anchor="ctr">
+                    <a:solidFill>
+                      <a:srgbClr val="FFFFFF"/>
+                    </a:solidFill>
+                  </a:tcPr>
+                </a:tc>
+                <a:tc>
+                  <a:txBody>
+                    <a:bodyPr/>
+                    <a:lstStyle/>
+                    <a:p>
+                      <a:r>
+                        <a:rPr sz="800" b="0">
+                          <a:solidFill>
+                            <a:srgbClr val="1F2A44"/>
+                          </a:solidFill>
+                          <a:latin typeface="Calibri"/>
+                        </a:rPr>
+                        <a:t>Modeled 4-h 60 MW all-in incl. EPC, developer overhead, interconnection allowance</a:t>
+                      </a:r>
+                    </a:p>
+                  </a:txBody>
+                  <a:tcPr marL="54864" marR="54864" marT="27432" marB="27432" anchor="ctr">
+                    <a:solidFill>
+                      <a:srgbClr val="FFFFFF"/>
+                    </a:solidFill>
+                  </a:tcPr>
+                </a:tc>
+                <a:tc>
+                  <a:txBody>
+                    <a:bodyPr/>
+                    <a:lstStyle/>
+                    <a:p>
+                      <a:r>
+                        <a:rPr sz="800" b="0">
+                          <a:solidFill>
+                            <a:srgbClr val="1F2A44"/>
+                          </a:solidFill>
+                          <a:latin typeface="Calibri"/>
+                        </a:rPr>
+                        <a:t>0.69x</a:t>
+                      </a:r>
+                    </a:p>
+                  </a:txBody>
+                  <a:tcPr marL="54864" marR="54864" marT="27432" marB="27432" anchor="ctr">
+                    <a:solidFill>
+                      <a:srgbClr val="FFFFFF"/>
+                    </a:solidFill>
+                  </a:tcPr>
+                </a:tc>
+                <a:tc>
+                  <a:txBody>
+                    <a:bodyPr/>
+                    <a:lstStyle/>
+                    <a:p>
+                      <a:r>
+                        <a:rPr sz="800" b="0">
+                          <a:solidFill>
+                            <a:srgbClr val="1F2A44"/>
+                          </a:solidFill>
+                          <a:latin typeface="Calibri"/>
+                        </a:rPr>
+                        <a:t>Battery share; two points</a:t>
+                      </a:r>
+                    </a:p>
+                  </a:txBody>
+                  <a:tcPr marL="54864" marR="54864" marT="27432" marB="27432" anchor="ctr">
+                    <a:solidFill>
+                      <a:srgbClr val="FFFFFF"/>
+                    </a:solidFill>
+                  </a:tcPr>
+                </a:tc>
+              </a:tr>
+              <a:tr h="535577">
+                <a:tc>
+                  <a:txBody>
+                    <a:bodyPr/>
+                    <a:lstStyle/>
+                    <a:p>
+                      <a:r>
+                        <a:rPr sz="800" b="0">
+                          <a:solidFill>
+                            <a:srgbClr val="1F2A44"/>
+                          </a:solidFill>
+                          <a:latin typeface="Calibri"/>
+                        </a:rPr>
+                        <a:t>EIA / LBNL installed all-in</a:t>
+                      </a:r>
+                    </a:p>
+                  </a:txBody>
+                  <a:tcPr marL="54864" marR="54864" marT="27432" marB="27432" anchor="ctr">
+                    <a:solidFill>
+                      <a:srgbClr val="F2F4F8"/>
+                    </a:solidFill>
+                  </a:tcPr>
+                </a:tc>
+                <a:tc>
+                  <a:txBody>
+                    <a:bodyPr/>
+                    <a:lstStyle/>
+                    <a:p>
+                      <a:r>
+                        <a:rPr sz="800" b="0">
+                          <a:solidFill>
+                            <a:srgbClr val="1F2A44"/>
+                          </a:solidFill>
+                          <a:latin typeface="Calibri"/>
+                        </a:rPr>
+                        <a:t>Reported capitalized cost of installed systems (EIA-860 2015-18; LBNL 2024)</a:t>
+                      </a:r>
+                    </a:p>
+                  </a:txBody>
+                  <a:tcPr marL="54864" marR="54864" marT="27432" marB="27432" anchor="ctr">
+                    <a:solidFill>
+                      <a:srgbClr val="F2F4F8"/>
+                    </a:solidFill>
+                  </a:tcPr>
+                </a:tc>
+                <a:tc>
+                  <a:txBody>
+                    <a:bodyPr/>
+                    <a:lstStyle/>
+                    <a:p>
+                      <a:r>
+                        <a:rPr sz="800" b="0">
                           <a:solidFill>
                             <a:srgbClr val="1F2A44"/>
                           </a:solidFill>
@@ -13646,6 +14882,52 @@
                   </a:txBody>
                   <a:tcPr marL="54864" marR="54864" marT="27432" marB="27432" anchor="ctr">
                     <a:solidFill>
+                      <a:srgbClr val="F2F4F8"/>
+                    </a:solidFill>
+                  </a:tcPr>
+                </a:tc>
+                <a:tc>
+                  <a:txBody>
+                    <a:bodyPr/>
+                    <a:lstStyle/>
+                    <a:p>
+                      <a:r>
+                        <a:rPr sz="800" b="0">
+                          <a:solidFill>
+                            <a:srgbClr val="1F2A44"/>
+                          </a:solidFill>
+                          <a:latin typeface="Calibri"/>
+                        </a:rPr>
+                        <a:t>Primary: closest to a project</a:t>
+                      </a:r>
+                    </a:p>
+                  </a:txBody>
+                  <a:tcPr marL="54864" marR="54864" marT="27432" marB="27432" anchor="ctr">
+                    <a:solidFill>
+                      <a:srgbClr val="F2F4F8"/>
+                    </a:solidFill>
+                  </a:tcPr>
+                </a:tc>
+              </a:tr>
+              <a:tr h="535577">
+                <a:tc>
+                  <a:txBody>
+                    <a:bodyPr/>
+                    <a:lstStyle/>
+                    <a:p>
+                      <a:r>
+                        <a:rPr sz="800" b="0">
+                          <a:solidFill>
+                            <a:srgbClr val="1F2A44"/>
+                          </a:solidFill>
+                          <a:latin typeface="Calibri"/>
+                        </a:rPr>
+                        <a:t>Lazard LCOS</a:t>
+                      </a:r>
+                    </a:p>
+                  </a:txBody>
+                  <a:tcPr marL="54864" marR="54864" marT="27432" marB="27432" anchor="ctr">
+                    <a:solidFill>
                       <a:srgbClr val="FFFFFF"/>
                     </a:solidFill>
                   </a:tcPr>
@@ -13655,15 +14937,14 @@
                     <a:bodyPr/>
                     <a:lstStyle/>
                     <a:p>
-                      <a:pPr algn="r"/>
-                      <a:r>
-                        <a:rPr sz="950" b="0">
-                          <a:solidFill>
-                            <a:srgbClr val="1F2A44"/>
-                          </a:solidFill>
-                          <a:latin typeface="Calibri"/>
-                        </a:rPr>
-                        <a:t>1.19x</a:t>
+                      <a:r>
+                        <a:rPr sz="800" b="0">
+                          <a:solidFill>
+                            <a:srgbClr val="1F2A44"/>
+                          </a:solidFill>
+                          <a:latin typeface="Calibri"/>
+                        </a:rPr>
+                        <a:t>Levelized $/MWh incl. charging, O&amp;M, augmentation, financing, ITC</a:t>
                       </a:r>
                     </a:p>
                   </a:txBody>
@@ -13678,15 +14959,14 @@
                     <a:bodyPr/>
                     <a:lstStyle/>
                     <a:p>
-                      <a:pPr algn="r"/>
-                      <a:r>
-                        <a:rPr sz="950" b="0">
-                          <a:solidFill>
-                            <a:srgbClr val="1F2A44"/>
-                          </a:solidFill>
-                          <a:latin typeface="Calibri"/>
-                        </a:rPr>
-                        <a:t>85%</a:t>
+                      <a:r>
+                        <a:rPr sz="800" b="0">
+                          <a:solidFill>
+                            <a:srgbClr val="1F2A44"/>
+                          </a:solidFill>
+                          <a:latin typeface="Calibri"/>
+                        </a:rPr>
+                        <a:t>1.03x</a:t>
                       </a:r>
                     </a:p>
                   </a:txBody>
@@ -13696,21 +14976,43 @@
                     </a:solidFill>
                   </a:tcPr>
                 </a:tc>
+                <a:tc>
+                  <a:txBody>
+                    <a:bodyPr/>
+                    <a:lstStyle/>
+                    <a:p>
+                      <a:r>
+                        <a:rPr sz="800" b="0">
+                          <a:solidFill>
+                            <a:srgbClr val="1F2A44"/>
+                          </a:solidFill>
+                          <a:latin typeface="Calibri"/>
+                        </a:rPr>
+                        <a:t>Not a capital-cost deflator</a:t>
+                      </a:r>
+                    </a:p>
+                  </a:txBody>
+                  <a:tcPr marL="54864" marR="54864" marT="27432" marB="27432" anchor="ctr">
+                    <a:solidFill>
+                      <a:srgbClr val="FFFFFF"/>
+                    </a:solidFill>
+                  </a:tcPr>
+                </a:tc>
               </a:tr>
-              <a:tr h="378822">
-                <a:tc>
-                  <a:txBody>
-                    <a:bodyPr/>
-                    <a:lstStyle/>
-                    <a:p>
-                      <a:r>
-                        <a:rPr sz="950" b="0">
-                          <a:solidFill>
-                            <a:srgbClr val="1F2A44"/>
-                          </a:solidFill>
-                          <a:latin typeface="Calibri"/>
-                        </a:rPr>
-                        <a:t>BNEF pack</a:t>
+              <a:tr h="535577">
+                <a:tc>
+                  <a:txBody>
+                    <a:bodyPr/>
+                    <a:lstStyle/>
+                    <a:p>
+                      <a:r>
+                        <a:rPr sz="800" b="0">
+                          <a:solidFill>
+                            <a:srgbClr val="1F2A44"/>
+                          </a:solidFill>
+                          <a:latin typeface="Calibri"/>
+                        </a:rPr>
+                        <a:t>Handy-Whitman construction</a:t>
                       </a:r>
                     </a:p>
                   </a:txBody>
@@ -13725,15 +15027,14 @@
                     <a:bodyPr/>
                     <a:lstStyle/>
                     <a:p>
-                      <a:pPr algn="r"/>
-                      <a:r>
-                        <a:rPr sz="950" b="0">
-                          <a:solidFill>
-                            <a:srgbClr val="1F2A44"/>
-                          </a:solidFill>
-                          <a:latin typeface="Calibri"/>
-                        </a:rPr>
-                        <a:t>0.61x</a:t>
+                      <a:r>
+                        <a:rPr sz="800" b="0">
+                          <a:solidFill>
+                            <a:srgbClr val="1F2A44"/>
+                          </a:solidFill>
+                          <a:latin typeface="Calibri"/>
+                        </a:rPr>
+                        <a:t>Utility plant construction cost index, North Atlantic (via PJM)</a:t>
                       </a:r>
                     </a:p>
                   </a:txBody>
@@ -13748,15 +15049,14 @@
                     <a:bodyPr/>
                     <a:lstStyle/>
                     <a:p>
-                      <a:pPr algn="r"/>
-                      <a:r>
-                        <a:rPr sz="950" b="0">
-                          <a:solidFill>
-                            <a:srgbClr val="1F2A44"/>
-                          </a:solidFill>
-                          <a:latin typeface="Calibri"/>
-                        </a:rPr>
-                        <a:t>1.14x</a:t>
+                      <a:r>
+                        <a:rPr sz="800" b="0">
+                          <a:solidFill>
+                            <a:srgbClr val="1F2A44"/>
+                          </a:solidFill>
+                          <a:latin typeface="Calibri"/>
+                        </a:rPr>
+                        <a:t>1.49x</a:t>
                       </a:r>
                     </a:p>
                   </a:txBody>
@@ -13771,387 +15071,14 @@
                     <a:bodyPr/>
                     <a:lstStyle/>
                     <a:p>
-                      <a:pPr algn="r"/>
-                      <a:r>
-                        <a:rPr sz="950" b="0">
-                          <a:solidFill>
-                            <a:srgbClr val="1F2A44"/>
-                          </a:solidFill>
-                          <a:latin typeface="Calibri"/>
-                        </a:rPr>
-                        <a:t>87%</a:t>
-                      </a:r>
-                    </a:p>
-                  </a:txBody>
-                  <a:tcPr marL="54864" marR="54864" marT="27432" marB="27432" anchor="ctr">
-                    <a:solidFill>
-                      <a:srgbClr val="F2F4F8"/>
-                    </a:solidFill>
-                  </a:tcPr>
-                </a:tc>
-              </a:tr>
-              <a:tr h="378822">
-                <a:tc>
-                  <a:txBody>
-                    <a:bodyPr/>
-                    <a:lstStyle/>
-                    <a:p>
-                      <a:r>
-                        <a:rPr sz="950" b="0">
-                          <a:solidFill>
-                            <a:srgbClr val="1F2A44"/>
-                          </a:solidFill>
-                          <a:latin typeface="Calibri"/>
-                        </a:rPr>
-                        <a:t>BNEF turnkey</a:t>
-                      </a:r>
-                    </a:p>
-                  </a:txBody>
-                  <a:tcPr marL="54864" marR="54864" marT="27432" marB="27432" anchor="ctr">
-                    <a:solidFill>
-                      <a:srgbClr val="FFFFFF"/>
-                    </a:solidFill>
-                  </a:tcPr>
-                </a:tc>
-                <a:tc>
-                  <a:txBody>
-                    <a:bodyPr/>
-                    <a:lstStyle/>
-                    <a:p>
-                      <a:pPr algn="r"/>
-                      <a:r>
-                        <a:rPr sz="950" b="0">
-                          <a:solidFill>
-                            <a:srgbClr val="1F2A44"/>
-                          </a:solidFill>
-                          <a:latin typeface="Calibri"/>
-                        </a:rPr>
-                        <a:t>0.49x</a:t>
-                      </a:r>
-                    </a:p>
-                  </a:txBody>
-                  <a:tcPr marL="54864" marR="54864" marT="27432" marB="27432" anchor="ctr">
-                    <a:solidFill>
-                      <a:srgbClr val="FFFFFF"/>
-                    </a:solidFill>
-                  </a:tcPr>
-                </a:tc>
-                <a:tc>
-                  <a:txBody>
-                    <a:bodyPr/>
-                    <a:lstStyle/>
-                    <a:p>
-                      <a:pPr algn="r"/>
-                      <a:r>
-                        <a:rPr sz="950" b="0">
-                          <a:solidFill>
-                            <a:srgbClr val="1F2A44"/>
-                          </a:solidFill>
-                          <a:latin typeface="Calibri"/>
-                        </a:rPr>
-                        <a:t>1.09x</a:t>
-                      </a:r>
-                    </a:p>
-                  </a:txBody>
-                  <a:tcPr marL="54864" marR="54864" marT="27432" marB="27432" anchor="ctr">
-                    <a:solidFill>
-                      <a:srgbClr val="FFFFFF"/>
-                    </a:solidFill>
-                  </a:tcPr>
-                </a:tc>
-                <a:tc>
-                  <a:txBody>
-                    <a:bodyPr/>
-                    <a:lstStyle/>
-                    <a:p>
-                      <a:pPr algn="r"/>
-                      <a:r>
-                        <a:rPr sz="950" b="0">
-                          <a:solidFill>
-                            <a:srgbClr val="1F2A44"/>
-                          </a:solidFill>
-                          <a:latin typeface="Calibri"/>
-                        </a:rPr>
-                        <a:t>89%</a:t>
-                      </a:r>
-                    </a:p>
-                  </a:txBody>
-                  <a:tcPr marL="54864" marR="54864" marT="27432" marB="27432" anchor="ctr">
-                    <a:solidFill>
-                      <a:srgbClr val="FFFFFF"/>
-                    </a:solidFill>
-                  </a:tcPr>
-                </a:tc>
-              </a:tr>
-              <a:tr h="378822">
-                <a:tc>
-                  <a:txBody>
-                    <a:bodyPr/>
-                    <a:lstStyle/>
-                    <a:p>
-                      <a:r>
-                        <a:rPr sz="950" b="0">
-                          <a:solidFill>
-                            <a:srgbClr val="1F2A44"/>
-                          </a:solidFill>
-                          <a:latin typeface="Calibri"/>
-                        </a:rPr>
-                        <a:t>NREL base year</a:t>
-                      </a:r>
-                    </a:p>
-                  </a:txBody>
-                  <a:tcPr marL="54864" marR="54864" marT="27432" marB="27432" anchor="ctr">
-                    <a:solidFill>
-                      <a:srgbClr val="F2F4F8"/>
-                    </a:solidFill>
-                  </a:tcPr>
-                </a:tc>
-                <a:tc>
-                  <a:txBody>
-                    <a:bodyPr/>
-                    <a:lstStyle/>
-                    <a:p>
-                      <a:pPr algn="r"/>
-                      <a:r>
-                        <a:rPr sz="950" b="0">
-                          <a:solidFill>
-                            <a:srgbClr val="1F2A44"/>
-                          </a:solidFill>
-                          <a:latin typeface="Calibri"/>
-                        </a:rPr>
-                        <a:t>0.69x</a:t>
-                      </a:r>
-                    </a:p>
-                  </a:txBody>
-                  <a:tcPr marL="54864" marR="54864" marT="27432" marB="27432" anchor="ctr">
-                    <a:solidFill>
-                      <a:srgbClr val="F2F4F8"/>
-                    </a:solidFill>
-                  </a:tcPr>
-                </a:tc>
-                <a:tc>
-                  <a:txBody>
-                    <a:bodyPr/>
-                    <a:lstStyle/>
-                    <a:p>
-                      <a:pPr algn="r"/>
-                      <a:r>
-                        <a:rPr sz="950" b="0">
-                          <a:solidFill>
-                            <a:srgbClr val="1F2A44"/>
-                          </a:solidFill>
-                          <a:latin typeface="Calibri"/>
-                        </a:rPr>
-                        <a:t>1.17x</a:t>
-                      </a:r>
-                    </a:p>
-                  </a:txBody>
-                  <a:tcPr marL="54864" marR="54864" marT="27432" marB="27432" anchor="ctr">
-                    <a:solidFill>
-                      <a:srgbClr val="F2F4F8"/>
-                    </a:solidFill>
-                  </a:tcPr>
-                </a:tc>
-                <a:tc>
-                  <a:txBody>
-                    <a:bodyPr/>
-                    <a:lstStyle/>
-                    <a:p>
-                      <a:pPr algn="r"/>
-                      <a:r>
-                        <a:rPr sz="950" b="0">
-                          <a:solidFill>
-                            <a:srgbClr val="1F2A44"/>
-                          </a:solidFill>
-                          <a:latin typeface="Calibri"/>
-                        </a:rPr>
-                        <a:t>84%</a:t>
-                      </a:r>
-                    </a:p>
-                  </a:txBody>
-                  <a:tcPr marL="54864" marR="54864" marT="27432" marB="27432" anchor="ctr">
-                    <a:solidFill>
-                      <a:srgbClr val="F2F4F8"/>
-                    </a:solidFill>
-                  </a:tcPr>
-                </a:tc>
-              </a:tr>
-              <a:tr h="378822">
-                <a:tc>
-                  <a:txBody>
-                    <a:bodyPr/>
-                    <a:lstStyle/>
-                    <a:p>
-                      <a:r>
-                        <a:rPr sz="950" b="0">
-                          <a:solidFill>
-                            <a:srgbClr val="1F2A44"/>
-                          </a:solidFill>
-                          <a:latin typeface="Calibri"/>
-                        </a:rPr>
-                        <a:t>Lazard LCOS</a:t>
-                      </a:r>
-                    </a:p>
-                  </a:txBody>
-                  <a:tcPr marL="54864" marR="54864" marT="27432" marB="27432" anchor="ctr">
-                    <a:solidFill>
-                      <a:srgbClr val="FFFFFF"/>
-                    </a:solidFill>
-                  </a:tcPr>
-                </a:tc>
-                <a:tc>
-                  <a:txBody>
-                    <a:bodyPr/>
-                    <a:lstStyle/>
-                    <a:p>
-                      <a:pPr algn="r"/>
-                      <a:r>
-                        <a:rPr sz="950" b="0">
-                          <a:solidFill>
-                            <a:srgbClr val="1F2A44"/>
-                          </a:solidFill>
-                          <a:latin typeface="Calibri"/>
-                        </a:rPr>
-                        <a:t>1.03x</a:t>
-                      </a:r>
-                    </a:p>
-                  </a:txBody>
-                  <a:tcPr marL="54864" marR="54864" marT="27432" marB="27432" anchor="ctr">
-                    <a:solidFill>
-                      <a:srgbClr val="FFFFFF"/>
-                    </a:solidFill>
-                  </a:tcPr>
-                </a:tc>
-                <a:tc>
-                  <a:txBody>
-                    <a:bodyPr/>
-                    <a:lstStyle/>
-                    <a:p>
-                      <a:pPr algn="r"/>
-                      <a:r>
-                        <a:rPr sz="950" b="0">
-                          <a:solidFill>
-                            <a:srgbClr val="1F2A44"/>
-                          </a:solidFill>
-                          <a:latin typeface="Calibri"/>
-                        </a:rPr>
-                        <a:t>1.31x</a:t>
-                      </a:r>
-                    </a:p>
-                  </a:txBody>
-                  <a:tcPr marL="54864" marR="54864" marT="27432" marB="27432" anchor="ctr">
-                    <a:solidFill>
-                      <a:srgbClr val="FFFFFF"/>
-                    </a:solidFill>
-                  </a:tcPr>
-                </a:tc>
-                <a:tc>
-                  <a:txBody>
-                    <a:bodyPr/>
-                    <a:lstStyle/>
-                    <a:p>
-                      <a:pPr algn="r"/>
-                      <a:r>
-                        <a:rPr sz="950" b="0">
-                          <a:solidFill>
-                            <a:srgbClr val="1F2A44"/>
-                          </a:solidFill>
-                          <a:latin typeface="Calibri"/>
-                        </a:rPr>
-                        <a:t>76%</a:t>
-                      </a:r>
-                    </a:p>
-                  </a:txBody>
-                  <a:tcPr marL="54864" marR="54864" marT="27432" marB="27432" anchor="ctr">
-                    <a:solidFill>
-                      <a:srgbClr val="FFFFFF"/>
-                    </a:solidFill>
-                  </a:tcPr>
-                </a:tc>
-              </a:tr>
-              <a:tr h="378828">
-                <a:tc>
-                  <a:txBody>
-                    <a:bodyPr/>
-                    <a:lstStyle/>
-                    <a:p>
-                      <a:r>
-                        <a:rPr sz="950" b="0">
-                          <a:solidFill>
-                            <a:srgbClr val="1F2A44"/>
-                          </a:solidFill>
-                          <a:latin typeface="Calibri"/>
-                        </a:rPr>
-                        <a:t>Construction only</a:t>
-                      </a:r>
-                    </a:p>
-                  </a:txBody>
-                  <a:tcPr marL="54864" marR="54864" marT="27432" marB="27432" anchor="ctr">
-                    <a:solidFill>
-                      <a:srgbClr val="F2F4F8"/>
-                    </a:solidFill>
-                  </a:tcPr>
-                </a:tc>
-                <a:tc>
-                  <a:txBody>
-                    <a:bodyPr/>
-                    <a:lstStyle/>
-                    <a:p>
-                      <a:pPr algn="r"/>
-                      <a:r>
-                        <a:rPr sz="950" b="0">
-                          <a:solidFill>
-                            <a:srgbClr val="1F2A44"/>
-                          </a:solidFill>
-                          <a:latin typeface="Calibri"/>
-                        </a:rPr>
-                        <a:t>1.49x</a:t>
-                      </a:r>
-                    </a:p>
-                  </a:txBody>
-                  <a:tcPr marL="54864" marR="54864" marT="27432" marB="27432" anchor="ctr">
-                    <a:solidFill>
-                      <a:srgbClr val="F2F4F8"/>
-                    </a:solidFill>
-                  </a:tcPr>
-                </a:tc>
-                <a:tc>
-                  <a:txBody>
-                    <a:bodyPr/>
-                    <a:lstStyle/>
-                    <a:p>
-                      <a:pPr algn="r"/>
-                      <a:r>
-                        <a:rPr sz="950" b="0">
-                          <a:solidFill>
-                            <a:srgbClr val="1F2A44"/>
-                          </a:solidFill>
-                          <a:latin typeface="Calibri"/>
-                        </a:rPr>
-                        <a:t>1.49x</a:t>
-                      </a:r>
-                    </a:p>
-                  </a:txBody>
-                  <a:tcPr marL="54864" marR="54864" marT="27432" marB="27432" anchor="ctr">
-                    <a:solidFill>
-                      <a:srgbClr val="F2F4F8"/>
-                    </a:solidFill>
-                  </a:tcPr>
-                </a:tc>
-                <a:tc>
-                  <a:txBody>
-                    <a:bodyPr/>
-                    <a:lstStyle/>
-                    <a:p>
-                      <a:pPr algn="r"/>
-                      <a:r>
-                        <a:rPr sz="950" b="0">
-                          <a:solidFill>
-                            <a:srgbClr val="1F2A44"/>
-                          </a:solidFill>
-                          <a:latin typeface="Calibri"/>
-                        </a:rPr>
-                        <a:t>75%</a:t>
+                      <a:r>
+                        <a:rPr sz="800" b="0">
+                          <a:solidFill>
+                            <a:srgbClr val="1F2A44"/>
+                          </a:solidFill>
+                          <a:latin typeface="Calibri"/>
+                        </a:rPr>
+                        <a:t>Non-battery share (60%)</a:t>
                       </a:r>
                     </a:p>
                   </a:txBody>
@@ -14168,14 +15095,14 @@
       </p:graphicFrame>
       <p:sp>
         <p:nvSpPr>
-          <p:cNvPr id="10" name="TextBox 9"/>
+          <p:cNvPr id="9" name="TextBox 8"/>
           <p:cNvSpPr txBox="1"/>
           <p:nvPr/>
         </p:nvSpPr>
         <p:spPr>
           <a:xfrm>
-            <a:off x="7635240" y="4160520"/>
-            <a:ext cx="4069080" cy="2194560"/>
+            <a:off x="7086600" y="5440680"/>
+            <a:ext cx="4617720" cy="914400"/>
           </a:xfrm>
           <a:prstGeom prst="rect">
             <a:avLst/>
@@ -14193,7 +15120,7 @@
                 <a:spcPct val="105000"/>
               </a:lnSpc>
               <a:spcAft>
-                <a:spcPts val="400"/>
+                <a:spcPts val="300"/>
               </a:spcAft>
             </a:pPr>
             <a:r>
@@ -14212,7 +15139,7 @@
                 </a:solidFill>
                 <a:latin typeface="Calibri"/>
               </a:rPr>
-              <a:t>Choice of battery curve: </a:t>
+              <a:t>Four curves describe the battery, one the rest of the project, one neither. </a:t>
             </a:r>
             <a:r>
               <a:rPr sz="1000">
@@ -14221,160 +15148,7 @@
                 </a:solidFill>
                 <a:latin typeface="Calibri"/>
               </a:rPr>
-              <a:t>medians $806 to $838 across the four battery series (LCOS $903). The curves disagree about packs, not about projects.</a:t>
-            </a:r>
-          </a:p>
-          <a:p>
-            <a:pPr>
-              <a:lnSpc>
-                <a:spcPct val="105000"/>
-              </a:lnSpc>
-              <a:spcAft>
-                <a:spcPts val="400"/>
-              </a:spcAft>
-            </a:pPr>
-            <a:r>
-              <a:rPr sz="1000">
-                <a:solidFill>
-                  <a:srgbClr val="FFC72C"/>
-                </a:solidFill>
-                <a:latin typeface="Calibri"/>
-              </a:rPr>
-              <a:t>▪  </a:t>
-            </a:r>
-            <a:r>
-              <a:rPr b="1" sz="1000">
-                <a:solidFill>
-                  <a:srgbClr val="1F2A44"/>
-                </a:solidFill>
-                <a:latin typeface="Calibri"/>
-              </a:rPr>
-              <a:t>Battery share: </a:t>
-            </a:r>
-            <a:r>
-              <a:rPr sz="1000">
-                <a:solidFill>
-                  <a:srgbClr val="1F2A44"/>
-                </a:solidFill>
-                <a:latin typeface="Calibri"/>
-              </a:rPr>
-              <a:t>30% to 50% moves the median $11 to $86 depending on the curve; the share is a lever of the same order as the curve.</a:t>
-            </a:r>
-          </a:p>
-          <a:p>
-            <a:pPr>
-              <a:lnSpc>
-                <a:spcPct val="105000"/>
-              </a:lnSpc>
-              <a:spcAft>
-                <a:spcPts val="400"/>
-              </a:spcAft>
-            </a:pPr>
-            <a:r>
-              <a:rPr sz="1000">
-                <a:solidFill>
-                  <a:srgbClr val="FFC72C"/>
-                </a:solidFill>
-                <a:latin typeface="Calibri"/>
-              </a:rPr>
-              <a:t>▪  </a:t>
-            </a:r>
-            <a:r>
-              <a:rPr b="1" sz="1000">
-                <a:solidFill>
-                  <a:srgbClr val="1F2A44"/>
-                </a:solidFill>
-                <a:latin typeface="Calibri"/>
-              </a:rPr>
-              <a:t>Construction index: </a:t>
-            </a:r>
-            <a:r>
-              <a:rPr sz="1000">
-                <a:solidFill>
-                  <a:srgbClr val="1F2A44"/>
-                </a:solidFill>
-                <a:latin typeface="Calibri"/>
-              </a:rPr>
-              <a:t>Handy-Whitman North Atlantic rose 49% from 2018 to 2026 (10% a year in 2021-22); a flat 3.5% proxy gives 32%, and a median $816 instead of $832.</a:t>
-            </a:r>
-          </a:p>
-          <a:p>
-            <a:pPr>
-              <a:lnSpc>
-                <a:spcPct val="105000"/>
-              </a:lnSpc>
-              <a:spcAft>
-                <a:spcPts val="400"/>
-              </a:spcAft>
-            </a:pPr>
-            <a:r>
-              <a:rPr sz="1000">
-                <a:solidFill>
-                  <a:srgbClr val="FFC72C"/>
-                </a:solidFill>
-                <a:latin typeface="Calibri"/>
-              </a:rPr>
-              <a:t>▪  </a:t>
-            </a:r>
-            <a:r>
-              <a:rPr b="1" sz="1000">
-                <a:solidFill>
-                  <a:srgbClr val="1F2A44"/>
-                </a:solidFill>
-                <a:latin typeface="Calibri"/>
-              </a:rPr>
-              <a:t>LCOS </a:t>
-            </a:r>
-            <a:r>
-              <a:rPr sz="1000">
-                <a:solidFill>
-                  <a:srgbClr val="1F2A44"/>
-                </a:solidFill>
-                <a:latin typeface="Calibri"/>
-              </a:rPr>
-              <a:t>is a levelized $/MWh metric, flat since 2019; using it re-bases nothing on the battery side.</a:t>
-            </a:r>
-          </a:p>
-        </p:txBody>
-      </p:sp>
-      <p:sp>
-        <p:nvSpPr>
-          <p:cNvPr id="11" name="TextBox 10"/>
-          <p:cNvSpPr txBox="1"/>
-          <p:nvPr/>
-        </p:nvSpPr>
-        <p:spPr>
-          <a:xfrm>
-            <a:off x="548640" y="5074920"/>
-            <a:ext cx="6858000" cy="1188720"/>
-          </a:xfrm>
-          <a:prstGeom prst="rect">
-            <a:avLst/>
-          </a:prstGeom>
-          <a:noFill/>
-        </p:spPr>
-        <p:txBody>
-          <a:bodyPr wrap="square" lIns="45720" rIns="45720" tIns="27432" bIns="27432" anchor="t">
-            <a:spAutoFit/>
-          </a:bodyPr>
-          <a:lstStyle/>
-          <a:p>
-            <a:pPr algn="l">
-              <a:lnSpc>
-                <a:spcPct val="105000"/>
-              </a:lnSpc>
-              <a:spcAft>
-                <a:spcPts val="400"/>
-              </a:spcAft>
-            </a:pPr>
-            <a:r>
-              <a:rPr sz="950" b="0" i="0">
-                <a:solidFill>
-                  <a:srgbClr val="6B7280"/>
-                </a:solidFill>
-                <a:latin typeface="Calibri"/>
-              </a:rPr>
-              <a:t>Indices as published (BNEF pack and ESS surveys 2014-2025; EIA-860 2015-18 and LBNL 2024; NREL 2022 and 2024 base years; Lazard LCOS v5.0-2026 midpoints; Handy-Whitman via PJM), linearly interpolated between published points and held flat outside them. Retrieved from search excerpts; verify before external use.</a:t>
+              <a:t>A re-basing picks one from each of the first two groups and says which. LCOS is cited most and fits least.</a:t>
             </a:r>
           </a:p>
         </p:txBody>
@@ -14478,7 +15252,7 @@
                 </a:solidFill>
                 <a:latin typeface="Calibri"/>
               </a:rPr>
-              <a:t>1 · WHERE THE MONEY SITS   |   WHY A SMALL URBAN UTILITY-OWNED PROJECT SITS ABOVE THE INDEX</a:t>
+              <a:t>1 · WHERE THE MONEY SITS   |   NORMALIZING TO 2026: SIX INDICES X THREE BATTERY SHARES, CLASS MEDIAN $/KWH</a:t>
             </a:r>
           </a:p>
         </p:txBody>
@@ -14520,7 +15294,7 @@
                 </a:solidFill>
                 <a:latin typeface="Georgia"/>
               </a:rPr>
-              <a:t>Six things about Hyde Park that a 100 MW greenfield benchmark never has to pay for</a:t>
+              <a:t>The battery curve you choose moves the median 4%; the battery share and the construction index move it more</a:t>
             </a:r>
           </a:p>
         </p:txBody>
@@ -14605,6 +15379,2879 @@
                 <a:latin typeface="Calibri"/>
               </a:rPr>
               <a:t>15</a:t>
+            </a:r>
+          </a:p>
+        </p:txBody>
+      </p:sp>
+      <p:graphicFrame>
+        <p:nvGraphicFramePr>
+          <p:cNvPr id="7" name="Chart 6"/>
+          <p:cNvGraphicFramePr>
+            <a:graphicFrameLocks noGrp="1"/>
+          </p:cNvGraphicFramePr>
+          <p:nvPr/>
+        </p:nvGraphicFramePr>
+        <p:xfrm>
+          <a:off x="457200" y="1371600"/>
+          <a:ext cx="6949440" cy="3291840"/>
+        </p:xfrm>
+        <a:graphic>
+          <a:graphicData uri="http://schemas.openxmlformats.org/drawingml/2006/chart">
+            <c:chart xmlns:c="http://schemas.openxmlformats.org/drawingml/2006/chart" r:id="rId2"/>
+          </a:graphicData>
+        </a:graphic>
+      </p:graphicFrame>
+      <p:sp>
+        <p:nvSpPr>
+          <p:cNvPr id="8" name="TextBox 7"/>
+          <p:cNvSpPr txBox="1"/>
+          <p:nvPr/>
+        </p:nvSpPr>
+        <p:spPr>
+          <a:xfrm>
+            <a:off x="548640" y="4709160"/>
+            <a:ext cx="6858000" cy="320040"/>
+          </a:xfrm>
+          <a:prstGeom prst="rect">
+            <a:avLst/>
+          </a:prstGeom>
+          <a:noFill/>
+        </p:spPr>
+        <p:txBody>
+          <a:bodyPr wrap="square" lIns="45720" rIns="45720" tIns="27432" bIns="27432" anchor="t">
+            <a:spAutoFit/>
+          </a:bodyPr>
+          <a:lstStyle/>
+          <a:p>
+            <a:pPr algn="l">
+              <a:lnSpc>
+                <a:spcPct val="105000"/>
+              </a:lnSpc>
+              <a:spcAft>
+                <a:spcPts val="400"/>
+              </a:spcAft>
+            </a:pPr>
+            <a:r>
+              <a:rPr sz="1050" b="0" i="0">
+                <a:solidFill>
+                  <a:srgbClr val="6B7280"/>
+                </a:solidFill>
+                <a:latin typeface="Calibri"/>
+              </a:rPr>
+              <a:t>Nominal median $771. Hyde Park station complete, direct, is $1,483/kWh; its percentile under each index is at right. Deflating whole projects at the battery rate gives $524 to $620.</a:t>
+            </a:r>
+          </a:p>
+        </p:txBody>
+      </p:sp>
+      <p:graphicFrame>
+        <p:nvGraphicFramePr>
+          <p:cNvPr id="9" name="Table 8"/>
+          <p:cNvGraphicFramePr>
+            <a:graphicFrameLocks noGrp="1"/>
+          </p:cNvGraphicFramePr>
+          <p:nvPr/>
+        </p:nvGraphicFramePr>
+        <p:xfrm>
+          <a:off x="7635240" y="1371600"/>
+          <a:ext cx="4069080" cy="2651760"/>
+        </p:xfrm>
+        <a:graphic>
+          <a:graphicData uri="http://schemas.openxmlformats.org/drawingml/2006/table">
+            <a:tbl>
+              <a:tblPr firstRow="1" bandRow="1">
+                <a:tableStyleId>{5C22544A-7EE6-4342-B048-85BDC9FD1C3A}</a:tableStyleId>
+              </a:tblPr>
+              <a:tblGrid>
+                <a:gridCol w="1325880"/>
+                <a:gridCol w="868680"/>
+                <a:gridCol w="1188720"/>
+                <a:gridCol w="685800"/>
+              </a:tblGrid>
+              <a:tr h="378822">
+                <a:tc>
+                  <a:txBody>
+                    <a:bodyPr/>
+                    <a:lstStyle/>
+                    <a:p>
+                      <a:r>
+                        <a:rPr sz="950" b="1">
+                          <a:solidFill>
+                            <a:srgbClr val="FFFFFF"/>
+                          </a:solidFill>
+                          <a:latin typeface="Calibri"/>
+                        </a:rPr>
+                        <a:t>Index</a:t>
+                      </a:r>
+                    </a:p>
+                  </a:txBody>
+                  <a:tcPr marL="54864" marR="54864" marT="27432" marB="27432">
+                    <a:solidFill>
+                      <a:srgbClr val="001E60"/>
+                    </a:solidFill>
+                  </a:tcPr>
+                </a:tc>
+                <a:tc>
+                  <a:txBody>
+                    <a:bodyPr/>
+                    <a:lstStyle/>
+                    <a:p>
+                      <a:pPr algn="r"/>
+                      <a:r>
+                        <a:rPr sz="950" b="1">
+                          <a:solidFill>
+                            <a:srgbClr val="FFFFFF"/>
+                          </a:solidFill>
+                          <a:latin typeface="Calibri"/>
+                        </a:rPr>
+                        <a:t>2018 to 2026</a:t>
+                      </a:r>
+                    </a:p>
+                  </a:txBody>
+                  <a:tcPr marL="54864" marR="54864" marT="27432" marB="27432">
+                    <a:solidFill>
+                      <a:srgbClr val="001E60"/>
+                    </a:solidFill>
+                  </a:tcPr>
+                </a:tc>
+                <a:tc>
+                  <a:txBody>
+                    <a:bodyPr/>
+                    <a:lstStyle/>
+                    <a:p>
+                      <a:pPr algn="r"/>
+                      <a:r>
+                        <a:rPr sz="950" b="1">
+                          <a:solidFill>
+                            <a:srgbClr val="FFFFFF"/>
+                          </a:solidFill>
+                          <a:latin typeface="Calibri"/>
+                        </a:rPr>
+                        <a:t>Net factor, 2018 project, 40% share</a:t>
+                      </a:r>
+                    </a:p>
+                  </a:txBody>
+                  <a:tcPr marL="54864" marR="54864" marT="27432" marB="27432">
+                    <a:solidFill>
+                      <a:srgbClr val="001E60"/>
+                    </a:solidFill>
+                  </a:tcPr>
+                </a:tc>
+                <a:tc>
+                  <a:txBody>
+                    <a:bodyPr/>
+                    <a:lstStyle/>
+                    <a:p>
+                      <a:pPr algn="r"/>
+                      <a:r>
+                        <a:rPr sz="950" b="1">
+                          <a:solidFill>
+                            <a:srgbClr val="FFFFFF"/>
+                          </a:solidFill>
+                          <a:latin typeface="Calibri"/>
+                        </a:rPr>
+                        <a:t>HP station pct</a:t>
+                      </a:r>
+                    </a:p>
+                  </a:txBody>
+                  <a:tcPr marL="54864" marR="54864" marT="27432" marB="27432">
+                    <a:solidFill>
+                      <a:srgbClr val="001E60"/>
+                    </a:solidFill>
+                  </a:tcPr>
+                </a:tc>
+              </a:tr>
+              <a:tr h="378822">
+                <a:tc>
+                  <a:txBody>
+                    <a:bodyPr/>
+                    <a:lstStyle/>
+                    <a:p>
+                      <a:r>
+                        <a:rPr sz="950" b="0">
+                          <a:solidFill>
+                            <a:srgbClr val="1F2A44"/>
+                          </a:solidFill>
+                          <a:latin typeface="Calibri"/>
+                        </a:rPr>
+                        <a:t>Installed all-in</a:t>
+                      </a:r>
+                    </a:p>
+                  </a:txBody>
+                  <a:tcPr marL="54864" marR="54864" marT="27432" marB="27432" anchor="ctr">
+                    <a:solidFill>
+                      <a:srgbClr val="FFFFFF"/>
+                    </a:solidFill>
+                  </a:tcPr>
+                </a:tc>
+                <a:tc>
+                  <a:txBody>
+                    <a:bodyPr/>
+                    <a:lstStyle/>
+                    <a:p>
+                      <a:pPr algn="r"/>
+                      <a:r>
+                        <a:rPr sz="950" b="0">
+                          <a:solidFill>
+                            <a:srgbClr val="1F2A44"/>
+                          </a:solidFill>
+                          <a:latin typeface="Calibri"/>
+                        </a:rPr>
+                        <a:t>0.73x</a:t>
+                      </a:r>
+                    </a:p>
+                  </a:txBody>
+                  <a:tcPr marL="54864" marR="54864" marT="27432" marB="27432" anchor="ctr">
+                    <a:solidFill>
+                      <a:srgbClr val="FFFFFF"/>
+                    </a:solidFill>
+                  </a:tcPr>
+                </a:tc>
+                <a:tc>
+                  <a:txBody>
+                    <a:bodyPr/>
+                    <a:lstStyle/>
+                    <a:p>
+                      <a:pPr algn="r"/>
+                      <a:r>
+                        <a:rPr sz="950" b="0">
+                          <a:solidFill>
+                            <a:srgbClr val="1F2A44"/>
+                          </a:solidFill>
+                          <a:latin typeface="Calibri"/>
+                        </a:rPr>
+                        <a:t>1.19x</a:t>
+                      </a:r>
+                    </a:p>
+                  </a:txBody>
+                  <a:tcPr marL="54864" marR="54864" marT="27432" marB="27432" anchor="ctr">
+                    <a:solidFill>
+                      <a:srgbClr val="FFFFFF"/>
+                    </a:solidFill>
+                  </a:tcPr>
+                </a:tc>
+                <a:tc>
+                  <a:txBody>
+                    <a:bodyPr/>
+                    <a:lstStyle/>
+                    <a:p>
+                      <a:pPr algn="r"/>
+                      <a:r>
+                        <a:rPr sz="950" b="0">
+                          <a:solidFill>
+                            <a:srgbClr val="1F2A44"/>
+                          </a:solidFill>
+                          <a:latin typeface="Calibri"/>
+                        </a:rPr>
+                        <a:t>85%</a:t>
+                      </a:r>
+                    </a:p>
+                  </a:txBody>
+                  <a:tcPr marL="54864" marR="54864" marT="27432" marB="27432" anchor="ctr">
+                    <a:solidFill>
+                      <a:srgbClr val="FFFFFF"/>
+                    </a:solidFill>
+                  </a:tcPr>
+                </a:tc>
+              </a:tr>
+              <a:tr h="378822">
+                <a:tc>
+                  <a:txBody>
+                    <a:bodyPr/>
+                    <a:lstStyle/>
+                    <a:p>
+                      <a:r>
+                        <a:rPr sz="950" b="0">
+                          <a:solidFill>
+                            <a:srgbClr val="1F2A44"/>
+                          </a:solidFill>
+                          <a:latin typeface="Calibri"/>
+                        </a:rPr>
+                        <a:t>BNEF pack</a:t>
+                      </a:r>
+                    </a:p>
+                  </a:txBody>
+                  <a:tcPr marL="54864" marR="54864" marT="27432" marB="27432" anchor="ctr">
+                    <a:solidFill>
+                      <a:srgbClr val="F2F4F8"/>
+                    </a:solidFill>
+                  </a:tcPr>
+                </a:tc>
+                <a:tc>
+                  <a:txBody>
+                    <a:bodyPr/>
+                    <a:lstStyle/>
+                    <a:p>
+                      <a:pPr algn="r"/>
+                      <a:r>
+                        <a:rPr sz="950" b="0">
+                          <a:solidFill>
+                            <a:srgbClr val="1F2A44"/>
+                          </a:solidFill>
+                          <a:latin typeface="Calibri"/>
+                        </a:rPr>
+                        <a:t>0.61x</a:t>
+                      </a:r>
+                    </a:p>
+                  </a:txBody>
+                  <a:tcPr marL="54864" marR="54864" marT="27432" marB="27432" anchor="ctr">
+                    <a:solidFill>
+                      <a:srgbClr val="F2F4F8"/>
+                    </a:solidFill>
+                  </a:tcPr>
+                </a:tc>
+                <a:tc>
+                  <a:txBody>
+                    <a:bodyPr/>
+                    <a:lstStyle/>
+                    <a:p>
+                      <a:pPr algn="r"/>
+                      <a:r>
+                        <a:rPr sz="950" b="0">
+                          <a:solidFill>
+                            <a:srgbClr val="1F2A44"/>
+                          </a:solidFill>
+                          <a:latin typeface="Calibri"/>
+                        </a:rPr>
+                        <a:t>1.14x</a:t>
+                      </a:r>
+                    </a:p>
+                  </a:txBody>
+                  <a:tcPr marL="54864" marR="54864" marT="27432" marB="27432" anchor="ctr">
+                    <a:solidFill>
+                      <a:srgbClr val="F2F4F8"/>
+                    </a:solidFill>
+                  </a:tcPr>
+                </a:tc>
+                <a:tc>
+                  <a:txBody>
+                    <a:bodyPr/>
+                    <a:lstStyle/>
+                    <a:p>
+                      <a:pPr algn="r"/>
+                      <a:r>
+                        <a:rPr sz="950" b="0">
+                          <a:solidFill>
+                            <a:srgbClr val="1F2A44"/>
+                          </a:solidFill>
+                          <a:latin typeface="Calibri"/>
+                        </a:rPr>
+                        <a:t>87%</a:t>
+                      </a:r>
+                    </a:p>
+                  </a:txBody>
+                  <a:tcPr marL="54864" marR="54864" marT="27432" marB="27432" anchor="ctr">
+                    <a:solidFill>
+                      <a:srgbClr val="F2F4F8"/>
+                    </a:solidFill>
+                  </a:tcPr>
+                </a:tc>
+              </a:tr>
+              <a:tr h="378822">
+                <a:tc>
+                  <a:txBody>
+                    <a:bodyPr/>
+                    <a:lstStyle/>
+                    <a:p>
+                      <a:r>
+                        <a:rPr sz="950" b="0">
+                          <a:solidFill>
+                            <a:srgbClr val="1F2A44"/>
+                          </a:solidFill>
+                          <a:latin typeface="Calibri"/>
+                        </a:rPr>
+                        <a:t>BNEF turnkey</a:t>
+                      </a:r>
+                    </a:p>
+                  </a:txBody>
+                  <a:tcPr marL="54864" marR="54864" marT="27432" marB="27432" anchor="ctr">
+                    <a:solidFill>
+                      <a:srgbClr val="FFFFFF"/>
+                    </a:solidFill>
+                  </a:tcPr>
+                </a:tc>
+                <a:tc>
+                  <a:txBody>
+                    <a:bodyPr/>
+                    <a:lstStyle/>
+                    <a:p>
+                      <a:pPr algn="r"/>
+                      <a:r>
+                        <a:rPr sz="950" b="0">
+                          <a:solidFill>
+                            <a:srgbClr val="1F2A44"/>
+                          </a:solidFill>
+                          <a:latin typeface="Calibri"/>
+                        </a:rPr>
+                        <a:t>0.49x</a:t>
+                      </a:r>
+                    </a:p>
+                  </a:txBody>
+                  <a:tcPr marL="54864" marR="54864" marT="27432" marB="27432" anchor="ctr">
+                    <a:solidFill>
+                      <a:srgbClr val="FFFFFF"/>
+                    </a:solidFill>
+                  </a:tcPr>
+                </a:tc>
+                <a:tc>
+                  <a:txBody>
+                    <a:bodyPr/>
+                    <a:lstStyle/>
+                    <a:p>
+                      <a:pPr algn="r"/>
+                      <a:r>
+                        <a:rPr sz="950" b="0">
+                          <a:solidFill>
+                            <a:srgbClr val="1F2A44"/>
+                          </a:solidFill>
+                          <a:latin typeface="Calibri"/>
+                        </a:rPr>
+                        <a:t>1.09x</a:t>
+                      </a:r>
+                    </a:p>
+                  </a:txBody>
+                  <a:tcPr marL="54864" marR="54864" marT="27432" marB="27432" anchor="ctr">
+                    <a:solidFill>
+                      <a:srgbClr val="FFFFFF"/>
+                    </a:solidFill>
+                  </a:tcPr>
+                </a:tc>
+                <a:tc>
+                  <a:txBody>
+                    <a:bodyPr/>
+                    <a:lstStyle/>
+                    <a:p>
+                      <a:pPr algn="r"/>
+                      <a:r>
+                        <a:rPr sz="950" b="0">
+                          <a:solidFill>
+                            <a:srgbClr val="1F2A44"/>
+                          </a:solidFill>
+                          <a:latin typeface="Calibri"/>
+                        </a:rPr>
+                        <a:t>89%</a:t>
+                      </a:r>
+                    </a:p>
+                  </a:txBody>
+                  <a:tcPr marL="54864" marR="54864" marT="27432" marB="27432" anchor="ctr">
+                    <a:solidFill>
+                      <a:srgbClr val="FFFFFF"/>
+                    </a:solidFill>
+                  </a:tcPr>
+                </a:tc>
+              </a:tr>
+              <a:tr h="378822">
+                <a:tc>
+                  <a:txBody>
+                    <a:bodyPr/>
+                    <a:lstStyle/>
+                    <a:p>
+                      <a:r>
+                        <a:rPr sz="950" b="0">
+                          <a:solidFill>
+                            <a:srgbClr val="1F2A44"/>
+                          </a:solidFill>
+                          <a:latin typeface="Calibri"/>
+                        </a:rPr>
+                        <a:t>NREL base year</a:t>
+                      </a:r>
+                    </a:p>
+                  </a:txBody>
+                  <a:tcPr marL="54864" marR="54864" marT="27432" marB="27432" anchor="ctr">
+                    <a:solidFill>
+                      <a:srgbClr val="F2F4F8"/>
+                    </a:solidFill>
+                  </a:tcPr>
+                </a:tc>
+                <a:tc>
+                  <a:txBody>
+                    <a:bodyPr/>
+                    <a:lstStyle/>
+                    <a:p>
+                      <a:pPr algn="r"/>
+                      <a:r>
+                        <a:rPr sz="950" b="0">
+                          <a:solidFill>
+                            <a:srgbClr val="1F2A44"/>
+                          </a:solidFill>
+                          <a:latin typeface="Calibri"/>
+                        </a:rPr>
+                        <a:t>0.69x</a:t>
+                      </a:r>
+                    </a:p>
+                  </a:txBody>
+                  <a:tcPr marL="54864" marR="54864" marT="27432" marB="27432" anchor="ctr">
+                    <a:solidFill>
+                      <a:srgbClr val="F2F4F8"/>
+                    </a:solidFill>
+                  </a:tcPr>
+                </a:tc>
+                <a:tc>
+                  <a:txBody>
+                    <a:bodyPr/>
+                    <a:lstStyle/>
+                    <a:p>
+                      <a:pPr algn="r"/>
+                      <a:r>
+                        <a:rPr sz="950" b="0">
+                          <a:solidFill>
+                            <a:srgbClr val="1F2A44"/>
+                          </a:solidFill>
+                          <a:latin typeface="Calibri"/>
+                        </a:rPr>
+                        <a:t>1.17x</a:t>
+                      </a:r>
+                    </a:p>
+                  </a:txBody>
+                  <a:tcPr marL="54864" marR="54864" marT="27432" marB="27432" anchor="ctr">
+                    <a:solidFill>
+                      <a:srgbClr val="F2F4F8"/>
+                    </a:solidFill>
+                  </a:tcPr>
+                </a:tc>
+                <a:tc>
+                  <a:txBody>
+                    <a:bodyPr/>
+                    <a:lstStyle/>
+                    <a:p>
+                      <a:pPr algn="r"/>
+                      <a:r>
+                        <a:rPr sz="950" b="0">
+                          <a:solidFill>
+                            <a:srgbClr val="1F2A44"/>
+                          </a:solidFill>
+                          <a:latin typeface="Calibri"/>
+                        </a:rPr>
+                        <a:t>84%</a:t>
+                      </a:r>
+                    </a:p>
+                  </a:txBody>
+                  <a:tcPr marL="54864" marR="54864" marT="27432" marB="27432" anchor="ctr">
+                    <a:solidFill>
+                      <a:srgbClr val="F2F4F8"/>
+                    </a:solidFill>
+                  </a:tcPr>
+                </a:tc>
+              </a:tr>
+              <a:tr h="378822">
+                <a:tc>
+                  <a:txBody>
+                    <a:bodyPr/>
+                    <a:lstStyle/>
+                    <a:p>
+                      <a:r>
+                        <a:rPr sz="950" b="0">
+                          <a:solidFill>
+                            <a:srgbClr val="1F2A44"/>
+                          </a:solidFill>
+                          <a:latin typeface="Calibri"/>
+                        </a:rPr>
+                        <a:t>Lazard LCOS</a:t>
+                      </a:r>
+                    </a:p>
+                  </a:txBody>
+                  <a:tcPr marL="54864" marR="54864" marT="27432" marB="27432" anchor="ctr">
+                    <a:solidFill>
+                      <a:srgbClr val="FFFFFF"/>
+                    </a:solidFill>
+                  </a:tcPr>
+                </a:tc>
+                <a:tc>
+                  <a:txBody>
+                    <a:bodyPr/>
+                    <a:lstStyle/>
+                    <a:p>
+                      <a:pPr algn="r"/>
+                      <a:r>
+                        <a:rPr sz="950" b="0">
+                          <a:solidFill>
+                            <a:srgbClr val="1F2A44"/>
+                          </a:solidFill>
+                          <a:latin typeface="Calibri"/>
+                        </a:rPr>
+                        <a:t>1.03x</a:t>
+                      </a:r>
+                    </a:p>
+                  </a:txBody>
+                  <a:tcPr marL="54864" marR="54864" marT="27432" marB="27432" anchor="ctr">
+                    <a:solidFill>
+                      <a:srgbClr val="FFFFFF"/>
+                    </a:solidFill>
+                  </a:tcPr>
+                </a:tc>
+                <a:tc>
+                  <a:txBody>
+                    <a:bodyPr/>
+                    <a:lstStyle/>
+                    <a:p>
+                      <a:pPr algn="r"/>
+                      <a:r>
+                        <a:rPr sz="950" b="0">
+                          <a:solidFill>
+                            <a:srgbClr val="1F2A44"/>
+                          </a:solidFill>
+                          <a:latin typeface="Calibri"/>
+                        </a:rPr>
+                        <a:t>1.31x</a:t>
+                      </a:r>
+                    </a:p>
+                  </a:txBody>
+                  <a:tcPr marL="54864" marR="54864" marT="27432" marB="27432" anchor="ctr">
+                    <a:solidFill>
+                      <a:srgbClr val="FFFFFF"/>
+                    </a:solidFill>
+                  </a:tcPr>
+                </a:tc>
+                <a:tc>
+                  <a:txBody>
+                    <a:bodyPr/>
+                    <a:lstStyle/>
+                    <a:p>
+                      <a:pPr algn="r"/>
+                      <a:r>
+                        <a:rPr sz="950" b="0">
+                          <a:solidFill>
+                            <a:srgbClr val="1F2A44"/>
+                          </a:solidFill>
+                          <a:latin typeface="Calibri"/>
+                        </a:rPr>
+                        <a:t>76%</a:t>
+                      </a:r>
+                    </a:p>
+                  </a:txBody>
+                  <a:tcPr marL="54864" marR="54864" marT="27432" marB="27432" anchor="ctr">
+                    <a:solidFill>
+                      <a:srgbClr val="FFFFFF"/>
+                    </a:solidFill>
+                  </a:tcPr>
+                </a:tc>
+              </a:tr>
+              <a:tr h="378828">
+                <a:tc>
+                  <a:txBody>
+                    <a:bodyPr/>
+                    <a:lstStyle/>
+                    <a:p>
+                      <a:r>
+                        <a:rPr sz="950" b="0">
+                          <a:solidFill>
+                            <a:srgbClr val="1F2A44"/>
+                          </a:solidFill>
+                          <a:latin typeface="Calibri"/>
+                        </a:rPr>
+                        <a:t>Construction only</a:t>
+                      </a:r>
+                    </a:p>
+                  </a:txBody>
+                  <a:tcPr marL="54864" marR="54864" marT="27432" marB="27432" anchor="ctr">
+                    <a:solidFill>
+                      <a:srgbClr val="F2F4F8"/>
+                    </a:solidFill>
+                  </a:tcPr>
+                </a:tc>
+                <a:tc>
+                  <a:txBody>
+                    <a:bodyPr/>
+                    <a:lstStyle/>
+                    <a:p>
+                      <a:pPr algn="r"/>
+                      <a:r>
+                        <a:rPr sz="950" b="0">
+                          <a:solidFill>
+                            <a:srgbClr val="1F2A44"/>
+                          </a:solidFill>
+                          <a:latin typeface="Calibri"/>
+                        </a:rPr>
+                        <a:t>1.49x</a:t>
+                      </a:r>
+                    </a:p>
+                  </a:txBody>
+                  <a:tcPr marL="54864" marR="54864" marT="27432" marB="27432" anchor="ctr">
+                    <a:solidFill>
+                      <a:srgbClr val="F2F4F8"/>
+                    </a:solidFill>
+                  </a:tcPr>
+                </a:tc>
+                <a:tc>
+                  <a:txBody>
+                    <a:bodyPr/>
+                    <a:lstStyle/>
+                    <a:p>
+                      <a:pPr algn="r"/>
+                      <a:r>
+                        <a:rPr sz="950" b="0">
+                          <a:solidFill>
+                            <a:srgbClr val="1F2A44"/>
+                          </a:solidFill>
+                          <a:latin typeface="Calibri"/>
+                        </a:rPr>
+                        <a:t>1.49x</a:t>
+                      </a:r>
+                    </a:p>
+                  </a:txBody>
+                  <a:tcPr marL="54864" marR="54864" marT="27432" marB="27432" anchor="ctr">
+                    <a:solidFill>
+                      <a:srgbClr val="F2F4F8"/>
+                    </a:solidFill>
+                  </a:tcPr>
+                </a:tc>
+                <a:tc>
+                  <a:txBody>
+                    <a:bodyPr/>
+                    <a:lstStyle/>
+                    <a:p>
+                      <a:pPr algn="r"/>
+                      <a:r>
+                        <a:rPr sz="950" b="0">
+                          <a:solidFill>
+                            <a:srgbClr val="1F2A44"/>
+                          </a:solidFill>
+                          <a:latin typeface="Calibri"/>
+                        </a:rPr>
+                        <a:t>75%</a:t>
+                      </a:r>
+                    </a:p>
+                  </a:txBody>
+                  <a:tcPr marL="54864" marR="54864" marT="27432" marB="27432" anchor="ctr">
+                    <a:solidFill>
+                      <a:srgbClr val="F2F4F8"/>
+                    </a:solidFill>
+                  </a:tcPr>
+                </a:tc>
+              </a:tr>
+            </a:tbl>
+          </a:graphicData>
+        </a:graphic>
+      </p:graphicFrame>
+      <p:sp>
+        <p:nvSpPr>
+          <p:cNvPr id="10" name="TextBox 9"/>
+          <p:cNvSpPr txBox="1"/>
+          <p:nvPr/>
+        </p:nvSpPr>
+        <p:spPr>
+          <a:xfrm>
+            <a:off x="7635240" y="4160520"/>
+            <a:ext cx="4069080" cy="2194560"/>
+          </a:xfrm>
+          <a:prstGeom prst="rect">
+            <a:avLst/>
+          </a:prstGeom>
+          <a:noFill/>
+        </p:spPr>
+        <p:txBody>
+          <a:bodyPr wrap="square" lIns="45720">
+            <a:spAutoFit/>
+          </a:bodyPr>
+          <a:lstStyle/>
+          <a:p>
+            <a:pPr>
+              <a:lnSpc>
+                <a:spcPct val="105000"/>
+              </a:lnSpc>
+              <a:spcAft>
+                <a:spcPts val="400"/>
+              </a:spcAft>
+            </a:pPr>
+            <a:r>
+              <a:rPr sz="1000">
+                <a:solidFill>
+                  <a:srgbClr val="FFC72C"/>
+                </a:solidFill>
+                <a:latin typeface="Calibri"/>
+              </a:rPr>
+              <a:t>▪  </a:t>
+            </a:r>
+            <a:r>
+              <a:rPr b="1" sz="1000">
+                <a:solidFill>
+                  <a:srgbClr val="1F2A44"/>
+                </a:solidFill>
+                <a:latin typeface="Calibri"/>
+              </a:rPr>
+              <a:t>Choice of battery curve: </a:t>
+            </a:r>
+            <a:r>
+              <a:rPr sz="1000">
+                <a:solidFill>
+                  <a:srgbClr val="1F2A44"/>
+                </a:solidFill>
+                <a:latin typeface="Calibri"/>
+              </a:rPr>
+              <a:t>medians $806 to $838 across the four battery series (LCOS $903). The curves disagree about packs, not about projects.</a:t>
+            </a:r>
+          </a:p>
+          <a:p>
+            <a:pPr>
+              <a:lnSpc>
+                <a:spcPct val="105000"/>
+              </a:lnSpc>
+              <a:spcAft>
+                <a:spcPts val="400"/>
+              </a:spcAft>
+            </a:pPr>
+            <a:r>
+              <a:rPr sz="1000">
+                <a:solidFill>
+                  <a:srgbClr val="FFC72C"/>
+                </a:solidFill>
+                <a:latin typeface="Calibri"/>
+              </a:rPr>
+              <a:t>▪  </a:t>
+            </a:r>
+            <a:r>
+              <a:rPr b="1" sz="1000">
+                <a:solidFill>
+                  <a:srgbClr val="1F2A44"/>
+                </a:solidFill>
+                <a:latin typeface="Calibri"/>
+              </a:rPr>
+              <a:t>Battery share: </a:t>
+            </a:r>
+            <a:r>
+              <a:rPr sz="1000">
+                <a:solidFill>
+                  <a:srgbClr val="1F2A44"/>
+                </a:solidFill>
+                <a:latin typeface="Calibri"/>
+              </a:rPr>
+              <a:t>30% to 50% moves the median $11 to $86 depending on the curve; the share is a lever of the same order as the curve.</a:t>
+            </a:r>
+          </a:p>
+          <a:p>
+            <a:pPr>
+              <a:lnSpc>
+                <a:spcPct val="105000"/>
+              </a:lnSpc>
+              <a:spcAft>
+                <a:spcPts val="400"/>
+              </a:spcAft>
+            </a:pPr>
+            <a:r>
+              <a:rPr sz="1000">
+                <a:solidFill>
+                  <a:srgbClr val="FFC72C"/>
+                </a:solidFill>
+                <a:latin typeface="Calibri"/>
+              </a:rPr>
+              <a:t>▪  </a:t>
+            </a:r>
+            <a:r>
+              <a:rPr b="1" sz="1000">
+                <a:solidFill>
+                  <a:srgbClr val="1F2A44"/>
+                </a:solidFill>
+                <a:latin typeface="Calibri"/>
+              </a:rPr>
+              <a:t>Construction index: </a:t>
+            </a:r>
+            <a:r>
+              <a:rPr sz="1000">
+                <a:solidFill>
+                  <a:srgbClr val="1F2A44"/>
+                </a:solidFill>
+                <a:latin typeface="Calibri"/>
+              </a:rPr>
+              <a:t>Handy-Whitman North Atlantic rose 49% from 2018 to 2026 (10% a year in 2021-22); a flat 3.5% proxy gives 32%, and a median $816 instead of $832.</a:t>
+            </a:r>
+          </a:p>
+          <a:p>
+            <a:pPr>
+              <a:lnSpc>
+                <a:spcPct val="105000"/>
+              </a:lnSpc>
+              <a:spcAft>
+                <a:spcPts val="400"/>
+              </a:spcAft>
+            </a:pPr>
+            <a:r>
+              <a:rPr sz="1000">
+                <a:solidFill>
+                  <a:srgbClr val="FFC72C"/>
+                </a:solidFill>
+                <a:latin typeface="Calibri"/>
+              </a:rPr>
+              <a:t>▪  </a:t>
+            </a:r>
+            <a:r>
+              <a:rPr b="1" sz="1000">
+                <a:solidFill>
+                  <a:srgbClr val="1F2A44"/>
+                </a:solidFill>
+                <a:latin typeface="Calibri"/>
+              </a:rPr>
+              <a:t>LCOS </a:t>
+            </a:r>
+            <a:r>
+              <a:rPr sz="1000">
+                <a:solidFill>
+                  <a:srgbClr val="1F2A44"/>
+                </a:solidFill>
+                <a:latin typeface="Calibri"/>
+              </a:rPr>
+              <a:t>is a levelized $/MWh metric, flat since 2019; using it re-bases nothing on the battery side.</a:t>
+            </a:r>
+          </a:p>
+        </p:txBody>
+      </p:sp>
+      <p:sp>
+        <p:nvSpPr>
+          <p:cNvPr id="11" name="TextBox 10"/>
+          <p:cNvSpPr txBox="1"/>
+          <p:nvPr/>
+        </p:nvSpPr>
+        <p:spPr>
+          <a:xfrm>
+            <a:off x="548640" y="5074920"/>
+            <a:ext cx="6858000" cy="1188720"/>
+          </a:xfrm>
+          <a:prstGeom prst="rect">
+            <a:avLst/>
+          </a:prstGeom>
+          <a:noFill/>
+        </p:spPr>
+        <p:txBody>
+          <a:bodyPr wrap="square" lIns="45720" rIns="45720" tIns="27432" bIns="27432" anchor="t">
+            <a:spAutoFit/>
+          </a:bodyPr>
+          <a:lstStyle/>
+          <a:p>
+            <a:pPr algn="l">
+              <a:lnSpc>
+                <a:spcPct val="105000"/>
+              </a:lnSpc>
+              <a:spcAft>
+                <a:spcPts val="400"/>
+              </a:spcAft>
+            </a:pPr>
+            <a:r>
+              <a:rPr sz="950" b="0" i="0">
+                <a:solidFill>
+                  <a:srgbClr val="6B7280"/>
+                </a:solidFill>
+                <a:latin typeface="Calibri"/>
+              </a:rPr>
+              <a:t>Indices as published (BNEF pack and ESS surveys 2014-2025; EIA-860 2015-18 and LBNL 2024; NREL 2022 and 2024 base years; Lazard LCOS v5.0-2026 midpoints; Handy-Whitman via PJM), linearly interpolated between published points and held flat outside them. Retrieved from search excerpts; verify before external use.</a:t>
+            </a:r>
+          </a:p>
+        </p:txBody>
+      </p:sp>
+    </p:spTree>
+  </p:cSld>
+  <p:clrMapOvr>
+    <a:masterClrMapping/>
+  </p:clrMapOvr>
+</p:sld>
+</file>
+
+<file path=ppt/slides/slide16.xml><?xml version="1.0" encoding="utf-8"?>
+<p:sld xmlns:a="http://schemas.openxmlformats.org/drawingml/2006/main" xmlns:p="http://schemas.openxmlformats.org/presentationml/2006/main" xmlns:r="http://schemas.openxmlformats.org/officeDocument/2006/relationships">
+  <p:cSld>
+    <p:spTree>
+      <p:nvGrpSpPr>
+        <p:cNvPr id="1" name=""/>
+        <p:cNvGrpSpPr/>
+        <p:nvPr/>
+      </p:nvGrpSpPr>
+      <p:grpSpPr/>
+      <p:sp>
+        <p:nvSpPr>
+          <p:cNvPr id="2" name="Rectangle 1"/>
+          <p:cNvSpPr/>
+          <p:nvPr/>
+        </p:nvSpPr>
+        <p:spPr>
+          <a:xfrm>
+            <a:off x="0" y="0"/>
+            <a:ext cx="12191695" cy="6858000"/>
+          </a:xfrm>
+          <a:prstGeom prst="rect">
+            <a:avLst/>
+          </a:prstGeom>
+          <a:solidFill>
+            <a:srgbClr val="FFFFFF"/>
+          </a:solidFill>
+          <a:ln>
+            <a:noFill/>
+          </a:ln>
+          <a:effectLst/>
+        </p:spPr>
+        <p:style>
+          <a:lnRef idx="1">
+            <a:schemeClr val="accent1"/>
+          </a:lnRef>
+          <a:fillRef idx="3">
+            <a:schemeClr val="accent1"/>
+          </a:fillRef>
+          <a:effectRef idx="2">
+            <a:schemeClr val="accent1"/>
+          </a:effectRef>
+          <a:fontRef idx="minor">
+            <a:schemeClr val="lt1"/>
+          </a:fontRef>
+        </p:style>
+        <p:txBody>
+          <a:bodyPr rtlCol="0" anchor="ctr"/>
+          <a:lstStyle/>
+          <a:p>
+            <a:pPr algn="ctr"/>
+          </a:p>
+        </p:txBody>
+      </p:sp>
+      <p:sp>
+        <p:nvSpPr>
+          <p:cNvPr id="3" name="TextBox 2"/>
+          <p:cNvSpPr txBox="1"/>
+          <p:nvPr/>
+        </p:nvSpPr>
+        <p:spPr>
+          <a:xfrm>
+            <a:off x="548640" y="256032"/>
+            <a:ext cx="11064240" cy="274320"/>
+          </a:xfrm>
+          <a:prstGeom prst="rect">
+            <a:avLst/>
+          </a:prstGeom>
+          <a:noFill/>
+        </p:spPr>
+        <p:txBody>
+          <a:bodyPr wrap="square" lIns="45720" rIns="45720" tIns="27432" bIns="27432" anchor="t">
+            <a:spAutoFit/>
+          </a:bodyPr>
+          <a:lstStyle/>
+          <a:p>
+            <a:pPr algn="l">
+              <a:lnSpc>
+                <a:spcPct val="105000"/>
+              </a:lnSpc>
+              <a:spcAft>
+                <a:spcPts val="400"/>
+              </a:spcAft>
+            </a:pPr>
+            <a:r>
+              <a:rPr sz="1100" b="1" i="0">
+                <a:solidFill>
+                  <a:srgbClr val="6E1F2E"/>
+                </a:solidFill>
+                <a:latin typeface="Calibri"/>
+              </a:rPr>
+              <a:t>1 · WHERE THE MONEY SITS   |   HOW THE COMPARISON CHANGES UNDER EACH CURVE, 2026$ (55-PROJECT CLASS; 31 UTILITY-OWNED)</a:t>
+            </a:r>
+          </a:p>
+        </p:txBody>
+      </p:sp>
+      <p:sp>
+        <p:nvSpPr>
+          <p:cNvPr id="4" name="TextBox 3"/>
+          <p:cNvSpPr txBox="1"/>
+          <p:nvPr/>
+        </p:nvSpPr>
+        <p:spPr>
+          <a:xfrm>
+            <a:off x="548640" y="475488"/>
+            <a:ext cx="11064240" cy="868680"/>
+          </a:xfrm>
+          <a:prstGeom prst="rect">
+            <a:avLst/>
+          </a:prstGeom>
+          <a:noFill/>
+        </p:spPr>
+        <p:txBody>
+          <a:bodyPr wrap="square" lIns="45720" rIns="45720" tIns="27432" bIns="27432" anchor="t">
+            <a:spAutoFit/>
+          </a:bodyPr>
+          <a:lstStyle/>
+          <a:p>
+            <a:pPr algn="l">
+              <a:lnSpc>
+                <a:spcPct val="100000"/>
+              </a:lnSpc>
+              <a:spcAft>
+                <a:spcPts val="400"/>
+              </a:spcAft>
+            </a:pPr>
+            <a:r>
+              <a:rPr sz="2300" b="1" i="0">
+                <a:solidFill>
+                  <a:srgbClr val="001E60"/>
+                </a:solidFill>
+                <a:latin typeface="Georgia"/>
+              </a:rPr>
+              <a:t>Whichever curve you cite, Hyde Park's station cost stays in the top quarter and the approval level stays above the class</a:t>
+            </a:r>
+          </a:p>
+        </p:txBody>
+      </p:sp>
+      <p:sp>
+        <p:nvSpPr>
+          <p:cNvPr id="5" name="TextBox 4"/>
+          <p:cNvSpPr txBox="1"/>
+          <p:nvPr/>
+        </p:nvSpPr>
+        <p:spPr>
+          <a:xfrm>
+            <a:off x="548640" y="6419088"/>
+            <a:ext cx="8229600" cy="274320"/>
+          </a:xfrm>
+          <a:prstGeom prst="rect">
+            <a:avLst/>
+          </a:prstGeom>
+          <a:noFill/>
+        </p:spPr>
+        <p:txBody>
+          <a:bodyPr wrap="square" lIns="45720" rIns="45720" tIns="27432" bIns="27432" anchor="t">
+            <a:spAutoFit/>
+          </a:bodyPr>
+          <a:lstStyle/>
+          <a:p>
+            <a:pPr algn="l">
+              <a:lnSpc>
+                <a:spcPct val="105000"/>
+              </a:lnSpc>
+              <a:spcAft>
+                <a:spcPts val="400"/>
+              </a:spcAft>
+            </a:pPr>
+            <a:r>
+              <a:rPr sz="1000" b="0" i="0">
+                <a:solidFill>
+                  <a:srgbClr val="6B7280"/>
+                </a:solidFill>
+                <a:latin typeface="Calibri"/>
+              </a:rPr>
+              <a:t>EstimatingCoE | Eversource Energy | Stewards of Affordability</a:t>
+            </a:r>
+          </a:p>
+        </p:txBody>
+      </p:sp>
+      <p:sp>
+        <p:nvSpPr>
+          <p:cNvPr id="6" name="TextBox 5"/>
+          <p:cNvSpPr txBox="1"/>
+          <p:nvPr/>
+        </p:nvSpPr>
+        <p:spPr>
+          <a:xfrm>
+            <a:off x="10972800" y="6419088"/>
+            <a:ext cx="685800" cy="274320"/>
+          </a:xfrm>
+          <a:prstGeom prst="rect">
+            <a:avLst/>
+          </a:prstGeom>
+          <a:noFill/>
+        </p:spPr>
+        <p:txBody>
+          <a:bodyPr wrap="square" lIns="45720" rIns="45720" tIns="27432" bIns="27432" anchor="t">
+            <a:spAutoFit/>
+          </a:bodyPr>
+          <a:lstStyle/>
+          <a:p>
+            <a:pPr algn="r">
+              <a:lnSpc>
+                <a:spcPct val="105000"/>
+              </a:lnSpc>
+              <a:spcAft>
+                <a:spcPts val="400"/>
+              </a:spcAft>
+            </a:pPr>
+            <a:r>
+              <a:rPr sz="1000" b="0" i="0">
+                <a:solidFill>
+                  <a:srgbClr val="6B7280"/>
+                </a:solidFill>
+                <a:latin typeface="Calibri"/>
+              </a:rPr>
+              <a:t>16</a:t>
+            </a:r>
+          </a:p>
+        </p:txBody>
+      </p:sp>
+      <p:graphicFrame>
+        <p:nvGraphicFramePr>
+          <p:cNvPr id="7" name="Table 6"/>
+          <p:cNvGraphicFramePr>
+            <a:graphicFrameLocks noGrp="1"/>
+          </p:cNvGraphicFramePr>
+          <p:nvPr/>
+        </p:nvGraphicFramePr>
+        <p:xfrm>
+          <a:off x="548640" y="1371600"/>
+          <a:ext cx="11064240" cy="3017520"/>
+        </p:xfrm>
+        <a:graphic>
+          <a:graphicData uri="http://schemas.openxmlformats.org/drawingml/2006/table">
+            <a:tbl>
+              <a:tblPr firstRow="1" bandRow="1">
+                <a:tableStyleId>{5C22544A-7EE6-4342-B048-85BDC9FD1C3A}</a:tableStyleId>
+              </a:tblPr>
+              <a:tblGrid>
+                <a:gridCol w="2286000"/>
+                <a:gridCol w="1097280"/>
+                <a:gridCol w="1188720"/>
+                <a:gridCol w="1188720"/>
+                <a:gridCol w="1463040"/>
+                <a:gridCol w="1371600"/>
+                <a:gridCol w="2468880"/>
+              </a:tblGrid>
+              <a:tr h="377190">
+                <a:tc>
+                  <a:txBody>
+                    <a:bodyPr/>
+                    <a:lstStyle/>
+                    <a:p>
+                      <a:r>
+                        <a:rPr sz="1050" b="1">
+                          <a:solidFill>
+                            <a:srgbClr val="FFFFFF"/>
+                          </a:solidFill>
+                          <a:latin typeface="Calibri"/>
+                        </a:rPr>
+                        <a:t>Curve used to re-base</a:t>
+                      </a:r>
+                    </a:p>
+                  </a:txBody>
+                  <a:tcPr marL="54864" marR="54864" marT="27432" marB="27432">
+                    <a:solidFill>
+                      <a:srgbClr val="001E60"/>
+                    </a:solidFill>
+                  </a:tcPr>
+                </a:tc>
+                <a:tc>
+                  <a:txBody>
+                    <a:bodyPr/>
+                    <a:lstStyle/>
+                    <a:p>
+                      <a:pPr algn="r"/>
+                      <a:r>
+                        <a:rPr sz="1050" b="1">
+                          <a:solidFill>
+                            <a:srgbClr val="FFFFFF"/>
+                          </a:solidFill>
+                          <a:latin typeface="Calibri"/>
+                        </a:rPr>
+                        <a:t>Class median</a:t>
+                      </a:r>
+                    </a:p>
+                  </a:txBody>
+                  <a:tcPr marL="54864" marR="54864" marT="27432" marB="27432">
+                    <a:solidFill>
+                      <a:srgbClr val="001E60"/>
+                    </a:solidFill>
+                  </a:tcPr>
+                </a:tc>
+                <a:tc>
+                  <a:txBody>
+                    <a:bodyPr/>
+                    <a:lstStyle/>
+                    <a:p>
+                      <a:pPr algn="r"/>
+                      <a:r>
+                        <a:rPr sz="1050" b="1">
+                          <a:solidFill>
+                            <a:srgbClr val="FFFFFF"/>
+                          </a:solidFill>
+                          <a:latin typeface="Calibri"/>
+                        </a:rPr>
+                        <a:t>HP installed pct</a:t>
+                      </a:r>
+                    </a:p>
+                  </a:txBody>
+                  <a:tcPr marL="54864" marR="54864" marT="27432" marB="27432">
+                    <a:solidFill>
+                      <a:srgbClr val="001E60"/>
+                    </a:solidFill>
+                  </a:tcPr>
+                </a:tc>
+                <a:tc>
+                  <a:txBody>
+                    <a:bodyPr/>
+                    <a:lstStyle/>
+                    <a:p>
+                      <a:pPr algn="r"/>
+                      <a:r>
+                        <a:rPr sz="1050" b="1">
+                          <a:solidFill>
+                            <a:srgbClr val="FFFFFF"/>
+                          </a:solidFill>
+                          <a:latin typeface="Calibri"/>
+                        </a:rPr>
+                        <a:t>HP station pct</a:t>
+                      </a:r>
+                    </a:p>
+                  </a:txBody>
+                  <a:tcPr marL="54864" marR="54864" marT="27432" marB="27432">
+                    <a:solidFill>
+                      <a:srgbClr val="001E60"/>
+                    </a:solidFill>
+                  </a:tcPr>
+                </a:tc>
+                <a:tc>
+                  <a:txBody>
+                    <a:bodyPr/>
+                    <a:lstStyle/>
+                    <a:p>
+                      <a:pPr algn="r"/>
+                      <a:r>
+                        <a:rPr sz="1050" b="1">
+                          <a:solidFill>
+                            <a:srgbClr val="FFFFFF"/>
+                          </a:solidFill>
+                          <a:latin typeface="Calibri"/>
+                        </a:rPr>
+                        <a:t>Utility subclass median</a:t>
+                      </a:r>
+                    </a:p>
+                  </a:txBody>
+                  <a:tcPr marL="54864" marR="54864" marT="27432" marB="27432">
+                    <a:solidFill>
+                      <a:srgbClr val="001E60"/>
+                    </a:solidFill>
+                  </a:tcPr>
+                </a:tc>
+                <a:tc>
+                  <a:txBody>
+                    <a:bodyPr/>
+                    <a:lstStyle/>
+                    <a:p>
+                      <a:pPr algn="r"/>
+                      <a:r>
+                        <a:rPr sz="1050" b="1">
+                          <a:solidFill>
+                            <a:srgbClr val="FFFFFF"/>
+                          </a:solidFill>
+                          <a:latin typeface="Calibri"/>
+                        </a:rPr>
+                        <a:t>HP station pct (utility)</a:t>
+                      </a:r>
+                    </a:p>
+                  </a:txBody>
+                  <a:tcPr marL="54864" marR="54864" marT="27432" marB="27432">
+                    <a:solidFill>
+                      <a:srgbClr val="001E60"/>
+                    </a:solidFill>
+                  </a:tcPr>
+                </a:tc>
+                <a:tc>
+                  <a:txBody>
+                    <a:bodyPr/>
+                    <a:lstStyle/>
+                    <a:p>
+                      <a:pPr algn="r"/>
+                      <a:r>
+                        <a:rPr sz="1050" b="1">
+                          <a:solidFill>
+                            <a:srgbClr val="FFFFFF"/>
+                          </a:solidFill>
+                          <a:latin typeface="Calibri"/>
+                        </a:rPr>
+                        <a:t>Whole cost deflated at battery rate: median / HP station pct</a:t>
+                      </a:r>
+                    </a:p>
+                  </a:txBody>
+                  <a:tcPr marL="54864" marR="54864" marT="27432" marB="27432">
+                    <a:solidFill>
+                      <a:srgbClr val="001E60"/>
+                    </a:solidFill>
+                  </a:tcPr>
+                </a:tc>
+              </a:tr>
+              <a:tr h="377190">
+                <a:tc>
+                  <a:txBody>
+                    <a:bodyPr/>
+                    <a:lstStyle/>
+                    <a:p>
+                      <a:r>
+                        <a:rPr sz="1050" b="0">
+                          <a:solidFill>
+                            <a:srgbClr val="1F2A44"/>
+                          </a:solidFill>
+                          <a:latin typeface="Calibri"/>
+                        </a:rPr>
+                        <a:t>Nominal, as published</a:t>
+                      </a:r>
+                    </a:p>
+                  </a:txBody>
+                  <a:tcPr marL="54864" marR="54864" marT="27432" marB="27432" anchor="ctr">
+                    <a:solidFill>
+                      <a:srgbClr val="FFFFFF"/>
+                    </a:solidFill>
+                  </a:tcPr>
+                </a:tc>
+                <a:tc>
+                  <a:txBody>
+                    <a:bodyPr/>
+                    <a:lstStyle/>
+                    <a:p>
+                      <a:pPr algn="r"/>
+                      <a:r>
+                        <a:rPr sz="1050" b="0">
+                          <a:solidFill>
+                            <a:srgbClr val="1F2A44"/>
+                          </a:solidFill>
+                          <a:latin typeface="Calibri"/>
+                        </a:rPr>
+                        <a:t>$771</a:t>
+                      </a:r>
+                    </a:p>
+                  </a:txBody>
+                  <a:tcPr marL="54864" marR="54864" marT="27432" marB="27432" anchor="ctr">
+                    <a:solidFill>
+                      <a:srgbClr val="FFFFFF"/>
+                    </a:solidFill>
+                  </a:tcPr>
+                </a:tc>
+                <a:tc>
+                  <a:txBody>
+                    <a:bodyPr/>
+                    <a:lstStyle/>
+                    <a:p>
+                      <a:pPr algn="r"/>
+                      <a:r>
+                        <a:rPr sz="1050" b="0">
+                          <a:solidFill>
+                            <a:srgbClr val="1F2A44"/>
+                          </a:solidFill>
+                          <a:latin typeface="Calibri"/>
+                        </a:rPr>
+                        <a:t>58%</a:t>
+                      </a:r>
+                    </a:p>
+                  </a:txBody>
+                  <a:tcPr marL="54864" marR="54864" marT="27432" marB="27432" anchor="ctr">
+                    <a:solidFill>
+                      <a:srgbClr val="FFFFFF"/>
+                    </a:solidFill>
+                  </a:tcPr>
+                </a:tc>
+                <a:tc>
+                  <a:txBody>
+                    <a:bodyPr/>
+                    <a:lstStyle/>
+                    <a:p>
+                      <a:pPr algn="r"/>
+                      <a:r>
+                        <a:rPr sz="1050" b="0">
+                          <a:solidFill>
+                            <a:srgbClr val="1F2A44"/>
+                          </a:solidFill>
+                          <a:latin typeface="Calibri"/>
+                        </a:rPr>
+                        <a:t>85%</a:t>
+                      </a:r>
+                    </a:p>
+                  </a:txBody>
+                  <a:tcPr marL="54864" marR="54864" marT="27432" marB="27432" anchor="ctr">
+                    <a:solidFill>
+                      <a:srgbClr val="FFFFFF"/>
+                    </a:solidFill>
+                  </a:tcPr>
+                </a:tc>
+                <a:tc>
+                  <a:txBody>
+                    <a:bodyPr/>
+                    <a:lstStyle/>
+                    <a:p>
+                      <a:pPr algn="r"/>
+                      <a:r>
+                        <a:rPr sz="1050" b="0">
+                          <a:solidFill>
+                            <a:srgbClr val="1F2A44"/>
+                          </a:solidFill>
+                          <a:latin typeface="Calibri"/>
+                        </a:rPr>
+                        <a:t>$986</a:t>
+                      </a:r>
+                    </a:p>
+                  </a:txBody>
+                  <a:tcPr marL="54864" marR="54864" marT="27432" marB="27432" anchor="ctr">
+                    <a:solidFill>
+                      <a:srgbClr val="FFFFFF"/>
+                    </a:solidFill>
+                  </a:tcPr>
+                </a:tc>
+                <a:tc>
+                  <a:txBody>
+                    <a:bodyPr/>
+                    <a:lstStyle/>
+                    <a:p>
+                      <a:pPr algn="r"/>
+                      <a:r>
+                        <a:rPr sz="1050" b="0">
+                          <a:solidFill>
+                            <a:srgbClr val="1F2A44"/>
+                          </a:solidFill>
+                          <a:latin typeface="Calibri"/>
+                        </a:rPr>
+                        <a:t>74%</a:t>
+                      </a:r>
+                    </a:p>
+                  </a:txBody>
+                  <a:tcPr marL="54864" marR="54864" marT="27432" marB="27432" anchor="ctr">
+                    <a:solidFill>
+                      <a:srgbClr val="FFFFFF"/>
+                    </a:solidFill>
+                  </a:tcPr>
+                </a:tc>
+                <a:tc>
+                  <a:txBody>
+                    <a:bodyPr/>
+                    <a:lstStyle/>
+                    <a:p>
+                      <a:pPr algn="r"/>
+                      <a:r>
+                        <a:rPr sz="1050" b="0">
+                          <a:solidFill>
+                            <a:srgbClr val="1F2A44"/>
+                          </a:solidFill>
+                          <a:latin typeface="Calibri"/>
+                        </a:rPr>
+                        <a:t>n/a</a:t>
+                      </a:r>
+                    </a:p>
+                  </a:txBody>
+                  <a:tcPr marL="54864" marR="54864" marT="27432" marB="27432" anchor="ctr">
+                    <a:solidFill>
+                      <a:srgbClr val="FFFFFF"/>
+                    </a:solidFill>
+                  </a:tcPr>
+                </a:tc>
+              </a:tr>
+              <a:tr h="377190">
+                <a:tc>
+                  <a:txBody>
+                    <a:bodyPr/>
+                    <a:lstStyle/>
+                    <a:p>
+                      <a:r>
+                        <a:rPr sz="1050" b="0">
+                          <a:solidFill>
+                            <a:srgbClr val="1F2A44"/>
+                          </a:solidFill>
+                          <a:latin typeface="Calibri"/>
+                        </a:rPr>
+                        <a:t>EIA / LBNL installed all-in</a:t>
+                      </a:r>
+                    </a:p>
+                  </a:txBody>
+                  <a:tcPr marL="54864" marR="54864" marT="27432" marB="27432" anchor="ctr">
+                    <a:solidFill>
+                      <a:srgbClr val="F2F4F8"/>
+                    </a:solidFill>
+                  </a:tcPr>
+                </a:tc>
+                <a:tc>
+                  <a:txBody>
+                    <a:bodyPr/>
+                    <a:lstStyle/>
+                    <a:p>
+                      <a:pPr algn="r"/>
+                      <a:r>
+                        <a:rPr sz="1050" b="0">
+                          <a:solidFill>
+                            <a:srgbClr val="1F2A44"/>
+                          </a:solidFill>
+                          <a:latin typeface="Calibri"/>
+                        </a:rPr>
+                        <a:t>$832</a:t>
+                      </a:r>
+                    </a:p>
+                  </a:txBody>
+                  <a:tcPr marL="54864" marR="54864" marT="27432" marB="27432" anchor="ctr">
+                    <a:solidFill>
+                      <a:srgbClr val="F2F4F8"/>
+                    </a:solidFill>
+                  </a:tcPr>
+                </a:tc>
+                <a:tc>
+                  <a:txBody>
+                    <a:bodyPr/>
+                    <a:lstStyle/>
+                    <a:p>
+                      <a:pPr algn="r"/>
+                      <a:r>
+                        <a:rPr sz="1050" b="0">
+                          <a:solidFill>
+                            <a:srgbClr val="1F2A44"/>
+                          </a:solidFill>
+                          <a:latin typeface="Calibri"/>
+                        </a:rPr>
+                        <a:t>51%</a:t>
+                      </a:r>
+                    </a:p>
+                  </a:txBody>
+                  <a:tcPr marL="54864" marR="54864" marT="27432" marB="27432" anchor="ctr">
+                    <a:solidFill>
+                      <a:srgbClr val="F2F4F8"/>
+                    </a:solidFill>
+                  </a:tcPr>
+                </a:tc>
+                <a:tc>
+                  <a:txBody>
+                    <a:bodyPr/>
+                    <a:lstStyle/>
+                    <a:p>
+                      <a:pPr algn="r"/>
+                      <a:r>
+                        <a:rPr sz="1050" b="0">
+                          <a:solidFill>
+                            <a:srgbClr val="1F2A44"/>
+                          </a:solidFill>
+                          <a:latin typeface="Calibri"/>
+                        </a:rPr>
+                        <a:t>85%</a:t>
+                      </a:r>
+                    </a:p>
+                  </a:txBody>
+                  <a:tcPr marL="54864" marR="54864" marT="27432" marB="27432" anchor="ctr">
+                    <a:solidFill>
+                      <a:srgbClr val="F2F4F8"/>
+                    </a:solidFill>
+                  </a:tcPr>
+                </a:tc>
+                <a:tc>
+                  <a:txBody>
+                    <a:bodyPr/>
+                    <a:lstStyle/>
+                    <a:p>
+                      <a:pPr algn="r"/>
+                      <a:r>
+                        <a:rPr sz="1050" b="0">
+                          <a:solidFill>
+                            <a:srgbClr val="1F2A44"/>
+                          </a:solidFill>
+                          <a:latin typeface="Calibri"/>
+                        </a:rPr>
+                        <a:t>$1,057</a:t>
+                      </a:r>
+                    </a:p>
+                  </a:txBody>
+                  <a:tcPr marL="54864" marR="54864" marT="27432" marB="27432" anchor="ctr">
+                    <a:solidFill>
+                      <a:srgbClr val="F2F4F8"/>
+                    </a:solidFill>
+                  </a:tcPr>
+                </a:tc>
+                <a:tc>
+                  <a:txBody>
+                    <a:bodyPr/>
+                    <a:lstStyle/>
+                    <a:p>
+                      <a:pPr algn="r"/>
+                      <a:r>
+                        <a:rPr sz="1050" b="0">
+                          <a:solidFill>
+                            <a:srgbClr val="1F2A44"/>
+                          </a:solidFill>
+                          <a:latin typeface="Calibri"/>
+                        </a:rPr>
+                        <a:t>74%</a:t>
+                      </a:r>
+                    </a:p>
+                  </a:txBody>
+                  <a:tcPr marL="54864" marR="54864" marT="27432" marB="27432" anchor="ctr">
+                    <a:solidFill>
+                      <a:srgbClr val="F2F4F8"/>
+                    </a:solidFill>
+                  </a:tcPr>
+                </a:tc>
+                <a:tc>
+                  <a:txBody>
+                    <a:bodyPr/>
+                    <a:lstStyle/>
+                    <a:p>
+                      <a:pPr algn="r"/>
+                      <a:r>
+                        <a:rPr sz="1050" b="0">
+                          <a:solidFill>
+                            <a:srgbClr val="1F2A44"/>
+                          </a:solidFill>
+                          <a:latin typeface="Calibri"/>
+                        </a:rPr>
+                        <a:t>$620 / 95%</a:t>
+                      </a:r>
+                    </a:p>
+                  </a:txBody>
+                  <a:tcPr marL="54864" marR="54864" marT="27432" marB="27432" anchor="ctr">
+                    <a:solidFill>
+                      <a:srgbClr val="F2F4F8"/>
+                    </a:solidFill>
+                  </a:tcPr>
+                </a:tc>
+              </a:tr>
+              <a:tr h="377190">
+                <a:tc>
+                  <a:txBody>
+                    <a:bodyPr/>
+                    <a:lstStyle/>
+                    <a:p>
+                      <a:r>
+                        <a:rPr sz="1050" b="0">
+                          <a:solidFill>
+                            <a:srgbClr val="1F2A44"/>
+                          </a:solidFill>
+                          <a:latin typeface="Calibri"/>
+                        </a:rPr>
+                        <a:t>BNEF pack price</a:t>
+                      </a:r>
+                    </a:p>
+                  </a:txBody>
+                  <a:tcPr marL="54864" marR="54864" marT="27432" marB="27432" anchor="ctr">
+                    <a:solidFill>
+                      <a:srgbClr val="FFFFFF"/>
+                    </a:solidFill>
+                  </a:tcPr>
+                </a:tc>
+                <a:tc>
+                  <a:txBody>
+                    <a:bodyPr/>
+                    <a:lstStyle/>
+                    <a:p>
+                      <a:pPr algn="r"/>
+                      <a:r>
+                        <a:rPr sz="1050" b="0">
+                          <a:solidFill>
+                            <a:srgbClr val="1F2A44"/>
+                          </a:solidFill>
+                          <a:latin typeface="Calibri"/>
+                        </a:rPr>
+                        <a:t>$830</a:t>
+                      </a:r>
+                    </a:p>
+                  </a:txBody>
+                  <a:tcPr marL="54864" marR="54864" marT="27432" marB="27432" anchor="ctr">
+                    <a:solidFill>
+                      <a:srgbClr val="FFFFFF"/>
+                    </a:solidFill>
+                  </a:tcPr>
+                </a:tc>
+                <a:tc>
+                  <a:txBody>
+                    <a:bodyPr/>
+                    <a:lstStyle/>
+                    <a:p>
+                      <a:pPr algn="r"/>
+                      <a:r>
+                        <a:rPr sz="1050" b="0">
+                          <a:solidFill>
+                            <a:srgbClr val="1F2A44"/>
+                          </a:solidFill>
+                          <a:latin typeface="Calibri"/>
+                        </a:rPr>
+                        <a:t>53%</a:t>
+                      </a:r>
+                    </a:p>
+                  </a:txBody>
+                  <a:tcPr marL="54864" marR="54864" marT="27432" marB="27432" anchor="ctr">
+                    <a:solidFill>
+                      <a:srgbClr val="FFFFFF"/>
+                    </a:solidFill>
+                  </a:tcPr>
+                </a:tc>
+                <a:tc>
+                  <a:txBody>
+                    <a:bodyPr/>
+                    <a:lstStyle/>
+                    <a:p>
+                      <a:pPr algn="r"/>
+                      <a:r>
+                        <a:rPr sz="1050" b="0">
+                          <a:solidFill>
+                            <a:srgbClr val="1F2A44"/>
+                          </a:solidFill>
+                          <a:latin typeface="Calibri"/>
+                        </a:rPr>
+                        <a:t>87%</a:t>
+                      </a:r>
+                    </a:p>
+                  </a:txBody>
+                  <a:tcPr marL="54864" marR="54864" marT="27432" marB="27432" anchor="ctr">
+                    <a:solidFill>
+                      <a:srgbClr val="FFFFFF"/>
+                    </a:solidFill>
+                  </a:tcPr>
+                </a:tc>
+                <a:tc>
+                  <a:txBody>
+                    <a:bodyPr/>
+                    <a:lstStyle/>
+                    <a:p>
+                      <a:pPr algn="r"/>
+                      <a:r>
+                        <a:rPr sz="1050" b="0">
+                          <a:solidFill>
+                            <a:srgbClr val="1F2A44"/>
+                          </a:solidFill>
+                          <a:latin typeface="Calibri"/>
+                        </a:rPr>
+                        <a:t>$1,093</a:t>
+                      </a:r>
+                    </a:p>
+                  </a:txBody>
+                  <a:tcPr marL="54864" marR="54864" marT="27432" marB="27432" anchor="ctr">
+                    <a:solidFill>
+                      <a:srgbClr val="FFFFFF"/>
+                    </a:solidFill>
+                  </a:tcPr>
+                </a:tc>
+                <a:tc>
+                  <a:txBody>
+                    <a:bodyPr/>
+                    <a:lstStyle/>
+                    <a:p>
+                      <a:pPr algn="r"/>
+                      <a:r>
+                        <a:rPr sz="1050" b="0">
+                          <a:solidFill>
+                            <a:srgbClr val="1F2A44"/>
+                          </a:solidFill>
+                          <a:latin typeface="Calibri"/>
+                        </a:rPr>
+                        <a:t>77%</a:t>
+                      </a:r>
+                    </a:p>
+                  </a:txBody>
+                  <a:tcPr marL="54864" marR="54864" marT="27432" marB="27432" anchor="ctr">
+                    <a:solidFill>
+                      <a:srgbClr val="FFFFFF"/>
+                    </a:solidFill>
+                  </a:tcPr>
+                </a:tc>
+                <a:tc>
+                  <a:txBody>
+                    <a:bodyPr/>
+                    <a:lstStyle/>
+                    <a:p>
+                      <a:pPr algn="r"/>
+                      <a:r>
+                        <a:rPr sz="1050" b="0">
+                          <a:solidFill>
+                            <a:srgbClr val="1F2A44"/>
+                          </a:solidFill>
+                          <a:latin typeface="Calibri"/>
+                        </a:rPr>
+                        <a:t>$607 / 96%</a:t>
+                      </a:r>
+                    </a:p>
+                  </a:txBody>
+                  <a:tcPr marL="54864" marR="54864" marT="27432" marB="27432" anchor="ctr">
+                    <a:solidFill>
+                      <a:srgbClr val="FFFFFF"/>
+                    </a:solidFill>
+                  </a:tcPr>
+                </a:tc>
+              </a:tr>
+              <a:tr h="377190">
+                <a:tc>
+                  <a:txBody>
+                    <a:bodyPr/>
+                    <a:lstStyle/>
+                    <a:p>
+                      <a:r>
+                        <a:rPr sz="1050" b="0">
+                          <a:solidFill>
+                            <a:srgbClr val="1F2A44"/>
+                          </a:solidFill>
+                          <a:latin typeface="Calibri"/>
+                        </a:rPr>
+                        <a:t>BNEF turnkey system</a:t>
+                      </a:r>
+                    </a:p>
+                  </a:txBody>
+                  <a:tcPr marL="54864" marR="54864" marT="27432" marB="27432" anchor="ctr">
+                    <a:solidFill>
+                      <a:srgbClr val="F2F4F8"/>
+                    </a:solidFill>
+                  </a:tcPr>
+                </a:tc>
+                <a:tc>
+                  <a:txBody>
+                    <a:bodyPr/>
+                    <a:lstStyle/>
+                    <a:p>
+                      <a:pPr algn="r"/>
+                      <a:r>
+                        <a:rPr sz="1050" b="0">
+                          <a:solidFill>
+                            <a:srgbClr val="1F2A44"/>
+                          </a:solidFill>
+                          <a:latin typeface="Calibri"/>
+                        </a:rPr>
+                        <a:t>$806</a:t>
+                      </a:r>
+                    </a:p>
+                  </a:txBody>
+                  <a:tcPr marL="54864" marR="54864" marT="27432" marB="27432" anchor="ctr">
+                    <a:solidFill>
+                      <a:srgbClr val="F2F4F8"/>
+                    </a:solidFill>
+                  </a:tcPr>
+                </a:tc>
+                <a:tc>
+                  <a:txBody>
+                    <a:bodyPr/>
+                    <a:lstStyle/>
+                    <a:p>
+                      <a:pPr algn="r"/>
+                      <a:r>
+                        <a:rPr sz="1050" b="0">
+                          <a:solidFill>
+                            <a:srgbClr val="1F2A44"/>
+                          </a:solidFill>
+                          <a:latin typeface="Calibri"/>
+                        </a:rPr>
+                        <a:t>60%</a:t>
+                      </a:r>
+                    </a:p>
+                  </a:txBody>
+                  <a:tcPr marL="54864" marR="54864" marT="27432" marB="27432" anchor="ctr">
+                    <a:solidFill>
+                      <a:srgbClr val="F2F4F8"/>
+                    </a:solidFill>
+                  </a:tcPr>
+                </a:tc>
+                <a:tc>
+                  <a:txBody>
+                    <a:bodyPr/>
+                    <a:lstStyle/>
+                    <a:p>
+                      <a:pPr algn="r"/>
+                      <a:r>
+                        <a:rPr sz="1050" b="0">
+                          <a:solidFill>
+                            <a:srgbClr val="1F2A44"/>
+                          </a:solidFill>
+                          <a:latin typeface="Calibri"/>
+                        </a:rPr>
+                        <a:t>89%</a:t>
+                      </a:r>
+                    </a:p>
+                  </a:txBody>
+                  <a:tcPr marL="54864" marR="54864" marT="27432" marB="27432" anchor="ctr">
+                    <a:solidFill>
+                      <a:srgbClr val="F2F4F8"/>
+                    </a:solidFill>
+                  </a:tcPr>
+                </a:tc>
+                <a:tc>
+                  <a:txBody>
+                    <a:bodyPr/>
+                    <a:lstStyle/>
+                    <a:p>
+                      <a:pPr algn="r"/>
+                      <a:r>
+                        <a:rPr sz="1050" b="0">
+                          <a:solidFill>
+                            <a:srgbClr val="1F2A44"/>
+                          </a:solidFill>
+                          <a:latin typeface="Calibri"/>
+                        </a:rPr>
+                        <a:t>$1,038</a:t>
+                      </a:r>
+                    </a:p>
+                  </a:txBody>
+                  <a:tcPr marL="54864" marR="54864" marT="27432" marB="27432" anchor="ctr">
+                    <a:solidFill>
+                      <a:srgbClr val="F2F4F8"/>
+                    </a:solidFill>
+                  </a:tcPr>
+                </a:tc>
+                <a:tc>
+                  <a:txBody>
+                    <a:bodyPr/>
+                    <a:lstStyle/>
+                    <a:p>
+                      <a:pPr algn="r"/>
+                      <a:r>
+                        <a:rPr sz="1050" b="0">
+                          <a:solidFill>
+                            <a:srgbClr val="1F2A44"/>
+                          </a:solidFill>
+                          <a:latin typeface="Calibri"/>
+                        </a:rPr>
+                        <a:t>81%</a:t>
+                      </a:r>
+                    </a:p>
+                  </a:txBody>
+                  <a:tcPr marL="54864" marR="54864" marT="27432" marB="27432" anchor="ctr">
+                    <a:solidFill>
+                      <a:srgbClr val="F2F4F8"/>
+                    </a:solidFill>
+                  </a:tcPr>
+                </a:tc>
+                <a:tc>
+                  <a:txBody>
+                    <a:bodyPr/>
+                    <a:lstStyle/>
+                    <a:p>
+                      <a:pPr algn="r"/>
+                      <a:r>
+                        <a:rPr sz="1050" b="0">
+                          <a:solidFill>
+                            <a:srgbClr val="1F2A44"/>
+                          </a:solidFill>
+                          <a:latin typeface="Calibri"/>
+                        </a:rPr>
+                        <a:t>$524 / 100%</a:t>
+                      </a:r>
+                    </a:p>
+                  </a:txBody>
+                  <a:tcPr marL="54864" marR="54864" marT="27432" marB="27432" anchor="ctr">
+                    <a:solidFill>
+                      <a:srgbClr val="F2F4F8"/>
+                    </a:solidFill>
+                  </a:tcPr>
+                </a:tc>
+              </a:tr>
+              <a:tr h="377190">
+                <a:tc>
+                  <a:txBody>
+                    <a:bodyPr/>
+                    <a:lstStyle/>
+                    <a:p>
+                      <a:r>
+                        <a:rPr sz="1050" b="0">
+                          <a:solidFill>
+                            <a:srgbClr val="1F2A44"/>
+                          </a:solidFill>
+                          <a:latin typeface="Calibri"/>
+                        </a:rPr>
+                        <a:t>NREL bottom-up base year</a:t>
+                      </a:r>
+                    </a:p>
+                  </a:txBody>
+                  <a:tcPr marL="54864" marR="54864" marT="27432" marB="27432" anchor="ctr">
+                    <a:solidFill>
+                      <a:srgbClr val="FFFFFF"/>
+                    </a:solidFill>
+                  </a:tcPr>
+                </a:tc>
+                <a:tc>
+                  <a:txBody>
+                    <a:bodyPr/>
+                    <a:lstStyle/>
+                    <a:p>
+                      <a:pPr algn="r"/>
+                      <a:r>
+                        <a:rPr sz="1050" b="0">
+                          <a:solidFill>
+                            <a:srgbClr val="1F2A44"/>
+                          </a:solidFill>
+                          <a:latin typeface="Calibri"/>
+                        </a:rPr>
+                        <a:t>$838</a:t>
+                      </a:r>
+                    </a:p>
+                  </a:txBody>
+                  <a:tcPr marL="54864" marR="54864" marT="27432" marB="27432" anchor="ctr">
+                    <a:solidFill>
+                      <a:srgbClr val="FFFFFF"/>
+                    </a:solidFill>
+                  </a:tcPr>
+                </a:tc>
+                <a:tc>
+                  <a:txBody>
+                    <a:bodyPr/>
+                    <a:lstStyle/>
+                    <a:p>
+                      <a:pPr algn="r"/>
+                      <a:r>
+                        <a:rPr sz="1050" b="0">
+                          <a:solidFill>
+                            <a:srgbClr val="1F2A44"/>
+                          </a:solidFill>
+                          <a:latin typeface="Calibri"/>
+                        </a:rPr>
+                        <a:t>49%</a:t>
+                      </a:r>
+                    </a:p>
+                  </a:txBody>
+                  <a:tcPr marL="54864" marR="54864" marT="27432" marB="27432" anchor="ctr">
+                    <a:solidFill>
+                      <a:srgbClr val="FFFFFF"/>
+                    </a:solidFill>
+                  </a:tcPr>
+                </a:tc>
+                <a:tc>
+                  <a:txBody>
+                    <a:bodyPr/>
+                    <a:lstStyle/>
+                    <a:p>
+                      <a:pPr algn="r"/>
+                      <a:r>
+                        <a:rPr sz="1050" b="0">
+                          <a:solidFill>
+                            <a:srgbClr val="1F2A44"/>
+                          </a:solidFill>
+                          <a:latin typeface="Calibri"/>
+                        </a:rPr>
+                        <a:t>84%</a:t>
+                      </a:r>
+                    </a:p>
+                  </a:txBody>
+                  <a:tcPr marL="54864" marR="54864" marT="27432" marB="27432" anchor="ctr">
+                    <a:solidFill>
+                      <a:srgbClr val="FFFFFF"/>
+                    </a:solidFill>
+                  </a:tcPr>
+                </a:tc>
+                <a:tc>
+                  <a:txBody>
+                    <a:bodyPr/>
+                    <a:lstStyle/>
+                    <a:p>
+                      <a:pPr algn="r"/>
+                      <a:r>
+                        <a:rPr sz="1050" b="0">
+                          <a:solidFill>
+                            <a:srgbClr val="1F2A44"/>
+                          </a:solidFill>
+                          <a:latin typeface="Calibri"/>
+                        </a:rPr>
+                        <a:t>$1,118</a:t>
+                      </a:r>
+                    </a:p>
+                  </a:txBody>
+                  <a:tcPr marL="54864" marR="54864" marT="27432" marB="27432" anchor="ctr">
+                    <a:solidFill>
+                      <a:srgbClr val="FFFFFF"/>
+                    </a:solidFill>
+                  </a:tcPr>
+                </a:tc>
+                <a:tc>
+                  <a:txBody>
+                    <a:bodyPr/>
+                    <a:lstStyle/>
+                    <a:p>
+                      <a:pPr algn="r"/>
+                      <a:r>
+                        <a:rPr sz="1050" b="0">
+                          <a:solidFill>
+                            <a:srgbClr val="1F2A44"/>
+                          </a:solidFill>
+                          <a:latin typeface="Calibri"/>
+                        </a:rPr>
+                        <a:t>71%</a:t>
+                      </a:r>
+                    </a:p>
+                  </a:txBody>
+                  <a:tcPr marL="54864" marR="54864" marT="27432" marB="27432" anchor="ctr">
+                    <a:solidFill>
+                      <a:srgbClr val="FFFFFF"/>
+                    </a:solidFill>
+                  </a:tcPr>
+                </a:tc>
+                <a:tc>
+                  <a:txBody>
+                    <a:bodyPr/>
+                    <a:lstStyle/>
+                    <a:p>
+                      <a:pPr algn="r"/>
+                      <a:r>
+                        <a:rPr sz="1050" b="0">
+                          <a:solidFill>
+                            <a:srgbClr val="1F2A44"/>
+                          </a:solidFill>
+                          <a:latin typeface="Calibri"/>
+                        </a:rPr>
+                        <a:t>$694 / 95%</a:t>
+                      </a:r>
+                    </a:p>
+                  </a:txBody>
+                  <a:tcPr marL="54864" marR="54864" marT="27432" marB="27432" anchor="ctr">
+                    <a:solidFill>
+                      <a:srgbClr val="FFFFFF"/>
+                    </a:solidFill>
+                  </a:tcPr>
+                </a:tc>
+              </a:tr>
+              <a:tr h="377190">
+                <a:tc>
+                  <a:txBody>
+                    <a:bodyPr/>
+                    <a:lstStyle/>
+                    <a:p>
+                      <a:r>
+                        <a:rPr sz="1050" b="0">
+                          <a:solidFill>
+                            <a:srgbClr val="1F2A44"/>
+                          </a:solidFill>
+                          <a:latin typeface="Calibri"/>
+                        </a:rPr>
+                        <a:t>Lazard LCOS midpoint</a:t>
+                      </a:r>
+                    </a:p>
+                  </a:txBody>
+                  <a:tcPr marL="54864" marR="54864" marT="27432" marB="27432" anchor="ctr">
+                    <a:solidFill>
+                      <a:srgbClr val="F2F4F8"/>
+                    </a:solidFill>
+                  </a:tcPr>
+                </a:tc>
+                <a:tc>
+                  <a:txBody>
+                    <a:bodyPr/>
+                    <a:lstStyle/>
+                    <a:p>
+                      <a:pPr algn="r"/>
+                      <a:r>
+                        <a:rPr sz="1050" b="0">
+                          <a:solidFill>
+                            <a:srgbClr val="1F2A44"/>
+                          </a:solidFill>
+                          <a:latin typeface="Calibri"/>
+                        </a:rPr>
+                        <a:t>$903</a:t>
+                      </a:r>
+                    </a:p>
+                  </a:txBody>
+                  <a:tcPr marL="54864" marR="54864" marT="27432" marB="27432" anchor="ctr">
+                    <a:solidFill>
+                      <a:srgbClr val="F2F4F8"/>
+                    </a:solidFill>
+                  </a:tcPr>
+                </a:tc>
+                <a:tc>
+                  <a:txBody>
+                    <a:bodyPr/>
+                    <a:lstStyle/>
+                    <a:p>
+                      <a:pPr algn="r"/>
+                      <a:r>
+                        <a:rPr sz="1050" b="0">
+                          <a:solidFill>
+                            <a:srgbClr val="1F2A44"/>
+                          </a:solidFill>
+                          <a:latin typeface="Calibri"/>
+                        </a:rPr>
+                        <a:t>42%</a:t>
+                      </a:r>
+                    </a:p>
+                  </a:txBody>
+                  <a:tcPr marL="54864" marR="54864" marT="27432" marB="27432" anchor="ctr">
+                    <a:solidFill>
+                      <a:srgbClr val="F2F4F8"/>
+                    </a:solidFill>
+                  </a:tcPr>
+                </a:tc>
+                <a:tc>
+                  <a:txBody>
+                    <a:bodyPr/>
+                    <a:lstStyle/>
+                    <a:p>
+                      <a:pPr algn="r"/>
+                      <a:r>
+                        <a:rPr sz="1050" b="0">
+                          <a:solidFill>
+                            <a:srgbClr val="1F2A44"/>
+                          </a:solidFill>
+                          <a:latin typeface="Calibri"/>
+                        </a:rPr>
+                        <a:t>76%</a:t>
+                      </a:r>
+                    </a:p>
+                  </a:txBody>
+                  <a:tcPr marL="54864" marR="54864" marT="27432" marB="27432" anchor="ctr">
+                    <a:solidFill>
+                      <a:srgbClr val="F2F4F8"/>
+                    </a:solidFill>
+                  </a:tcPr>
+                </a:tc>
+                <a:tc>
+                  <a:txBody>
+                    <a:bodyPr/>
+                    <a:lstStyle/>
+                    <a:p>
+                      <a:pPr algn="r"/>
+                      <a:r>
+                        <a:rPr sz="1050" b="0">
+                          <a:solidFill>
+                            <a:srgbClr val="1F2A44"/>
+                          </a:solidFill>
+                          <a:latin typeface="Calibri"/>
+                        </a:rPr>
+                        <a:t>$1,339</a:t>
+                      </a:r>
+                    </a:p>
+                  </a:txBody>
+                  <a:tcPr marL="54864" marR="54864" marT="27432" marB="27432" anchor="ctr">
+                    <a:solidFill>
+                      <a:srgbClr val="F2F4F8"/>
+                    </a:solidFill>
+                  </a:tcPr>
+                </a:tc>
+                <a:tc>
+                  <a:txBody>
+                    <a:bodyPr/>
+                    <a:lstStyle/>
+                    <a:p>
+                      <a:pPr algn="r"/>
+                      <a:r>
+                        <a:rPr sz="1050" b="0">
+                          <a:solidFill>
+                            <a:srgbClr val="1F2A44"/>
+                          </a:solidFill>
+                          <a:latin typeface="Calibri"/>
+                        </a:rPr>
+                        <a:t>58%</a:t>
+                      </a:r>
+                    </a:p>
+                  </a:txBody>
+                  <a:tcPr marL="54864" marR="54864" marT="27432" marB="27432" anchor="ctr">
+                    <a:solidFill>
+                      <a:srgbClr val="F2F4F8"/>
+                    </a:solidFill>
+                  </a:tcPr>
+                </a:tc>
+                <a:tc>
+                  <a:txBody>
+                    <a:bodyPr/>
+                    <a:lstStyle/>
+                    <a:p>
+                      <a:pPr algn="r"/>
+                      <a:r>
+                        <a:rPr sz="1050" b="0">
+                          <a:solidFill>
+                            <a:srgbClr val="1F2A44"/>
+                          </a:solidFill>
+                          <a:latin typeface="Calibri"/>
+                        </a:rPr>
+                        <a:t>$890 / 80%</a:t>
+                      </a:r>
+                    </a:p>
+                  </a:txBody>
+                  <a:tcPr marL="54864" marR="54864" marT="27432" marB="27432" anchor="ctr">
+                    <a:solidFill>
+                      <a:srgbClr val="F2F4F8"/>
+                    </a:solidFill>
+                  </a:tcPr>
+                </a:tc>
+              </a:tr>
+              <a:tr h="377190">
+                <a:tc>
+                  <a:txBody>
+                    <a:bodyPr/>
+                    <a:lstStyle/>
+                    <a:p>
+                      <a:r>
+                        <a:rPr sz="1050" b="0">
+                          <a:solidFill>
+                            <a:srgbClr val="1F2A44"/>
+                          </a:solidFill>
+                          <a:latin typeface="Calibri"/>
+                        </a:rPr>
+                        <a:t>Construction index only</a:t>
+                      </a:r>
+                    </a:p>
+                  </a:txBody>
+                  <a:tcPr marL="54864" marR="54864" marT="27432" marB="27432" anchor="ctr">
+                    <a:solidFill>
+                      <a:srgbClr val="FFFFFF"/>
+                    </a:solidFill>
+                  </a:tcPr>
+                </a:tc>
+                <a:tc>
+                  <a:txBody>
+                    <a:bodyPr/>
+                    <a:lstStyle/>
+                    <a:p>
+                      <a:pPr algn="r"/>
+                      <a:r>
+                        <a:rPr sz="1050" b="0">
+                          <a:solidFill>
+                            <a:srgbClr val="1F2A44"/>
+                          </a:solidFill>
+                          <a:latin typeface="Calibri"/>
+                        </a:rPr>
+                        <a:t>$902</a:t>
+                      </a:r>
+                    </a:p>
+                  </a:txBody>
+                  <a:tcPr marL="54864" marR="54864" marT="27432" marB="27432" anchor="ctr">
+                    <a:solidFill>
+                      <a:srgbClr val="FFFFFF"/>
+                    </a:solidFill>
+                  </a:tcPr>
+                </a:tc>
+                <a:tc>
+                  <a:txBody>
+                    <a:bodyPr/>
+                    <a:lstStyle/>
+                    <a:p>
+                      <a:pPr algn="r"/>
+                      <a:r>
+                        <a:rPr sz="1050" b="0">
+                          <a:solidFill>
+                            <a:srgbClr val="1F2A44"/>
+                          </a:solidFill>
+                          <a:latin typeface="Calibri"/>
+                        </a:rPr>
+                        <a:t>42%</a:t>
+                      </a:r>
+                    </a:p>
+                  </a:txBody>
+                  <a:tcPr marL="54864" marR="54864" marT="27432" marB="27432" anchor="ctr">
+                    <a:solidFill>
+                      <a:srgbClr val="FFFFFF"/>
+                    </a:solidFill>
+                  </a:tcPr>
+                </a:tc>
+                <a:tc>
+                  <a:txBody>
+                    <a:bodyPr/>
+                    <a:lstStyle/>
+                    <a:p>
+                      <a:pPr algn="r"/>
+                      <a:r>
+                        <a:rPr sz="1050" b="0">
+                          <a:solidFill>
+                            <a:srgbClr val="1F2A44"/>
+                          </a:solidFill>
+                          <a:latin typeface="Calibri"/>
+                        </a:rPr>
+                        <a:t>75%</a:t>
+                      </a:r>
+                    </a:p>
+                  </a:txBody>
+                  <a:tcPr marL="54864" marR="54864" marT="27432" marB="27432" anchor="ctr">
+                    <a:solidFill>
+                      <a:srgbClr val="FFFFFF"/>
+                    </a:solidFill>
+                  </a:tcPr>
+                </a:tc>
+                <a:tc>
+                  <a:txBody>
+                    <a:bodyPr/>
+                    <a:lstStyle/>
+                    <a:p>
+                      <a:pPr algn="r"/>
+                      <a:r>
+                        <a:rPr sz="1050" b="0">
+                          <a:solidFill>
+                            <a:srgbClr val="1F2A44"/>
+                          </a:solidFill>
+                          <a:latin typeface="Calibri"/>
+                        </a:rPr>
+                        <a:t>$1,327</a:t>
+                      </a:r>
+                    </a:p>
+                  </a:txBody>
+                  <a:tcPr marL="54864" marR="54864" marT="27432" marB="27432" anchor="ctr">
+                    <a:solidFill>
+                      <a:srgbClr val="FFFFFF"/>
+                    </a:solidFill>
+                  </a:tcPr>
+                </a:tc>
+                <a:tc>
+                  <a:txBody>
+                    <a:bodyPr/>
+                    <a:lstStyle/>
+                    <a:p>
+                      <a:pPr algn="r"/>
+                      <a:r>
+                        <a:rPr sz="1050" b="0">
+                          <a:solidFill>
+                            <a:srgbClr val="1F2A44"/>
+                          </a:solidFill>
+                          <a:latin typeface="Calibri"/>
+                        </a:rPr>
+                        <a:t>55%</a:t>
+                      </a:r>
+                    </a:p>
+                  </a:txBody>
+                  <a:tcPr marL="54864" marR="54864" marT="27432" marB="27432" anchor="ctr">
+                    <a:solidFill>
+                      <a:srgbClr val="FFFFFF"/>
+                    </a:solidFill>
+                  </a:tcPr>
+                </a:tc>
+                <a:tc>
+                  <a:txBody>
+                    <a:bodyPr/>
+                    <a:lstStyle/>
+                    <a:p>
+                      <a:pPr algn="r"/>
+                      <a:r>
+                        <a:rPr sz="1050" b="0">
+                          <a:solidFill>
+                            <a:srgbClr val="1F2A44"/>
+                          </a:solidFill>
+                          <a:latin typeface="Calibri"/>
+                        </a:rPr>
+                        <a:t>n/a</a:t>
+                      </a:r>
+                    </a:p>
+                  </a:txBody>
+                  <a:tcPr marL="54864" marR="54864" marT="27432" marB="27432" anchor="ctr">
+                    <a:solidFill>
+                      <a:srgbClr val="FFFFFF"/>
+                    </a:solidFill>
+                  </a:tcPr>
+                </a:tc>
+              </a:tr>
+            </a:tbl>
+          </a:graphicData>
+        </a:graphic>
+      </p:graphicFrame>
+      <p:sp>
+        <p:nvSpPr>
+          <p:cNvPr id="8" name="TextBox 7"/>
+          <p:cNvSpPr txBox="1"/>
+          <p:nvPr/>
+        </p:nvSpPr>
+        <p:spPr>
+          <a:xfrm>
+            <a:off x="548640" y="4572000"/>
+            <a:ext cx="11064240" cy="1737360"/>
+          </a:xfrm>
+          <a:prstGeom prst="rect">
+            <a:avLst/>
+          </a:prstGeom>
+          <a:noFill/>
+        </p:spPr>
+        <p:txBody>
+          <a:bodyPr wrap="square" lIns="45720">
+            <a:spAutoFit/>
+          </a:bodyPr>
+          <a:lstStyle/>
+          <a:p>
+            <a:pPr>
+              <a:lnSpc>
+                <a:spcPct val="105000"/>
+              </a:lnSpc>
+              <a:spcAft>
+                <a:spcPts val="500"/>
+              </a:spcAft>
+            </a:pPr>
+            <a:r>
+              <a:rPr sz="1150">
+                <a:solidFill>
+                  <a:srgbClr val="FFC72C"/>
+                </a:solidFill>
+                <a:latin typeface="Calibri"/>
+              </a:rPr>
+              <a:t>▪  </a:t>
+            </a:r>
+            <a:r>
+              <a:rPr b="1" sz="1150">
+                <a:solidFill>
+                  <a:srgbClr val="1F2A44"/>
+                </a:solidFill>
+                <a:latin typeface="Calibri"/>
+              </a:rPr>
+              <a:t>Reading across: </a:t>
+            </a:r>
+            <a:r>
+              <a:rPr sz="1150">
+                <a:solidFill>
+                  <a:srgbClr val="1F2A44"/>
+                </a:solidFill>
+                <a:latin typeface="Calibri"/>
+              </a:rPr>
+              <a:t>the four battery curves place the class median within $32/kWh of each other and Hyde Park's station cost between the 84% and 89% percentiles. LCOS and a construction-only index raise the class because they carry no battery deflation.</a:t>
+            </a:r>
+          </a:p>
+          <a:p>
+            <a:pPr>
+              <a:lnSpc>
+                <a:spcPct val="105000"/>
+              </a:lnSpc>
+              <a:spcAft>
+                <a:spcPts val="500"/>
+              </a:spcAft>
+            </a:pPr>
+            <a:r>
+              <a:rPr sz="1150">
+                <a:solidFill>
+                  <a:srgbClr val="FFC72C"/>
+                </a:solidFill>
+                <a:latin typeface="Calibri"/>
+              </a:rPr>
+              <a:t>▪  </a:t>
+            </a:r>
+            <a:r>
+              <a:rPr b="1" sz="1150">
+                <a:solidFill>
+                  <a:srgbClr val="1F2A44"/>
+                </a:solidFill>
+                <a:latin typeface="Calibri"/>
+              </a:rPr>
+              <a:t>The last column is the challenge as it was put to us: </a:t>
+            </a:r>
+            <a:r>
+              <a:rPr sz="1150">
+                <a:solidFill>
+                  <a:srgbClr val="1F2A44"/>
+                </a:solidFill>
+                <a:latin typeface="Calibri"/>
+              </a:rPr>
+              <a:t>deflate every comparable at the battery rate. It moves the median to $524 to $694 and Hyde Park to the top of the class, by treating switchgear, civil works and interconnection as lithium. It is the vendor framing applied backward in time.</a:t>
+            </a:r>
+          </a:p>
+          <a:p>
+            <a:pPr>
+              <a:lnSpc>
+                <a:spcPct val="105000"/>
+              </a:lnSpc>
+              <a:spcAft>
+                <a:spcPts val="500"/>
+              </a:spcAft>
+            </a:pPr>
+            <a:r>
+              <a:rPr sz="1150">
+                <a:solidFill>
+                  <a:srgbClr val="FFC72C"/>
+                </a:solidFill>
+                <a:latin typeface="Calibri"/>
+              </a:rPr>
+              <a:t>▪  </a:t>
+            </a:r>
+            <a:r>
+              <a:rPr b="1" sz="1150">
+                <a:solidFill>
+                  <a:srgbClr val="1F2A44"/>
+                </a:solidFill>
+                <a:latin typeface="Calibri"/>
+              </a:rPr>
+              <a:t>Which to cite: </a:t>
+            </a:r>
+            <a:r>
+              <a:rPr sz="1150">
+                <a:solidFill>
+                  <a:srgbClr val="1F2A44"/>
+                </a:solidFill>
+                <a:latin typeface="Calibri"/>
+              </a:rPr>
+              <a:t>the EIA / LBNL installed series to a regulator (reported costs of real installations); the BNEF pack series to a vendor (it is their number); neither LCOS nor a flat proxy to anyone for re-basing capital cost.</a:t>
+            </a:r>
+          </a:p>
+        </p:txBody>
+      </p:sp>
+    </p:spTree>
+  </p:cSld>
+  <p:clrMapOvr>
+    <a:masterClrMapping/>
+  </p:clrMapOvr>
+</p:sld>
+</file>
+
+<file path=ppt/slides/slide17.xml><?xml version="1.0" encoding="utf-8"?>
+<p:sld xmlns:a="http://schemas.openxmlformats.org/drawingml/2006/main" xmlns:p="http://schemas.openxmlformats.org/presentationml/2006/main" xmlns:r="http://schemas.openxmlformats.org/officeDocument/2006/relationships">
+  <p:cSld>
+    <p:spTree>
+      <p:nvGrpSpPr>
+        <p:cNvPr id="1" name=""/>
+        <p:cNvGrpSpPr/>
+        <p:nvPr/>
+      </p:nvGrpSpPr>
+      <p:grpSpPr/>
+      <p:sp>
+        <p:nvSpPr>
+          <p:cNvPr id="2" name="Rectangle 1"/>
+          <p:cNvSpPr/>
+          <p:nvPr/>
+        </p:nvSpPr>
+        <p:spPr>
+          <a:xfrm>
+            <a:off x="0" y="0"/>
+            <a:ext cx="12191695" cy="6858000"/>
+          </a:xfrm>
+          <a:prstGeom prst="rect">
+            <a:avLst/>
+          </a:prstGeom>
+          <a:solidFill>
+            <a:srgbClr val="FFFFFF"/>
+          </a:solidFill>
+          <a:ln>
+            <a:noFill/>
+          </a:ln>
+          <a:effectLst/>
+        </p:spPr>
+        <p:style>
+          <a:lnRef idx="1">
+            <a:schemeClr val="accent1"/>
+          </a:lnRef>
+          <a:fillRef idx="3">
+            <a:schemeClr val="accent1"/>
+          </a:fillRef>
+          <a:effectRef idx="2">
+            <a:schemeClr val="accent1"/>
+          </a:effectRef>
+          <a:fontRef idx="minor">
+            <a:schemeClr val="lt1"/>
+          </a:fontRef>
+        </p:style>
+        <p:txBody>
+          <a:bodyPr rtlCol="0" anchor="ctr"/>
+          <a:lstStyle/>
+          <a:p>
+            <a:pPr algn="ctr"/>
+          </a:p>
+        </p:txBody>
+      </p:sp>
+      <p:sp>
+        <p:nvSpPr>
+          <p:cNvPr id="3" name="TextBox 2"/>
+          <p:cNvSpPr txBox="1"/>
+          <p:nvPr/>
+        </p:nvSpPr>
+        <p:spPr>
+          <a:xfrm>
+            <a:off x="548640" y="256032"/>
+            <a:ext cx="11064240" cy="274320"/>
+          </a:xfrm>
+          <a:prstGeom prst="rect">
+            <a:avLst/>
+          </a:prstGeom>
+          <a:noFill/>
+        </p:spPr>
+        <p:txBody>
+          <a:bodyPr wrap="square" lIns="45720" rIns="45720" tIns="27432" bIns="27432" anchor="t">
+            <a:spAutoFit/>
+          </a:bodyPr>
+          <a:lstStyle/>
+          <a:p>
+            <a:pPr algn="l">
+              <a:lnSpc>
+                <a:spcPct val="105000"/>
+              </a:lnSpc>
+              <a:spcAft>
+                <a:spcPts val="400"/>
+              </a:spcAft>
+            </a:pPr>
+            <a:r>
+              <a:rPr sz="1100" b="1" i="0">
+                <a:solidFill>
+                  <a:srgbClr val="6E1F2E"/>
+                </a:solidFill>
+                <a:latin typeface="Calibri"/>
+              </a:rPr>
+              <a:t>1 · WHERE THE MONEY SITS   |   WHY A SMALL URBAN UTILITY-OWNED PROJECT SITS ABOVE THE INDEX</a:t>
+            </a:r>
+          </a:p>
+        </p:txBody>
+      </p:sp>
+      <p:sp>
+        <p:nvSpPr>
+          <p:cNvPr id="4" name="TextBox 3"/>
+          <p:cNvSpPr txBox="1"/>
+          <p:nvPr/>
+        </p:nvSpPr>
+        <p:spPr>
+          <a:xfrm>
+            <a:off x="548640" y="475488"/>
+            <a:ext cx="11064240" cy="868680"/>
+          </a:xfrm>
+          <a:prstGeom prst="rect">
+            <a:avLst/>
+          </a:prstGeom>
+          <a:noFill/>
+        </p:spPr>
+        <p:txBody>
+          <a:bodyPr wrap="square" lIns="45720" rIns="45720" tIns="27432" bIns="27432" anchor="t">
+            <a:spAutoFit/>
+          </a:bodyPr>
+          <a:lstStyle/>
+          <a:p>
+            <a:pPr algn="l">
+              <a:lnSpc>
+                <a:spcPct val="100000"/>
+              </a:lnSpc>
+              <a:spcAft>
+                <a:spcPts val="400"/>
+              </a:spcAft>
+            </a:pPr>
+            <a:r>
+              <a:rPr sz="2300" b="1" i="0">
+                <a:solidFill>
+                  <a:srgbClr val="001E60"/>
+                </a:solidFill>
+                <a:latin typeface="Georgia"/>
+              </a:rPr>
+              <a:t>Six things about Hyde Park that a 100 MW greenfield benchmark never has to pay for</a:t>
+            </a:r>
+          </a:p>
+        </p:txBody>
+      </p:sp>
+      <p:sp>
+        <p:nvSpPr>
+          <p:cNvPr id="5" name="TextBox 4"/>
+          <p:cNvSpPr txBox="1"/>
+          <p:nvPr/>
+        </p:nvSpPr>
+        <p:spPr>
+          <a:xfrm>
+            <a:off x="548640" y="6419088"/>
+            <a:ext cx="8229600" cy="274320"/>
+          </a:xfrm>
+          <a:prstGeom prst="rect">
+            <a:avLst/>
+          </a:prstGeom>
+          <a:noFill/>
+        </p:spPr>
+        <p:txBody>
+          <a:bodyPr wrap="square" lIns="45720" rIns="45720" tIns="27432" bIns="27432" anchor="t">
+            <a:spAutoFit/>
+          </a:bodyPr>
+          <a:lstStyle/>
+          <a:p>
+            <a:pPr algn="l">
+              <a:lnSpc>
+                <a:spcPct val="105000"/>
+              </a:lnSpc>
+              <a:spcAft>
+                <a:spcPts val="400"/>
+              </a:spcAft>
+            </a:pPr>
+            <a:r>
+              <a:rPr sz="1000" b="0" i="0">
+                <a:solidFill>
+                  <a:srgbClr val="6B7280"/>
+                </a:solidFill>
+                <a:latin typeface="Calibri"/>
+              </a:rPr>
+              <a:t>EstimatingCoE | Eversource Energy | Stewards of Affordability</a:t>
+            </a:r>
+          </a:p>
+        </p:txBody>
+      </p:sp>
+      <p:sp>
+        <p:nvSpPr>
+          <p:cNvPr id="6" name="TextBox 5"/>
+          <p:cNvSpPr txBox="1"/>
+          <p:nvPr/>
+        </p:nvSpPr>
+        <p:spPr>
+          <a:xfrm>
+            <a:off x="10972800" y="6419088"/>
+            <a:ext cx="685800" cy="274320"/>
+          </a:xfrm>
+          <a:prstGeom prst="rect">
+            <a:avLst/>
+          </a:prstGeom>
+          <a:noFill/>
+        </p:spPr>
+        <p:txBody>
+          <a:bodyPr wrap="square" lIns="45720" rIns="45720" tIns="27432" bIns="27432" anchor="t">
+            <a:spAutoFit/>
+          </a:bodyPr>
+          <a:lstStyle/>
+          <a:p>
+            <a:pPr algn="r">
+              <a:lnSpc>
+                <a:spcPct val="105000"/>
+              </a:lnSpc>
+              <a:spcAft>
+                <a:spcPts val="400"/>
+              </a:spcAft>
+            </a:pPr>
+            <a:r>
+              <a:rPr sz="1000" b="0" i="0">
+                <a:solidFill>
+                  <a:srgbClr val="6B7280"/>
+                </a:solidFill>
+                <a:latin typeface="Calibri"/>
+              </a:rPr>
+              <a:t>17</a:t>
             </a:r>
           </a:p>
         </p:txBody>
@@ -15451,7 +19098,7 @@
 </p:sld>
 </file>
 
-<file path=ppt/slides/slide16.xml><?xml version="1.0" encoding="utf-8"?>
+<file path=ppt/slides/slide18.xml><?xml version="1.0" encoding="utf-8"?>
 <p:sld xmlns:a="http://schemas.openxmlformats.org/drawingml/2006/main" xmlns:p="http://schemas.openxmlformats.org/presentationml/2006/main" xmlns:r="http://schemas.openxmlformats.org/officeDocument/2006/relationships">
   <p:cSld>
     <p:spTree>
@@ -15668,7 +19315,7 @@
                 </a:solidFill>
                 <a:latin typeface="Calibri"/>
               </a:rPr>
-              <a:t>16</a:t>
+              <a:t>18</a:t>
             </a:r>
           </a:p>
         </p:txBody>
@@ -16085,7 +19732,7 @@
 </p:sld>
 </file>
 
-<file path=ppt/slides/slide17.xml><?xml version="1.0" encoding="utf-8"?>
+<file path=ppt/slides/slide19.xml><?xml version="1.0" encoding="utf-8"?>
 <p:sld xmlns:a="http://schemas.openxmlformats.org/drawingml/2006/main" xmlns:p="http://schemas.openxmlformats.org/presentationml/2006/main" xmlns:r="http://schemas.openxmlformats.org/officeDocument/2006/relationships">
   <p:cSld>
     <p:spTree>
@@ -16302,7 +19949,7 @@
                 </a:solidFill>
                 <a:latin typeface="Calibri"/>
               </a:rPr>
-              <a:t>17</a:t>
+              <a:t>19</a:t>
             </a:r>
           </a:p>
         </p:txBody>
@@ -16819,7 +20466,7 @@
 </p:sld>
 </file>
 
-<file path=ppt/slides/slide18.xml><?xml version="1.0" encoding="utf-8"?>
+<file path=ppt/slides/slide2.xml><?xml version="1.0" encoding="utf-8"?>
 <p:sld xmlns:a="http://schemas.openxmlformats.org/drawingml/2006/main" xmlns:p="http://schemas.openxmlformats.org/presentationml/2006/main" xmlns:r="http://schemas.openxmlformats.org/officeDocument/2006/relationships">
   <p:cSld>
     <p:spTree>
@@ -16910,7 +20557,7 @@
                 </a:solidFill>
                 <a:latin typeface="Calibri"/>
               </a:rPr>
-              <a:t>2 · HOW THE COST CHANGED   |   REVISION WALK, 26 AUG TO 24 SEP 2026</a:t>
+              <a:t>THE PROMISE</a:t>
             </a:r>
           </a:p>
         </p:txBody>
@@ -16952,7 +20599,7 @@
                 </a:solidFill>
                 <a:latin typeface="Georgia"/>
               </a:rPr>
-              <a:t>Four revisions in five weeks: how the September estimate settled at $57.2M</a:t>
+              <a:t>By the end of this deck you can answer one question in one breath</a:t>
             </a:r>
           </a:p>
         </p:txBody>
@@ -17036,39 +20683,21 @@
                 </a:solidFill>
                 <a:latin typeface="Calibri"/>
               </a:rPr>
-              <a:t>18</a:t>
+              <a:t>2</a:t>
             </a:r>
           </a:p>
         </p:txBody>
       </p:sp>
-      <p:graphicFrame>
-        <p:nvGraphicFramePr>
-          <p:cNvPr id="7" name="Chart 6"/>
-          <p:cNvGraphicFramePr>
-            <a:graphicFrameLocks noGrp="1"/>
-          </p:cNvGraphicFramePr>
-          <p:nvPr/>
-        </p:nvGraphicFramePr>
-        <p:xfrm>
-          <a:off x="457200" y="1371600"/>
-          <a:ext cx="6949440" cy="4846320"/>
-        </p:xfrm>
-        <a:graphic>
-          <a:graphicData uri="http://schemas.openxmlformats.org/drawingml/2006/chart">
-            <c:chart xmlns:c="http://schemas.openxmlformats.org/drawingml/2006/chart" r:id="rId2"/>
-          </a:graphicData>
-        </a:graphic>
-      </p:graphicFrame>
-      <p:sp>
-        <p:nvSpPr>
-          <p:cNvPr id="8" name="TextBox 7"/>
+      <p:sp>
+        <p:nvSpPr>
+          <p:cNvPr id="7" name="TextBox 6"/>
           <p:cNvSpPr txBox="1"/>
           <p:nvPr/>
         </p:nvSpPr>
         <p:spPr>
           <a:xfrm>
-            <a:off x="7589520" y="1417320"/>
-            <a:ext cx="4114800" cy="4846320"/>
+            <a:off x="548640" y="1417320"/>
+            <a:ext cx="10972800" cy="640080"/>
           </a:xfrm>
           <a:prstGeom prst="rect">
             <a:avLst/>
@@ -17076,156 +20705,616 @@
           <a:noFill/>
         </p:spPr>
         <p:txBody>
-          <a:bodyPr wrap="square" lIns="45720">
+          <a:bodyPr wrap="square" lIns="45720" rIns="45720" tIns="27432" bIns="27432" anchor="t">
             <a:spAutoFit/>
           </a:bodyPr>
           <a:lstStyle/>
           <a:p>
-            <a:pPr>
+            <a:pPr algn="l">
               <a:lnSpc>
                 <a:spcPct val="105000"/>
               </a:lnSpc>
               <a:spcAft>
-                <a:spcPts val="700"/>
+                <a:spcPts val="400"/>
               </a:spcAft>
             </a:pPr>
             <a:r>
-              <a:rPr sz="1350">
-                <a:solidFill>
-                  <a:srgbClr val="FFC72C"/>
+              <a:rPr sz="1900" b="0" i="0">
+                <a:solidFill>
+                  <a:srgbClr val="1F2A44"/>
                 </a:solidFill>
                 <a:latin typeface="Calibri"/>
               </a:rPr>
-              <a:t>▪  </a:t>
-            </a:r>
-            <a:r>
-              <a:rPr b="1" sz="1350">
-                <a:solidFill>
-                  <a:srgbClr val="1F2A44"/>
-                </a:solidFill>
-                <a:latin typeface="Calibri"/>
-              </a:rPr>
-              <a:t>Rev 0 carried the battery at about $6M </a:t>
-            </a:r>
-            <a:r>
-              <a:rPr sz="1350">
-                <a:solidFill>
-                  <a:srgbClr val="1F2A44"/>
-                </a:solidFill>
-                <a:latin typeface="Calibri"/>
-              </a:rPr>
-              <a:t>from the 2023 indicative sheet. The PM: 'we know the BESS system itself is 12.'</a:t>
-            </a:r>
-          </a:p>
-          <a:p>
-            <a:pPr>
+              <a:t>“Why is a $12 million battery a $57 million project?”  Because a vendor prices the battery. We build the station, the site, the feeder protection and the siting case, and we carry the risk and the cost of money.</a:t>
+            </a:r>
+          </a:p>
+        </p:txBody>
+      </p:sp>
+      <p:sp>
+        <p:nvSpPr>
+          <p:cNvPr id="8" name="Rectangle 7"/>
+          <p:cNvSpPr/>
+          <p:nvPr/>
+        </p:nvSpPr>
+        <p:spPr>
+          <a:xfrm>
+            <a:off x="548640" y="2468880"/>
+            <a:ext cx="3566160" cy="2194560"/>
+          </a:xfrm>
+          <a:prstGeom prst="rect">
+            <a:avLst/>
+          </a:prstGeom>
+          <a:solidFill>
+            <a:srgbClr val="F2F4F8"/>
+          </a:solidFill>
+          <a:ln>
+            <a:noFill/>
+          </a:ln>
+          <a:effectLst/>
+        </p:spPr>
+        <p:style>
+          <a:lnRef idx="1">
+            <a:schemeClr val="accent1"/>
+          </a:lnRef>
+          <a:fillRef idx="3">
+            <a:schemeClr val="accent1"/>
+          </a:fillRef>
+          <a:effectRef idx="2">
+            <a:schemeClr val="accent1"/>
+          </a:effectRef>
+          <a:fontRef idx="minor">
+            <a:schemeClr val="lt1"/>
+          </a:fontRef>
+        </p:style>
+        <p:txBody>
+          <a:bodyPr rtlCol="0" anchor="ctr"/>
+          <a:lstStyle/>
+          <a:p>
+            <a:pPr algn="ctr"/>
+          </a:p>
+        </p:txBody>
+      </p:sp>
+      <p:sp>
+        <p:nvSpPr>
+          <p:cNvPr id="9" name="TextBox 8"/>
+          <p:cNvSpPr txBox="1"/>
+          <p:nvPr/>
+        </p:nvSpPr>
+        <p:spPr>
+          <a:xfrm>
+            <a:off x="685800" y="2578608"/>
+            <a:ext cx="3291840" cy="822960"/>
+          </a:xfrm>
+          <a:prstGeom prst="rect">
+            <a:avLst/>
+          </a:prstGeom>
+          <a:noFill/>
+        </p:spPr>
+        <p:txBody>
+          <a:bodyPr wrap="square" lIns="45720" rIns="45720" tIns="27432" bIns="27432" anchor="t">
+            <a:spAutoFit/>
+          </a:bodyPr>
+          <a:lstStyle/>
+          <a:p>
+            <a:pPr algn="l">
               <a:lnSpc>
                 <a:spcPct val="105000"/>
               </a:lnSpc>
               <a:spcAft>
-                <a:spcPts val="700"/>
+                <a:spcPts val="400"/>
               </a:spcAft>
             </a:pPr>
             <a:r>
-              <a:rPr sz="1350">
-                <a:solidFill>
-                  <a:srgbClr val="FFC72C"/>
-                </a:solidFill>
-                <a:latin typeface="Calibri"/>
-              </a:rPr>
-              <a:t>▪  </a:t>
-            </a:r>
-            <a:r>
-              <a:rPr b="1" sz="1350">
-                <a:solidFill>
-                  <a:srgbClr val="1F2A44"/>
-                </a:solidFill>
-                <a:latin typeface="Calibri"/>
-              </a:rPr>
-              <a:t>Rev 2 reset it to the cover agreement, escalated to $13.1M, </a:t>
-            </a:r>
-            <a:r>
-              <a:rPr sz="1350">
-                <a:solidFill>
-                  <a:srgbClr val="1F2A44"/>
-                </a:solidFill>
-                <a:latin typeface="Calibri"/>
-              </a:rPr>
-              <a:t>and carried $1.5M of 'relays for batteries' from a 2023 bidder that priced its own switchgear.</a:t>
-            </a:r>
-          </a:p>
-          <a:p>
-            <a:pPr>
+              <a:rPr sz="4000" b="1" i="0">
+                <a:solidFill>
+                  <a:srgbClr val="001E60"/>
+                </a:solidFill>
+                <a:latin typeface="Georgia"/>
+              </a:rPr>
+              <a:t>$12.1M</a:t>
+            </a:r>
+          </a:p>
+        </p:txBody>
+      </p:sp>
+      <p:sp>
+        <p:nvSpPr>
+          <p:cNvPr id="10" name="TextBox 9"/>
+          <p:cNvSpPr txBox="1"/>
+          <p:nvPr/>
+        </p:nvSpPr>
+        <p:spPr>
+          <a:xfrm>
+            <a:off x="685800" y="3264408"/>
+            <a:ext cx="3291840" cy="457200"/>
+          </a:xfrm>
+          <a:prstGeom prst="rect">
+            <a:avLst/>
+          </a:prstGeom>
+          <a:noFill/>
+        </p:spPr>
+        <p:txBody>
+          <a:bodyPr wrap="square" lIns="45720" rIns="45720" tIns="27432" bIns="27432" anchor="t">
+            <a:spAutoFit/>
+          </a:bodyPr>
+          <a:lstStyle/>
+          <a:p>
+            <a:pPr algn="l">
               <a:lnSpc>
                 <a:spcPct val="105000"/>
               </a:lnSpc>
               <a:spcAft>
-                <a:spcPts val="700"/>
+                <a:spcPts val="400"/>
               </a:spcAft>
             </a:pPr>
             <a:r>
-              <a:rPr sz="1350">
-                <a:solidFill>
-                  <a:srgbClr val="FFC72C"/>
+              <a:rPr sz="1500" b="1" i="0">
+                <a:solidFill>
+                  <a:srgbClr val="1F2A44"/>
                 </a:solidFill>
                 <a:latin typeface="Calibri"/>
               </a:rPr>
-              <a:t>▪  </a:t>
-            </a:r>
-            <a:r>
-              <a:rPr b="1" sz="1350">
-                <a:solidFill>
-                  <a:srgbClr val="1F2A44"/>
+              <a:t>Vendor fixed-price contract</a:t>
+            </a:r>
+          </a:p>
+        </p:txBody>
+      </p:sp>
+      <p:sp>
+        <p:nvSpPr>
+          <p:cNvPr id="11" name="TextBox 10"/>
+          <p:cNvSpPr txBox="1"/>
+          <p:nvPr/>
+        </p:nvSpPr>
+        <p:spPr>
+          <a:xfrm>
+            <a:off x="685800" y="3648456"/>
+            <a:ext cx="3291840" cy="969263"/>
+          </a:xfrm>
+          <a:prstGeom prst="rect">
+            <a:avLst/>
+          </a:prstGeom>
+          <a:noFill/>
+        </p:spPr>
+        <p:txBody>
+          <a:bodyPr wrap="square" lIns="45720" rIns="45720" tIns="27432" bIns="27432" anchor="t">
+            <a:spAutoFit/>
+          </a:bodyPr>
+          <a:lstStyle/>
+          <a:p>
+            <a:pPr algn="l">
+              <a:lnSpc>
+                <a:spcPct val="100000"/>
+              </a:lnSpc>
+              <a:spcAft>
+                <a:spcPts val="400"/>
+              </a:spcAft>
+            </a:pPr>
+            <a:r>
+              <a:rPr sz="1250" b="0" i="0">
+                <a:solidFill>
+                  <a:srgbClr val="6B7280"/>
                 </a:solidFill>
                 <a:latin typeface="Calibri"/>
               </a:rPr>
-              <a:t>Rev 3 removed the relays </a:t>
-            </a:r>
-            <a:r>
-              <a:rPr sz="1350">
-                <a:solidFill>
-                  <a:srgbClr val="1F2A44"/>
-                </a:solidFill>
-                <a:latin typeface="Calibri"/>
-              </a:rPr>
-              <a:t>(P&amp;C Engineering: included in the $300K Siemens skid), cut three SSVTs to one, and re-based engineering to $501K to go plus actuals.</a:t>
-            </a:r>
-          </a:p>
-          <a:p>
-            <a:pPr>
+              <a:t>Nomad cover agreement, 10 Mar 2026. 12 Voyager LFP units, PCS, BMS, fire protection, 10-yr warranty. $605/kWh, $1,211/kW.</a:t>
+            </a:r>
+          </a:p>
+        </p:txBody>
+      </p:sp>
+      <p:sp>
+        <p:nvSpPr>
+          <p:cNvPr id="12" name="Rectangle 11"/>
+          <p:cNvSpPr/>
+          <p:nvPr/>
+        </p:nvSpPr>
+        <p:spPr>
+          <a:xfrm>
+            <a:off x="4315968" y="2468880"/>
+            <a:ext cx="3566160" cy="2194560"/>
+          </a:xfrm>
+          <a:prstGeom prst="rect">
+            <a:avLst/>
+          </a:prstGeom>
+          <a:solidFill>
+            <a:srgbClr val="F2F4F8"/>
+          </a:solidFill>
+          <a:ln>
+            <a:noFill/>
+          </a:ln>
+          <a:effectLst/>
+        </p:spPr>
+        <p:style>
+          <a:lnRef idx="1">
+            <a:schemeClr val="accent1"/>
+          </a:lnRef>
+          <a:fillRef idx="3">
+            <a:schemeClr val="accent1"/>
+          </a:fillRef>
+          <a:effectRef idx="2">
+            <a:schemeClr val="accent1"/>
+          </a:effectRef>
+          <a:fontRef idx="minor">
+            <a:schemeClr val="lt1"/>
+          </a:fontRef>
+        </p:style>
+        <p:txBody>
+          <a:bodyPr rtlCol="0" anchor="ctr"/>
+          <a:lstStyle/>
+          <a:p>
+            <a:pPr algn="ctr"/>
+          </a:p>
+        </p:txBody>
+      </p:sp>
+      <p:sp>
+        <p:nvSpPr>
+          <p:cNvPr id="13" name="TextBox 12"/>
+          <p:cNvSpPr txBox="1"/>
+          <p:nvPr/>
+        </p:nvSpPr>
+        <p:spPr>
+          <a:xfrm>
+            <a:off x="4453128" y="2578608"/>
+            <a:ext cx="3291840" cy="822960"/>
+          </a:xfrm>
+          <a:prstGeom prst="rect">
+            <a:avLst/>
+          </a:prstGeom>
+          <a:noFill/>
+        </p:spPr>
+        <p:txBody>
+          <a:bodyPr wrap="square" lIns="45720" rIns="45720" tIns="27432" bIns="27432" anchor="t">
+            <a:spAutoFit/>
+          </a:bodyPr>
+          <a:lstStyle/>
+          <a:p>
+            <a:pPr algn="l">
               <a:lnSpc>
                 <a:spcPct val="105000"/>
               </a:lnSpc>
               <a:spcAft>
-                <a:spcPts val="700"/>
+                <a:spcPts val="400"/>
               </a:spcAft>
             </a:pPr>
             <a:r>
-              <a:rPr sz="1350">
-                <a:solidFill>
-                  <a:srgbClr val="FFC72C"/>
+              <a:rPr sz="4000" b="1" i="0">
+                <a:solidFill>
+                  <a:srgbClr val="6E1F2E"/>
+                </a:solidFill>
+                <a:latin typeface="Georgia"/>
+              </a:rPr>
+              <a:t>$57.2M</a:t>
+            </a:r>
+          </a:p>
+        </p:txBody>
+      </p:sp>
+      <p:sp>
+        <p:nvSpPr>
+          <p:cNvPr id="14" name="TextBox 13"/>
+          <p:cNvSpPr txBox="1"/>
+          <p:nvPr/>
+        </p:nvSpPr>
+        <p:spPr>
+          <a:xfrm>
+            <a:off x="4453128" y="3264408"/>
+            <a:ext cx="3291840" cy="457200"/>
+          </a:xfrm>
+          <a:prstGeom prst="rect">
+            <a:avLst/>
+          </a:prstGeom>
+          <a:noFill/>
+        </p:spPr>
+        <p:txBody>
+          <a:bodyPr wrap="square" lIns="45720" rIns="45720" tIns="27432" bIns="27432" anchor="t">
+            <a:spAutoFit/>
+          </a:bodyPr>
+          <a:lstStyle/>
+          <a:p>
+            <a:pPr algn="l">
+              <a:lnSpc>
+                <a:spcPct val="105000"/>
+              </a:lnSpc>
+              <a:spcAft>
+                <a:spcPts val="400"/>
+              </a:spcAft>
+            </a:pPr>
+            <a:r>
+              <a:rPr sz="1500" b="1" i="0">
+                <a:solidFill>
+                  <a:srgbClr val="1F2A44"/>
                 </a:solidFill>
                 <a:latin typeface="Calibri"/>
               </a:rPr>
-              <a:t>▪  </a:t>
-            </a:r>
-            <a:r>
-              <a:rPr b="1" sz="1350">
+              <a:t>Project 21334 approval level</a:t>
+            </a:r>
+          </a:p>
+        </p:txBody>
+      </p:sp>
+      <p:sp>
+        <p:nvSpPr>
+          <p:cNvPr id="15" name="TextBox 14"/>
+          <p:cNvSpPr txBox="1"/>
+          <p:nvPr/>
+        </p:nvSpPr>
+        <p:spPr>
+          <a:xfrm>
+            <a:off x="4453128" y="3648456"/>
+            <a:ext cx="3291840" cy="969263"/>
+          </a:xfrm>
+          <a:prstGeom prst="rect">
+            <a:avLst/>
+          </a:prstGeom>
+          <a:noFill/>
+        </p:spPr>
+        <p:txBody>
+          <a:bodyPr wrap="square" lIns="45720" rIns="45720" tIns="27432" bIns="27432" anchor="t">
+            <a:spAutoFit/>
+          </a:bodyPr>
+          <a:lstStyle/>
+          <a:p>
+            <a:pPr algn="l">
+              <a:lnSpc>
+                <a:spcPct val="100000"/>
+              </a:lnSpc>
+              <a:spcAft>
+                <a:spcPts val="400"/>
+              </a:spcAft>
+            </a:pPr>
+            <a:r>
+              <a:rPr sz="1250" b="0" i="0">
+                <a:solidFill>
+                  <a:srgbClr val="6B7280"/>
+                </a:solidFill>
+                <a:latin typeface="Calibri"/>
+              </a:rPr>
+              <a:t>ESF Total Rev 3. Station 360 $50.0M plus Station 496 protection $7.3M. $2,862/kWh, $5,725/kW. Conceptual, -25%/+50%.</a:t>
+            </a:r>
+          </a:p>
+        </p:txBody>
+      </p:sp>
+      <p:sp>
+        <p:nvSpPr>
+          <p:cNvPr id="16" name="Rectangle 15"/>
+          <p:cNvSpPr/>
+          <p:nvPr/>
+        </p:nvSpPr>
+        <p:spPr>
+          <a:xfrm>
+            <a:off x="8083296" y="2468880"/>
+            <a:ext cx="3566160" cy="2194560"/>
+          </a:xfrm>
+          <a:prstGeom prst="rect">
+            <a:avLst/>
+          </a:prstGeom>
+          <a:solidFill>
+            <a:srgbClr val="F2F4F8"/>
+          </a:solidFill>
+          <a:ln>
+            <a:noFill/>
+          </a:ln>
+          <a:effectLst/>
+        </p:spPr>
+        <p:style>
+          <a:lnRef idx="1">
+            <a:schemeClr val="accent1"/>
+          </a:lnRef>
+          <a:fillRef idx="3">
+            <a:schemeClr val="accent1"/>
+          </a:fillRef>
+          <a:effectRef idx="2">
+            <a:schemeClr val="accent1"/>
+          </a:effectRef>
+          <a:fontRef idx="minor">
+            <a:schemeClr val="lt1"/>
+          </a:fontRef>
+        </p:style>
+        <p:txBody>
+          <a:bodyPr rtlCol="0" anchor="ctr"/>
+          <a:lstStyle/>
+          <a:p>
+            <a:pPr algn="ctr"/>
+          </a:p>
+        </p:txBody>
+      </p:sp>
+      <p:sp>
+        <p:nvSpPr>
+          <p:cNvPr id="17" name="TextBox 16"/>
+          <p:cNvSpPr txBox="1"/>
+          <p:nvPr/>
+        </p:nvSpPr>
+        <p:spPr>
+          <a:xfrm>
+            <a:off x="8220456" y="2578608"/>
+            <a:ext cx="3291840" cy="822960"/>
+          </a:xfrm>
+          <a:prstGeom prst="rect">
+            <a:avLst/>
+          </a:prstGeom>
+          <a:noFill/>
+        </p:spPr>
+        <p:txBody>
+          <a:bodyPr wrap="square" lIns="45720" rIns="45720" tIns="27432" bIns="27432" anchor="t">
+            <a:spAutoFit/>
+          </a:bodyPr>
+          <a:lstStyle/>
+          <a:p>
+            <a:pPr algn="l">
+              <a:lnSpc>
+                <a:spcPct val="105000"/>
+              </a:lnSpc>
+              <a:spcAft>
+                <a:spcPts val="400"/>
+              </a:spcAft>
+            </a:pPr>
+            <a:r>
+              <a:rPr sz="4000" b="1" i="0">
+                <a:solidFill>
+                  <a:srgbClr val="001E60"/>
+                </a:solidFill>
+                <a:latin typeface="Georgia"/>
+              </a:rPr>
+              <a:t>21%</a:t>
+            </a:r>
+          </a:p>
+        </p:txBody>
+      </p:sp>
+      <p:sp>
+        <p:nvSpPr>
+          <p:cNvPr id="18" name="TextBox 17"/>
+          <p:cNvSpPr txBox="1"/>
+          <p:nvPr/>
+        </p:nvSpPr>
+        <p:spPr>
+          <a:xfrm>
+            <a:off x="8220456" y="3264408"/>
+            <a:ext cx="3291840" cy="457200"/>
+          </a:xfrm>
+          <a:prstGeom prst="rect">
+            <a:avLst/>
+          </a:prstGeom>
+          <a:noFill/>
+        </p:spPr>
+        <p:txBody>
+          <a:bodyPr wrap="square" lIns="45720" rIns="45720" tIns="27432" bIns="27432" anchor="t">
+            <a:spAutoFit/>
+          </a:bodyPr>
+          <a:lstStyle/>
+          <a:p>
+            <a:pPr algn="l">
+              <a:lnSpc>
+                <a:spcPct val="105000"/>
+              </a:lnSpc>
+              <a:spcAft>
+                <a:spcPts val="400"/>
+              </a:spcAft>
+            </a:pPr>
+            <a:r>
+              <a:rPr sz="1500" b="1" i="0">
                 <a:solidFill>
                   <a:srgbClr val="1F2A44"/>
                 </a:solidFill>
                 <a:latin typeface="Calibri"/>
               </a:rPr>
-              <a:t>Net: </a:t>
-            </a:r>
-            <a:r>
-              <a:rPr sz="1350">
+              <a:t>Battery share of the total</a:t>
+            </a:r>
+          </a:p>
+        </p:txBody>
+      </p:sp>
+      <p:sp>
+        <p:nvSpPr>
+          <p:cNvPr id="19" name="TextBox 18"/>
+          <p:cNvSpPr txBox="1"/>
+          <p:nvPr/>
+        </p:nvSpPr>
+        <p:spPr>
+          <a:xfrm>
+            <a:off x="8220456" y="3648456"/>
+            <a:ext cx="3291840" cy="969263"/>
+          </a:xfrm>
+          <a:prstGeom prst="rect">
+            <a:avLst/>
+          </a:prstGeom>
+          <a:noFill/>
+        </p:spPr>
+        <p:txBody>
+          <a:bodyPr wrap="square" lIns="45720" rIns="45720" tIns="27432" bIns="27432" anchor="t">
+            <a:spAutoFit/>
+          </a:bodyPr>
+          <a:lstStyle/>
+          <a:p>
+            <a:pPr algn="l">
+              <a:lnSpc>
+                <a:spcPct val="100000"/>
+              </a:lnSpc>
+              <a:spcAft>
+                <a:spcPts val="400"/>
+              </a:spcAft>
+            </a:pPr>
+            <a:r>
+              <a:rPr sz="1250" b="0" i="0">
+                <a:solidFill>
+                  <a:srgbClr val="6B7280"/>
+                </a:solidFill>
+                <a:latin typeface="Calibri"/>
+              </a:rPr>
+              <a:t>Add the D-Line circuit extension (24211, $4.8M conceptual) and the share drops to 20%. Four dollars of every five are not the battery.</a:t>
+            </a:r>
+          </a:p>
+        </p:txBody>
+      </p:sp>
+      <p:sp>
+        <p:nvSpPr>
+          <p:cNvPr id="20" name="TextBox 19"/>
+          <p:cNvSpPr txBox="1"/>
+          <p:nvPr/>
+        </p:nvSpPr>
+        <p:spPr>
+          <a:xfrm>
+            <a:off x="548640" y="4937760"/>
+            <a:ext cx="11064240" cy="1371600"/>
+          </a:xfrm>
+          <a:prstGeom prst="rect">
+            <a:avLst/>
+          </a:prstGeom>
+          <a:noFill/>
+        </p:spPr>
+        <p:txBody>
+          <a:bodyPr wrap="square" lIns="45720" rIns="45720" tIns="27432" bIns="27432" anchor="t">
+            <a:spAutoFit/>
+          </a:bodyPr>
+          <a:lstStyle/>
+          <a:p>
+            <a:pPr algn="l">
+              <a:lnSpc>
+                <a:spcPct val="105000"/>
+              </a:lnSpc>
+              <a:spcAft>
+                <a:spcPts val="400"/>
+              </a:spcAft>
+            </a:pPr>
+            <a:r>
+              <a:rPr sz="1500" b="1" i="0">
+                <a:solidFill>
+                  <a:srgbClr val="001E60"/>
+                </a:solidFill>
+                <a:latin typeface="Calibri"/>
+              </a:rPr>
+              <a:t>Three sections: </a:t>
+            </a:r>
+            <a:r>
+              <a:rPr sz="1500" b="0" i="0">
                 <a:solidFill>
                   <a:srgbClr val="1F2A44"/>
                 </a:solidFill>
                 <a:latin typeface="Calibri"/>
               </a:rPr>
-              <a:t>+$10.0M from Rev 0, of which $7.0M is the battery line catching up to the contract.</a:t>
+              <a:t>where the money sits (thirteen layers, unit costs, benchmarks, six price curves); how the cost changed (2021 to today); can the number be defended (red team, stress tests, what must close).</a:t>
+            </a:r>
+          </a:p>
+          <a:p>
+            <a:pPr algn="l">
+              <a:lnSpc>
+                <a:spcPct val="105000"/>
+              </a:lnSpc>
+              <a:spcAft>
+                <a:spcPts val="400"/>
+              </a:spcAft>
+            </a:pPr>
+            <a:r>
+              <a:rPr sz="1500" b="1" i="0">
+                <a:solidFill>
+                  <a:srgbClr val="001E60"/>
+                </a:solidFill>
+                <a:latin typeface="Calibri"/>
+              </a:rPr>
+              <a:t>Against 55 public projects its own size: </a:t>
+            </a:r>
+            <a:r>
+              <a:rPr sz="1500" b="0" i="0">
+                <a:solidFill>
+                  <a:srgbClr val="1F2A44"/>
+                </a:solidFill>
+                <a:latin typeface="Calibri"/>
+              </a:rPr>
+              <a:t>the battery installed sits at the 58% percentile, the station complete at the 85% (74% among the 31 utility-owned), and the approval level above every member. The gap is the station, the interconnection and the loaders, not the battery.</a:t>
             </a:r>
           </a:p>
         </p:txBody>
@@ -17238,7 +21327,7 @@
 </p:sld>
 </file>
 
-<file path=ppt/slides/slide19.xml><?xml version="1.0" encoding="utf-8"?>
+<file path=ppt/slides/slide20.xml><?xml version="1.0" encoding="utf-8"?>
 <p:sld xmlns:a="http://schemas.openxmlformats.org/drawingml/2006/main" xmlns:p="http://schemas.openxmlformats.org/presentationml/2006/main" xmlns:r="http://schemas.openxmlformats.org/officeDocument/2006/relationships">
   <p:cSld>
     <p:spTree>
@@ -17329,7 +21418,7 @@
                 </a:solidFill>
                 <a:latin typeface="Calibri"/>
               </a:rPr>
-              <a:t>2 · HOW THE COST CHANGED   |   BATTERY SCOPE PRICE POINTS ($/KWH AT 20 MWH)</a:t>
+              <a:t>2 · HOW THE COST CHANGED   |   REVISION WALK, 26 AUG TO 24 SEP 2026</a:t>
             </a:r>
           </a:p>
         </p:txBody>
@@ -17371,7 +21460,7 @@
                 </a:solidFill>
                 <a:latin typeface="Georgia"/>
               </a:rPr>
-              <a:t>The battery: a $9.6M to $18.2M spread in 2023, a $12.1M fixed price in 2026</a:t>
+              <a:t>Four revisions in five weeks: how the September estimate settled at $57.2M</a:t>
             </a:r>
           </a:p>
         </p:txBody>
@@ -17455,7 +21544,7 @@
                 </a:solidFill>
                 <a:latin typeface="Calibri"/>
               </a:rPr>
-              <a:t>19</a:t>
+              <a:t>20</a:t>
             </a:r>
           </a:p>
         </p:txBody>
@@ -17505,11 +21594,11 @@
                 <a:spcPct val="105000"/>
               </a:lnSpc>
               <a:spcAft>
-                <a:spcPts val="600"/>
+                <a:spcPts val="700"/>
               </a:spcAft>
             </a:pPr>
             <a:r>
-              <a:rPr sz="1300">
+              <a:rPr sz="1350">
                 <a:solidFill>
                   <a:srgbClr val="FFC72C"/>
                 </a:solidFill>
@@ -17518,22 +21607,22 @@
               <a:t>▪  </a:t>
             </a:r>
             <a:r>
-              <a:rPr b="1" sz="1300">
+              <a:rPr b="1" sz="1350">
                 <a:solidFill>
                   <a:srgbClr val="1F2A44"/>
                 </a:solidFill>
                 <a:latin typeface="Calibri"/>
               </a:rPr>
-              <a:t>July 2023, five bidders, 10 MW / 20 MWh: </a:t>
-            </a:r>
-            <a:r>
-              <a:rPr sz="1300">
+              <a:t>Rev 0 carried the battery at about $6M </a:t>
+            </a:r>
+            <a:r>
+              <a:rPr sz="1350">
                 <a:solidFill>
                   <a:srgbClr val="1F2A44"/>
                 </a:solidFill>
                 <a:latin typeface="Calibri"/>
               </a:rPr>
-              <a:t>$9.6M to $18.2M. Every bidder excluded interconnection, permits beyond local, below-grade risk, sound walls or spares.</a:t>
+              <a:t>from the 2023 indicative sheet. The PM: 'we know the BESS system itself is 12.'</a:t>
             </a:r>
           </a:p>
           <a:p>
@@ -17542,11 +21631,11 @@
                 <a:spcPct val="105000"/>
               </a:lnSpc>
               <a:spcAft>
-                <a:spcPts val="600"/>
+                <a:spcPts val="700"/>
               </a:spcAft>
             </a:pPr>
             <a:r>
-              <a:rPr sz="1300">
+              <a:rPr sz="1350">
                 <a:solidFill>
                   <a:srgbClr val="FFC72C"/>
                 </a:solidFill>
@@ -17555,22 +21644,22 @@
               <a:t>▪  </a:t>
             </a:r>
             <a:r>
-              <a:rPr b="1" sz="1300">
+              <a:rPr b="1" sz="1350">
                 <a:solidFill>
                   <a:srgbClr val="1F2A44"/>
                 </a:solidFill>
                 <a:latin typeface="Calibri"/>
               </a:rPr>
-              <a:t>Company 3 ($18.2M, burgundy) </a:t>
-            </a:r>
-            <a:r>
-              <a:rPr sz="1300">
+              <a:t>Rev 2 reset it to the cover agreement, escalated to $13.1M, </a:t>
+            </a:r>
+            <a:r>
+              <a:rPr sz="1350">
                 <a:solidFill>
                   <a:srgbClr val="1F2A44"/>
                 </a:solidFill>
                 <a:latin typeface="Calibri"/>
               </a:rPr>
-              <a:t>became the E-23-373 basis because it alone priced turnkey civil ($4.56M) and installation.</a:t>
+              <a:t>and carried $1.5M of 'relays for batteries' from a 2023 bidder that priced its own switchgear.</a:t>
             </a:r>
           </a:p>
           <a:p>
@@ -17579,11 +21668,11 @@
                 <a:spcPct val="105000"/>
               </a:lnSpc>
               <a:spcAft>
-                <a:spcPts val="600"/>
+                <a:spcPts val="700"/>
               </a:spcAft>
             </a:pPr>
             <a:r>
-              <a:rPr sz="1300">
+              <a:rPr sz="1350">
                 <a:solidFill>
                   <a:srgbClr val="FFC72C"/>
                 </a:solidFill>
@@ -17592,22 +21681,22 @@
               <a:t>▪  </a:t>
             </a:r>
             <a:r>
-              <a:rPr b="1" sz="1300">
+              <a:rPr b="1" sz="1350">
                 <a:solidFill>
                   <a:srgbClr val="1F2A44"/>
                 </a:solidFill>
                 <a:latin typeface="Calibri"/>
               </a:rPr>
-              <a:t>March 2026 contract, $12.1M (gold): </a:t>
-            </a:r>
-            <a:r>
-              <a:rPr sz="1300">
+              <a:t>Rev 3 removed the relays </a:t>
+            </a:r>
+            <a:r>
+              <a:rPr sz="1350">
                 <a:solidFill>
                   <a:srgbClr val="1F2A44"/>
                 </a:solidFill>
                 <a:latin typeface="Calibri"/>
               </a:rPr>
-              <a:t>supply only, with supervision. Civil, install, GSUs, station and interconnection moved to Eversource scope.</a:t>
+              <a:t>(P&amp;C Engineering: included in the $300K Siemens skid), cut three SSVTs to one, and re-based engineering to $501K to go plus actuals.</a:t>
             </a:r>
           </a:p>
           <a:p>
@@ -17616,11 +21705,11 @@
                 <a:spcPct val="105000"/>
               </a:lnSpc>
               <a:spcAft>
-                <a:spcPts val="600"/>
+                <a:spcPts val="700"/>
               </a:spcAft>
             </a:pPr>
             <a:r>
-              <a:rPr sz="1300">
+              <a:rPr sz="1350">
                 <a:solidFill>
                   <a:srgbClr val="FFC72C"/>
                 </a:solidFill>
@@ -17629,59 +21718,22 @@
               <a:t>▪  </a:t>
             </a:r>
             <a:r>
-              <a:rPr b="1" sz="1300">
+              <a:rPr b="1" sz="1350">
                 <a:solidFill>
                   <a:srgbClr val="1F2A44"/>
                 </a:solidFill>
                 <a:latin typeface="Calibri"/>
               </a:rPr>
-              <a:t>Equipment-only inside the contract: </a:t>
-            </a:r>
-            <a:r>
-              <a:rPr sz="1300">
+              <a:t>Net: </a:t>
+            </a:r>
+            <a:r>
+              <a:rPr sz="1350">
                 <a:solidFill>
                   <a:srgbClr val="1F2A44"/>
                 </a:solidFill>
                 <a:latin typeface="Calibri"/>
               </a:rPr>
-              <a:t>$10.64M, $532/kWh, in line with published 2025-26 turnkey system indices (slides 9-10).</a:t>
-            </a:r>
-          </a:p>
-          <a:p>
-            <a:pPr>
-              <a:lnSpc>
-                <a:spcPct val="105000"/>
-              </a:lnSpc>
-              <a:spcAft>
-                <a:spcPts val="600"/>
-              </a:spcAft>
-            </a:pPr>
-            <a:r>
-              <a:rPr sz="1300">
-                <a:solidFill>
-                  <a:srgbClr val="FFC72C"/>
-                </a:solidFill>
-                <a:latin typeface="Calibri"/>
-              </a:rPr>
-              <a:t>▪  </a:t>
-            </a:r>
-            <a:r>
-              <a:rPr b="1" sz="1300">
-                <a:solidFill>
-                  <a:srgbClr val="1F2A44"/>
-                </a:solidFill>
-                <a:latin typeface="Calibri"/>
-              </a:rPr>
-              <a:t>Rev 3 adds $1.13M of escalation </a:t>
-            </a:r>
-            <a:r>
-              <a:rPr sz="1300">
-                <a:solidFill>
-                  <a:srgbClr val="1F2A44"/>
-                </a:solidFill>
-                <a:latin typeface="Calibri"/>
-              </a:rPr>
-              <a:t>to a price the contract fixes until Final Acceptance.</a:t>
+              <a:t>+$10.0M from Rev 0, of which $7.0M is the battery line catching up to the contract.</a:t>
             </a:r>
           </a:p>
         </p:txBody>
@@ -17694,7 +21746,7 @@
 </p:sld>
 </file>
 
-<file path=ppt/slides/slide2.xml><?xml version="1.0" encoding="utf-8"?>
+<file path=ppt/slides/slide21.xml><?xml version="1.0" encoding="utf-8"?>
 <p:sld xmlns:a="http://schemas.openxmlformats.org/drawingml/2006/main" xmlns:p="http://schemas.openxmlformats.org/presentationml/2006/main" xmlns:r="http://schemas.openxmlformats.org/officeDocument/2006/relationships">
   <p:cSld>
     <p:spTree>
@@ -17785,7 +21837,7 @@
                 </a:solidFill>
                 <a:latin typeface="Calibri"/>
               </a:rPr>
-              <a:t>THE PROMISE</a:t>
+              <a:t>2 · HOW THE COST CHANGED   |   BATTERY SCOPE PRICE POINTS ($/KWH AT 20 MWH)</a:t>
             </a:r>
           </a:p>
         </p:txBody>
@@ -17827,7 +21879,7 @@
                 </a:solidFill>
                 <a:latin typeface="Georgia"/>
               </a:rPr>
-              <a:t>By the end of this deck you can answer one question in one breath</a:t>
+              <a:t>The battery: a $9.6M to $18.2M spread in 2023, a $12.1M fixed price in 2026</a:t>
             </a:r>
           </a:p>
         </p:txBody>
@@ -17911,21 +21963,39 @@
                 </a:solidFill>
                 <a:latin typeface="Calibri"/>
               </a:rPr>
-              <a:t>2</a:t>
+              <a:t>21</a:t>
             </a:r>
           </a:p>
         </p:txBody>
       </p:sp>
-      <p:sp>
-        <p:nvSpPr>
-          <p:cNvPr id="7" name="TextBox 6"/>
+      <p:graphicFrame>
+        <p:nvGraphicFramePr>
+          <p:cNvPr id="7" name="Chart 6"/>
+          <p:cNvGraphicFramePr>
+            <a:graphicFrameLocks noGrp="1"/>
+          </p:cNvGraphicFramePr>
+          <p:nvPr/>
+        </p:nvGraphicFramePr>
+        <p:xfrm>
+          <a:off x="457200" y="1371600"/>
+          <a:ext cx="6949440" cy="4846320"/>
+        </p:xfrm>
+        <a:graphic>
+          <a:graphicData uri="http://schemas.openxmlformats.org/drawingml/2006/chart">
+            <c:chart xmlns:c="http://schemas.openxmlformats.org/drawingml/2006/chart" r:id="rId2"/>
+          </a:graphicData>
+        </a:graphic>
+      </p:graphicFrame>
+      <p:sp>
+        <p:nvSpPr>
+          <p:cNvPr id="8" name="TextBox 7"/>
           <p:cNvSpPr txBox="1"/>
           <p:nvPr/>
         </p:nvSpPr>
         <p:spPr>
           <a:xfrm>
-            <a:off x="548640" y="1417320"/>
-            <a:ext cx="10972800" cy="640080"/>
+            <a:off x="7589520" y="1417320"/>
+            <a:ext cx="4114800" cy="4846320"/>
           </a:xfrm>
           <a:prstGeom prst="rect">
             <a:avLst/>
@@ -17933,588 +22003,193 @@
           <a:noFill/>
         </p:spPr>
         <p:txBody>
-          <a:bodyPr wrap="square" lIns="45720" rIns="45720" tIns="27432" bIns="27432" anchor="t">
+          <a:bodyPr wrap="square" lIns="45720">
             <a:spAutoFit/>
           </a:bodyPr>
           <a:lstStyle/>
           <a:p>
-            <a:pPr algn="l">
+            <a:pPr>
               <a:lnSpc>
                 <a:spcPct val="105000"/>
               </a:lnSpc>
               <a:spcAft>
-                <a:spcPts val="400"/>
+                <a:spcPts val="600"/>
               </a:spcAft>
             </a:pPr>
             <a:r>
-              <a:rPr sz="1900" b="0" i="0">
+              <a:rPr sz="1300">
+                <a:solidFill>
+                  <a:srgbClr val="FFC72C"/>
+                </a:solidFill>
+                <a:latin typeface="Calibri"/>
+              </a:rPr>
+              <a:t>▪  </a:t>
+            </a:r>
+            <a:r>
+              <a:rPr b="1" sz="1300">
                 <a:solidFill>
                   <a:srgbClr val="1F2A44"/>
                 </a:solidFill>
                 <a:latin typeface="Calibri"/>
               </a:rPr>
-              <a:t>“Why is a $12 million battery a $57 million project?”  Because a vendor prices the battery. We build the station, the site, the feeder protection and the siting case, and we carry the risk and the cost of money.</a:t>
-            </a:r>
-          </a:p>
-        </p:txBody>
-      </p:sp>
-      <p:sp>
-        <p:nvSpPr>
-          <p:cNvPr id="8" name="Rectangle 7"/>
-          <p:cNvSpPr/>
-          <p:nvPr/>
-        </p:nvSpPr>
-        <p:spPr>
-          <a:xfrm>
-            <a:off x="548640" y="2468880"/>
-            <a:ext cx="3566160" cy="2194560"/>
-          </a:xfrm>
-          <a:prstGeom prst="rect">
-            <a:avLst/>
-          </a:prstGeom>
-          <a:solidFill>
-            <a:srgbClr val="F2F4F8"/>
-          </a:solidFill>
-          <a:ln>
-            <a:noFill/>
-          </a:ln>
-          <a:effectLst/>
-        </p:spPr>
-        <p:style>
-          <a:lnRef idx="1">
-            <a:schemeClr val="accent1"/>
-          </a:lnRef>
-          <a:fillRef idx="3">
-            <a:schemeClr val="accent1"/>
-          </a:fillRef>
-          <a:effectRef idx="2">
-            <a:schemeClr val="accent1"/>
-          </a:effectRef>
-          <a:fontRef idx="minor">
-            <a:schemeClr val="lt1"/>
-          </a:fontRef>
-        </p:style>
-        <p:txBody>
-          <a:bodyPr rtlCol="0" anchor="ctr"/>
-          <a:lstStyle/>
-          <a:p>
-            <a:pPr algn="ctr"/>
-          </a:p>
-        </p:txBody>
-      </p:sp>
-      <p:sp>
-        <p:nvSpPr>
-          <p:cNvPr id="9" name="TextBox 8"/>
-          <p:cNvSpPr txBox="1"/>
-          <p:nvPr/>
-        </p:nvSpPr>
-        <p:spPr>
-          <a:xfrm>
-            <a:off x="685800" y="2578608"/>
-            <a:ext cx="3291840" cy="822960"/>
-          </a:xfrm>
-          <a:prstGeom prst="rect">
-            <a:avLst/>
-          </a:prstGeom>
-          <a:noFill/>
-        </p:spPr>
-        <p:txBody>
-          <a:bodyPr wrap="square" lIns="45720" rIns="45720" tIns="27432" bIns="27432" anchor="t">
-            <a:spAutoFit/>
-          </a:bodyPr>
-          <a:lstStyle/>
-          <a:p>
-            <a:pPr algn="l">
+              <a:t>July 2023, five bidders, 10 MW / 20 MWh: </a:t>
+            </a:r>
+            <a:r>
+              <a:rPr sz="1300">
+                <a:solidFill>
+                  <a:srgbClr val="1F2A44"/>
+                </a:solidFill>
+                <a:latin typeface="Calibri"/>
+              </a:rPr>
+              <a:t>$9.6M to $18.2M. Every bidder excluded interconnection, permits beyond local, below-grade risk, sound walls or spares.</a:t>
+            </a:r>
+          </a:p>
+          <a:p>
+            <a:pPr>
               <a:lnSpc>
                 <a:spcPct val="105000"/>
               </a:lnSpc>
               <a:spcAft>
-                <a:spcPts val="400"/>
+                <a:spcPts val="600"/>
               </a:spcAft>
             </a:pPr>
             <a:r>
-              <a:rPr sz="4000" b="1" i="0">
-                <a:solidFill>
-                  <a:srgbClr val="001E60"/>
-                </a:solidFill>
-                <a:latin typeface="Georgia"/>
-              </a:rPr>
-              <a:t>$12.1M</a:t>
-            </a:r>
-          </a:p>
-        </p:txBody>
-      </p:sp>
-      <p:sp>
-        <p:nvSpPr>
-          <p:cNvPr id="10" name="TextBox 9"/>
-          <p:cNvSpPr txBox="1"/>
-          <p:nvPr/>
-        </p:nvSpPr>
-        <p:spPr>
-          <a:xfrm>
-            <a:off x="685800" y="3264408"/>
-            <a:ext cx="3291840" cy="457200"/>
-          </a:xfrm>
-          <a:prstGeom prst="rect">
-            <a:avLst/>
-          </a:prstGeom>
-          <a:noFill/>
-        </p:spPr>
-        <p:txBody>
-          <a:bodyPr wrap="square" lIns="45720" rIns="45720" tIns="27432" bIns="27432" anchor="t">
-            <a:spAutoFit/>
-          </a:bodyPr>
-          <a:lstStyle/>
-          <a:p>
-            <a:pPr algn="l">
+              <a:rPr sz="1300">
+                <a:solidFill>
+                  <a:srgbClr val="FFC72C"/>
+                </a:solidFill>
+                <a:latin typeface="Calibri"/>
+              </a:rPr>
+              <a:t>▪  </a:t>
+            </a:r>
+            <a:r>
+              <a:rPr b="1" sz="1300">
+                <a:solidFill>
+                  <a:srgbClr val="1F2A44"/>
+                </a:solidFill>
+                <a:latin typeface="Calibri"/>
+              </a:rPr>
+              <a:t>Company 3 ($18.2M, burgundy) </a:t>
+            </a:r>
+            <a:r>
+              <a:rPr sz="1300">
+                <a:solidFill>
+                  <a:srgbClr val="1F2A44"/>
+                </a:solidFill>
+                <a:latin typeface="Calibri"/>
+              </a:rPr>
+              <a:t>became the E-23-373 basis because it alone priced turnkey civil ($4.56M) and installation.</a:t>
+            </a:r>
+          </a:p>
+          <a:p>
+            <a:pPr>
               <a:lnSpc>
                 <a:spcPct val="105000"/>
               </a:lnSpc>
               <a:spcAft>
-                <a:spcPts val="400"/>
+                <a:spcPts val="600"/>
               </a:spcAft>
             </a:pPr>
             <a:r>
-              <a:rPr sz="1500" b="1" i="0">
+              <a:rPr sz="1300">
+                <a:solidFill>
+                  <a:srgbClr val="FFC72C"/>
+                </a:solidFill>
+                <a:latin typeface="Calibri"/>
+              </a:rPr>
+              <a:t>▪  </a:t>
+            </a:r>
+            <a:r>
+              <a:rPr b="1" sz="1300">
                 <a:solidFill>
                   <a:srgbClr val="1F2A44"/>
                 </a:solidFill>
                 <a:latin typeface="Calibri"/>
               </a:rPr>
-              <a:t>Vendor fixed-price contract</a:t>
-            </a:r>
-          </a:p>
-        </p:txBody>
-      </p:sp>
-      <p:sp>
-        <p:nvSpPr>
-          <p:cNvPr id="11" name="TextBox 10"/>
-          <p:cNvSpPr txBox="1"/>
-          <p:nvPr/>
-        </p:nvSpPr>
-        <p:spPr>
-          <a:xfrm>
-            <a:off x="685800" y="3648456"/>
-            <a:ext cx="3291840" cy="969263"/>
-          </a:xfrm>
-          <a:prstGeom prst="rect">
-            <a:avLst/>
-          </a:prstGeom>
-          <a:noFill/>
-        </p:spPr>
-        <p:txBody>
-          <a:bodyPr wrap="square" lIns="45720" rIns="45720" tIns="27432" bIns="27432" anchor="t">
-            <a:spAutoFit/>
-          </a:bodyPr>
-          <a:lstStyle/>
-          <a:p>
-            <a:pPr algn="l">
-              <a:lnSpc>
-                <a:spcPct val="100000"/>
-              </a:lnSpc>
-              <a:spcAft>
-                <a:spcPts val="400"/>
-              </a:spcAft>
-            </a:pPr>
-            <a:r>
-              <a:rPr sz="1250" b="0" i="0">
-                <a:solidFill>
-                  <a:srgbClr val="6B7280"/>
+              <a:t>March 2026 contract, $12.1M (gold): </a:t>
+            </a:r>
+            <a:r>
+              <a:rPr sz="1300">
+                <a:solidFill>
+                  <a:srgbClr val="1F2A44"/>
                 </a:solidFill>
                 <a:latin typeface="Calibri"/>
               </a:rPr>
-              <a:t>Nomad cover agreement, 10 Mar 2026. 12 Voyager LFP units, PCS, BMS, fire protection, 10-yr warranty. $605/kWh, $1,211/kW.</a:t>
-            </a:r>
-          </a:p>
-        </p:txBody>
-      </p:sp>
-      <p:sp>
-        <p:nvSpPr>
-          <p:cNvPr id="12" name="Rectangle 11"/>
-          <p:cNvSpPr/>
-          <p:nvPr/>
-        </p:nvSpPr>
-        <p:spPr>
-          <a:xfrm>
-            <a:off x="4315968" y="2468880"/>
-            <a:ext cx="3566160" cy="2194560"/>
-          </a:xfrm>
-          <a:prstGeom prst="rect">
-            <a:avLst/>
-          </a:prstGeom>
-          <a:solidFill>
-            <a:srgbClr val="F2F4F8"/>
-          </a:solidFill>
-          <a:ln>
-            <a:noFill/>
-          </a:ln>
-          <a:effectLst/>
-        </p:spPr>
-        <p:style>
-          <a:lnRef idx="1">
-            <a:schemeClr val="accent1"/>
-          </a:lnRef>
-          <a:fillRef idx="3">
-            <a:schemeClr val="accent1"/>
-          </a:fillRef>
-          <a:effectRef idx="2">
-            <a:schemeClr val="accent1"/>
-          </a:effectRef>
-          <a:fontRef idx="minor">
-            <a:schemeClr val="lt1"/>
-          </a:fontRef>
-        </p:style>
-        <p:txBody>
-          <a:bodyPr rtlCol="0" anchor="ctr"/>
-          <a:lstStyle/>
-          <a:p>
-            <a:pPr algn="ctr"/>
-          </a:p>
-        </p:txBody>
-      </p:sp>
-      <p:sp>
-        <p:nvSpPr>
-          <p:cNvPr id="13" name="TextBox 12"/>
-          <p:cNvSpPr txBox="1"/>
-          <p:nvPr/>
-        </p:nvSpPr>
-        <p:spPr>
-          <a:xfrm>
-            <a:off x="4453128" y="2578608"/>
-            <a:ext cx="3291840" cy="822960"/>
-          </a:xfrm>
-          <a:prstGeom prst="rect">
-            <a:avLst/>
-          </a:prstGeom>
-          <a:noFill/>
-        </p:spPr>
-        <p:txBody>
-          <a:bodyPr wrap="square" lIns="45720" rIns="45720" tIns="27432" bIns="27432" anchor="t">
-            <a:spAutoFit/>
-          </a:bodyPr>
-          <a:lstStyle/>
-          <a:p>
-            <a:pPr algn="l">
+              <a:t>supply only, with supervision. Civil, install, GSUs, station and interconnection moved to Eversource scope.</a:t>
+            </a:r>
+          </a:p>
+          <a:p>
+            <a:pPr>
               <a:lnSpc>
                 <a:spcPct val="105000"/>
               </a:lnSpc>
               <a:spcAft>
-                <a:spcPts val="400"/>
+                <a:spcPts val="600"/>
               </a:spcAft>
             </a:pPr>
             <a:r>
-              <a:rPr sz="4000" b="1" i="0">
-                <a:solidFill>
-                  <a:srgbClr val="6E1F2E"/>
-                </a:solidFill>
-                <a:latin typeface="Georgia"/>
-              </a:rPr>
-              <a:t>$57.2M</a:t>
-            </a:r>
-          </a:p>
-        </p:txBody>
-      </p:sp>
-      <p:sp>
-        <p:nvSpPr>
-          <p:cNvPr id="14" name="TextBox 13"/>
-          <p:cNvSpPr txBox="1"/>
-          <p:nvPr/>
-        </p:nvSpPr>
-        <p:spPr>
-          <a:xfrm>
-            <a:off x="4453128" y="3264408"/>
-            <a:ext cx="3291840" cy="457200"/>
-          </a:xfrm>
-          <a:prstGeom prst="rect">
-            <a:avLst/>
-          </a:prstGeom>
-          <a:noFill/>
-        </p:spPr>
-        <p:txBody>
-          <a:bodyPr wrap="square" lIns="45720" rIns="45720" tIns="27432" bIns="27432" anchor="t">
-            <a:spAutoFit/>
-          </a:bodyPr>
-          <a:lstStyle/>
-          <a:p>
-            <a:pPr algn="l">
+              <a:rPr sz="1300">
+                <a:solidFill>
+                  <a:srgbClr val="FFC72C"/>
+                </a:solidFill>
+                <a:latin typeface="Calibri"/>
+              </a:rPr>
+              <a:t>▪  </a:t>
+            </a:r>
+            <a:r>
+              <a:rPr b="1" sz="1300">
+                <a:solidFill>
+                  <a:srgbClr val="1F2A44"/>
+                </a:solidFill>
+                <a:latin typeface="Calibri"/>
+              </a:rPr>
+              <a:t>Equipment-only inside the contract: </a:t>
+            </a:r>
+            <a:r>
+              <a:rPr sz="1300">
+                <a:solidFill>
+                  <a:srgbClr val="1F2A44"/>
+                </a:solidFill>
+                <a:latin typeface="Calibri"/>
+              </a:rPr>
+              <a:t>$10.64M, $532/kWh, in line with published 2025-26 turnkey system indices (slides 9-10).</a:t>
+            </a:r>
+          </a:p>
+          <a:p>
+            <a:pPr>
               <a:lnSpc>
                 <a:spcPct val="105000"/>
               </a:lnSpc>
               <a:spcAft>
-                <a:spcPts val="400"/>
+                <a:spcPts val="600"/>
               </a:spcAft>
             </a:pPr>
             <a:r>
-              <a:rPr sz="1500" b="1" i="0">
+              <a:rPr sz="1300">
+                <a:solidFill>
+                  <a:srgbClr val="FFC72C"/>
+                </a:solidFill>
+                <a:latin typeface="Calibri"/>
+              </a:rPr>
+              <a:t>▪  </a:t>
+            </a:r>
+            <a:r>
+              <a:rPr b="1" sz="1300">
                 <a:solidFill>
                   <a:srgbClr val="1F2A44"/>
                 </a:solidFill>
                 <a:latin typeface="Calibri"/>
               </a:rPr>
-              <a:t>Project 21334 approval level</a:t>
-            </a:r>
-          </a:p>
-        </p:txBody>
-      </p:sp>
-      <p:sp>
-        <p:nvSpPr>
-          <p:cNvPr id="15" name="TextBox 14"/>
-          <p:cNvSpPr txBox="1"/>
-          <p:nvPr/>
-        </p:nvSpPr>
-        <p:spPr>
-          <a:xfrm>
-            <a:off x="4453128" y="3648456"/>
-            <a:ext cx="3291840" cy="969263"/>
-          </a:xfrm>
-          <a:prstGeom prst="rect">
-            <a:avLst/>
-          </a:prstGeom>
-          <a:noFill/>
-        </p:spPr>
-        <p:txBody>
-          <a:bodyPr wrap="square" lIns="45720" rIns="45720" tIns="27432" bIns="27432" anchor="t">
-            <a:spAutoFit/>
-          </a:bodyPr>
-          <a:lstStyle/>
-          <a:p>
-            <a:pPr algn="l">
-              <a:lnSpc>
-                <a:spcPct val="100000"/>
-              </a:lnSpc>
-              <a:spcAft>
-                <a:spcPts val="400"/>
-              </a:spcAft>
-            </a:pPr>
-            <a:r>
-              <a:rPr sz="1250" b="0" i="0">
-                <a:solidFill>
-                  <a:srgbClr val="6B7280"/>
+              <a:t>Rev 3 adds $1.13M of escalation </a:t>
+            </a:r>
+            <a:r>
+              <a:rPr sz="1300">
+                <a:solidFill>
+                  <a:srgbClr val="1F2A44"/>
                 </a:solidFill>
                 <a:latin typeface="Calibri"/>
               </a:rPr>
-              <a:t>ESF Total Rev 3. Station 360 $50.0M plus Station 496 protection $7.3M. $2,862/kWh, $5,725/kW. Conceptual, -25%/+50%.</a:t>
-            </a:r>
-          </a:p>
-        </p:txBody>
-      </p:sp>
-      <p:sp>
-        <p:nvSpPr>
-          <p:cNvPr id="16" name="Rectangle 15"/>
-          <p:cNvSpPr/>
-          <p:nvPr/>
-        </p:nvSpPr>
-        <p:spPr>
-          <a:xfrm>
-            <a:off x="8083296" y="2468880"/>
-            <a:ext cx="3566160" cy="2194560"/>
-          </a:xfrm>
-          <a:prstGeom prst="rect">
-            <a:avLst/>
-          </a:prstGeom>
-          <a:solidFill>
-            <a:srgbClr val="F2F4F8"/>
-          </a:solidFill>
-          <a:ln>
-            <a:noFill/>
-          </a:ln>
-          <a:effectLst/>
-        </p:spPr>
-        <p:style>
-          <a:lnRef idx="1">
-            <a:schemeClr val="accent1"/>
-          </a:lnRef>
-          <a:fillRef idx="3">
-            <a:schemeClr val="accent1"/>
-          </a:fillRef>
-          <a:effectRef idx="2">
-            <a:schemeClr val="accent1"/>
-          </a:effectRef>
-          <a:fontRef idx="minor">
-            <a:schemeClr val="lt1"/>
-          </a:fontRef>
-        </p:style>
-        <p:txBody>
-          <a:bodyPr rtlCol="0" anchor="ctr"/>
-          <a:lstStyle/>
-          <a:p>
-            <a:pPr algn="ctr"/>
-          </a:p>
-        </p:txBody>
-      </p:sp>
-      <p:sp>
-        <p:nvSpPr>
-          <p:cNvPr id="17" name="TextBox 16"/>
-          <p:cNvSpPr txBox="1"/>
-          <p:nvPr/>
-        </p:nvSpPr>
-        <p:spPr>
-          <a:xfrm>
-            <a:off x="8220456" y="2578608"/>
-            <a:ext cx="3291840" cy="822960"/>
-          </a:xfrm>
-          <a:prstGeom prst="rect">
-            <a:avLst/>
-          </a:prstGeom>
-          <a:noFill/>
-        </p:spPr>
-        <p:txBody>
-          <a:bodyPr wrap="square" lIns="45720" rIns="45720" tIns="27432" bIns="27432" anchor="t">
-            <a:spAutoFit/>
-          </a:bodyPr>
-          <a:lstStyle/>
-          <a:p>
-            <a:pPr algn="l">
-              <a:lnSpc>
-                <a:spcPct val="105000"/>
-              </a:lnSpc>
-              <a:spcAft>
-                <a:spcPts val="400"/>
-              </a:spcAft>
-            </a:pPr>
-            <a:r>
-              <a:rPr sz="4000" b="1" i="0">
-                <a:solidFill>
-                  <a:srgbClr val="001E60"/>
-                </a:solidFill>
-                <a:latin typeface="Georgia"/>
-              </a:rPr>
-              <a:t>21%</a:t>
-            </a:r>
-          </a:p>
-        </p:txBody>
-      </p:sp>
-      <p:sp>
-        <p:nvSpPr>
-          <p:cNvPr id="18" name="TextBox 17"/>
-          <p:cNvSpPr txBox="1"/>
-          <p:nvPr/>
-        </p:nvSpPr>
-        <p:spPr>
-          <a:xfrm>
-            <a:off x="8220456" y="3264408"/>
-            <a:ext cx="3291840" cy="457200"/>
-          </a:xfrm>
-          <a:prstGeom prst="rect">
-            <a:avLst/>
-          </a:prstGeom>
-          <a:noFill/>
-        </p:spPr>
-        <p:txBody>
-          <a:bodyPr wrap="square" lIns="45720" rIns="45720" tIns="27432" bIns="27432" anchor="t">
-            <a:spAutoFit/>
-          </a:bodyPr>
-          <a:lstStyle/>
-          <a:p>
-            <a:pPr algn="l">
-              <a:lnSpc>
-                <a:spcPct val="105000"/>
-              </a:lnSpc>
-              <a:spcAft>
-                <a:spcPts val="400"/>
-              </a:spcAft>
-            </a:pPr>
-            <a:r>
-              <a:rPr sz="1500" b="1" i="0">
-                <a:solidFill>
-                  <a:srgbClr val="1F2A44"/>
-                </a:solidFill>
-                <a:latin typeface="Calibri"/>
-              </a:rPr>
-              <a:t>Battery share of the total</a:t>
-            </a:r>
-          </a:p>
-        </p:txBody>
-      </p:sp>
-      <p:sp>
-        <p:nvSpPr>
-          <p:cNvPr id="19" name="TextBox 18"/>
-          <p:cNvSpPr txBox="1"/>
-          <p:nvPr/>
-        </p:nvSpPr>
-        <p:spPr>
-          <a:xfrm>
-            <a:off x="8220456" y="3648456"/>
-            <a:ext cx="3291840" cy="969263"/>
-          </a:xfrm>
-          <a:prstGeom prst="rect">
-            <a:avLst/>
-          </a:prstGeom>
-          <a:noFill/>
-        </p:spPr>
-        <p:txBody>
-          <a:bodyPr wrap="square" lIns="45720" rIns="45720" tIns="27432" bIns="27432" anchor="t">
-            <a:spAutoFit/>
-          </a:bodyPr>
-          <a:lstStyle/>
-          <a:p>
-            <a:pPr algn="l">
-              <a:lnSpc>
-                <a:spcPct val="100000"/>
-              </a:lnSpc>
-              <a:spcAft>
-                <a:spcPts val="400"/>
-              </a:spcAft>
-            </a:pPr>
-            <a:r>
-              <a:rPr sz="1250" b="0" i="0">
-                <a:solidFill>
-                  <a:srgbClr val="6B7280"/>
-                </a:solidFill>
-                <a:latin typeface="Calibri"/>
-              </a:rPr>
-              <a:t>Add the D-Line circuit extension (24211, $4.8M conceptual) and the share drops to 20%. Four dollars of every five are not the battery.</a:t>
-            </a:r>
-          </a:p>
-        </p:txBody>
-      </p:sp>
-      <p:sp>
-        <p:nvSpPr>
-          <p:cNvPr id="20" name="TextBox 19"/>
-          <p:cNvSpPr txBox="1"/>
-          <p:nvPr/>
-        </p:nvSpPr>
-        <p:spPr>
-          <a:xfrm>
-            <a:off x="548640" y="4937760"/>
-            <a:ext cx="11064240" cy="1097280"/>
-          </a:xfrm>
-          <a:prstGeom prst="rect">
-            <a:avLst/>
-          </a:prstGeom>
-          <a:noFill/>
-        </p:spPr>
-        <p:txBody>
-          <a:bodyPr wrap="square" lIns="45720" rIns="45720" tIns="27432" bIns="27432" anchor="t">
-            <a:spAutoFit/>
-          </a:bodyPr>
-          <a:lstStyle/>
-          <a:p>
-            <a:pPr algn="l">
-              <a:lnSpc>
-                <a:spcPct val="105000"/>
-              </a:lnSpc>
-              <a:spcAft>
-                <a:spcPts val="400"/>
-              </a:spcAft>
-            </a:pPr>
-            <a:r>
-              <a:rPr sz="1600" b="1" i="0">
-                <a:solidFill>
-                  <a:srgbClr val="001E60"/>
-                </a:solidFill>
-                <a:latin typeface="Calibri"/>
-              </a:rPr>
-              <a:t>Three sections: </a:t>
-            </a:r>
-            <a:r>
-              <a:rPr sz="1600" b="0" i="0">
-                <a:solidFill>
-                  <a:srgbClr val="1F2A44"/>
-                </a:solidFill>
-                <a:latin typeface="Calibri"/>
-              </a:rPr>
-              <a:t>where the money sits (thirteen layers, unit costs, benchmarks); how the cost changed (2021 to today); can the number be defended (red team, stress tests, what must close).</a:t>
+              <a:t>to a price the contract fixes until Final Acceptance.</a:t>
             </a:r>
           </a:p>
         </p:txBody>
@@ -18527,7 +22202,7 @@
 </p:sld>
 </file>
 
-<file path=ppt/slides/slide20.xml><?xml version="1.0" encoding="utf-8"?>
+<file path=ppt/slides/slide22.xml><?xml version="1.0" encoding="utf-8"?>
 <p:sld xmlns:a="http://schemas.openxmlformats.org/drawingml/2006/main" xmlns:p="http://schemas.openxmlformats.org/presentationml/2006/main" xmlns:r="http://schemas.openxmlformats.org/officeDocument/2006/relationships">
   <p:cSld>
     <p:spTree>
@@ -18744,7 +22419,7 @@
                 </a:solidFill>
                 <a:latin typeface="Calibri"/>
               </a:rPr>
-              <a:t>20</a:t>
+              <a:t>22</a:t>
             </a:r>
           </a:p>
         </p:txBody>
@@ -19399,7 +23074,7 @@
 </p:sld>
 </file>
 
-<file path=ppt/slides/slide21.xml><?xml version="1.0" encoding="utf-8"?>
+<file path=ppt/slides/slide23.xml><?xml version="1.0" encoding="utf-8"?>
 <p:sld xmlns:a="http://schemas.openxmlformats.org/drawingml/2006/main" xmlns:p="http://schemas.openxmlformats.org/presentationml/2006/main" xmlns:r="http://schemas.openxmlformats.org/officeDocument/2006/relationships">
   <p:cSld>
     <p:spTree>
@@ -19616,7 +23291,7 @@
                 </a:solidFill>
                 <a:latin typeface="Calibri"/>
               </a:rPr>
-              <a:t>21</a:t>
+              <a:t>23</a:t>
             </a:r>
           </a:p>
         </p:txBody>
@@ -20858,7 +24533,7 @@
 </p:sld>
 </file>
 
-<file path=ppt/slides/slide22.xml><?xml version="1.0" encoding="utf-8"?>
+<file path=ppt/slides/slide24.xml><?xml version="1.0" encoding="utf-8"?>
 <p:sld xmlns:a="http://schemas.openxmlformats.org/drawingml/2006/main" xmlns:p="http://schemas.openxmlformats.org/presentationml/2006/main" xmlns:r="http://schemas.openxmlformats.org/officeDocument/2006/relationships">
   <p:cSld>
     <p:spTree>
@@ -21075,7 +24750,7 @@
                 </a:solidFill>
                 <a:latin typeface="Calibri"/>
               </a:rPr>
-              <a:t>22</a:t>
+              <a:t>24</a:t>
             </a:r>
           </a:p>
         </p:txBody>
@@ -21518,7 +25193,7 @@
 </p:sld>
 </file>
 
-<file path=ppt/slides/slide23.xml><?xml version="1.0" encoding="utf-8"?>
+<file path=ppt/slides/slide25.xml><?xml version="1.0" encoding="utf-8"?>
 <p:sld xmlns:a="http://schemas.openxmlformats.org/drawingml/2006/main" xmlns:p="http://schemas.openxmlformats.org/presentationml/2006/main" xmlns:r="http://schemas.openxmlformats.org/officeDocument/2006/relationships">
   <p:cSld>
     <p:spTree>
@@ -21735,7 +25410,7 @@
                 </a:solidFill>
                 <a:latin typeface="Calibri"/>
               </a:rPr>
-              <a:t>23</a:t>
+              <a:t>25</a:t>
             </a:r>
           </a:p>
         </p:txBody>
@@ -22808,7 +26483,7 @@
 </p:sld>
 </file>
 
-<file path=ppt/slides/slide24.xml><?xml version="1.0" encoding="utf-8"?>
+<file path=ppt/slides/slide26.xml><?xml version="1.0" encoding="utf-8"?>
 <p:sld xmlns:a="http://schemas.openxmlformats.org/drawingml/2006/main" xmlns:p="http://schemas.openxmlformats.org/presentationml/2006/main" xmlns:r="http://schemas.openxmlformats.org/officeDocument/2006/relationships">
   <p:cSld>
     <p:spTree>
@@ -23112,7 +26787,7 @@
                 </a:solidFill>
                 <a:latin typeface="Calibri"/>
               </a:rPr>
-              <a:t>Inside the reference class on direct cost; three kill shots, seven stress tests, a pre-mortem, and ten reconciliations with owners and dollars.</a:t>
+              <a:t>Against 55 public projects at or below 100 MWh the station-direct cost is at the 85% percentile and the approval level above every member; a regression on 81 projects brackets a 2028 build at $676 to $1,668/kWh; six price curves re-base the class within a tenth of each other. Three kill shots, seven stress tests, a pre-mortem, ten reconciliations.</a:t>
             </a:r>
           </a:p>
         </p:txBody>
@@ -23360,7 +27035,7 @@
 </p:sld>
 </file>
 
-<file path=ppt/slides/slide25.xml><?xml version="1.0" encoding="utf-8"?>
+<file path=ppt/slides/slide27.xml><?xml version="1.0" encoding="utf-8"?>
 <p:sld xmlns:a="http://schemas.openxmlformats.org/drawingml/2006/main" xmlns:p="http://schemas.openxmlformats.org/presentationml/2006/main" xmlns:r="http://schemas.openxmlformats.org/officeDocument/2006/relationships">
   <p:cSld>
     <p:spTree>
@@ -23577,7 +27252,7 @@
                 </a:solidFill>
                 <a:latin typeface="Calibri"/>
               </a:rPr>
-              <a:t>24</a:t>
+              <a:t>26</a:t>
             </a:r>
           </a:p>
         </p:txBody>
@@ -23800,7 +27475,7 @@
                 </a:solidFill>
                 <a:latin typeface="Calibri"/>
               </a:rPr>
-              <a:t>Re-based to 2026 dollars (slides 12 and 14): </a:t>
+              <a:t>Re-based to 2026 dollars (slides 12 and 14 to 16): </a:t>
             </a:r>
             <a:r>
               <a:rPr sz="1150">
@@ -23859,7 +27534,7 @@
 </p:sld>
 </file>
 
-<file path=ppt/slides/slide26.xml><?xml version="1.0" encoding="utf-8"?>
+<file path=ppt/slides/slide28.xml><?xml version="1.0" encoding="utf-8"?>
 <p:sld xmlns:a="http://schemas.openxmlformats.org/drawingml/2006/main" xmlns:p="http://schemas.openxmlformats.org/presentationml/2006/main" xmlns:r="http://schemas.openxmlformats.org/officeDocument/2006/relationships">
   <p:cSld>
     <p:spTree>
@@ -24076,7 +27751,7 @@
                 </a:solidFill>
                 <a:latin typeface="Calibri"/>
               </a:rPr>
-              <a:t>25</a:t>
+              <a:t>27</a:t>
             </a:r>
           </a:p>
         </p:txBody>
@@ -24624,7 +28299,7 @@
 </p:sld>
 </file>
 
-<file path=ppt/slides/slide27.xml><?xml version="1.0" encoding="utf-8"?>
+<file path=ppt/slides/slide29.xml><?xml version="1.0" encoding="utf-8"?>
 <p:sld xmlns:a="http://schemas.openxmlformats.org/drawingml/2006/main" xmlns:p="http://schemas.openxmlformats.org/presentationml/2006/main" xmlns:r="http://schemas.openxmlformats.org/officeDocument/2006/relationships">
   <p:cSld>
     <p:spTree>
@@ -24841,7 +28516,7 @@
                 </a:solidFill>
                 <a:latin typeface="Calibri"/>
               </a:rPr>
-              <a:t>26</a:t>
+              <a:t>28</a:t>
             </a:r>
           </a:p>
         </p:txBody>
@@ -26561,7 +30236,7 @@
                 </a:solidFill>
                 <a:latin typeface="Calibri"/>
               </a:rPr>
-              <a:t>Gold = battery contract as carried in Rev 3 ($12.1M contract plus $1.1M escalation on the unpaid balance; see slide 19). Teal = station, site and feeder protection. Burgundy = risk, contingency, indirects, AFUDC. Total $57.2M.</a:t>
+              <a:t>Gold = battery contract as carried in Rev 3 ($12.1M contract plus $1.1M escalation on the unpaid balance; see slide 21). Teal = station, site and feeder protection. Burgundy = risk, contingency, indirects, AFUDC. Total $57.2M.</a:t>
             </a:r>
           </a:p>
         </p:txBody>

--- a/Hyde Park BESS/6) Cost Analysis Deliverables/Hyde Park BESS - Cost Analysis Deck.pptx
+++ b/Hyde Park BESS/6) Cost Analysis Deliverables/Hyde Park BESS - Cost Analysis Deck.pptx
@@ -791,41 +791,47 @@
           </c:marker>
           <c:xVal>
             <c:numRef>
-              <c:f>Sheet1!$A$18:$A$28</c:f>
+              <c:f>Sheet1!$A$18:$A$30</c:f>
               <c:numCache>
                 <c:formatCode>General</c:formatCode>
-                <c:ptCount val="11"/>
+                <c:ptCount val="13"/>
                 <c:pt idx="0">
+                  <c:v>2014</c:v>
+                </c:pt>
+                <c:pt idx="1">
                   <c:v>2015</c:v>
                 </c:pt>
-                <c:pt idx="1">
+                <c:pt idx="2">
                   <c:v>2016</c:v>
                 </c:pt>
-                <c:pt idx="2">
+                <c:pt idx="3">
                   <c:v>2017</c:v>
                 </c:pt>
-                <c:pt idx="3">
+                <c:pt idx="4">
                   <c:v>2018</c:v>
                 </c:pt>
-                <c:pt idx="4">
+                <c:pt idx="5">
                   <c:v>2019</c:v>
                 </c:pt>
-                <c:pt idx="5">
+                <c:pt idx="6">
                   <c:v>2020</c:v>
                 </c:pt>
-                <c:pt idx="6">
+                <c:pt idx="7">
                   <c:v>2021</c:v>
                 </c:pt>
-                <c:pt idx="7">
+                <c:pt idx="8">
                   <c:v>2022</c:v>
                 </c:pt>
-                <c:pt idx="8">
+                <c:pt idx="9">
                   <c:v>2023</c:v>
                 </c:pt>
-                <c:pt idx="9">
+                <c:pt idx="10">
+                  <c:v>2024</c:v>
+                </c:pt>
+                <c:pt idx="11">
                   <c:v>2025</c:v>
                 </c:pt>
-                <c:pt idx="10">
+                <c:pt idx="12">
                   <c:v>2026</c:v>
                 </c:pt>
               </c:numCache>
@@ -833,42 +839,48 @@
           </c:xVal>
           <c:yVal>
             <c:numRef>
-              <c:f>Sheet1!$B$18:$B$28</c:f>
+              <c:f>Sheet1!$B$18:$B$30</c:f>
               <c:numCache>
                 <c:formatCode>General</c:formatCode>
-                <c:ptCount val="11"/>
+                <c:ptCount val="13"/>
                 <c:pt idx="0">
+                  <c:v>1.005</c:v>
+                </c:pt>
+                <c:pt idx="1">
                   <c:v>0.943</c:v>
                 </c:pt>
-                <c:pt idx="1">
-                  <c:v>0.914</c:v>
-                </c:pt>
                 <c:pt idx="2">
+                  <c:v>0.915</c:v>
+                </c:pt>
+                <c:pt idx="3">
                   <c:v>0.949</c:v>
                 </c:pt>
-                <c:pt idx="3">
+                <c:pt idx="4">
                   <c:v>1.0</c:v>
                 </c:pt>
-                <c:pt idx="4">
+                <c:pt idx="5">
                   <c:v>1.02</c:v>
                 </c:pt>
-                <c:pt idx="5">
+                <c:pt idx="6">
                   <c:v>1.034</c:v>
                 </c:pt>
-                <c:pt idx="6">
+                <c:pt idx="7">
                   <c:v>1.213</c:v>
                 </c:pt>
-                <c:pt idx="7">
+                <c:pt idx="8">
                   <c:v>1.632</c:v>
                 </c:pt>
-                <c:pt idx="8">
-                  <c:v>1.737</c:v>
-                </c:pt>
                 <c:pt idx="9">
-                  <c:v>1.838</c:v>
+                  <c:v>1.741</c:v>
                 </c:pt>
                 <c:pt idx="10">
-                  <c:v>1.895</c:v>
+                  <c:v>1.788</c:v>
+                </c:pt>
+                <c:pt idx="11">
+                  <c:v>1.842</c:v>
+                </c:pt>
+                <c:pt idx="12">
+                  <c:v>1.912</c:v>
                 </c:pt>
               </c:numCache>
             </c:numRef>
@@ -880,7 +892,7 @@
           <c:order val="2"/>
           <c:tx>
             <c:strRef>
-              <c:f>Sheet1!$B$30</c:f>
+              <c:f>Sheet1!$B$32</c:f>
               <c:strCache>
                 <c:ptCount val="1"/>
                 <c:pt idx="0">
@@ -912,41 +924,47 @@
           </c:marker>
           <c:xVal>
             <c:numRef>
-              <c:f>Sheet1!$A$31:$A$41</c:f>
+              <c:f>Sheet1!$A$33:$A$45</c:f>
               <c:numCache>
                 <c:formatCode>General</c:formatCode>
-                <c:ptCount val="11"/>
+                <c:ptCount val="13"/>
                 <c:pt idx="0">
+                  <c:v>2014</c:v>
+                </c:pt>
+                <c:pt idx="1">
                   <c:v>2015</c:v>
                 </c:pt>
-                <c:pt idx="1">
+                <c:pt idx="2">
                   <c:v>2016</c:v>
                 </c:pt>
-                <c:pt idx="2">
+                <c:pt idx="3">
                   <c:v>2017</c:v>
                 </c:pt>
-                <c:pt idx="3">
+                <c:pt idx="4">
                   <c:v>2018</c:v>
                 </c:pt>
-                <c:pt idx="4">
+                <c:pt idx="5">
                   <c:v>2019</c:v>
                 </c:pt>
-                <c:pt idx="5">
+                <c:pt idx="6">
                   <c:v>2020</c:v>
                 </c:pt>
-                <c:pt idx="6">
+                <c:pt idx="7">
                   <c:v>2021</c:v>
                 </c:pt>
-                <c:pt idx="7">
+                <c:pt idx="8">
                   <c:v>2022</c:v>
                 </c:pt>
-                <c:pt idx="8">
+                <c:pt idx="9">
                   <c:v>2023</c:v>
                 </c:pt>
-                <c:pt idx="9">
+                <c:pt idx="10">
+                  <c:v>2024</c:v>
+                </c:pt>
+                <c:pt idx="11">
                   <c:v>2025</c:v>
                 </c:pt>
-                <c:pt idx="10">
+                <c:pt idx="12">
                   <c:v>2026</c:v>
                 </c:pt>
               </c:numCache>
@@ -954,42 +972,48 @@
           </c:xVal>
           <c:yVal>
             <c:numRef>
-              <c:f>Sheet1!$B$31:$B$41</c:f>
+              <c:f>Sheet1!$B$33:$B$45</c:f>
               <c:numCache>
                 <c:formatCode>General</c:formatCode>
-                <c:ptCount val="11"/>
+                <c:ptCount val="13"/>
                 <c:pt idx="0">
+                  <c:v>0.968</c:v>
+                </c:pt>
+                <c:pt idx="1">
                   <c:v>0.973</c:v>
                 </c:pt>
-                <c:pt idx="1">
+                <c:pt idx="2">
                   <c:v>0.976</c:v>
                 </c:pt>
-                <c:pt idx="2">
+                <c:pt idx="3">
                   <c:v>0.981</c:v>
                 </c:pt>
-                <c:pt idx="3">
+                <c:pt idx="4">
                   <c:v>1.0</c:v>
                 </c:pt>
-                <c:pt idx="4">
+                <c:pt idx="5">
                   <c:v>1.027</c:v>
                 </c:pt>
-                <c:pt idx="5">
+                <c:pt idx="6">
                   <c:v>1.047</c:v>
                 </c:pt>
-                <c:pt idx="6">
+                <c:pt idx="7">
                   <c:v>1.096</c:v>
                 </c:pt>
-                <c:pt idx="7">
+                <c:pt idx="8">
                   <c:v>1.303</c:v>
                 </c:pt>
-                <c:pt idx="8">
-                  <c:v>1.426</c:v>
-                </c:pt>
                 <c:pt idx="9">
-                  <c:v>1.689</c:v>
+                  <c:v>1.429</c:v>
                 </c:pt>
                 <c:pt idx="10">
-                  <c:v>1.831</c:v>
+                  <c:v>1.525</c:v>
+                </c:pt>
+                <c:pt idx="11">
+                  <c:v>1.665</c:v>
+                </c:pt>
+                <c:pt idx="12">
+                  <c:v>1.824</c:v>
                 </c:pt>
               </c:numCache>
             </c:numRef>
@@ -1001,7 +1025,7 @@
           <c:order val="3"/>
           <c:tx>
             <c:strRef>
-              <c:f>Sheet1!$B$43</c:f>
+              <c:f>Sheet1!$B$47</c:f>
               <c:strCache>
                 <c:ptCount val="1"/>
                 <c:pt idx="0">
@@ -1033,7 +1057,7 @@
           </c:marker>
           <c:xVal>
             <c:numRef>
-              <c:f>Sheet1!$A$44:$A$53</c:f>
+              <c:f>Sheet1!$A$48:$A$57</c:f>
               <c:numCache>
                 <c:formatCode>General</c:formatCode>
                 <c:ptCount val="10"/>
@@ -1072,7 +1096,7 @@
           </c:xVal>
           <c:yVal>
             <c:numRef>
-              <c:f>Sheet1!$B$44:$B$53</c:f>
+              <c:f>Sheet1!$B$48:$B$57</c:f>
               <c:numCache>
                 <c:formatCode>General</c:formatCode>
                 <c:ptCount val="10"/>
@@ -1116,7 +1140,7 @@
           <c:order val="4"/>
           <c:tx>
             <c:strRef>
-              <c:f>Sheet1!$B$55</c:f>
+              <c:f>Sheet1!$B$59</c:f>
               <c:strCache>
                 <c:ptCount val="1"/>
                 <c:pt idx="0">
@@ -1148,7 +1172,7 @@
           </c:marker>
           <c:xVal>
             <c:numRef>
-              <c:f>Sheet1!$A$56:$A$61</c:f>
+              <c:f>Sheet1!$A$60:$A$65</c:f>
               <c:numCache>
                 <c:formatCode>General</c:formatCode>
                 <c:ptCount val="6"/>
@@ -1175,7 +1199,7 @@
           </c:xVal>
           <c:yVal>
             <c:numRef>
-              <c:f>Sheet1!$B$56:$B$61</c:f>
+              <c:f>Sheet1!$B$60:$B$65</c:f>
               <c:numCache>
                 <c:formatCode>General</c:formatCode>
                 <c:ptCount val="6"/>
@@ -1207,7 +1231,7 @@
           <c:order val="5"/>
           <c:tx>
             <c:strRef>
-              <c:f>Sheet1!$B$63</c:f>
+              <c:f>Sheet1!$B$67</c:f>
               <c:strCache>
                 <c:ptCount val="1"/>
                 <c:pt idx="0">
@@ -1239,41 +1263,47 @@
           </c:marker>
           <c:xVal>
             <c:numRef>
-              <c:f>Sheet1!$A$64:$A$74</c:f>
+              <c:f>Sheet1!$A$68:$A$80</c:f>
               <c:numCache>
                 <c:formatCode>General</c:formatCode>
-                <c:ptCount val="11"/>
+                <c:ptCount val="13"/>
                 <c:pt idx="0">
+                  <c:v>2014</c:v>
+                </c:pt>
+                <c:pt idx="1">
                   <c:v>2015</c:v>
                 </c:pt>
-                <c:pt idx="1">
+                <c:pt idx="2">
                   <c:v>2016</c:v>
                 </c:pt>
-                <c:pt idx="2">
+                <c:pt idx="3">
                   <c:v>2017</c:v>
                 </c:pt>
-                <c:pt idx="3">
+                <c:pt idx="4">
                   <c:v>2018</c:v>
                 </c:pt>
-                <c:pt idx="4">
+                <c:pt idx="5">
                   <c:v>2019</c:v>
                 </c:pt>
-                <c:pt idx="5">
+                <c:pt idx="6">
                   <c:v>2020</c:v>
                 </c:pt>
-                <c:pt idx="6">
+                <c:pt idx="7">
                   <c:v>2021</c:v>
                 </c:pt>
-                <c:pt idx="7">
+                <c:pt idx="8">
                   <c:v>2022</c:v>
                 </c:pt>
-                <c:pt idx="8">
+                <c:pt idx="9">
                   <c:v>2023</c:v>
                 </c:pt>
-                <c:pt idx="9">
+                <c:pt idx="10">
+                  <c:v>2024</c:v>
+                </c:pt>
+                <c:pt idx="11">
                   <c:v>2025</c:v>
                 </c:pt>
-                <c:pt idx="10">
+                <c:pt idx="12">
                   <c:v>2026</c:v>
                 </c:pt>
               </c:numCache>
@@ -1281,42 +1311,48 @@
           </c:xVal>
           <c:yVal>
             <c:numRef>
-              <c:f>Sheet1!$B$64:$B$74</c:f>
+              <c:f>Sheet1!$B$68:$B$80</c:f>
               <c:numCache>
                 <c:formatCode>General</c:formatCode>
-                <c:ptCount val="11"/>
+                <c:ptCount val="13"/>
                 <c:pt idx="0">
+                  <c:v>0.911</c:v>
+                </c:pt>
+                <c:pt idx="1">
                   <c:v>0.935</c:v>
                 </c:pt>
-                <c:pt idx="1">
+                <c:pt idx="2">
                   <c:v>0.953</c:v>
                 </c:pt>
-                <c:pt idx="2">
+                <c:pt idx="3">
                   <c:v>0.975</c:v>
                 </c:pt>
-                <c:pt idx="3">
+                <c:pt idx="4">
                   <c:v>1.0</c:v>
                 </c:pt>
-                <c:pt idx="4">
+                <c:pt idx="5">
                   <c:v>1.026</c:v>
                 </c:pt>
-                <c:pt idx="5">
+                <c:pt idx="6">
                   <c:v>1.03</c:v>
                 </c:pt>
-                <c:pt idx="6">
-                  <c:v>1.061</c:v>
-                </c:pt>
                 <c:pt idx="7">
+                  <c:v>1.06</c:v>
+                </c:pt>
+                <c:pt idx="8">
                   <c:v>1.119</c:v>
                 </c:pt>
-                <c:pt idx="8">
-                  <c:v>1.16</c:v>
-                </c:pt>
                 <c:pt idx="9">
-                  <c:v>1.227</c:v>
+                  <c:v>1.161</c:v>
                 </c:pt>
                 <c:pt idx="10">
-                  <c:v>1.261</c:v>
+                  <c:v>1.19</c:v>
+                </c:pt>
+                <c:pt idx="11">
+                  <c:v>1.222</c:v>
+                </c:pt>
+                <c:pt idx="12">
+                  <c:v>1.247</c:v>
                 </c:pt>
               </c:numCache>
             </c:numRef>
@@ -1328,7 +1364,7 @@
           <c:order val="6"/>
           <c:tx>
             <c:strRef>
-              <c:f>Sheet1!$B$76</c:f>
+              <c:f>Sheet1!$B$82</c:f>
               <c:strCache>
                 <c:ptCount val="1"/>
                 <c:pt idx="0">
@@ -1361,7 +1397,7 @@
           </c:marker>
           <c:xVal>
             <c:numRef>
-              <c:f>Sheet1!$A$77:$A$79</c:f>
+              <c:f>Sheet1!$A$83:$A$85</c:f>
               <c:numCache>
                 <c:formatCode>General</c:formatCode>
                 <c:ptCount val="3"/>
@@ -1379,7 +1415,7 @@
           </c:xVal>
           <c:yVal>
             <c:numRef>
-              <c:f>Sheet1!$B$77:$B$79</c:f>
+              <c:f>Sheet1!$B$83:$B$85</c:f>
               <c:numCache>
                 <c:formatCode>General</c:formatCode>
                 <c:ptCount val="3"/>
@@ -2782,7 +2818,7 @@
                   <c:v>B4  Battery install crew build-up   $0.7 to 0.9M</c:v>
                 </c:pt>
                 <c:pt idx="9">
-                  <c:v>B5  Breaker package price   $0.4 to 0.9M</c:v>
+                  <c:v>B5  Breaker package price   $0.4 to 0.8M</c:v>
                 </c:pt>
                 <c:pt idx="10">
                   <c:v>B6  GSU package price   $0.3 to 0.6M</c:v>
@@ -2833,7 +2869,7 @@
                   <c:v>0.71</c:v>
                 </c:pt>
                 <c:pt idx="9">
-                  <c:v>0.43</c:v>
+                  <c:v>0.38</c:v>
                 </c:pt>
                 <c:pt idx="10">
                   <c:v>0.31</c:v>
@@ -3010,7 +3046,7 @@
                   <c:v>B4  Battery install crew build-up   $0.7 to 0.9M</c:v>
                 </c:pt>
                 <c:pt idx="9">
-                  <c:v>B5  Breaker package price   $0.4 to 0.9M</c:v>
+                  <c:v>B5  Breaker package price   $0.4 to 0.8M</c:v>
                 </c:pt>
                 <c:pt idx="10">
                   <c:v>B6  GSU package price   $0.3 to 0.6M</c:v>
@@ -3061,7 +3097,7 @@
                   <c:v>0.17</c:v>
                 </c:pt>
                 <c:pt idx="9">
-                  <c:v>0.43</c:v>
+                  <c:v>0.38</c:v>
                 </c:pt>
                 <c:pt idx="10">
                   <c:v>0.31</c:v>
@@ -7334,7 +7370,7 @@
           <a:lstStyle/>
           <a:p>
             <a:r>
-              <a:t>Narrative 1, step 1. The two-component model on slides 12 and 14 to 16 uses one battery index and one construction index. This slide replaces the construction index with the published series that fits each layer: ECI construction compensation for labor-driven layers (B, G), the IBEW Local 103 journeyman rate for the labor-driven layers (B, F, G), the BLS producer price index for power and distribution transformers (C), the PPI for switchgear (D), the ENR Construction Cost Index for civil (E) and the PPI for engineering services (H). Weights are the Rev 3 loaded layers A to I. Factors for a 2018 project: composite 1.174, two-component 1.189, naive battery 0.733, Handy-Whitman only 1.493. Series values retrieved from search excerpts of the publishers' releases and tagged in indices_layers.json; fetch_indices.py pulls the same series from the FRED and BLS APIs once the environment allows those hosts. Verify before external use.</a:t>
+              <a:t>Narrative 1, step 1. The two-component model on slides 12 and 14 to 16 uses one battery index and one construction index. This slide replaces the construction index with the published series that fits each layer: ECI construction compensation for labor-driven layers (B, G), the IBEW Local 103 journeyman rate for the labor-driven layers (B, F, G), the BLS producer price index for power and distribution transformers (C), the PPI for switchgear (D), the ENR Construction Cost Index for civil (E) and the PPI for engineering services (H). Weights are the Rev 3 loaded layers A to I. Factors for a 2018 project: composite 1.172, two-component 1.189, naive battery 0.733, Handy-Whitman only 1.493. Series values retrieved from search excerpts of the publishers' releases and tagged in indices_layers.json; fetch_indices.py pulls the same series from the FRED and BLS APIs once the environment allows those hosts. Verify before external use.</a:t>
             </a:r>
           </a:p>
         </p:txBody>
@@ -20361,7 +20397,7 @@
                           </a:solidFill>
                           <a:latin typeface="Calibri"/>
                         </a:rPr>
-                        <a:t>1.89x</a:t>
+                        <a:t>1.91x</a:t>
                       </a:r>
                     </a:p>
                   </a:txBody>
@@ -20453,7 +20489,7 @@
                           </a:solidFill>
                           <a:latin typeface="Calibri"/>
                         </a:rPr>
-                        <a:t>1.83x</a:t>
+                        <a:t>1.82x</a:t>
                       </a:r>
                     </a:p>
                   </a:txBody>
@@ -20821,7 +20857,7 @@
                           </a:solidFill>
                           <a:latin typeface="Calibri"/>
                         </a:rPr>
-                        <a:t>1.26x</a:t>
+                        <a:t>1.25x</a:t>
                       </a:r>
                     </a:p>
                   </a:txBody>
@@ -21126,7 +21162,7 @@
                 </a:solidFill>
                 <a:latin typeface="Calibri"/>
               </a:rPr>
-              <a:t>Five non-battery escalators sit between 1.26x and 1.89x since 2018; the battery sits at 0.73x. </a:t>
+              <a:t>Five non-battery escalators sit between 1.25x and 1.91x since 2018; the battery sits at 0.73x. </a:t>
             </a:r>
             <a:r>
               <a:rPr sz="1100">
@@ -21135,7 +21171,7 @@
                 </a:solidFill>
                 <a:latin typeface="Calibri"/>
               </a:rPr>
-              <a:t>Weighted by Hyde Park's loaded layers the net is 1.17x, beside the two-index model (1.19x). Transformers (1.89x) and switchgear (1.83x) are the fastest risers, so a station-heavy project escalates faster than a battery-heavy one.</a:t>
+              <a:t>Weighted by Hyde Park's loaded layers the net is 1.17x, beside the two-index model (1.19x). Transformers (1.91x) and switchgear (1.82x) are the fastest risers, so a station-heavy project escalates faster than a battery-heavy one.</a:t>
             </a:r>
           </a:p>
           <a:p>
@@ -22205,7 +22241,7 @@
                           </a:solidFill>
                           <a:latin typeface="Calibri"/>
                         </a:rPr>
-                        <a:t>$996</a:t>
+                        <a:t>$994</a:t>
                       </a:r>
                     </a:p>
                   </a:txBody>
@@ -22343,7 +22379,7 @@
                           </a:solidFill>
                           <a:latin typeface="Calibri"/>
                         </a:rPr>
-                        <a:t>84%</a:t>
+                        <a:t>85%</a:t>
                       </a:r>
                     </a:p>
                   </a:txBody>
@@ -22366,7 +22402,7 @@
                           </a:solidFill>
                           <a:latin typeface="Calibri"/>
                         </a:rPr>
-                        <a:t>$1,057</a:t>
+                        <a:t>$1,055</a:t>
                       </a:r>
                     </a:p>
                   </a:txBody>
@@ -22389,7 +22425,7 @@
                           </a:solidFill>
                           <a:latin typeface="Calibri"/>
                         </a:rPr>
-                        <a:t>71%</a:t>
+                        <a:t>74%</a:t>
                       </a:r>
                     </a:p>
                   </a:txBody>
@@ -22458,7 +22494,7 @@
                           </a:solidFill>
                           <a:latin typeface="Calibri"/>
                         </a:rPr>
-                        <a:t>$830</a:t>
+                        <a:t>$829</a:t>
                       </a:r>
                     </a:p>
                   </a:txBody>
@@ -22481,7 +22517,7 @@
                           </a:solidFill>
                           <a:latin typeface="Calibri"/>
                         </a:rPr>
-                        <a:t>56%</a:t>
+                        <a:t>55%</a:t>
                       </a:r>
                     </a:p>
                   </a:txBody>
@@ -22527,7 +22563,7 @@
                           </a:solidFill>
                           <a:latin typeface="Calibri"/>
                         </a:rPr>
-                        <a:t>$1,036</a:t>
+                        <a:t>$1,034</a:t>
                       </a:r>
                     </a:p>
                   </a:txBody>
@@ -22619,7 +22655,7 @@
                           </a:solidFill>
                           <a:latin typeface="Calibri"/>
                         </a:rPr>
-                        <a:t>$779</a:t>
+                        <a:t>$778</a:t>
                       </a:r>
                     </a:p>
                   </a:txBody>
@@ -22688,7 +22724,7 @@
                           </a:solidFill>
                           <a:latin typeface="Calibri"/>
                         </a:rPr>
-                        <a:t>$987</a:t>
+                        <a:t>$986</a:t>
                       </a:r>
                     </a:p>
                   </a:txBody>
@@ -23038,7 +23074,7 @@
                 </a:solidFill>
                 <a:latin typeface="Calibri"/>
               </a:rPr>
-              <a:t>installed 51% to 51% percentile, station 84% to 85%, under every defensible method.</a:t>
+              <a:t>installed 51% to 51% percentile, station 85% to 85%, under every defensible method.</a:t>
             </a:r>
           </a:p>
         </p:txBody>
@@ -30343,7 +30379,7 @@
                 </a:solidFill>
                 <a:latin typeface="Georgia"/>
               </a:rPr>
-              <a:t>Fourteen levers in three tiers: $5.0 to 7.1M in the estimate, $4.3 to 7.0M in scope decisions, and a tax credit larger than both</a:t>
+              <a:t>Fourteen levers in three tiers: $5.0 to 7.1M in the estimate, $4.3 to 6.9M in scope decisions, and a tax credit larger than both</a:t>
             </a:r>
           </a:p>
         </p:txBody>
@@ -32119,7 +32155,7 @@
                           </a:solidFill>
                           <a:latin typeface="Calibri"/>
                         </a:rPr>
-                        <a:t>$0.3 to 0.6M</a:t>
+                        <a:t>$0.3 to 0.5M</a:t>
                       </a:r>
                     </a:p>
                   </a:txBody>
@@ -32142,7 +32178,7 @@
                           </a:solidFill>
                           <a:latin typeface="Calibri"/>
                         </a:rPr>
-                        <a:t>$0.4 to 0.9M</a:t>
+                        <a:t>$0.4 to 0.8M</a:t>
                       </a:r>
                     </a:p>
                   </a:txBody>
@@ -33320,7 +33356,7 @@
                           </a:solidFill>
                           <a:latin typeface="Calibri"/>
                         </a:rPr>
-                        <a:t>$4.3 to 7.0M</a:t>
+                        <a:t>$4.3 to 6.9M</a:t>
                       </a:r>
                     </a:p>
                   </a:txBody>
@@ -33389,7 +33425,7 @@
                           </a:solidFill>
                           <a:latin typeface="Calibri"/>
                         </a:rPr>
-                        <a:t>$9.3 to 14.1M</a:t>
+                        <a:t>$9.3 to 14.0M</a:t>
                       </a:r>
                     </a:p>
                   </a:txBody>
@@ -33619,7 +33655,7 @@
                 </a:solidFill>
                 <a:latin typeface="Calibri"/>
               </a:rPr>
-              <a:t>Tiers A and B ($9.3 to 14.1M) and the Haugland gap (+$4 to 8M) are the same order of magnitude. The honest planning case is a $57M number that holds, not one that falls.</a:t>
+              <a:t>Tiers A and B ($9.3 to 14.0M) and the Haugland gap (+$4 to 8M) are the same order of magnitude. The honest planning case is a $57M number that holds, not one that falls.</a:t>
             </a:r>
           </a:p>
           <a:p>

--- a/Hyde Park BESS/6) Cost Analysis Deliverables/Hyde Park BESS - Cost Analysis Deck.pptx
+++ b/Hyde Park BESS/6) Cost Analysis Deliverables/Hyde Park BESS - Cost Analysis Deck.pptx
@@ -1397,10 +1397,10 @@
           </c:marker>
           <c:xVal>
             <c:numRef>
-              <c:f>Sheet1!$A$83:$A$85</c:f>
+              <c:f>Sheet1!$A$83:$A$89</c:f>
               <c:numCache>
                 <c:formatCode>General</c:formatCode>
-                <c:ptCount val="3"/>
+                <c:ptCount val="7"/>
                 <c:pt idx="0">
                   <c:v>2017</c:v>
                 </c:pt>
@@ -1408,6 +1408,18 @@
                   <c:v>2018</c:v>
                 </c:pt>
                 <c:pt idx="2">
+                  <c:v>2019</c:v>
+                </c:pt>
+                <c:pt idx="3">
+                  <c:v>2020</c:v>
+                </c:pt>
+                <c:pt idx="4">
+                  <c:v>2021</c:v>
+                </c:pt>
+                <c:pt idx="5">
+                  <c:v>2022</c:v>
+                </c:pt>
+                <c:pt idx="6">
                   <c:v>2024</c:v>
                 </c:pt>
               </c:numCache>
@@ -1415,10 +1427,10 @@
           </c:xVal>
           <c:yVal>
             <c:numRef>
-              <c:f>Sheet1!$B$83:$B$85</c:f>
+              <c:f>Sheet1!$B$83:$B$89</c:f>
               <c:numCache>
                 <c:formatCode>General</c:formatCode>
-                <c:ptCount val="3"/>
+                <c:ptCount val="7"/>
                 <c:pt idx="0">
                   <c:v>1.334</c:v>
                 </c:pt>
@@ -1426,6 +1438,18 @@
                   <c:v>1.0</c:v>
                 </c:pt>
                 <c:pt idx="2">
+                  <c:v>0.942</c:v>
+                </c:pt>
+                <c:pt idx="3">
+                  <c:v>1.032</c:v>
+                </c:pt>
+                <c:pt idx="4">
+                  <c:v>1.074</c:v>
+                </c:pt>
+                <c:pt idx="5">
+                  <c:v>0.633</c:v>
+                </c:pt>
+                <c:pt idx="6">
                   <c:v>0.733</c:v>
                 </c:pt>
               </c:numCache>
@@ -5670,20 +5694,35 @@
           </c:marker>
           <c:xVal>
             <c:numRef>
-              <c:f>Sheet1!$A$43:$A$46</c:f>
+              <c:f>Sheet1!$A$43:$A$51</c:f>
               <c:numCache>
                 <c:formatCode>General</c:formatCode>
-                <c:ptCount val="4"/>
+                <c:ptCount val="9"/>
                 <c:pt idx="0">
                   <c:v>2015</c:v>
                 </c:pt>
                 <c:pt idx="1">
+                  <c:v>2016</c:v>
+                </c:pt>
+                <c:pt idx="2">
                   <c:v>2017</c:v>
                 </c:pt>
-                <c:pt idx="2">
+                <c:pt idx="3">
                   <c:v>2018</c:v>
                 </c:pt>
-                <c:pt idx="3">
+                <c:pt idx="4">
+                  <c:v>2019</c:v>
+                </c:pt>
+                <c:pt idx="5">
+                  <c:v>2020</c:v>
+                </c:pt>
+                <c:pt idx="6">
+                  <c:v>2021</c:v>
+                </c:pt>
+                <c:pt idx="7">
+                  <c:v>2022</c:v>
+                </c:pt>
+                <c:pt idx="8">
                   <c:v>2024</c:v>
                 </c:pt>
               </c:numCache>
@@ -5691,20 +5730,35 @@
           </c:xVal>
           <c:yVal>
             <c:numRef>
-              <c:f>Sheet1!$B$43:$B$46</c:f>
+              <c:f>Sheet1!$B$43:$B$51</c:f>
               <c:numCache>
                 <c:formatCode>General</c:formatCode>
-                <c:ptCount val="4"/>
+                <c:ptCount val="9"/>
                 <c:pt idx="0">
-                  <c:v>3.443</c:v>
+                  <c:v>3.363</c:v>
                 </c:pt>
                 <c:pt idx="1">
+                  <c:v>2.031</c:v>
+                </c:pt>
+                <c:pt idx="2">
                   <c:v>1.334</c:v>
                 </c:pt>
-                <c:pt idx="2">
+                <c:pt idx="3">
                   <c:v>1.0</c:v>
                 </c:pt>
-                <c:pt idx="3">
+                <c:pt idx="4">
+                  <c:v>0.942</c:v>
+                </c:pt>
+                <c:pt idx="5">
+                  <c:v>1.032</c:v>
+                </c:pt>
+                <c:pt idx="6">
+                  <c:v>1.074</c:v>
+                </c:pt>
+                <c:pt idx="7">
+                  <c:v>0.633</c:v>
+                </c:pt>
+                <c:pt idx="8">
                   <c:v>0.733</c:v>
                 </c:pt>
               </c:numCache>
@@ -5717,7 +5771,7 @@
           <c:order val="5"/>
           <c:tx>
             <c:strRef>
-              <c:f>Sheet1!$B$48</c:f>
+              <c:f>Sheet1!$B$53</c:f>
               <c:strCache>
                 <c:ptCount val="1"/>
                 <c:pt idx="0">
@@ -5750,7 +5804,7 @@
           </c:marker>
           <c:xVal>
             <c:numRef>
-              <c:f>Sheet1!$A$49:$A$54</c:f>
+              <c:f>Sheet1!$A$54:$A$59</c:f>
               <c:numCache>
                 <c:formatCode>General</c:formatCode>
                 <c:ptCount val="6"/>
@@ -5777,7 +5831,7 @@
           </c:xVal>
           <c:yVal>
             <c:numRef>
-              <c:f>Sheet1!$B$49:$B$54</c:f>
+              <c:f>Sheet1!$B$54:$B$59</c:f>
               <c:numCache>
                 <c:formatCode>General</c:formatCode>
                 <c:ptCount val="6"/>
@@ -5809,7 +5863,7 @@
           <c:order val="6"/>
           <c:tx>
             <c:strRef>
-              <c:f>Sheet1!$B$56</c:f>
+              <c:f>Sheet1!$B$61</c:f>
               <c:strCache>
                 <c:ptCount val="1"/>
                 <c:pt idx="0">
@@ -5841,7 +5895,7 @@
           </c:marker>
           <c:xVal>
             <c:numRef>
-              <c:f>Sheet1!$A$57:$A$68</c:f>
+              <c:f>Sheet1!$A$62:$A$73</c:f>
               <c:numCache>
                 <c:formatCode>General</c:formatCode>
                 <c:ptCount val="12"/>
@@ -5886,7 +5940,7 @@
           </c:xVal>
           <c:yVal>
             <c:numRef>
-              <c:f>Sheet1!$B$57:$B$68</c:f>
+              <c:f>Sheet1!$B$62:$B$73</c:f>
               <c:numCache>
                 <c:formatCode>General</c:formatCode>
                 <c:ptCount val="12"/>
@@ -6075,7 +6129,7 @@
               <c:strCache>
                 <c:ptCount val="1"/>
                 <c:pt idx="0">
-                  <c:v>Battery share 30%</c:v>
+                  <c:v>Anchor battery share 30%</c:v>
                 </c:pt>
               </c:strCache>
             </c:strRef>
@@ -6118,19 +6172,19 @@
                 <c:formatCode>General</c:formatCode>
                 <c:ptCount val="6"/>
                 <c:pt idx="0">
-                  <c:v>843</c:v>
+                  <c:v>830</c:v>
                 </c:pt>
                 <c:pt idx="1">
-                  <c:v>837</c:v>
+                  <c:v>830</c:v>
                 </c:pt>
                 <c:pt idx="2">
+                  <c:v>772</c:v>
+                </c:pt>
+                <c:pt idx="3">
                   <c:v>830</c:v>
                 </c:pt>
-                <c:pt idx="3">
-                  <c:v>862</c:v>
-                </c:pt>
                 <c:pt idx="4">
-                  <c:v>909</c:v>
+                  <c:v>904</c:v>
                 </c:pt>
                 <c:pt idx="5">
                   <c:v>902</c:v>
@@ -6148,7 +6202,7 @@
               <c:strCache>
                 <c:ptCount val="1"/>
                 <c:pt idx="0">
-                  <c:v>Battery share 40%</c:v>
+                  <c:v>Anchor battery share 40%</c:v>
                 </c:pt>
               </c:strCache>
             </c:strRef>
@@ -6211,19 +6265,19 @@
                 <c:formatCode>General</c:formatCode>
                 <c:ptCount val="6"/>
                 <c:pt idx="0">
-                  <c:v>832</c:v>
+                  <c:v>790</c:v>
                 </c:pt>
                 <c:pt idx="1">
-                  <c:v>830</c:v>
+                  <c:v>775</c:v>
                 </c:pt>
                 <c:pt idx="2">
-                  <c:v>806</c:v>
+                  <c:v>744</c:v>
                 </c:pt>
                 <c:pt idx="3">
-                  <c:v>838</c:v>
+                  <c:v>783</c:v>
                 </c:pt>
                 <c:pt idx="4">
-                  <c:v>903</c:v>
+                  <c:v>892</c:v>
                 </c:pt>
                 <c:pt idx="5">
                   <c:v>902</c:v>
@@ -6241,7 +6295,7 @@
               <c:strCache>
                 <c:ptCount val="1"/>
                 <c:pt idx="0">
-                  <c:v>Battery share 50%</c:v>
+                  <c:v>Anchor battery share 50%</c:v>
                 </c:pt>
               </c:strCache>
             </c:strRef>
@@ -6284,19 +6338,19 @@
                 <c:formatCode>General</c:formatCode>
                 <c:ptCount val="6"/>
                 <c:pt idx="0">
-                  <c:v>832</c:v>
+                  <c:v>744</c:v>
                 </c:pt>
                 <c:pt idx="1">
-                  <c:v>809</c:v>
+                  <c:v>739</c:v>
                 </c:pt>
                 <c:pt idx="2">
-                  <c:v>744</c:v>
+                  <c:v>716</c:v>
                 </c:pt>
                 <c:pt idx="3">
-                  <c:v>820</c:v>
+                  <c:v>780</c:v>
                 </c:pt>
                 <c:pt idx="4">
-                  <c:v>895</c:v>
+                  <c:v>892</c:v>
                 </c:pt>
                 <c:pt idx="5">
                   <c:v>902</c:v>
@@ -7020,7 +7074,7 @@
           <a:lstStyle/>
           <a:p>
             <a:r>
-              <a:t>Reference class redefined on 2 Oct 2026 at the reviewer's request: every project at or below 100 MWh with an all-in disclosed cost, any owner. 55 members (31 utility-owned, 24 developer-owned); utility-only subclass of 31 kept in the workbook for continuity (median $986). Model: cost_2026 = cost x [ s x I(2026)/I(y) + (1 - s) x HW(2026)/HW(y) ], s = 0.40, I = the battery index in the row, HW = Handy-Whitman North Atlantic production-plant index (700 in 2015, 745 in 2018, 1,112 in 2026; PJM posting). The 3.5%/yr flat proxy used in the earlier version gives $816 at the installed index. Naive whole-cost deflation at the battery rate: $620 (installed), $607 (pack). Sources on the workbook tab '2026$ Adjustment' and in the research log.</a:t>
+              <a:t>Reference class redefined on 2 Oct 2026 at the reviewer's request: every project at or below 100 MWh with an all-in disclosed cost, any owner. 55 members (31 utility-owned, 24 developer-owned); utility-only subclass of 31 kept in the workbook for continuity (median $986). Model (revised 5 Oct 2026 after the review challenge that 2016-2018 batteries were far dearer): fixed quantities, not fixed shares. C(y) = s0 x I(y)/I(2024) + (1 - s0) x HW(y)/HW(2024) with s0 the 2024 battery share (0.40 utility-owned, 0.55 developer-owned); cost_2026 = cost_y x C(2026)/C(y). The battery share of a project in its own year is s0 x I(y)/I(2024) / C(y): 73% in 2016, 56% in 2018, 40% in 2024. I = the battery index in the row (installed: EIA 2015-2022 annual figure data, LBNL 2024), HW = Handy-Whitman North Atlantic production-plant index (700 in 2015, 745 in 2018, 1,112 in 2026; PJM posting). The earlier fixed-share version (today's 40% applied to every year) gave a median of $832 and is kept in the workbook for the record. Caveat on the installed series: EIA's 2022 point ($396, a sample dominated by large four-hour hybrids) sits below LBNL's 2024 point ($458, a different population), so 2022-vintage members re-base about 15% dearer while 2021 members re-base slightly cheaper; the splice is as published and is flagged in the memo. Naive whole-cost deflation at the battery rate: $694 (installed), $607 (pack). Sources on the workbook tab '2026$ Adjustment' and in the research log.</a:t>
             </a:r>
           </a:p>
         </p:txBody>
@@ -7230,7 +7284,7 @@
           <a:lstStyle/>
           <a:p>
             <a:r>
-              <a:t>This is the answer to 'what do the different curves do'. Three levers in order of leverage: (1) the non-battery escalator, because 60% of a comparable is station, civil, labor and interconnection and Handy-Whitman says that cost rose half again since 2018; (2) the battery share, which nobody discloses per project; (3) the battery curve itself, where the five published series agree within 4% on the class median once the share is fixed. The ratios in the table: pack 0.61, turnkey 0.49 (2021 base), NREL 0.69 (2022 base), installed 0.73, LCOS 1.03, Handy-Whitman 1.49. Net factor = 0.4 x battery ratio + 0.6 x 1.49.</a:t>
+              <a:t>This is the answer to 'what do the different curves do'. Three levers in order of leverage: (1) the non-battery escalator, because 60% of a comparable is station, civil, labor and interconnection and Handy-Whitman says that cost rose half again since 2018; (2) the battery share, which nobody discloses per project; (3) the battery curve itself, where the five published series agree within 4% on the class median once the share is fixed. The ratios in the table: pack 0.61, turnkey 0.49 (2021 base), NREL 0.69 (2022 base), installed 0.73, LCOS 1.03, Handy-Whitman 1.49. Revised 5 Oct 2026: factors now hold quantities fixed (C(2026)/C(y) with 2024 anchor shares), so a 2016 project comes to 2026 at 0.6 to 0.8x and a 2018 project at about 1.0 to 1.1x, instead of 1.1 to 1.2x for every year under the earlier fixed-share form. The anchor share remains the lever nobody discloses; the sensitivities on the chart are anchor shares of 30, 40 and 50%.</a:t>
             </a:r>
           </a:p>
         </p:txBody>
@@ -7300,7 +7354,7 @@
           <a:lstStyle/>
           <a:p>
             <a:r>
-              <a:t>Companion to the catalog slide. Battery share 40% in every row; the Handy-Whitman index escalates the other 60% except in the last column, which applies the battery ratio to the whole cost. Utility subclass = the members owned by investor-owned, municipal, cooperative, state or crown utilities. Workbook tab '2026$ Adjustment' reproduces every cell with an index selector.</a:t>
+              <a:t>Companion to the catalog slide. Anchor battery share 40% for utility-owned and 55% for developer-owned members, back-cast to each project's own year with quantities held fixed (revised 5 Oct 2026); the Handy-Whitman index escalates the non-battery remainder except in the last column, which applies the battery ratio to the whole cost. Utility subclass = the members owned by investor-owned, municipal, cooperative, state or crown utilities. Workbook tab '2026$ Adjustment' reproduces every cell with an index selector.</a:t>
             </a:r>
           </a:p>
         </p:txBody>
@@ -7370,7 +7424,7 @@
           <a:lstStyle/>
           <a:p>
             <a:r>
-              <a:t>Narrative 1, step 1. The two-component model on slides 12 and 14 to 16 uses one battery index and one construction index. This slide replaces the construction index with the published series that fits each layer: ECI construction compensation for labor-driven layers (B, G), the IBEW Local 103 journeyman rate for the labor-driven layers (B, F, G), the BLS producer price index for power and distribution transformers (C), the PPI for switchgear (D), the ENR Construction Cost Index for civil (E) and the PPI for engineering services (H). Weights are the Rev 3 loaded layers A to I. Factors for a 2018 project: composite 1.172, two-component 1.189, naive battery 0.733, Handy-Whitman only 1.493. Series values retrieved from search excerpts of the publishers' releases and tagged in indices_layers.json; fetch_indices.py pulls the same series from the FRED and BLS APIs once the environment allows those hosts. Verify before external use.</a:t>
+              <a:t>Narrative 1, step 1. The two-component model on slides 12 and 14 to 16 uses one battery index and one construction index. This slide replaces the construction index with the published series that fits each layer: ECI construction compensation for labor-driven layers (B, G), the IBEW Local 103 journeyman rate for the labor-driven layers (B, F, G), the BLS producer price index for power and distribution transformers (C), the PPI for switchgear (D), the ENR Construction Cost Index for civil (E) and the PPI for engineering services (H). Weights are the Rev 3 loaded layers A to I. Factors for a 2018 project: composite 1.040, two-component 1.064, naive battery 0.733, Handy-Whitman only 1.493; for 2016: composite 0.676. Revised 5 Oct 2026: the composite now holds physical quantities fixed (1 over the weighted sum of inverse ratios), which is the Laspeyres form; the earlier arithmetic form applied today's dollar shares to yesterday's prices and gave 1.172 for 2018 and 1.076 for 2016. Series values retrieved from search excerpts of the publishers' releases and tagged in indices_layers.json; fetch_indices.py pulls the same series from the FRED and BLS APIs once the environment allows those hosts. Verify before external use.</a:t>
             </a:r>
           </a:p>
         </p:txBody>
@@ -7440,7 +7494,7 @@
           <a:lstStyle/>
           <a:p>
             <a:r>
-              <a:t>Narrative 1, step 2. The same 55-project class under seven re-basing methods. The developer composition is the NREL/PNNL component structure of a merchant 4-h project (battery, PCS and BOS, labor, civil, transformer, soft costs, interconnection); the Hyde Park composition is the Rev 3 loaded layers. The layer-level methods and the two-component model agree within about one percent on the class median because the non-battery escalators cluster between 1.26x and 1.67x since 2018 and the battery is the only layer that fell. The naive method (whole cost at the battery rate) is the only one that moves Hyde Park's percentile materially, and it is the one that cannot be defended. Workbook tab '2026$ Adjustment' holds the index selector; the layer series are in indices_layers.json.</a:t>
+              <a:t>Narrative 1, step 2. The same 55-project class under seven re-basing methods. The developer composition is the NREL/PNNL component structure of a merchant 4-h project (battery, PCS and BOS, labor, civil, transformer, soft costs, interconnection); the Hyde Park composition is the Rev 3 loaded layers. The layer-level methods and the two-component model agree within about one percent on the class median because the non-battery escalators cluster between 1.26x and 1.67x since 2018 and the battery is the only layer that fell. The naive method (whole cost at the battery rate) is the only one that moves Hyde Park's percentile materially, and it is the one that cannot be defended. Revised 5 Oct 2026 after the review challenge on slide 12: every method now holds physical quantities fixed, so the battery share of an older project is back-cast from the indices rather than set at today's value; the superseded fixed-share row is kept for the record. Workbook tab '2026$ Adjustment' holds the index selector; the layer series are in indices_layers.json.</a:t>
             </a:r>
           </a:p>
         </p:txBody>
@@ -14154,7 +14208,7 @@
                 </a:solidFill>
                 <a:latin typeface="Georgia"/>
               </a:rPr>
-              <a:t>Re-based to 2026 dollars, the 55-project class moves by at most a tenth and Hyde Park's station cost stays in the top fifth</a:t>
+              <a:t>Own-year battery shares: the re-based class median barely moves and Hyde Park's station cost stays in the top fifth</a:t>
             </a:r>
           </a:p>
         </p:txBody>
@@ -14304,7 +14358,7 @@
                           </a:solidFill>
                           <a:latin typeface="Calibri"/>
                         </a:rPr>
-                        <a:t>Battery index (40% share)</a:t>
+                        <a:t>Battery index (own-year share)</a:t>
                       </a:r>
                     </a:p>
                   </a:txBody>
@@ -14513,7 +14567,7 @@
                           </a:solidFill>
                           <a:latin typeface="Calibri"/>
                         </a:rPr>
-                        <a:t>$832</a:t>
+                        <a:t>$778</a:t>
                       </a:r>
                     </a:p>
                   </a:txBody>
@@ -14536,7 +14590,7 @@
                           </a:solidFill>
                           <a:latin typeface="Calibri"/>
                         </a:rPr>
-                        <a:t>51%</a:t>
+                        <a:t>60%</a:t>
                       </a:r>
                     </a:p>
                   </a:txBody>
@@ -14559,7 +14613,7 @@
                           </a:solidFill>
                           <a:latin typeface="Calibri"/>
                         </a:rPr>
-                        <a:t>85%</a:t>
+                        <a:t>82%</a:t>
                       </a:r>
                     </a:p>
                   </a:txBody>
@@ -14606,7 +14660,7 @@
                           </a:solidFill>
                           <a:latin typeface="Calibri"/>
                         </a:rPr>
-                        <a:t>$830</a:t>
+                        <a:t>$773</a:t>
                       </a:r>
                     </a:p>
                   </a:txBody>
@@ -14629,7 +14683,7 @@
                           </a:solidFill>
                           <a:latin typeface="Calibri"/>
                         </a:rPr>
-                        <a:t>53%</a:t>
+                        <a:t>62%</a:t>
                       </a:r>
                     </a:p>
                   </a:txBody>
@@ -14699,7 +14753,7 @@
                           </a:solidFill>
                           <a:latin typeface="Calibri"/>
                         </a:rPr>
-                        <a:t>$806</a:t>
+                        <a:t>$740</a:t>
                       </a:r>
                     </a:p>
                   </a:txBody>
@@ -14792,7 +14846,7 @@
                           </a:solidFill>
                           <a:latin typeface="Calibri"/>
                         </a:rPr>
-                        <a:t>$838</a:t>
+                        <a:t>$778</a:t>
                       </a:r>
                     </a:p>
                   </a:txBody>
@@ -14815,7 +14869,7 @@
                           </a:solidFill>
                           <a:latin typeface="Calibri"/>
                         </a:rPr>
-                        <a:t>49%</a:t>
+                        <a:t>56%</a:t>
                       </a:r>
                     </a:p>
                   </a:txBody>
@@ -14838,7 +14892,7 @@
                           </a:solidFill>
                           <a:latin typeface="Calibri"/>
                         </a:rPr>
-                        <a:t>84%</a:t>
+                        <a:t>87%</a:t>
                       </a:r>
                     </a:p>
                   </a:txBody>
@@ -14885,7 +14939,7 @@
                           </a:solidFill>
                           <a:latin typeface="Calibri"/>
                         </a:rPr>
-                        <a:t>$903</a:t>
+                        <a:t>$892</a:t>
                       </a:r>
                     </a:p>
                   </a:txBody>
@@ -15047,8 +15101,8 @@
         </p:nvSpPr>
         <p:spPr>
           <a:xfrm>
-            <a:off x="7635240" y="4343400"/>
-            <a:ext cx="4069080" cy="2011680"/>
+            <a:off x="7635240" y="4297680"/>
+            <a:ext cx="4069080" cy="2103120"/>
           </a:xfrm>
           <a:prstGeom prst="rect">
             <a:avLst/>
@@ -15070,7 +15124,7 @@
               </a:spcAft>
             </a:pPr>
             <a:r>
-              <a:rPr sz="1000">
+              <a:rPr sz="950">
                 <a:solidFill>
                   <a:srgbClr val="FFC72C"/>
                 </a:solidFill>
@@ -15079,22 +15133,22 @@
               <a:t>▪  </a:t>
             </a:r>
             <a:r>
-              <a:rPr b="1" sz="1000">
+              <a:rPr b="1" sz="950">
                 <a:solidFill>
                   <a:srgbClr val="1F2A44"/>
                 </a:solidFill>
                 <a:latin typeface="Calibri"/>
               </a:rPr>
-              <a:t>Two forces, one net. </a:t>
-            </a:r>
-            <a:r>
-              <a:rPr sz="1000">
+              <a:t>The weights move with the prices. </a:t>
+            </a:r>
+            <a:r>
+              <a:rPr sz="950">
                 <a:solidFill>
                   <a:srgbClr val="1F2A44"/>
                 </a:solidFill>
                 <a:latin typeface="Calibri"/>
               </a:rPr>
-              <a:t>Batteries fell 1.4 to 2x since 2018; Handy-Whitman utility construction rose 49%. On a 40% battery share the net factor for a 2018 project is 1.1 to 1.2.</a:t>
+              <a:t>Quantities are held fixed, not today's dollar shares: a 2016 project was about 73% battery and comes to 2026 at 0.68x; a 2018 project was 56% battery, 1.06x; 2021 and later about 1.0x. The 5 Oct review challenge stands: the earlier version held a 40% share fixed and made every old project dearer (median $832).</a:t>
             </a:r>
           </a:p>
           <a:p>
@@ -15107,7 +15161,7 @@
               </a:spcAft>
             </a:pPr>
             <a:r>
-              <a:rPr sz="1000">
+              <a:rPr sz="950">
                 <a:solidFill>
                   <a:srgbClr val="FFC72C"/>
                 </a:solidFill>
@@ -15116,22 +15170,22 @@
               <a:t>▪  </a:t>
             </a:r>
             <a:r>
-              <a:rPr b="1" sz="1000">
+              <a:rPr b="1" sz="950">
                 <a:solidFill>
                   <a:srgbClr val="1F2A44"/>
                 </a:solidFill>
                 <a:latin typeface="Calibri"/>
               </a:rPr>
-              <a:t>Widening the class from 13 utility-owned to 55 projects, 24 of them developer-owned, </a:t>
-            </a:r>
-            <a:r>
-              <a:rPr sz="1000">
+              <a:t>Widening the class to 55 projects, 24 developer-owned, </a:t>
+            </a:r>
+            <a:r>
+              <a:rPr sz="950">
                 <a:solidFill>
                   <a:srgbClr val="1F2A44"/>
                 </a:solidFill>
                 <a:latin typeface="Calibri"/>
               </a:rPr>
-              <a:t>pulls the median from $1,235 to $771 and puts Hyde Park's station-direct cost at the 85% percentile (74% among the utility-owned members). That is the honest comparison and the argument holds: the developer sites carry no utility station, no landfill and no siting case.</a:t>
+              <a:t>puts Hyde Park's station-direct cost at the 85% percentile nominal and 82% re-based; the developer sites carry no utility station, no landfill and no siting case.</a:t>
             </a:r>
           </a:p>
           <a:p>
@@ -15144,7 +15198,7 @@
               </a:spcAft>
             </a:pPr>
             <a:r>
-              <a:rPr sz="1000">
+              <a:rPr sz="950">
                 <a:solidFill>
                   <a:srgbClr val="FFC72C"/>
                 </a:solidFill>
@@ -15153,16 +15207,16 @@
               <a:t>▪  </a:t>
             </a:r>
             <a:r>
-              <a:rPr b="1" sz="1000">
+              <a:rPr b="1" sz="950">
                 <a:solidFill>
                   <a:srgbClr val="1F2A44"/>
                 </a:solidFill>
                 <a:latin typeface="Calibri"/>
               </a:rPr>
-              <a:t>The battery curve you pick moves the median by 4%; </a:t>
-            </a:r>
-            <a:r>
-              <a:rPr sz="1000">
+              <a:t>The battery curve you pick moves the median by 5%; </a:t>
+            </a:r>
+            <a:r>
+              <a:rPr sz="950">
                 <a:solidFill>
                   <a:srgbClr val="1F2A44"/>
                 </a:solidFill>
@@ -17012,7 +17066,7 @@
                 </a:solidFill>
                 <a:latin typeface="Calibri"/>
               </a:rPr>
-              <a:t>1 · WHERE THE MONEY SITS   |   NORMALIZING TO 2026: SIX INDICES X THREE BATTERY SHARES, CLASS MEDIAN $/KWH</a:t>
+              <a:t>1 · WHERE THE MONEY SITS   |   NORMALIZING TO 2026: SIX INDICES X THREE ANCHOR BATTERY SHARES (2024 BASIS), CLASS MEDIAN $/KWH</a:t>
             </a:r>
           </a:p>
         </p:txBody>
@@ -17054,7 +17108,7 @@
                 </a:solidFill>
                 <a:latin typeface="Georgia"/>
               </a:rPr>
-              <a:t>The battery curve you choose moves the median 4%; the battery share and the construction index move it more</a:t>
+              <a:t>The battery curve you choose moves the median 5%; the battery share and the construction index move it more</a:t>
             </a:r>
           </a:p>
         </p:txBody>
@@ -17198,7 +17252,7 @@
                 </a:solidFill>
                 <a:latin typeface="Calibri"/>
               </a:rPr>
-              <a:t>Nominal median $771. Hyde Park station complete, direct, is $1,483/kWh; its percentile under each index is at right. Deflating whole projects at the battery rate gives $524 to $620.</a:t>
+              <a:t>Nominal median $771. Hyde Park station complete, direct, is $1,483/kWh; its percentile under each index is at right. Deflating whole projects at the battery rate gives $524 to $694.</a:t>
             </a:r>
           </a:p>
         </p:txBody>
@@ -17286,7 +17340,7 @@
                           </a:solidFill>
                           <a:latin typeface="Calibri"/>
                         </a:rPr>
-                        <a:t>Net factor, 2018 project, 40% share</a:t>
+                        <a:t>Factor to 2026: 2018 / 2016 project</a:t>
                       </a:r>
                     </a:p>
                   </a:txBody>
@@ -17379,7 +17433,7 @@
                           </a:solidFill>
                           <a:latin typeface="Calibri"/>
                         </a:rPr>
-                        <a:t>1.19x</a:t>
+                        <a:t>1.06x / 0.68x</a:t>
                       </a:r>
                     </a:p>
                   </a:txBody>
@@ -17402,7 +17456,7 @@
                           </a:solidFill>
                           <a:latin typeface="Calibri"/>
                         </a:rPr>
-                        <a:t>85%</a:t>
+                        <a:t>82%</a:t>
                       </a:r>
                     </a:p>
                   </a:txBody>
@@ -17472,7 +17526,7 @@
                           </a:solidFill>
                           <a:latin typeface="Calibri"/>
                         </a:rPr>
-                        <a:t>1.14x</a:t>
+                        <a:t>0.97x / 0.74x</a:t>
                       </a:r>
                     </a:p>
                   </a:txBody>
@@ -17565,7 +17619,7 @@
                           </a:solidFill>
                           <a:latin typeface="Calibri"/>
                         </a:rPr>
-                        <a:t>1.09x</a:t>
+                        <a:t>0.92x / 0.93x</a:t>
                       </a:r>
                     </a:p>
                   </a:txBody>
@@ -17658,7 +17712,7 @@
                           </a:solidFill>
                           <a:latin typeface="Calibri"/>
                         </a:rPr>
-                        <a:t>1.17x</a:t>
+                        <a:t>1.03x / 1.05x</a:t>
                       </a:r>
                     </a:p>
                   </a:txBody>
@@ -17681,7 +17735,7 @@
                           </a:solidFill>
                           <a:latin typeface="Calibri"/>
                         </a:rPr>
-                        <a:t>84%</a:t>
+                        <a:t>87%</a:t>
                       </a:r>
                     </a:p>
                   </a:txBody>
@@ -17751,7 +17805,7 @@
                           </a:solidFill>
                           <a:latin typeface="Calibri"/>
                         </a:rPr>
-                        <a:t>1.31x</a:t>
+                        <a:t>1.26x / 1.29x</a:t>
                       </a:r>
                     </a:p>
                   </a:txBody>
@@ -17844,7 +17898,7 @@
                           </a:solidFill>
                           <a:latin typeface="Calibri"/>
                         </a:rPr>
-                        <a:t>1.49x</a:t>
+                        <a:t>1.49x / 1.56x</a:t>
                       </a:r>
                     </a:p>
                   </a:txBody>
@@ -17937,7 +17991,7 @@
                 </a:solidFill>
                 <a:latin typeface="Calibri"/>
               </a:rPr>
-              <a:t>medians $806 to $838 across the four battery series (LCOS $903). The curves disagree about packs, not about projects.</a:t>
+              <a:t>medians $740 to $778 across the four battery series (LCOS $892). The curves disagree about packs, not about projects.</a:t>
             </a:r>
           </a:p>
           <a:p>
@@ -17965,7 +18019,7 @@
                 </a:solidFill>
                 <a:latin typeface="Calibri"/>
               </a:rPr>
-              <a:t>Battery share: </a:t>
+              <a:t>Anchor battery share: </a:t>
             </a:r>
             <a:r>
               <a:rPr sz="1000">
@@ -17974,7 +18028,7 @@
                 </a:solidFill>
                 <a:latin typeface="Calibri"/>
               </a:rPr>
-              <a:t>30% to 50% moves the median $11 to $86 depending on the curve; the share is a lever of the same order as the curve.</a:t>
+              <a:t>30% to 50% (2024 basis) moves the median $51 to $91 depending on the curve; the share is a lever of the same order as the curve.</a:t>
             </a:r>
           </a:p>
           <a:p>
@@ -18011,7 +18065,7 @@
                 </a:solidFill>
                 <a:latin typeface="Calibri"/>
               </a:rPr>
-              <a:t>Handy-Whitman North Atlantic rose 49% from 2018 to 2026 (10% a year in 2021-22); a flat 3.5% proxy gives 32%, and a median $816 instead of $832.</a:t>
+              <a:t>Handy-Whitman North Atlantic rose 49% from 2018 to 2026 (10% a year in 2021-22); a flat 3.5% proxy gives 32%, and a median $778 instead of $778.</a:t>
             </a:r>
           </a:p>
           <a:p>
@@ -18712,7 +18766,7 @@
                           </a:solidFill>
                           <a:latin typeface="Calibri"/>
                         </a:rPr>
-                        <a:t>$832</a:t>
+                        <a:t>$778</a:t>
                       </a:r>
                     </a:p>
                   </a:txBody>
@@ -18735,7 +18789,7 @@
                           </a:solidFill>
                           <a:latin typeface="Calibri"/>
                         </a:rPr>
-                        <a:t>51%</a:t>
+                        <a:t>60%</a:t>
                       </a:r>
                     </a:p>
                   </a:txBody>
@@ -18758,7 +18812,7 @@
                           </a:solidFill>
                           <a:latin typeface="Calibri"/>
                         </a:rPr>
-                        <a:t>85%</a:t>
+                        <a:t>82%</a:t>
                       </a:r>
                     </a:p>
                   </a:txBody>
@@ -18781,7 +18835,7 @@
                           </a:solidFill>
                           <a:latin typeface="Calibri"/>
                         </a:rPr>
-                        <a:t>$1,057</a:t>
+                        <a:t>$818</a:t>
                       </a:r>
                     </a:p>
                   </a:txBody>
@@ -18804,7 +18858,7 @@
                           </a:solidFill>
                           <a:latin typeface="Calibri"/>
                         </a:rPr>
-                        <a:t>74%</a:t>
+                        <a:t>68%</a:t>
                       </a:r>
                     </a:p>
                   </a:txBody>
@@ -18827,7 +18881,7 @@
                           </a:solidFill>
                           <a:latin typeface="Calibri"/>
                         </a:rPr>
-                        <a:t>$620 / 95%</a:t>
+                        <a:t>$694 / 89%</a:t>
                       </a:r>
                     </a:p>
                   </a:txBody>
@@ -18874,7 +18928,7 @@
                           </a:solidFill>
                           <a:latin typeface="Calibri"/>
                         </a:rPr>
-                        <a:t>$830</a:t>
+                        <a:t>$773</a:t>
                       </a:r>
                     </a:p>
                   </a:txBody>
@@ -18897,7 +18951,7 @@
                           </a:solidFill>
                           <a:latin typeface="Calibri"/>
                         </a:rPr>
-                        <a:t>53%</a:t>
+                        <a:t>62%</a:t>
                       </a:r>
                     </a:p>
                   </a:txBody>
@@ -18943,7 +18997,7 @@
                           </a:solidFill>
                           <a:latin typeface="Calibri"/>
                         </a:rPr>
-                        <a:t>$1,093</a:t>
+                        <a:t>$775</a:t>
                       </a:r>
                     </a:p>
                   </a:txBody>
@@ -19036,7 +19090,7 @@
                           </a:solidFill>
                           <a:latin typeface="Calibri"/>
                         </a:rPr>
-                        <a:t>$806</a:t>
+                        <a:t>$740</a:t>
                       </a:r>
                     </a:p>
                   </a:txBody>
@@ -19105,7 +19159,7 @@
                           </a:solidFill>
                           <a:latin typeface="Calibri"/>
                         </a:rPr>
-                        <a:t>$1,038</a:t>
+                        <a:t>$885</a:t>
                       </a:r>
                     </a:p>
                   </a:txBody>
@@ -19198,7 +19252,7 @@
                           </a:solidFill>
                           <a:latin typeface="Calibri"/>
                         </a:rPr>
-                        <a:t>$838</a:t>
+                        <a:t>$778</a:t>
                       </a:r>
                     </a:p>
                   </a:txBody>
@@ -19221,7 +19275,7 @@
                           </a:solidFill>
                           <a:latin typeface="Calibri"/>
                         </a:rPr>
-                        <a:t>49%</a:t>
+                        <a:t>56%</a:t>
                       </a:r>
                     </a:p>
                   </a:txBody>
@@ -19244,7 +19298,7 @@
                           </a:solidFill>
                           <a:latin typeface="Calibri"/>
                         </a:rPr>
-                        <a:t>84%</a:t>
+                        <a:t>87%</a:t>
                       </a:r>
                     </a:p>
                   </a:txBody>
@@ -19267,7 +19321,7 @@
                           </a:solidFill>
                           <a:latin typeface="Calibri"/>
                         </a:rPr>
-                        <a:t>$1,118</a:t>
+                        <a:t>$997</a:t>
                       </a:r>
                     </a:p>
                   </a:txBody>
@@ -19290,7 +19344,7 @@
                           </a:solidFill>
                           <a:latin typeface="Calibri"/>
                         </a:rPr>
-                        <a:t>71%</a:t>
+                        <a:t>77%</a:t>
                       </a:r>
                     </a:p>
                   </a:txBody>
@@ -19360,7 +19414,7 @@
                           </a:solidFill>
                           <a:latin typeface="Calibri"/>
                         </a:rPr>
-                        <a:t>$903</a:t>
+                        <a:t>$892</a:t>
                       </a:r>
                     </a:p>
                   </a:txBody>
@@ -19429,7 +19483,7 @@
                           </a:solidFill>
                           <a:latin typeface="Calibri"/>
                         </a:rPr>
-                        <a:t>$1,339</a:t>
+                        <a:t>$1,289</a:t>
                       </a:r>
                     </a:p>
                   </a:txBody>
@@ -19707,7 +19761,7 @@
                 </a:solidFill>
                 <a:latin typeface="Calibri"/>
               </a:rPr>
-              <a:t>the four battery curves place the class median within $32/kWh of each other and Hyde Park's station cost between the 84% and 89% percentiles. LCOS and a construction-only index raise the class because they carry no battery deflation.</a:t>
+              <a:t>the four battery curves place the class median within $38/kWh of each other and Hyde Park's station cost between the 82% and 89% percentiles. LCOS and a construction-only index raise the class because they carry no battery deflation.</a:t>
             </a:r>
           </a:p>
           <a:p>
@@ -19927,7 +19981,7 @@
                 </a:solidFill>
                 <a:latin typeface="Georgia"/>
               </a:rPr>
-              <a:t>One escalator per layer: a 2018 project built the way Hyde Park is built costs 17% more in 2026 dollars, not 27% less</a:t>
+              <a:t>One escalator per layer, quantities fixed: a 2018 project like Hyde Park costs +4% in 2026 dollars, a 2016 one 32% less</a:t>
             </a:r>
           </a:p>
         </p:txBody>
@@ -20973,7 +21027,7 @@
                           </a:solidFill>
                           <a:latin typeface="Calibri"/>
                         </a:rPr>
-                        <a:t>Composite, Hyde Park weights</a:t>
+                        <a:t>Composite, Hyde Park scope</a:t>
                       </a:r>
                     </a:p>
                   </a:txBody>
@@ -21018,7 +21072,7 @@
                           </a:solidFill>
                           <a:latin typeface="Calibri"/>
                         </a:rPr>
-                        <a:t>weighted sum</a:t>
+                        <a:t>fixed quantities (1 / weighted sum of inverse ratios)</a:t>
                       </a:r>
                     </a:p>
                   </a:txBody>
@@ -21041,7 +21095,7 @@
                           </a:solidFill>
                           <a:latin typeface="Calibri"/>
                         </a:rPr>
-                        <a:t>1.17x</a:t>
+                        <a:t>1.04x</a:t>
                       </a:r>
                     </a:p>
                   </a:txBody>
@@ -21171,7 +21225,7 @@
                 </a:solidFill>
                 <a:latin typeface="Calibri"/>
               </a:rPr>
-              <a:t>Weighted by Hyde Park's loaded layers the net is 1.17x, beside the two-index model (1.19x). Transformers (1.91x) and switchgear (1.82x) are the fastest risers, so a station-heavy project escalates faster than a battery-heavy one.</a:t>
+              <a:t>With Hyde Park's physical scope held fixed, a 2018 build comes to 2026 at 1.04x (two-index model 1.06x) and a 2016 build at 0.68x, because the battery was 72% of such a project in 2016 and is 38% now. Transformers (1.91x) and switchgear (1.82x) are the fastest risers.</a:t>
             </a:r>
           </a:p>
           <a:p>
@@ -21199,7 +21253,7 @@
                 </a:solidFill>
                 <a:latin typeface="Calibri"/>
               </a:rPr>
-              <a:t>What the 'batteries were 4x' argument misses: </a:t>
+              <a:t>The review challenge was right about 2015 to 2017, and the earlier version of this slide was wrong. </a:t>
             </a:r>
             <a:r>
               <a:rPr sz="1100">
@@ -21208,7 +21262,7 @@
                 </a:solidFill>
                 <a:latin typeface="Calibri"/>
               </a:rPr>
-              <a:t>it deflates a whole project at the pack rate. Only the battery layer (38% of this project loaded) is on that curve; the other 62% rose by a quarter to nine tenths.</a:t>
+              <a:t>Holding today's 38% battery share fixed made a 2016 project 1.08x; letting the share be what it was then makes it 0.68x. From 2018 on the battery decline and the construction rise roughly cancel. Deflating a whole project at the pack rate is still wrong: it gives 0.36x for 2016.</a:t>
             </a:r>
           </a:p>
         </p:txBody>
@@ -21354,7 +21408,7 @@
                 </a:solidFill>
                 <a:latin typeface="Georgia"/>
               </a:rPr>
-              <a:t>Three defensible methods, one answer: class median $832 to $832, Hyde Park's station cost at the 85% percentile</a:t>
+              <a:t>Three defensible methods, one answer: class median $752 to $780, Hyde Park's station cost at the 82% percentile</a:t>
             </a:r>
           </a:p>
         </p:txBody>
@@ -21453,7 +21507,7 @@
         </p:nvGraphicFramePr>
         <p:xfrm>
           <a:off x="548640" y="1371600"/>
-          <a:ext cx="11064240" cy="3063240"/>
+          <a:ext cx="11064240" cy="3246120"/>
         </p:xfrm>
         <a:graphic>
           <a:graphicData uri="http://schemas.openxmlformats.org/drawingml/2006/table">
@@ -21470,14 +21524,14 @@
                 <a:gridCol w="1188720"/>
                 <a:gridCol w="1280160"/>
               </a:tblGrid>
-              <a:tr h="382905">
-                <a:tc>
-                  <a:txBody>
-                    <a:bodyPr/>
-                    <a:lstStyle/>
-                    <a:p>
-                      <a:r>
-                        <a:rPr sz="1050" b="1">
+              <a:tr h="360680">
+                <a:tc>
+                  <a:txBody>
+                    <a:bodyPr/>
+                    <a:lstStyle/>
+                    <a:p>
+                      <a:r>
+                        <a:rPr sz="1000" b="1">
                           <a:solidFill>
                             <a:srgbClr val="FFFFFF"/>
                           </a:solidFill>
@@ -21499,7 +21553,7 @@
                     <a:lstStyle/>
                     <a:p>
                       <a:r>
-                        <a:rPr sz="1050" b="1">
+                        <a:rPr sz="1000" b="1">
                           <a:solidFill>
                             <a:srgbClr val="FFFFFF"/>
                           </a:solidFill>
@@ -21522,7 +21576,7 @@
                     <a:p>
                       <a:pPr algn="r"/>
                       <a:r>
-                        <a:rPr sz="1050" b="1">
+                        <a:rPr sz="1000" b="1">
                           <a:solidFill>
                             <a:srgbClr val="FFFFFF"/>
                           </a:solidFill>
@@ -21545,7 +21599,7 @@
                     <a:p>
                       <a:pPr algn="r"/>
                       <a:r>
-                        <a:rPr sz="1050" b="1">
+                        <a:rPr sz="1000" b="1">
                           <a:solidFill>
                             <a:srgbClr val="FFFFFF"/>
                           </a:solidFill>
@@ -21568,7 +21622,7 @@
                     <a:p>
                       <a:pPr algn="r"/>
                       <a:r>
-                        <a:rPr sz="1050" b="1">
+                        <a:rPr sz="1000" b="1">
                           <a:solidFill>
                             <a:srgbClr val="FFFFFF"/>
                           </a:solidFill>
@@ -21591,7 +21645,7 @@
                     <a:p>
                       <a:pPr algn="r"/>
                       <a:r>
-                        <a:rPr sz="1050" b="1">
+                        <a:rPr sz="1000" b="1">
                           <a:solidFill>
                             <a:srgbClr val="FFFFFF"/>
                           </a:solidFill>
@@ -21614,7 +21668,7 @@
                     <a:p>
                       <a:pPr algn="r"/>
                       <a:r>
-                        <a:rPr sz="1050" b="1">
+                        <a:rPr sz="1000" b="1">
                           <a:solidFill>
                             <a:srgbClr val="FFFFFF"/>
                           </a:solidFill>
@@ -21631,14 +21685,14 @@
                   </a:tcPr>
                 </a:tc>
               </a:tr>
-              <a:tr h="382905">
-                <a:tc>
-                  <a:txBody>
-                    <a:bodyPr/>
-                    <a:lstStyle/>
-                    <a:p>
-                      <a:r>
-                        <a:rPr sz="1050" b="0">
+              <a:tr h="360680">
+                <a:tc>
+                  <a:txBody>
+                    <a:bodyPr/>
+                    <a:lstStyle/>
+                    <a:p>
+                      <a:r>
+                        <a:rPr sz="1000" b="0">
                           <a:solidFill>
                             <a:srgbClr val="1F2A44"/>
                           </a:solidFill>
@@ -21660,7 +21714,7 @@
                     <a:lstStyle/>
                     <a:p>
                       <a:r>
-                        <a:rPr sz="1050" b="0">
+                        <a:rPr sz="1000" b="0">
                           <a:solidFill>
                             <a:srgbClr val="1F2A44"/>
                           </a:solidFill>
@@ -21683,7 +21737,7 @@
                     <a:p>
                       <a:pPr algn="r"/>
                       <a:r>
-                        <a:rPr sz="1050" b="0">
+                        <a:rPr sz="1000" b="0">
                           <a:solidFill>
                             <a:srgbClr val="1F2A44"/>
                           </a:solidFill>
@@ -21706,7 +21760,7 @@
                     <a:p>
                       <a:pPr algn="r"/>
                       <a:r>
-                        <a:rPr sz="1050" b="0">
+                        <a:rPr sz="1000" b="0">
                           <a:solidFill>
                             <a:srgbClr val="1F2A44"/>
                           </a:solidFill>
@@ -21729,7 +21783,7 @@
                     <a:p>
                       <a:pPr algn="r"/>
                       <a:r>
-                        <a:rPr sz="1050" b="0">
+                        <a:rPr sz="1000" b="0">
                           <a:solidFill>
                             <a:srgbClr val="1F2A44"/>
                           </a:solidFill>
@@ -21752,7 +21806,7 @@
                     <a:p>
                       <a:pPr algn="r"/>
                       <a:r>
-                        <a:rPr sz="1050" b="0">
+                        <a:rPr sz="1000" b="0">
                           <a:solidFill>
                             <a:srgbClr val="1F2A44"/>
                           </a:solidFill>
@@ -21775,7 +21829,7 @@
                     <a:p>
                       <a:pPr algn="r"/>
                       <a:r>
-                        <a:rPr sz="1050" b="0">
+                        <a:rPr sz="1000" b="0">
                           <a:solidFill>
                             <a:srgbClr val="1F2A44"/>
                           </a:solidFill>
@@ -21792,14 +21846,14 @@
                   </a:tcPr>
                 </a:tc>
               </a:tr>
-              <a:tr h="382905">
-                <a:tc>
-                  <a:txBody>
-                    <a:bodyPr/>
-                    <a:lstStyle/>
-                    <a:p>
-                      <a:r>
-                        <a:rPr sz="1050" b="0">
+              <a:tr h="360680">
+                <a:tc>
+                  <a:txBody>
+                    <a:bodyPr/>
+                    <a:lstStyle/>
+                    <a:p>
+                      <a:r>
+                        <a:rPr sz="1000" b="0">
                           <a:solidFill>
                             <a:srgbClr val="1F2A44"/>
                           </a:solidFill>
@@ -21821,7 +21875,7 @@
                     <a:lstStyle/>
                     <a:p>
                       <a:r>
-                        <a:rPr sz="1050" b="0">
+                        <a:rPr sz="1000" b="0">
                           <a:solidFill>
                             <a:srgbClr val="1F2A44"/>
                           </a:solidFill>
@@ -21844,13 +21898,13 @@
                     <a:p>
                       <a:pPr algn="r"/>
                       <a:r>
-                        <a:rPr sz="1050" b="0">
-                          <a:solidFill>
-                            <a:srgbClr val="1F2A44"/>
-                          </a:solidFill>
-                          <a:latin typeface="Calibri"/>
-                        </a:rPr>
-                        <a:t>$620</a:t>
+                        <a:rPr sz="1000" b="0">
+                          <a:solidFill>
+                            <a:srgbClr val="1F2A44"/>
+                          </a:solidFill>
+                          <a:latin typeface="Calibri"/>
+                        </a:rPr>
+                        <a:t>$694</a:t>
                       </a:r>
                     </a:p>
                   </a:txBody>
@@ -21867,13 +21921,13 @@
                     <a:p>
                       <a:pPr algn="r"/>
                       <a:r>
-                        <a:rPr sz="1050" b="0">
-                          <a:solidFill>
-                            <a:srgbClr val="1F2A44"/>
-                          </a:solidFill>
-                          <a:latin typeface="Calibri"/>
-                        </a:rPr>
-                        <a:t>67%</a:t>
+                        <a:rPr sz="1000" b="0">
+                          <a:solidFill>
+                            <a:srgbClr val="1F2A44"/>
+                          </a:solidFill>
+                          <a:latin typeface="Calibri"/>
+                        </a:rPr>
+                        <a:t>65%</a:t>
                       </a:r>
                     </a:p>
                   </a:txBody>
@@ -21890,7 +21944,812 @@
                     <a:p>
                       <a:pPr algn="r"/>
                       <a:r>
-                        <a:rPr sz="1050" b="0">
+                        <a:rPr sz="1000" b="0">
+                          <a:solidFill>
+                            <a:srgbClr val="1F2A44"/>
+                          </a:solidFill>
+                          <a:latin typeface="Calibri"/>
+                        </a:rPr>
+                        <a:t>89%</a:t>
+                      </a:r>
+                    </a:p>
+                  </a:txBody>
+                  <a:tcPr marL="54864" marR="54864" marT="27432" marB="27432" anchor="ctr">
+                    <a:solidFill>
+                      <a:srgbClr val="F2F4F8"/>
+                    </a:solidFill>
+                  </a:tcPr>
+                </a:tc>
+                <a:tc>
+                  <a:txBody>
+                    <a:bodyPr/>
+                    <a:lstStyle/>
+                    <a:p>
+                      <a:pPr algn="r"/>
+                      <a:r>
+                        <a:rPr sz="1000" b="0">
+                          <a:solidFill>
+                            <a:srgbClr val="1F2A44"/>
+                          </a:solidFill>
+                          <a:latin typeface="Calibri"/>
+                        </a:rPr>
+                        <a:t>$695</a:t>
+                      </a:r>
+                    </a:p>
+                  </a:txBody>
+                  <a:tcPr marL="54864" marR="54864" marT="27432" marB="27432" anchor="ctr">
+                    <a:solidFill>
+                      <a:srgbClr val="F2F4F8"/>
+                    </a:solidFill>
+                  </a:tcPr>
+                </a:tc>
+                <a:tc>
+                  <a:txBody>
+                    <a:bodyPr/>
+                    <a:lstStyle/>
+                    <a:p>
+                      <a:pPr algn="r"/>
+                      <a:r>
+                        <a:rPr sz="1000" b="0">
+                          <a:solidFill>
+                            <a:srgbClr val="1F2A44"/>
+                          </a:solidFill>
+                          <a:latin typeface="Calibri"/>
+                        </a:rPr>
+                        <a:t>81%</a:t>
+                      </a:r>
+                    </a:p>
+                  </a:txBody>
+                  <a:tcPr marL="54864" marR="54864" marT="27432" marB="27432" anchor="ctr">
+                    <a:solidFill>
+                      <a:srgbClr val="F2F4F8"/>
+                    </a:solidFill>
+                  </a:tcPr>
+                </a:tc>
+              </a:tr>
+              <a:tr h="360680">
+                <a:tc>
+                  <a:txBody>
+                    <a:bodyPr/>
+                    <a:lstStyle/>
+                    <a:p>
+                      <a:r>
+                        <a:rPr sz="1000" b="0">
+                          <a:solidFill>
+                            <a:srgbClr val="1F2A44"/>
+                          </a:solidFill>
+                          <a:latin typeface="Calibri"/>
+                        </a:rPr>
+                        <a:t>Two indices, own-year battery share</a:t>
+                      </a:r>
+                    </a:p>
+                  </a:txBody>
+                  <a:tcPr marL="54864" marR="54864" marT="27432" marB="27432" anchor="ctr">
+                    <a:solidFill>
+                      <a:srgbClr val="FFFFFF"/>
+                    </a:solidFill>
+                  </a:tcPr>
+                </a:tc>
+                <a:tc>
+                  <a:txBody>
+                    <a:bodyPr/>
+                    <a:lstStyle/>
+                    <a:p>
+                      <a:r>
+                        <a:rPr sz="1000" b="0">
+                          <a:solidFill>
+                            <a:srgbClr val="1F2A44"/>
+                          </a:solidFill>
+                          <a:latin typeface="Calibri"/>
+                        </a:rPr>
+                        <a:t>anchor 40% utility, 55% developer; slides 12 to 16</a:t>
+                      </a:r>
+                    </a:p>
+                  </a:txBody>
+                  <a:tcPr marL="54864" marR="54864" marT="27432" marB="27432" anchor="ctr">
+                    <a:solidFill>
+                      <a:srgbClr val="FFFFFF"/>
+                    </a:solidFill>
+                  </a:tcPr>
+                </a:tc>
+                <a:tc>
+                  <a:txBody>
+                    <a:bodyPr/>
+                    <a:lstStyle/>
+                    <a:p>
+                      <a:pPr algn="r"/>
+                      <a:r>
+                        <a:rPr sz="1000" b="0">
+                          <a:solidFill>
+                            <a:srgbClr val="1F2A44"/>
+                          </a:solidFill>
+                          <a:latin typeface="Calibri"/>
+                        </a:rPr>
+                        <a:t>$778</a:t>
+                      </a:r>
+                    </a:p>
+                  </a:txBody>
+                  <a:tcPr marL="54864" marR="54864" marT="27432" marB="27432" anchor="ctr">
+                    <a:solidFill>
+                      <a:srgbClr val="FFFFFF"/>
+                    </a:solidFill>
+                  </a:tcPr>
+                </a:tc>
+                <a:tc>
+                  <a:txBody>
+                    <a:bodyPr/>
+                    <a:lstStyle/>
+                    <a:p>
+                      <a:pPr algn="r"/>
+                      <a:r>
+                        <a:rPr sz="1000" b="0">
+                          <a:solidFill>
+                            <a:srgbClr val="1F2A44"/>
+                          </a:solidFill>
+                          <a:latin typeface="Calibri"/>
+                        </a:rPr>
+                        <a:t>60%</a:t>
+                      </a:r>
+                    </a:p>
+                  </a:txBody>
+                  <a:tcPr marL="54864" marR="54864" marT="27432" marB="27432" anchor="ctr">
+                    <a:solidFill>
+                      <a:srgbClr val="FFFFFF"/>
+                    </a:solidFill>
+                  </a:tcPr>
+                </a:tc>
+                <a:tc>
+                  <a:txBody>
+                    <a:bodyPr/>
+                    <a:lstStyle/>
+                    <a:p>
+                      <a:pPr algn="r"/>
+                      <a:r>
+                        <a:rPr sz="1000" b="0">
+                          <a:solidFill>
+                            <a:srgbClr val="1F2A44"/>
+                          </a:solidFill>
+                          <a:latin typeface="Calibri"/>
+                        </a:rPr>
+                        <a:t>82%</a:t>
+                      </a:r>
+                    </a:p>
+                  </a:txBody>
+                  <a:tcPr marL="54864" marR="54864" marT="27432" marB="27432" anchor="ctr">
+                    <a:solidFill>
+                      <a:srgbClr val="FFFFFF"/>
+                    </a:solidFill>
+                  </a:tcPr>
+                </a:tc>
+                <a:tc>
+                  <a:txBody>
+                    <a:bodyPr/>
+                    <a:lstStyle/>
+                    <a:p>
+                      <a:pPr algn="r"/>
+                      <a:r>
+                        <a:rPr sz="1000" b="0">
+                          <a:solidFill>
+                            <a:srgbClr val="1F2A44"/>
+                          </a:solidFill>
+                          <a:latin typeface="Calibri"/>
+                        </a:rPr>
+                        <a:t>$818</a:t>
+                      </a:r>
+                    </a:p>
+                  </a:txBody>
+                  <a:tcPr marL="54864" marR="54864" marT="27432" marB="27432" anchor="ctr">
+                    <a:solidFill>
+                      <a:srgbClr val="FFFFFF"/>
+                    </a:solidFill>
+                  </a:tcPr>
+                </a:tc>
+                <a:tc>
+                  <a:txBody>
+                    <a:bodyPr/>
+                    <a:lstStyle/>
+                    <a:p>
+                      <a:pPr algn="r"/>
+                      <a:r>
+                        <a:rPr sz="1000" b="0">
+                          <a:solidFill>
+                            <a:srgbClr val="1F2A44"/>
+                          </a:solidFill>
+                          <a:latin typeface="Calibri"/>
+                        </a:rPr>
+                        <a:t>68%</a:t>
+                      </a:r>
+                    </a:p>
+                  </a:txBody>
+                  <a:tcPr marL="54864" marR="54864" marT="27432" marB="27432" anchor="ctr">
+                    <a:solidFill>
+                      <a:srgbClr val="FFFFFF"/>
+                    </a:solidFill>
+                  </a:tcPr>
+                </a:tc>
+              </a:tr>
+              <a:tr h="360680">
+                <a:tc>
+                  <a:txBody>
+                    <a:bodyPr/>
+                    <a:lstStyle/>
+                    <a:p>
+                      <a:r>
+                        <a:rPr sz="1000" b="0">
+                          <a:solidFill>
+                            <a:srgbClr val="1F2A44"/>
+                          </a:solidFill>
+                          <a:latin typeface="Calibri"/>
+                        </a:rPr>
+                        <a:t>One index per layer, developer weights</a:t>
+                      </a:r>
+                    </a:p>
+                  </a:txBody>
+                  <a:tcPr marL="54864" marR="54864" marT="27432" marB="27432" anchor="ctr">
+                    <a:solidFill>
+                      <a:srgbClr val="F2F4F8"/>
+                    </a:solidFill>
+                  </a:tcPr>
+                </a:tc>
+                <a:tc>
+                  <a:txBody>
+                    <a:bodyPr/>
+                    <a:lstStyle/>
+                    <a:p>
+                      <a:r>
+                        <a:rPr sz="1000" b="0">
+                          <a:solidFill>
+                            <a:srgbClr val="1F2A44"/>
+                          </a:solidFill>
+                          <a:latin typeface="Calibri"/>
+                        </a:rPr>
+                        <a:t>NREL/PNNL composition</a:t>
+                      </a:r>
+                    </a:p>
+                  </a:txBody>
+                  <a:tcPr marL="54864" marR="54864" marT="27432" marB="27432" anchor="ctr">
+                    <a:solidFill>
+                      <a:srgbClr val="F2F4F8"/>
+                    </a:solidFill>
+                  </a:tcPr>
+                </a:tc>
+                <a:tc>
+                  <a:txBody>
+                    <a:bodyPr/>
+                    <a:lstStyle/>
+                    <a:p>
+                      <a:pPr algn="r"/>
+                      <a:r>
+                        <a:rPr sz="1000" b="0">
+                          <a:solidFill>
+                            <a:srgbClr val="1F2A44"/>
+                          </a:solidFill>
+                          <a:latin typeface="Calibri"/>
+                        </a:rPr>
+                        <a:t>$752</a:t>
+                      </a:r>
+                    </a:p>
+                  </a:txBody>
+                  <a:tcPr marL="54864" marR="54864" marT="27432" marB="27432" anchor="ctr">
+                    <a:solidFill>
+                      <a:srgbClr val="F2F4F8"/>
+                    </a:solidFill>
+                  </a:tcPr>
+                </a:tc>
+                <a:tc>
+                  <a:txBody>
+                    <a:bodyPr/>
+                    <a:lstStyle/>
+                    <a:p>
+                      <a:pPr algn="r"/>
+                      <a:r>
+                        <a:rPr sz="1000" b="0">
+                          <a:solidFill>
+                            <a:srgbClr val="1F2A44"/>
+                          </a:solidFill>
+                          <a:latin typeface="Calibri"/>
+                        </a:rPr>
+                        <a:t>62%</a:t>
+                      </a:r>
+                    </a:p>
+                  </a:txBody>
+                  <a:tcPr marL="54864" marR="54864" marT="27432" marB="27432" anchor="ctr">
+                    <a:solidFill>
+                      <a:srgbClr val="F2F4F8"/>
+                    </a:solidFill>
+                  </a:tcPr>
+                </a:tc>
+                <a:tc>
+                  <a:txBody>
+                    <a:bodyPr/>
+                    <a:lstStyle/>
+                    <a:p>
+                      <a:pPr algn="r"/>
+                      <a:r>
+                        <a:rPr sz="1000" b="0">
+                          <a:solidFill>
+                            <a:srgbClr val="1F2A44"/>
+                          </a:solidFill>
+                          <a:latin typeface="Calibri"/>
+                        </a:rPr>
+                        <a:t>82%</a:t>
+                      </a:r>
+                    </a:p>
+                  </a:txBody>
+                  <a:tcPr marL="54864" marR="54864" marT="27432" marB="27432" anchor="ctr">
+                    <a:solidFill>
+                      <a:srgbClr val="F2F4F8"/>
+                    </a:solidFill>
+                  </a:tcPr>
+                </a:tc>
+                <a:tc>
+                  <a:txBody>
+                    <a:bodyPr/>
+                    <a:lstStyle/>
+                    <a:p>
+                      <a:pPr algn="r"/>
+                      <a:r>
+                        <a:rPr sz="1000" b="0">
+                          <a:solidFill>
+                            <a:srgbClr val="1F2A44"/>
+                          </a:solidFill>
+                          <a:latin typeface="Calibri"/>
+                        </a:rPr>
+                        <a:t>$771</a:t>
+                      </a:r>
+                    </a:p>
+                  </a:txBody>
+                  <a:tcPr marL="54864" marR="54864" marT="27432" marB="27432" anchor="ctr">
+                    <a:solidFill>
+                      <a:srgbClr val="F2F4F8"/>
+                    </a:solidFill>
+                  </a:tcPr>
+                </a:tc>
+                <a:tc>
+                  <a:txBody>
+                    <a:bodyPr/>
+                    <a:lstStyle/>
+                    <a:p>
+                      <a:pPr algn="r"/>
+                      <a:r>
+                        <a:rPr sz="1000" b="0">
+                          <a:solidFill>
+                            <a:srgbClr val="1F2A44"/>
+                          </a:solidFill>
+                          <a:latin typeface="Calibri"/>
+                        </a:rPr>
+                        <a:t>68%</a:t>
+                      </a:r>
+                    </a:p>
+                  </a:txBody>
+                  <a:tcPr marL="54864" marR="54864" marT="27432" marB="27432" anchor="ctr">
+                    <a:solidFill>
+                      <a:srgbClr val="F2F4F8"/>
+                    </a:solidFill>
+                  </a:tcPr>
+                </a:tc>
+              </a:tr>
+              <a:tr h="360680">
+                <a:tc>
+                  <a:txBody>
+                    <a:bodyPr/>
+                    <a:lstStyle/>
+                    <a:p>
+                      <a:r>
+                        <a:rPr sz="1000" b="0">
+                          <a:solidFill>
+                            <a:srgbClr val="1F2A44"/>
+                          </a:solidFill>
+                          <a:latin typeface="Calibri"/>
+                        </a:rPr>
+                        <a:t>One index per layer, Hyde Park weights</a:t>
+                      </a:r>
+                    </a:p>
+                  </a:txBody>
+                  <a:tcPr marL="54864" marR="54864" marT="27432" marB="27432" anchor="ctr">
+                    <a:solidFill>
+                      <a:srgbClr val="FFFFFF"/>
+                    </a:solidFill>
+                  </a:tcPr>
+                </a:tc>
+                <a:tc>
+                  <a:txBody>
+                    <a:bodyPr/>
+                    <a:lstStyle/>
+                    <a:p>
+                      <a:r>
+                        <a:rPr sz="1000" b="0">
+                          <a:solidFill>
+                            <a:srgbClr val="1F2A44"/>
+                          </a:solidFill>
+                          <a:latin typeface="Calibri"/>
+                        </a:rPr>
+                        <a:t>Rev 3 loaded layers</a:t>
+                      </a:r>
+                    </a:p>
+                  </a:txBody>
+                  <a:tcPr marL="54864" marR="54864" marT="27432" marB="27432" anchor="ctr">
+                    <a:solidFill>
+                      <a:srgbClr val="FFFFFF"/>
+                    </a:solidFill>
+                  </a:tcPr>
+                </a:tc>
+                <a:tc>
+                  <a:txBody>
+                    <a:bodyPr/>
+                    <a:lstStyle/>
+                    <a:p>
+                      <a:pPr algn="r"/>
+                      <a:r>
+                        <a:rPr sz="1000" b="0">
+                          <a:solidFill>
+                            <a:srgbClr val="1F2A44"/>
+                          </a:solidFill>
+                          <a:latin typeface="Calibri"/>
+                        </a:rPr>
+                        <a:t>$780</a:t>
+                      </a:r>
+                    </a:p>
+                  </a:txBody>
+                  <a:tcPr marL="54864" marR="54864" marT="27432" marB="27432" anchor="ctr">
+                    <a:solidFill>
+                      <a:srgbClr val="FFFFFF"/>
+                    </a:solidFill>
+                  </a:tcPr>
+                </a:tc>
+                <a:tc>
+                  <a:txBody>
+                    <a:bodyPr/>
+                    <a:lstStyle/>
+                    <a:p>
+                      <a:pPr algn="r"/>
+                      <a:r>
+                        <a:rPr sz="1000" b="0">
+                          <a:solidFill>
+                            <a:srgbClr val="1F2A44"/>
+                          </a:solidFill>
+                          <a:latin typeface="Calibri"/>
+                        </a:rPr>
+                        <a:t>60%</a:t>
+                      </a:r>
+                    </a:p>
+                  </a:txBody>
+                  <a:tcPr marL="54864" marR="54864" marT="27432" marB="27432" anchor="ctr">
+                    <a:solidFill>
+                      <a:srgbClr val="FFFFFF"/>
+                    </a:solidFill>
+                  </a:tcPr>
+                </a:tc>
+                <a:tc>
+                  <a:txBody>
+                    <a:bodyPr/>
+                    <a:lstStyle/>
+                    <a:p>
+                      <a:pPr algn="r"/>
+                      <a:r>
+                        <a:rPr sz="1000" b="0">
+                          <a:solidFill>
+                            <a:srgbClr val="1F2A44"/>
+                          </a:solidFill>
+                          <a:latin typeface="Calibri"/>
+                        </a:rPr>
+                        <a:t>82%</a:t>
+                      </a:r>
+                    </a:p>
+                  </a:txBody>
+                  <a:tcPr marL="54864" marR="54864" marT="27432" marB="27432" anchor="ctr">
+                    <a:solidFill>
+                      <a:srgbClr val="FFFFFF"/>
+                    </a:solidFill>
+                  </a:tcPr>
+                </a:tc>
+                <a:tc>
+                  <a:txBody>
+                    <a:bodyPr/>
+                    <a:lstStyle/>
+                    <a:p>
+                      <a:pPr algn="r"/>
+                      <a:r>
+                        <a:rPr sz="1000" b="0">
+                          <a:solidFill>
+                            <a:srgbClr val="1F2A44"/>
+                          </a:solidFill>
+                          <a:latin typeface="Calibri"/>
+                        </a:rPr>
+                        <a:t>$794</a:t>
+                      </a:r>
+                    </a:p>
+                  </a:txBody>
+                  <a:tcPr marL="54864" marR="54864" marT="27432" marB="27432" anchor="ctr">
+                    <a:solidFill>
+                      <a:srgbClr val="FFFFFF"/>
+                    </a:solidFill>
+                  </a:tcPr>
+                </a:tc>
+                <a:tc>
+                  <a:txBody>
+                    <a:bodyPr/>
+                    <a:lstStyle/>
+                    <a:p>
+                      <a:pPr algn="r"/>
+                      <a:r>
+                        <a:rPr sz="1000" b="0">
+                          <a:solidFill>
+                            <a:srgbClr val="1F2A44"/>
+                          </a:solidFill>
+                          <a:latin typeface="Calibri"/>
+                        </a:rPr>
+                        <a:t>68%</a:t>
+                      </a:r>
+                    </a:p>
+                  </a:txBody>
+                  <a:tcPr marL="54864" marR="54864" marT="27432" marB="27432" anchor="ctr">
+                    <a:solidFill>
+                      <a:srgbClr val="FFFFFF"/>
+                    </a:solidFill>
+                  </a:tcPr>
+                </a:tc>
+              </a:tr>
+              <a:tr h="360680">
+                <a:tc>
+                  <a:txBody>
+                    <a:bodyPr/>
+                    <a:lstStyle/>
+                    <a:p>
+                      <a:r>
+                        <a:rPr sz="1000" b="0">
+                          <a:solidFill>
+                            <a:srgbClr val="1F2A44"/>
+                          </a:solidFill>
+                          <a:latin typeface="Calibri"/>
+                        </a:rPr>
+                        <a:t>Layer method, BNEF pack for the battery</a:t>
+                      </a:r>
+                    </a:p>
+                  </a:txBody>
+                  <a:tcPr marL="54864" marR="54864" marT="27432" marB="27432" anchor="ctr">
+                    <a:solidFill>
+                      <a:srgbClr val="F2F4F8"/>
+                    </a:solidFill>
+                  </a:tcPr>
+                </a:tc>
+                <a:tc>
+                  <a:txBody>
+                    <a:bodyPr/>
+                    <a:lstStyle/>
+                    <a:p>
+                      <a:r>
+                        <a:rPr sz="1000" b="0">
+                          <a:solidFill>
+                            <a:srgbClr val="1F2A44"/>
+                          </a:solidFill>
+                          <a:latin typeface="Calibri"/>
+                        </a:rPr>
+                        <a:t>sensitivity</a:t>
+                      </a:r>
+                    </a:p>
+                  </a:txBody>
+                  <a:tcPr marL="54864" marR="54864" marT="27432" marB="27432" anchor="ctr">
+                    <a:solidFill>
+                      <a:srgbClr val="F2F4F8"/>
+                    </a:solidFill>
+                  </a:tcPr>
+                </a:tc>
+                <a:tc>
+                  <a:txBody>
+                    <a:bodyPr/>
+                    <a:lstStyle/>
+                    <a:p>
+                      <a:pPr algn="r"/>
+                      <a:r>
+                        <a:rPr sz="1000" b="0">
+                          <a:solidFill>
+                            <a:srgbClr val="1F2A44"/>
+                          </a:solidFill>
+                          <a:latin typeface="Calibri"/>
+                        </a:rPr>
+                        <a:t>$751</a:t>
+                      </a:r>
+                    </a:p>
+                  </a:txBody>
+                  <a:tcPr marL="54864" marR="54864" marT="27432" marB="27432" anchor="ctr">
+                    <a:solidFill>
+                      <a:srgbClr val="F2F4F8"/>
+                    </a:solidFill>
+                  </a:tcPr>
+                </a:tc>
+                <a:tc>
+                  <a:txBody>
+                    <a:bodyPr/>
+                    <a:lstStyle/>
+                    <a:p>
+                      <a:pPr algn="r"/>
+                      <a:r>
+                        <a:rPr sz="1000" b="0">
+                          <a:solidFill>
+                            <a:srgbClr val="1F2A44"/>
+                          </a:solidFill>
+                          <a:latin typeface="Calibri"/>
+                        </a:rPr>
+                        <a:t>64%</a:t>
+                      </a:r>
+                    </a:p>
+                  </a:txBody>
+                  <a:tcPr marL="54864" marR="54864" marT="27432" marB="27432" anchor="ctr">
+                    <a:solidFill>
+                      <a:srgbClr val="F2F4F8"/>
+                    </a:solidFill>
+                  </a:tcPr>
+                </a:tc>
+                <a:tc>
+                  <a:txBody>
+                    <a:bodyPr/>
+                    <a:lstStyle/>
+                    <a:p>
+                      <a:pPr algn="r"/>
+                      <a:r>
+                        <a:rPr sz="1000" b="0">
+                          <a:solidFill>
+                            <a:srgbClr val="1F2A44"/>
+                          </a:solidFill>
+                          <a:latin typeface="Calibri"/>
+                        </a:rPr>
+                        <a:t>87%</a:t>
+                      </a:r>
+                    </a:p>
+                  </a:txBody>
+                  <a:tcPr marL="54864" marR="54864" marT="27432" marB="27432" anchor="ctr">
+                    <a:solidFill>
+                      <a:srgbClr val="F2F4F8"/>
+                    </a:solidFill>
+                  </a:tcPr>
+                </a:tc>
+                <a:tc>
+                  <a:txBody>
+                    <a:bodyPr/>
+                    <a:lstStyle/>
+                    <a:p>
+                      <a:pPr algn="r"/>
+                      <a:r>
+                        <a:rPr sz="1000" b="0">
+                          <a:solidFill>
+                            <a:srgbClr val="1F2A44"/>
+                          </a:solidFill>
+                          <a:latin typeface="Calibri"/>
+                        </a:rPr>
+                        <a:t>$719</a:t>
+                      </a:r>
+                    </a:p>
+                  </a:txBody>
+                  <a:tcPr marL="54864" marR="54864" marT="27432" marB="27432" anchor="ctr">
+                    <a:solidFill>
+                      <a:srgbClr val="F2F4F8"/>
+                    </a:solidFill>
+                  </a:tcPr>
+                </a:tc>
+                <a:tc>
+                  <a:txBody>
+                    <a:bodyPr/>
+                    <a:lstStyle/>
+                    <a:p>
+                      <a:pPr algn="r"/>
+                      <a:r>
+                        <a:rPr sz="1000" b="0">
+                          <a:solidFill>
+                            <a:srgbClr val="1F2A44"/>
+                          </a:solidFill>
+                          <a:latin typeface="Calibri"/>
+                        </a:rPr>
+                        <a:t>77%</a:t>
+                      </a:r>
+                    </a:p>
+                  </a:txBody>
+                  <a:tcPr marL="54864" marR="54864" marT="27432" marB="27432" anchor="ctr">
+                    <a:solidFill>
+                      <a:srgbClr val="F2F4F8"/>
+                    </a:solidFill>
+                  </a:tcPr>
+                </a:tc>
+              </a:tr>
+              <a:tr h="360680">
+                <a:tc>
+                  <a:txBody>
+                    <a:bodyPr/>
+                    <a:lstStyle/>
+                    <a:p>
+                      <a:r>
+                        <a:rPr sz="1000" b="0">
+                          <a:solidFill>
+                            <a:srgbClr val="1F2A44"/>
+                          </a:solidFill>
+                          <a:latin typeface="Calibri"/>
+                        </a:rPr>
+                        <a:t>Layer method, BNEF turnkey for the battery</a:t>
+                      </a:r>
+                    </a:p>
+                  </a:txBody>
+                  <a:tcPr marL="54864" marR="54864" marT="27432" marB="27432" anchor="ctr">
+                    <a:solidFill>
+                      <a:srgbClr val="FFFFFF"/>
+                    </a:solidFill>
+                  </a:tcPr>
+                </a:tc>
+                <a:tc>
+                  <a:txBody>
+                    <a:bodyPr/>
+                    <a:lstStyle/>
+                    <a:p>
+                      <a:r>
+                        <a:rPr sz="1000" b="0">
+                          <a:solidFill>
+                            <a:srgbClr val="1F2A44"/>
+                          </a:solidFill>
+                          <a:latin typeface="Calibri"/>
+                        </a:rPr>
+                        <a:t>sensitivity</a:t>
+                      </a:r>
+                    </a:p>
+                  </a:txBody>
+                  <a:tcPr marL="54864" marR="54864" marT="27432" marB="27432" anchor="ctr">
+                    <a:solidFill>
+                      <a:srgbClr val="FFFFFF"/>
+                    </a:solidFill>
+                  </a:tcPr>
+                </a:tc>
+                <a:tc>
+                  <a:txBody>
+                    <a:bodyPr/>
+                    <a:lstStyle/>
+                    <a:p>
+                      <a:pPr algn="r"/>
+                      <a:r>
+                        <a:rPr sz="1000" b="0">
+                          <a:solidFill>
+                            <a:srgbClr val="1F2A44"/>
+                          </a:solidFill>
+                          <a:latin typeface="Calibri"/>
+                        </a:rPr>
+                        <a:t>$715</a:t>
+                      </a:r>
+                    </a:p>
+                  </a:txBody>
+                  <a:tcPr marL="54864" marR="54864" marT="27432" marB="27432" anchor="ctr">
+                    <a:solidFill>
+                      <a:srgbClr val="FFFFFF"/>
+                    </a:solidFill>
+                  </a:tcPr>
+                </a:tc>
+                <a:tc>
+                  <a:txBody>
+                    <a:bodyPr/>
+                    <a:lstStyle/>
+                    <a:p>
+                      <a:pPr algn="r"/>
+                      <a:r>
+                        <a:rPr sz="1000" b="0">
+                          <a:solidFill>
+                            <a:srgbClr val="1F2A44"/>
+                          </a:solidFill>
+                          <a:latin typeface="Calibri"/>
+                        </a:rPr>
+                        <a:t>65%</a:t>
+                      </a:r>
+                    </a:p>
+                  </a:txBody>
+                  <a:tcPr marL="54864" marR="54864" marT="27432" marB="27432" anchor="ctr">
+                    <a:solidFill>
+                      <a:srgbClr val="FFFFFF"/>
+                    </a:solidFill>
+                  </a:tcPr>
+                </a:tc>
+                <a:tc>
+                  <a:txBody>
+                    <a:bodyPr/>
+                    <a:lstStyle/>
+                    <a:p>
+                      <a:pPr algn="r"/>
+                      <a:r>
+                        <a:rPr sz="1000" b="0">
                           <a:solidFill>
                             <a:srgbClr val="1F2A44"/>
                           </a:solidFill>
@@ -21902,6 +22761,76 @@
                   </a:txBody>
                   <a:tcPr marL="54864" marR="54864" marT="27432" marB="27432" anchor="ctr">
                     <a:solidFill>
+                      <a:srgbClr val="FFFFFF"/>
+                    </a:solidFill>
+                  </a:tcPr>
+                </a:tc>
+                <a:tc>
+                  <a:txBody>
+                    <a:bodyPr/>
+                    <a:lstStyle/>
+                    <a:p>
+                      <a:pPr algn="r"/>
+                      <a:r>
+                        <a:rPr sz="1000" b="0">
+                          <a:solidFill>
+                            <a:srgbClr val="1F2A44"/>
+                          </a:solidFill>
+                          <a:latin typeface="Calibri"/>
+                        </a:rPr>
+                        <a:t>$749</a:t>
+                      </a:r>
+                    </a:p>
+                  </a:txBody>
+                  <a:tcPr marL="54864" marR="54864" marT="27432" marB="27432" anchor="ctr">
+                    <a:solidFill>
+                      <a:srgbClr val="FFFFFF"/>
+                    </a:solidFill>
+                  </a:tcPr>
+                </a:tc>
+                <a:tc>
+                  <a:txBody>
+                    <a:bodyPr/>
+                    <a:lstStyle/>
+                    <a:p>
+                      <a:pPr algn="r"/>
+                      <a:r>
+                        <a:rPr sz="1000" b="0">
+                          <a:solidFill>
+                            <a:srgbClr val="1F2A44"/>
+                          </a:solidFill>
+                          <a:latin typeface="Calibri"/>
+                        </a:rPr>
+                        <a:t>90%</a:t>
+                      </a:r>
+                    </a:p>
+                  </a:txBody>
+                  <a:tcPr marL="54864" marR="54864" marT="27432" marB="27432" anchor="ctr">
+                    <a:solidFill>
+                      <a:srgbClr val="FFFFFF"/>
+                    </a:solidFill>
+                  </a:tcPr>
+                </a:tc>
+              </a:tr>
+              <a:tr h="360680">
+                <a:tc>
+                  <a:txBody>
+                    <a:bodyPr/>
+                    <a:lstStyle/>
+                    <a:p>
+                      <a:r>
+                        <a:rPr sz="1000" b="0">
+                          <a:solidFill>
+                            <a:srgbClr val="1F2A44"/>
+                          </a:solidFill>
+                          <a:latin typeface="Calibri"/>
+                        </a:rPr>
+                        <a:t>Earlier version: today's 40% share held fixed</a:t>
+                      </a:r>
+                    </a:p>
+                  </a:txBody>
+                  <a:tcPr marL="54864" marR="54864" marT="27432" marB="27432" anchor="ctr">
+                    <a:solidFill>
                       <a:srgbClr val="F2F4F8"/>
                     </a:solidFill>
                   </a:tcPr>
@@ -21911,15 +22840,37 @@
                     <a:bodyPr/>
                     <a:lstStyle/>
                     <a:p>
+                      <a:r>
+                        <a:rPr sz="1000" b="0">
+                          <a:solidFill>
+                            <a:srgbClr val="1F2A44"/>
+                          </a:solidFill>
+                          <a:latin typeface="Calibri"/>
+                        </a:rPr>
+                        <a:t>superseded 5 Oct 2026</a:t>
+                      </a:r>
+                    </a:p>
+                  </a:txBody>
+                  <a:tcPr marL="54864" marR="54864" marT="27432" marB="27432" anchor="ctr">
+                    <a:solidFill>
+                      <a:srgbClr val="F2F4F8"/>
+                    </a:solidFill>
+                  </a:tcPr>
+                </a:tc>
+                <a:tc>
+                  <a:txBody>
+                    <a:bodyPr/>
+                    <a:lstStyle/>
+                    <a:p>
                       <a:pPr algn="r"/>
                       <a:r>
-                        <a:rPr sz="1050" b="0">
-                          <a:solidFill>
-                            <a:srgbClr val="1F2A44"/>
-                          </a:solidFill>
-                          <a:latin typeface="Calibri"/>
-                        </a:rPr>
-                        <a:t>$610</a:t>
+                        <a:rPr sz="1000" b="0">
+                          <a:solidFill>
+                            <a:srgbClr val="1F2A44"/>
+                          </a:solidFill>
+                          <a:latin typeface="Calibri"/>
+                        </a:rPr>
+                        <a:t>$832</a:t>
                       </a:r>
                     </a:p>
                   </a:txBody>
@@ -21936,13 +22887,13 @@
                     <a:p>
                       <a:pPr algn="r"/>
                       <a:r>
-                        <a:rPr sz="1050" b="0">
-                          <a:solidFill>
-                            <a:srgbClr val="1F2A44"/>
-                          </a:solidFill>
-                          <a:latin typeface="Calibri"/>
-                        </a:rPr>
-                        <a:t>90%</a:t>
+                        <a:rPr sz="1000" b="0">
+                          <a:solidFill>
+                            <a:srgbClr val="1F2A44"/>
+                          </a:solidFill>
+                          <a:latin typeface="Calibri"/>
+                        </a:rPr>
+                        <a:t>51%</a:t>
                       </a:r>
                     </a:p>
                   </a:txBody>
@@ -21952,52 +22903,6 @@
                     </a:solidFill>
                   </a:tcPr>
                 </a:tc>
-              </a:tr>
-              <a:tr h="382905">
-                <a:tc>
-                  <a:txBody>
-                    <a:bodyPr/>
-                    <a:lstStyle/>
-                    <a:p>
-                      <a:r>
-                        <a:rPr sz="1050" b="0">
-                          <a:solidFill>
-                            <a:srgbClr val="1F2A44"/>
-                          </a:solidFill>
-                          <a:latin typeface="Calibri"/>
-                        </a:rPr>
-                        <a:t>Battery 40% + Handy-Whitman 60%</a:t>
-                      </a:r>
-                    </a:p>
-                  </a:txBody>
-                  <a:tcPr marL="54864" marR="54864" marT="27432" marB="27432" anchor="ctr">
-                    <a:solidFill>
-                      <a:srgbClr val="FFFFFF"/>
-                    </a:solidFill>
-                  </a:tcPr>
-                </a:tc>
-                <a:tc>
-                  <a:txBody>
-                    <a:bodyPr/>
-                    <a:lstStyle/>
-                    <a:p>
-                      <a:r>
-                        <a:rPr sz="1050" b="0">
-                          <a:solidFill>
-                            <a:srgbClr val="1F2A44"/>
-                          </a:solidFill>
-                          <a:latin typeface="Calibri"/>
-                        </a:rPr>
-                        <a:t>slides 12 to 16</a:t>
-                      </a:r>
-                    </a:p>
-                  </a:txBody>
-                  <a:tcPr marL="54864" marR="54864" marT="27432" marB="27432" anchor="ctr">
-                    <a:solidFill>
-                      <a:srgbClr val="FFFFFF"/>
-                    </a:solidFill>
-                  </a:tcPr>
-                </a:tc>
                 <a:tc>
                   <a:txBody>
                     <a:bodyPr/>
@@ -22005,19 +22910,19 @@
                     <a:p>
                       <a:pPr algn="r"/>
                       <a:r>
-                        <a:rPr sz="1050" b="0">
-                          <a:solidFill>
-                            <a:srgbClr val="1F2A44"/>
-                          </a:solidFill>
-                          <a:latin typeface="Calibri"/>
-                        </a:rPr>
-                        <a:t>$832</a:t>
-                      </a:r>
-                    </a:p>
-                  </a:txBody>
-                  <a:tcPr marL="54864" marR="54864" marT="27432" marB="27432" anchor="ctr">
-                    <a:solidFill>
-                      <a:srgbClr val="FFFFFF"/>
+                        <a:rPr sz="1000" b="0">
+                          <a:solidFill>
+                            <a:srgbClr val="1F2A44"/>
+                          </a:solidFill>
+                          <a:latin typeface="Calibri"/>
+                        </a:rPr>
+                        <a:t>80%</a:t>
+                      </a:r>
+                    </a:p>
+                  </a:txBody>
+                  <a:tcPr marL="54864" marR="54864" marT="27432" marB="27432" anchor="ctr">
+                    <a:solidFill>
+                      <a:srgbClr val="F2F4F8"/>
                     </a:solidFill>
                   </a:tcPr>
                 </a:tc>
@@ -22028,19 +22933,19 @@
                     <a:p>
                       <a:pPr algn="r"/>
                       <a:r>
-                        <a:rPr sz="1050" b="0">
-                          <a:solidFill>
-                            <a:srgbClr val="1F2A44"/>
-                          </a:solidFill>
-                          <a:latin typeface="Calibri"/>
-                        </a:rPr>
-                        <a:t>51%</a:t>
-                      </a:r>
-                    </a:p>
-                  </a:txBody>
-                  <a:tcPr marL="54864" marR="54864" marT="27432" marB="27432" anchor="ctr">
-                    <a:solidFill>
-                      <a:srgbClr val="FFFFFF"/>
+                        <a:rPr sz="1000" b="0">
+                          <a:solidFill>
+                            <a:srgbClr val="1F2A44"/>
+                          </a:solidFill>
+                          <a:latin typeface="Calibri"/>
+                        </a:rPr>
+                        <a:t>$1,079</a:t>
+                      </a:r>
+                    </a:p>
+                  </a:txBody>
+                  <a:tcPr marL="54864" marR="54864" marT="27432" marB="27432" anchor="ctr">
+                    <a:solidFill>
+                      <a:srgbClr val="F2F4F8"/>
                     </a:solidFill>
                   </a:tcPr>
                 </a:tc>
@@ -22051,709 +22956,19 @@
                     <a:p>
                       <a:pPr algn="r"/>
                       <a:r>
-                        <a:rPr sz="1050" b="0">
-                          <a:solidFill>
-                            <a:srgbClr val="1F2A44"/>
-                          </a:solidFill>
-                          <a:latin typeface="Calibri"/>
-                        </a:rPr>
-                        <a:t>85%</a:t>
-                      </a:r>
-                    </a:p>
-                  </a:txBody>
-                  <a:tcPr marL="54864" marR="54864" marT="27432" marB="27432" anchor="ctr">
-                    <a:solidFill>
-                      <a:srgbClr val="FFFFFF"/>
-                    </a:solidFill>
-                  </a:tcPr>
-                </a:tc>
-                <a:tc>
-                  <a:txBody>
-                    <a:bodyPr/>
-                    <a:lstStyle/>
-                    <a:p>
-                      <a:pPr algn="r"/>
-                      <a:r>
-                        <a:rPr sz="1050" b="0">
-                          <a:solidFill>
-                            <a:srgbClr val="1F2A44"/>
-                          </a:solidFill>
-                          <a:latin typeface="Calibri"/>
-                        </a:rPr>
-                        <a:t>$1,057</a:t>
-                      </a:r>
-                    </a:p>
-                  </a:txBody>
-                  <a:tcPr marL="54864" marR="54864" marT="27432" marB="27432" anchor="ctr">
-                    <a:solidFill>
-                      <a:srgbClr val="FFFFFF"/>
-                    </a:solidFill>
-                  </a:tcPr>
-                </a:tc>
-                <a:tc>
-                  <a:txBody>
-                    <a:bodyPr/>
-                    <a:lstStyle/>
-                    <a:p>
-                      <a:pPr algn="r"/>
-                      <a:r>
-                        <a:rPr sz="1050" b="0">
-                          <a:solidFill>
-                            <a:srgbClr val="1F2A44"/>
-                          </a:solidFill>
-                          <a:latin typeface="Calibri"/>
-                        </a:rPr>
-                        <a:t>74%</a:t>
-                      </a:r>
-                    </a:p>
-                  </a:txBody>
-                  <a:tcPr marL="54864" marR="54864" marT="27432" marB="27432" anchor="ctr">
-                    <a:solidFill>
-                      <a:srgbClr val="FFFFFF"/>
-                    </a:solidFill>
-                  </a:tcPr>
-                </a:tc>
-              </a:tr>
-              <a:tr h="382905">
-                <a:tc>
-                  <a:txBody>
-                    <a:bodyPr/>
-                    <a:lstStyle/>
-                    <a:p>
-                      <a:r>
-                        <a:rPr sz="1050" b="0">
-                          <a:solidFill>
-                            <a:srgbClr val="1F2A44"/>
-                          </a:solidFill>
-                          <a:latin typeface="Calibri"/>
-                        </a:rPr>
-                        <a:t>One index per layer, developer weights</a:t>
+                        <a:rPr sz="1000" b="0">
+                          <a:solidFill>
+                            <a:srgbClr val="1F2A44"/>
+                          </a:solidFill>
+                          <a:latin typeface="Calibri"/>
+                        </a:rPr>
+                        <a:t>65%</a:t>
                       </a:r>
                     </a:p>
                   </a:txBody>
                   <a:tcPr marL="54864" marR="54864" marT="27432" marB="27432" anchor="ctr">
                     <a:solidFill>
                       <a:srgbClr val="F2F4F8"/>
-                    </a:solidFill>
-                  </a:tcPr>
-                </a:tc>
-                <a:tc>
-                  <a:txBody>
-                    <a:bodyPr/>
-                    <a:lstStyle/>
-                    <a:p>
-                      <a:r>
-                        <a:rPr sz="1050" b="0">
-                          <a:solidFill>
-                            <a:srgbClr val="1F2A44"/>
-                          </a:solidFill>
-                          <a:latin typeface="Calibri"/>
-                        </a:rPr>
-                        <a:t>NREL/PNNL composition</a:t>
-                      </a:r>
-                    </a:p>
-                  </a:txBody>
-                  <a:tcPr marL="54864" marR="54864" marT="27432" marB="27432" anchor="ctr">
-                    <a:solidFill>
-                      <a:srgbClr val="F2F4F8"/>
-                    </a:solidFill>
-                  </a:tcPr>
-                </a:tc>
-                <a:tc>
-                  <a:txBody>
-                    <a:bodyPr/>
-                    <a:lstStyle/>
-                    <a:p>
-                      <a:pPr algn="r"/>
-                      <a:r>
-                        <a:rPr sz="1050" b="0">
-                          <a:solidFill>
-                            <a:srgbClr val="1F2A44"/>
-                          </a:solidFill>
-                          <a:latin typeface="Calibri"/>
-                        </a:rPr>
-                        <a:t>$832</a:t>
-                      </a:r>
-                    </a:p>
-                  </a:txBody>
-                  <a:tcPr marL="54864" marR="54864" marT="27432" marB="27432" anchor="ctr">
-                    <a:solidFill>
-                      <a:srgbClr val="F2F4F8"/>
-                    </a:solidFill>
-                  </a:tcPr>
-                </a:tc>
-                <a:tc>
-                  <a:txBody>
-                    <a:bodyPr/>
-                    <a:lstStyle/>
-                    <a:p>
-                      <a:pPr algn="r"/>
-                      <a:r>
-                        <a:rPr sz="1050" b="0">
-                          <a:solidFill>
-                            <a:srgbClr val="1F2A44"/>
-                          </a:solidFill>
-                          <a:latin typeface="Calibri"/>
-                        </a:rPr>
-                        <a:t>51%</a:t>
-                      </a:r>
-                    </a:p>
-                  </a:txBody>
-                  <a:tcPr marL="54864" marR="54864" marT="27432" marB="27432" anchor="ctr">
-                    <a:solidFill>
-                      <a:srgbClr val="F2F4F8"/>
-                    </a:solidFill>
-                  </a:tcPr>
-                </a:tc>
-                <a:tc>
-                  <a:txBody>
-                    <a:bodyPr/>
-                    <a:lstStyle/>
-                    <a:p>
-                      <a:pPr algn="r"/>
-                      <a:r>
-                        <a:rPr sz="1050" b="0">
-                          <a:solidFill>
-                            <a:srgbClr val="1F2A44"/>
-                          </a:solidFill>
-                          <a:latin typeface="Calibri"/>
-                        </a:rPr>
-                        <a:t>85%</a:t>
-                      </a:r>
-                    </a:p>
-                  </a:txBody>
-                  <a:tcPr marL="54864" marR="54864" marT="27432" marB="27432" anchor="ctr">
-                    <a:solidFill>
-                      <a:srgbClr val="F2F4F8"/>
-                    </a:solidFill>
-                  </a:tcPr>
-                </a:tc>
-                <a:tc>
-                  <a:txBody>
-                    <a:bodyPr/>
-                    <a:lstStyle/>
-                    <a:p>
-                      <a:pPr algn="r"/>
-                      <a:r>
-                        <a:rPr sz="1050" b="0">
-                          <a:solidFill>
-                            <a:srgbClr val="1F2A44"/>
-                          </a:solidFill>
-                          <a:latin typeface="Calibri"/>
-                        </a:rPr>
-                        <a:t>$994</a:t>
-                      </a:r>
-                    </a:p>
-                  </a:txBody>
-                  <a:tcPr marL="54864" marR="54864" marT="27432" marB="27432" anchor="ctr">
-                    <a:solidFill>
-                      <a:srgbClr val="F2F4F8"/>
-                    </a:solidFill>
-                  </a:tcPr>
-                </a:tc>
-                <a:tc>
-                  <a:txBody>
-                    <a:bodyPr/>
-                    <a:lstStyle/>
-                    <a:p>
-                      <a:pPr algn="r"/>
-                      <a:r>
-                        <a:rPr sz="1050" b="0">
-                          <a:solidFill>
-                            <a:srgbClr val="1F2A44"/>
-                          </a:solidFill>
-                          <a:latin typeface="Calibri"/>
-                        </a:rPr>
-                        <a:t>74%</a:t>
-                      </a:r>
-                    </a:p>
-                  </a:txBody>
-                  <a:tcPr marL="54864" marR="54864" marT="27432" marB="27432" anchor="ctr">
-                    <a:solidFill>
-                      <a:srgbClr val="F2F4F8"/>
-                    </a:solidFill>
-                  </a:tcPr>
-                </a:tc>
-              </a:tr>
-              <a:tr h="382905">
-                <a:tc>
-                  <a:txBody>
-                    <a:bodyPr/>
-                    <a:lstStyle/>
-                    <a:p>
-                      <a:r>
-                        <a:rPr sz="1050" b="0">
-                          <a:solidFill>
-                            <a:srgbClr val="1F2A44"/>
-                          </a:solidFill>
-                          <a:latin typeface="Calibri"/>
-                        </a:rPr>
-                        <a:t>One index per layer, Hyde Park weights</a:t>
-                      </a:r>
-                    </a:p>
-                  </a:txBody>
-                  <a:tcPr marL="54864" marR="54864" marT="27432" marB="27432" anchor="ctr">
-                    <a:solidFill>
-                      <a:srgbClr val="FFFFFF"/>
-                    </a:solidFill>
-                  </a:tcPr>
-                </a:tc>
-                <a:tc>
-                  <a:txBody>
-                    <a:bodyPr/>
-                    <a:lstStyle/>
-                    <a:p>
-                      <a:r>
-                        <a:rPr sz="1050" b="0">
-                          <a:solidFill>
-                            <a:srgbClr val="1F2A44"/>
-                          </a:solidFill>
-                          <a:latin typeface="Calibri"/>
-                        </a:rPr>
-                        <a:t>Rev 3 loaded layers</a:t>
-                      </a:r>
-                    </a:p>
-                  </a:txBody>
-                  <a:tcPr marL="54864" marR="54864" marT="27432" marB="27432" anchor="ctr">
-                    <a:solidFill>
-                      <a:srgbClr val="FFFFFF"/>
-                    </a:solidFill>
-                  </a:tcPr>
-                </a:tc>
-                <a:tc>
-                  <a:txBody>
-                    <a:bodyPr/>
-                    <a:lstStyle/>
-                    <a:p>
-                      <a:pPr algn="r"/>
-                      <a:r>
-                        <a:rPr sz="1050" b="0">
-                          <a:solidFill>
-                            <a:srgbClr val="1F2A44"/>
-                          </a:solidFill>
-                          <a:latin typeface="Calibri"/>
-                        </a:rPr>
-                        <a:t>$832</a:t>
-                      </a:r>
-                    </a:p>
-                  </a:txBody>
-                  <a:tcPr marL="54864" marR="54864" marT="27432" marB="27432" anchor="ctr">
-                    <a:solidFill>
-                      <a:srgbClr val="FFFFFF"/>
-                    </a:solidFill>
-                  </a:tcPr>
-                </a:tc>
-                <a:tc>
-                  <a:txBody>
-                    <a:bodyPr/>
-                    <a:lstStyle/>
-                    <a:p>
-                      <a:pPr algn="r"/>
-                      <a:r>
-                        <a:rPr sz="1050" b="0">
-                          <a:solidFill>
-                            <a:srgbClr val="1F2A44"/>
-                          </a:solidFill>
-                          <a:latin typeface="Calibri"/>
-                        </a:rPr>
-                        <a:t>51%</a:t>
-                      </a:r>
-                    </a:p>
-                  </a:txBody>
-                  <a:tcPr marL="54864" marR="54864" marT="27432" marB="27432" anchor="ctr">
-                    <a:solidFill>
-                      <a:srgbClr val="FFFFFF"/>
-                    </a:solidFill>
-                  </a:tcPr>
-                </a:tc>
-                <a:tc>
-                  <a:txBody>
-                    <a:bodyPr/>
-                    <a:lstStyle/>
-                    <a:p>
-                      <a:pPr algn="r"/>
-                      <a:r>
-                        <a:rPr sz="1050" b="0">
-                          <a:solidFill>
-                            <a:srgbClr val="1F2A44"/>
-                          </a:solidFill>
-                          <a:latin typeface="Calibri"/>
-                        </a:rPr>
-                        <a:t>85%</a:t>
-                      </a:r>
-                    </a:p>
-                  </a:txBody>
-                  <a:tcPr marL="54864" marR="54864" marT="27432" marB="27432" anchor="ctr">
-                    <a:solidFill>
-                      <a:srgbClr val="FFFFFF"/>
-                    </a:solidFill>
-                  </a:tcPr>
-                </a:tc>
-                <a:tc>
-                  <a:txBody>
-                    <a:bodyPr/>
-                    <a:lstStyle/>
-                    <a:p>
-                      <a:pPr algn="r"/>
-                      <a:r>
-                        <a:rPr sz="1050" b="0">
-                          <a:solidFill>
-                            <a:srgbClr val="1F2A44"/>
-                          </a:solidFill>
-                          <a:latin typeface="Calibri"/>
-                        </a:rPr>
-                        <a:t>$1,055</a:t>
-                      </a:r>
-                    </a:p>
-                  </a:txBody>
-                  <a:tcPr marL="54864" marR="54864" marT="27432" marB="27432" anchor="ctr">
-                    <a:solidFill>
-                      <a:srgbClr val="FFFFFF"/>
-                    </a:solidFill>
-                  </a:tcPr>
-                </a:tc>
-                <a:tc>
-                  <a:txBody>
-                    <a:bodyPr/>
-                    <a:lstStyle/>
-                    <a:p>
-                      <a:pPr algn="r"/>
-                      <a:r>
-                        <a:rPr sz="1050" b="0">
-                          <a:solidFill>
-                            <a:srgbClr val="1F2A44"/>
-                          </a:solidFill>
-                          <a:latin typeface="Calibri"/>
-                        </a:rPr>
-                        <a:t>74%</a:t>
-                      </a:r>
-                    </a:p>
-                  </a:txBody>
-                  <a:tcPr marL="54864" marR="54864" marT="27432" marB="27432" anchor="ctr">
-                    <a:solidFill>
-                      <a:srgbClr val="FFFFFF"/>
-                    </a:solidFill>
-                  </a:tcPr>
-                </a:tc>
-              </a:tr>
-              <a:tr h="382905">
-                <a:tc>
-                  <a:txBody>
-                    <a:bodyPr/>
-                    <a:lstStyle/>
-                    <a:p>
-                      <a:r>
-                        <a:rPr sz="1050" b="0">
-                          <a:solidFill>
-                            <a:srgbClr val="1F2A44"/>
-                          </a:solidFill>
-                          <a:latin typeface="Calibri"/>
-                        </a:rPr>
-                        <a:t>Layer method, BNEF pack for the battery</a:t>
-                      </a:r>
-                    </a:p>
-                  </a:txBody>
-                  <a:tcPr marL="54864" marR="54864" marT="27432" marB="27432" anchor="ctr">
-                    <a:solidFill>
-                      <a:srgbClr val="F2F4F8"/>
-                    </a:solidFill>
-                  </a:tcPr>
-                </a:tc>
-                <a:tc>
-                  <a:txBody>
-                    <a:bodyPr/>
-                    <a:lstStyle/>
-                    <a:p>
-                      <a:r>
-                        <a:rPr sz="1050" b="0">
-                          <a:solidFill>
-                            <a:srgbClr val="1F2A44"/>
-                          </a:solidFill>
-                          <a:latin typeface="Calibri"/>
-                        </a:rPr>
-                        <a:t>sensitivity</a:t>
-                      </a:r>
-                    </a:p>
-                  </a:txBody>
-                  <a:tcPr marL="54864" marR="54864" marT="27432" marB="27432" anchor="ctr">
-                    <a:solidFill>
-                      <a:srgbClr val="F2F4F8"/>
-                    </a:solidFill>
-                  </a:tcPr>
-                </a:tc>
-                <a:tc>
-                  <a:txBody>
-                    <a:bodyPr/>
-                    <a:lstStyle/>
-                    <a:p>
-                      <a:pPr algn="r"/>
-                      <a:r>
-                        <a:rPr sz="1050" b="0">
-                          <a:solidFill>
-                            <a:srgbClr val="1F2A44"/>
-                          </a:solidFill>
-                          <a:latin typeface="Calibri"/>
-                        </a:rPr>
-                        <a:t>$829</a:t>
-                      </a:r>
-                    </a:p>
-                  </a:txBody>
-                  <a:tcPr marL="54864" marR="54864" marT="27432" marB="27432" anchor="ctr">
-                    <a:solidFill>
-                      <a:srgbClr val="F2F4F8"/>
-                    </a:solidFill>
-                  </a:tcPr>
-                </a:tc>
-                <a:tc>
-                  <a:txBody>
-                    <a:bodyPr/>
-                    <a:lstStyle/>
-                    <a:p>
-                      <a:pPr algn="r"/>
-                      <a:r>
-                        <a:rPr sz="1050" b="0">
-                          <a:solidFill>
-                            <a:srgbClr val="1F2A44"/>
-                          </a:solidFill>
-                          <a:latin typeface="Calibri"/>
-                        </a:rPr>
-                        <a:t>55%</a:t>
-                      </a:r>
-                    </a:p>
-                  </a:txBody>
-                  <a:tcPr marL="54864" marR="54864" marT="27432" marB="27432" anchor="ctr">
-                    <a:solidFill>
-                      <a:srgbClr val="F2F4F8"/>
-                    </a:solidFill>
-                  </a:tcPr>
-                </a:tc>
-                <a:tc>
-                  <a:txBody>
-                    <a:bodyPr/>
-                    <a:lstStyle/>
-                    <a:p>
-                      <a:pPr algn="r"/>
-                      <a:r>
-                        <a:rPr sz="1050" b="0">
-                          <a:solidFill>
-                            <a:srgbClr val="1F2A44"/>
-                          </a:solidFill>
-                          <a:latin typeface="Calibri"/>
-                        </a:rPr>
-                        <a:t>87%</a:t>
-                      </a:r>
-                    </a:p>
-                  </a:txBody>
-                  <a:tcPr marL="54864" marR="54864" marT="27432" marB="27432" anchor="ctr">
-                    <a:solidFill>
-                      <a:srgbClr val="F2F4F8"/>
-                    </a:solidFill>
-                  </a:tcPr>
-                </a:tc>
-                <a:tc>
-                  <a:txBody>
-                    <a:bodyPr/>
-                    <a:lstStyle/>
-                    <a:p>
-                      <a:pPr algn="r"/>
-                      <a:r>
-                        <a:rPr sz="1050" b="0">
-                          <a:solidFill>
-                            <a:srgbClr val="1F2A44"/>
-                          </a:solidFill>
-                          <a:latin typeface="Calibri"/>
-                        </a:rPr>
-                        <a:t>$1,034</a:t>
-                      </a:r>
-                    </a:p>
-                  </a:txBody>
-                  <a:tcPr marL="54864" marR="54864" marT="27432" marB="27432" anchor="ctr">
-                    <a:solidFill>
-                      <a:srgbClr val="F2F4F8"/>
-                    </a:solidFill>
-                  </a:tcPr>
-                </a:tc>
-                <a:tc>
-                  <a:txBody>
-                    <a:bodyPr/>
-                    <a:lstStyle/>
-                    <a:p>
-                      <a:pPr algn="r"/>
-                      <a:r>
-                        <a:rPr sz="1050" b="0">
-                          <a:solidFill>
-                            <a:srgbClr val="1F2A44"/>
-                          </a:solidFill>
-                          <a:latin typeface="Calibri"/>
-                        </a:rPr>
-                        <a:t>77%</a:t>
-                      </a:r>
-                    </a:p>
-                  </a:txBody>
-                  <a:tcPr marL="54864" marR="54864" marT="27432" marB="27432" anchor="ctr">
-                    <a:solidFill>
-                      <a:srgbClr val="F2F4F8"/>
-                    </a:solidFill>
-                  </a:tcPr>
-                </a:tc>
-              </a:tr>
-              <a:tr h="382905">
-                <a:tc>
-                  <a:txBody>
-                    <a:bodyPr/>
-                    <a:lstStyle/>
-                    <a:p>
-                      <a:r>
-                        <a:rPr sz="1050" b="0">
-                          <a:solidFill>
-                            <a:srgbClr val="1F2A44"/>
-                          </a:solidFill>
-                          <a:latin typeface="Calibri"/>
-                        </a:rPr>
-                        <a:t>Layer method, BNEF turnkey for the battery</a:t>
-                      </a:r>
-                    </a:p>
-                  </a:txBody>
-                  <a:tcPr marL="54864" marR="54864" marT="27432" marB="27432" anchor="ctr">
-                    <a:solidFill>
-                      <a:srgbClr val="FFFFFF"/>
-                    </a:solidFill>
-                  </a:tcPr>
-                </a:tc>
-                <a:tc>
-                  <a:txBody>
-                    <a:bodyPr/>
-                    <a:lstStyle/>
-                    <a:p>
-                      <a:r>
-                        <a:rPr sz="1050" b="0">
-                          <a:solidFill>
-                            <a:srgbClr val="1F2A44"/>
-                          </a:solidFill>
-                          <a:latin typeface="Calibri"/>
-                        </a:rPr>
-                        <a:t>sensitivity</a:t>
-                      </a:r>
-                    </a:p>
-                  </a:txBody>
-                  <a:tcPr marL="54864" marR="54864" marT="27432" marB="27432" anchor="ctr">
-                    <a:solidFill>
-                      <a:srgbClr val="FFFFFF"/>
-                    </a:solidFill>
-                  </a:tcPr>
-                </a:tc>
-                <a:tc>
-                  <a:txBody>
-                    <a:bodyPr/>
-                    <a:lstStyle/>
-                    <a:p>
-                      <a:pPr algn="r"/>
-                      <a:r>
-                        <a:rPr sz="1050" b="0">
-                          <a:solidFill>
-                            <a:srgbClr val="1F2A44"/>
-                          </a:solidFill>
-                          <a:latin typeface="Calibri"/>
-                        </a:rPr>
-                        <a:t>$778</a:t>
-                      </a:r>
-                    </a:p>
-                  </a:txBody>
-                  <a:tcPr marL="54864" marR="54864" marT="27432" marB="27432" anchor="ctr">
-                    <a:solidFill>
-                      <a:srgbClr val="FFFFFF"/>
-                    </a:solidFill>
-                  </a:tcPr>
-                </a:tc>
-                <a:tc>
-                  <a:txBody>
-                    <a:bodyPr/>
-                    <a:lstStyle/>
-                    <a:p>
-                      <a:pPr algn="r"/>
-                      <a:r>
-                        <a:rPr sz="1050" b="0">
-                          <a:solidFill>
-                            <a:srgbClr val="1F2A44"/>
-                          </a:solidFill>
-                          <a:latin typeface="Calibri"/>
-                        </a:rPr>
-                        <a:t>60%</a:t>
-                      </a:r>
-                    </a:p>
-                  </a:txBody>
-                  <a:tcPr marL="54864" marR="54864" marT="27432" marB="27432" anchor="ctr">
-                    <a:solidFill>
-                      <a:srgbClr val="FFFFFF"/>
-                    </a:solidFill>
-                  </a:tcPr>
-                </a:tc>
-                <a:tc>
-                  <a:txBody>
-                    <a:bodyPr/>
-                    <a:lstStyle/>
-                    <a:p>
-                      <a:pPr algn="r"/>
-                      <a:r>
-                        <a:rPr sz="1050" b="0">
-                          <a:solidFill>
-                            <a:srgbClr val="1F2A44"/>
-                          </a:solidFill>
-                          <a:latin typeface="Calibri"/>
-                        </a:rPr>
-                        <a:t>89%</a:t>
-                      </a:r>
-                    </a:p>
-                  </a:txBody>
-                  <a:tcPr marL="54864" marR="54864" marT="27432" marB="27432" anchor="ctr">
-                    <a:solidFill>
-                      <a:srgbClr val="FFFFFF"/>
-                    </a:solidFill>
-                  </a:tcPr>
-                </a:tc>
-                <a:tc>
-                  <a:txBody>
-                    <a:bodyPr/>
-                    <a:lstStyle/>
-                    <a:p>
-                      <a:pPr algn="r"/>
-                      <a:r>
-                        <a:rPr sz="1050" b="0">
-                          <a:solidFill>
-                            <a:srgbClr val="1F2A44"/>
-                          </a:solidFill>
-                          <a:latin typeface="Calibri"/>
-                        </a:rPr>
-                        <a:t>$986</a:t>
-                      </a:r>
-                    </a:p>
-                  </a:txBody>
-                  <a:tcPr marL="54864" marR="54864" marT="27432" marB="27432" anchor="ctr">
-                    <a:solidFill>
-                      <a:srgbClr val="FFFFFF"/>
-                    </a:solidFill>
-                  </a:tcPr>
-                </a:tc>
-                <a:tc>
-                  <a:txBody>
-                    <a:bodyPr/>
-                    <a:lstStyle/>
-                    <a:p>
-                      <a:pPr algn="r"/>
-                      <a:r>
-                        <a:rPr sz="1050" b="0">
-                          <a:solidFill>
-                            <a:srgbClr val="1F2A44"/>
-                          </a:solidFill>
-                          <a:latin typeface="Calibri"/>
-                        </a:rPr>
-                        <a:t>81%</a:t>
-                      </a:r>
-                    </a:p>
-                  </a:txBody>
-                  <a:tcPr marL="54864" marR="54864" marT="27432" marB="27432" anchor="ctr">
-                    <a:solidFill>
-                      <a:srgbClr val="FFFFFF"/>
                     </a:solidFill>
                   </a:tcPr>
                 </a:tc>
@@ -22770,8 +22985,8 @@
         </p:nvSpPr>
         <p:spPr>
           <a:xfrm>
-            <a:off x="548640" y="4572000"/>
-            <a:ext cx="6675120" cy="1737360"/>
+            <a:off x="548640" y="4709160"/>
+            <a:ext cx="6675120" cy="1691640"/>
           </a:xfrm>
           <a:prstGeom prst="rect">
             <a:avLst/>
@@ -22814,7 +23029,7 @@
         </p:nvSpPr>
         <p:spPr>
           <a:xfrm>
-            <a:off x="685800" y="4617720"/>
+            <a:off x="685800" y="4727448"/>
             <a:ext cx="6400800" cy="274320"/>
           </a:xfrm>
           <a:prstGeom prst="rect">
@@ -22837,7 +23052,7 @@
               </a:spcAft>
             </a:pPr>
             <a:r>
-              <a:rPr sz="1200" b="1" i="0">
+              <a:rPr sz="1150" b="1" i="0">
                 <a:solidFill>
                   <a:srgbClr val="001E60"/>
                 </a:solidFill>
@@ -22856,7 +23071,7 @@
         </p:nvSpPr>
         <p:spPr>
           <a:xfrm>
-            <a:off x="685800" y="4892040"/>
+            <a:off x="685800" y="4956048"/>
             <a:ext cx="6400800" cy="1417320"/>
           </a:xfrm>
           <a:prstGeom prst="rect">
@@ -22875,11 +23090,11 @@
                 <a:spcPct val="105000"/>
               </a:lnSpc>
               <a:spcAft>
-                <a:spcPts val="300"/>
+                <a:spcPts val="200"/>
               </a:spcAft>
             </a:pPr>
             <a:r>
-              <a:rPr sz="1050">
+              <a:rPr sz="950">
                 <a:solidFill>
                   <a:srgbClr val="FFC72C"/>
                 </a:solidFill>
@@ -22888,7 +23103,7 @@
               <a:t>▪  </a:t>
             </a:r>
             <a:r>
-              <a:rPr b="1" sz="1050">
+              <a:rPr b="1" sz="950">
                 <a:solidFill>
                   <a:srgbClr val="1F2A44"/>
                 </a:solidFill>
@@ -22897,7 +23112,7 @@
               <a:t>1. Fix the dollar year and the scope boundary. </a:t>
             </a:r>
             <a:r>
-              <a:rPr sz="1050">
+              <a:rPr sz="950">
                 <a:solidFill>
                   <a:srgbClr val="1F2A44"/>
                 </a:solidFill>
@@ -22912,11 +23127,11 @@
                 <a:spcPct val="105000"/>
               </a:lnSpc>
               <a:spcAft>
-                <a:spcPts val="300"/>
+                <a:spcPts val="200"/>
               </a:spcAft>
             </a:pPr>
             <a:r>
-              <a:rPr sz="1050">
+              <a:rPr sz="950">
                 <a:solidFill>
                   <a:srgbClr val="FFC72C"/>
                 </a:solidFill>
@@ -22925,22 +23140,22 @@
               <a:t>▪  </a:t>
             </a:r>
             <a:r>
-              <a:rPr b="1" sz="1050">
+              <a:rPr b="1" sz="950">
                 <a:solidFill>
                   <a:srgbClr val="1F2A44"/>
                 </a:solidFill>
                 <a:latin typeface="Calibri"/>
               </a:rPr>
-              <a:t>2. Split the cost into battery and non-battery shares. </a:t>
-            </a:r>
-            <a:r>
-              <a:rPr sz="1050">
+              <a:t>2. Fix the battery share in today's prices, then back-cast it. </a:t>
+            </a:r>
+            <a:r>
+              <a:rPr sz="950">
                 <a:solidFill>
                   <a:srgbClr val="1F2A44"/>
                 </a:solidFill>
                 <a:latin typeface="Calibri"/>
               </a:rPr>
-              <a:t>From the scope, not a default: 40% for an all-in utility project, 55% or more for a turnkey quote.</a:t>
+              <a:t>40% for an all-in utility project, 55% for a developer site; the two indices tell you what that share was in the project's year (about three quarters in 2016).</a:t>
             </a:r>
           </a:p>
           <a:p>
@@ -22949,11 +23164,11 @@
                 <a:spcPct val="105000"/>
               </a:lnSpc>
               <a:spcAft>
-                <a:spcPts val="300"/>
+                <a:spcPts val="200"/>
               </a:spcAft>
             </a:pPr>
             <a:r>
-              <a:rPr sz="1050">
+              <a:rPr sz="950">
                 <a:solidFill>
                   <a:srgbClr val="FFC72C"/>
                 </a:solidFill>
@@ -22962,22 +23177,22 @@
               <a:t>▪  </a:t>
             </a:r>
             <a:r>
-              <a:rPr b="1" sz="1050">
+              <a:rPr b="1" sz="950">
                 <a:solidFill>
                   <a:srgbClr val="1F2A44"/>
                 </a:solidFill>
                 <a:latin typeface="Calibri"/>
               </a:rPr>
-              <a:t>3. Apply a battery index to the first share and a construction or layer index to the rest. </a:t>
-            </a:r>
-            <a:r>
-              <a:rPr sz="1050">
+              <a:t>3. Apply a battery index to the battery share and a construction or layer index to the rest, holding quantities fixed. </a:t>
+            </a:r>
+            <a:r>
+              <a:rPr sz="950">
                 <a:solidFill>
                   <a:srgbClr val="1F2A44"/>
                 </a:solidFill>
                 <a:latin typeface="Calibri"/>
               </a:rPr>
-              <a:t>Never one index to the whole cost.</a:t>
+              <a:t>Never one index to the whole cost, and never today's shares on yesterday's prices.</a:t>
             </a:r>
           </a:p>
         </p:txBody>
@@ -22990,8 +23205,8 @@
         </p:nvSpPr>
         <p:spPr>
           <a:xfrm>
-            <a:off x="7406640" y="4572000"/>
-            <a:ext cx="4297680" cy="1737360"/>
+            <a:off x="7406640" y="4709160"/>
+            <a:ext cx="4297680" cy="1691640"/>
           </a:xfrm>
           <a:prstGeom prst="rect">
             <a:avLst/>
@@ -23037,7 +23252,7 @@
                 </a:solidFill>
                 <a:latin typeface="Calibri"/>
               </a:rPr>
-              <a:t>$832 to $832 across the three defensible methods; $620 for the naive one.</a:t>
+              <a:t>$752 to $780 across the three defensible methods; $694 for the naive one.</a:t>
             </a:r>
           </a:p>
           <a:p>
@@ -23074,7 +23289,7 @@
                 </a:solidFill>
                 <a:latin typeface="Calibri"/>
               </a:rPr>
-              <a:t>installed 51% to 51% percentile, station 85% to 85%, under every defensible method.</a:t>
+              <a:t>installed 60% to 62% percentile, station 82% to 82%, under every defensible method.</a:t>
             </a:r>
           </a:p>
         </p:txBody>
@@ -38208,7 +38423,7 @@
                 </a:solidFill>
                 <a:latin typeface="Calibri"/>
               </a:rPr>
-              <a:t>median $832 at the installed index, $843 to $832 across 30 to 50% battery share.</a:t>
+              <a:t>median $778 at the installed index, $830 to $744 across 30 to 50% anchor battery share (2024 basis, back-cast to each project's year).</a:t>
             </a:r>
           </a:p>
           <a:p>

--- a/Hyde Park BESS/6) Cost Analysis Deliverables/Hyde Park BESS - Cost Analysis Deck.pptx
+++ b/Hyde Park BESS/6) Cost Analysis Deliverables/Hyde Park BESS - Cost Analysis Deck.pptx
@@ -39,10 +39,13 @@
     <p:sldId id="287" r:id="rId39"/>
     <p:sldId id="288" r:id="rId40"/>
     <p:sldId id="289" r:id="rId41"/>
+    <p:sldId id="290" r:id="rId42"/>
     <p:sldId id="291" r:id="rId43"/>
     <p:sldId id="292" r:id="rId44"/>
+    <p:sldId id="294" r:id="rId46"/>
+    <p:sldId id="295" r:id="rId47"/>
+    <p:sldId id="296" r:id="rId48"/>
     <p:sldId id="293" r:id="rId45"/>
-    <p:sldId id="290" r:id="rId42"/>
   </p:sldIdLst>
   <p:sldSz cx="12191695" cy="6858000" type="screen4x3"/>
   <p:notesSz cx="6858000" cy="9144000"/>
@@ -7933,7 +7936,7 @@
           <a:lstStyle/>
           <a:p>
             <a:r>
-              <a:t>Three numbers. Vendor contract, approval level, share. Everything after this slide is proof. CORE PATH for a 25-minute slot: slides 1, 2, 3, 6, 4, 7, 8, 9, 10, 12, 20, 24, 27, 32, 34, 38. Everything else is reachable from the appendix.</a:t>
+              <a:t>Three numbers. Vendor contract, approval level, share. Everything after this slide is proof. CORE PATH for a 25-minute slot: slides 1, 2, 3, 6, 4, 7, 8, 9, 10, 12, 20, 24, 27, 32, 36, 37, 41. Everything else is reachable from the appendix.</a:t>
             </a:r>
           </a:p>
         </p:txBody>
@@ -9053,7 +9056,7 @@
           <a:lstStyle/>
           <a:p>
             <a:r>
-              <a:t>Ranked by the red team. The first two items are the ones that can move the number by more than the whole reserve; the rest are hygiene.</a:t>
+              <a:t>The ranking answers 'what should we be more aggressive on'. It is ordered by leverage on the outcome, not by the size of the line: the Haugland reconciliation and the siting schedule are not estimate lines, but they carry 72% of the variance between them, and no amount of value engineering on the station offsets a reconciliation that moves the construction base by $5M. Items 3 to 8 are the levers in order of expected value and controllability. Probabilities of realization per lever are in the model file and are judgments: A1 0.8, A2 0.7, B5 0.9, B4 0.6, B1 0.5, C3 0.5, A5 0.5, B3 0.4, B8 0.4, B2 0.35, A4 0.3.</a:t>
             </a:r>
           </a:p>
         </p:txBody>
@@ -9079,6 +9082,216 @@
 </file>
 
 <file path=ppt/notesSlides/notesSlide35.xml><?xml version="1.0" encoding="utf-8"?>
+<p:notes xmlns:a="http://schemas.openxmlformats.org/drawingml/2006/main" xmlns:p="http://schemas.openxmlformats.org/presentationml/2006/main" xmlns:r="http://schemas.openxmlformats.org/officeDocument/2006/relationships">
+  <p:cSld>
+    <p:spTree>
+      <p:nvGrpSpPr>
+        <p:cNvPr id="1" name=""/>
+        <p:cNvGrpSpPr/>
+        <p:nvPr/>
+      </p:nvGrpSpPr>
+      <p:grpSpPr>
+        <a:xfrm>
+          <a:off x="0" y="0"/>
+          <a:ext cx="0" cy="0"/>
+          <a:chOff x="0" y="0"/>
+          <a:chExt cx="0" cy="0"/>
+        </a:xfrm>
+      </p:grpSpPr>
+      <p:sp>
+        <p:nvSpPr>
+          <p:cNvPr id="2" name="Slide Image Placeholder 1"/>
+          <p:cNvSpPr>
+            <a:spLocks noGrp="1"/>
+          </p:cNvSpPr>
+          <p:nvPr>
+            <p:ph type="sldImg" idx="2"/>
+          </p:nvPr>
+        </p:nvSpPr>
+        <p:spPr/>
+      </p:sp>
+      <p:sp>
+        <p:nvSpPr>
+          <p:cNvPr id="3" name="Notes Placeholder 2"/>
+          <p:cNvSpPr>
+            <a:spLocks noGrp="1"/>
+          </p:cNvSpPr>
+          <p:nvPr>
+            <p:ph type="body" idx="3" sz="quarter"/>
+          </p:nvPr>
+        </p:nvSpPr>
+        <p:spPr/>
+        <p:txBody>
+          <a:bodyPr/>
+          <a:lstStyle/>
+          <a:p>
+            <a:r>
+              <a:t>Model: the approval level less its reserves ($49.6M) plus estimate-accuracy ranges by layer (PERT, as in the red-team Monte Carlo, loaded at 1.44), plus threats not in the estimate (Haugland reconciliation at 60% odds and +$2M to +$8M direct; sound mitigation, screening, police details, NFPA 855 changes, the GSU count, Nomad change orders, outage premiums), plus schedule cost (siting slip at 50% odds of 2 to 14 months, 8% EFSB path of 18 to 24 months, 30% odds of 2 to 6 months on long-lead equipment, construction variance; $0.30M to $0.45M per month), less the levers from the savings register at their assessed odds of realization. Compared to the $57.2M approval, which includes the $7.6M of reserves. Status quo pursues no lever; managed pursues all at assessed odds; ceiling realizes every lever at its mid value. The battery contract is fixed and not varied except through change orders.</a:t>
+            </a:r>
+          </a:p>
+        </p:txBody>
+      </p:sp>
+      <p:sp>
+        <p:nvSpPr>
+          <p:cNvPr id="4" name="Slide Number Placeholder 3"/>
+          <p:cNvSpPr>
+            <a:spLocks noGrp="1"/>
+          </p:cNvSpPr>
+          <p:nvPr>
+            <p:ph type="sldNum" idx="5" sz="quarter"/>
+          </p:nvPr>
+        </p:nvSpPr>
+        <p:spPr/>
+      </p:sp>
+    </p:spTree>
+  </p:cSld>
+  <p:clrMapOvr>
+    <a:masterClrMapping/>
+  </p:clrMapOvr>
+</p:notes>
+</file>
+
+<file path=ppt/notesSlides/notesSlide36.xml><?xml version="1.0" encoding="utf-8"?>
+<p:notes xmlns:a="http://schemas.openxmlformats.org/drawingml/2006/main" xmlns:p="http://schemas.openxmlformats.org/presentationml/2006/main" xmlns:r="http://schemas.openxmlformats.org/officeDocument/2006/relationships">
+  <p:cSld>
+    <p:spTree>
+      <p:nvGrpSpPr>
+        <p:cNvPr id="1" name=""/>
+        <p:cNvGrpSpPr/>
+        <p:nvPr/>
+      </p:nvGrpSpPr>
+      <p:grpSpPr>
+        <a:xfrm>
+          <a:off x="0" y="0"/>
+          <a:ext cx="0" cy="0"/>
+          <a:chOff x="0" y="0"/>
+          <a:chExt cx="0" cy="0"/>
+        </a:xfrm>
+      </p:grpSpPr>
+      <p:sp>
+        <p:nvSpPr>
+          <p:cNvPr id="2" name="Slide Image Placeholder 1"/>
+          <p:cNvSpPr>
+            <a:spLocks noGrp="1"/>
+          </p:cNvSpPr>
+          <p:nvPr>
+            <p:ph type="sldImg" idx="2"/>
+          </p:nvPr>
+        </p:nvSpPr>
+        <p:spPr/>
+      </p:sp>
+      <p:sp>
+        <p:nvSpPr>
+          <p:cNvPr id="3" name="Notes Placeholder 2"/>
+          <p:cNvSpPr>
+            <a:spLocks noGrp="1"/>
+          </p:cNvSpPr>
+          <p:nvPr>
+            <p:ph type="body" idx="3" sz="quarter"/>
+          </p:nvPr>
+        </p:nvSpPr>
+        <p:spPr/>
+        <p:txBody>
+          <a:bodyPr/>
+          <a:lstStyle/>
+          <a:p>
+            <a:r>
+              <a:t>Each bar is the P10 to P90 range of the driver's own contribution to the managed total, with the mean marked; opportunity bars are negative because they reduce the total and their P90 is zero when the lever is not realized. Accuracy bars are two-sided. Variance shares from Spearman rank correlation of each driver with the managed outcome. Chart file mc_scope_tornado.png; data in mc_scope_results.json.</a:t>
+            </a:r>
+          </a:p>
+        </p:txBody>
+      </p:sp>
+      <p:sp>
+        <p:nvSpPr>
+          <p:cNvPr id="4" name="Slide Number Placeholder 3"/>
+          <p:cNvSpPr>
+            <a:spLocks noGrp="1"/>
+          </p:cNvSpPr>
+          <p:nvPr>
+            <p:ph type="sldNum" idx="5" sz="quarter"/>
+          </p:nvPr>
+        </p:nvSpPr>
+        <p:spPr/>
+      </p:sp>
+    </p:spTree>
+  </p:cSld>
+  <p:clrMapOvr>
+    <a:masterClrMapping/>
+  </p:clrMapOvr>
+</p:notes>
+</file>
+
+<file path=ppt/notesSlides/notesSlide37.xml><?xml version="1.0" encoding="utf-8"?>
+<p:notes xmlns:a="http://schemas.openxmlformats.org/drawingml/2006/main" xmlns:p="http://schemas.openxmlformats.org/presentationml/2006/main" xmlns:r="http://schemas.openxmlformats.org/officeDocument/2006/relationships">
+  <p:cSld>
+    <p:spTree>
+      <p:nvGrpSpPr>
+        <p:cNvPr id="1" name=""/>
+        <p:cNvGrpSpPr/>
+        <p:nvPr/>
+      </p:nvGrpSpPr>
+      <p:grpSpPr>
+        <a:xfrm>
+          <a:off x="0" y="0"/>
+          <a:ext cx="0" cy="0"/>
+          <a:chOff x="0" y="0"/>
+          <a:chExt cx="0" cy="0"/>
+        </a:xfrm>
+      </p:grpSpPr>
+      <p:sp>
+        <p:nvSpPr>
+          <p:cNvPr id="2" name="Slide Image Placeholder 1"/>
+          <p:cNvSpPr>
+            <a:spLocks noGrp="1"/>
+          </p:cNvSpPr>
+          <p:nvPr>
+            <p:ph type="sldImg" idx="2"/>
+          </p:nvPr>
+        </p:nvSpPr>
+        <p:spPr/>
+      </p:sp>
+      <p:sp>
+        <p:nvSpPr>
+          <p:cNvPr id="3" name="Notes Placeholder 2"/>
+          <p:cNvSpPr>
+            <a:spLocks noGrp="1"/>
+          </p:cNvSpPr>
+          <p:nvPr>
+            <p:ph type="body" idx="3" sz="quarter"/>
+          </p:nvPr>
+        </p:nvSpPr>
+        <p:spPr/>
+        <p:txBody>
+          <a:bodyPr/>
+          <a:lstStyle/>
+          <a:p>
+            <a:r>
+              <a:t>Ranked by the red team. The first two items are the ones that can move the number by more than the whole reserve; the rest are hygiene.</a:t>
+            </a:r>
+          </a:p>
+        </p:txBody>
+      </p:sp>
+      <p:sp>
+        <p:nvSpPr>
+          <p:cNvPr id="4" name="Slide Number Placeholder 3"/>
+          <p:cNvSpPr>
+            <a:spLocks noGrp="1"/>
+          </p:cNvSpPr>
+          <p:nvPr>
+            <p:ph type="sldNum" idx="5" sz="quarter"/>
+          </p:nvPr>
+        </p:nvSpPr>
+        <p:spPr/>
+      </p:sp>
+    </p:spTree>
+  </p:cSld>
+  <p:clrMapOvr>
+    <a:masterClrMapping/>
+  </p:clrMapOvr>
+</p:notes>
+</file>
+
+<file path=ppt/notesSlides/notesSlide38.xml><?xml version="1.0" encoding="utf-8"?>
 <p:notes xmlns:a="http://schemas.openxmlformats.org/drawingml/2006/main" xmlns:p="http://schemas.openxmlformats.org/presentationml/2006/main" xmlns:r="http://schemas.openxmlformats.org/officeDocument/2006/relationships">
   <p:cSld>
     <p:spTree>
@@ -14493,7 +14706,7 @@
                 </a:solidFill>
                 <a:latin typeface="Calibri"/>
               </a:rPr>
-              <a:t>$1.13M sits on a price the contract fixes. Remove it or move it to the risk register with a stated rationale (open item, slide 34).</a:t>
+              <a:t>$1.13M sits on a price the contract fixes. Remove it or move it to the risk register with a stated rationale (open item, slide 37).</a:t>
             </a:r>
           </a:p>
           <a:p>
@@ -40915,7 +41128,7 @@
                 </a:solidFill>
                 <a:latin typeface="Calibri"/>
               </a:rPr>
-              <a:t>3 · CAN THE NUMBER BE DEFENDED   |   RECONCILIATIONS AND DECISIONS, RED-TEAM RANKED</a:t>
+              <a:t>3 · CAN THE NUMBER BE DEFENDED   |   RANKED BY WHAT THE SIMULATION SAYS MOVES THE NUMBER, AND WHO CONTROLS IT</a:t>
             </a:r>
           </a:p>
         </p:txBody>
@@ -40957,7 +41170,7 @@
                 </a:solidFill>
                 <a:latin typeface="Georgia"/>
               </a:rPr>
-              <a:t>What must close before this number goes to EPAC as full funding</a:t>
+              <a:t>Where to be aggressive: two things drive 72% of the variance, and neither is a line item</a:t>
             </a:r>
           </a:p>
         </p:txBody>
@@ -41056,7 +41269,7 @@
         </p:nvGraphicFramePr>
         <p:xfrm>
           <a:off x="548640" y="1325880"/>
-          <a:ext cx="11064240" cy="4480560"/>
+          <a:ext cx="11064240" cy="4572000"/>
         </p:xfrm>
         <a:graphic>
           <a:graphicData uri="http://schemas.openxmlformats.org/drawingml/2006/table">
@@ -41065,25 +41278,26 @@
                 <a:tableStyleId>{5C22544A-7EE6-4342-B048-85BDC9FD1C3A}</a:tableStyleId>
               </a:tblPr>
               <a:tblGrid>
-                <a:gridCol w="6035040"/>
-                <a:gridCol w="1188720"/>
-                <a:gridCol w="2286000"/>
-                <a:gridCol w="1554480"/>
+                <a:gridCol w="365760"/>
+                <a:gridCol w="2743200"/>
+                <a:gridCol w="5394960"/>
+                <a:gridCol w="1737360"/>
+                <a:gridCol w="822960"/>
               </a:tblGrid>
-              <a:tr h="407323">
-                <a:tc>
-                  <a:txBody>
-                    <a:bodyPr/>
-                    <a:lstStyle/>
-                    <a:p>
-                      <a:r>
-                        <a:rPr sz="1000" b="1">
+              <a:tr h="508000">
+                <a:tc>
+                  <a:txBody>
+                    <a:bodyPr/>
+                    <a:lstStyle/>
+                    <a:p>
+                      <a:r>
+                        <a:rPr sz="950" b="1">
                           <a:solidFill>
                             <a:srgbClr val="FFFFFF"/>
                           </a:solidFill>
                           <a:latin typeface="Calibri"/>
                         </a:rPr>
-                        <a:t>Item</a:t>
+                        <a:t>#</a:t>
                       </a:r>
                     </a:p>
                   </a:txBody>
@@ -41099,13 +41313,13 @@
                     <a:lstStyle/>
                     <a:p>
                       <a:r>
-                        <a:rPr sz="1000" b="1">
+                        <a:rPr sz="950" b="1">
                           <a:solidFill>
                             <a:srgbClr val="FFFFFF"/>
                           </a:solidFill>
                           <a:latin typeface="Calibri"/>
                         </a:rPr>
-                        <a:t>Type</a:t>
+                        <a:t>Be aggressive on</a:t>
                       </a:r>
                     </a:p>
                   </a:txBody>
@@ -41121,13 +41335,13 @@
                     <a:lstStyle/>
                     <a:p>
                       <a:r>
-                        <a:rPr sz="1000" b="1">
+                        <a:rPr sz="950" b="1">
                           <a:solidFill>
                             <a:srgbClr val="FFFFFF"/>
                           </a:solidFill>
                           <a:latin typeface="Calibri"/>
                         </a:rPr>
-                        <a:t>Dollars at stake</a:t>
+                        <a:t>Why, from the simulation</a:t>
                       </a:r>
                     </a:p>
                   </a:txBody>
@@ -41143,7 +41357,7 @@
                     <a:lstStyle/>
                     <a:p>
                       <a:r>
-                        <a:rPr sz="1000" b="1">
+                        <a:rPr sz="950" b="1">
                           <a:solidFill>
                             <a:srgbClr val="FFFFFF"/>
                           </a:solidFill>
@@ -41159,21 +41373,43 @@
                     </a:solidFill>
                   </a:tcPr>
                 </a:tc>
+                <a:tc>
+                  <a:txBody>
+                    <a:bodyPr/>
+                    <a:lstStyle/>
+                    <a:p>
+                      <a:r>
+                        <a:rPr sz="950" b="1">
+                          <a:solidFill>
+                            <a:srgbClr val="FFFFFF"/>
+                          </a:solidFill>
+                          <a:latin typeface="Calibri"/>
+                        </a:rPr>
+                        <a:t>By</a:t>
+                      </a:r>
+                    </a:p>
+                  </a:txBody>
+                  <a:tcPr marL="54864" marR="54864" marT="27432" marB="27432">
+                    <a:solidFill>
+                      <a:srgbClr val="001E60"/>
+                    </a:solidFill>
+                  </a:tcPr>
+                </a:tc>
               </a:tr>
-              <a:tr h="407323">
-                <a:tc>
-                  <a:txBody>
-                    <a:bodyPr/>
-                    <a:lstStyle/>
-                    <a:p>
-                      <a:r>
-                        <a:rPr sz="1000" b="0">
-                          <a:solidFill>
-                            <a:srgbClr val="1F2A44"/>
-                          </a:solidFill>
-                          <a:latin typeface="Calibri"/>
-                        </a:rPr>
-                        <a:t>Reconcile Haugland Class 3 base ($19.2M, its scope) to Rev 3 layers B+D+E ($8.3M direct). Red team expects it to move the base up, not down.</a:t>
+              <a:tr h="508000">
+                <a:tc>
+                  <a:txBody>
+                    <a:bodyPr/>
+                    <a:lstStyle/>
+                    <a:p>
+                      <a:r>
+                        <a:rPr sz="950" b="0">
+                          <a:solidFill>
+                            <a:srgbClr val="1F2A44"/>
+                          </a:solidFill>
+                          <a:latin typeface="Calibri"/>
+                        </a:rPr>
+                        <a:t>1</a:t>
                       </a:r>
                     </a:p>
                   </a:txBody>
@@ -41189,13 +41425,13 @@
                     <a:lstStyle/>
                     <a:p>
                       <a:r>
-                        <a:rPr sz="1000" b="0">
-                          <a:solidFill>
-                            <a:srgbClr val="1F2A44"/>
-                          </a:solidFill>
-                          <a:latin typeface="Calibri"/>
-                        </a:rPr>
-                        <a:t>Scope boundary</a:t>
+                        <a:rPr sz="950" b="0">
+                          <a:solidFill>
+                            <a:srgbClr val="1F2A44"/>
+                          </a:solidFill>
+                          <a:latin typeface="Calibri"/>
+                        </a:rPr>
+                        <a:t>Close the Haugland reconciliation before the PAF</a:t>
                       </a:r>
                     </a:p>
                   </a:txBody>
@@ -41211,13 +41447,13 @@
                     <a:lstStyle/>
                     <a:p>
                       <a:r>
-                        <a:rPr sz="1000" b="0">
-                          <a:solidFill>
-                            <a:srgbClr val="1F2A44"/>
-                          </a:solidFill>
-                          <a:latin typeface="Calibri"/>
-                        </a:rPr>
-                        <a:t>+$4M to +$8M direct if half the gap is 21334 scope</a:t>
+                        <a:rPr sz="950" b="0">
+                          <a:solidFill>
+                            <a:srgbClr val="1F2A44"/>
+                          </a:solidFill>
+                          <a:latin typeface="Calibri"/>
+                        </a:rPr>
+                        <a:t>Threat T1: 58% of the variance in the outcome. A signed scope map turns a +$3M to +$12M loaded exposure into a known number; until then every reduction below is gross of it.</a:t>
                       </a:r>
                     </a:p>
                   </a:txBody>
@@ -41233,13 +41469,13 @@
                     <a:lstStyle/>
                     <a:p>
                       <a:r>
-                        <a:rPr sz="1000" b="0">
-                          <a:solidFill>
-                            <a:srgbClr val="1F2A44"/>
-                          </a:solidFill>
-                          <a:latin typeface="Calibri"/>
-                        </a:rPr>
-                        <a:t>Cost Estimating + PM + HEG</a:t>
+                        <a:rPr sz="950" b="0">
+                          <a:solidFill>
+                            <a:srgbClr val="1F2A44"/>
+                          </a:solidFill>
+                          <a:latin typeface="Calibri"/>
+                        </a:rPr>
+                        <a:t>PM + Cost Estimating + HEG</a:t>
                       </a:r>
                     </a:p>
                   </a:txBody>
@@ -41249,21 +41485,43 @@
                     </a:solidFill>
                   </a:tcPr>
                 </a:tc>
+                <a:tc>
+                  <a:txBody>
+                    <a:bodyPr/>
+                    <a:lstStyle/>
+                    <a:p>
+                      <a:r>
+                        <a:rPr sz="950" b="0">
+                          <a:solidFill>
+                            <a:srgbClr val="1F2A44"/>
+                          </a:solidFill>
+                          <a:latin typeface="Calibri"/>
+                        </a:rPr>
+                        <a:t>Nov 2026</a:t>
+                      </a:r>
+                    </a:p>
+                  </a:txBody>
+                  <a:tcPr marL="54864" marR="54864" marT="27432" marB="27432" anchor="ctr">
+                    <a:solidFill>
+                      <a:srgbClr val="FFFFFF"/>
+                    </a:solidFill>
+                  </a:tcPr>
+                </a:tc>
               </a:tr>
-              <a:tr h="407323">
-                <a:tc>
-                  <a:txBody>
-                    <a:bodyPr/>
-                    <a:lstStyle/>
-                    <a:p>
-                      <a:r>
-                        <a:rPr sz="1000" b="0">
-                          <a:solidFill>
-                            <a:srgbClr val="1F2A44"/>
-                          </a:solidFill>
-                          <a:latin typeface="Calibri"/>
-                        </a:rPr>
-                        <a:t>Siting chain has no float: ZBA determination Feb 2028, construction start Feb 2028, ISD Dec 2028; EFSB fallback 18-24 mo</a:t>
+              <a:tr h="508000">
+                <a:tc>
+                  <a:txBody>
+                    <a:bodyPr/>
+                    <a:lstStyle/>
+                    <a:p>
+                      <a:r>
+                        <a:rPr sz="950" b="0">
+                          <a:solidFill>
+                            <a:srgbClr val="1F2A44"/>
+                          </a:solidFill>
+                          <a:latin typeface="Calibri"/>
+                        </a:rPr>
+                        <a:t>2</a:t>
                       </a:r>
                     </a:p>
                   </a:txBody>
@@ -41279,13 +41537,13 @@
                     <a:lstStyle/>
                     <a:p>
                       <a:r>
-                        <a:rPr sz="1000" b="0">
-                          <a:solidFill>
-                            <a:srgbClr val="1F2A44"/>
-                          </a:solidFill>
-                          <a:latin typeface="Calibri"/>
-                        </a:rPr>
-                        <a:t>Schedule</a:t>
+                        <a:rPr sz="950" b="0">
+                          <a:solidFill>
+                            <a:srgbClr val="1F2A44"/>
+                          </a:solidFill>
+                          <a:latin typeface="Calibri"/>
+                        </a:rPr>
+                        <a:t>Buy siting float</a:t>
                       </a:r>
                     </a:p>
                   </a:txBody>
@@ -41301,13 +41559,13 @@
                     <a:lstStyle/>
                     <a:p>
                       <a:r>
-                        <a:rPr sz="1000" b="0">
-                          <a:solidFill>
-                            <a:srgbClr val="1F2A44"/>
-                          </a:solidFill>
-                          <a:latin typeface="Calibri"/>
-                        </a:rPr>
-                        <a:t>~$5M per 12 months (AFUDC, escalation, PM, indirects)</a:t>
+                        <a:rPr sz="950" b="0">
+                          <a:solidFill>
+                            <a:srgbClr val="1F2A44"/>
+                          </a:solidFill>
+                          <a:latin typeface="Calibri"/>
+                        </a:rPr>
+                        <a:t>Schedule: 14% of the variance; P50 +5 months, P80 +9 months, each month about $0.37M. File Article 80 early, set the ZBA hearing within 90 days, pre-brief the abutters on screening and sound.</a:t>
                       </a:r>
                     </a:p>
                   </a:txBody>
@@ -41323,7 +41581,7 @@
                     <a:lstStyle/>
                     <a:p>
                       <a:r>
-                        <a:rPr sz="1000" b="0">
+                        <a:rPr sz="950" b="0">
                           <a:solidFill>
                             <a:srgbClr val="1F2A44"/>
                           </a:solidFill>
@@ -41339,21 +41597,43 @@
                     </a:solidFill>
                   </a:tcPr>
                 </a:tc>
+                <a:tc>
+                  <a:txBody>
+                    <a:bodyPr/>
+                    <a:lstStyle/>
+                    <a:p>
+                      <a:r>
+                        <a:rPr sz="950" b="0">
+                          <a:solidFill>
+                            <a:srgbClr val="1F2A44"/>
+                          </a:solidFill>
+                          <a:latin typeface="Calibri"/>
+                        </a:rPr>
+                        <a:t>Q1 2027</a:t>
+                      </a:r>
+                    </a:p>
+                  </a:txBody>
+                  <a:tcPr marL="54864" marR="54864" marT="27432" marB="27432" anchor="ctr">
+                    <a:solidFill>
+                      <a:srgbClr val="F2F4F8"/>
+                    </a:solidFill>
+                  </a:tcPr>
+                </a:tc>
               </a:tr>
-              <a:tr h="407323">
-                <a:tc>
-                  <a:txBody>
-                    <a:bodyPr/>
-                    <a:lstStyle/>
-                    <a:p>
-                      <a:r>
-                        <a:rPr sz="1000" b="0">
-                          <a:solidFill>
-                            <a:srgbClr val="1F2A44"/>
-                          </a:solidFill>
-                          <a:latin typeface="Calibri"/>
-                        </a:rPr>
-                        <a:t>Present full funding at its real maturity: 30% engineering, no bid, placeholder platform = Class 4</a:t>
+              <a:tr h="508000">
+                <a:tc>
+                  <a:txBody>
+                    <a:bodyPr/>
+                    <a:lstStyle/>
+                    <a:p>
+                      <a:r>
+                        <a:rPr sz="950" b="0">
+                          <a:solidFill>
+                            <a:srgbClr val="1F2A44"/>
+                          </a:solidFill>
+                          <a:latin typeface="Calibri"/>
+                        </a:rPr>
+                        <a:t>3</a:t>
                       </a:r>
                     </a:p>
                   </a:txBody>
@@ -41369,13 +41649,13 @@
                     <a:lstStyle/>
                     <a:p>
                       <a:r>
-                        <a:rPr sz="1000" b="0">
-                          <a:solidFill>
-                            <a:srgbClr val="1F2A44"/>
-                          </a:solidFill>
-                          <a:latin typeface="Calibri"/>
-                        </a:rPr>
-                        <a:t>Classification</a:t>
+                        <a:rPr sz="950" b="0">
+                          <a:solidFill>
+                            <a:srgbClr val="1F2A44"/>
+                          </a:solidFill>
+                          <a:latin typeface="Calibri"/>
+                        </a:rPr>
+                        <a:t>Take the decision-only levers now</a:t>
                       </a:r>
                     </a:p>
                   </a:txBody>
@@ -41391,13 +41671,13 @@
                     <a:lstStyle/>
                     <a:p>
                       <a:r>
-                        <a:rPr sz="1000" b="0">
-                          <a:solidFill>
-                            <a:srgbClr val="1F2A44"/>
-                          </a:solidFill>
-                          <a:latin typeface="Calibri"/>
-                        </a:rPr>
-                        <a:t>Range is -25/+50% ($43M-$86M) until closed</a:t>
+                        <a:rPr sz="950" b="0">
+                          <a:solidFill>
+                            <a:srgbClr val="1F2A44"/>
+                          </a:solidFill>
+                          <a:latin typeface="Calibri"/>
+                        </a:rPr>
+                        <a:t>A1 escalation ($1.3M expected), A2 risk wording ($1.1M), B5 disconnect double count ($0.3M), C3 AFUDC timing ($0.3M): about $3M expected, no study needed.</a:t>
                       </a:r>
                     </a:p>
                   </a:txBody>
@@ -41413,13 +41693,13 @@
                     <a:lstStyle/>
                     <a:p>
                       <a:r>
-                        <a:rPr sz="1000" b="0">
-                          <a:solidFill>
-                            <a:srgbClr val="1F2A44"/>
-                          </a:solidFill>
-                          <a:latin typeface="Calibri"/>
-                        </a:rPr>
-                        <a:t>Cost Estimating</a:t>
+                        <a:rPr sz="950" b="0">
+                          <a:solidFill>
+                            <a:srgbClr val="1F2A44"/>
+                          </a:solidFill>
+                          <a:latin typeface="Calibri"/>
+                        </a:rPr>
+                        <a:t>Cost Estimating + Sourcing</a:t>
                       </a:r>
                     </a:p>
                   </a:txBody>
@@ -41429,21 +41709,43 @@
                     </a:solidFill>
                   </a:tcPr>
                 </a:tc>
+                <a:tc>
+                  <a:txBody>
+                    <a:bodyPr/>
+                    <a:lstStyle/>
+                    <a:p>
+                      <a:r>
+                        <a:rPr sz="950" b="0">
+                          <a:solidFill>
+                            <a:srgbClr val="1F2A44"/>
+                          </a:solidFill>
+                          <a:latin typeface="Calibri"/>
+                        </a:rPr>
+                        <a:t>Nov 2026</a:t>
+                      </a:r>
+                    </a:p>
+                  </a:txBody>
+                  <a:tcPr marL="54864" marR="54864" marT="27432" marB="27432" anchor="ctr">
+                    <a:solidFill>
+                      <a:srgbClr val="FFFFFF"/>
+                    </a:solidFill>
+                  </a:tcPr>
+                </a:tc>
               </a:tr>
-              <a:tr h="407323">
-                <a:tc>
-                  <a:txBody>
-                    <a:bodyPr/>
-                    <a:lstStyle/>
-                    <a:p>
-                      <a:r>
-                        <a:rPr sz="1000" b="0">
-                          <a:solidFill>
-                            <a:srgbClr val="1F2A44"/>
-                          </a:solidFill>
-                          <a:latin typeface="Calibri"/>
-                        </a:rPr>
-                        <a:t>Geotechnical investigation and NFPA 855 hazard mitigation analysis before civil freeze</a:t>
+              <a:tr h="508000">
+                <a:tc>
+                  <a:txBody>
+                    <a:bodyPr/>
+                    <a:lstStyle/>
+                    <a:p>
+                      <a:r>
+                        <a:rPr sz="950" b="0">
+                          <a:solidFill>
+                            <a:srgbClr val="1F2A44"/>
+                          </a:solidFill>
+                          <a:latin typeface="Calibri"/>
+                        </a:rPr>
+                        <a:t>4</a:t>
                       </a:r>
                     </a:p>
                   </a:txBody>
@@ -41459,13 +41761,13 @@
                     <a:lstStyle/>
                     <a:p>
                       <a:r>
-                        <a:rPr sz="1000" b="0">
-                          <a:solidFill>
-                            <a:srgbClr val="1F2A44"/>
-                          </a:solidFill>
-                          <a:latin typeface="Calibri"/>
-                        </a:rPr>
-                        <a:t>Study</a:t>
+                        <a:rPr sz="950" b="0">
+                          <a:solidFill>
+                            <a:srgbClr val="1F2A44"/>
+                          </a:solidFill>
+                          <a:latin typeface="Calibri"/>
+                        </a:rPr>
+                        <a:t>Benchmark Station 496 and price its outage windows</a:t>
                       </a:r>
                     </a:p>
                   </a:txBody>
@@ -41481,13 +41783,13 @@
                     <a:lstStyle/>
                     <a:p>
                       <a:r>
-                        <a:rPr sz="1000" b="0">
-                          <a:solidFill>
-                            <a:srgbClr val="1F2A44"/>
-                          </a:solidFill>
-                          <a:latin typeface="Calibri"/>
-                        </a:rPr>
-                        <a:t>$1.0M of deducts vs $0.6M-$3.5M exposure</a:t>
+                        <a:rPr sz="950" b="0">
+                          <a:solidFill>
+                            <a:srgbClr val="1F2A44"/>
+                          </a:solidFill>
+                          <a:latin typeface="Calibri"/>
+                        </a:rPr>
+                        <a:t>B1 ($0.7M expected) is the largest controllable estimate lever; accuracy on F is 6% of variance; T8 outage premiums are unpriced.</a:t>
                       </a:r>
                     </a:p>
                   </a:txBody>
@@ -41503,7 +41805,231 @@
                     <a:lstStyle/>
                     <a:p>
                       <a:r>
-                        <a:rPr sz="1000" b="0">
+                        <a:rPr sz="950" b="0">
+                          <a:solidFill>
+                            <a:srgbClr val="1F2A44"/>
+                          </a:solidFill>
+                          <a:latin typeface="Calibri"/>
+                        </a:rPr>
+                        <a:t>P&amp;C Engineering + EMA</a:t>
+                      </a:r>
+                    </a:p>
+                  </a:txBody>
+                  <a:tcPr marL="54864" marR="54864" marT="27432" marB="27432" anchor="ctr">
+                    <a:solidFill>
+                      <a:srgbClr val="F2F4F8"/>
+                    </a:solidFill>
+                  </a:tcPr>
+                </a:tc>
+                <a:tc>
+                  <a:txBody>
+                    <a:bodyPr/>
+                    <a:lstStyle/>
+                    <a:p>
+                      <a:r>
+                        <a:rPr sz="950" b="0">
+                          <a:solidFill>
+                            <a:srgbClr val="1F2A44"/>
+                          </a:solidFill>
+                          <a:latin typeface="Calibri"/>
+                        </a:rPr>
+                        <a:t>Q1 2027</a:t>
+                      </a:r>
+                    </a:p>
+                  </a:txBody>
+                  <a:tcPr marL="54864" marR="54864" marT="27432" marB="27432" anchor="ctr">
+                    <a:solidFill>
+                      <a:srgbClr val="F2F4F8"/>
+                    </a:solidFill>
+                  </a:tcPr>
+                </a:tc>
+              </a:tr>
+              <a:tr h="508000">
+                <a:tc>
+                  <a:txBody>
+                    <a:bodyPr/>
+                    <a:lstStyle/>
+                    <a:p>
+                      <a:r>
+                        <a:rPr sz="950" b="0">
+                          <a:solidFill>
+                            <a:srgbClr val="1F2A44"/>
+                          </a:solidFill>
+                          <a:latin typeface="Calibri"/>
+                        </a:rPr>
+                        <a:t>5</a:t>
+                      </a:r>
+                    </a:p>
+                  </a:txBody>
+                  <a:tcPr marL="54864" marR="54864" marT="27432" marB="27432" anchor="ctr">
+                    <a:solidFill>
+                      <a:srgbClr val="FFFFFF"/>
+                    </a:solidFill>
+                  </a:tcPr>
+                </a:tc>
+                <a:tc>
+                  <a:txBody>
+                    <a:bodyPr/>
+                    <a:lstStyle/>
+                    <a:p>
+                      <a:r>
+                        <a:rPr sz="950" b="0">
+                          <a:solidFill>
+                            <a:srgbClr val="1F2A44"/>
+                          </a:solidFill>
+                          <a:latin typeface="Calibri"/>
+                        </a:rPr>
+                        <a:t>Settle the topology and the GSU count in one study</a:t>
+                      </a:r>
+                    </a:p>
+                  </a:txBody>
+                  <a:tcPr marL="54864" marR="54864" marT="27432" marB="27432" anchor="ctr">
+                    <a:solidFill>
+                      <a:srgbClr val="FFFFFF"/>
+                    </a:solidFill>
+                  </a:tcPr>
+                </a:tc>
+                <a:tc>
+                  <a:txBody>
+                    <a:bodyPr/>
+                    <a:lstStyle/>
+                    <a:p>
+                      <a:r>
+                        <a:rPr sz="950" b="0">
+                          <a:solidFill>
+                            <a:srgbClr val="1F2A44"/>
+                          </a:solidFill>
+                          <a:latin typeface="Calibri"/>
+                        </a:rPr>
+                        <a:t>B2 ($0.6M expected) and T6 ($0.4M expected threat) are the same question asked twice. Hosting capacity for two 5 MW feeders decides both.</a:t>
+                      </a:r>
+                    </a:p>
+                  </a:txBody>
+                  <a:tcPr marL="54864" marR="54864" marT="27432" marB="27432" anchor="ctr">
+                    <a:solidFill>
+                      <a:srgbClr val="FFFFFF"/>
+                    </a:solidFill>
+                  </a:tcPr>
+                </a:tc>
+                <a:tc>
+                  <a:txBody>
+                    <a:bodyPr/>
+                    <a:lstStyle/>
+                    <a:p>
+                      <a:r>
+                        <a:rPr sz="950" b="0">
+                          <a:solidFill>
+                            <a:srgbClr val="1F2A44"/>
+                          </a:solidFill>
+                          <a:latin typeface="Calibri"/>
+                        </a:rPr>
+                        <a:t>System Planning + Substation Eng.</a:t>
+                      </a:r>
+                    </a:p>
+                  </a:txBody>
+                  <a:tcPr marL="54864" marR="54864" marT="27432" marB="27432" anchor="ctr">
+                    <a:solidFill>
+                      <a:srgbClr val="FFFFFF"/>
+                    </a:solidFill>
+                  </a:tcPr>
+                </a:tc>
+                <a:tc>
+                  <a:txBody>
+                    <a:bodyPr/>
+                    <a:lstStyle/>
+                    <a:p>
+                      <a:r>
+                        <a:rPr sz="950" b="0">
+                          <a:solidFill>
+                            <a:srgbClr val="1F2A44"/>
+                          </a:solidFill>
+                          <a:latin typeface="Calibri"/>
+                        </a:rPr>
+                        <a:t>Gate 1</a:t>
+                      </a:r>
+                    </a:p>
+                  </a:txBody>
+                  <a:tcPr marL="54864" marR="54864" marT="27432" marB="27432" anchor="ctr">
+                    <a:solidFill>
+                      <a:srgbClr val="FFFFFF"/>
+                    </a:solidFill>
+                  </a:tcPr>
+                </a:tc>
+              </a:tr>
+              <a:tr h="508000">
+                <a:tc>
+                  <a:txBody>
+                    <a:bodyPr/>
+                    <a:lstStyle/>
+                    <a:p>
+                      <a:r>
+                        <a:rPr sz="950" b="0">
+                          <a:solidFill>
+                            <a:srgbClr val="1F2A44"/>
+                          </a:solidFill>
+                          <a:latin typeface="Calibri"/>
+                        </a:rPr>
+                        <a:t>6</a:t>
+                      </a:r>
+                    </a:p>
+                  </a:txBody>
+                  <a:tcPr marL="54864" marR="54864" marT="27432" marB="27432" anchor="ctr">
+                    <a:solidFill>
+                      <a:srgbClr val="F2F4F8"/>
+                    </a:solidFill>
+                  </a:tcPr>
+                </a:tc>
+                <a:tc>
+                  <a:txBody>
+                    <a:bodyPr/>
+                    <a:lstStyle/>
+                    <a:p>
+                      <a:r>
+                        <a:rPr sz="950" b="0">
+                          <a:solidFill>
+                            <a:srgbClr val="1F2A44"/>
+                          </a:solidFill>
+                          <a:latin typeface="Calibri"/>
+                        </a:rPr>
+                        <a:t>Hold the civil layer open until geotech</a:t>
+                      </a:r>
+                    </a:p>
+                  </a:txBody>
+                  <a:tcPr marL="54864" marR="54864" marT="27432" marB="27432" anchor="ctr">
+                    <a:solidFill>
+                      <a:srgbClr val="F2F4F8"/>
+                    </a:solidFill>
+                  </a:tcPr>
+                </a:tc>
+                <a:tc>
+                  <a:txBody>
+                    <a:bodyPr/>
+                    <a:lstStyle/>
+                    <a:p>
+                      <a:r>
+                        <a:rPr sz="950" b="0">
+                          <a:solidFill>
+                            <a:srgbClr val="1F2A44"/>
+                          </a:solidFill>
+                          <a:latin typeface="Calibri"/>
+                        </a:rPr>
+                        <a:t>Accuracy on E is 6% of variance and asymmetric (0.6x to 2.6x). B3 is worth $0.3M expected; the downside is three times that.</a:t>
+                      </a:r>
+                    </a:p>
+                  </a:txBody>
+                  <a:tcPr marL="54864" marR="54864" marT="27432" marB="27432" anchor="ctr">
+                    <a:solidFill>
+                      <a:srgbClr val="F2F4F8"/>
+                    </a:solidFill>
+                  </a:tcPr>
+                </a:tc>
+                <a:tc>
+                  <a:txBody>
+                    <a:bodyPr/>
+                    <a:lstStyle/>
+                    <a:p>
+                      <a:r>
+                        <a:rPr sz="950" b="0">
                           <a:solidFill>
                             <a:srgbClr val="1F2A44"/>
                           </a:solidFill>
@@ -41519,21 +42045,43 @@
                     </a:solidFill>
                   </a:tcPr>
                 </a:tc>
+                <a:tc>
+                  <a:txBody>
+                    <a:bodyPr/>
+                    <a:lstStyle/>
+                    <a:p>
+                      <a:r>
+                        <a:rPr sz="950" b="0">
+                          <a:solidFill>
+                            <a:srgbClr val="1F2A44"/>
+                          </a:solidFill>
+                          <a:latin typeface="Calibri"/>
+                        </a:rPr>
+                        <a:t>Gate 1</a:t>
+                      </a:r>
+                    </a:p>
+                  </a:txBody>
+                  <a:tcPr marL="54864" marR="54864" marT="27432" marB="27432" anchor="ctr">
+                    <a:solidFill>
+                      <a:srgbClr val="F2F4F8"/>
+                    </a:solidFill>
+                  </a:tcPr>
+                </a:tc>
               </a:tr>
-              <a:tr h="407323">
-                <a:tc>
-                  <a:txBody>
-                    <a:bodyPr/>
-                    <a:lstStyle/>
-                    <a:p>
-                      <a:r>
-                        <a:rPr sz="1000" b="0">
-                          <a:solidFill>
-                            <a:srgbClr val="1F2A44"/>
-                          </a:solidFill>
-                          <a:latin typeface="Calibri"/>
-                        </a:rPr>
-                        <a:t>Confirm four written design-basis items (retaining wall, basin, duct bank, GSU count)</a:t>
+              <a:tr h="508000">
+                <a:tc>
+                  <a:txBody>
+                    <a:bodyPr/>
+                    <a:lstStyle/>
+                    <a:p>
+                      <a:r>
+                        <a:rPr sz="950" b="0">
+                          <a:solidFill>
+                            <a:srgbClr val="1F2A44"/>
+                          </a:solidFill>
+                          <a:latin typeface="Calibri"/>
+                        </a:rPr>
+                        <a:t>7</a:t>
                       </a:r>
                     </a:p>
                   </a:txBody>
@@ -41549,13 +42097,13 @@
                     <a:lstStyle/>
                     <a:p>
                       <a:r>
-                        <a:rPr sz="1000" b="0">
-                          <a:solidFill>
-                            <a:srgbClr val="1F2A44"/>
-                          </a:solidFill>
-                          <a:latin typeface="Calibri"/>
-                        </a:rPr>
-                        <a:t>Design confirmation</a:t>
+                        <a:rPr sz="950" b="0">
+                          <a:solidFill>
+                            <a:srgbClr val="1F2A44"/>
+                          </a:solidFill>
+                          <a:latin typeface="Calibri"/>
+                        </a:rPr>
+                        <a:t>Get the overhead-basis ruling</a:t>
                       </a:r>
                     </a:p>
                   </a:txBody>
@@ -41571,13 +42119,13 @@
                     <a:lstStyle/>
                     <a:p>
                       <a:r>
-                        <a:rPr sz="1000" b="0">
-                          <a:solidFill>
-                            <a:srgbClr val="1F2A44"/>
-                          </a:solidFill>
-                          <a:latin typeface="Calibri"/>
-                        </a:rPr>
-                        <a:t>$1.47M HEG deduct ceiling (~$0.8M net of GSUs already at 4)</a:t>
+                        <a:rPr sz="950" b="0">
+                          <a:solidFill>
+                            <a:srgbClr val="1F2A44"/>
+                          </a:solidFill>
+                          <a:latin typeface="Calibri"/>
+                        </a:rPr>
+                        <a:t>A4 ($0.5M expected at 30% odds, $2.1M if granted) is the single largest line nobody on the project can change.</a:t>
                       </a:r>
                     </a:p>
                   </a:txBody>
@@ -41593,13 +42141,13 @@
                     <a:lstStyle/>
                     <a:p>
                       <a:r>
-                        <a:rPr sz="1000" b="0">
-                          <a:solidFill>
-                            <a:srgbClr val="1F2A44"/>
-                          </a:solidFill>
-                          <a:latin typeface="Calibri"/>
-                        </a:rPr>
-                        <a:t>Substation Engineering</a:t>
+                        <a:rPr sz="950" b="0">
+                          <a:solidFill>
+                            <a:srgbClr val="1F2A44"/>
+                          </a:solidFill>
+                          <a:latin typeface="Calibri"/>
+                        </a:rPr>
+                        <a:t>Accounting</a:t>
                       </a:r>
                     </a:p>
                   </a:txBody>
@@ -41609,21 +42157,43 @@
                     </a:solidFill>
                   </a:tcPr>
                 </a:tc>
+                <a:tc>
+                  <a:txBody>
+                    <a:bodyPr/>
+                    <a:lstStyle/>
+                    <a:p>
+                      <a:r>
+                        <a:rPr sz="950" b="0">
+                          <a:solidFill>
+                            <a:srgbClr val="1F2A44"/>
+                          </a:solidFill>
+                          <a:latin typeface="Calibri"/>
+                        </a:rPr>
+                        <a:t>Nov 2026</a:t>
+                      </a:r>
+                    </a:p>
+                  </a:txBody>
+                  <a:tcPr marL="54864" marR="54864" marT="27432" marB="27432" anchor="ctr">
+                    <a:solidFill>
+                      <a:srgbClr val="FFFFFF"/>
+                    </a:solidFill>
+                  </a:tcPr>
+                </a:tc>
               </a:tr>
-              <a:tr h="407323">
-                <a:tc>
-                  <a:txBody>
-                    <a:bodyPr/>
-                    <a:lstStyle/>
-                    <a:p>
-                      <a:r>
-                        <a:rPr sz="1000" b="0">
-                          <a:solidFill>
-                            <a:srgbClr val="1F2A44"/>
-                          </a:solidFill>
-                          <a:latin typeface="Calibri"/>
-                        </a:rPr>
-                        <a:t>Escalation on the fixed-price battery balance; check Exhibit C for tariff / change-in-law pass-through</a:t>
+              <a:tr h="508000">
+                <a:tc>
+                  <a:txBody>
+                    <a:bodyPr/>
+                    <a:lstStyle/>
+                    <a:p>
+                      <a:r>
+                        <a:rPr sz="950" b="0">
+                          <a:solidFill>
+                            <a:srgbClr val="1F2A44"/>
+                          </a:solidFill>
+                          <a:latin typeface="Calibri"/>
+                        </a:rPr>
+                        <a:t>8</a:t>
                       </a:r>
                     </a:p>
                   </a:txBody>
@@ -41639,13 +42209,13 @@
                     <a:lstStyle/>
                     <a:p>
                       <a:r>
-                        <a:rPr sz="1000" b="0">
-                          <a:solidFill>
-                            <a:srgbClr val="1F2A44"/>
-                          </a:solidFill>
-                          <a:latin typeface="Calibri"/>
-                        </a:rPr>
-                        <a:t>Decision</a:t>
+                        <a:rPr sz="950" b="0">
+                          <a:solidFill>
+                            <a:srgbClr val="1F2A44"/>
+                          </a:solidFill>
+                          <a:latin typeface="Calibri"/>
+                        </a:rPr>
+                        <a:t>Price what is missing before someone else does</a:t>
                       </a:r>
                     </a:p>
                   </a:txBody>
@@ -41661,13 +42231,13 @@
                     <a:lstStyle/>
                     <a:p>
                       <a:r>
-                        <a:rPr sz="1000" b="0">
-                          <a:solidFill>
-                            <a:srgbClr val="1F2A44"/>
-                          </a:solidFill>
-                          <a:latin typeface="Calibri"/>
-                        </a:rPr>
-                        <a:t>$1.13M</a:t>
+                        <a:rPr sz="950" b="0">
+                          <a:solidFill>
+                            <a:srgbClr val="1F2A44"/>
+                          </a:solidFill>
+                          <a:latin typeface="Calibri"/>
+                        </a:rPr>
+                        <a:t>T2 to T5 (sound, screening, police details, NFPA 855) are $1.1M expected together; carrying them is cheaper than defending their absence.</a:t>
                       </a:r>
                     </a:p>
                   </a:txBody>
@@ -41683,13 +42253,13 @@
                     <a:lstStyle/>
                     <a:p>
                       <a:r>
-                        <a:rPr sz="1000" b="0">
-                          <a:solidFill>
-                            <a:srgbClr val="1F2A44"/>
-                          </a:solidFill>
-                          <a:latin typeface="Calibri"/>
-                        </a:rPr>
-                        <a:t>PM / Cost Estimating / Sourcing</a:t>
+                        <a:rPr sz="950" b="0">
+                          <a:solidFill>
+                            <a:srgbClr val="1F2A44"/>
+                          </a:solidFill>
+                          <a:latin typeface="Calibri"/>
+                        </a:rPr>
+                        <a:t>Siting + Civil</a:t>
                       </a:r>
                     </a:p>
                   </a:txBody>
@@ -41699,357 +42269,19 @@
                     </a:solidFill>
                   </a:tcPr>
                 </a:tc>
-              </a:tr>
-              <a:tr h="407323">
-                <a:tc>
-                  <a:txBody>
-                    <a:bodyPr/>
-                    <a:lstStyle/>
-                    <a:p>
-                      <a:r>
-                        <a:rPr sz="1000" b="0">
-                          <a:solidFill>
-                            <a:srgbClr val="1F2A44"/>
-                          </a:solidFill>
-                          <a:latin typeface="Calibri"/>
-                        </a:rPr>
-                        <a:t>Battery installation labor: replace 25%-of-16,801 mh with a crew build-up</a:t>
-                      </a:r>
-                    </a:p>
-                  </a:txBody>
-                  <a:tcPr marL="54864" marR="54864" marT="27432" marB="27432" anchor="ctr">
-                    <a:solidFill>
-                      <a:srgbClr val="FFFFFF"/>
-                    </a:solidFill>
-                  </a:tcPr>
-                </a:tc>
-                <a:tc>
-                  <a:txBody>
-                    <a:bodyPr/>
-                    <a:lstStyle/>
-                    <a:p>
-                      <a:r>
-                        <a:rPr sz="1000" b="0">
-                          <a:solidFill>
-                            <a:srgbClr val="1F2A44"/>
-                          </a:solidFill>
-                          <a:latin typeface="Calibri"/>
-                        </a:rPr>
-                        <a:t>Estimate</a:t>
-                      </a:r>
-                    </a:p>
-                  </a:txBody>
-                  <a:tcPr marL="54864" marR="54864" marT="27432" marB="27432" anchor="ctr">
-                    <a:solidFill>
-                      <a:srgbClr val="FFFFFF"/>
-                    </a:solidFill>
-                  </a:tcPr>
-                </a:tc>
-                <a:tc>
-                  <a:txBody>
-                    <a:bodyPr/>
-                    <a:lstStyle/>
-                    <a:p>
-                      <a:r>
-                        <a:rPr sz="1000" b="0">
-                          <a:solidFill>
-                            <a:srgbClr val="1F2A44"/>
-                          </a:solidFill>
-                          <a:latin typeface="Calibri"/>
-                        </a:rPr>
-                        <a:t>+/- $0.5M (Rev 2 used 50%)</a:t>
-                      </a:r>
-                    </a:p>
-                  </a:txBody>
-                  <a:tcPr marL="54864" marR="54864" marT="27432" marB="27432" anchor="ctr">
-                    <a:solidFill>
-                      <a:srgbClr val="FFFFFF"/>
-                    </a:solidFill>
-                  </a:tcPr>
-                </a:tc>
-                <a:tc>
-                  <a:txBody>
-                    <a:bodyPr/>
-                    <a:lstStyle/>
-                    <a:p>
-                      <a:r>
-                        <a:rPr sz="1000" b="0">
-                          <a:solidFill>
-                            <a:srgbClr val="1F2A44"/>
-                          </a:solidFill>
-                          <a:latin typeface="Calibri"/>
-                        </a:rPr>
-                        <a:t>Cost Estimating + Nomad + HEG</a:t>
-                      </a:r>
-                    </a:p>
-                  </a:txBody>
-                  <a:tcPr marL="54864" marR="54864" marT="27432" marB="27432" anchor="ctr">
-                    <a:solidFill>
-                      <a:srgbClr val="FFFFFF"/>
-                    </a:solidFill>
-                  </a:tcPr>
-                </a:tc>
-              </a:tr>
-              <a:tr h="407323">
-                <a:tc>
-                  <a:txBody>
-                    <a:bodyPr/>
-                    <a:lstStyle/>
-                    <a:p>
-                      <a:r>
-                        <a:rPr sz="1000" b="0">
-                          <a:solidFill>
-                            <a:srgbClr val="1F2A44"/>
-                          </a:solidFill>
-                          <a:latin typeface="Calibri"/>
-                        </a:rPr>
-                        <a:t>Station 496 at $363K per relay: compare to two recent EMA relay-replacement actuals; outage-window premium not priced</a:t>
-                      </a:r>
-                    </a:p>
-                  </a:txBody>
-                  <a:tcPr marL="54864" marR="54864" marT="27432" marB="27432" anchor="ctr">
-                    <a:solidFill>
-                      <a:srgbClr val="F2F4F8"/>
-                    </a:solidFill>
-                  </a:tcPr>
-                </a:tc>
-                <a:tc>
-                  <a:txBody>
-                    <a:bodyPr/>
-                    <a:lstStyle/>
-                    <a:p>
-                      <a:r>
-                        <a:rPr sz="1000" b="0">
-                          <a:solidFill>
-                            <a:srgbClr val="1F2A44"/>
-                          </a:solidFill>
-                          <a:latin typeface="Calibri"/>
-                        </a:rPr>
-                        <a:t>Benchmark</a:t>
-                      </a:r>
-                    </a:p>
-                  </a:txBody>
-                  <a:tcPr marL="54864" marR="54864" marT="27432" marB="27432" anchor="ctr">
-                    <a:solidFill>
-                      <a:srgbClr val="F2F4F8"/>
-                    </a:solidFill>
-                  </a:tcPr>
-                </a:tc>
-                <a:tc>
-                  <a:txBody>
-                    <a:bodyPr/>
-                    <a:lstStyle/>
-                    <a:p>
-                      <a:r>
-                        <a:rPr sz="1000" b="0">
-                          <a:solidFill>
-                            <a:srgbClr val="1F2A44"/>
-                          </a:solidFill>
-                          <a:latin typeface="Calibri"/>
-                        </a:rPr>
-                        <a:t>Unknown; $1.8M testing line</a:t>
-                      </a:r>
-                    </a:p>
-                  </a:txBody>
-                  <a:tcPr marL="54864" marR="54864" marT="27432" marB="27432" anchor="ctr">
-                    <a:solidFill>
-                      <a:srgbClr val="F2F4F8"/>
-                    </a:solidFill>
-                  </a:tcPr>
-                </a:tc>
-                <a:tc>
-                  <a:txBody>
-                    <a:bodyPr/>
-                    <a:lstStyle/>
-                    <a:p>
-                      <a:r>
-                        <a:rPr sz="1000" b="0">
-                          <a:solidFill>
-                            <a:srgbClr val="1F2A44"/>
-                          </a:solidFill>
-                          <a:latin typeface="Calibri"/>
-                        </a:rPr>
-                        <a:t>P&amp;C Engineering</a:t>
-                      </a:r>
-                    </a:p>
-                  </a:txBody>
-                  <a:tcPr marL="54864" marR="54864" marT="27432" marB="27432" anchor="ctr">
-                    <a:solidFill>
-                      <a:srgbClr val="F2F4F8"/>
-                    </a:solidFill>
-                  </a:tcPr>
-                </a:tc>
-              </a:tr>
-              <a:tr h="407323">
-                <a:tc>
-                  <a:txBody>
-                    <a:bodyPr/>
-                    <a:lstStyle/>
-                    <a:p>
-                      <a:r>
-                        <a:rPr sz="1000" b="0">
-                          <a:solidFill>
-                            <a:srgbClr val="1F2A44"/>
-                          </a:solidFill>
-                          <a:latin typeface="Calibri"/>
-                        </a:rPr>
-                        <a:t>Spot generation if the BESS misses Dec 2028 (SSF: 2-8 MW) was removed from scope; who carries it?</a:t>
-                      </a:r>
-                    </a:p>
-                  </a:txBody>
-                  <a:tcPr marL="54864" marR="54864" marT="27432" marB="27432" anchor="ctr">
-                    <a:solidFill>
-                      <a:srgbClr val="FFFFFF"/>
-                    </a:solidFill>
-                  </a:tcPr>
-                </a:tc>
-                <a:tc>
-                  <a:txBody>
-                    <a:bodyPr/>
-                    <a:lstStyle/>
-                    <a:p>
-                      <a:r>
-                        <a:rPr sz="1000" b="0">
-                          <a:solidFill>
-                            <a:srgbClr val="1F2A44"/>
-                          </a:solidFill>
-                          <a:latin typeface="Calibri"/>
-                        </a:rPr>
-                        <a:t>Scope / ownership</a:t>
-                      </a:r>
-                    </a:p>
-                  </a:txBody>
-                  <a:tcPr marL="54864" marR="54864" marT="27432" marB="27432" anchor="ctr">
-                    <a:solidFill>
-                      <a:srgbClr val="FFFFFF"/>
-                    </a:solidFill>
-                  </a:tcPr>
-                </a:tc>
-                <a:tc>
-                  <a:txBody>
-                    <a:bodyPr/>
-                    <a:lstStyle/>
-                    <a:p>
-                      <a:r>
-                        <a:rPr sz="1000" b="0">
-                          <a:solidFill>
-                            <a:srgbClr val="1F2A44"/>
-                          </a:solidFill>
-                          <a:latin typeface="Calibri"/>
-                        </a:rPr>
-                        <a:t>Not in project</a:t>
-                      </a:r>
-                    </a:p>
-                  </a:txBody>
-                  <a:tcPr marL="54864" marR="54864" marT="27432" marB="27432" anchor="ctr">
-                    <a:solidFill>
-                      <a:srgbClr val="FFFFFF"/>
-                    </a:solidFill>
-                  </a:tcPr>
-                </a:tc>
-                <a:tc>
-                  <a:txBody>
-                    <a:bodyPr/>
-                    <a:lstStyle/>
-                    <a:p>
-                      <a:r>
-                        <a:rPr sz="1000" b="0">
-                          <a:solidFill>
-                            <a:srgbClr val="1F2A44"/>
-                          </a:solidFill>
-                          <a:latin typeface="Calibri"/>
-                        </a:rPr>
-                        <a:t>System Planning</a:t>
-                      </a:r>
-                    </a:p>
-                  </a:txBody>
-                  <a:tcPr marL="54864" marR="54864" marT="27432" marB="27432" anchor="ctr">
-                    <a:solidFill>
-                      <a:srgbClr val="FFFFFF"/>
-                    </a:solidFill>
-                  </a:tcPr>
-                </a:tc>
-              </a:tr>
-              <a:tr h="407330">
-                <a:tc>
-                  <a:txBody>
-                    <a:bodyPr/>
-                    <a:lstStyle/>
-                    <a:p>
-                      <a:r>
-                        <a:rPr sz="1000" b="0">
-                          <a:solidFill>
-                            <a:srgbClr val="1F2A44"/>
-                          </a:solidFill>
-                          <a:latin typeface="Calibri"/>
-                        </a:rPr>
-                        <a:t>Re-base D-Line 24211 (2023 conceptual $4.8M; HEG take-off larger)</a:t>
-                      </a:r>
-                    </a:p>
-                  </a:txBody>
-                  <a:tcPr marL="54864" marR="54864" marT="27432" marB="27432" anchor="ctr">
-                    <a:solidFill>
-                      <a:srgbClr val="F2F4F8"/>
-                    </a:solidFill>
-                  </a:tcPr>
-                </a:tc>
-                <a:tc>
-                  <a:txBody>
-                    <a:bodyPr/>
-                    <a:lstStyle/>
-                    <a:p>
-                      <a:r>
-                        <a:rPr sz="1000" b="0">
-                          <a:solidFill>
-                            <a:srgbClr val="1F2A44"/>
-                          </a:solidFill>
-                          <a:latin typeface="Calibri"/>
-                        </a:rPr>
-                        <a:t>Estimate</a:t>
-                      </a:r>
-                    </a:p>
-                  </a:txBody>
-                  <a:tcPr marL="54864" marR="54864" marT="27432" marB="27432" anchor="ctr">
-                    <a:solidFill>
-                      <a:srgbClr val="F2F4F8"/>
-                    </a:solidFill>
-                  </a:tcPr>
-                </a:tc>
-                <a:tc>
-                  <a:txBody>
-                    <a:bodyPr/>
-                    <a:lstStyle/>
-                    <a:p>
-                      <a:r>
-                        <a:rPr sz="1000" b="0">
-                          <a:solidFill>
-                            <a:srgbClr val="1F2A44"/>
-                          </a:solidFill>
-                          <a:latin typeface="Calibri"/>
-                        </a:rPr>
-                        <a:t>Unknown</a:t>
-                      </a:r>
-                    </a:p>
-                  </a:txBody>
-                  <a:tcPr marL="54864" marR="54864" marT="27432" marB="27432" anchor="ctr">
-                    <a:solidFill>
-                      <a:srgbClr val="F2F4F8"/>
-                    </a:solidFill>
-                  </a:tcPr>
-                </a:tc>
-                <a:tc>
-                  <a:txBody>
-                    <a:bodyPr/>
-                    <a:lstStyle/>
-                    <a:p>
-                      <a:r>
-                        <a:rPr sz="1000" b="0">
-                          <a:solidFill>
-                            <a:srgbClr val="1F2A44"/>
-                          </a:solidFill>
-                          <a:latin typeface="Calibri"/>
-                        </a:rPr>
-                        <a:t>Distribution Engineering</a:t>
+                <a:tc>
+                  <a:txBody>
+                    <a:bodyPr/>
+                    <a:lstStyle/>
+                    <a:p>
+                      <a:r>
+                        <a:rPr sz="950" b="0">
+                          <a:solidFill>
+                            <a:srgbClr val="1F2A44"/>
+                          </a:solidFill>
+                          <a:latin typeface="Calibri"/>
+                        </a:rPr>
+                        <a:t>Nov 2026</a:t>
                       </a:r>
                     </a:p>
                   </a:txBody>
@@ -42072,8 +42304,8 @@
         </p:nvSpPr>
         <p:spPr>
           <a:xfrm>
-            <a:off x="548640" y="6053328"/>
-            <a:ext cx="11064240" cy="320040"/>
+            <a:off x="548640" y="5989320"/>
+            <a:ext cx="11064240" cy="365760"/>
           </a:xfrm>
           <a:prstGeom prst="rect">
             <a:avLst/>
@@ -42095,13 +42327,13 @@
               </a:spcAft>
             </a:pPr>
             <a:r>
-              <a:rPr sz="1100" b="0" i="0">
+              <a:rPr sz="900" b="0" i="0">
                 <a:solidFill>
                   <a:srgbClr val="6B7280"/>
                 </a:solidFill>
                 <a:latin typeface="Calibri"/>
               </a:rPr>
-              <a:t>Defensible reductions (~$3M: battery escalation, design-basis confirmations, material risk sized on non-battery material) are conditional on the Haugland reconciliation closing first.</a:t>
+              <a:t>Expected values are probability-weighted means from 20,000 trials (mc_scope_schedule.py); 'variance' is the Spearman contribution to the spread of the managed outcome. Reductions in the register total $10.0 to 14.6M loaded if every one lands; the simulation expects about $6.3M of it at the assessed odds.</a:t>
             </a:r>
           </a:p>
         </p:txBody>
@@ -42139,7 +42371,7 @@
             <a:avLst/>
           </a:prstGeom>
           <a:solidFill>
-            <a:srgbClr val="001E60"/>
+            <a:srgbClr val="FFFFFF"/>
           </a:solidFill>
           <a:ln>
             <a:noFill/>
@@ -42176,8 +42408,8 @@
         </p:nvSpPr>
         <p:spPr>
           <a:xfrm>
-            <a:off x="548640" y="320040"/>
-            <a:ext cx="9144000" cy="320040"/>
+            <a:off x="548640" y="256032"/>
+            <a:ext cx="11064240" cy="274320"/>
           </a:xfrm>
           <a:prstGeom prst="rect">
             <a:avLst/>
@@ -42199,13 +42431,13 @@
               </a:spcAft>
             </a:pPr>
             <a:r>
-              <a:rPr sz="1200" b="1" i="0">
-                <a:solidFill>
-                  <a:srgbClr val="FFC72C"/>
+              <a:rPr sz="1100" b="1" i="0">
+                <a:solidFill>
+                  <a:srgbClr val="6E1F2E"/>
                 </a:solidFill>
                 <a:latin typeface="Calibri"/>
               </a:rPr>
-              <a:t>CONTRIBUTIONS</a:t>
+              <a:t>3 · CAN THE NUMBER BE DEFENDED   |   20,000 TRIALS: LAYER ACCURACY, UNPRICED THREATS, LEVERS AT ASSESSED ODDS, SCHEDULE SLIP</a:t>
             </a:r>
           </a:p>
         </p:txBody>
@@ -42218,8 +42450,8 @@
         </p:nvSpPr>
         <p:spPr>
           <a:xfrm>
-            <a:off x="548640" y="640080"/>
-            <a:ext cx="11064240" cy="914400"/>
+            <a:off x="548640" y="475488"/>
+            <a:ext cx="11064240" cy="868680"/>
           </a:xfrm>
           <a:prstGeom prst="rect">
             <a:avLst/>
@@ -42234,20 +42466,20 @@
           <a:p>
             <a:pPr algn="l">
               <a:lnSpc>
-                <a:spcPct val="105000"/>
+                <a:spcPct val="100000"/>
               </a:lnSpc>
               <a:spcAft>
                 <a:spcPts val="400"/>
               </a:spcAft>
             </a:pPr>
             <a:r>
-              <a:rPr sz="3000" b="1" i="0">
-                <a:solidFill>
-                  <a:srgbClr val="FFFFFF"/>
+              <a:rPr sz="2300" b="1" i="0">
+                <a:solidFill>
+                  <a:srgbClr val="001E60"/>
                 </a:solidFill>
                 <a:latin typeface="Georgia"/>
               </a:rPr>
-              <a:t>A $12 million battery is a $57 million project, and now every dollar between them has a name</a:t>
+              <a:t>Monte Carlo on cost, scope and schedule: $61M if nothing is pursued, $54M if the levers are worked, $49M if every one lands</a:t>
             </a:r>
           </a:p>
         </p:txBody>
@@ -42255,426 +42487,6 @@
       <p:sp>
         <p:nvSpPr>
           <p:cNvPr id="5" name="TextBox 4"/>
-          <p:cNvSpPr txBox="1"/>
-          <p:nvPr/>
-        </p:nvSpPr>
-        <p:spPr>
-          <a:xfrm>
-            <a:off x="548640" y="1737360"/>
-            <a:ext cx="5577840" cy="4480560"/>
-          </a:xfrm>
-          <a:prstGeom prst="rect">
-            <a:avLst/>
-          </a:prstGeom>
-          <a:noFill/>
-        </p:spPr>
-        <p:txBody>
-          <a:bodyPr wrap="square" lIns="45720">
-            <a:spAutoFit/>
-          </a:bodyPr>
-          <a:lstStyle/>
-          <a:p>
-            <a:pPr>
-              <a:lnSpc>
-                <a:spcPct val="105000"/>
-              </a:lnSpc>
-              <a:spcAft>
-                <a:spcPts val="900"/>
-              </a:spcAft>
-            </a:pPr>
-            <a:r>
-              <a:rPr sz="1450">
-                <a:solidFill>
-                  <a:srgbClr val="FFC72C"/>
-                </a:solidFill>
-                <a:latin typeface="Calibri"/>
-              </a:rPr>
-              <a:t>▪  </a:t>
-            </a:r>
-            <a:r>
-              <a:rPr b="1" sz="1450">
-                <a:solidFill>
-                  <a:srgbClr val="FFFFFF"/>
-                </a:solidFill>
-                <a:latin typeface="Calibri"/>
-              </a:rPr>
-              <a:t>Where the money sits. </a:t>
-            </a:r>
-            <a:r>
-              <a:rPr sz="1450">
-                <a:solidFill>
-                  <a:srgbClr val="FFFFFF"/>
-                </a:solidFill>
-                <a:latin typeface="Calibri"/>
-              </a:rPr>
-              <a:t>292 lines in thirteen layers, reconciled to the penny: battery contract 21%, station and interconnection 32% loaded, owner scope 19%, loaders 41%.</a:t>
-            </a:r>
-          </a:p>
-          <a:p>
-            <a:pPr>
-              <a:lnSpc>
-                <a:spcPct val="105000"/>
-              </a:lnSpc>
-              <a:spcAft>
-                <a:spcPts val="900"/>
-              </a:spcAft>
-            </a:pPr>
-            <a:r>
-              <a:rPr sz="1450">
-                <a:solidFill>
-                  <a:srgbClr val="FFC72C"/>
-                </a:solidFill>
-                <a:latin typeface="Calibri"/>
-              </a:rPr>
-              <a:t>▪  </a:t>
-            </a:r>
-            <a:r>
-              <a:rPr b="1" sz="1450">
-                <a:solidFill>
-                  <a:srgbClr val="FFFFFF"/>
-                </a:solidFill>
-                <a:latin typeface="Calibri"/>
-              </a:rPr>
-              <a:t>Unit cost at every boundary. </a:t>
-            </a:r>
-            <a:r>
-              <a:rPr sz="1450">
-                <a:solidFill>
-                  <a:srgbClr val="FFFFFF"/>
-                </a:solidFill>
-                <a:latin typeface="Calibri"/>
-              </a:rPr>
-              <a:t>$605/kWh vendor, $833 installed, $1,483 station direct, $2,862 project. Each benchmark read against the row that shares its definition.</a:t>
-            </a:r>
-          </a:p>
-          <a:p>
-            <a:pPr>
-              <a:lnSpc>
-                <a:spcPct val="105000"/>
-              </a:lnSpc>
-              <a:spcAft>
-                <a:spcPts val="900"/>
-              </a:spcAft>
-            </a:pPr>
-            <a:r>
-              <a:rPr sz="1450">
-                <a:solidFill>
-                  <a:srgbClr val="FFC72C"/>
-                </a:solidFill>
-                <a:latin typeface="Calibri"/>
-              </a:rPr>
-              <a:t>▪  </a:t>
-            </a:r>
-            <a:r>
-              <a:rPr b="1" sz="1450">
-                <a:solidFill>
-                  <a:srgbClr val="FFFFFF"/>
-                </a:solidFill>
-                <a:latin typeface="Calibri"/>
-              </a:rPr>
-              <a:t>How it changed. </a:t>
-            </a:r>
-            <a:r>
-              <a:rPr sz="1450">
-                <a:solidFill>
-                  <a:srgbClr val="FFFFFF"/>
-                </a:solidFill>
-                <a:latin typeface="Calibri"/>
-              </a:rPr>
-              <a:t>The battery got cheaper; the project got real. $43.9M to $57.2M, five in-service dates, documented from the ESF revisions and the email record.</a:t>
-            </a:r>
-          </a:p>
-          <a:p>
-            <a:pPr>
-              <a:lnSpc>
-                <a:spcPct val="105000"/>
-              </a:lnSpc>
-              <a:spcAft>
-                <a:spcPts val="900"/>
-              </a:spcAft>
-            </a:pPr>
-            <a:r>
-              <a:rPr sz="1450">
-                <a:solidFill>
-                  <a:srgbClr val="FFC72C"/>
-                </a:solidFill>
-                <a:latin typeface="Calibri"/>
-              </a:rPr>
-              <a:t>▪  </a:t>
-            </a:r>
-            <a:r>
-              <a:rPr b="1" sz="1450">
-                <a:solidFill>
-                  <a:srgbClr val="FFFFFF"/>
-                </a:solidFill>
-                <a:latin typeface="Calibri"/>
-              </a:rPr>
-              <a:t>Can it be defended. </a:t>
-            </a:r>
-            <a:r>
-              <a:rPr sz="1450">
-                <a:solidFill>
-                  <a:srgbClr val="FFFFFF"/>
-                </a:solidFill>
-                <a:latin typeface="Calibri"/>
-              </a:rPr>
-              <a:t>Against 35 public projects at or below 100 MWh the station-direct cost is at the 77% percentile and the approval level above every member; a regression on 53 projects brackets a 2028 build at $571 to $1,640/kWh; six price curves re-base the class within a tenth of each other. Three kill shots, seven stress tests, a pre-mortem, ten reconciliations.</a:t>
-            </a:r>
-          </a:p>
-        </p:txBody>
-      </p:sp>
-      <p:sp>
-        <p:nvSpPr>
-          <p:cNvPr id="6" name="Rectangle 5"/>
-          <p:cNvSpPr/>
-          <p:nvPr/>
-        </p:nvSpPr>
-        <p:spPr>
-          <a:xfrm>
-            <a:off x="6400800" y="1737360"/>
-            <a:ext cx="5257800" cy="4480560"/>
-          </a:xfrm>
-          <a:prstGeom prst="rect">
-            <a:avLst/>
-          </a:prstGeom>
-          <a:solidFill>
-            <a:srgbClr val="0B2A72"/>
-          </a:solidFill>
-          <a:ln>
-            <a:noFill/>
-          </a:ln>
-          <a:effectLst/>
-        </p:spPr>
-        <p:style>
-          <a:lnRef idx="1">
-            <a:schemeClr val="accent1"/>
-          </a:lnRef>
-          <a:fillRef idx="3">
-            <a:schemeClr val="accent1"/>
-          </a:fillRef>
-          <a:effectRef idx="2">
-            <a:schemeClr val="accent1"/>
-          </a:effectRef>
-          <a:fontRef idx="minor">
-            <a:schemeClr val="lt1"/>
-          </a:fontRef>
-        </p:style>
-        <p:txBody>
-          <a:bodyPr rtlCol="0" anchor="ctr"/>
-          <a:lstStyle/>
-          <a:p>
-            <a:pPr algn="ctr"/>
-          </a:p>
-        </p:txBody>
-      </p:sp>
-      <p:sp>
-        <p:nvSpPr>
-          <p:cNvPr id="7" name="TextBox 6"/>
-          <p:cNvSpPr txBox="1"/>
-          <p:nvPr/>
-        </p:nvSpPr>
-        <p:spPr>
-          <a:xfrm>
-            <a:off x="6583680" y="1874519"/>
-            <a:ext cx="4937760" cy="365760"/>
-          </a:xfrm>
-          <a:prstGeom prst="rect">
-            <a:avLst/>
-          </a:prstGeom>
-          <a:noFill/>
-        </p:spPr>
-        <p:txBody>
-          <a:bodyPr wrap="square" lIns="45720" rIns="45720" tIns="27432" bIns="27432" anchor="t">
-            <a:spAutoFit/>
-          </a:bodyPr>
-          <a:lstStyle/>
-          <a:p>
-            <a:pPr algn="l">
-              <a:lnSpc>
-                <a:spcPct val="105000"/>
-              </a:lnSpc>
-              <a:spcAft>
-                <a:spcPts val="400"/>
-              </a:spcAft>
-            </a:pPr>
-            <a:r>
-              <a:rPr sz="1600" b="1" i="0">
-                <a:solidFill>
-                  <a:srgbClr val="FFC72C"/>
-                </a:solidFill>
-                <a:latin typeface="Georgia"/>
-              </a:rPr>
-              <a:t>Decisions requested</a:t>
-            </a:r>
-          </a:p>
-        </p:txBody>
-      </p:sp>
-      <p:sp>
-        <p:nvSpPr>
-          <p:cNvPr id="8" name="TextBox 7"/>
-          <p:cNvSpPr txBox="1"/>
-          <p:nvPr/>
-        </p:nvSpPr>
-        <p:spPr>
-          <a:xfrm>
-            <a:off x="6583680" y="2286000"/>
-            <a:ext cx="4937760" cy="3840480"/>
-          </a:xfrm>
-          <a:prstGeom prst="rect">
-            <a:avLst/>
-          </a:prstGeom>
-          <a:noFill/>
-        </p:spPr>
-        <p:txBody>
-          <a:bodyPr wrap="square" lIns="45720">
-            <a:spAutoFit/>
-          </a:bodyPr>
-          <a:lstStyle/>
-          <a:p>
-            <a:pPr>
-              <a:lnSpc>
-                <a:spcPct val="105000"/>
-              </a:lnSpc>
-              <a:spcAft>
-                <a:spcPts val="700"/>
-              </a:spcAft>
-            </a:pPr>
-            <a:r>
-              <a:rPr sz="1350">
-                <a:solidFill>
-                  <a:srgbClr val="FFC72C"/>
-                </a:solidFill>
-                <a:latin typeface="Calibri"/>
-              </a:rPr>
-              <a:t>▪  </a:t>
-            </a:r>
-            <a:r>
-              <a:rPr sz="1350">
-                <a:solidFill>
-                  <a:srgbClr val="FFFFFF"/>
-                </a:solidFill>
-                <a:latin typeface="Calibri"/>
-              </a:rPr>
-              <a:t>Adopt the layered view (battery, station, interconnection, owner scope, loaders) as the standard presentation of this project, internally and to regulators.</a:t>
-            </a:r>
-          </a:p>
-          <a:p>
-            <a:pPr>
-              <a:lnSpc>
-                <a:spcPct val="105000"/>
-              </a:lnSpc>
-              <a:spcAft>
-                <a:spcPts val="700"/>
-              </a:spcAft>
-            </a:pPr>
-            <a:r>
-              <a:rPr sz="1350">
-                <a:solidFill>
-                  <a:srgbClr val="FFC72C"/>
-                </a:solidFill>
-                <a:latin typeface="Calibri"/>
-              </a:rPr>
-              <a:t>▪  </a:t>
-            </a:r>
-            <a:r>
-              <a:rPr sz="1350">
-                <a:solidFill>
-                  <a:srgbClr val="FFFFFF"/>
-                </a:solidFill>
-                <a:latin typeface="Calibri"/>
-              </a:rPr>
-              <a:t>Make the Haugland-to-Rev 3 reconciliation, the geotech and the hazard mitigation analysis preconditions of the November PAF; present at Class 4 until they close.</a:t>
-            </a:r>
-          </a:p>
-          <a:p>
-            <a:pPr>
-              <a:lnSpc>
-                <a:spcPct val="105000"/>
-              </a:lnSpc>
-              <a:spcAft>
-                <a:spcPts val="700"/>
-              </a:spcAft>
-            </a:pPr>
-            <a:r>
-              <a:rPr sz="1350">
-                <a:solidFill>
-                  <a:srgbClr val="FFC72C"/>
-                </a:solidFill>
-                <a:latin typeface="Calibri"/>
-              </a:rPr>
-              <a:t>▪  </a:t>
-            </a:r>
-            <a:r>
-              <a:rPr sz="1350">
-                <a:solidFill>
-                  <a:srgbClr val="FFFFFF"/>
-                </a:solidFill>
-                <a:latin typeface="Calibri"/>
-              </a:rPr>
-              <a:t>Assign owners to the siting-chain float and the five early-warning indicators.</a:t>
-            </a:r>
-          </a:p>
-          <a:p>
-            <a:pPr>
-              <a:lnSpc>
-                <a:spcPct val="105000"/>
-              </a:lnSpc>
-              <a:spcAft>
-                <a:spcPts val="700"/>
-              </a:spcAft>
-            </a:pPr>
-            <a:r>
-              <a:rPr sz="1350">
-                <a:solidFill>
-                  <a:srgbClr val="FFC72C"/>
-                </a:solidFill>
-                <a:latin typeface="Calibri"/>
-              </a:rPr>
-              <a:t>▪  </a:t>
-            </a:r>
-            <a:r>
-              <a:rPr sz="1350">
-                <a:solidFill>
-                  <a:srgbClr val="FFFFFF"/>
-                </a:solidFill>
-                <a:latin typeface="Calibri"/>
-              </a:rPr>
-              <a:t>Open the Section 48E credit question with Tax now: eligible basis, the FEOC test on the Voyager cells, and the normalization election.</a:t>
-            </a:r>
-          </a:p>
-          <a:p>
-            <a:pPr>
-              <a:lnSpc>
-                <a:spcPct val="105000"/>
-              </a:lnSpc>
-              <a:spcAft>
-                <a:spcPts val="700"/>
-              </a:spcAft>
-            </a:pPr>
-            <a:r>
-              <a:rPr sz="1350">
-                <a:solidFill>
-                  <a:srgbClr val="FFC72C"/>
-                </a:solidFill>
-                <a:latin typeface="Calibri"/>
-              </a:rPr>
-              <a:t>▪  </a:t>
-            </a:r>
-            <a:r>
-              <a:rPr sz="1350">
-                <a:solidFill>
-                  <a:srgbClr val="FFFFFF"/>
-                </a:solidFill>
-                <a:latin typeface="Calibri"/>
-              </a:rPr>
-              <a:t>Adopt the containment plan: a $1,200 per kWh station-direct target at IFC, five gates with owners, competitive lump-sum pricing of the station and civil scope, and a monthly cost-containment report.</a:t>
-            </a:r>
-          </a:p>
-        </p:txBody>
-      </p:sp>
-      <p:sp>
-        <p:nvSpPr>
-          <p:cNvPr id="9" name="TextBox 8"/>
           <p:cNvSpPr txBox="1"/>
           <p:nvPr/>
         </p:nvSpPr>
@@ -42705,11 +42517,728 @@
             <a:r>
               <a:rPr sz="1000" b="0" i="0">
                 <a:solidFill>
-                  <a:srgbClr val="C9D1E0"/>
+                  <a:srgbClr val="6B7280"/>
                 </a:solidFill>
                 <a:latin typeface="Calibri"/>
               </a:rPr>
               <a:t>EstimatingCoE | Eversource Energy | Stewards of Affordability</a:t>
+            </a:r>
+          </a:p>
+        </p:txBody>
+      </p:sp>
+      <p:sp>
+        <p:nvSpPr>
+          <p:cNvPr id="6" name="TextBox 5"/>
+          <p:cNvSpPr txBox="1"/>
+          <p:nvPr/>
+        </p:nvSpPr>
+        <p:spPr>
+          <a:xfrm>
+            <a:off x="10972800" y="6419088"/>
+            <a:ext cx="685800" cy="274320"/>
+          </a:xfrm>
+          <a:prstGeom prst="rect">
+            <a:avLst/>
+          </a:prstGeom>
+          <a:noFill/>
+        </p:spPr>
+        <p:txBody>
+          <a:bodyPr wrap="square" lIns="45720" rIns="45720" tIns="27432" bIns="27432" anchor="t">
+            <a:spAutoFit/>
+          </a:bodyPr>
+          <a:lstStyle/>
+          <a:p>
+            <a:pPr algn="r">
+              <a:lnSpc>
+                <a:spcPct val="105000"/>
+              </a:lnSpc>
+              <a:spcAft>
+                <a:spcPts val="400"/>
+              </a:spcAft>
+            </a:pPr>
+            <a:r>
+              <a:rPr sz="1000" b="0" i="0">
+                <a:solidFill>
+                  <a:srgbClr val="6B7280"/>
+                </a:solidFill>
+                <a:latin typeface="Calibri"/>
+              </a:rPr>
+              <a:t>35</a:t>
+            </a:r>
+          </a:p>
+        </p:txBody>
+      </p:sp>
+      <p:pic>
+        <p:nvPicPr>
+          <p:cNvPr id="7" name="Picture 6" descr="mc_scope_hist.png"/>
+          <p:cNvPicPr>
+            <a:picLocks noChangeAspect="1"/>
+          </p:cNvPicPr>
+          <p:nvPr/>
+        </p:nvPicPr>
+        <p:blipFill>
+          <a:blip r:embed="rId2"/>
+          <a:stretch>
+            <a:fillRect/>
+          </a:stretch>
+        </p:blipFill>
+        <p:spPr>
+          <a:xfrm>
+            <a:off x="457200" y="1325880"/>
+            <a:ext cx="6309360" cy="3253264"/>
+          </a:xfrm>
+          <a:prstGeom prst="rect">
+            <a:avLst/>
+          </a:prstGeom>
+        </p:spPr>
+      </p:pic>
+      <p:pic>
+        <p:nvPicPr>
+          <p:cNvPr id="8" name="Picture 7" descr="mc_scope_sched.png"/>
+          <p:cNvPicPr>
+            <a:picLocks noChangeAspect="1"/>
+          </p:cNvPicPr>
+          <p:nvPr/>
+        </p:nvPicPr>
+        <p:blipFill>
+          <a:blip r:embed="rId3"/>
+          <a:stretch>
+            <a:fillRect/>
+          </a:stretch>
+        </p:blipFill>
+        <p:spPr>
+          <a:xfrm>
+            <a:off x="457200" y="4572000"/>
+            <a:ext cx="6309360" cy="1873091"/>
+          </a:xfrm>
+          <a:prstGeom prst="rect">
+            <a:avLst/>
+          </a:prstGeom>
+        </p:spPr>
+      </p:pic>
+      <p:graphicFrame>
+        <p:nvGraphicFramePr>
+          <p:cNvPr id="9" name="Table 8"/>
+          <p:cNvGraphicFramePr>
+            <a:graphicFrameLocks noGrp="1"/>
+          </p:cNvGraphicFramePr>
+          <p:nvPr/>
+        </p:nvGraphicFramePr>
+        <p:xfrm>
+          <a:off x="7040880" y="1371600"/>
+          <a:ext cx="4389120" cy="2514600"/>
+        </p:xfrm>
+        <a:graphic>
+          <a:graphicData uri="http://schemas.openxmlformats.org/drawingml/2006/table">
+            <a:tbl>
+              <a:tblPr firstRow="1" bandRow="1">
+                <a:tableStyleId>{5C22544A-7EE6-4342-B048-85BDC9FD1C3A}</a:tableStyleId>
+              </a:tblPr>
+              <a:tblGrid>
+                <a:gridCol w="1188720"/>
+                <a:gridCol w="914400"/>
+                <a:gridCol w="914400"/>
+                <a:gridCol w="1371600"/>
+              </a:tblGrid>
+              <a:tr h="502920">
+                <a:tc>
+                  <a:txBody>
+                    <a:bodyPr/>
+                    <a:lstStyle/>
+                    <a:p>
+                      <a:r>
+                        <a:rPr sz="1000" b="1">
+                          <a:solidFill>
+                            <a:srgbClr val="FFFFFF"/>
+                          </a:solidFill>
+                          <a:latin typeface="Calibri"/>
+                        </a:rPr>
+                        <a:t>Posture</a:t>
+                      </a:r>
+                    </a:p>
+                  </a:txBody>
+                  <a:tcPr marL="54864" marR="54864" marT="27432" marB="27432">
+                    <a:solidFill>
+                      <a:srgbClr val="001E60"/>
+                    </a:solidFill>
+                  </a:tcPr>
+                </a:tc>
+                <a:tc>
+                  <a:txBody>
+                    <a:bodyPr/>
+                    <a:lstStyle/>
+                    <a:p>
+                      <a:pPr algn="r"/>
+                      <a:r>
+                        <a:rPr sz="1000" b="1">
+                          <a:solidFill>
+                            <a:srgbClr val="FFFFFF"/>
+                          </a:solidFill>
+                          <a:latin typeface="Calibri"/>
+                        </a:rPr>
+                        <a:t>P50</a:t>
+                      </a:r>
+                    </a:p>
+                  </a:txBody>
+                  <a:tcPr marL="54864" marR="54864" marT="27432" marB="27432">
+                    <a:solidFill>
+                      <a:srgbClr val="001E60"/>
+                    </a:solidFill>
+                  </a:tcPr>
+                </a:tc>
+                <a:tc>
+                  <a:txBody>
+                    <a:bodyPr/>
+                    <a:lstStyle/>
+                    <a:p>
+                      <a:pPr algn="r"/>
+                      <a:r>
+                        <a:rPr sz="1000" b="1">
+                          <a:solidFill>
+                            <a:srgbClr val="FFFFFF"/>
+                          </a:solidFill>
+                          <a:latin typeface="Calibri"/>
+                        </a:rPr>
+                        <a:t>P80</a:t>
+                      </a:r>
+                    </a:p>
+                  </a:txBody>
+                  <a:tcPr marL="54864" marR="54864" marT="27432" marB="27432">
+                    <a:solidFill>
+                      <a:srgbClr val="001E60"/>
+                    </a:solidFill>
+                  </a:tcPr>
+                </a:tc>
+                <a:tc>
+                  <a:txBody>
+                    <a:bodyPr/>
+                    <a:lstStyle/>
+                    <a:p>
+                      <a:pPr algn="r"/>
+                      <a:r>
+                        <a:rPr sz="1000" b="1">
+                          <a:solidFill>
+                            <a:srgbClr val="FFFFFF"/>
+                          </a:solidFill>
+                          <a:latin typeface="Calibri"/>
+                        </a:rPr>
+                        <a:t>P(over $57.2M)</a:t>
+                      </a:r>
+                    </a:p>
+                  </a:txBody>
+                  <a:tcPr marL="54864" marR="54864" marT="27432" marB="27432">
+                    <a:solidFill>
+                      <a:srgbClr val="001E60"/>
+                    </a:solidFill>
+                  </a:tcPr>
+                </a:tc>
+              </a:tr>
+              <a:tr h="502920">
+                <a:tc>
+                  <a:txBody>
+                    <a:bodyPr/>
+                    <a:lstStyle/>
+                    <a:p>
+                      <a:r>
+                        <a:rPr sz="1000" b="0">
+                          <a:solidFill>
+                            <a:srgbClr val="1F2A44"/>
+                          </a:solidFill>
+                          <a:latin typeface="Calibri"/>
+                        </a:rPr>
+                        <a:t>Status quo</a:t>
+                      </a:r>
+                    </a:p>
+                  </a:txBody>
+                  <a:tcPr marL="54864" marR="54864" marT="27432" marB="27432" anchor="ctr">
+                    <a:solidFill>
+                      <a:srgbClr val="FFFFFF"/>
+                    </a:solidFill>
+                  </a:tcPr>
+                </a:tc>
+                <a:tc>
+                  <a:txBody>
+                    <a:bodyPr/>
+                    <a:lstStyle/>
+                    <a:p>
+                      <a:pPr algn="r"/>
+                      <a:r>
+                        <a:rPr sz="1000" b="0">
+                          <a:solidFill>
+                            <a:srgbClr val="1F2A44"/>
+                          </a:solidFill>
+                          <a:latin typeface="Calibri"/>
+                        </a:rPr>
+                        <a:t>$60.7M</a:t>
+                      </a:r>
+                    </a:p>
+                  </a:txBody>
+                  <a:tcPr marL="54864" marR="54864" marT="27432" marB="27432" anchor="ctr">
+                    <a:solidFill>
+                      <a:srgbClr val="FFFFFF"/>
+                    </a:solidFill>
+                  </a:tcPr>
+                </a:tc>
+                <a:tc>
+                  <a:txBody>
+                    <a:bodyPr/>
+                    <a:lstStyle/>
+                    <a:p>
+                      <a:pPr algn="r"/>
+                      <a:r>
+                        <a:rPr sz="1000" b="0">
+                          <a:solidFill>
+                            <a:srgbClr val="1F2A44"/>
+                          </a:solidFill>
+                          <a:latin typeface="Calibri"/>
+                        </a:rPr>
+                        <a:t>$64.7M</a:t>
+                      </a:r>
+                    </a:p>
+                  </a:txBody>
+                  <a:tcPr marL="54864" marR="54864" marT="27432" marB="27432" anchor="ctr">
+                    <a:solidFill>
+                      <a:srgbClr val="FFFFFF"/>
+                    </a:solidFill>
+                  </a:tcPr>
+                </a:tc>
+                <a:tc>
+                  <a:txBody>
+                    <a:bodyPr/>
+                    <a:lstStyle/>
+                    <a:p>
+                      <a:pPr algn="r"/>
+                      <a:r>
+                        <a:rPr sz="1000" b="0">
+                          <a:solidFill>
+                            <a:srgbClr val="1F2A44"/>
+                          </a:solidFill>
+                          <a:latin typeface="Calibri"/>
+                        </a:rPr>
+                        <a:t>71%</a:t>
+                      </a:r>
+                    </a:p>
+                  </a:txBody>
+                  <a:tcPr marL="54864" marR="54864" marT="27432" marB="27432" anchor="ctr">
+                    <a:solidFill>
+                      <a:srgbClr val="FFFFFF"/>
+                    </a:solidFill>
+                  </a:tcPr>
+                </a:tc>
+              </a:tr>
+              <a:tr h="502920">
+                <a:tc>
+                  <a:txBody>
+                    <a:bodyPr/>
+                    <a:lstStyle/>
+                    <a:p>
+                      <a:r>
+                        <a:rPr sz="1000" b="0">
+                          <a:solidFill>
+                            <a:srgbClr val="1F2A44"/>
+                          </a:solidFill>
+                          <a:latin typeface="Calibri"/>
+                        </a:rPr>
+                        <a:t>Managed</a:t>
+                      </a:r>
+                    </a:p>
+                  </a:txBody>
+                  <a:tcPr marL="54864" marR="54864" marT="27432" marB="27432" anchor="ctr">
+                    <a:solidFill>
+                      <a:srgbClr val="F2F4F8"/>
+                    </a:solidFill>
+                  </a:tcPr>
+                </a:tc>
+                <a:tc>
+                  <a:txBody>
+                    <a:bodyPr/>
+                    <a:lstStyle/>
+                    <a:p>
+                      <a:pPr algn="r"/>
+                      <a:r>
+                        <a:rPr sz="1000" b="0">
+                          <a:solidFill>
+                            <a:srgbClr val="1F2A44"/>
+                          </a:solidFill>
+                          <a:latin typeface="Calibri"/>
+                        </a:rPr>
+                        <a:t>$54.3M</a:t>
+                      </a:r>
+                    </a:p>
+                  </a:txBody>
+                  <a:tcPr marL="54864" marR="54864" marT="27432" marB="27432" anchor="ctr">
+                    <a:solidFill>
+                      <a:srgbClr val="F2F4F8"/>
+                    </a:solidFill>
+                  </a:tcPr>
+                </a:tc>
+                <a:tc>
+                  <a:txBody>
+                    <a:bodyPr/>
+                    <a:lstStyle/>
+                    <a:p>
+                      <a:pPr algn="r"/>
+                      <a:r>
+                        <a:rPr sz="1000" b="0">
+                          <a:solidFill>
+                            <a:srgbClr val="1F2A44"/>
+                          </a:solidFill>
+                          <a:latin typeface="Calibri"/>
+                        </a:rPr>
+                        <a:t>$58.6M</a:t>
+                      </a:r>
+                    </a:p>
+                  </a:txBody>
+                  <a:tcPr marL="54864" marR="54864" marT="27432" marB="27432" anchor="ctr">
+                    <a:solidFill>
+                      <a:srgbClr val="F2F4F8"/>
+                    </a:solidFill>
+                  </a:tcPr>
+                </a:tc>
+                <a:tc>
+                  <a:txBody>
+                    <a:bodyPr/>
+                    <a:lstStyle/>
+                    <a:p>
+                      <a:pPr algn="r"/>
+                      <a:r>
+                        <a:rPr sz="1000" b="0">
+                          <a:solidFill>
+                            <a:srgbClr val="1F2A44"/>
+                          </a:solidFill>
+                          <a:latin typeface="Calibri"/>
+                        </a:rPr>
+                        <a:t>29%</a:t>
+                      </a:r>
+                    </a:p>
+                  </a:txBody>
+                  <a:tcPr marL="54864" marR="54864" marT="27432" marB="27432" anchor="ctr">
+                    <a:solidFill>
+                      <a:srgbClr val="F2F4F8"/>
+                    </a:solidFill>
+                  </a:tcPr>
+                </a:tc>
+              </a:tr>
+              <a:tr h="502920">
+                <a:tc>
+                  <a:txBody>
+                    <a:bodyPr/>
+                    <a:lstStyle/>
+                    <a:p>
+                      <a:r>
+                        <a:rPr sz="1000" b="0">
+                          <a:solidFill>
+                            <a:srgbClr val="1F2A44"/>
+                          </a:solidFill>
+                          <a:latin typeface="Calibri"/>
+                        </a:rPr>
+                        <a:t>Ceiling</a:t>
+                      </a:r>
+                    </a:p>
+                  </a:txBody>
+                  <a:tcPr marL="54864" marR="54864" marT="27432" marB="27432" anchor="ctr">
+                    <a:solidFill>
+                      <a:srgbClr val="FFFFFF"/>
+                    </a:solidFill>
+                  </a:tcPr>
+                </a:tc>
+                <a:tc>
+                  <a:txBody>
+                    <a:bodyPr/>
+                    <a:lstStyle/>
+                    <a:p>
+                      <a:pPr algn="r"/>
+                      <a:r>
+                        <a:rPr sz="1000" b="0">
+                          <a:solidFill>
+                            <a:srgbClr val="1F2A44"/>
+                          </a:solidFill>
+                          <a:latin typeface="Calibri"/>
+                        </a:rPr>
+                        <a:t>$48.9M</a:t>
+                      </a:r>
+                    </a:p>
+                  </a:txBody>
+                  <a:tcPr marL="54864" marR="54864" marT="27432" marB="27432" anchor="ctr">
+                    <a:solidFill>
+                      <a:srgbClr val="FFFFFF"/>
+                    </a:solidFill>
+                  </a:tcPr>
+                </a:tc>
+                <a:tc>
+                  <a:txBody>
+                    <a:bodyPr/>
+                    <a:lstStyle/>
+                    <a:p>
+                      <a:pPr algn="r"/>
+                      <a:r>
+                        <a:rPr sz="1000" b="0">
+                          <a:solidFill>
+                            <a:srgbClr val="1F2A44"/>
+                          </a:solidFill>
+                          <a:latin typeface="Calibri"/>
+                        </a:rPr>
+                        <a:t>$52.9M</a:t>
+                      </a:r>
+                    </a:p>
+                  </a:txBody>
+                  <a:tcPr marL="54864" marR="54864" marT="27432" marB="27432" anchor="ctr">
+                    <a:solidFill>
+                      <a:srgbClr val="FFFFFF"/>
+                    </a:solidFill>
+                  </a:tcPr>
+                </a:tc>
+                <a:tc>
+                  <a:txBody>
+                    <a:bodyPr/>
+                    <a:lstStyle/>
+                    <a:p>
+                      <a:pPr algn="r"/>
+                      <a:r>
+                        <a:rPr sz="1000" b="0">
+                          <a:solidFill>
+                            <a:srgbClr val="1F2A44"/>
+                          </a:solidFill>
+                          <a:latin typeface="Calibri"/>
+                        </a:rPr>
+                        <a:t>4%</a:t>
+                      </a:r>
+                    </a:p>
+                  </a:txBody>
+                  <a:tcPr marL="54864" marR="54864" marT="27432" marB="27432" anchor="ctr">
+                    <a:solidFill>
+                      <a:srgbClr val="FFFFFF"/>
+                    </a:solidFill>
+                  </a:tcPr>
+                </a:tc>
+              </a:tr>
+              <a:tr h="502920">
+                <a:tc>
+                  <a:txBody>
+                    <a:bodyPr/>
+                    <a:lstStyle/>
+                    <a:p>
+                      <a:r>
+                        <a:rPr sz="1000" b="0">
+                          <a:solidFill>
+                            <a:srgbClr val="1F2A44"/>
+                          </a:solidFill>
+                          <a:latin typeface="Calibri"/>
+                        </a:rPr>
+                        <a:t>Schedule</a:t>
+                      </a:r>
+                    </a:p>
+                  </a:txBody>
+                  <a:tcPr marL="54864" marR="54864" marT="27432" marB="27432" anchor="ctr">
+                    <a:solidFill>
+                      <a:srgbClr val="F2F4F8"/>
+                    </a:solidFill>
+                  </a:tcPr>
+                </a:tc>
+                <a:tc>
+                  <a:txBody>
+                    <a:bodyPr/>
+                    <a:lstStyle/>
+                    <a:p>
+                      <a:pPr algn="r"/>
+                      <a:r>
+                        <a:rPr sz="1000" b="0">
+                          <a:solidFill>
+                            <a:srgbClr val="1F2A44"/>
+                          </a:solidFill>
+                          <a:latin typeface="Calibri"/>
+                        </a:rPr>
+                        <a:t>+5 mo</a:t>
+                      </a:r>
+                    </a:p>
+                  </a:txBody>
+                  <a:tcPr marL="54864" marR="54864" marT="27432" marB="27432" anchor="ctr">
+                    <a:solidFill>
+                      <a:srgbClr val="F2F4F8"/>
+                    </a:solidFill>
+                  </a:tcPr>
+                </a:tc>
+                <a:tc>
+                  <a:txBody>
+                    <a:bodyPr/>
+                    <a:lstStyle/>
+                    <a:p>
+                      <a:pPr algn="r"/>
+                      <a:r>
+                        <a:rPr sz="1000" b="0">
+                          <a:solidFill>
+                            <a:srgbClr val="1F2A44"/>
+                          </a:solidFill>
+                          <a:latin typeface="Calibri"/>
+                        </a:rPr>
+                        <a:t>+9 mo</a:t>
+                      </a:r>
+                    </a:p>
+                  </a:txBody>
+                  <a:tcPr marL="54864" marR="54864" marT="27432" marB="27432" anchor="ctr">
+                    <a:solidFill>
+                      <a:srgbClr val="F2F4F8"/>
+                    </a:solidFill>
+                  </a:tcPr>
+                </a:tc>
+                <a:tc>
+                  <a:txBody>
+                    <a:bodyPr/>
+                    <a:lstStyle/>
+                    <a:p>
+                      <a:pPr algn="r"/>
+                      <a:r>
+                        <a:rPr sz="1000" b="0">
+                          <a:solidFill>
+                            <a:srgbClr val="1F2A44"/>
+                          </a:solidFill>
+                          <a:latin typeface="Calibri"/>
+                        </a:rPr>
+                        <a:t>39% over 6 mo</a:t>
+                      </a:r>
+                    </a:p>
+                  </a:txBody>
+                  <a:tcPr marL="54864" marR="54864" marT="27432" marB="27432" anchor="ctr">
+                    <a:solidFill>
+                      <a:srgbClr val="F2F4F8"/>
+                    </a:solidFill>
+                  </a:tcPr>
+                </a:tc>
+              </a:tr>
+            </a:tbl>
+          </a:graphicData>
+        </a:graphic>
+      </p:graphicFrame>
+      <p:sp>
+        <p:nvSpPr>
+          <p:cNvPr id="10" name="TextBox 9"/>
+          <p:cNvSpPr txBox="1"/>
+          <p:nvPr/>
+        </p:nvSpPr>
+        <p:spPr>
+          <a:xfrm>
+            <a:off x="7040880" y="4023360"/>
+            <a:ext cx="4663440" cy="2331720"/>
+          </a:xfrm>
+          <a:prstGeom prst="rect">
+            <a:avLst/>
+          </a:prstGeom>
+          <a:noFill/>
+        </p:spPr>
+        <p:txBody>
+          <a:bodyPr wrap="square" lIns="45720">
+            <a:spAutoFit/>
+          </a:bodyPr>
+          <a:lstStyle/>
+          <a:p>
+            <a:pPr>
+              <a:lnSpc>
+                <a:spcPct val="105000"/>
+              </a:lnSpc>
+              <a:spcAft>
+                <a:spcPts val="400"/>
+              </a:spcAft>
+            </a:pPr>
+            <a:r>
+              <a:rPr sz="1000">
+                <a:solidFill>
+                  <a:srgbClr val="FFC72C"/>
+                </a:solidFill>
+                <a:latin typeface="Calibri"/>
+              </a:rPr>
+              <a:t>▪  </a:t>
+            </a:r>
+            <a:r>
+              <a:rPr b="1" sz="1000">
+                <a:solidFill>
+                  <a:srgbClr val="1F2A44"/>
+                </a:solidFill>
+                <a:latin typeface="Calibri"/>
+              </a:rPr>
+              <a:t>What the three postures mean. </a:t>
+            </a:r>
+            <a:r>
+              <a:rPr sz="1000">
+                <a:solidFill>
+                  <a:srgbClr val="1F2A44"/>
+                </a:solidFill>
+                <a:latin typeface="Calibri"/>
+              </a:rPr>
+              <a:t>Status quo: the $57.2M holds in 29% of trials. Managed: 71%, with a 24% chance of landing under $50M. Ceiling: every lever lands; it is the floor of what is physically possible, not a plan.</a:t>
+            </a:r>
+          </a:p>
+          <a:p>
+            <a:pPr>
+              <a:lnSpc>
+                <a:spcPct val="105000"/>
+              </a:lnSpc>
+              <a:spcAft>
+                <a:spcPts val="400"/>
+              </a:spcAft>
+            </a:pPr>
+            <a:r>
+              <a:rPr sz="1000">
+                <a:solidFill>
+                  <a:srgbClr val="FFC72C"/>
+                </a:solidFill>
+                <a:latin typeface="Calibri"/>
+              </a:rPr>
+              <a:t>▪  </a:t>
+            </a:r>
+            <a:r>
+              <a:rPr b="1" sz="1000">
+                <a:solidFill>
+                  <a:srgbClr val="1F2A44"/>
+                </a:solidFill>
+                <a:latin typeface="Calibri"/>
+              </a:rPr>
+              <a:t>The reserve. </a:t>
+            </a:r>
+            <a:r>
+              <a:rPr sz="1000">
+                <a:solidFill>
+                  <a:srgbClr val="1F2A44"/>
+                </a:solidFill>
+                <a:latin typeface="Calibri"/>
+              </a:rPr>
+              <a:t>The $7.6M of risk register and contingency is what these outcomes draw on. It covers the managed case at about P75 and the status quo at about P25.</a:t>
+            </a:r>
+          </a:p>
+          <a:p>
+            <a:pPr>
+              <a:lnSpc>
+                <a:spcPct val="105000"/>
+              </a:lnSpc>
+              <a:spcAft>
+                <a:spcPts val="400"/>
+              </a:spcAft>
+            </a:pPr>
+            <a:r>
+              <a:rPr sz="1000">
+                <a:solidFill>
+                  <a:srgbClr val="FFC72C"/>
+                </a:solidFill>
+                <a:latin typeface="Calibri"/>
+              </a:rPr>
+              <a:t>▪  </a:t>
+            </a:r>
+            <a:r>
+              <a:rPr b="1" sz="1000">
+                <a:solidFill>
+                  <a:srgbClr val="1F2A44"/>
+                </a:solidFill>
+                <a:latin typeface="Calibri"/>
+              </a:rPr>
+              <a:t>Schedule. </a:t>
+            </a:r>
+            <a:r>
+              <a:rPr sz="1000">
+                <a:solidFill>
+                  <a:srgbClr val="1F2A44"/>
+                </a:solidFill>
+                <a:latin typeface="Calibri"/>
+              </a:rPr>
+              <a:t>Eight in ten trials slip; the median slip is 5 months and costs about $1.8M; an EFSB path (8%) adds 18 to 24 months.</a:t>
             </a:r>
           </a:p>
         </p:txBody>
@@ -42813,7 +43342,7 @@
                 </a:solidFill>
                 <a:latin typeface="Calibri"/>
               </a:rPr>
-              <a:t>APPENDIX A. REFERENCE CLASS (PUBLIC DISCLOSURES, NOMINAL $/KWH)</a:t>
+              <a:t>3 · CAN THE NUMBER BE DEFENDED   |   OPPORTUNITIES LEFT, THREATS RIGHT: P10 TO P90 OF EACH DRIVER'S EFFECT ON THE LOADED TOTAL, $M</a:t>
             </a:r>
           </a:p>
         </p:txBody>
@@ -42855,7 +43384,7 @@
                 </a:solidFill>
                 <a:latin typeface="Georgia"/>
               </a:rPr>
-              <a:t>35 built projects at or below 100 MWh, utility- and developer-owned: where Hyde Park sits</a:t>
+              <a:t>Tornado: the Haugland gap and the siting schedule are the risks; the levers are many, small and mostly ours to take</a:t>
             </a:r>
           </a:p>
         </p:txBody>
@@ -42939,14 +43468,14 @@
                 </a:solidFill>
                 <a:latin typeface="Calibri"/>
               </a:rPr>
-              <a:t>35</a:t>
+              <a:t>36</a:t>
             </a:r>
           </a:p>
         </p:txBody>
       </p:sp>
       <p:pic>
         <p:nvPicPr>
-          <p:cNvPr id="7" name="Picture 6" descr="stats_refclass.png"/>
+          <p:cNvPr id="7" name="Picture 6" descr="mc_scope_tornado.png"/>
           <p:cNvPicPr>
             <a:picLocks noChangeAspect="1"/>
           </p:cNvPicPr>
@@ -42960,8 +43489,8 @@
         </p:blipFill>
         <p:spPr>
           <a:xfrm>
-            <a:off x="457200" y="1371600"/>
-            <a:ext cx="6820747" cy="4846320"/>
+            <a:off x="411480" y="1280160"/>
+            <a:ext cx="7004957" cy="5029200"/>
           </a:xfrm>
           <a:prstGeom prst="rect">
             <a:avLst/>
@@ -42976,8 +43505,8 @@
         </p:nvSpPr>
         <p:spPr>
           <a:xfrm>
-            <a:off x="7863840" y="1417320"/>
-            <a:ext cx="3840480" cy="4846320"/>
+            <a:off x="7589520" y="1371600"/>
+            <a:ext cx="4114800" cy="4937760"/>
           </a:xfrm>
           <a:prstGeom prst="rect">
             <a:avLst/>
@@ -42995,11 +43524,11 @@
                 <a:spcPct val="105000"/>
               </a:lnSpc>
               <a:spcAft>
-                <a:spcPts val="300"/>
+                <a:spcPts val="500"/>
               </a:spcAft>
             </a:pPr>
             <a:r>
-              <a:rPr sz="1000">
+              <a:rPr sz="1050">
                 <a:solidFill>
                   <a:srgbClr val="FFC72C"/>
                 </a:solidFill>
@@ -43008,22 +43537,22 @@
               <a:t>▪  </a:t>
             </a:r>
             <a:r>
-              <a:rPr b="1" sz="1000">
+              <a:rPr b="1" sz="1050">
                 <a:solidFill>
                   <a:srgbClr val="1F2A44"/>
                 </a:solidFill>
                 <a:latin typeface="Calibri"/>
               </a:rPr>
-              <a:t>Median </a:t>
-            </a:r>
-            <a:r>
-              <a:rPr sz="1000">
+              <a:t>Read the right side first. </a:t>
+            </a:r>
+            <a:r>
+              <a:rPr sz="1050">
                 <a:solidFill>
                   <a:srgbClr val="1F2A44"/>
                 </a:solidFill>
                 <a:latin typeface="Calibri"/>
               </a:rPr>
-              <a:t>$750/kWh; interquartile $556 to $1,275. Utility-owned subclass (25): median $1,235.</a:t>
+              <a:t>One threat, the Haugland reconciliation, reaches $9M at P90 and carries 58% of the variance. Schedule slip reaches $4.3M. The civil layer and Station 496 are the two accuracy ranges with real upside risk.</a:t>
             </a:r>
           </a:p>
           <a:p>
@@ -43032,11 +43561,11 @@
                 <a:spcPct val="105000"/>
               </a:lnSpc>
               <a:spcAft>
-                <a:spcPts val="300"/>
+                <a:spcPts val="500"/>
               </a:spcAft>
             </a:pPr>
             <a:r>
-              <a:rPr sz="1000">
+              <a:rPr sz="1050">
                 <a:solidFill>
                   <a:srgbClr val="FFC72C"/>
                 </a:solidFill>
@@ -43045,22 +43574,22 @@
               <a:t>▪  </a:t>
             </a:r>
             <a:r>
-              <a:rPr b="1" sz="1000">
+              <a:rPr b="1" sz="1050">
                 <a:solidFill>
                   <a:srgbClr val="1F2A44"/>
                 </a:solidFill>
                 <a:latin typeface="Calibri"/>
               </a:rPr>
-              <a:t>Hyde Park battery installed, $833: </a:t>
-            </a:r>
-            <a:r>
-              <a:rPr sz="1000">
+              <a:t>The left side is a portfolio. </a:t>
+            </a:r>
+            <a:r>
+              <a:rPr sz="1050">
                 <a:solidFill>
                   <a:srgbClr val="1F2A44"/>
                 </a:solidFill>
                 <a:latin typeface="Calibri"/>
               </a:rPr>
-              <a:t>57% percentile.</a:t>
+              <a:t>No single lever exceeds $2M, but together they are worth about $6.3M at the odds assessed and $11.8M if every one lands. The four that need only a decision (A1, A2, B5, C3) are the surest.</a:t>
             </a:r>
           </a:p>
           <a:p>
@@ -43069,11 +43598,11 @@
                 <a:spcPct val="105000"/>
               </a:lnSpc>
               <a:spcAft>
-                <a:spcPts val="300"/>
+                <a:spcPts val="500"/>
               </a:spcAft>
             </a:pPr>
             <a:r>
-              <a:rPr sz="1000">
+              <a:rPr sz="1050">
                 <a:solidFill>
                   <a:srgbClr val="FFC72C"/>
                 </a:solidFill>
@@ -43082,22 +43611,22 @@
               <a:t>▪  </a:t>
             </a:r>
             <a:r>
-              <a:rPr b="1" sz="1000">
+              <a:rPr b="1" sz="1050">
                 <a:solidFill>
                   <a:srgbClr val="1F2A44"/>
                 </a:solidFill>
                 <a:latin typeface="Calibri"/>
               </a:rPr>
-              <a:t>Station complete, direct, $1,483: </a:t>
-            </a:r>
-            <a:r>
-              <a:rPr sz="1000">
+              <a:t>What this says about being aggressive. </a:t>
+            </a:r>
+            <a:r>
+              <a:rPr sz="1050">
                 <a:solidFill>
                   <a:srgbClr val="1F2A44"/>
                 </a:solidFill>
                 <a:latin typeface="Calibri"/>
               </a:rPr>
-              <a:t>77% percentile (68% in the utility subclass), beside Fairhaven ($1,659 actual, 2023), Chateaugay ($1,490, 2023) and Provincetown ($1,289 actual, 2022).</a:t>
+              <a:t>Aggression on the station lines buys $3M to $6M; aggression on the reconciliation and the siting calendar protects $8M to $13M. Do both, in that order.</a:t>
             </a:r>
           </a:p>
           <a:p>
@@ -43106,11 +43635,11 @@
                 <a:spcPct val="105000"/>
               </a:lnSpc>
               <a:spcAft>
-                <a:spcPts val="300"/>
+                <a:spcPts val="500"/>
               </a:spcAft>
             </a:pPr>
             <a:r>
-              <a:rPr sz="1000">
+              <a:rPr sz="1050">
                 <a:solidFill>
                   <a:srgbClr val="FFC72C"/>
                 </a:solidFill>
@@ -43119,133 +43648,22 @@
               <a:t>▪  </a:t>
             </a:r>
             <a:r>
-              <a:rPr b="1" sz="1000">
+              <a:rPr b="1" sz="1050">
                 <a:solidFill>
                   <a:srgbClr val="1F2A44"/>
                 </a:solidFill>
                 <a:latin typeface="Calibri"/>
               </a:rPr>
-              <a:t>Approval level, $2,862: </a:t>
-            </a:r>
-            <a:r>
-              <a:rPr sz="1000">
+              <a:t>Not on the chart: </a:t>
+            </a:r>
+            <a:r>
+              <a:rPr sz="1050">
                 <a:solidFill>
                   <a:srgbClr val="1F2A44"/>
                 </a:solidFill>
                 <a:latin typeface="Calibri"/>
               </a:rPr>
-              <a:t>above every member. The loaders ($23.7M) and the two interconnection scopes are what the comparables do not carry.</a:t>
-            </a:r>
-          </a:p>
-          <a:p>
-            <a:pPr>
-              <a:lnSpc>
-                <a:spcPct val="105000"/>
-              </a:lnSpc>
-              <a:spcAft>
-                <a:spcPts val="300"/>
-              </a:spcAft>
-            </a:pPr>
-            <a:r>
-              <a:rPr sz="1000">
-                <a:solidFill>
-                  <a:srgbClr val="FFC72C"/>
-                </a:solidFill>
-                <a:latin typeface="Calibri"/>
-              </a:rPr>
-              <a:t>▪  </a:t>
-            </a:r>
-            <a:r>
-              <a:rPr b="1" sz="1000">
-                <a:solidFill>
-                  <a:srgbClr val="1F2A44"/>
-                </a:solidFill>
-                <a:latin typeface="Calibri"/>
-              </a:rPr>
-              <a:t>Re-based to 2026 dollars (slides 12 and 14 to 18): </a:t>
-            </a:r>
-            <a:r>
-              <a:rPr sz="1000">
-                <a:solidFill>
-                  <a:srgbClr val="1F2A44"/>
-                </a:solidFill>
-                <a:latin typeface="Calibri"/>
-              </a:rPr>
-              <a:t>median $742 at the installed index, $816 to $737 across 30 to 50% anchor battery share (2024 basis, back-cast to each project's year).</a:t>
-            </a:r>
-          </a:p>
-          <a:p>
-            <a:pPr>
-              <a:lnSpc>
-                <a:spcPct val="105000"/>
-              </a:lnSpc>
-              <a:spcAft>
-                <a:spcPts val="300"/>
-              </a:spcAft>
-            </a:pPr>
-            <a:r>
-              <a:rPr sz="1000">
-                <a:solidFill>
-                  <a:srgbClr val="FFC72C"/>
-                </a:solidFill>
-                <a:latin typeface="Calibri"/>
-              </a:rPr>
-              <a:t>▪  </a:t>
-            </a:r>
-            <a:r>
-              <a:rPr b="1" sz="1000">
-                <a:solidFill>
-                  <a:srgbClr val="1F2A44"/>
-                </a:solidFill>
-                <a:latin typeface="Calibri"/>
-              </a:rPr>
-              <a:t>Built projects only (5 Oct 2026). </a:t>
-            </a:r>
-            <a:r>
-              <a:rPr sz="1000">
-                <a:solidFill>
-                  <a:srgbClr val="1F2A44"/>
-                </a:solidFill>
-                <a:latin typeface="Calibri"/>
-              </a:rPr>
-              <a:t>Status of every dataset row verified; 27 rows that were planned, under development, under construction or cancelled are excluded from the class and the regression. 14 members carry a final or actual cost (median $756); the others are contract, budget or announcement figures for projects that were built.</a:t>
-            </a:r>
-          </a:p>
-          <a:p>
-            <a:pPr>
-              <a:lnSpc>
-                <a:spcPct val="105000"/>
-              </a:lnSpc>
-              <a:spcAft>
-                <a:spcPts val="300"/>
-              </a:spcAft>
-            </a:pPr>
-            <a:r>
-              <a:rPr sz="1000">
-                <a:solidFill>
-                  <a:srgbClr val="FFC72C"/>
-                </a:solidFill>
-                <a:latin typeface="Calibri"/>
-              </a:rPr>
-              <a:t>▪  </a:t>
-            </a:r>
-            <a:r>
-              <a:rPr b="1" sz="1000">
-                <a:solidFill>
-                  <a:srgbClr val="1F2A44"/>
-                </a:solidFill>
-                <a:latin typeface="Calibri"/>
-              </a:rPr>
-              <a:t>Caveat: </a:t>
-            </a:r>
-            <a:r>
-              <a:rPr sz="1000">
-                <a:solidFill>
-                  <a:srgbClr val="1F2A44"/>
-                </a:solidFill>
-                <a:latin typeface="Calibri"/>
-              </a:rPr>
-              <a:t>figures from regulator, IDA, EIA and utility documents, verified by status audit; developer-owned members carry developer overhead and profit but no utility indirects or AFUDC; incentives are not netted.</a:t>
+              <a:t>the Section 48E credit ($8.4 to 12.4M), which is larger than everything on the left combined and sits in the revenue requirement.</a:t>
             </a:r>
           </a:p>
         </p:txBody>
@@ -43349,7 +43767,7 @@
                 </a:solidFill>
                 <a:latin typeface="Calibri"/>
               </a:rPr>
-              <a:t>APPENDIX B. REGRESSION ON 53 PUBLIC PROJECTS</a:t>
+              <a:t>3 · CAN THE NUMBER BE DEFENDED   |   RECONCILIATIONS AND DECISIONS, RED-TEAM RANKED</a:t>
             </a:r>
           </a:p>
         </p:txBody>
@@ -43391,7 +43809,7 @@
                 </a:solidFill>
                 <a:latin typeface="Georgia"/>
               </a:rPr>
-              <a:t>Size and duration explain half the spread in public costs; Hyde Park's direct cost is high-normal</a:t>
+              <a:t>What must close before this number goes to EPAC as full funding</a:t>
             </a:r>
           </a:p>
         </p:txBody>
@@ -43475,7 +43893,2731 @@
                 </a:solidFill>
                 <a:latin typeface="Calibri"/>
               </a:rPr>
-              <a:t>36</a:t>
+              <a:t>37</a:t>
+            </a:r>
+          </a:p>
+        </p:txBody>
+      </p:sp>
+      <p:graphicFrame>
+        <p:nvGraphicFramePr>
+          <p:cNvPr id="7" name="Table 6"/>
+          <p:cNvGraphicFramePr>
+            <a:graphicFrameLocks noGrp="1"/>
+          </p:cNvGraphicFramePr>
+          <p:nvPr/>
+        </p:nvGraphicFramePr>
+        <p:xfrm>
+          <a:off x="548640" y="1325880"/>
+          <a:ext cx="11064240" cy="4480560"/>
+        </p:xfrm>
+        <a:graphic>
+          <a:graphicData uri="http://schemas.openxmlformats.org/drawingml/2006/table">
+            <a:tbl>
+              <a:tblPr firstRow="1" bandRow="1">
+                <a:tableStyleId>{5C22544A-7EE6-4342-B048-85BDC9FD1C3A}</a:tableStyleId>
+              </a:tblPr>
+              <a:tblGrid>
+                <a:gridCol w="6035040"/>
+                <a:gridCol w="1188720"/>
+                <a:gridCol w="2286000"/>
+                <a:gridCol w="1554480"/>
+              </a:tblGrid>
+              <a:tr h="407323">
+                <a:tc>
+                  <a:txBody>
+                    <a:bodyPr/>
+                    <a:lstStyle/>
+                    <a:p>
+                      <a:r>
+                        <a:rPr sz="1000" b="1">
+                          <a:solidFill>
+                            <a:srgbClr val="FFFFFF"/>
+                          </a:solidFill>
+                          <a:latin typeface="Calibri"/>
+                        </a:rPr>
+                        <a:t>Item</a:t>
+                      </a:r>
+                    </a:p>
+                  </a:txBody>
+                  <a:tcPr marL="54864" marR="54864" marT="27432" marB="27432">
+                    <a:solidFill>
+                      <a:srgbClr val="001E60"/>
+                    </a:solidFill>
+                  </a:tcPr>
+                </a:tc>
+                <a:tc>
+                  <a:txBody>
+                    <a:bodyPr/>
+                    <a:lstStyle/>
+                    <a:p>
+                      <a:r>
+                        <a:rPr sz="1000" b="1">
+                          <a:solidFill>
+                            <a:srgbClr val="FFFFFF"/>
+                          </a:solidFill>
+                          <a:latin typeface="Calibri"/>
+                        </a:rPr>
+                        <a:t>Type</a:t>
+                      </a:r>
+                    </a:p>
+                  </a:txBody>
+                  <a:tcPr marL="54864" marR="54864" marT="27432" marB="27432">
+                    <a:solidFill>
+                      <a:srgbClr val="001E60"/>
+                    </a:solidFill>
+                  </a:tcPr>
+                </a:tc>
+                <a:tc>
+                  <a:txBody>
+                    <a:bodyPr/>
+                    <a:lstStyle/>
+                    <a:p>
+                      <a:r>
+                        <a:rPr sz="1000" b="1">
+                          <a:solidFill>
+                            <a:srgbClr val="FFFFFF"/>
+                          </a:solidFill>
+                          <a:latin typeface="Calibri"/>
+                        </a:rPr>
+                        <a:t>Dollars at stake</a:t>
+                      </a:r>
+                    </a:p>
+                  </a:txBody>
+                  <a:tcPr marL="54864" marR="54864" marT="27432" marB="27432">
+                    <a:solidFill>
+                      <a:srgbClr val="001E60"/>
+                    </a:solidFill>
+                  </a:tcPr>
+                </a:tc>
+                <a:tc>
+                  <a:txBody>
+                    <a:bodyPr/>
+                    <a:lstStyle/>
+                    <a:p>
+                      <a:r>
+                        <a:rPr sz="1000" b="1">
+                          <a:solidFill>
+                            <a:srgbClr val="FFFFFF"/>
+                          </a:solidFill>
+                          <a:latin typeface="Calibri"/>
+                        </a:rPr>
+                        <a:t>Owner</a:t>
+                      </a:r>
+                    </a:p>
+                  </a:txBody>
+                  <a:tcPr marL="54864" marR="54864" marT="27432" marB="27432">
+                    <a:solidFill>
+                      <a:srgbClr val="001E60"/>
+                    </a:solidFill>
+                  </a:tcPr>
+                </a:tc>
+              </a:tr>
+              <a:tr h="407323">
+                <a:tc>
+                  <a:txBody>
+                    <a:bodyPr/>
+                    <a:lstStyle/>
+                    <a:p>
+                      <a:r>
+                        <a:rPr sz="1000" b="0">
+                          <a:solidFill>
+                            <a:srgbClr val="1F2A44"/>
+                          </a:solidFill>
+                          <a:latin typeface="Calibri"/>
+                        </a:rPr>
+                        <a:t>Reconcile Haugland Class 3 base ($19.2M, its scope) to Rev 3 layers B+D+E ($8.3M direct). Red team expects it to move the base up, not down.</a:t>
+                      </a:r>
+                    </a:p>
+                  </a:txBody>
+                  <a:tcPr marL="54864" marR="54864" marT="27432" marB="27432" anchor="ctr">
+                    <a:solidFill>
+                      <a:srgbClr val="FFFFFF"/>
+                    </a:solidFill>
+                  </a:tcPr>
+                </a:tc>
+                <a:tc>
+                  <a:txBody>
+                    <a:bodyPr/>
+                    <a:lstStyle/>
+                    <a:p>
+                      <a:r>
+                        <a:rPr sz="1000" b="0">
+                          <a:solidFill>
+                            <a:srgbClr val="1F2A44"/>
+                          </a:solidFill>
+                          <a:latin typeface="Calibri"/>
+                        </a:rPr>
+                        <a:t>Scope boundary</a:t>
+                      </a:r>
+                    </a:p>
+                  </a:txBody>
+                  <a:tcPr marL="54864" marR="54864" marT="27432" marB="27432" anchor="ctr">
+                    <a:solidFill>
+                      <a:srgbClr val="FFFFFF"/>
+                    </a:solidFill>
+                  </a:tcPr>
+                </a:tc>
+                <a:tc>
+                  <a:txBody>
+                    <a:bodyPr/>
+                    <a:lstStyle/>
+                    <a:p>
+                      <a:r>
+                        <a:rPr sz="1000" b="0">
+                          <a:solidFill>
+                            <a:srgbClr val="1F2A44"/>
+                          </a:solidFill>
+                          <a:latin typeface="Calibri"/>
+                        </a:rPr>
+                        <a:t>+$4M to +$8M direct if half the gap is 21334 scope</a:t>
+                      </a:r>
+                    </a:p>
+                  </a:txBody>
+                  <a:tcPr marL="54864" marR="54864" marT="27432" marB="27432" anchor="ctr">
+                    <a:solidFill>
+                      <a:srgbClr val="FFFFFF"/>
+                    </a:solidFill>
+                  </a:tcPr>
+                </a:tc>
+                <a:tc>
+                  <a:txBody>
+                    <a:bodyPr/>
+                    <a:lstStyle/>
+                    <a:p>
+                      <a:r>
+                        <a:rPr sz="1000" b="0">
+                          <a:solidFill>
+                            <a:srgbClr val="1F2A44"/>
+                          </a:solidFill>
+                          <a:latin typeface="Calibri"/>
+                        </a:rPr>
+                        <a:t>Cost Estimating + PM + HEG</a:t>
+                      </a:r>
+                    </a:p>
+                  </a:txBody>
+                  <a:tcPr marL="54864" marR="54864" marT="27432" marB="27432" anchor="ctr">
+                    <a:solidFill>
+                      <a:srgbClr val="FFFFFF"/>
+                    </a:solidFill>
+                  </a:tcPr>
+                </a:tc>
+              </a:tr>
+              <a:tr h="407323">
+                <a:tc>
+                  <a:txBody>
+                    <a:bodyPr/>
+                    <a:lstStyle/>
+                    <a:p>
+                      <a:r>
+                        <a:rPr sz="1000" b="0">
+                          <a:solidFill>
+                            <a:srgbClr val="1F2A44"/>
+                          </a:solidFill>
+                          <a:latin typeface="Calibri"/>
+                        </a:rPr>
+                        <a:t>Siting chain has no float: ZBA determination Feb 2028, construction start Feb 2028, ISD Dec 2028; EFSB fallback 18-24 mo</a:t>
+                      </a:r>
+                    </a:p>
+                  </a:txBody>
+                  <a:tcPr marL="54864" marR="54864" marT="27432" marB="27432" anchor="ctr">
+                    <a:solidFill>
+                      <a:srgbClr val="F2F4F8"/>
+                    </a:solidFill>
+                  </a:tcPr>
+                </a:tc>
+                <a:tc>
+                  <a:txBody>
+                    <a:bodyPr/>
+                    <a:lstStyle/>
+                    <a:p>
+                      <a:r>
+                        <a:rPr sz="1000" b="0">
+                          <a:solidFill>
+                            <a:srgbClr val="1F2A44"/>
+                          </a:solidFill>
+                          <a:latin typeface="Calibri"/>
+                        </a:rPr>
+                        <a:t>Schedule</a:t>
+                      </a:r>
+                    </a:p>
+                  </a:txBody>
+                  <a:tcPr marL="54864" marR="54864" marT="27432" marB="27432" anchor="ctr">
+                    <a:solidFill>
+                      <a:srgbClr val="F2F4F8"/>
+                    </a:solidFill>
+                  </a:tcPr>
+                </a:tc>
+                <a:tc>
+                  <a:txBody>
+                    <a:bodyPr/>
+                    <a:lstStyle/>
+                    <a:p>
+                      <a:r>
+                        <a:rPr sz="1000" b="0">
+                          <a:solidFill>
+                            <a:srgbClr val="1F2A44"/>
+                          </a:solidFill>
+                          <a:latin typeface="Calibri"/>
+                        </a:rPr>
+                        <a:t>~$5M per 12 months (AFUDC, escalation, PM, indirects)</a:t>
+                      </a:r>
+                    </a:p>
+                  </a:txBody>
+                  <a:tcPr marL="54864" marR="54864" marT="27432" marB="27432" anchor="ctr">
+                    <a:solidFill>
+                      <a:srgbClr val="F2F4F8"/>
+                    </a:solidFill>
+                  </a:tcPr>
+                </a:tc>
+                <a:tc>
+                  <a:txBody>
+                    <a:bodyPr/>
+                    <a:lstStyle/>
+                    <a:p>
+                      <a:r>
+                        <a:rPr sz="1000" b="0">
+                          <a:solidFill>
+                            <a:srgbClr val="1F2A44"/>
+                          </a:solidFill>
+                          <a:latin typeface="Calibri"/>
+                        </a:rPr>
+                        <a:t>Siting + PM</a:t>
+                      </a:r>
+                    </a:p>
+                  </a:txBody>
+                  <a:tcPr marL="54864" marR="54864" marT="27432" marB="27432" anchor="ctr">
+                    <a:solidFill>
+                      <a:srgbClr val="F2F4F8"/>
+                    </a:solidFill>
+                  </a:tcPr>
+                </a:tc>
+              </a:tr>
+              <a:tr h="407323">
+                <a:tc>
+                  <a:txBody>
+                    <a:bodyPr/>
+                    <a:lstStyle/>
+                    <a:p>
+                      <a:r>
+                        <a:rPr sz="1000" b="0">
+                          <a:solidFill>
+                            <a:srgbClr val="1F2A44"/>
+                          </a:solidFill>
+                          <a:latin typeface="Calibri"/>
+                        </a:rPr>
+                        <a:t>Present full funding at its real maturity: 30% engineering, no bid, placeholder platform = Class 4</a:t>
+                      </a:r>
+                    </a:p>
+                  </a:txBody>
+                  <a:tcPr marL="54864" marR="54864" marT="27432" marB="27432" anchor="ctr">
+                    <a:solidFill>
+                      <a:srgbClr val="FFFFFF"/>
+                    </a:solidFill>
+                  </a:tcPr>
+                </a:tc>
+                <a:tc>
+                  <a:txBody>
+                    <a:bodyPr/>
+                    <a:lstStyle/>
+                    <a:p>
+                      <a:r>
+                        <a:rPr sz="1000" b="0">
+                          <a:solidFill>
+                            <a:srgbClr val="1F2A44"/>
+                          </a:solidFill>
+                          <a:latin typeface="Calibri"/>
+                        </a:rPr>
+                        <a:t>Classification</a:t>
+                      </a:r>
+                    </a:p>
+                  </a:txBody>
+                  <a:tcPr marL="54864" marR="54864" marT="27432" marB="27432" anchor="ctr">
+                    <a:solidFill>
+                      <a:srgbClr val="FFFFFF"/>
+                    </a:solidFill>
+                  </a:tcPr>
+                </a:tc>
+                <a:tc>
+                  <a:txBody>
+                    <a:bodyPr/>
+                    <a:lstStyle/>
+                    <a:p>
+                      <a:r>
+                        <a:rPr sz="1000" b="0">
+                          <a:solidFill>
+                            <a:srgbClr val="1F2A44"/>
+                          </a:solidFill>
+                          <a:latin typeface="Calibri"/>
+                        </a:rPr>
+                        <a:t>Range is -25/+50% ($43M-$86M) until closed</a:t>
+                      </a:r>
+                    </a:p>
+                  </a:txBody>
+                  <a:tcPr marL="54864" marR="54864" marT="27432" marB="27432" anchor="ctr">
+                    <a:solidFill>
+                      <a:srgbClr val="FFFFFF"/>
+                    </a:solidFill>
+                  </a:tcPr>
+                </a:tc>
+                <a:tc>
+                  <a:txBody>
+                    <a:bodyPr/>
+                    <a:lstStyle/>
+                    <a:p>
+                      <a:r>
+                        <a:rPr sz="1000" b="0">
+                          <a:solidFill>
+                            <a:srgbClr val="1F2A44"/>
+                          </a:solidFill>
+                          <a:latin typeface="Calibri"/>
+                        </a:rPr>
+                        <a:t>Cost Estimating</a:t>
+                      </a:r>
+                    </a:p>
+                  </a:txBody>
+                  <a:tcPr marL="54864" marR="54864" marT="27432" marB="27432" anchor="ctr">
+                    <a:solidFill>
+                      <a:srgbClr val="FFFFFF"/>
+                    </a:solidFill>
+                  </a:tcPr>
+                </a:tc>
+              </a:tr>
+              <a:tr h="407323">
+                <a:tc>
+                  <a:txBody>
+                    <a:bodyPr/>
+                    <a:lstStyle/>
+                    <a:p>
+                      <a:r>
+                        <a:rPr sz="1000" b="0">
+                          <a:solidFill>
+                            <a:srgbClr val="1F2A44"/>
+                          </a:solidFill>
+                          <a:latin typeface="Calibri"/>
+                        </a:rPr>
+                        <a:t>Geotechnical investigation and NFPA 855 hazard mitigation analysis before civil freeze</a:t>
+                      </a:r>
+                    </a:p>
+                  </a:txBody>
+                  <a:tcPr marL="54864" marR="54864" marT="27432" marB="27432" anchor="ctr">
+                    <a:solidFill>
+                      <a:srgbClr val="F2F4F8"/>
+                    </a:solidFill>
+                  </a:tcPr>
+                </a:tc>
+                <a:tc>
+                  <a:txBody>
+                    <a:bodyPr/>
+                    <a:lstStyle/>
+                    <a:p>
+                      <a:r>
+                        <a:rPr sz="1000" b="0">
+                          <a:solidFill>
+                            <a:srgbClr val="1F2A44"/>
+                          </a:solidFill>
+                          <a:latin typeface="Calibri"/>
+                        </a:rPr>
+                        <a:t>Study</a:t>
+                      </a:r>
+                    </a:p>
+                  </a:txBody>
+                  <a:tcPr marL="54864" marR="54864" marT="27432" marB="27432" anchor="ctr">
+                    <a:solidFill>
+                      <a:srgbClr val="F2F4F8"/>
+                    </a:solidFill>
+                  </a:tcPr>
+                </a:tc>
+                <a:tc>
+                  <a:txBody>
+                    <a:bodyPr/>
+                    <a:lstStyle/>
+                    <a:p>
+                      <a:r>
+                        <a:rPr sz="1000" b="0">
+                          <a:solidFill>
+                            <a:srgbClr val="1F2A44"/>
+                          </a:solidFill>
+                          <a:latin typeface="Calibri"/>
+                        </a:rPr>
+                        <a:t>$1.0M of deducts vs $0.6M-$3.5M exposure</a:t>
+                      </a:r>
+                    </a:p>
+                  </a:txBody>
+                  <a:tcPr marL="54864" marR="54864" marT="27432" marB="27432" anchor="ctr">
+                    <a:solidFill>
+                      <a:srgbClr val="F2F4F8"/>
+                    </a:solidFill>
+                  </a:tcPr>
+                </a:tc>
+                <a:tc>
+                  <a:txBody>
+                    <a:bodyPr/>
+                    <a:lstStyle/>
+                    <a:p>
+                      <a:r>
+                        <a:rPr sz="1000" b="0">
+                          <a:solidFill>
+                            <a:srgbClr val="1F2A44"/>
+                          </a:solidFill>
+                          <a:latin typeface="Calibri"/>
+                        </a:rPr>
+                        <a:t>Civil + Capital Projects Eng.</a:t>
+                      </a:r>
+                    </a:p>
+                  </a:txBody>
+                  <a:tcPr marL="54864" marR="54864" marT="27432" marB="27432" anchor="ctr">
+                    <a:solidFill>
+                      <a:srgbClr val="F2F4F8"/>
+                    </a:solidFill>
+                  </a:tcPr>
+                </a:tc>
+              </a:tr>
+              <a:tr h="407323">
+                <a:tc>
+                  <a:txBody>
+                    <a:bodyPr/>
+                    <a:lstStyle/>
+                    <a:p>
+                      <a:r>
+                        <a:rPr sz="1000" b="0">
+                          <a:solidFill>
+                            <a:srgbClr val="1F2A44"/>
+                          </a:solidFill>
+                          <a:latin typeface="Calibri"/>
+                        </a:rPr>
+                        <a:t>Confirm four written design-basis items (retaining wall, basin, duct bank, GSU count)</a:t>
+                      </a:r>
+                    </a:p>
+                  </a:txBody>
+                  <a:tcPr marL="54864" marR="54864" marT="27432" marB="27432" anchor="ctr">
+                    <a:solidFill>
+                      <a:srgbClr val="FFFFFF"/>
+                    </a:solidFill>
+                  </a:tcPr>
+                </a:tc>
+                <a:tc>
+                  <a:txBody>
+                    <a:bodyPr/>
+                    <a:lstStyle/>
+                    <a:p>
+                      <a:r>
+                        <a:rPr sz="1000" b="0">
+                          <a:solidFill>
+                            <a:srgbClr val="1F2A44"/>
+                          </a:solidFill>
+                          <a:latin typeface="Calibri"/>
+                        </a:rPr>
+                        <a:t>Design confirmation</a:t>
+                      </a:r>
+                    </a:p>
+                  </a:txBody>
+                  <a:tcPr marL="54864" marR="54864" marT="27432" marB="27432" anchor="ctr">
+                    <a:solidFill>
+                      <a:srgbClr val="FFFFFF"/>
+                    </a:solidFill>
+                  </a:tcPr>
+                </a:tc>
+                <a:tc>
+                  <a:txBody>
+                    <a:bodyPr/>
+                    <a:lstStyle/>
+                    <a:p>
+                      <a:r>
+                        <a:rPr sz="1000" b="0">
+                          <a:solidFill>
+                            <a:srgbClr val="1F2A44"/>
+                          </a:solidFill>
+                          <a:latin typeface="Calibri"/>
+                        </a:rPr>
+                        <a:t>$1.47M HEG deduct ceiling (~$0.8M net of GSUs already at 4)</a:t>
+                      </a:r>
+                    </a:p>
+                  </a:txBody>
+                  <a:tcPr marL="54864" marR="54864" marT="27432" marB="27432" anchor="ctr">
+                    <a:solidFill>
+                      <a:srgbClr val="FFFFFF"/>
+                    </a:solidFill>
+                  </a:tcPr>
+                </a:tc>
+                <a:tc>
+                  <a:txBody>
+                    <a:bodyPr/>
+                    <a:lstStyle/>
+                    <a:p>
+                      <a:r>
+                        <a:rPr sz="1000" b="0">
+                          <a:solidFill>
+                            <a:srgbClr val="1F2A44"/>
+                          </a:solidFill>
+                          <a:latin typeface="Calibri"/>
+                        </a:rPr>
+                        <a:t>Substation Engineering</a:t>
+                      </a:r>
+                    </a:p>
+                  </a:txBody>
+                  <a:tcPr marL="54864" marR="54864" marT="27432" marB="27432" anchor="ctr">
+                    <a:solidFill>
+                      <a:srgbClr val="FFFFFF"/>
+                    </a:solidFill>
+                  </a:tcPr>
+                </a:tc>
+              </a:tr>
+              <a:tr h="407323">
+                <a:tc>
+                  <a:txBody>
+                    <a:bodyPr/>
+                    <a:lstStyle/>
+                    <a:p>
+                      <a:r>
+                        <a:rPr sz="1000" b="0">
+                          <a:solidFill>
+                            <a:srgbClr val="1F2A44"/>
+                          </a:solidFill>
+                          <a:latin typeface="Calibri"/>
+                        </a:rPr>
+                        <a:t>Escalation on the fixed-price battery balance; check Exhibit C for tariff / change-in-law pass-through</a:t>
+                      </a:r>
+                    </a:p>
+                  </a:txBody>
+                  <a:tcPr marL="54864" marR="54864" marT="27432" marB="27432" anchor="ctr">
+                    <a:solidFill>
+                      <a:srgbClr val="F2F4F8"/>
+                    </a:solidFill>
+                  </a:tcPr>
+                </a:tc>
+                <a:tc>
+                  <a:txBody>
+                    <a:bodyPr/>
+                    <a:lstStyle/>
+                    <a:p>
+                      <a:r>
+                        <a:rPr sz="1000" b="0">
+                          <a:solidFill>
+                            <a:srgbClr val="1F2A44"/>
+                          </a:solidFill>
+                          <a:latin typeface="Calibri"/>
+                        </a:rPr>
+                        <a:t>Decision</a:t>
+                      </a:r>
+                    </a:p>
+                  </a:txBody>
+                  <a:tcPr marL="54864" marR="54864" marT="27432" marB="27432" anchor="ctr">
+                    <a:solidFill>
+                      <a:srgbClr val="F2F4F8"/>
+                    </a:solidFill>
+                  </a:tcPr>
+                </a:tc>
+                <a:tc>
+                  <a:txBody>
+                    <a:bodyPr/>
+                    <a:lstStyle/>
+                    <a:p>
+                      <a:r>
+                        <a:rPr sz="1000" b="0">
+                          <a:solidFill>
+                            <a:srgbClr val="1F2A44"/>
+                          </a:solidFill>
+                          <a:latin typeface="Calibri"/>
+                        </a:rPr>
+                        <a:t>$1.13M</a:t>
+                      </a:r>
+                    </a:p>
+                  </a:txBody>
+                  <a:tcPr marL="54864" marR="54864" marT="27432" marB="27432" anchor="ctr">
+                    <a:solidFill>
+                      <a:srgbClr val="F2F4F8"/>
+                    </a:solidFill>
+                  </a:tcPr>
+                </a:tc>
+                <a:tc>
+                  <a:txBody>
+                    <a:bodyPr/>
+                    <a:lstStyle/>
+                    <a:p>
+                      <a:r>
+                        <a:rPr sz="1000" b="0">
+                          <a:solidFill>
+                            <a:srgbClr val="1F2A44"/>
+                          </a:solidFill>
+                          <a:latin typeface="Calibri"/>
+                        </a:rPr>
+                        <a:t>PM / Cost Estimating / Sourcing</a:t>
+                      </a:r>
+                    </a:p>
+                  </a:txBody>
+                  <a:tcPr marL="54864" marR="54864" marT="27432" marB="27432" anchor="ctr">
+                    <a:solidFill>
+                      <a:srgbClr val="F2F4F8"/>
+                    </a:solidFill>
+                  </a:tcPr>
+                </a:tc>
+              </a:tr>
+              <a:tr h="407323">
+                <a:tc>
+                  <a:txBody>
+                    <a:bodyPr/>
+                    <a:lstStyle/>
+                    <a:p>
+                      <a:r>
+                        <a:rPr sz="1000" b="0">
+                          <a:solidFill>
+                            <a:srgbClr val="1F2A44"/>
+                          </a:solidFill>
+                          <a:latin typeface="Calibri"/>
+                        </a:rPr>
+                        <a:t>Battery installation labor: replace 25%-of-16,801 mh with a crew build-up</a:t>
+                      </a:r>
+                    </a:p>
+                  </a:txBody>
+                  <a:tcPr marL="54864" marR="54864" marT="27432" marB="27432" anchor="ctr">
+                    <a:solidFill>
+                      <a:srgbClr val="FFFFFF"/>
+                    </a:solidFill>
+                  </a:tcPr>
+                </a:tc>
+                <a:tc>
+                  <a:txBody>
+                    <a:bodyPr/>
+                    <a:lstStyle/>
+                    <a:p>
+                      <a:r>
+                        <a:rPr sz="1000" b="0">
+                          <a:solidFill>
+                            <a:srgbClr val="1F2A44"/>
+                          </a:solidFill>
+                          <a:latin typeface="Calibri"/>
+                        </a:rPr>
+                        <a:t>Estimate</a:t>
+                      </a:r>
+                    </a:p>
+                  </a:txBody>
+                  <a:tcPr marL="54864" marR="54864" marT="27432" marB="27432" anchor="ctr">
+                    <a:solidFill>
+                      <a:srgbClr val="FFFFFF"/>
+                    </a:solidFill>
+                  </a:tcPr>
+                </a:tc>
+                <a:tc>
+                  <a:txBody>
+                    <a:bodyPr/>
+                    <a:lstStyle/>
+                    <a:p>
+                      <a:r>
+                        <a:rPr sz="1000" b="0">
+                          <a:solidFill>
+                            <a:srgbClr val="1F2A44"/>
+                          </a:solidFill>
+                          <a:latin typeface="Calibri"/>
+                        </a:rPr>
+                        <a:t>+/- $0.5M (Rev 2 used 50%)</a:t>
+                      </a:r>
+                    </a:p>
+                  </a:txBody>
+                  <a:tcPr marL="54864" marR="54864" marT="27432" marB="27432" anchor="ctr">
+                    <a:solidFill>
+                      <a:srgbClr val="FFFFFF"/>
+                    </a:solidFill>
+                  </a:tcPr>
+                </a:tc>
+                <a:tc>
+                  <a:txBody>
+                    <a:bodyPr/>
+                    <a:lstStyle/>
+                    <a:p>
+                      <a:r>
+                        <a:rPr sz="1000" b="0">
+                          <a:solidFill>
+                            <a:srgbClr val="1F2A44"/>
+                          </a:solidFill>
+                          <a:latin typeface="Calibri"/>
+                        </a:rPr>
+                        <a:t>Cost Estimating + Nomad + HEG</a:t>
+                      </a:r>
+                    </a:p>
+                  </a:txBody>
+                  <a:tcPr marL="54864" marR="54864" marT="27432" marB="27432" anchor="ctr">
+                    <a:solidFill>
+                      <a:srgbClr val="FFFFFF"/>
+                    </a:solidFill>
+                  </a:tcPr>
+                </a:tc>
+              </a:tr>
+              <a:tr h="407323">
+                <a:tc>
+                  <a:txBody>
+                    <a:bodyPr/>
+                    <a:lstStyle/>
+                    <a:p>
+                      <a:r>
+                        <a:rPr sz="1000" b="0">
+                          <a:solidFill>
+                            <a:srgbClr val="1F2A44"/>
+                          </a:solidFill>
+                          <a:latin typeface="Calibri"/>
+                        </a:rPr>
+                        <a:t>Station 496 at $363K per relay: compare to two recent EMA relay-replacement actuals; outage-window premium not priced</a:t>
+                      </a:r>
+                    </a:p>
+                  </a:txBody>
+                  <a:tcPr marL="54864" marR="54864" marT="27432" marB="27432" anchor="ctr">
+                    <a:solidFill>
+                      <a:srgbClr val="F2F4F8"/>
+                    </a:solidFill>
+                  </a:tcPr>
+                </a:tc>
+                <a:tc>
+                  <a:txBody>
+                    <a:bodyPr/>
+                    <a:lstStyle/>
+                    <a:p>
+                      <a:r>
+                        <a:rPr sz="1000" b="0">
+                          <a:solidFill>
+                            <a:srgbClr val="1F2A44"/>
+                          </a:solidFill>
+                          <a:latin typeface="Calibri"/>
+                        </a:rPr>
+                        <a:t>Benchmark</a:t>
+                      </a:r>
+                    </a:p>
+                  </a:txBody>
+                  <a:tcPr marL="54864" marR="54864" marT="27432" marB="27432" anchor="ctr">
+                    <a:solidFill>
+                      <a:srgbClr val="F2F4F8"/>
+                    </a:solidFill>
+                  </a:tcPr>
+                </a:tc>
+                <a:tc>
+                  <a:txBody>
+                    <a:bodyPr/>
+                    <a:lstStyle/>
+                    <a:p>
+                      <a:r>
+                        <a:rPr sz="1000" b="0">
+                          <a:solidFill>
+                            <a:srgbClr val="1F2A44"/>
+                          </a:solidFill>
+                          <a:latin typeface="Calibri"/>
+                        </a:rPr>
+                        <a:t>Unknown; $1.8M testing line</a:t>
+                      </a:r>
+                    </a:p>
+                  </a:txBody>
+                  <a:tcPr marL="54864" marR="54864" marT="27432" marB="27432" anchor="ctr">
+                    <a:solidFill>
+                      <a:srgbClr val="F2F4F8"/>
+                    </a:solidFill>
+                  </a:tcPr>
+                </a:tc>
+                <a:tc>
+                  <a:txBody>
+                    <a:bodyPr/>
+                    <a:lstStyle/>
+                    <a:p>
+                      <a:r>
+                        <a:rPr sz="1000" b="0">
+                          <a:solidFill>
+                            <a:srgbClr val="1F2A44"/>
+                          </a:solidFill>
+                          <a:latin typeface="Calibri"/>
+                        </a:rPr>
+                        <a:t>P&amp;C Engineering</a:t>
+                      </a:r>
+                    </a:p>
+                  </a:txBody>
+                  <a:tcPr marL="54864" marR="54864" marT="27432" marB="27432" anchor="ctr">
+                    <a:solidFill>
+                      <a:srgbClr val="F2F4F8"/>
+                    </a:solidFill>
+                  </a:tcPr>
+                </a:tc>
+              </a:tr>
+              <a:tr h="407323">
+                <a:tc>
+                  <a:txBody>
+                    <a:bodyPr/>
+                    <a:lstStyle/>
+                    <a:p>
+                      <a:r>
+                        <a:rPr sz="1000" b="0">
+                          <a:solidFill>
+                            <a:srgbClr val="1F2A44"/>
+                          </a:solidFill>
+                          <a:latin typeface="Calibri"/>
+                        </a:rPr>
+                        <a:t>Spot generation if the BESS misses Dec 2028 (SSF: 2-8 MW) was removed from scope; who carries it?</a:t>
+                      </a:r>
+                    </a:p>
+                  </a:txBody>
+                  <a:tcPr marL="54864" marR="54864" marT="27432" marB="27432" anchor="ctr">
+                    <a:solidFill>
+                      <a:srgbClr val="FFFFFF"/>
+                    </a:solidFill>
+                  </a:tcPr>
+                </a:tc>
+                <a:tc>
+                  <a:txBody>
+                    <a:bodyPr/>
+                    <a:lstStyle/>
+                    <a:p>
+                      <a:r>
+                        <a:rPr sz="1000" b="0">
+                          <a:solidFill>
+                            <a:srgbClr val="1F2A44"/>
+                          </a:solidFill>
+                          <a:latin typeface="Calibri"/>
+                        </a:rPr>
+                        <a:t>Scope / ownership</a:t>
+                      </a:r>
+                    </a:p>
+                  </a:txBody>
+                  <a:tcPr marL="54864" marR="54864" marT="27432" marB="27432" anchor="ctr">
+                    <a:solidFill>
+                      <a:srgbClr val="FFFFFF"/>
+                    </a:solidFill>
+                  </a:tcPr>
+                </a:tc>
+                <a:tc>
+                  <a:txBody>
+                    <a:bodyPr/>
+                    <a:lstStyle/>
+                    <a:p>
+                      <a:r>
+                        <a:rPr sz="1000" b="0">
+                          <a:solidFill>
+                            <a:srgbClr val="1F2A44"/>
+                          </a:solidFill>
+                          <a:latin typeface="Calibri"/>
+                        </a:rPr>
+                        <a:t>Not in project</a:t>
+                      </a:r>
+                    </a:p>
+                  </a:txBody>
+                  <a:tcPr marL="54864" marR="54864" marT="27432" marB="27432" anchor="ctr">
+                    <a:solidFill>
+                      <a:srgbClr val="FFFFFF"/>
+                    </a:solidFill>
+                  </a:tcPr>
+                </a:tc>
+                <a:tc>
+                  <a:txBody>
+                    <a:bodyPr/>
+                    <a:lstStyle/>
+                    <a:p>
+                      <a:r>
+                        <a:rPr sz="1000" b="0">
+                          <a:solidFill>
+                            <a:srgbClr val="1F2A44"/>
+                          </a:solidFill>
+                          <a:latin typeface="Calibri"/>
+                        </a:rPr>
+                        <a:t>System Planning</a:t>
+                      </a:r>
+                    </a:p>
+                  </a:txBody>
+                  <a:tcPr marL="54864" marR="54864" marT="27432" marB="27432" anchor="ctr">
+                    <a:solidFill>
+                      <a:srgbClr val="FFFFFF"/>
+                    </a:solidFill>
+                  </a:tcPr>
+                </a:tc>
+              </a:tr>
+              <a:tr h="407330">
+                <a:tc>
+                  <a:txBody>
+                    <a:bodyPr/>
+                    <a:lstStyle/>
+                    <a:p>
+                      <a:r>
+                        <a:rPr sz="1000" b="0">
+                          <a:solidFill>
+                            <a:srgbClr val="1F2A44"/>
+                          </a:solidFill>
+                          <a:latin typeface="Calibri"/>
+                        </a:rPr>
+                        <a:t>Re-base D-Line 24211 (2023 conceptual $4.8M; HEG take-off larger)</a:t>
+                      </a:r>
+                    </a:p>
+                  </a:txBody>
+                  <a:tcPr marL="54864" marR="54864" marT="27432" marB="27432" anchor="ctr">
+                    <a:solidFill>
+                      <a:srgbClr val="F2F4F8"/>
+                    </a:solidFill>
+                  </a:tcPr>
+                </a:tc>
+                <a:tc>
+                  <a:txBody>
+                    <a:bodyPr/>
+                    <a:lstStyle/>
+                    <a:p>
+                      <a:r>
+                        <a:rPr sz="1000" b="0">
+                          <a:solidFill>
+                            <a:srgbClr val="1F2A44"/>
+                          </a:solidFill>
+                          <a:latin typeface="Calibri"/>
+                        </a:rPr>
+                        <a:t>Estimate</a:t>
+                      </a:r>
+                    </a:p>
+                  </a:txBody>
+                  <a:tcPr marL="54864" marR="54864" marT="27432" marB="27432" anchor="ctr">
+                    <a:solidFill>
+                      <a:srgbClr val="F2F4F8"/>
+                    </a:solidFill>
+                  </a:tcPr>
+                </a:tc>
+                <a:tc>
+                  <a:txBody>
+                    <a:bodyPr/>
+                    <a:lstStyle/>
+                    <a:p>
+                      <a:r>
+                        <a:rPr sz="1000" b="0">
+                          <a:solidFill>
+                            <a:srgbClr val="1F2A44"/>
+                          </a:solidFill>
+                          <a:latin typeface="Calibri"/>
+                        </a:rPr>
+                        <a:t>Unknown</a:t>
+                      </a:r>
+                    </a:p>
+                  </a:txBody>
+                  <a:tcPr marL="54864" marR="54864" marT="27432" marB="27432" anchor="ctr">
+                    <a:solidFill>
+                      <a:srgbClr val="F2F4F8"/>
+                    </a:solidFill>
+                  </a:tcPr>
+                </a:tc>
+                <a:tc>
+                  <a:txBody>
+                    <a:bodyPr/>
+                    <a:lstStyle/>
+                    <a:p>
+                      <a:r>
+                        <a:rPr sz="1000" b="0">
+                          <a:solidFill>
+                            <a:srgbClr val="1F2A44"/>
+                          </a:solidFill>
+                          <a:latin typeface="Calibri"/>
+                        </a:rPr>
+                        <a:t>Distribution Engineering</a:t>
+                      </a:r>
+                    </a:p>
+                  </a:txBody>
+                  <a:tcPr marL="54864" marR="54864" marT="27432" marB="27432" anchor="ctr">
+                    <a:solidFill>
+                      <a:srgbClr val="F2F4F8"/>
+                    </a:solidFill>
+                  </a:tcPr>
+                </a:tc>
+              </a:tr>
+            </a:tbl>
+          </a:graphicData>
+        </a:graphic>
+      </p:graphicFrame>
+      <p:sp>
+        <p:nvSpPr>
+          <p:cNvPr id="8" name="TextBox 7"/>
+          <p:cNvSpPr txBox="1"/>
+          <p:nvPr/>
+        </p:nvSpPr>
+        <p:spPr>
+          <a:xfrm>
+            <a:off x="548640" y="6053328"/>
+            <a:ext cx="11064240" cy="320040"/>
+          </a:xfrm>
+          <a:prstGeom prst="rect">
+            <a:avLst/>
+          </a:prstGeom>
+          <a:noFill/>
+        </p:spPr>
+        <p:txBody>
+          <a:bodyPr wrap="square" lIns="45720" rIns="45720" tIns="27432" bIns="27432" anchor="t">
+            <a:spAutoFit/>
+          </a:bodyPr>
+          <a:lstStyle/>
+          <a:p>
+            <a:pPr algn="l">
+              <a:lnSpc>
+                <a:spcPct val="105000"/>
+              </a:lnSpc>
+              <a:spcAft>
+                <a:spcPts val="400"/>
+              </a:spcAft>
+            </a:pPr>
+            <a:r>
+              <a:rPr sz="1100" b="0" i="0">
+                <a:solidFill>
+                  <a:srgbClr val="6B7280"/>
+                </a:solidFill>
+                <a:latin typeface="Calibri"/>
+              </a:rPr>
+              <a:t>Defensible reductions (~$3M: battery escalation, design-basis confirmations, material risk sized on non-battery material) are conditional on the Haugland reconciliation closing first.</a:t>
+            </a:r>
+          </a:p>
+        </p:txBody>
+      </p:sp>
+    </p:spTree>
+  </p:cSld>
+  <p:clrMapOvr>
+    <a:masterClrMapping/>
+  </p:clrMapOvr>
+</p:sld>
+</file>
+
+<file path=ppt/slides/slide38.xml><?xml version="1.0" encoding="utf-8"?>
+<p:sld xmlns:a="http://schemas.openxmlformats.org/drawingml/2006/main" xmlns:p="http://schemas.openxmlformats.org/presentationml/2006/main" xmlns:r="http://schemas.openxmlformats.org/officeDocument/2006/relationships">
+  <p:cSld>
+    <p:spTree>
+      <p:nvGrpSpPr>
+        <p:cNvPr id="1" name=""/>
+        <p:cNvGrpSpPr/>
+        <p:nvPr/>
+      </p:nvGrpSpPr>
+      <p:grpSpPr/>
+      <p:sp>
+        <p:nvSpPr>
+          <p:cNvPr id="2" name="Rectangle 1"/>
+          <p:cNvSpPr/>
+          <p:nvPr/>
+        </p:nvSpPr>
+        <p:spPr>
+          <a:xfrm>
+            <a:off x="0" y="0"/>
+            <a:ext cx="12191695" cy="6858000"/>
+          </a:xfrm>
+          <a:prstGeom prst="rect">
+            <a:avLst/>
+          </a:prstGeom>
+          <a:solidFill>
+            <a:srgbClr val="001E60"/>
+          </a:solidFill>
+          <a:ln>
+            <a:noFill/>
+          </a:ln>
+          <a:effectLst/>
+        </p:spPr>
+        <p:style>
+          <a:lnRef idx="1">
+            <a:schemeClr val="accent1"/>
+          </a:lnRef>
+          <a:fillRef idx="3">
+            <a:schemeClr val="accent1"/>
+          </a:fillRef>
+          <a:effectRef idx="2">
+            <a:schemeClr val="accent1"/>
+          </a:effectRef>
+          <a:fontRef idx="minor">
+            <a:schemeClr val="lt1"/>
+          </a:fontRef>
+        </p:style>
+        <p:txBody>
+          <a:bodyPr rtlCol="0" anchor="ctr"/>
+          <a:lstStyle/>
+          <a:p>
+            <a:pPr algn="ctr"/>
+          </a:p>
+        </p:txBody>
+      </p:sp>
+      <p:sp>
+        <p:nvSpPr>
+          <p:cNvPr id="3" name="TextBox 2"/>
+          <p:cNvSpPr txBox="1"/>
+          <p:nvPr/>
+        </p:nvSpPr>
+        <p:spPr>
+          <a:xfrm>
+            <a:off x="548640" y="320040"/>
+            <a:ext cx="9144000" cy="320040"/>
+          </a:xfrm>
+          <a:prstGeom prst="rect">
+            <a:avLst/>
+          </a:prstGeom>
+          <a:noFill/>
+        </p:spPr>
+        <p:txBody>
+          <a:bodyPr wrap="square" lIns="45720" rIns="45720" tIns="27432" bIns="27432" anchor="t">
+            <a:spAutoFit/>
+          </a:bodyPr>
+          <a:lstStyle/>
+          <a:p>
+            <a:pPr algn="l">
+              <a:lnSpc>
+                <a:spcPct val="105000"/>
+              </a:lnSpc>
+              <a:spcAft>
+                <a:spcPts val="400"/>
+              </a:spcAft>
+            </a:pPr>
+            <a:r>
+              <a:rPr sz="1200" b="1" i="0">
+                <a:solidFill>
+                  <a:srgbClr val="FFC72C"/>
+                </a:solidFill>
+                <a:latin typeface="Calibri"/>
+              </a:rPr>
+              <a:t>CONTRIBUTIONS</a:t>
+            </a:r>
+          </a:p>
+        </p:txBody>
+      </p:sp>
+      <p:sp>
+        <p:nvSpPr>
+          <p:cNvPr id="4" name="TextBox 3"/>
+          <p:cNvSpPr txBox="1"/>
+          <p:nvPr/>
+        </p:nvSpPr>
+        <p:spPr>
+          <a:xfrm>
+            <a:off x="548640" y="640080"/>
+            <a:ext cx="11064240" cy="914400"/>
+          </a:xfrm>
+          <a:prstGeom prst="rect">
+            <a:avLst/>
+          </a:prstGeom>
+          <a:noFill/>
+        </p:spPr>
+        <p:txBody>
+          <a:bodyPr wrap="square" lIns="45720" rIns="45720" tIns="27432" bIns="27432" anchor="t">
+            <a:spAutoFit/>
+          </a:bodyPr>
+          <a:lstStyle/>
+          <a:p>
+            <a:pPr algn="l">
+              <a:lnSpc>
+                <a:spcPct val="105000"/>
+              </a:lnSpc>
+              <a:spcAft>
+                <a:spcPts val="400"/>
+              </a:spcAft>
+            </a:pPr>
+            <a:r>
+              <a:rPr sz="3000" b="1" i="0">
+                <a:solidFill>
+                  <a:srgbClr val="FFFFFF"/>
+                </a:solidFill>
+                <a:latin typeface="Georgia"/>
+              </a:rPr>
+              <a:t>A $12 million battery is a $57 million project, and now every dollar between them has a name</a:t>
+            </a:r>
+          </a:p>
+        </p:txBody>
+      </p:sp>
+      <p:sp>
+        <p:nvSpPr>
+          <p:cNvPr id="5" name="TextBox 4"/>
+          <p:cNvSpPr txBox="1"/>
+          <p:nvPr/>
+        </p:nvSpPr>
+        <p:spPr>
+          <a:xfrm>
+            <a:off x="548640" y="1737360"/>
+            <a:ext cx="5577840" cy="4480560"/>
+          </a:xfrm>
+          <a:prstGeom prst="rect">
+            <a:avLst/>
+          </a:prstGeom>
+          <a:noFill/>
+        </p:spPr>
+        <p:txBody>
+          <a:bodyPr wrap="square" lIns="45720">
+            <a:spAutoFit/>
+          </a:bodyPr>
+          <a:lstStyle/>
+          <a:p>
+            <a:pPr>
+              <a:lnSpc>
+                <a:spcPct val="105000"/>
+              </a:lnSpc>
+              <a:spcAft>
+                <a:spcPts val="900"/>
+              </a:spcAft>
+            </a:pPr>
+            <a:r>
+              <a:rPr sz="1450">
+                <a:solidFill>
+                  <a:srgbClr val="FFC72C"/>
+                </a:solidFill>
+                <a:latin typeface="Calibri"/>
+              </a:rPr>
+              <a:t>▪  </a:t>
+            </a:r>
+            <a:r>
+              <a:rPr b="1" sz="1450">
+                <a:solidFill>
+                  <a:srgbClr val="FFFFFF"/>
+                </a:solidFill>
+                <a:latin typeface="Calibri"/>
+              </a:rPr>
+              <a:t>Where the money sits. </a:t>
+            </a:r>
+            <a:r>
+              <a:rPr sz="1450">
+                <a:solidFill>
+                  <a:srgbClr val="FFFFFF"/>
+                </a:solidFill>
+                <a:latin typeface="Calibri"/>
+              </a:rPr>
+              <a:t>292 lines in thirteen layers, reconciled to the penny: battery contract 21%, station and interconnection 32% loaded, owner scope 19%, loaders 41%.</a:t>
+            </a:r>
+          </a:p>
+          <a:p>
+            <a:pPr>
+              <a:lnSpc>
+                <a:spcPct val="105000"/>
+              </a:lnSpc>
+              <a:spcAft>
+                <a:spcPts val="900"/>
+              </a:spcAft>
+            </a:pPr>
+            <a:r>
+              <a:rPr sz="1450">
+                <a:solidFill>
+                  <a:srgbClr val="FFC72C"/>
+                </a:solidFill>
+                <a:latin typeface="Calibri"/>
+              </a:rPr>
+              <a:t>▪  </a:t>
+            </a:r>
+            <a:r>
+              <a:rPr b="1" sz="1450">
+                <a:solidFill>
+                  <a:srgbClr val="FFFFFF"/>
+                </a:solidFill>
+                <a:latin typeface="Calibri"/>
+              </a:rPr>
+              <a:t>Unit cost at every boundary. </a:t>
+            </a:r>
+            <a:r>
+              <a:rPr sz="1450">
+                <a:solidFill>
+                  <a:srgbClr val="FFFFFF"/>
+                </a:solidFill>
+                <a:latin typeface="Calibri"/>
+              </a:rPr>
+              <a:t>$605/kWh vendor, $833 installed, $1,483 station direct, $2,862 project. Each benchmark read against the row that shares its definition.</a:t>
+            </a:r>
+          </a:p>
+          <a:p>
+            <a:pPr>
+              <a:lnSpc>
+                <a:spcPct val="105000"/>
+              </a:lnSpc>
+              <a:spcAft>
+                <a:spcPts val="900"/>
+              </a:spcAft>
+            </a:pPr>
+            <a:r>
+              <a:rPr sz="1450">
+                <a:solidFill>
+                  <a:srgbClr val="FFC72C"/>
+                </a:solidFill>
+                <a:latin typeface="Calibri"/>
+              </a:rPr>
+              <a:t>▪  </a:t>
+            </a:r>
+            <a:r>
+              <a:rPr b="1" sz="1450">
+                <a:solidFill>
+                  <a:srgbClr val="FFFFFF"/>
+                </a:solidFill>
+                <a:latin typeface="Calibri"/>
+              </a:rPr>
+              <a:t>How it changed. </a:t>
+            </a:r>
+            <a:r>
+              <a:rPr sz="1450">
+                <a:solidFill>
+                  <a:srgbClr val="FFFFFF"/>
+                </a:solidFill>
+                <a:latin typeface="Calibri"/>
+              </a:rPr>
+              <a:t>The battery got cheaper; the project got real. $43.9M to $57.2M, five in-service dates, documented from the ESF revisions and the email record.</a:t>
+            </a:r>
+          </a:p>
+          <a:p>
+            <a:pPr>
+              <a:lnSpc>
+                <a:spcPct val="105000"/>
+              </a:lnSpc>
+              <a:spcAft>
+                <a:spcPts val="900"/>
+              </a:spcAft>
+            </a:pPr>
+            <a:r>
+              <a:rPr sz="1450">
+                <a:solidFill>
+                  <a:srgbClr val="FFC72C"/>
+                </a:solidFill>
+                <a:latin typeface="Calibri"/>
+              </a:rPr>
+              <a:t>▪  </a:t>
+            </a:r>
+            <a:r>
+              <a:rPr b="1" sz="1450">
+                <a:solidFill>
+                  <a:srgbClr val="FFFFFF"/>
+                </a:solidFill>
+                <a:latin typeface="Calibri"/>
+              </a:rPr>
+              <a:t>Can it be defended. </a:t>
+            </a:r>
+            <a:r>
+              <a:rPr sz="1450">
+                <a:solidFill>
+                  <a:srgbClr val="FFFFFF"/>
+                </a:solidFill>
+                <a:latin typeface="Calibri"/>
+              </a:rPr>
+              <a:t>Against 35 public projects at or below 100 MWh the station-direct cost is at the 77% percentile and the approval level above every member; a regression on 53 projects brackets a 2028 build at $571 to $1,640/kWh; six price curves re-base the class within a tenth of each other. Three kill shots, seven stress tests, a pre-mortem, ten reconciliations.</a:t>
+            </a:r>
+          </a:p>
+        </p:txBody>
+      </p:sp>
+      <p:sp>
+        <p:nvSpPr>
+          <p:cNvPr id="6" name="Rectangle 5"/>
+          <p:cNvSpPr/>
+          <p:nvPr/>
+        </p:nvSpPr>
+        <p:spPr>
+          <a:xfrm>
+            <a:off x="6400800" y="1737360"/>
+            <a:ext cx="5257800" cy="4480560"/>
+          </a:xfrm>
+          <a:prstGeom prst="rect">
+            <a:avLst/>
+          </a:prstGeom>
+          <a:solidFill>
+            <a:srgbClr val="0B2A72"/>
+          </a:solidFill>
+          <a:ln>
+            <a:noFill/>
+          </a:ln>
+          <a:effectLst/>
+        </p:spPr>
+        <p:style>
+          <a:lnRef idx="1">
+            <a:schemeClr val="accent1"/>
+          </a:lnRef>
+          <a:fillRef idx="3">
+            <a:schemeClr val="accent1"/>
+          </a:fillRef>
+          <a:effectRef idx="2">
+            <a:schemeClr val="accent1"/>
+          </a:effectRef>
+          <a:fontRef idx="minor">
+            <a:schemeClr val="lt1"/>
+          </a:fontRef>
+        </p:style>
+        <p:txBody>
+          <a:bodyPr rtlCol="0" anchor="ctr"/>
+          <a:lstStyle/>
+          <a:p>
+            <a:pPr algn="ctr"/>
+          </a:p>
+        </p:txBody>
+      </p:sp>
+      <p:sp>
+        <p:nvSpPr>
+          <p:cNvPr id="7" name="TextBox 6"/>
+          <p:cNvSpPr txBox="1"/>
+          <p:nvPr/>
+        </p:nvSpPr>
+        <p:spPr>
+          <a:xfrm>
+            <a:off x="6583680" y="1874519"/>
+            <a:ext cx="4937760" cy="365760"/>
+          </a:xfrm>
+          <a:prstGeom prst="rect">
+            <a:avLst/>
+          </a:prstGeom>
+          <a:noFill/>
+        </p:spPr>
+        <p:txBody>
+          <a:bodyPr wrap="square" lIns="45720" rIns="45720" tIns="27432" bIns="27432" anchor="t">
+            <a:spAutoFit/>
+          </a:bodyPr>
+          <a:lstStyle/>
+          <a:p>
+            <a:pPr algn="l">
+              <a:lnSpc>
+                <a:spcPct val="105000"/>
+              </a:lnSpc>
+              <a:spcAft>
+                <a:spcPts val="400"/>
+              </a:spcAft>
+            </a:pPr>
+            <a:r>
+              <a:rPr sz="1600" b="1" i="0">
+                <a:solidFill>
+                  <a:srgbClr val="FFC72C"/>
+                </a:solidFill>
+                <a:latin typeface="Georgia"/>
+              </a:rPr>
+              <a:t>Decisions requested</a:t>
+            </a:r>
+          </a:p>
+        </p:txBody>
+      </p:sp>
+      <p:sp>
+        <p:nvSpPr>
+          <p:cNvPr id="8" name="TextBox 7"/>
+          <p:cNvSpPr txBox="1"/>
+          <p:nvPr/>
+        </p:nvSpPr>
+        <p:spPr>
+          <a:xfrm>
+            <a:off x="6583680" y="2286000"/>
+            <a:ext cx="4937760" cy="3840480"/>
+          </a:xfrm>
+          <a:prstGeom prst="rect">
+            <a:avLst/>
+          </a:prstGeom>
+          <a:noFill/>
+        </p:spPr>
+        <p:txBody>
+          <a:bodyPr wrap="square" lIns="45720">
+            <a:spAutoFit/>
+          </a:bodyPr>
+          <a:lstStyle/>
+          <a:p>
+            <a:pPr>
+              <a:lnSpc>
+                <a:spcPct val="105000"/>
+              </a:lnSpc>
+              <a:spcAft>
+                <a:spcPts val="700"/>
+              </a:spcAft>
+            </a:pPr>
+            <a:r>
+              <a:rPr sz="1350">
+                <a:solidFill>
+                  <a:srgbClr val="FFC72C"/>
+                </a:solidFill>
+                <a:latin typeface="Calibri"/>
+              </a:rPr>
+              <a:t>▪  </a:t>
+            </a:r>
+            <a:r>
+              <a:rPr sz="1350">
+                <a:solidFill>
+                  <a:srgbClr val="FFFFFF"/>
+                </a:solidFill>
+                <a:latin typeface="Calibri"/>
+              </a:rPr>
+              <a:t>Adopt the layered view (battery, station, interconnection, owner scope, loaders) as the standard presentation of this project, internally and to regulators.</a:t>
+            </a:r>
+          </a:p>
+          <a:p>
+            <a:pPr>
+              <a:lnSpc>
+                <a:spcPct val="105000"/>
+              </a:lnSpc>
+              <a:spcAft>
+                <a:spcPts val="700"/>
+              </a:spcAft>
+            </a:pPr>
+            <a:r>
+              <a:rPr sz="1350">
+                <a:solidFill>
+                  <a:srgbClr val="FFC72C"/>
+                </a:solidFill>
+                <a:latin typeface="Calibri"/>
+              </a:rPr>
+              <a:t>▪  </a:t>
+            </a:r>
+            <a:r>
+              <a:rPr sz="1350">
+                <a:solidFill>
+                  <a:srgbClr val="FFFFFF"/>
+                </a:solidFill>
+                <a:latin typeface="Calibri"/>
+              </a:rPr>
+              <a:t>Make the Haugland-to-Rev 3 reconciliation, the geotech and the hazard mitigation analysis preconditions of the November PAF; present at Class 4 until they close.</a:t>
+            </a:r>
+          </a:p>
+          <a:p>
+            <a:pPr>
+              <a:lnSpc>
+                <a:spcPct val="105000"/>
+              </a:lnSpc>
+              <a:spcAft>
+                <a:spcPts val="700"/>
+              </a:spcAft>
+            </a:pPr>
+            <a:r>
+              <a:rPr sz="1350">
+                <a:solidFill>
+                  <a:srgbClr val="FFC72C"/>
+                </a:solidFill>
+                <a:latin typeface="Calibri"/>
+              </a:rPr>
+              <a:t>▪  </a:t>
+            </a:r>
+            <a:r>
+              <a:rPr sz="1350">
+                <a:solidFill>
+                  <a:srgbClr val="FFFFFF"/>
+                </a:solidFill>
+                <a:latin typeface="Calibri"/>
+              </a:rPr>
+              <a:t>Assign owners to the siting-chain float and the five early-warning indicators.</a:t>
+            </a:r>
+          </a:p>
+          <a:p>
+            <a:pPr>
+              <a:lnSpc>
+                <a:spcPct val="105000"/>
+              </a:lnSpc>
+              <a:spcAft>
+                <a:spcPts val="700"/>
+              </a:spcAft>
+            </a:pPr>
+            <a:r>
+              <a:rPr sz="1350">
+                <a:solidFill>
+                  <a:srgbClr val="FFC72C"/>
+                </a:solidFill>
+                <a:latin typeface="Calibri"/>
+              </a:rPr>
+              <a:t>▪  </a:t>
+            </a:r>
+            <a:r>
+              <a:rPr sz="1350">
+                <a:solidFill>
+                  <a:srgbClr val="FFFFFF"/>
+                </a:solidFill>
+                <a:latin typeface="Calibri"/>
+              </a:rPr>
+              <a:t>Open the Section 48E credit question with Tax now: eligible basis, the FEOC test on the Voyager cells, and the normalization election.</a:t>
+            </a:r>
+          </a:p>
+          <a:p>
+            <a:pPr>
+              <a:lnSpc>
+                <a:spcPct val="105000"/>
+              </a:lnSpc>
+              <a:spcAft>
+                <a:spcPts val="700"/>
+              </a:spcAft>
+            </a:pPr>
+            <a:r>
+              <a:rPr sz="1350">
+                <a:solidFill>
+                  <a:srgbClr val="FFC72C"/>
+                </a:solidFill>
+                <a:latin typeface="Calibri"/>
+              </a:rPr>
+              <a:t>▪  </a:t>
+            </a:r>
+            <a:r>
+              <a:rPr sz="1350">
+                <a:solidFill>
+                  <a:srgbClr val="FFFFFF"/>
+                </a:solidFill>
+                <a:latin typeface="Calibri"/>
+              </a:rPr>
+              <a:t>Adopt the containment plan: a $1,200 per kWh station-direct target at IFC, five gates with owners, competitive lump-sum pricing of the station and civil scope, and a monthly cost-containment report.</a:t>
+            </a:r>
+          </a:p>
+        </p:txBody>
+      </p:sp>
+      <p:sp>
+        <p:nvSpPr>
+          <p:cNvPr id="9" name="TextBox 8"/>
+          <p:cNvSpPr txBox="1"/>
+          <p:nvPr/>
+        </p:nvSpPr>
+        <p:spPr>
+          <a:xfrm>
+            <a:off x="548640" y="6419088"/>
+            <a:ext cx="8229600" cy="274320"/>
+          </a:xfrm>
+          <a:prstGeom prst="rect">
+            <a:avLst/>
+          </a:prstGeom>
+          <a:noFill/>
+        </p:spPr>
+        <p:txBody>
+          <a:bodyPr wrap="square" lIns="45720" rIns="45720" tIns="27432" bIns="27432" anchor="t">
+            <a:spAutoFit/>
+          </a:bodyPr>
+          <a:lstStyle/>
+          <a:p>
+            <a:pPr algn="l">
+              <a:lnSpc>
+                <a:spcPct val="105000"/>
+              </a:lnSpc>
+              <a:spcAft>
+                <a:spcPts val="400"/>
+              </a:spcAft>
+            </a:pPr>
+            <a:r>
+              <a:rPr sz="1000" b="0" i="0">
+                <a:solidFill>
+                  <a:srgbClr val="C9D1E0"/>
+                </a:solidFill>
+                <a:latin typeface="Calibri"/>
+              </a:rPr>
+              <a:t>EstimatingCoE | Eversource Energy | Stewards of Affordability</a:t>
+            </a:r>
+          </a:p>
+        </p:txBody>
+      </p:sp>
+    </p:spTree>
+  </p:cSld>
+  <p:clrMapOvr>
+    <a:masterClrMapping/>
+  </p:clrMapOvr>
+</p:sld>
+</file>
+
+<file path=ppt/slides/slide39.xml><?xml version="1.0" encoding="utf-8"?>
+<p:sld xmlns:a="http://schemas.openxmlformats.org/drawingml/2006/main" xmlns:p="http://schemas.openxmlformats.org/presentationml/2006/main" xmlns:r="http://schemas.openxmlformats.org/officeDocument/2006/relationships">
+  <p:cSld>
+    <p:spTree>
+      <p:nvGrpSpPr>
+        <p:cNvPr id="1" name=""/>
+        <p:cNvGrpSpPr/>
+        <p:nvPr/>
+      </p:nvGrpSpPr>
+      <p:grpSpPr/>
+      <p:sp>
+        <p:nvSpPr>
+          <p:cNvPr id="2" name="Rectangle 1"/>
+          <p:cNvSpPr/>
+          <p:nvPr/>
+        </p:nvSpPr>
+        <p:spPr>
+          <a:xfrm>
+            <a:off x="0" y="0"/>
+            <a:ext cx="12191695" cy="6858000"/>
+          </a:xfrm>
+          <a:prstGeom prst="rect">
+            <a:avLst/>
+          </a:prstGeom>
+          <a:solidFill>
+            <a:srgbClr val="FFFFFF"/>
+          </a:solidFill>
+          <a:ln>
+            <a:noFill/>
+          </a:ln>
+          <a:effectLst/>
+        </p:spPr>
+        <p:style>
+          <a:lnRef idx="1">
+            <a:schemeClr val="accent1"/>
+          </a:lnRef>
+          <a:fillRef idx="3">
+            <a:schemeClr val="accent1"/>
+          </a:fillRef>
+          <a:effectRef idx="2">
+            <a:schemeClr val="accent1"/>
+          </a:effectRef>
+          <a:fontRef idx="minor">
+            <a:schemeClr val="lt1"/>
+          </a:fontRef>
+        </p:style>
+        <p:txBody>
+          <a:bodyPr rtlCol="0" anchor="ctr"/>
+          <a:lstStyle/>
+          <a:p>
+            <a:pPr algn="ctr"/>
+          </a:p>
+        </p:txBody>
+      </p:sp>
+      <p:sp>
+        <p:nvSpPr>
+          <p:cNvPr id="3" name="TextBox 2"/>
+          <p:cNvSpPr txBox="1"/>
+          <p:nvPr/>
+        </p:nvSpPr>
+        <p:spPr>
+          <a:xfrm>
+            <a:off x="548640" y="256032"/>
+            <a:ext cx="11064240" cy="274320"/>
+          </a:xfrm>
+          <a:prstGeom prst="rect">
+            <a:avLst/>
+          </a:prstGeom>
+          <a:noFill/>
+        </p:spPr>
+        <p:txBody>
+          <a:bodyPr wrap="square" lIns="45720" rIns="45720" tIns="27432" bIns="27432" anchor="t">
+            <a:spAutoFit/>
+          </a:bodyPr>
+          <a:lstStyle/>
+          <a:p>
+            <a:pPr algn="l">
+              <a:lnSpc>
+                <a:spcPct val="105000"/>
+              </a:lnSpc>
+              <a:spcAft>
+                <a:spcPts val="400"/>
+              </a:spcAft>
+            </a:pPr>
+            <a:r>
+              <a:rPr sz="1100" b="1" i="0">
+                <a:solidFill>
+                  <a:srgbClr val="6E1F2E"/>
+                </a:solidFill>
+                <a:latin typeface="Calibri"/>
+              </a:rPr>
+              <a:t>APPENDIX A. REFERENCE CLASS (PUBLIC DISCLOSURES, NOMINAL $/KWH)</a:t>
+            </a:r>
+          </a:p>
+        </p:txBody>
+      </p:sp>
+      <p:sp>
+        <p:nvSpPr>
+          <p:cNvPr id="4" name="TextBox 3"/>
+          <p:cNvSpPr txBox="1"/>
+          <p:nvPr/>
+        </p:nvSpPr>
+        <p:spPr>
+          <a:xfrm>
+            <a:off x="548640" y="475488"/>
+            <a:ext cx="11064240" cy="868680"/>
+          </a:xfrm>
+          <a:prstGeom prst="rect">
+            <a:avLst/>
+          </a:prstGeom>
+          <a:noFill/>
+        </p:spPr>
+        <p:txBody>
+          <a:bodyPr wrap="square" lIns="45720" rIns="45720" tIns="27432" bIns="27432" anchor="t">
+            <a:spAutoFit/>
+          </a:bodyPr>
+          <a:lstStyle/>
+          <a:p>
+            <a:pPr algn="l">
+              <a:lnSpc>
+                <a:spcPct val="100000"/>
+              </a:lnSpc>
+              <a:spcAft>
+                <a:spcPts val="400"/>
+              </a:spcAft>
+            </a:pPr>
+            <a:r>
+              <a:rPr sz="2300" b="1" i="0">
+                <a:solidFill>
+                  <a:srgbClr val="001E60"/>
+                </a:solidFill>
+                <a:latin typeface="Georgia"/>
+              </a:rPr>
+              <a:t>35 built projects at or below 100 MWh, utility- and developer-owned: where Hyde Park sits</a:t>
+            </a:r>
+          </a:p>
+        </p:txBody>
+      </p:sp>
+      <p:sp>
+        <p:nvSpPr>
+          <p:cNvPr id="5" name="TextBox 4"/>
+          <p:cNvSpPr txBox="1"/>
+          <p:nvPr/>
+        </p:nvSpPr>
+        <p:spPr>
+          <a:xfrm>
+            <a:off x="548640" y="6419088"/>
+            <a:ext cx="8229600" cy="274320"/>
+          </a:xfrm>
+          <a:prstGeom prst="rect">
+            <a:avLst/>
+          </a:prstGeom>
+          <a:noFill/>
+        </p:spPr>
+        <p:txBody>
+          <a:bodyPr wrap="square" lIns="45720" rIns="45720" tIns="27432" bIns="27432" anchor="t">
+            <a:spAutoFit/>
+          </a:bodyPr>
+          <a:lstStyle/>
+          <a:p>
+            <a:pPr algn="l">
+              <a:lnSpc>
+                <a:spcPct val="105000"/>
+              </a:lnSpc>
+              <a:spcAft>
+                <a:spcPts val="400"/>
+              </a:spcAft>
+            </a:pPr>
+            <a:r>
+              <a:rPr sz="1000" b="0" i="0">
+                <a:solidFill>
+                  <a:srgbClr val="6B7280"/>
+                </a:solidFill>
+                <a:latin typeface="Calibri"/>
+              </a:rPr>
+              <a:t>EstimatingCoE | Eversource Energy | Stewards of Affordability</a:t>
+            </a:r>
+          </a:p>
+        </p:txBody>
+      </p:sp>
+      <p:sp>
+        <p:nvSpPr>
+          <p:cNvPr id="6" name="TextBox 5"/>
+          <p:cNvSpPr txBox="1"/>
+          <p:nvPr/>
+        </p:nvSpPr>
+        <p:spPr>
+          <a:xfrm>
+            <a:off x="10972800" y="6419088"/>
+            <a:ext cx="685800" cy="274320"/>
+          </a:xfrm>
+          <a:prstGeom prst="rect">
+            <a:avLst/>
+          </a:prstGeom>
+          <a:noFill/>
+        </p:spPr>
+        <p:txBody>
+          <a:bodyPr wrap="square" lIns="45720" rIns="45720" tIns="27432" bIns="27432" anchor="t">
+            <a:spAutoFit/>
+          </a:bodyPr>
+          <a:lstStyle/>
+          <a:p>
+            <a:pPr algn="r">
+              <a:lnSpc>
+                <a:spcPct val="105000"/>
+              </a:lnSpc>
+              <a:spcAft>
+                <a:spcPts val="400"/>
+              </a:spcAft>
+            </a:pPr>
+            <a:r>
+              <a:rPr sz="1000" b="0" i="0">
+                <a:solidFill>
+                  <a:srgbClr val="6B7280"/>
+                </a:solidFill>
+                <a:latin typeface="Calibri"/>
+              </a:rPr>
+              <a:t>38</a:t>
+            </a:r>
+          </a:p>
+        </p:txBody>
+      </p:sp>
+      <p:pic>
+        <p:nvPicPr>
+          <p:cNvPr id="7" name="Picture 6" descr="stats_refclass.png"/>
+          <p:cNvPicPr>
+            <a:picLocks noChangeAspect="1"/>
+          </p:cNvPicPr>
+          <p:nvPr/>
+        </p:nvPicPr>
+        <p:blipFill>
+          <a:blip r:embed="rId2"/>
+          <a:stretch>
+            <a:fillRect/>
+          </a:stretch>
+        </p:blipFill>
+        <p:spPr>
+          <a:xfrm>
+            <a:off x="457200" y="1371600"/>
+            <a:ext cx="6820747" cy="4846320"/>
+          </a:xfrm>
+          <a:prstGeom prst="rect">
+            <a:avLst/>
+          </a:prstGeom>
+        </p:spPr>
+      </p:pic>
+      <p:sp>
+        <p:nvSpPr>
+          <p:cNvPr id="8" name="TextBox 7"/>
+          <p:cNvSpPr txBox="1"/>
+          <p:nvPr/>
+        </p:nvSpPr>
+        <p:spPr>
+          <a:xfrm>
+            <a:off x="7863840" y="1417320"/>
+            <a:ext cx="3840480" cy="4846320"/>
+          </a:xfrm>
+          <a:prstGeom prst="rect">
+            <a:avLst/>
+          </a:prstGeom>
+          <a:noFill/>
+        </p:spPr>
+        <p:txBody>
+          <a:bodyPr wrap="square" lIns="45720">
+            <a:spAutoFit/>
+          </a:bodyPr>
+          <a:lstStyle/>
+          <a:p>
+            <a:pPr>
+              <a:lnSpc>
+                <a:spcPct val="105000"/>
+              </a:lnSpc>
+              <a:spcAft>
+                <a:spcPts val="300"/>
+              </a:spcAft>
+            </a:pPr>
+            <a:r>
+              <a:rPr sz="1000">
+                <a:solidFill>
+                  <a:srgbClr val="FFC72C"/>
+                </a:solidFill>
+                <a:latin typeface="Calibri"/>
+              </a:rPr>
+              <a:t>▪  </a:t>
+            </a:r>
+            <a:r>
+              <a:rPr b="1" sz="1000">
+                <a:solidFill>
+                  <a:srgbClr val="1F2A44"/>
+                </a:solidFill>
+                <a:latin typeface="Calibri"/>
+              </a:rPr>
+              <a:t>Median </a:t>
+            </a:r>
+            <a:r>
+              <a:rPr sz="1000">
+                <a:solidFill>
+                  <a:srgbClr val="1F2A44"/>
+                </a:solidFill>
+                <a:latin typeface="Calibri"/>
+              </a:rPr>
+              <a:t>$750/kWh; interquartile $556 to $1,275. Utility-owned subclass (25): median $1,235.</a:t>
+            </a:r>
+          </a:p>
+          <a:p>
+            <a:pPr>
+              <a:lnSpc>
+                <a:spcPct val="105000"/>
+              </a:lnSpc>
+              <a:spcAft>
+                <a:spcPts val="300"/>
+              </a:spcAft>
+            </a:pPr>
+            <a:r>
+              <a:rPr sz="1000">
+                <a:solidFill>
+                  <a:srgbClr val="FFC72C"/>
+                </a:solidFill>
+                <a:latin typeface="Calibri"/>
+              </a:rPr>
+              <a:t>▪  </a:t>
+            </a:r>
+            <a:r>
+              <a:rPr b="1" sz="1000">
+                <a:solidFill>
+                  <a:srgbClr val="1F2A44"/>
+                </a:solidFill>
+                <a:latin typeface="Calibri"/>
+              </a:rPr>
+              <a:t>Hyde Park battery installed, $833: </a:t>
+            </a:r>
+            <a:r>
+              <a:rPr sz="1000">
+                <a:solidFill>
+                  <a:srgbClr val="1F2A44"/>
+                </a:solidFill>
+                <a:latin typeface="Calibri"/>
+              </a:rPr>
+              <a:t>57% percentile.</a:t>
+            </a:r>
+          </a:p>
+          <a:p>
+            <a:pPr>
+              <a:lnSpc>
+                <a:spcPct val="105000"/>
+              </a:lnSpc>
+              <a:spcAft>
+                <a:spcPts val="300"/>
+              </a:spcAft>
+            </a:pPr>
+            <a:r>
+              <a:rPr sz="1000">
+                <a:solidFill>
+                  <a:srgbClr val="FFC72C"/>
+                </a:solidFill>
+                <a:latin typeface="Calibri"/>
+              </a:rPr>
+              <a:t>▪  </a:t>
+            </a:r>
+            <a:r>
+              <a:rPr b="1" sz="1000">
+                <a:solidFill>
+                  <a:srgbClr val="1F2A44"/>
+                </a:solidFill>
+                <a:latin typeface="Calibri"/>
+              </a:rPr>
+              <a:t>Station complete, direct, $1,483: </a:t>
+            </a:r>
+            <a:r>
+              <a:rPr sz="1000">
+                <a:solidFill>
+                  <a:srgbClr val="1F2A44"/>
+                </a:solidFill>
+                <a:latin typeface="Calibri"/>
+              </a:rPr>
+              <a:t>77% percentile (68% in the utility subclass), beside Fairhaven ($1,659 actual, 2023), Chateaugay ($1,490, 2023) and Provincetown ($1,289 actual, 2022).</a:t>
+            </a:r>
+          </a:p>
+          <a:p>
+            <a:pPr>
+              <a:lnSpc>
+                <a:spcPct val="105000"/>
+              </a:lnSpc>
+              <a:spcAft>
+                <a:spcPts val="300"/>
+              </a:spcAft>
+            </a:pPr>
+            <a:r>
+              <a:rPr sz="1000">
+                <a:solidFill>
+                  <a:srgbClr val="FFC72C"/>
+                </a:solidFill>
+                <a:latin typeface="Calibri"/>
+              </a:rPr>
+              <a:t>▪  </a:t>
+            </a:r>
+            <a:r>
+              <a:rPr b="1" sz="1000">
+                <a:solidFill>
+                  <a:srgbClr val="1F2A44"/>
+                </a:solidFill>
+                <a:latin typeface="Calibri"/>
+              </a:rPr>
+              <a:t>Approval level, $2,862: </a:t>
+            </a:r>
+            <a:r>
+              <a:rPr sz="1000">
+                <a:solidFill>
+                  <a:srgbClr val="1F2A44"/>
+                </a:solidFill>
+                <a:latin typeface="Calibri"/>
+              </a:rPr>
+              <a:t>above every member. The loaders ($23.7M) and the two interconnection scopes are what the comparables do not carry.</a:t>
+            </a:r>
+          </a:p>
+          <a:p>
+            <a:pPr>
+              <a:lnSpc>
+                <a:spcPct val="105000"/>
+              </a:lnSpc>
+              <a:spcAft>
+                <a:spcPts val="300"/>
+              </a:spcAft>
+            </a:pPr>
+            <a:r>
+              <a:rPr sz="1000">
+                <a:solidFill>
+                  <a:srgbClr val="FFC72C"/>
+                </a:solidFill>
+                <a:latin typeface="Calibri"/>
+              </a:rPr>
+              <a:t>▪  </a:t>
+            </a:r>
+            <a:r>
+              <a:rPr b="1" sz="1000">
+                <a:solidFill>
+                  <a:srgbClr val="1F2A44"/>
+                </a:solidFill>
+                <a:latin typeface="Calibri"/>
+              </a:rPr>
+              <a:t>Re-based to 2026 dollars (slides 12 and 14 to 18): </a:t>
+            </a:r>
+            <a:r>
+              <a:rPr sz="1000">
+                <a:solidFill>
+                  <a:srgbClr val="1F2A44"/>
+                </a:solidFill>
+                <a:latin typeface="Calibri"/>
+              </a:rPr>
+              <a:t>median $742 at the installed index, $816 to $737 across 30 to 50% anchor battery share (2024 basis, back-cast to each project's year).</a:t>
+            </a:r>
+          </a:p>
+          <a:p>
+            <a:pPr>
+              <a:lnSpc>
+                <a:spcPct val="105000"/>
+              </a:lnSpc>
+              <a:spcAft>
+                <a:spcPts val="300"/>
+              </a:spcAft>
+            </a:pPr>
+            <a:r>
+              <a:rPr sz="1000">
+                <a:solidFill>
+                  <a:srgbClr val="FFC72C"/>
+                </a:solidFill>
+                <a:latin typeface="Calibri"/>
+              </a:rPr>
+              <a:t>▪  </a:t>
+            </a:r>
+            <a:r>
+              <a:rPr b="1" sz="1000">
+                <a:solidFill>
+                  <a:srgbClr val="1F2A44"/>
+                </a:solidFill>
+                <a:latin typeface="Calibri"/>
+              </a:rPr>
+              <a:t>Built projects only (5 Oct 2026). </a:t>
+            </a:r>
+            <a:r>
+              <a:rPr sz="1000">
+                <a:solidFill>
+                  <a:srgbClr val="1F2A44"/>
+                </a:solidFill>
+                <a:latin typeface="Calibri"/>
+              </a:rPr>
+              <a:t>Status of every dataset row verified; 27 rows that were planned, under development, under construction or cancelled are excluded from the class and the regression. 14 members carry a final or actual cost (median $756); the others are contract, budget or announcement figures for projects that were built.</a:t>
+            </a:r>
+          </a:p>
+          <a:p>
+            <a:pPr>
+              <a:lnSpc>
+                <a:spcPct val="105000"/>
+              </a:lnSpc>
+              <a:spcAft>
+                <a:spcPts val="300"/>
+              </a:spcAft>
+            </a:pPr>
+            <a:r>
+              <a:rPr sz="1000">
+                <a:solidFill>
+                  <a:srgbClr val="FFC72C"/>
+                </a:solidFill>
+                <a:latin typeface="Calibri"/>
+              </a:rPr>
+              <a:t>▪  </a:t>
+            </a:r>
+            <a:r>
+              <a:rPr b="1" sz="1000">
+                <a:solidFill>
+                  <a:srgbClr val="1F2A44"/>
+                </a:solidFill>
+                <a:latin typeface="Calibri"/>
+              </a:rPr>
+              <a:t>Caveat: </a:t>
+            </a:r>
+            <a:r>
+              <a:rPr sz="1000">
+                <a:solidFill>
+                  <a:srgbClr val="1F2A44"/>
+                </a:solidFill>
+                <a:latin typeface="Calibri"/>
+              </a:rPr>
+              <a:t>figures from regulator, IDA, EIA and utility documents, verified by status audit; developer-owned members carry developer overhead and profit but no utility indirects or AFUDC; incentives are not netted.</a:t>
+            </a:r>
+          </a:p>
+        </p:txBody>
+      </p:sp>
+    </p:spTree>
+  </p:cSld>
+  <p:clrMapOvr>
+    <a:masterClrMapping/>
+  </p:clrMapOvr>
+</p:sld>
+</file>
+
+<file path=ppt/slides/slide4.xml><?xml version="1.0" encoding="utf-8"?>
+<p:sld xmlns:a="http://schemas.openxmlformats.org/drawingml/2006/main" xmlns:p="http://schemas.openxmlformats.org/presentationml/2006/main" xmlns:r="http://schemas.openxmlformats.org/officeDocument/2006/relationships">
+  <p:cSld>
+    <p:spTree>
+      <p:nvGrpSpPr>
+        <p:cNvPr id="1" name=""/>
+        <p:cNvGrpSpPr/>
+        <p:nvPr/>
+      </p:nvGrpSpPr>
+      <p:grpSpPr/>
+      <p:sp>
+        <p:nvSpPr>
+          <p:cNvPr id="2" name="Rectangle 1"/>
+          <p:cNvSpPr/>
+          <p:nvPr/>
+        </p:nvSpPr>
+        <p:spPr>
+          <a:xfrm>
+            <a:off x="0" y="0"/>
+            <a:ext cx="12191695" cy="6858000"/>
+          </a:xfrm>
+          <a:prstGeom prst="rect">
+            <a:avLst/>
+          </a:prstGeom>
+          <a:solidFill>
+            <a:srgbClr val="FFFFFF"/>
+          </a:solidFill>
+          <a:ln>
+            <a:noFill/>
+          </a:ln>
+          <a:effectLst/>
+        </p:spPr>
+        <p:style>
+          <a:lnRef idx="1">
+            <a:schemeClr val="accent1"/>
+          </a:lnRef>
+          <a:fillRef idx="3">
+            <a:schemeClr val="accent1"/>
+          </a:fillRef>
+          <a:effectRef idx="2">
+            <a:schemeClr val="accent1"/>
+          </a:effectRef>
+          <a:fontRef idx="minor">
+            <a:schemeClr val="lt1"/>
+          </a:fontRef>
+        </p:style>
+        <p:txBody>
+          <a:bodyPr rtlCol="0" anchor="ctr"/>
+          <a:lstStyle/>
+          <a:p>
+            <a:pPr algn="ctr"/>
+          </a:p>
+        </p:txBody>
+      </p:sp>
+      <p:sp>
+        <p:nvSpPr>
+          <p:cNvPr id="3" name="TextBox 2"/>
+          <p:cNvSpPr txBox="1"/>
+          <p:nvPr/>
+        </p:nvSpPr>
+        <p:spPr>
+          <a:xfrm>
+            <a:off x="548640" y="256032"/>
+            <a:ext cx="11064240" cy="274320"/>
+          </a:xfrm>
+          <a:prstGeom prst="rect">
+            <a:avLst/>
+          </a:prstGeom>
+          <a:noFill/>
+        </p:spPr>
+        <p:txBody>
+          <a:bodyPr wrap="square" lIns="45720" rIns="45720" tIns="27432" bIns="27432" anchor="t">
+            <a:spAutoFit/>
+          </a:bodyPr>
+          <a:lstStyle/>
+          <a:p>
+            <a:pPr algn="l">
+              <a:lnSpc>
+                <a:spcPct val="105000"/>
+              </a:lnSpc>
+              <a:spcAft>
+                <a:spcPts val="400"/>
+              </a:spcAft>
+            </a:pPr>
+            <a:r>
+              <a:rPr sz="1100" b="1" i="0">
+                <a:solidFill>
+                  <a:srgbClr val="6E1F2E"/>
+                </a:solidFill>
+                <a:latin typeface="Calibri"/>
+              </a:rPr>
+              <a:t>1 · WHERE THE MONEY SITS   |   COST LAYER EXTRACTION, ESF TOTAL REV 3 (DIRECTS, $M)</a:t>
+            </a:r>
+          </a:p>
+        </p:txBody>
+      </p:sp>
+      <p:sp>
+        <p:nvSpPr>
+          <p:cNvPr id="4" name="TextBox 3"/>
+          <p:cNvSpPr txBox="1"/>
+          <p:nvPr/>
+        </p:nvSpPr>
+        <p:spPr>
+          <a:xfrm>
+            <a:off x="548640" y="475488"/>
+            <a:ext cx="11064240" cy="868680"/>
+          </a:xfrm>
+          <a:prstGeom prst="rect">
+            <a:avLst/>
+          </a:prstGeom>
+          <a:noFill/>
+        </p:spPr>
+        <p:txBody>
+          <a:bodyPr wrap="square" lIns="45720" rIns="45720" tIns="27432" bIns="27432" anchor="t">
+            <a:spAutoFit/>
+          </a:bodyPr>
+          <a:lstStyle/>
+          <a:p>
+            <a:pPr algn="l">
+              <a:lnSpc>
+                <a:spcPct val="100000"/>
+              </a:lnSpc>
+              <a:spcAft>
+                <a:spcPts val="400"/>
+              </a:spcAft>
+            </a:pPr>
+            <a:r>
+              <a:rPr sz="2300" b="1" i="0">
+                <a:solidFill>
+                  <a:srgbClr val="001E60"/>
+                </a:solidFill>
+                <a:latin typeface="Georgia"/>
+              </a:rPr>
+              <a:t>Thirteen layers between the battery contract and the approval level</a:t>
+            </a:r>
+          </a:p>
+        </p:txBody>
+      </p:sp>
+      <p:sp>
+        <p:nvSpPr>
+          <p:cNvPr id="5" name="TextBox 4"/>
+          <p:cNvSpPr txBox="1"/>
+          <p:nvPr/>
+        </p:nvSpPr>
+        <p:spPr>
+          <a:xfrm>
+            <a:off x="548640" y="6419088"/>
+            <a:ext cx="8229600" cy="274320"/>
+          </a:xfrm>
+          <a:prstGeom prst="rect">
+            <a:avLst/>
+          </a:prstGeom>
+          <a:noFill/>
+        </p:spPr>
+        <p:txBody>
+          <a:bodyPr wrap="square" lIns="45720" rIns="45720" tIns="27432" bIns="27432" anchor="t">
+            <a:spAutoFit/>
+          </a:bodyPr>
+          <a:lstStyle/>
+          <a:p>
+            <a:pPr algn="l">
+              <a:lnSpc>
+                <a:spcPct val="105000"/>
+              </a:lnSpc>
+              <a:spcAft>
+                <a:spcPts val="400"/>
+              </a:spcAft>
+            </a:pPr>
+            <a:r>
+              <a:rPr sz="1000" b="0" i="0">
+                <a:solidFill>
+                  <a:srgbClr val="6B7280"/>
+                </a:solidFill>
+                <a:latin typeface="Calibri"/>
+              </a:rPr>
+              <a:t>EstimatingCoE | Eversource Energy | Stewards of Affordability</a:t>
+            </a:r>
+          </a:p>
+        </p:txBody>
+      </p:sp>
+      <p:sp>
+        <p:nvSpPr>
+          <p:cNvPr id="6" name="TextBox 5"/>
+          <p:cNvSpPr txBox="1"/>
+          <p:nvPr/>
+        </p:nvSpPr>
+        <p:spPr>
+          <a:xfrm>
+            <a:off x="10972800" y="6419088"/>
+            <a:ext cx="685800" cy="274320"/>
+          </a:xfrm>
+          <a:prstGeom prst="rect">
+            <a:avLst/>
+          </a:prstGeom>
+          <a:noFill/>
+        </p:spPr>
+        <p:txBody>
+          <a:bodyPr wrap="square" lIns="45720" rIns="45720" tIns="27432" bIns="27432" anchor="t">
+            <a:spAutoFit/>
+          </a:bodyPr>
+          <a:lstStyle/>
+          <a:p>
+            <a:pPr algn="r">
+              <a:lnSpc>
+                <a:spcPct val="105000"/>
+              </a:lnSpc>
+              <a:spcAft>
+                <a:spcPts val="400"/>
+              </a:spcAft>
+            </a:pPr>
+            <a:r>
+              <a:rPr sz="1000" b="0" i="0">
+                <a:solidFill>
+                  <a:srgbClr val="6B7280"/>
+                </a:solidFill>
+                <a:latin typeface="Calibri"/>
+              </a:rPr>
+              <a:t>4</a:t>
+            </a:r>
+          </a:p>
+        </p:txBody>
+      </p:sp>
+      <p:graphicFrame>
+        <p:nvGraphicFramePr>
+          <p:cNvPr id="7" name="Chart 6"/>
+          <p:cNvGraphicFramePr>
+            <a:graphicFrameLocks noGrp="1"/>
+          </p:cNvGraphicFramePr>
+          <p:nvPr/>
+        </p:nvGraphicFramePr>
+        <p:xfrm>
+          <a:off x="457200" y="1371600"/>
+          <a:ext cx="11247120" cy="4846320"/>
+        </p:xfrm>
+        <a:graphic>
+          <a:graphicData uri="http://schemas.openxmlformats.org/drawingml/2006/chart">
+            <c:chart xmlns:c="http://schemas.openxmlformats.org/drawingml/2006/chart" r:id="rId2"/>
+          </a:graphicData>
+        </a:graphic>
+      </p:graphicFrame>
+      <p:sp>
+        <p:nvSpPr>
+          <p:cNvPr id="8" name="TextBox 7"/>
+          <p:cNvSpPr txBox="1"/>
+          <p:nvPr/>
+        </p:nvSpPr>
+        <p:spPr>
+          <a:xfrm>
+            <a:off x="548640" y="6080760"/>
+            <a:ext cx="10972800" cy="320040"/>
+          </a:xfrm>
+          <a:prstGeom prst="rect">
+            <a:avLst/>
+          </a:prstGeom>
+          <a:noFill/>
+        </p:spPr>
+        <p:txBody>
+          <a:bodyPr wrap="square" lIns="45720" rIns="45720" tIns="27432" bIns="27432" anchor="t">
+            <a:spAutoFit/>
+          </a:bodyPr>
+          <a:lstStyle/>
+          <a:p>
+            <a:pPr algn="l">
+              <a:lnSpc>
+                <a:spcPct val="105000"/>
+              </a:lnSpc>
+              <a:spcAft>
+                <a:spcPts val="400"/>
+              </a:spcAft>
+            </a:pPr>
+            <a:r>
+              <a:rPr sz="1100" b="0" i="0">
+                <a:solidFill>
+                  <a:srgbClr val="6B7280"/>
+                </a:solidFill>
+                <a:latin typeface="Calibri"/>
+              </a:rPr>
+              <a:t>Gold = battery contract as carried in Rev 3 ($12.1M contract plus $1.1M escalation on the unpaid balance; see slide 23). Teal = station, site and feeder protection. Burgundy = risk, contingency, indirects, AFUDC. Total $57.2M.</a:t>
+            </a:r>
+          </a:p>
+        </p:txBody>
+      </p:sp>
+    </p:spTree>
+  </p:cSld>
+  <p:clrMapOvr>
+    <a:masterClrMapping/>
+  </p:clrMapOvr>
+</p:sld>
+</file>
+
+<file path=ppt/slides/slide40.xml><?xml version="1.0" encoding="utf-8"?>
+<p:sld xmlns:a="http://schemas.openxmlformats.org/drawingml/2006/main" xmlns:p="http://schemas.openxmlformats.org/presentationml/2006/main" xmlns:r="http://schemas.openxmlformats.org/officeDocument/2006/relationships">
+  <p:cSld>
+    <p:spTree>
+      <p:nvGrpSpPr>
+        <p:cNvPr id="1" name=""/>
+        <p:cNvGrpSpPr/>
+        <p:nvPr/>
+      </p:nvGrpSpPr>
+      <p:grpSpPr/>
+      <p:sp>
+        <p:nvSpPr>
+          <p:cNvPr id="2" name="Rectangle 1"/>
+          <p:cNvSpPr/>
+          <p:nvPr/>
+        </p:nvSpPr>
+        <p:spPr>
+          <a:xfrm>
+            <a:off x="0" y="0"/>
+            <a:ext cx="12191695" cy="6858000"/>
+          </a:xfrm>
+          <a:prstGeom prst="rect">
+            <a:avLst/>
+          </a:prstGeom>
+          <a:solidFill>
+            <a:srgbClr val="FFFFFF"/>
+          </a:solidFill>
+          <a:ln>
+            <a:noFill/>
+          </a:ln>
+          <a:effectLst/>
+        </p:spPr>
+        <p:style>
+          <a:lnRef idx="1">
+            <a:schemeClr val="accent1"/>
+          </a:lnRef>
+          <a:fillRef idx="3">
+            <a:schemeClr val="accent1"/>
+          </a:fillRef>
+          <a:effectRef idx="2">
+            <a:schemeClr val="accent1"/>
+          </a:effectRef>
+          <a:fontRef idx="minor">
+            <a:schemeClr val="lt1"/>
+          </a:fontRef>
+        </p:style>
+        <p:txBody>
+          <a:bodyPr rtlCol="0" anchor="ctr"/>
+          <a:lstStyle/>
+          <a:p>
+            <a:pPr algn="ctr"/>
+          </a:p>
+        </p:txBody>
+      </p:sp>
+      <p:sp>
+        <p:nvSpPr>
+          <p:cNvPr id="3" name="TextBox 2"/>
+          <p:cNvSpPr txBox="1"/>
+          <p:nvPr/>
+        </p:nvSpPr>
+        <p:spPr>
+          <a:xfrm>
+            <a:off x="548640" y="256032"/>
+            <a:ext cx="11064240" cy="274320"/>
+          </a:xfrm>
+          <a:prstGeom prst="rect">
+            <a:avLst/>
+          </a:prstGeom>
+          <a:noFill/>
+        </p:spPr>
+        <p:txBody>
+          <a:bodyPr wrap="square" lIns="45720" rIns="45720" tIns="27432" bIns="27432" anchor="t">
+            <a:spAutoFit/>
+          </a:bodyPr>
+          <a:lstStyle/>
+          <a:p>
+            <a:pPr algn="l">
+              <a:lnSpc>
+                <a:spcPct val="105000"/>
+              </a:lnSpc>
+              <a:spcAft>
+                <a:spcPts val="400"/>
+              </a:spcAft>
+            </a:pPr>
+            <a:r>
+              <a:rPr sz="1100" b="1" i="0">
+                <a:solidFill>
+                  <a:srgbClr val="6E1F2E"/>
+                </a:solidFill>
+                <a:latin typeface="Calibri"/>
+              </a:rPr>
+              <a:t>APPENDIX B. REGRESSION ON 53 PUBLIC PROJECTS</a:t>
+            </a:r>
+          </a:p>
+        </p:txBody>
+      </p:sp>
+      <p:sp>
+        <p:nvSpPr>
+          <p:cNvPr id="4" name="TextBox 3"/>
+          <p:cNvSpPr txBox="1"/>
+          <p:nvPr/>
+        </p:nvSpPr>
+        <p:spPr>
+          <a:xfrm>
+            <a:off x="548640" y="475488"/>
+            <a:ext cx="11064240" cy="868680"/>
+          </a:xfrm>
+          <a:prstGeom prst="rect">
+            <a:avLst/>
+          </a:prstGeom>
+          <a:noFill/>
+        </p:spPr>
+        <p:txBody>
+          <a:bodyPr wrap="square" lIns="45720" rIns="45720" tIns="27432" bIns="27432" anchor="t">
+            <a:spAutoFit/>
+          </a:bodyPr>
+          <a:lstStyle/>
+          <a:p>
+            <a:pPr algn="l">
+              <a:lnSpc>
+                <a:spcPct val="100000"/>
+              </a:lnSpc>
+              <a:spcAft>
+                <a:spcPts val="400"/>
+              </a:spcAft>
+            </a:pPr>
+            <a:r>
+              <a:rPr sz="2300" b="1" i="0">
+                <a:solidFill>
+                  <a:srgbClr val="001E60"/>
+                </a:solidFill>
+                <a:latin typeface="Georgia"/>
+              </a:rPr>
+              <a:t>Size and duration explain half the spread in public costs; Hyde Park's direct cost is high-normal</a:t>
+            </a:r>
+          </a:p>
+        </p:txBody>
+      </p:sp>
+      <p:sp>
+        <p:nvSpPr>
+          <p:cNvPr id="5" name="TextBox 4"/>
+          <p:cNvSpPr txBox="1"/>
+          <p:nvPr/>
+        </p:nvSpPr>
+        <p:spPr>
+          <a:xfrm>
+            <a:off x="548640" y="6419088"/>
+            <a:ext cx="8229600" cy="274320"/>
+          </a:xfrm>
+          <a:prstGeom prst="rect">
+            <a:avLst/>
+          </a:prstGeom>
+          <a:noFill/>
+        </p:spPr>
+        <p:txBody>
+          <a:bodyPr wrap="square" lIns="45720" rIns="45720" tIns="27432" bIns="27432" anchor="t">
+            <a:spAutoFit/>
+          </a:bodyPr>
+          <a:lstStyle/>
+          <a:p>
+            <a:pPr algn="l">
+              <a:lnSpc>
+                <a:spcPct val="105000"/>
+              </a:lnSpc>
+              <a:spcAft>
+                <a:spcPts val="400"/>
+              </a:spcAft>
+            </a:pPr>
+            <a:r>
+              <a:rPr sz="1000" b="0" i="0">
+                <a:solidFill>
+                  <a:srgbClr val="6B7280"/>
+                </a:solidFill>
+                <a:latin typeface="Calibri"/>
+              </a:rPr>
+              <a:t>EstimatingCoE | Eversource Energy | Stewards of Affordability</a:t>
+            </a:r>
+          </a:p>
+        </p:txBody>
+      </p:sp>
+      <p:sp>
+        <p:nvSpPr>
+          <p:cNvPr id="6" name="TextBox 5"/>
+          <p:cNvSpPr txBox="1"/>
+          <p:nvPr/>
+        </p:nvSpPr>
+        <p:spPr>
+          <a:xfrm>
+            <a:off x="10972800" y="6419088"/>
+            <a:ext cx="685800" cy="274320"/>
+          </a:xfrm>
+          <a:prstGeom prst="rect">
+            <a:avLst/>
+          </a:prstGeom>
+          <a:noFill/>
+        </p:spPr>
+        <p:txBody>
+          <a:bodyPr wrap="square" lIns="45720" rIns="45720" tIns="27432" bIns="27432" anchor="t">
+            <a:spAutoFit/>
+          </a:bodyPr>
+          <a:lstStyle/>
+          <a:p>
+            <a:pPr algn="r">
+              <a:lnSpc>
+                <a:spcPct val="105000"/>
+              </a:lnSpc>
+              <a:spcAft>
+                <a:spcPts val="400"/>
+              </a:spcAft>
+            </a:pPr>
+            <a:r>
+              <a:rPr sz="1000" b="0" i="0">
+                <a:solidFill>
+                  <a:srgbClr val="6B7280"/>
+                </a:solidFill>
+                <a:latin typeface="Calibri"/>
+              </a:rPr>
+              <a:t>39</a:t>
             </a:r>
           </a:p>
         </p:txBody>
@@ -44023,7 +47165,7 @@
 </p:sld>
 </file>
 
-<file path=ppt/slides/slide38.xml><?xml version="1.0" encoding="utf-8"?>
+<file path=ppt/slides/slide41.xml><?xml version="1.0" encoding="utf-8"?>
 <p:sld xmlns:a="http://schemas.openxmlformats.org/drawingml/2006/main" xmlns:p="http://schemas.openxmlformats.org/presentationml/2006/main" xmlns:r="http://schemas.openxmlformats.org/officeDocument/2006/relationships">
   <p:cSld>
     <p:spTree>
@@ -44240,7 +47382,7 @@
                 </a:solidFill>
                 <a:latin typeface="Calibri"/>
               </a:rPr>
-              <a:t>37</a:t>
+              <a:t>40</a:t>
             </a:r>
           </a:p>
         </p:txBody>
@@ -44870,296 +48012,6 @@
                 <a:latin typeface="Calibri"/>
               </a:rPr>
               <a:t>replace these ranges with the project team's in a two-hour range-estimating session (AACE 41R-08) before full funding.</a:t>
-            </a:r>
-          </a:p>
-        </p:txBody>
-      </p:sp>
-    </p:spTree>
-  </p:cSld>
-  <p:clrMapOvr>
-    <a:masterClrMapping/>
-  </p:clrMapOvr>
-</p:sld>
-</file>
-
-<file path=ppt/slides/slide4.xml><?xml version="1.0" encoding="utf-8"?>
-<p:sld xmlns:a="http://schemas.openxmlformats.org/drawingml/2006/main" xmlns:p="http://schemas.openxmlformats.org/presentationml/2006/main" xmlns:r="http://schemas.openxmlformats.org/officeDocument/2006/relationships">
-  <p:cSld>
-    <p:spTree>
-      <p:nvGrpSpPr>
-        <p:cNvPr id="1" name=""/>
-        <p:cNvGrpSpPr/>
-        <p:nvPr/>
-      </p:nvGrpSpPr>
-      <p:grpSpPr/>
-      <p:sp>
-        <p:nvSpPr>
-          <p:cNvPr id="2" name="Rectangle 1"/>
-          <p:cNvSpPr/>
-          <p:nvPr/>
-        </p:nvSpPr>
-        <p:spPr>
-          <a:xfrm>
-            <a:off x="0" y="0"/>
-            <a:ext cx="12191695" cy="6858000"/>
-          </a:xfrm>
-          <a:prstGeom prst="rect">
-            <a:avLst/>
-          </a:prstGeom>
-          <a:solidFill>
-            <a:srgbClr val="FFFFFF"/>
-          </a:solidFill>
-          <a:ln>
-            <a:noFill/>
-          </a:ln>
-          <a:effectLst/>
-        </p:spPr>
-        <p:style>
-          <a:lnRef idx="1">
-            <a:schemeClr val="accent1"/>
-          </a:lnRef>
-          <a:fillRef idx="3">
-            <a:schemeClr val="accent1"/>
-          </a:fillRef>
-          <a:effectRef idx="2">
-            <a:schemeClr val="accent1"/>
-          </a:effectRef>
-          <a:fontRef idx="minor">
-            <a:schemeClr val="lt1"/>
-          </a:fontRef>
-        </p:style>
-        <p:txBody>
-          <a:bodyPr rtlCol="0" anchor="ctr"/>
-          <a:lstStyle/>
-          <a:p>
-            <a:pPr algn="ctr"/>
-          </a:p>
-        </p:txBody>
-      </p:sp>
-      <p:sp>
-        <p:nvSpPr>
-          <p:cNvPr id="3" name="TextBox 2"/>
-          <p:cNvSpPr txBox="1"/>
-          <p:nvPr/>
-        </p:nvSpPr>
-        <p:spPr>
-          <a:xfrm>
-            <a:off x="548640" y="256032"/>
-            <a:ext cx="11064240" cy="274320"/>
-          </a:xfrm>
-          <a:prstGeom prst="rect">
-            <a:avLst/>
-          </a:prstGeom>
-          <a:noFill/>
-        </p:spPr>
-        <p:txBody>
-          <a:bodyPr wrap="square" lIns="45720" rIns="45720" tIns="27432" bIns="27432" anchor="t">
-            <a:spAutoFit/>
-          </a:bodyPr>
-          <a:lstStyle/>
-          <a:p>
-            <a:pPr algn="l">
-              <a:lnSpc>
-                <a:spcPct val="105000"/>
-              </a:lnSpc>
-              <a:spcAft>
-                <a:spcPts val="400"/>
-              </a:spcAft>
-            </a:pPr>
-            <a:r>
-              <a:rPr sz="1100" b="1" i="0">
-                <a:solidFill>
-                  <a:srgbClr val="6E1F2E"/>
-                </a:solidFill>
-                <a:latin typeface="Calibri"/>
-              </a:rPr>
-              <a:t>1 · WHERE THE MONEY SITS   |   COST LAYER EXTRACTION, ESF TOTAL REV 3 (DIRECTS, $M)</a:t>
-            </a:r>
-          </a:p>
-        </p:txBody>
-      </p:sp>
-      <p:sp>
-        <p:nvSpPr>
-          <p:cNvPr id="4" name="TextBox 3"/>
-          <p:cNvSpPr txBox="1"/>
-          <p:nvPr/>
-        </p:nvSpPr>
-        <p:spPr>
-          <a:xfrm>
-            <a:off x="548640" y="475488"/>
-            <a:ext cx="11064240" cy="868680"/>
-          </a:xfrm>
-          <a:prstGeom prst="rect">
-            <a:avLst/>
-          </a:prstGeom>
-          <a:noFill/>
-        </p:spPr>
-        <p:txBody>
-          <a:bodyPr wrap="square" lIns="45720" rIns="45720" tIns="27432" bIns="27432" anchor="t">
-            <a:spAutoFit/>
-          </a:bodyPr>
-          <a:lstStyle/>
-          <a:p>
-            <a:pPr algn="l">
-              <a:lnSpc>
-                <a:spcPct val="100000"/>
-              </a:lnSpc>
-              <a:spcAft>
-                <a:spcPts val="400"/>
-              </a:spcAft>
-            </a:pPr>
-            <a:r>
-              <a:rPr sz="2300" b="1" i="0">
-                <a:solidFill>
-                  <a:srgbClr val="001E60"/>
-                </a:solidFill>
-                <a:latin typeface="Georgia"/>
-              </a:rPr>
-              <a:t>Thirteen layers between the battery contract and the approval level</a:t>
-            </a:r>
-          </a:p>
-        </p:txBody>
-      </p:sp>
-      <p:sp>
-        <p:nvSpPr>
-          <p:cNvPr id="5" name="TextBox 4"/>
-          <p:cNvSpPr txBox="1"/>
-          <p:nvPr/>
-        </p:nvSpPr>
-        <p:spPr>
-          <a:xfrm>
-            <a:off x="548640" y="6419088"/>
-            <a:ext cx="8229600" cy="274320"/>
-          </a:xfrm>
-          <a:prstGeom prst="rect">
-            <a:avLst/>
-          </a:prstGeom>
-          <a:noFill/>
-        </p:spPr>
-        <p:txBody>
-          <a:bodyPr wrap="square" lIns="45720" rIns="45720" tIns="27432" bIns="27432" anchor="t">
-            <a:spAutoFit/>
-          </a:bodyPr>
-          <a:lstStyle/>
-          <a:p>
-            <a:pPr algn="l">
-              <a:lnSpc>
-                <a:spcPct val="105000"/>
-              </a:lnSpc>
-              <a:spcAft>
-                <a:spcPts val="400"/>
-              </a:spcAft>
-            </a:pPr>
-            <a:r>
-              <a:rPr sz="1000" b="0" i="0">
-                <a:solidFill>
-                  <a:srgbClr val="6B7280"/>
-                </a:solidFill>
-                <a:latin typeface="Calibri"/>
-              </a:rPr>
-              <a:t>EstimatingCoE | Eversource Energy | Stewards of Affordability</a:t>
-            </a:r>
-          </a:p>
-        </p:txBody>
-      </p:sp>
-      <p:sp>
-        <p:nvSpPr>
-          <p:cNvPr id="6" name="TextBox 5"/>
-          <p:cNvSpPr txBox="1"/>
-          <p:nvPr/>
-        </p:nvSpPr>
-        <p:spPr>
-          <a:xfrm>
-            <a:off x="10972800" y="6419088"/>
-            <a:ext cx="685800" cy="274320"/>
-          </a:xfrm>
-          <a:prstGeom prst="rect">
-            <a:avLst/>
-          </a:prstGeom>
-          <a:noFill/>
-        </p:spPr>
-        <p:txBody>
-          <a:bodyPr wrap="square" lIns="45720" rIns="45720" tIns="27432" bIns="27432" anchor="t">
-            <a:spAutoFit/>
-          </a:bodyPr>
-          <a:lstStyle/>
-          <a:p>
-            <a:pPr algn="r">
-              <a:lnSpc>
-                <a:spcPct val="105000"/>
-              </a:lnSpc>
-              <a:spcAft>
-                <a:spcPts val="400"/>
-              </a:spcAft>
-            </a:pPr>
-            <a:r>
-              <a:rPr sz="1000" b="0" i="0">
-                <a:solidFill>
-                  <a:srgbClr val="6B7280"/>
-                </a:solidFill>
-                <a:latin typeface="Calibri"/>
-              </a:rPr>
-              <a:t>4</a:t>
-            </a:r>
-          </a:p>
-        </p:txBody>
-      </p:sp>
-      <p:graphicFrame>
-        <p:nvGraphicFramePr>
-          <p:cNvPr id="7" name="Chart 6"/>
-          <p:cNvGraphicFramePr>
-            <a:graphicFrameLocks noGrp="1"/>
-          </p:cNvGraphicFramePr>
-          <p:nvPr/>
-        </p:nvGraphicFramePr>
-        <p:xfrm>
-          <a:off x="457200" y="1371600"/>
-          <a:ext cx="11247120" cy="4846320"/>
-        </p:xfrm>
-        <a:graphic>
-          <a:graphicData uri="http://schemas.openxmlformats.org/drawingml/2006/chart">
-            <c:chart xmlns:c="http://schemas.openxmlformats.org/drawingml/2006/chart" r:id="rId2"/>
-          </a:graphicData>
-        </a:graphic>
-      </p:graphicFrame>
-      <p:sp>
-        <p:nvSpPr>
-          <p:cNvPr id="8" name="TextBox 7"/>
-          <p:cNvSpPr txBox="1"/>
-          <p:nvPr/>
-        </p:nvSpPr>
-        <p:spPr>
-          <a:xfrm>
-            <a:off x="548640" y="6080760"/>
-            <a:ext cx="10972800" cy="320040"/>
-          </a:xfrm>
-          <a:prstGeom prst="rect">
-            <a:avLst/>
-          </a:prstGeom>
-          <a:noFill/>
-        </p:spPr>
-        <p:txBody>
-          <a:bodyPr wrap="square" lIns="45720" rIns="45720" tIns="27432" bIns="27432" anchor="t">
-            <a:spAutoFit/>
-          </a:bodyPr>
-          <a:lstStyle/>
-          <a:p>
-            <a:pPr algn="l">
-              <a:lnSpc>
-                <a:spcPct val="105000"/>
-              </a:lnSpc>
-              <a:spcAft>
-                <a:spcPts val="400"/>
-              </a:spcAft>
-            </a:pPr>
-            <a:r>
-              <a:rPr sz="1100" b="0" i="0">
-                <a:solidFill>
-                  <a:srgbClr val="6B7280"/>
-                </a:solidFill>
-                <a:latin typeface="Calibri"/>
-              </a:rPr>
-              <a:t>Gold = battery contract as carried in Rev 3 ($12.1M contract plus $1.1M escalation on the unpaid balance; see slide 23). Teal = station, site and feeder protection. Burgundy = risk, contingency, indirects, AFUDC. Total $57.2M.</a:t>
             </a:r>
           </a:p>
         </p:txBody>

--- a/Hyde Park BESS/6) Cost Analysis Deliverables/Hyde Park BESS - Cost Analysis Deck.pptx
+++ b/Hyde Park BESS/6) Cost Analysis Deliverables/Hyde Park BESS - Cost Analysis Deck.pptx
@@ -42437,7 +42437,7 @@
                 </a:solidFill>
                 <a:latin typeface="Calibri"/>
               </a:rPr>
-              <a:t>3 · CAN THE NUMBER BE DEFENDED   |   20,000 TRIALS: LAYER ACCURACY, UNPRICED THREATS, LEVERS AT ASSESSED ODDS, SCHEDULE SLIP</a:t>
+              <a:t>3 · CAN THE NUMBER BE DEFENDED   |   20,000 TRIALS: LAYER ACCURACY, UNPRICED THREATS, LEVERS AT ODDS, SCHEDULE SLIP</a:t>
             </a:r>
           </a:p>
         </p:txBody>

--- a/Hyde Park BESS/6) Cost Analysis Deliverables/Hyde Park BESS - Cost Analysis Deck.pptx
+++ b/Hyde Park BESS/6) Cost Analysis Deliverables/Hyde Park BESS - Cost Analysis Deck.pptx
@@ -8986,7 +8986,7 @@
           <a:lstStyle/>
           <a:p>
             <a:r>
-              <a:t>Design-to-cost: the target is set at a defensible external reference (the reference-class 75th percentile for station-direct cost, about $1,200 per kWh) rather than at an arbitrary cut, so the project can explain to a regulator why it stopped where it stopped. The gates are tied to the documents the red team and the estimating review already said were missing: geotech, NFPA 855 analysis, hosting capacity, GSU count, the Haugland scope map. Competitive lump-sum pricing converts the unit-library construction estimate into a bid, which is the only way to retire the +25% construction stress test.</a:t>
+              <a:t>Design-to-cost: the target is set at a defensible external reference (the reference-class 75th percentile for station-direct cost, about $1,250 per kWh) rather than at an arbitrary cut, so the project can explain to a regulator why it stopped where it stopped. The gates are tied to the documents the red team and the estimating review already said were missing: geotech, NFPA 855 analysis, hosting capacity, GSU count, the Haugland scope map. Competitive lump-sum pricing converts the unit-library construction estimate into a bid, which is the only way to retire the +25% construction stress test.</a:t>
             </a:r>
           </a:p>
         </p:txBody>
@@ -12927,7 +12927,7 @@
                 </a:solidFill>
                 <a:latin typeface="Calibri"/>
               </a:rPr>
-              <a:t>Cost Estimating Center of Excellence  |  Estimate basis: ESF Total Rev 3, 24 Sep 2026  |  29 Sep 2026</a:t>
+              <a:t>Cost Estimating Center of Excellence  |  Estimate basis: ESF Total Rev 3, 24 Sep 2026  |  5 Oct 2026</a:t>
             </a:r>
           </a:p>
         </p:txBody>
@@ -17858,7 +17858,7 @@
                 </a:solidFill>
                 <a:latin typeface="Calibri"/>
               </a:rPr>
-              <a:t>1 · WHERE THE MONEY SITS   |   NORMALIZING TO 2026: SIX INDICES X THREE ANCHOR BATTERY SHARES (2024 BASIS), CLASS MEDIAN $/KWH</a:t>
+              <a:t>1 · WHERE THE MONEY SITS   |   NORMALIZING TO 2026: SIX INDICES X THREE ANCHOR BATTERY SHARES, CLASS MEDIAN $/KWH</a:t>
             </a:r>
           </a:p>
         </p:txBody>
@@ -31484,8 +31484,8 @@
           <p:nvPr/>
         </p:nvGraphicFramePr>
         <p:xfrm>
-          <a:off x="548640" y="1325880"/>
-          <a:ext cx="11064239" cy="4572000"/>
+          <a:off x="548640" y="1280160"/>
+          <a:ext cx="11064240" cy="4572000"/>
         </p:xfrm>
         <a:graphic>
           <a:graphicData uri="http://schemas.openxmlformats.org/drawingml/2006/table">
@@ -31494,13 +31494,13 @@
                 <a:tableStyleId>{5C22544A-7EE6-4342-B048-85BDC9FD1C3A}</a:tableStyleId>
               </a:tblPr>
               <a:tblGrid>
-                <a:gridCol w="365760"/>
-                <a:gridCol w="3749039"/>
-                <a:gridCol w="640080"/>
-                <a:gridCol w="1097280"/>
-                <a:gridCol w="1097280"/>
-                <a:gridCol w="640080"/>
-                <a:gridCol w="3474720"/>
+                <a:gridCol w="320040"/>
+                <a:gridCol w="3931920"/>
+                <a:gridCol w="502920"/>
+                <a:gridCol w="960120"/>
+                <a:gridCol w="1005840"/>
+                <a:gridCol w="548640"/>
+                <a:gridCol w="3794760"/>
               </a:tblGrid>
               <a:tr h="268941">
                 <a:tc>
@@ -31509,7 +31509,7 @@
                     <a:lstStyle/>
                     <a:p>
                       <a:r>
-                        <a:rPr sz="800" b="1">
+                        <a:rPr sz="700" b="1">
                           <a:solidFill>
                             <a:srgbClr val="FFFFFF"/>
                           </a:solidFill>
@@ -31531,7 +31531,7 @@
                     <a:lstStyle/>
                     <a:p>
                       <a:r>
-                        <a:rPr sz="800" b="1">
+                        <a:rPr sz="700" b="1">
                           <a:solidFill>
                             <a:srgbClr val="FFFFFF"/>
                           </a:solidFill>
@@ -31553,7 +31553,7 @@
                     <a:lstStyle/>
                     <a:p>
                       <a:r>
-                        <a:rPr sz="800" b="1">
+                        <a:rPr sz="700" b="1">
                           <a:solidFill>
                             <a:srgbClr val="FFFFFF"/>
                           </a:solidFill>
@@ -31576,7 +31576,7 @@
                     <a:p>
                       <a:pPr algn="r"/>
                       <a:r>
-                        <a:rPr sz="800" b="1">
+                        <a:rPr sz="700" b="1">
                           <a:solidFill>
                             <a:srgbClr val="FFFFFF"/>
                           </a:solidFill>
@@ -31599,7 +31599,7 @@
                     <a:p>
                       <a:pPr algn="r"/>
                       <a:r>
-                        <a:rPr sz="800" b="1">
+                        <a:rPr sz="700" b="1">
                           <a:solidFill>
                             <a:srgbClr val="FFFFFF"/>
                           </a:solidFill>
@@ -31621,7 +31621,7 @@
                     <a:lstStyle/>
                     <a:p>
                       <a:r>
-                        <a:rPr sz="800" b="1">
+                        <a:rPr sz="700" b="1">
                           <a:solidFill>
                             <a:srgbClr val="FFFFFF"/>
                           </a:solidFill>
@@ -31643,7 +31643,7 @@
                     <a:lstStyle/>
                     <a:p>
                       <a:r>
-                        <a:rPr sz="800" b="1">
+                        <a:rPr sz="700" b="1">
                           <a:solidFill>
                             <a:srgbClr val="FFFFFF"/>
                           </a:solidFill>
@@ -31667,7 +31667,7 @@
                     <a:lstStyle/>
                     <a:p>
                       <a:r>
-                        <a:rPr sz="800" b="1">
+                        <a:rPr sz="700" b="1">
                           <a:solidFill>
                             <a:srgbClr val="FFFFFF"/>
                           </a:solidFill>
@@ -31689,7 +31689,7 @@
                     <a:lstStyle/>
                     <a:p>
                       <a:r>
-                        <a:rPr sz="800" b="0">
+                        <a:rPr sz="700" b="0">
                           <a:solidFill>
                             <a:srgbClr val="1F2A44"/>
                           </a:solidFill>
@@ -31711,7 +31711,7 @@
                     <a:lstStyle/>
                     <a:p>
                       <a:r>
-                        <a:rPr sz="800" b="0">
+                        <a:rPr sz="700" b="0">
                           <a:solidFill>
                             <a:srgbClr val="1F2A44"/>
                           </a:solidFill>
@@ -31734,7 +31734,7 @@
                     <a:p>
                       <a:pPr algn="r"/>
                       <a:r>
-                        <a:rPr sz="800" b="0">
+                        <a:rPr sz="700" b="0">
                           <a:solidFill>
                             <a:srgbClr val="1F2A44"/>
                           </a:solidFill>
@@ -31757,7 +31757,7 @@
                     <a:p>
                       <a:pPr algn="r"/>
                       <a:r>
-                        <a:rPr sz="800" b="0">
+                        <a:rPr sz="700" b="0">
                           <a:solidFill>
                             <a:srgbClr val="1F2A44"/>
                           </a:solidFill>
@@ -31779,7 +31779,7 @@
                     <a:lstStyle/>
                     <a:p>
                       <a:r>
-                        <a:rPr sz="800" b="0">
+                        <a:rPr sz="700" b="0">
                           <a:solidFill>
                             <a:srgbClr val="1F2A44"/>
                           </a:solidFill>
@@ -31801,7 +31801,7 @@
                     <a:lstStyle/>
                     <a:p>
                       <a:r>
-                        <a:rPr sz="800" b="0">
+                        <a:rPr sz="700" b="0">
                           <a:solidFill>
                             <a:srgbClr val="1F2A44"/>
                           </a:solidFill>
@@ -31825,7 +31825,7 @@
                     <a:lstStyle/>
                     <a:p>
                       <a:r>
-                        <a:rPr sz="800" b="1">
+                        <a:rPr sz="700" b="1">
                           <a:solidFill>
                             <a:srgbClr val="FFFFFF"/>
                           </a:solidFill>
@@ -31847,7 +31847,7 @@
                     <a:lstStyle/>
                     <a:p>
                       <a:r>
-                        <a:rPr sz="800" b="0">
+                        <a:rPr sz="700" b="0">
                           <a:solidFill>
                             <a:srgbClr val="1F2A44"/>
                           </a:solidFill>
@@ -31869,7 +31869,7 @@
                     <a:lstStyle/>
                     <a:p>
                       <a:r>
-                        <a:rPr sz="800" b="0">
+                        <a:rPr sz="700" b="0">
                           <a:solidFill>
                             <a:srgbClr val="1F2A44"/>
                           </a:solidFill>
@@ -31892,7 +31892,7 @@
                     <a:p>
                       <a:pPr algn="r"/>
                       <a:r>
-                        <a:rPr sz="800" b="0">
+                        <a:rPr sz="700" b="0">
                           <a:solidFill>
                             <a:srgbClr val="1F2A44"/>
                           </a:solidFill>
@@ -31915,7 +31915,7 @@
                     <a:p>
                       <a:pPr algn="r"/>
                       <a:r>
-                        <a:rPr sz="800" b="0">
+                        <a:rPr sz="700" b="0">
                           <a:solidFill>
                             <a:srgbClr val="1F2A44"/>
                           </a:solidFill>
@@ -31937,7 +31937,7 @@
                     <a:lstStyle/>
                     <a:p>
                       <a:r>
-                        <a:rPr sz="800" b="0">
+                        <a:rPr sz="700" b="0">
                           <a:solidFill>
                             <a:srgbClr val="1F2A44"/>
                           </a:solidFill>
@@ -31959,7 +31959,7 @@
                     <a:lstStyle/>
                     <a:p>
                       <a:r>
-                        <a:rPr sz="800" b="0">
+                        <a:rPr sz="700" b="0">
                           <a:solidFill>
                             <a:srgbClr val="1F2A44"/>
                           </a:solidFill>
@@ -31983,7 +31983,7 @@
                     <a:lstStyle/>
                     <a:p>
                       <a:r>
-                        <a:rPr sz="800" b="1">
+                        <a:rPr sz="700" b="1">
                           <a:solidFill>
                             <a:srgbClr val="FFFFFF"/>
                           </a:solidFill>
@@ -32005,7 +32005,7 @@
                     <a:lstStyle/>
                     <a:p>
                       <a:r>
-                        <a:rPr sz="800" b="0">
+                        <a:rPr sz="700" b="0">
                           <a:solidFill>
                             <a:srgbClr val="1F2A44"/>
                           </a:solidFill>
@@ -32027,7 +32027,7 @@
                     <a:lstStyle/>
                     <a:p>
                       <a:r>
-                        <a:rPr sz="800" b="0">
+                        <a:rPr sz="700" b="0">
                           <a:solidFill>
                             <a:srgbClr val="1F2A44"/>
                           </a:solidFill>
@@ -32050,7 +32050,7 @@
                     <a:p>
                       <a:pPr algn="r"/>
                       <a:r>
-                        <a:rPr sz="800" b="0">
+                        <a:rPr sz="700" b="0">
                           <a:solidFill>
                             <a:srgbClr val="1F2A44"/>
                           </a:solidFill>
@@ -32073,7 +32073,7 @@
                     <a:p>
                       <a:pPr algn="r"/>
                       <a:r>
-                        <a:rPr sz="800" b="0">
+                        <a:rPr sz="700" b="0">
                           <a:solidFill>
                             <a:srgbClr val="1F2A44"/>
                           </a:solidFill>
@@ -32095,7 +32095,7 @@
                     <a:lstStyle/>
                     <a:p>
                       <a:r>
-                        <a:rPr sz="800" b="0">
+                        <a:rPr sz="700" b="0">
                           <a:solidFill>
                             <a:srgbClr val="1F2A44"/>
                           </a:solidFill>
@@ -32117,7 +32117,7 @@
                     <a:lstStyle/>
                     <a:p>
                       <a:r>
-                        <a:rPr sz="800" b="0">
+                        <a:rPr sz="700" b="0">
                           <a:solidFill>
                             <a:srgbClr val="1F2A44"/>
                           </a:solidFill>
@@ -32141,7 +32141,7 @@
                     <a:lstStyle/>
                     <a:p>
                       <a:r>
-                        <a:rPr sz="800" b="1">
+                        <a:rPr sz="700" b="1">
                           <a:solidFill>
                             <a:srgbClr val="FFFFFF"/>
                           </a:solidFill>
@@ -32163,7 +32163,7 @@
                     <a:lstStyle/>
                     <a:p>
                       <a:r>
-                        <a:rPr sz="800" b="0">
+                        <a:rPr sz="700" b="0">
                           <a:solidFill>
                             <a:srgbClr val="1F2A44"/>
                           </a:solidFill>
@@ -32185,7 +32185,7 @@
                     <a:lstStyle/>
                     <a:p>
                       <a:r>
-                        <a:rPr sz="800" b="0">
+                        <a:rPr sz="700" b="0">
                           <a:solidFill>
                             <a:srgbClr val="1F2A44"/>
                           </a:solidFill>
@@ -32208,7 +32208,7 @@
                     <a:p>
                       <a:pPr algn="r"/>
                       <a:r>
-                        <a:rPr sz="800" b="0">
+                        <a:rPr sz="700" b="0">
                           <a:solidFill>
                             <a:srgbClr val="1F2A44"/>
                           </a:solidFill>
@@ -32231,7 +32231,7 @@
                     <a:p>
                       <a:pPr algn="r"/>
                       <a:r>
-                        <a:rPr sz="800" b="0">
+                        <a:rPr sz="700" b="0">
                           <a:solidFill>
                             <a:srgbClr val="1F2A44"/>
                           </a:solidFill>
@@ -32253,7 +32253,7 @@
                     <a:lstStyle/>
                     <a:p>
                       <a:r>
-                        <a:rPr sz="800" b="0">
+                        <a:rPr sz="700" b="0">
                           <a:solidFill>
                             <a:srgbClr val="1F2A44"/>
                           </a:solidFill>
@@ -32275,7 +32275,7 @@
                     <a:lstStyle/>
                     <a:p>
                       <a:r>
-                        <a:rPr sz="800" b="0">
+                        <a:rPr sz="700" b="0">
                           <a:solidFill>
                             <a:srgbClr val="1F2A44"/>
                           </a:solidFill>
@@ -32299,7 +32299,7 @@
                     <a:lstStyle/>
                     <a:p>
                       <a:r>
-                        <a:rPr sz="800" b="1">
+                        <a:rPr sz="700" b="1">
                           <a:solidFill>
                             <a:srgbClr val="FFFFFF"/>
                           </a:solidFill>
@@ -32321,7 +32321,7 @@
                     <a:lstStyle/>
                     <a:p>
                       <a:r>
-                        <a:rPr sz="800" b="0">
+                        <a:rPr sz="700" b="0">
                           <a:solidFill>
                             <a:srgbClr val="1F2A44"/>
                           </a:solidFill>
@@ -32343,7 +32343,7 @@
                     <a:lstStyle/>
                     <a:p>
                       <a:r>
-                        <a:rPr sz="800" b="0">
+                        <a:rPr sz="700" b="0">
                           <a:solidFill>
                             <a:srgbClr val="1F2A44"/>
                           </a:solidFill>
@@ -32366,7 +32366,7 @@
                     <a:p>
                       <a:pPr algn="r"/>
                       <a:r>
-                        <a:rPr sz="800" b="0">
+                        <a:rPr sz="700" b="0">
                           <a:solidFill>
                             <a:srgbClr val="1F2A44"/>
                           </a:solidFill>
@@ -32389,7 +32389,7 @@
                     <a:p>
                       <a:pPr algn="r"/>
                       <a:r>
-                        <a:rPr sz="800" b="0">
+                        <a:rPr sz="700" b="0">
                           <a:solidFill>
                             <a:srgbClr val="1F2A44"/>
                           </a:solidFill>
@@ -32411,7 +32411,7 @@
                     <a:lstStyle/>
                     <a:p>
                       <a:r>
-                        <a:rPr sz="800" b="0">
+                        <a:rPr sz="700" b="0">
                           <a:solidFill>
                             <a:srgbClr val="1F2A44"/>
                           </a:solidFill>
@@ -32433,7 +32433,7 @@
                     <a:lstStyle/>
                     <a:p>
                       <a:r>
-                        <a:rPr sz="800" b="0">
+                        <a:rPr sz="700" b="0">
                           <a:solidFill>
                             <a:srgbClr val="1F2A44"/>
                           </a:solidFill>
@@ -32457,7 +32457,7 @@
                     <a:lstStyle/>
                     <a:p>
                       <a:r>
-                        <a:rPr sz="800" b="1">
+                        <a:rPr sz="700" b="1">
                           <a:solidFill>
                             <a:srgbClr val="FFFFFF"/>
                           </a:solidFill>
@@ -32479,7 +32479,7 @@
                     <a:lstStyle/>
                     <a:p>
                       <a:r>
-                        <a:rPr sz="800" b="0">
+                        <a:rPr sz="700" b="0">
                           <a:solidFill>
                             <a:srgbClr val="1F2A44"/>
                           </a:solidFill>
@@ -32501,7 +32501,7 @@
                     <a:lstStyle/>
                     <a:p>
                       <a:r>
-                        <a:rPr sz="800" b="0">
+                        <a:rPr sz="700" b="0">
                           <a:solidFill>
                             <a:srgbClr val="1F2A44"/>
                           </a:solidFill>
@@ -32524,7 +32524,7 @@
                     <a:p>
                       <a:pPr algn="r"/>
                       <a:r>
-                        <a:rPr sz="800" b="0">
+                        <a:rPr sz="700" b="0">
                           <a:solidFill>
                             <a:srgbClr val="1F2A44"/>
                           </a:solidFill>
@@ -32547,7 +32547,7 @@
                     <a:p>
                       <a:pPr algn="r"/>
                       <a:r>
-                        <a:rPr sz="800" b="0">
+                        <a:rPr sz="700" b="0">
                           <a:solidFill>
                             <a:srgbClr val="1F2A44"/>
                           </a:solidFill>
@@ -32569,7 +32569,7 @@
                     <a:lstStyle/>
                     <a:p>
                       <a:r>
-                        <a:rPr sz="800" b="0">
+                        <a:rPr sz="700" b="0">
                           <a:solidFill>
                             <a:srgbClr val="1F2A44"/>
                           </a:solidFill>
@@ -32591,7 +32591,7 @@
                     <a:lstStyle/>
                     <a:p>
                       <a:r>
-                        <a:rPr sz="800" b="0">
+                        <a:rPr sz="700" b="0">
                           <a:solidFill>
                             <a:srgbClr val="1F2A44"/>
                           </a:solidFill>
@@ -32615,7 +32615,7 @@
                     <a:lstStyle/>
                     <a:p>
                       <a:r>
-                        <a:rPr sz="800" b="1">
+                        <a:rPr sz="700" b="1">
                           <a:solidFill>
                             <a:srgbClr val="FFFFFF"/>
                           </a:solidFill>
@@ -32637,7 +32637,7 @@
                     <a:lstStyle/>
                     <a:p>
                       <a:r>
-                        <a:rPr sz="800" b="0">
+                        <a:rPr sz="700" b="0">
                           <a:solidFill>
                             <a:srgbClr val="1F2A44"/>
                           </a:solidFill>
@@ -32659,7 +32659,7 @@
                     <a:lstStyle/>
                     <a:p>
                       <a:r>
-                        <a:rPr sz="800" b="0">
+                        <a:rPr sz="700" b="0">
                           <a:solidFill>
                             <a:srgbClr val="1F2A44"/>
                           </a:solidFill>
@@ -32682,7 +32682,7 @@
                     <a:p>
                       <a:pPr algn="r"/>
                       <a:r>
-                        <a:rPr sz="800" b="0">
+                        <a:rPr sz="700" b="0">
                           <a:solidFill>
                             <a:srgbClr val="1F2A44"/>
                           </a:solidFill>
@@ -32705,7 +32705,7 @@
                     <a:p>
                       <a:pPr algn="r"/>
                       <a:r>
-                        <a:rPr sz="800" b="0">
+                        <a:rPr sz="700" b="0">
                           <a:solidFill>
                             <a:srgbClr val="1F2A44"/>
                           </a:solidFill>
@@ -32727,7 +32727,7 @@
                     <a:lstStyle/>
                     <a:p>
                       <a:r>
-                        <a:rPr sz="800" b="0">
+                        <a:rPr sz="700" b="0">
                           <a:solidFill>
                             <a:srgbClr val="1F2A44"/>
                           </a:solidFill>
@@ -32749,7 +32749,7 @@
                     <a:lstStyle/>
                     <a:p>
                       <a:r>
-                        <a:rPr sz="800" b="0">
+                        <a:rPr sz="700" b="0">
                           <a:solidFill>
                             <a:srgbClr val="1F2A44"/>
                           </a:solidFill>
@@ -32773,7 +32773,7 @@
                     <a:lstStyle/>
                     <a:p>
                       <a:r>
-                        <a:rPr sz="800" b="1">
+                        <a:rPr sz="700" b="1">
                           <a:solidFill>
                             <a:srgbClr val="FFFFFF"/>
                           </a:solidFill>
@@ -32795,7 +32795,7 @@
                     <a:lstStyle/>
                     <a:p>
                       <a:r>
-                        <a:rPr sz="800" b="0">
+                        <a:rPr sz="700" b="0">
                           <a:solidFill>
                             <a:srgbClr val="1F2A44"/>
                           </a:solidFill>
@@ -32817,7 +32817,7 @@
                     <a:lstStyle/>
                     <a:p>
                       <a:r>
-                        <a:rPr sz="800" b="0">
+                        <a:rPr sz="700" b="0">
                           <a:solidFill>
                             <a:srgbClr val="1F2A44"/>
                           </a:solidFill>
@@ -32840,7 +32840,7 @@
                     <a:p>
                       <a:pPr algn="r"/>
                       <a:r>
-                        <a:rPr sz="800" b="0">
+                        <a:rPr sz="700" b="0">
                           <a:solidFill>
                             <a:srgbClr val="1F2A44"/>
                           </a:solidFill>
@@ -32863,7 +32863,7 @@
                     <a:p>
                       <a:pPr algn="r"/>
                       <a:r>
-                        <a:rPr sz="800" b="0">
+                        <a:rPr sz="700" b="0">
                           <a:solidFill>
                             <a:srgbClr val="1F2A44"/>
                           </a:solidFill>
@@ -32885,7 +32885,7 @@
                     <a:lstStyle/>
                     <a:p>
                       <a:r>
-                        <a:rPr sz="800" b="0">
+                        <a:rPr sz="700" b="0">
                           <a:solidFill>
                             <a:srgbClr val="1F2A44"/>
                           </a:solidFill>
@@ -32907,7 +32907,7 @@
                     <a:lstStyle/>
                     <a:p>
                       <a:r>
-                        <a:rPr sz="800" b="0">
+                        <a:rPr sz="700" b="0">
                           <a:solidFill>
                             <a:srgbClr val="1F2A44"/>
                           </a:solidFill>
@@ -32931,7 +32931,7 @@
                     <a:lstStyle/>
                     <a:p>
                       <a:r>
-                        <a:rPr sz="800" b="1">
+                        <a:rPr sz="700" b="1">
                           <a:solidFill>
                             <a:srgbClr val="FFFFFF"/>
                           </a:solidFill>
@@ -32953,7 +32953,7 @@
                     <a:lstStyle/>
                     <a:p>
                       <a:r>
-                        <a:rPr sz="800" b="0">
+                        <a:rPr sz="700" b="0">
                           <a:solidFill>
                             <a:srgbClr val="1F2A44"/>
                           </a:solidFill>
@@ -32975,7 +32975,7 @@
                     <a:lstStyle/>
                     <a:p>
                       <a:r>
-                        <a:rPr sz="800" b="0">
+                        <a:rPr sz="700" b="0">
                           <a:solidFill>
                             <a:srgbClr val="1F2A44"/>
                           </a:solidFill>
@@ -32998,7 +32998,7 @@
                     <a:p>
                       <a:pPr algn="r"/>
                       <a:r>
-                        <a:rPr sz="800" b="0">
+                        <a:rPr sz="700" b="0">
                           <a:solidFill>
                             <a:srgbClr val="1F2A44"/>
                           </a:solidFill>
@@ -33021,7 +33021,7 @@
                     <a:p>
                       <a:pPr algn="r"/>
                       <a:r>
-                        <a:rPr sz="800" b="0">
+                        <a:rPr sz="700" b="0">
                           <a:solidFill>
                             <a:srgbClr val="1F2A44"/>
                           </a:solidFill>
@@ -33043,7 +33043,7 @@
                     <a:lstStyle/>
                     <a:p>
                       <a:r>
-                        <a:rPr sz="800" b="0">
+                        <a:rPr sz="700" b="0">
                           <a:solidFill>
                             <a:srgbClr val="1F2A44"/>
                           </a:solidFill>
@@ -33065,7 +33065,7 @@
                     <a:lstStyle/>
                     <a:p>
                       <a:r>
-                        <a:rPr sz="800" b="0">
+                        <a:rPr sz="700" b="0">
                           <a:solidFill>
                             <a:srgbClr val="1F2A44"/>
                           </a:solidFill>
@@ -33089,7 +33089,7 @@
                     <a:lstStyle/>
                     <a:p>
                       <a:r>
-                        <a:rPr sz="800" b="1">
+                        <a:rPr sz="700" b="1">
                           <a:solidFill>
                             <a:srgbClr val="FFFFFF"/>
                           </a:solidFill>
@@ -33111,7 +33111,7 @@
                     <a:lstStyle/>
                     <a:p>
                       <a:r>
-                        <a:rPr sz="800" b="0">
+                        <a:rPr sz="700" b="0">
                           <a:solidFill>
                             <a:srgbClr val="1F2A44"/>
                           </a:solidFill>
@@ -33133,7 +33133,7 @@
                     <a:lstStyle/>
                     <a:p>
                       <a:r>
-                        <a:rPr sz="800" b="0">
+                        <a:rPr sz="700" b="0">
                           <a:solidFill>
                             <a:srgbClr val="1F2A44"/>
                           </a:solidFill>
@@ -33156,7 +33156,7 @@
                     <a:p>
                       <a:pPr algn="r"/>
                       <a:r>
-                        <a:rPr sz="800" b="0">
+                        <a:rPr sz="700" b="0">
                           <a:solidFill>
                             <a:srgbClr val="1F2A44"/>
                           </a:solidFill>
@@ -33179,7 +33179,7 @@
                     <a:p>
                       <a:pPr algn="r"/>
                       <a:r>
-                        <a:rPr sz="800" b="0">
+                        <a:rPr sz="700" b="0">
                           <a:solidFill>
                             <a:srgbClr val="1F2A44"/>
                           </a:solidFill>
@@ -33201,7 +33201,7 @@
                     <a:lstStyle/>
                     <a:p>
                       <a:r>
-                        <a:rPr sz="800" b="0">
+                        <a:rPr sz="700" b="0">
                           <a:solidFill>
                             <a:srgbClr val="1F2A44"/>
                           </a:solidFill>
@@ -33223,7 +33223,7 @@
                     <a:lstStyle/>
                     <a:p>
                       <a:r>
-                        <a:rPr sz="800" b="0">
+                        <a:rPr sz="700" b="0">
                           <a:solidFill>
                             <a:srgbClr val="1F2A44"/>
                           </a:solidFill>
@@ -33247,7 +33247,7 @@
                     <a:lstStyle/>
                     <a:p>
                       <a:r>
-                        <a:rPr sz="800" b="1">
+                        <a:rPr sz="700" b="1">
                           <a:solidFill>
                             <a:srgbClr val="FFFFFF"/>
                           </a:solidFill>
@@ -33269,7 +33269,7 @@
                     <a:lstStyle/>
                     <a:p>
                       <a:r>
-                        <a:rPr sz="800" b="0">
+                        <a:rPr sz="700" b="0">
                           <a:solidFill>
                             <a:srgbClr val="1F2A44"/>
                           </a:solidFill>
@@ -33291,7 +33291,7 @@
                     <a:lstStyle/>
                     <a:p>
                       <a:r>
-                        <a:rPr sz="800" b="0">
+                        <a:rPr sz="700" b="0">
                           <a:solidFill>
                             <a:srgbClr val="1F2A44"/>
                           </a:solidFill>
@@ -33314,7 +33314,7 @@
                     <a:p>
                       <a:pPr algn="r"/>
                       <a:r>
-                        <a:rPr sz="800" b="0">
+                        <a:rPr sz="700" b="0">
                           <a:solidFill>
                             <a:srgbClr val="1F2A44"/>
                           </a:solidFill>
@@ -33337,7 +33337,7 @@
                     <a:p>
                       <a:pPr algn="r"/>
                       <a:r>
-                        <a:rPr sz="800" b="0">
+                        <a:rPr sz="700" b="0">
                           <a:solidFill>
                             <a:srgbClr val="1F2A44"/>
                           </a:solidFill>
@@ -33359,7 +33359,7 @@
                     <a:lstStyle/>
                     <a:p>
                       <a:r>
-                        <a:rPr sz="800" b="0">
+                        <a:rPr sz="700" b="0">
                           <a:solidFill>
                             <a:srgbClr val="1F2A44"/>
                           </a:solidFill>
@@ -33381,7 +33381,7 @@
                     <a:lstStyle/>
                     <a:p>
                       <a:r>
-                        <a:rPr sz="800" b="0">
+                        <a:rPr sz="700" b="0">
                           <a:solidFill>
                             <a:srgbClr val="1F2A44"/>
                           </a:solidFill>
@@ -33405,7 +33405,7 @@
                     <a:lstStyle/>
                     <a:p>
                       <a:r>
-                        <a:rPr sz="800" b="1">
+                        <a:rPr sz="700" b="1">
                           <a:solidFill>
                             <a:srgbClr val="FFFFFF"/>
                           </a:solidFill>
@@ -33427,7 +33427,7 @@
                     <a:lstStyle/>
                     <a:p>
                       <a:r>
-                        <a:rPr sz="800" b="0">
+                        <a:rPr sz="700" b="0">
                           <a:solidFill>
                             <a:srgbClr val="1F2A44"/>
                           </a:solidFill>
@@ -33449,7 +33449,7 @@
                     <a:lstStyle/>
                     <a:p>
                       <a:r>
-                        <a:rPr sz="800" b="0">
+                        <a:rPr sz="700" b="0">
                           <a:solidFill>
                             <a:srgbClr val="1F2A44"/>
                           </a:solidFill>
@@ -33472,7 +33472,7 @@
                     <a:p>
                       <a:pPr algn="r"/>
                       <a:r>
-                        <a:rPr sz="800" b="0">
+                        <a:rPr sz="700" b="0">
                           <a:solidFill>
                             <a:srgbClr val="1F2A44"/>
                           </a:solidFill>
@@ -33495,7 +33495,7 @@
                     <a:p>
                       <a:pPr algn="r"/>
                       <a:r>
-                        <a:rPr sz="800" b="0">
+                        <a:rPr sz="700" b="0">
                           <a:solidFill>
                             <a:srgbClr val="1F2A44"/>
                           </a:solidFill>
@@ -33517,7 +33517,7 @@
                     <a:lstStyle/>
                     <a:p>
                       <a:r>
-                        <a:rPr sz="800" b="0">
+                        <a:rPr sz="700" b="0">
                           <a:solidFill>
                             <a:srgbClr val="1F2A44"/>
                           </a:solidFill>
@@ -33539,7 +33539,7 @@
                     <a:lstStyle/>
                     <a:p>
                       <a:r>
-                        <a:rPr sz="800" b="0">
+                        <a:rPr sz="700" b="0">
                           <a:solidFill>
                             <a:srgbClr val="1F2A44"/>
                           </a:solidFill>
@@ -33563,7 +33563,7 @@
                     <a:lstStyle/>
                     <a:p>
                       <a:r>
-                        <a:rPr sz="800" b="1">
+                        <a:rPr sz="700" b="1">
                           <a:solidFill>
                             <a:srgbClr val="FFFFFF"/>
                           </a:solidFill>
@@ -33585,7 +33585,7 @@
                     <a:lstStyle/>
                     <a:p>
                       <a:r>
-                        <a:rPr sz="800" b="0">
+                        <a:rPr sz="700" b="0">
                           <a:solidFill>
                             <a:srgbClr val="1F2A44"/>
                           </a:solidFill>
@@ -33607,7 +33607,7 @@
                     <a:lstStyle/>
                     <a:p>
                       <a:r>
-                        <a:rPr sz="800" b="0">
+                        <a:rPr sz="700" b="0">
                           <a:solidFill>
                             <a:srgbClr val="1F2A44"/>
                           </a:solidFill>
@@ -33630,7 +33630,7 @@
                     <a:p>
                       <a:pPr algn="r"/>
                       <a:r>
-                        <a:rPr sz="800" b="0">
+                        <a:rPr sz="700" b="0">
                           <a:solidFill>
                             <a:srgbClr val="1F2A44"/>
                           </a:solidFill>
@@ -33653,7 +33653,7 @@
                     <a:p>
                       <a:pPr algn="r"/>
                       <a:r>
-                        <a:rPr sz="800" b="0">
+                        <a:rPr sz="700" b="0">
                           <a:solidFill>
                             <a:srgbClr val="1F2A44"/>
                           </a:solidFill>
@@ -33675,7 +33675,7 @@
                     <a:lstStyle/>
                     <a:p>
                       <a:r>
-                        <a:rPr sz="800" b="0">
+                        <a:rPr sz="700" b="0">
                           <a:solidFill>
                             <a:srgbClr val="1F2A44"/>
                           </a:solidFill>
@@ -33697,7 +33697,7 @@
                     <a:lstStyle/>
                     <a:p>
                       <a:r>
-                        <a:rPr sz="800" b="0">
+                        <a:rPr sz="700" b="0">
                           <a:solidFill>
                             <a:srgbClr val="1F2A44"/>
                           </a:solidFill>
@@ -33721,7 +33721,7 @@
                     <a:lstStyle/>
                     <a:p>
                       <a:r>
-                        <a:rPr sz="800" b="1">
+                        <a:rPr sz="700" b="1">
                           <a:solidFill>
                             <a:srgbClr val="FFFFFF"/>
                           </a:solidFill>
@@ -33743,7 +33743,7 @@
                     <a:lstStyle/>
                     <a:p>
                       <a:r>
-                        <a:rPr sz="800" b="0">
+                        <a:rPr sz="700" b="0">
                           <a:solidFill>
                             <a:srgbClr val="1F2A44"/>
                           </a:solidFill>
@@ -33765,7 +33765,7 @@
                     <a:lstStyle/>
                     <a:p>
                       <a:r>
-                        <a:rPr sz="800" b="0">
+                        <a:rPr sz="700" b="0">
                           <a:solidFill>
                             <a:srgbClr val="1F2A44"/>
                           </a:solidFill>
@@ -33788,7 +33788,7 @@
                     <a:p>
                       <a:pPr algn="r"/>
                       <a:r>
-                        <a:rPr sz="800" b="0">
+                        <a:rPr sz="700" b="0">
                           <a:solidFill>
                             <a:srgbClr val="1F2A44"/>
                           </a:solidFill>
@@ -33811,7 +33811,7 @@
                     <a:p>
                       <a:pPr algn="r"/>
                       <a:r>
-                        <a:rPr sz="800" b="0">
+                        <a:rPr sz="700" b="0">
                           <a:solidFill>
                             <a:srgbClr val="1F2A44"/>
                           </a:solidFill>
@@ -33833,7 +33833,7 @@
                     <a:lstStyle/>
                     <a:p>
                       <a:r>
-                        <a:rPr sz="800" b="0">
+                        <a:rPr sz="700" b="0">
                           <a:solidFill>
                             <a:srgbClr val="1F2A44"/>
                           </a:solidFill>
@@ -33855,7 +33855,7 @@
                     <a:lstStyle/>
                     <a:p>
                       <a:r>
-                        <a:rPr sz="800" b="0">
+                        <a:rPr sz="700" b="0">
                           <a:solidFill>
                             <a:srgbClr val="1F2A44"/>
                           </a:solidFill>
@@ -33879,7 +33879,7 @@
                     <a:lstStyle/>
                     <a:p>
                       <a:r>
-                        <a:rPr sz="800" b="1">
+                        <a:rPr sz="700" b="1">
                           <a:solidFill>
                             <a:srgbClr val="FFFFFF"/>
                           </a:solidFill>
@@ -33901,7 +33901,7 @@
                     <a:lstStyle/>
                     <a:p>
                       <a:r>
-                        <a:rPr sz="800" b="0">
+                        <a:rPr sz="700" b="0">
                           <a:solidFill>
                             <a:srgbClr val="1F2A44"/>
                           </a:solidFill>
@@ -33923,7 +33923,7 @@
                     <a:lstStyle/>
                     <a:p>
                       <a:r>
-                        <a:rPr sz="800" b="0">
+                        <a:rPr sz="700" b="0">
                           <a:solidFill>
                             <a:srgbClr val="1F2A44"/>
                           </a:solidFill>
@@ -33946,7 +33946,7 @@
                     <a:p>
                       <a:pPr algn="r"/>
                       <a:r>
-                        <a:rPr sz="800" b="0">
+                        <a:rPr sz="700" b="0">
                           <a:solidFill>
                             <a:srgbClr val="1F2A44"/>
                           </a:solidFill>
@@ -33969,7 +33969,7 @@
                     <a:p>
                       <a:pPr algn="r"/>
                       <a:r>
-                        <a:rPr sz="800" b="0">
+                        <a:rPr sz="700" b="0">
                           <a:solidFill>
                             <a:srgbClr val="1F2A44"/>
                           </a:solidFill>
@@ -33991,7 +33991,7 @@
                     <a:lstStyle/>
                     <a:p>
                       <a:r>
-                        <a:rPr sz="800" b="0">
+                        <a:rPr sz="700" b="0">
                           <a:solidFill>
                             <a:srgbClr val="1F2A44"/>
                           </a:solidFill>
@@ -34013,7 +34013,7 @@
                     <a:lstStyle/>
                     <a:p>
                       <a:r>
-                        <a:rPr sz="800" b="0">
+                        <a:rPr sz="700" b="0">
                           <a:solidFill>
                             <a:srgbClr val="1F2A44"/>
                           </a:solidFill>
@@ -34037,7 +34037,7 @@
                     <a:lstStyle/>
                     <a:p>
                       <a:r>
-                        <a:rPr sz="800" b="1">
+                        <a:rPr sz="700" b="1">
                           <a:solidFill>
                             <a:srgbClr val="FFFFFF"/>
                           </a:solidFill>
@@ -34059,7 +34059,7 @@
                     <a:lstStyle/>
                     <a:p>
                       <a:r>
-                        <a:rPr sz="800" b="0">
+                        <a:rPr sz="700" b="0">
                           <a:solidFill>
                             <a:srgbClr val="1F2A44"/>
                           </a:solidFill>
@@ -34081,7 +34081,7 @@
                     <a:lstStyle/>
                     <a:p>
                       <a:r>
-                        <a:rPr sz="800" b="0">
+                        <a:rPr sz="700" b="0">
                           <a:solidFill>
                             <a:srgbClr val="1F2A44"/>
                           </a:solidFill>
@@ -34104,7 +34104,7 @@
                     <a:p>
                       <a:pPr algn="r"/>
                       <a:r>
-                        <a:rPr sz="800" b="0">
+                        <a:rPr sz="700" b="0">
                           <a:solidFill>
                             <a:srgbClr val="1F2A44"/>
                           </a:solidFill>
@@ -34127,7 +34127,7 @@
                     <a:p>
                       <a:pPr algn="r"/>
                       <a:r>
-                        <a:rPr sz="800" b="0">
+                        <a:rPr sz="700" b="0">
                           <a:solidFill>
                             <a:srgbClr val="1F2A44"/>
                           </a:solidFill>
@@ -34149,7 +34149,7 @@
                     <a:lstStyle/>
                     <a:p>
                       <a:r>
-                        <a:rPr sz="800" b="0">
+                        <a:rPr sz="700" b="0">
                           <a:solidFill>
                             <a:srgbClr val="1F2A44"/>
                           </a:solidFill>
@@ -34171,7 +34171,7 @@
                     <a:lstStyle/>
                     <a:p>
                       <a:r>
-                        <a:rPr sz="800" b="0">
+                        <a:rPr sz="700" b="0">
                           <a:solidFill>
                             <a:srgbClr val="1F2A44"/>
                           </a:solidFill>
@@ -34200,8 +34200,8 @@
         </p:nvSpPr>
         <p:spPr>
           <a:xfrm>
-            <a:off x="548640" y="6016752"/>
-            <a:ext cx="11064240" cy="411480"/>
+            <a:off x="548640" y="6144768"/>
+            <a:ext cx="11064240" cy="365760"/>
           </a:xfrm>
           <a:prstGeom prst="rect">
             <a:avLst/>
@@ -43342,7 +43342,7 @@
                 </a:solidFill>
                 <a:latin typeface="Calibri"/>
               </a:rPr>
-              <a:t>3 · CAN THE NUMBER BE DEFENDED   |   OPPORTUNITIES LEFT, THREATS RIGHT: P10 TO P90 OF EACH DRIVER'S EFFECT ON THE LOADED TOTAL, $M</a:t>
+              <a:t>3 · CAN THE NUMBER BE DEFENDED   |   TORNADO: P10 TO P90 EFFECT OF EACH DRIVER ON THE LOADED TOTAL, $M</a:t>
             </a:r>
           </a:p>
         </p:txBody>
@@ -45519,7 +45519,7 @@
                 </a:solidFill>
                 <a:latin typeface="Calibri"/>
               </a:rPr>
-              <a:t>Adopt the containment plan: a $1,200 per kWh station-direct target at IFC, five gates with owners, competitive lump-sum pricing of the station and civil scope, and a monthly cost-containment report.</a:t>
+              <a:t>Adopt the containment plan: a $1,250 per kWh station-direct target at IFC, five gates with owners, competitive lump-sum pricing of the station and civil scope, and a monthly cost-containment report.</a:t>
             </a:r>
           </a:p>
         </p:txBody>

--- a/Hyde Park BESS/6) Cost Analysis Deliverables/Hyde Park BESS - Cost Analysis Deck.pptx
+++ b/Hyde Park BESS/6) Cost Analysis Deliverables/Hyde Park BESS - Cost Analysis Deck.pptx
@@ -2837,10 +2837,10 @@
                   <c:v>A5  Commissioning overlap with Nomad   $0.2 to 0.5M</c:v>
                 </c:pt>
                 <c:pt idx="5">
-                  <c:v>B2  Interconnection topology (feeders)   $1.4 to 1.9M</c:v>
+                  <c:v>B1  Station 496 to RTU/RTAC only   $6.1 to 6.6M</c:v>
                 </c:pt>
                 <c:pt idx="6">
-                  <c:v>B1  Station 496 relay program   $1.1 to 1.5M</c:v>
+                  <c:v>B2  Two feeders instead of four   $1.5 to 1.7M</c:v>
                 </c:pt>
                 <c:pt idx="7">
                   <c:v>B3  Platform and wall after geotech   $0.4 to 1.2M</c:v>
@@ -2894,10 +2894,10 @@
                   <c:v>0.22</c:v>
                 </c:pt>
                 <c:pt idx="5">
-                  <c:v>1.36</c:v>
+                  <c:v>6.11</c:v>
                 </c:pt>
                 <c:pt idx="6">
-                  <c:v>1.07</c:v>
+                  <c:v>1.45</c:v>
                 </c:pt>
                 <c:pt idx="7">
                   <c:v>0.43</c:v>
@@ -3093,10 +3093,10 @@
                   <c:v>A5  Commissioning overlap with Nomad   $0.2 to 0.5M</c:v>
                 </c:pt>
                 <c:pt idx="5">
-                  <c:v>B2  Interconnection topology (feeders)   $1.4 to 1.9M</c:v>
+                  <c:v>B1  Station 496 to RTU/RTAC only   $6.1 to 6.6M</c:v>
                 </c:pt>
                 <c:pt idx="6">
-                  <c:v>B1  Station 496 relay program   $1.1 to 1.5M</c:v>
+                  <c:v>B2  Two feeders instead of four   $1.5 to 1.7M</c:v>
                 </c:pt>
                 <c:pt idx="7">
                   <c:v>B3  Platform and wall after geotech   $0.4 to 1.2M</c:v>
@@ -3150,10 +3150,10 @@
                   <c:v>0.29</c:v>
                 </c:pt>
                 <c:pt idx="5">
-                  <c:v>0.58</c:v>
+                  <c:v>0.47</c:v>
                 </c:pt>
                 <c:pt idx="6">
-                  <c:v>0.46</c:v>
+                  <c:v>0.25</c:v>
                 </c:pt>
                 <c:pt idx="7">
                   <c:v>0.72</c:v>
@@ -3313,9 +3313,9 @@
           </c:spPr>
           <c:cat>
             <c:strRef>
-              <c:f>Sheet1!$A$2:$A$5</c:f>
+              <c:f>Sheet1!$A$2:$A$6</c:f>
               <c:strCache>
-                <c:ptCount val="4"/>
+                <c:ptCount val="5"/>
                 <c:pt idx="0">
                   <c:v>Rev 3 as estimated   $57.2M</c:v>
                 </c:pt>
@@ -3323,20 +3323,23 @@
                   <c:v>Contained: decisions only   $50.7 to 52.6M</c:v>
                 </c:pt>
                 <c:pt idx="2">
-                  <c:v>Re-scoped after studies   $42.4 to 47.3M</c:v>
+                  <c:v>Engineering proposal, 5 Oct   $42.4 to 45.0M</c:v>
                 </c:pt>
                 <c:pt idx="3">
-                  <c:v>Re-scoped + exposures + Haugland   $48.1 to 58.5M</c:v>
+                  <c:v>Re-scoped after studies   $38.5 to 42.9M</c:v>
+                </c:pt>
+                <c:pt idx="4">
+                  <c:v>Re-scoped + exposures + Haugland   $44.5 to 54.8M</c:v>
                 </c:pt>
               </c:strCache>
             </c:strRef>
           </c:cat>
           <c:val>
             <c:numRef>
-              <c:f>Sheet1!$B$2:$B$5</c:f>
+              <c:f>Sheet1!$B$2:$B$6</c:f>
               <c:numCache>
                 <c:formatCode>General</c:formatCode>
-                <c:ptCount val="4"/>
+                <c:ptCount val="5"/>
                 <c:pt idx="0">
                   <c:v>57.2</c:v>
                 </c:pt>
@@ -3347,7 +3350,10 @@
                   <c:v>42.4</c:v>
                 </c:pt>
                 <c:pt idx="3">
-                  <c:v>48.1</c:v>
+                  <c:v>38.5</c:v>
+                </c:pt>
+                <c:pt idx="4">
+                  <c:v>44.5</c:v>
                 </c:pt>
               </c:numCache>
             </c:numRef>
@@ -3387,12 +3393,20 @@
             <c:idx val="2"/>
             <c:spPr>
               <a:solidFill>
+                <a:srgbClr val="FFC72C"/>
+              </a:solidFill>
+            </c:spPr>
+          </c:dPt>
+          <c:dPt>
+            <c:idx val="3"/>
+            <c:spPr>
+              <a:solidFill>
                 <a:srgbClr val="2A8A8C"/>
               </a:solidFill>
             </c:spPr>
           </c:dPt>
           <c:dPt>
-            <c:idx val="3"/>
+            <c:idx val="4"/>
             <c:spPr>
               <a:solidFill>
                 <a:srgbClr val="6E1F2E"/>
@@ -3401,9 +3415,9 @@
           </c:dPt>
           <c:cat>
             <c:strRef>
-              <c:f>Sheet1!$A$2:$A$5</c:f>
+              <c:f>Sheet1!$A$2:$A$6</c:f>
               <c:strCache>
-                <c:ptCount val="4"/>
+                <c:ptCount val="5"/>
                 <c:pt idx="0">
                   <c:v>Rev 3 as estimated   $57.2M</c:v>
                 </c:pt>
@@ -3411,20 +3425,23 @@
                   <c:v>Contained: decisions only   $50.7 to 52.6M</c:v>
                 </c:pt>
                 <c:pt idx="2">
-                  <c:v>Re-scoped after studies   $42.4 to 47.3M</c:v>
+                  <c:v>Engineering proposal, 5 Oct   $42.4 to 45.0M</c:v>
                 </c:pt>
                 <c:pt idx="3">
-                  <c:v>Re-scoped + exposures + Haugland   $48.1 to 58.5M</c:v>
+                  <c:v>Re-scoped after studies   $38.5 to 42.9M</c:v>
+                </c:pt>
+                <c:pt idx="4">
+                  <c:v>Re-scoped + exposures + Haugland   $44.5 to 54.8M</c:v>
                 </c:pt>
               </c:strCache>
             </c:strRef>
           </c:cat>
           <c:val>
             <c:numRef>
-              <c:f>Sheet1!$C$2:$C$5</c:f>
+              <c:f>Sheet1!$C$2:$C$6</c:f>
               <c:numCache>
                 <c:formatCode>General</c:formatCode>
-                <c:ptCount val="4"/>
+                <c:ptCount val="5"/>
                 <c:pt idx="0">
                   <c:v>0.3</c:v>
                 </c:pt>
@@ -3432,10 +3449,13 @@
                   <c:v>1.9</c:v>
                 </c:pt>
                 <c:pt idx="2">
-                  <c:v>4.9</c:v>
+                  <c:v>2.6</c:v>
                 </c:pt>
                 <c:pt idx="3">
-                  <c:v>10.4</c:v>
+                  <c:v>4.4</c:v>
+                </c:pt>
+                <c:pt idx="4">
+                  <c:v>10.3</c:v>
                 </c:pt>
               </c:numCache>
             </c:numRef>
@@ -31386,7 +31406,7 @@
                 </a:solidFill>
                 <a:latin typeface="Georgia"/>
               </a:rPr>
-              <a:t>16 levers in three tiers: $5.0 to 7.1M in the estimate, $4.9 to 7.5M in scope decisions, and a tax credit larger than both</a:t>
+              <a:t>16 levers in three tiers: $5.0 to 7.1M in the estimate, $10.1 to 12.3M in scope decisions, and a tax credit larger than both</a:t>
             </a:r>
           </a:p>
         </p:txBody>
@@ -32485,7 +32505,7 @@
                           </a:solidFill>
                           <a:latin typeface="Calibri"/>
                         </a:rPr>
-                        <a:t>Station 496 relay program: 710 man-hours per relay</a:t>
+                        <a:t>Station 496: relay program out; RTU, RTAC and transfer trip only (Engineering, 5 Oct 2026)</a:t>
                       </a:r>
                     </a:p>
                   </a:txBody>
@@ -32530,7 +32550,7 @@
                           </a:solidFill>
                           <a:latin typeface="Calibri"/>
                         </a:rPr>
-                        <a:t>$1.1 to 1.5M</a:t>
+                        <a:t>$6.1 to 6.6M</a:t>
                       </a:r>
                     </a:p>
                   </a:txBody>
@@ -32553,7 +32573,7 @@
                           </a:solidFill>
                           <a:latin typeface="Calibri"/>
                         </a:rPr>
-                        <a:t>$1.1 to 1.5M</a:t>
+                        <a:t>$6.1 to 6.6M</a:t>
                       </a:r>
                     </a:p>
                   </a:txBody>
@@ -32597,7 +32617,7 @@
                           </a:solidFill>
                           <a:latin typeface="Calibri"/>
                         </a:rPr>
-                        <a:t>Two recent relay-replacement actuals; confirm the four SEL-735 are protection, not metering; outage windows priced</a:t>
+                        <a:t>Protection-basis memo signed by System Protection (existing SEL-551 and REF610 relays plus an RTAC transfer trip meet the interconnection requirement); RTU, RTAC, Axion and fiber scope priced (no line in Rev 2); asset-condition relays, if any, to the asset program</a:t>
                       </a:r>
                     </a:p>
                   </a:txBody>
@@ -32643,7 +32663,7 @@
                           </a:solidFill>
                           <a:latin typeface="Calibri"/>
                         </a:rPr>
-                        <a:t>Interconnection topology: five feeder cabinets, four GSUs, four breakers, four metering sets for 10 MW</a:t>
+                        <a:t>Two feeders instead of four: two skids, two metering sets, two duct-bank runs (Engineering, 5 Oct 2026)</a:t>
                       </a:r>
                     </a:p>
                   </a:txBody>
@@ -32688,7 +32708,7 @@
                           </a:solidFill>
                           <a:latin typeface="Calibri"/>
                         </a:rPr>
-                        <a:t>$0.9 to 1.4M</a:t>
+                        <a:t>$1.0 to 1.2M</a:t>
                       </a:r>
                     </a:p>
                   </a:txBody>
@@ -32711,7 +32731,7 @@
                           </a:solidFill>
                           <a:latin typeface="Calibri"/>
                         </a:rPr>
-                        <a:t>$1.4 to 1.9M</a:t>
+                        <a:t>$1.5 to 1.7M</a:t>
                       </a:r>
                     </a:p>
                   </a:txBody>
@@ -32733,7 +32753,7 @@
                           </a:solidFill>
                           <a:latin typeface="Calibri"/>
                         </a:rPr>
-                        <a:t>Low</a:t>
+                        <a:t>Medium</a:t>
                       </a:r>
                     </a:p>
                   </a:txBody>
@@ -32755,7 +32775,7 @@
                           </a:solidFill>
                           <a:latin typeface="Calibri"/>
                         </a:rPr>
-                        <a:t>Hosting-capacity study: can two feeders take 5 MW each? If not, the item is zero</a:t>
+                        <a:t>Hosting-capacity and protection study at 5 MW per feeder; N-1 position accepted in writing; D-Line 24211 to two tie-ins; four GSUs unchanged</a:t>
                       </a:r>
                     </a:p>
                   </a:txBody>
@@ -34679,7 +34699,7 @@
                           </a:solidFill>
                           <a:latin typeface="Calibri"/>
                         </a:rPr>
-                        <a:t>$4.9 to 7.5M</a:t>
+                        <a:t>$10.1 to 12.3M</a:t>
                       </a:r>
                     </a:p>
                   </a:txBody>
@@ -34748,7 +34768,7 @@
                           </a:solidFill>
                           <a:latin typeface="Calibri"/>
                         </a:rPr>
-                        <a:t>$10.0 to 14.6M</a:t>
+                        <a:t>$15.1 to 19.5M</a:t>
                       </a:r>
                     </a:p>
                   </a:txBody>
@@ -34978,7 +34998,7 @@
                 </a:solidFill>
                 <a:latin typeface="Calibri"/>
               </a:rPr>
-              <a:t>Tiers A and B ($10.0 to 14.6M) and the Haugland gap (+$4 to 8M) are the same order of magnitude. The honest planning case is a $57M number that holds, not one that falls.</a:t>
+              <a:t>Tiers A and B ($15.1 to 19.5M) and the Haugland gap (+$4 to 8M) are the same order of magnitude. The honest planning case is a $57M number that holds, not one that falls.</a:t>
             </a:r>
           </a:p>
           <a:p>
@@ -37459,7 +37479,7 @@
                 <a:gridCol w="3840480"/>
                 <a:gridCol w="914400"/>
               </a:tblGrid>
-              <a:tr h="622935">
+              <a:tr h="553720">
                 <a:tc>
                   <a:txBody>
                     <a:bodyPr/>
@@ -37572,7 +37592,7 @@
                   </a:tcPr>
                 </a:tc>
               </a:tr>
-              <a:tr h="622935">
+              <a:tr h="553720">
                 <a:tc>
                   <a:txBody>
                     <a:bodyPr/>
@@ -37685,7 +37705,7 @@
                   </a:tcPr>
                 </a:tc>
               </a:tr>
-              <a:tr h="622935">
+              <a:tr h="553720">
                 <a:tc>
                   <a:txBody>
                     <a:bodyPr/>
@@ -37798,7 +37818,7 @@
                   </a:tcPr>
                 </a:tc>
               </a:tr>
-              <a:tr h="622935">
+              <a:tr h="553720">
                 <a:tc>
                   <a:txBody>
                     <a:bodyPr/>
@@ -37911,7 +37931,7 @@
                   </a:tcPr>
                 </a:tc>
               </a:tr>
-              <a:tr h="622935">
+              <a:tr h="553720">
                 <a:tc>
                   <a:txBody>
                     <a:bodyPr/>
@@ -38024,7 +38044,7 @@
                   </a:tcPr>
                 </a:tc>
               </a:tr>
-              <a:tr h="622935">
+              <a:tr h="553720">
                 <a:tc>
                   <a:txBody>
                     <a:bodyPr/>
@@ -38137,7 +38157,7 @@
                   </a:tcPr>
                 </a:tc>
               </a:tr>
-              <a:tr h="622935">
+              <a:tr h="553720">
                 <a:tc>
                   <a:txBody>
                     <a:bodyPr/>
@@ -38150,13 +38170,126 @@
                           </a:solidFill>
                           <a:latin typeface="Calibri"/>
                         </a:rPr>
+                        <a:t>D. Two feeders (exposure)</a:t>
+                      </a:r>
+                    </a:p>
+                  </a:txBody>
+                  <a:tcPr marL="54864" marR="54864" marT="27432" marB="27432" anchor="ctr">
+                    <a:solidFill>
+                      <a:srgbClr val="FBECEC"/>
+                    </a:solidFill>
+                  </a:tcPr>
+                </a:tc>
+                <a:tc>
+                  <a:txBody>
+                    <a:bodyPr/>
+                    <a:lstStyle/>
+                    <a:p>
+                      <a:r>
+                        <a:rPr sz="750" b="0">
+                          <a:solidFill>
+                            <a:srgbClr val="1F2A44"/>
+                          </a:solidFill>
+                          <a:latin typeface="Calibri"/>
+                        </a:rPr>
+                        <a:t>Four feeder connections at 2.5 MW each</a:t>
+                      </a:r>
+                    </a:p>
+                  </a:txBody>
+                  <a:tcPr marL="54864" marR="54864" marT="27432" marB="27432" anchor="ctr">
+                    <a:solidFill>
+                      <a:srgbClr val="FBECEC"/>
+                    </a:solidFill>
+                  </a:tcPr>
+                </a:tc>
+                <a:tc>
+                  <a:txBody>
+                    <a:bodyPr/>
+                    <a:lstStyle/>
+                    <a:p>
+                      <a:r>
+                        <a:rPr sz="750" b="0">
+                          <a:solidFill>
+                            <a:srgbClr val="1F2A44"/>
+                          </a:solidFill>
+                          <a:latin typeface="Calibri"/>
+                        </a:rPr>
+                        <a:t>If two feeders carry 5 MW each: voltage regulation and protection coordination on those feeders, and one feeder outage strands 5 MW rather than 2.5 MW</a:t>
+                      </a:r>
+                    </a:p>
+                  </a:txBody>
+                  <a:tcPr marL="54864" marR="54864" marT="27432" marB="27432" anchor="ctr">
+                    <a:solidFill>
+                      <a:srgbClr val="FBECEC"/>
+                    </a:solidFill>
+                  </a:tcPr>
+                </a:tc>
+                <a:tc>
+                  <a:txBody>
+                    <a:bodyPr/>
+                    <a:lstStyle/>
+                    <a:p>
+                      <a:r>
+                        <a:rPr sz="750" b="0">
+                          <a:solidFill>
+                            <a:srgbClr val="1F2A44"/>
+                          </a:solidFill>
+                          <a:latin typeface="Calibri"/>
+                        </a:rPr>
+                        <a:t>The hosting-capacity study may require voltage mitigation or regulator settings on the two feeders; System Planning has to accept the N-1 position for the Hyde Park load pocket in writing</a:t>
+                      </a:r>
+                    </a:p>
+                  </a:txBody>
+                  <a:tcPr marL="54864" marR="54864" marT="27432" marB="27432" anchor="ctr">
+                    <a:solidFill>
+                      <a:srgbClr val="FBECEC"/>
+                    </a:solidFill>
+                  </a:tcPr>
+                </a:tc>
+                <a:tc>
+                  <a:txBody>
+                    <a:bodyPr/>
+                    <a:lstStyle/>
+                    <a:p>
+                      <a:pPr algn="r"/>
+                      <a:r>
+                        <a:rPr sz="750" b="0">
+                          <a:solidFill>
+                            <a:srgbClr val="1F2A44"/>
+                          </a:solidFill>
+                          <a:latin typeface="Calibri"/>
+                        </a:rPr>
+                        <a:t>exposure $0.2 to 0.5M</a:t>
+                      </a:r>
+                    </a:p>
+                  </a:txBody>
+                  <a:tcPr marL="54864" marR="54864" marT="27432" marB="27432" anchor="ctr">
+                    <a:solidFill>
+                      <a:srgbClr val="FBECEC"/>
+                    </a:solidFill>
+                  </a:tcPr>
+                </a:tc>
+              </a:tr>
+              <a:tr h="553720">
+                <a:tc>
+                  <a:txBody>
+                    <a:bodyPr/>
+                    <a:lstStyle/>
+                    <a:p>
+                      <a:r>
+                        <a:rPr sz="750" b="0">
+                          <a:solidFill>
+                            <a:srgbClr val="1F2A44"/>
+                          </a:solidFill>
+                          <a:latin typeface="Calibri"/>
+                        </a:rPr>
                         <a:t>E. Site and civil</a:t>
                       </a:r>
                     </a:p>
                   </a:txBody>
                   <a:tcPr marL="54864" marR="54864" marT="27432" marB="27432" anchor="ctr">
                     <a:solidFill>
-                      <a:srgbClr val="F2F4F8"/>
+                      <a:srgbClr val="FFFFFF"/>
                     </a:solidFill>
                   </a:tcPr>
                 </a:tc>
@@ -38178,7 +38311,7 @@
                   </a:txBody>
                   <a:tcPr marL="54864" marR="54864" marT="27432" marB="27432" anchor="ctr">
                     <a:solidFill>
-                      <a:srgbClr val="F2F4F8"/>
+                      <a:srgbClr val="FFFFFF"/>
                     </a:solidFill>
                   </a:tcPr>
                 </a:tc>
@@ -38200,7 +38333,7 @@
                   </a:txBody>
                   <a:tcPr marL="54864" marR="54864" marT="27432" marB="27432" anchor="ctr">
                     <a:solidFill>
-                      <a:srgbClr val="F2F4F8"/>
+                      <a:srgbClr val="FFFFFF"/>
                     </a:solidFill>
                   </a:tcPr>
                 </a:tc>
@@ -38222,7 +38355,7 @@
                   </a:txBody>
                   <a:tcPr marL="54864" marR="54864" marT="27432" marB="27432" anchor="ctr">
                     <a:solidFill>
-                      <a:srgbClr val="F2F4F8"/>
+                      <a:srgbClr val="FFFFFF"/>
                     </a:solidFill>
                   </a:tcPr>
                 </a:tc>
@@ -38245,12 +38378,12 @@
                   </a:txBody>
                   <a:tcPr marL="54864" marR="54864" marT="27432" marB="27432" anchor="ctr">
                     <a:solidFill>
-                      <a:srgbClr val="F2F4F8"/>
+                      <a:srgbClr val="FFFFFF"/>
                     </a:solidFill>
                   </a:tcPr>
                 </a:tc>
               </a:tr>
-              <a:tr h="622935">
+              <a:tr h="553720">
                 <a:tc>
                   <a:txBody>
                     <a:bodyPr/>
@@ -38770,7 +38903,7 @@
                           </a:solidFill>
                           <a:latin typeface="Calibri"/>
                         </a:rPr>
-                        <a:t>20 relays: hardware $91K; install 6,400 mh $1.23M; test 7,800 mh $1.81M; E&amp;S basis $1.46M; siting application $157K; AFUDC, contingency, risk</a:t>
+                        <a:t>20 relays: hardware $91K; install 6,400 mh $1.23M; test 7,800 mh $1.81M; E&amp;S basis $1.46M; siting application $157K; AFUDC, contingency, risk. No line for the RTU, the RTAC/Axion or the transfer trip that the Rev 2 clarifications name.</a:t>
                       </a:r>
                     </a:p>
                   </a:txBody>
@@ -38792,7 +38925,7 @@
                           </a:solidFill>
                           <a:latin typeface="Calibri"/>
                         </a:rPr>
-                        <a:t>Directional protection on the four feeders that will see reverse flow, and coordination at the source station. Whether all 20 relays, the four SEL-735 meters and a siting application are needed for relay work inside an existing fence is the question.</a:t>
+                        <a:t>A transfer trip from the Station 496 feeder breakers to the BESS over the dedicated dark fiber, SCADA points at 496, and feeder protection that tolerates the inverter-based injection on each feeder. Whether that needs 20 new relays, or the existing SEL-551 and REF610 relays with an RTAC, is the protection-basis question.</a:t>
                       </a:r>
                     </a:p>
                   </a:txBody>
@@ -38814,7 +38947,7 @@
                           </a:solidFill>
                           <a:latin typeface="Calibri"/>
                         </a:rPr>
-                        <a:t>$363K and 710 man-hours per relay. Benchmark against two recent EMA relay-replacement actuals; confirm the SEL-735 are protection; confirm what the $157K siting line is for; price the outage windows explicitly instead of inside the hours.</a:t>
+                        <a:t>Engineering proposal (5 Oct 2026): remove the relay program; install the RTU, RTAC and transfer trip only. Net $6.1M to $6.6M after a $0.30M to $0.55M direct allowance ($0.67M to $1.14M at the 496 loader) for the scope Rev 2 names but does not price. Needs a protection-basis memo signed by System Protection; if the legacy relays are an asset-condition replacement, the cost transfers to that program and is not a saving to customers.</a:t>
                       </a:r>
                     </a:p>
                   </a:txBody>
@@ -38837,7 +38970,7 @@
                           </a:solidFill>
                           <a:latin typeface="Calibri"/>
                         </a:rPr>
-                        <a:t>$1.2 to 1.7M</a:t>
+                        <a:t>$6.1 to 6.6M</a:t>
                       </a:r>
                     </a:p>
                   </a:txBody>
@@ -39558,7 +39691,7 @@
                 </a:solidFill>
                 <a:latin typeface="Georgia"/>
               </a:rPr>
-              <a:t>Three numbers: $57.2M estimated, $50.7 to 52.6M contained, $42.4 to 47.3M re-scoped; honest range $48.1 to 58.5M</a:t>
+              <a:t>Three numbers: $57.2M estimated, $50.7 to 52.6M contained, $38.5 to 42.9M re-scoped; honest range $44.5 to 54.8M</a:t>
             </a:r>
           </a:p>
         </p:txBody>
@@ -39793,7 +39926,7 @@
                           </a:solidFill>
                           <a:latin typeface="Calibri"/>
                         </a:rPr>
-                        <a:t>$8.5 to 12.9M</a:t>
+                        <a:t>$12.9 to 17.1M</a:t>
                       </a:r>
                     </a:p>
                   </a:txBody>
@@ -39862,7 +39995,7 @@
                           </a:solidFill>
                           <a:latin typeface="Calibri"/>
                         </a:rPr>
-                        <a:t>$1.4 to 1.9M</a:t>
+                        <a:t>$1.5 to 1.7M</a:t>
                       </a:r>
                     </a:p>
                   </a:txBody>
@@ -39931,7 +40064,7 @@
                           </a:solidFill>
                           <a:latin typeface="Calibri"/>
                         </a:rPr>
-                        <a:t>$1.7 to 3.2M</a:t>
+                        <a:t>$2.0 to 3.9M</a:t>
                       </a:r>
                     </a:p>
                   </a:txBody>
@@ -40640,7 +40773,7 @@
                           </a:solidFill>
                           <a:latin typeface="Calibri"/>
                         </a:rPr>
-                        <a:t>Geotech report, NFPA 855 hazard mitigation analysis, hosting-capacity study for two feeders, GSU count and topology in writing, Haugland-to-Rev 3 scope map signed</a:t>
+                        <a:t>Geotech report, NFPA 855 hazard mitigation analysis, hosting-capacity and protection study for two feeders at 5 MW each, the Station 496 protection-basis memo (RTU, RTAC and transfer trip without the relay program), GSU count and topology in writing, Haugland-to-Rev 3 scope map signed</a:t>
                       </a:r>
                     </a:p>
                   </a:txBody>
@@ -40684,7 +40817,7 @@
                           </a:solidFill>
                           <a:latin typeface="Calibri"/>
                         </a:rPr>
-                        <a:t>Decides the two-feeder case ($1.4M to $1.9M), the civil layer (either way) and the GSU exposure</a:t>
+                        <a:t>Decides the two-feeder case ($1.5M to $1.7M) and the Station 496 case ($6.1M to $6.6M), the civil layer (either way) and the GSU exposure</a:t>
                       </a:r>
                     </a:p>
                   </a:txBody>
@@ -41170,7 +41303,7 @@
                 </a:solidFill>
                 <a:latin typeface="Georgia"/>
               </a:rPr>
-              <a:t>Where to be aggressive: two things drive 72% of the variance, and neither is a line item</a:t>
+              <a:t>Where to be aggressive: two things drive 54% of the variance, and neither is a line item</a:t>
             </a:r>
           </a:p>
         </p:txBody>
@@ -41767,7 +41900,7 @@
                           </a:solidFill>
                           <a:latin typeface="Calibri"/>
                         </a:rPr>
-                        <a:t>Benchmark Station 496 and price its outage windows</a:t>
+                        <a:t>Close the Station 496 protection basis: RTU, RTAC and transfer trip, no relay program</a:t>
                       </a:r>
                     </a:p>
                   </a:txBody>
@@ -41789,7 +41922,7 @@
                           </a:solidFill>
                           <a:latin typeface="Calibri"/>
                         </a:rPr>
-                        <a:t>B1 ($0.7M expected) is the largest controllable estimate lever; accuracy on F is 6% of variance; T8 outage premiums are unpriced.</a:t>
+                        <a:t>Engineering's 5 Oct proposal is the largest single lever in the register ($6.1M to $6.6M net) and carries about a quarter of the simulated variance on its own; it needs a signed protection-basis memo and a priced RTU/RTAC scope, neither of which exists today</a:t>
                       </a:r>
                     </a:p>
                   </a:txBody>
@@ -41811,7 +41944,7 @@
                           </a:solidFill>
                           <a:latin typeface="Calibri"/>
                         </a:rPr>
-                        <a:t>P&amp;C Engineering + EMA</a:t>
+                        <a:t>P&amp;C Engineering + System Protection</a:t>
                       </a:r>
                     </a:p>
                   </a:txBody>
@@ -41833,7 +41966,7 @@
                           </a:solidFill>
                           <a:latin typeface="Calibri"/>
                         </a:rPr>
-                        <a:t>Q1 2027</a:t>
+                        <a:t>Dec 2026</a:t>
                       </a:r>
                     </a:p>
                   </a:txBody>
@@ -42333,7 +42466,7 @@
                 </a:solidFill>
                 <a:latin typeface="Calibri"/>
               </a:rPr>
-              <a:t>Expected values are probability-weighted means from 20,000 trials (mc_scope_schedule.py); 'variance' is the Spearman contribution to the spread of the managed outcome. Reductions in the register total $10.0 to 14.6M loaded if every one lands; the simulation expects about $6.3M of it at the assessed odds.</a:t>
+              <a:t>Expected values are probability-weighted means from 20,000 trials (mc_scope_schedule.py); 'variance' is the Spearman contribution to the spread of the managed outcome. Reductions in the register total $15.1 to 19.5M loaded if every one lands; the simulation expects about $10.8M of it at the assessed odds.</a:t>
             </a:r>
           </a:p>
         </p:txBody>
@@ -42479,7 +42612,7 @@
                 </a:solidFill>
                 <a:latin typeface="Georgia"/>
               </a:rPr>
-              <a:t>Monte Carlo on cost, scope and schedule: $61M if nothing is pursued, $54M if the levers are worked, $49M if every one lands</a:t>
+              <a:t>Monte Carlo on cost, scope and schedule: $61M if nothing is pursued, $50M if the levers are worked, $44M if every one lands</a:t>
             </a:r>
           </a:p>
         </p:txBody>
@@ -42769,7 +42902,7 @@
                           </a:solidFill>
                           <a:latin typeface="Calibri"/>
                         </a:rPr>
-                        <a:t>$60.7M</a:t>
+                        <a:t>$60.6M</a:t>
                       </a:r>
                     </a:p>
                   </a:txBody>
@@ -42792,7 +42925,7 @@
                           </a:solidFill>
                           <a:latin typeface="Calibri"/>
                         </a:rPr>
-                        <a:t>$64.7M</a:t>
+                        <a:t>$64.5M</a:t>
                       </a:r>
                     </a:p>
                   </a:txBody>
@@ -42815,7 +42948,7 @@
                           </a:solidFill>
                           <a:latin typeface="Calibri"/>
                         </a:rPr>
-                        <a:t>71%</a:t>
+                        <a:t>70%</a:t>
                       </a:r>
                     </a:p>
                   </a:txBody>
@@ -42862,7 +42995,7 @@
                           </a:solidFill>
                           <a:latin typeface="Calibri"/>
                         </a:rPr>
-                        <a:t>$54.3M</a:t>
+                        <a:t>$50.5M</a:t>
                       </a:r>
                     </a:p>
                   </a:txBody>
@@ -42885,7 +43018,7 @@
                           </a:solidFill>
                           <a:latin typeface="Calibri"/>
                         </a:rPr>
-                        <a:t>$58.6M</a:t>
+                        <a:t>$55.8M</a:t>
                       </a:r>
                     </a:p>
                   </a:txBody>
@@ -42908,7 +43041,7 @@
                           </a:solidFill>
                           <a:latin typeface="Calibri"/>
                         </a:rPr>
-                        <a:t>29%</a:t>
+                        <a:t>14%</a:t>
                       </a:r>
                     </a:p>
                   </a:txBody>
@@ -42955,7 +43088,7 @@
                           </a:solidFill>
                           <a:latin typeface="Calibri"/>
                         </a:rPr>
-                        <a:t>$48.9M</a:t>
+                        <a:t>$43.8M</a:t>
                       </a:r>
                     </a:p>
                   </a:txBody>
@@ -42978,7 +43111,7 @@
                           </a:solidFill>
                           <a:latin typeface="Calibri"/>
                         </a:rPr>
-                        <a:t>$52.9M</a:t>
+                        <a:t>$47.7M</a:t>
                       </a:r>
                     </a:p>
                   </a:txBody>
@@ -43001,7 +43134,7 @@
                           </a:solidFill>
                           <a:latin typeface="Calibri"/>
                         </a:rPr>
-                        <a:t>4%</a:t>
+                        <a:t>0%</a:t>
                       </a:r>
                     </a:p>
                   </a:txBody>
@@ -43164,7 +43297,7 @@
                 </a:solidFill>
                 <a:latin typeface="Calibri"/>
               </a:rPr>
-              <a:t>Status quo: the $57.2M holds in 29% of trials. Managed: 71%, with a 24% chance of landing under $50M. Ceiling: every lever lands; it is the floor of what is physically possible, not a plan.</a:t>
+              <a:t>Status quo: the $57.2M holds in 30% of trials. Managed: 86%, with a 47% chance of landing under $50M. Ceiling: every lever lands; it is the floor of what is physically possible, not a plan.</a:t>
             </a:r>
           </a:p>
           <a:p>
@@ -43552,7 +43685,7 @@
                 </a:solidFill>
                 <a:latin typeface="Calibri"/>
               </a:rPr>
-              <a:t>One threat, the Haugland reconciliation, reaches $9M at P90 and carries 58% of the variance. Schedule slip reaches $4.3M. The civil layer and Station 496 are the two accuracy ranges with real upside risk.</a:t>
+              <a:t>One threat, the Haugland reconciliation, reaches $9M at P90 and carries 43% of the variance. Schedule slip reaches $4.3M. The civil layer and Station 496 are the two accuracy ranges with real upside risk.</a:t>
             </a:r>
           </a:p>
           <a:p>
@@ -43589,7 +43722,7 @@
                 </a:solidFill>
                 <a:latin typeface="Calibri"/>
               </a:rPr>
-              <a:t>No single lever exceeds $2M, but together they are worth about $6.3M at the odds assessed and $11.8M if every one lands. The four that need only a decision (A1, A2, B5, C3) are the surest.</a:t>
+              <a:t>No single lever exceeds $2M, but together they are worth about $10.8M at the odds assessed and $16.8M if every one lands. The four that need only a decision (A1, A2, B5, C3) are the surest.</a:t>
             </a:r>
           </a:p>
           <a:p>
@@ -44655,7 +44788,7 @@
                           </a:solidFill>
                           <a:latin typeface="Calibri"/>
                         </a:rPr>
-                        <a:t>Station 496 at $363K per relay: compare to two recent EMA relay-replacement actuals; outage-window premium not priced</a:t>
+                        <a:t>Station 496: Engineering proposes RTU, RTAC and transfer trip only, no relay program (5 Oct); needs a protection-basis memo and a priced RTU/RTAC scope (not in Rev 2); if the legacy relays are asset-condition, the cost transfers rather than saves</a:t>
                       </a:r>
                     </a:p>
                   </a:txBody>
@@ -44677,7 +44810,7 @@
                           </a:solidFill>
                           <a:latin typeface="Calibri"/>
                         </a:rPr>
-                        <a:t>Benchmark</a:t>
+                        <a:t>Scope / protection basis</a:t>
                       </a:r>
                     </a:p>
                   </a:txBody>
@@ -44699,7 +44832,7 @@
                           </a:solidFill>
                           <a:latin typeface="Calibri"/>
                         </a:rPr>
-                        <a:t>Unknown; $1.8M testing line</a:t>
+                        <a:t>$6.1M to $6.6M net of a $0.7M to $1.1M RTU/RTAC allowance</a:t>
                       </a:r>
                     </a:p>
                   </a:txBody>
@@ -44721,7 +44854,7 @@
                           </a:solidFill>
                           <a:latin typeface="Calibri"/>
                         </a:rPr>
-                        <a:t>P&amp;C Engineering</a:t>
+                        <a:t>P&amp;C Engineering + System Protection</a:t>
                       </a:r>
                     </a:p>
                   </a:txBody>
